--- a/docs/curso/slides/m09-operacao.pptx
+++ b/docs/curso/slides/m09-operacao.pptx
@@ -2798,6 +2798,54 @@
           <a:chExt cx="0" cy="0"/>
         </a:xfrm>
       </p:grpSpPr>
+      <p:sp>
+        <p:nvSpPr>
+          <p:cNvPr id="25" name="Slide Number Placeholder 0"/>
+          <p:cNvSpPr>
+            <a:spLocks noGrp="1"/>
+          </p:cNvSpPr>
+          <p:nvPr>
+            <p:ph type="sldNum" sz="quarter" idx="4294967295"/>
+          </p:nvPr>
+        </p:nvSpPr>
+        <p:spPr>
+          <a:xfrm>
+            <a:off x="11292840" y="6556248"/>
+            <a:ext cx="548640" cy="256032"/>
+          </a:xfrm>
+          <a:prstGeom prst="rect">
+            <a:avLst/>
+          </a:prstGeom>
+          <a:extLst>
+            <a:ext uri="{C572A759-6A51-4108-AA02-DFA0A04FC94B}">
+              <ma14:wrappingTextBoxFlag xmlns:ma14="http://schemas.microsoft.com/office/mac/drawingml/2011/main" val="0"/>
+            </a:ext>
+          </a:extLst>
+        </p:spPr>
+        <p:txBody>
+          <a:bodyPr/>
+          <a:lstStyle>
+            <a:lvl1pPr>
+              <a:defRPr sz="900">
+                <a:solidFill>
+                  <a:srgbClr val="1B3A6B"/>
+                </a:solidFill>
+                <a:latin typeface="Arial"/>
+                <a:ea typeface="Arial"/>
+                <a:cs typeface="Arial"/>
+              </a:defRPr>
+            </a:lvl1pPr>
+          </a:lstStyle>
+          <a:p>
+            <a:pPr algn="r"/>
+            <a:fld id="{F7021451-1387-4CA6-816F-3879F97B5CBC}" type="slidenum">
+              <a:rPr b="1" lang="en-US"/>
+              <a:t>1000</a:t>
+            </a:fld>
+            <a:endParaRPr lang="en-US"/>
+          </a:p>
+        </p:txBody>
+      </p:sp>
     </p:spTree>
   </p:cSld>
   <p:clrMapOvr>
@@ -2823,6 +2871,54 @@
           <a:chExt cx="0" cy="0"/>
         </a:xfrm>
       </p:grpSpPr>
+      <p:sp>
+        <p:nvSpPr>
+          <p:cNvPr id="25" name="Slide Number Placeholder 0"/>
+          <p:cNvSpPr>
+            <a:spLocks noGrp="1"/>
+          </p:cNvSpPr>
+          <p:nvPr>
+            <p:ph type="sldNum" sz="quarter" idx="4294967295"/>
+          </p:nvPr>
+        </p:nvSpPr>
+        <p:spPr>
+          <a:xfrm>
+            <a:off x="11292840" y="6556248"/>
+            <a:ext cx="548640" cy="256032"/>
+          </a:xfrm>
+          <a:prstGeom prst="rect">
+            <a:avLst/>
+          </a:prstGeom>
+          <a:extLst>
+            <a:ext uri="{C572A759-6A51-4108-AA02-DFA0A04FC94B}">
+              <ma14:wrappingTextBoxFlag xmlns:ma14="http://schemas.microsoft.com/office/mac/drawingml/2011/main" val="0"/>
+            </a:ext>
+          </a:extLst>
+        </p:spPr>
+        <p:txBody>
+          <a:bodyPr/>
+          <a:lstStyle>
+            <a:lvl1pPr>
+              <a:defRPr sz="900">
+                <a:solidFill>
+                  <a:srgbClr val="1B3A6B"/>
+                </a:solidFill>
+                <a:latin typeface="Arial"/>
+                <a:ea typeface="Arial"/>
+                <a:cs typeface="Arial"/>
+              </a:defRPr>
+            </a:lvl1pPr>
+          </a:lstStyle>
+          <a:p>
+            <a:pPr algn="r"/>
+            <a:fld id="{F7021451-1387-4CA6-816F-3879F97B5CBC}" type="slidenum">
+              <a:rPr b="1" lang="en-US"/>
+              <a:t>null</a:t>
+            </a:fld>
+            <a:endParaRPr lang="en-US"/>
+          </a:p>
+        </p:txBody>
+      </p:sp>
     </p:spTree>
   </p:cSld>
   <p:clrMap bg1="lt1" tx1="dk1" bg2="lt2" tx2="dk2" accent1="accent1" accent2="accent2" accent3="accent3" accent4="accent4" accent5="accent5" accent6="accent6" hlink="hlink" folHlink="folHlink"/>
@@ -3636,7 +3732,7 @@
         </p:blipFill>
         <p:spPr>
           <a:xfrm>
-            <a:off x="411480" y="6547104"/>
+            <a:off x="548640" y="6547104"/>
             <a:ext cx="274320" cy="274320"/>
           </a:xfrm>
           <a:prstGeom prst="rect">
@@ -3652,7 +3748,7 @@
         </p:nvSpPr>
         <p:spPr>
           <a:xfrm>
-            <a:off x="749808" y="6528816"/>
+            <a:off x="886968" y="6528816"/>
             <a:ext cx="6400800" cy="310896"/>
           </a:xfrm>
           <a:prstGeom prst="rect">
@@ -3692,7 +3788,7 @@
         <p:spPr>
           <a:xfrm>
             <a:off x="7132320" y="6528816"/>
-            <a:ext cx="4663440" cy="310896"/>
+            <a:ext cx="4023360" cy="310896"/>
           </a:xfrm>
           <a:prstGeom prst="rect">
             <a:avLst/>
@@ -3730,7 +3826,7 @@
         </p:nvSpPr>
         <p:spPr>
           <a:xfrm>
-            <a:off x="411480" y="384048"/>
+            <a:off x="548640" y="384048"/>
             <a:ext cx="82296" cy="658368"/>
           </a:xfrm>
           <a:prstGeom prst="rect">
@@ -3750,7 +3846,7 @@
         </p:nvSpPr>
         <p:spPr>
           <a:xfrm>
-            <a:off x="640080" y="292608"/>
+            <a:off x="777240" y="292608"/>
             <a:ext cx="10972800" cy="274320"/>
           </a:xfrm>
           <a:prstGeom prst="rect">
@@ -3789,8 +3885,8 @@
         </p:nvSpPr>
         <p:spPr>
           <a:xfrm>
-            <a:off x="640080" y="530352"/>
-            <a:ext cx="11155680" cy="566928"/>
+            <a:off x="777240" y="530352"/>
+            <a:ext cx="10881360" cy="566928"/>
           </a:xfrm>
           <a:prstGeom prst="rect">
             <a:avLst/>
@@ -3830,12 +3926,12 @@
         </p:nvSpPr>
         <p:spPr>
           <a:xfrm>
-            <a:off x="411480" y="1325880"/>
-            <a:ext cx="3611880" cy="4937760"/>
+            <a:off x="548640" y="1325880"/>
+            <a:ext cx="3514344" cy="4937760"/>
           </a:xfrm>
           <a:prstGeom prst="roundRect">
             <a:avLst>
-              <a:gd name="adj" fmla="val 2025"/>
+              <a:gd name="adj" fmla="val 2082"/>
             </a:avLst>
           </a:prstGeom>
           <a:solidFill>
@@ -3864,8 +3960,8 @@
         </p:nvSpPr>
         <p:spPr>
           <a:xfrm>
-            <a:off x="411480" y="1325880"/>
-            <a:ext cx="3611880" cy="109728"/>
+            <a:off x="548640" y="1325880"/>
+            <a:ext cx="3514344" cy="109728"/>
           </a:xfrm>
           <a:prstGeom prst="rect">
             <a:avLst/>
@@ -3884,8 +3980,8 @@
         </p:nvSpPr>
         <p:spPr>
           <a:xfrm>
-            <a:off x="685800" y="1554480"/>
-            <a:ext cx="3063240" cy="685800"/>
+            <a:off x="822960" y="1554480"/>
+            <a:ext cx="2965704" cy="685800"/>
           </a:xfrm>
           <a:prstGeom prst="rect">
             <a:avLst/>
@@ -3925,8 +4021,8 @@
         </p:nvSpPr>
         <p:spPr>
           <a:xfrm>
-            <a:off x="685800" y="2286000"/>
-            <a:ext cx="3063240" cy="3749040"/>
+            <a:off x="822960" y="2286000"/>
+            <a:ext cx="2965704" cy="3749040"/>
           </a:xfrm>
           <a:prstGeom prst="rect">
             <a:avLst/>
@@ -3948,7 +4044,7 @@
               <a:buChar char="●"/>
             </a:pPr>
             <a:r>
-              <a:rPr lang="en-US" sz="1600" dirty="0">
+              <a:rPr lang="en-US" sz="1700" dirty="0">
                 <a:solidFill>
                   <a:srgbClr val="1F2937"/>
                 </a:solidFill>
@@ -3958,7 +4054,7 @@
               </a:rPr>
               <a:t>Crítico: trate hoje (ameaça receita/clientes)</a:t>
             </a:r>
-            <a:endParaRPr lang="en-US" sz="1600" dirty="0"/>
+            <a:endParaRPr lang="en-US" sz="1700" dirty="0"/>
           </a:p>
           <a:p>
             <a:pPr marL="342900" indent="-342900">
@@ -3969,7 +4065,7 @@
               <a:buChar char="●"/>
             </a:pPr>
             <a:r>
-              <a:rPr lang="en-US" sz="1600" dirty="0">
+              <a:rPr lang="en-US" sz="1700" dirty="0">
                 <a:solidFill>
                   <a:srgbClr val="1F2937"/>
                 </a:solidFill>
@@ -3979,7 +4075,7 @@
               </a:rPr>
               <a:t>Aviso: trate na semana</a:t>
             </a:r>
-            <a:endParaRPr lang="en-US" sz="1600" dirty="0"/>
+            <a:endParaRPr lang="en-US" sz="1700" dirty="0"/>
           </a:p>
           <a:p>
             <a:pPr marL="342900" indent="-342900">
@@ -3990,7 +4086,7 @@
               <a:buChar char="●"/>
             </a:pPr>
             <a:r>
-              <a:rPr lang="en-US" sz="1600" dirty="0">
+              <a:rPr lang="en-US" sz="1700" dirty="0">
                 <a:solidFill>
                   <a:srgbClr val="1F2937"/>
                 </a:solidFill>
@@ -4000,7 +4096,7 @@
               </a:rPr>
               <a:t>Informativo: acompanhe</a:t>
             </a:r>
-            <a:endParaRPr lang="en-US" sz="1600" dirty="0"/>
+            <a:endParaRPr lang="en-US" sz="1700" dirty="0"/>
           </a:p>
         </p:txBody>
       </p:sp>
@@ -4012,12 +4108,12 @@
         </p:nvSpPr>
         <p:spPr>
           <a:xfrm>
-            <a:off x="4297680" y="1325880"/>
-            <a:ext cx="3611880" cy="4937760"/>
+            <a:off x="4337304" y="1325880"/>
+            <a:ext cx="3514344" cy="4937760"/>
           </a:xfrm>
           <a:prstGeom prst="roundRect">
             <a:avLst>
-              <a:gd name="adj" fmla="val 2025"/>
+              <a:gd name="adj" fmla="val 2082"/>
             </a:avLst>
           </a:prstGeom>
           <a:solidFill>
@@ -4046,8 +4142,8 @@
         </p:nvSpPr>
         <p:spPr>
           <a:xfrm>
-            <a:off x="4297680" y="1325880"/>
-            <a:ext cx="3611880" cy="109728"/>
+            <a:off x="4337304" y="1325880"/>
+            <a:ext cx="3514344" cy="109728"/>
           </a:xfrm>
           <a:prstGeom prst="rect">
             <a:avLst/>
@@ -4066,8 +4162,8 @@
         </p:nvSpPr>
         <p:spPr>
           <a:xfrm>
-            <a:off x="4572000" y="1554480"/>
-            <a:ext cx="3063240" cy="685800"/>
+            <a:off x="4611624" y="1554480"/>
+            <a:ext cx="2965704" cy="685800"/>
           </a:xfrm>
           <a:prstGeom prst="rect">
             <a:avLst/>
@@ -4107,8 +4203,8 @@
         </p:nvSpPr>
         <p:spPr>
           <a:xfrm>
-            <a:off x="4572000" y="2286000"/>
-            <a:ext cx="3063240" cy="3749040"/>
+            <a:off x="4611624" y="2286000"/>
+            <a:ext cx="2965704" cy="3749040"/>
           </a:xfrm>
           <a:prstGeom prst="rect">
             <a:avLst/>
@@ -4130,7 +4226,7 @@
               <a:buChar char="●"/>
             </a:pPr>
             <a:r>
-              <a:rPr lang="en-US" sz="1600" dirty="0">
+              <a:rPr lang="en-US" sz="1700" dirty="0">
                 <a:solidFill>
                   <a:srgbClr val="1F2937"/>
                 </a:solidFill>
@@ -4140,7 +4236,7 @@
               </a:rPr>
               <a:t>Único por módulo + tipo + registro</a:t>
             </a:r>
-            <a:endParaRPr lang="en-US" sz="1600" dirty="0"/>
+            <a:endParaRPr lang="en-US" sz="1700" dirty="0"/>
           </a:p>
           <a:p>
             <a:pPr marL="342900" indent="-342900">
@@ -4151,7 +4247,7 @@
               <a:buChar char="●"/>
             </a:pPr>
             <a:r>
-              <a:rPr lang="en-US" sz="1600" dirty="0">
+              <a:rPr lang="en-US" sz="1700" dirty="0">
                 <a:solidFill>
                   <a:srgbClr val="1F2937"/>
                 </a:solidFill>
@@ -4161,7 +4257,7 @@
               </a:rPr>
               <a:t>renovado se repetir</a:t>
             </a:r>
-            <a:endParaRPr lang="en-US" sz="1600" dirty="0"/>
+            <a:endParaRPr lang="en-US" sz="1700" dirty="0"/>
           </a:p>
           <a:p>
             <a:pPr marL="342900" indent="-342900">
@@ -4172,7 +4268,7 @@
               <a:buChar char="●"/>
             </a:pPr>
             <a:r>
-              <a:rPr lang="en-US" sz="1600" dirty="0">
+              <a:rPr lang="en-US" sz="1700" dirty="0">
                 <a:solidFill>
                   <a:srgbClr val="1F2937"/>
                 </a:solidFill>
@@ -4182,7 +4278,7 @@
               </a:rPr>
               <a:t>resolvido automaticamente quando a causa some</a:t>
             </a:r>
-            <a:endParaRPr lang="en-US" sz="1600" dirty="0"/>
+            <a:endParaRPr lang="en-US" sz="1700" dirty="0"/>
           </a:p>
         </p:txBody>
       </p:sp>
@@ -4194,12 +4290,12 @@
         </p:nvSpPr>
         <p:spPr>
           <a:xfrm>
-            <a:off x="8183880" y="1325880"/>
-            <a:ext cx="3611880" cy="4937760"/>
+            <a:off x="8125968" y="1325880"/>
+            <a:ext cx="3514344" cy="4937760"/>
           </a:xfrm>
           <a:prstGeom prst="roundRect">
             <a:avLst>
-              <a:gd name="adj" fmla="val 2025"/>
+              <a:gd name="adj" fmla="val 2082"/>
             </a:avLst>
           </a:prstGeom>
           <a:solidFill>
@@ -4228,8 +4324,8 @@
         </p:nvSpPr>
         <p:spPr>
           <a:xfrm>
-            <a:off x="8183880" y="1325880"/>
-            <a:ext cx="3611880" cy="109728"/>
+            <a:off x="8125968" y="1325880"/>
+            <a:ext cx="3514344" cy="109728"/>
           </a:xfrm>
           <a:prstGeom prst="rect">
             <a:avLst/>
@@ -4248,8 +4344,8 @@
         </p:nvSpPr>
         <p:spPr>
           <a:xfrm>
-            <a:off x="8458200" y="1554480"/>
-            <a:ext cx="3063240" cy="685800"/>
+            <a:off x="8400288" y="1554480"/>
+            <a:ext cx="2965704" cy="685800"/>
           </a:xfrm>
           <a:prstGeom prst="rect">
             <a:avLst/>
@@ -4289,8 +4385,8 @@
         </p:nvSpPr>
         <p:spPr>
           <a:xfrm>
-            <a:off x="8458200" y="2286000"/>
-            <a:ext cx="3063240" cy="3749040"/>
+            <a:off x="8400288" y="2286000"/>
+            <a:ext cx="2965704" cy="3749040"/>
           </a:xfrm>
           <a:prstGeom prst="rect">
             <a:avLst/>
@@ -4312,7 +4408,7 @@
               <a:buChar char="●"/>
             </a:pPr>
             <a:r>
-              <a:rPr lang="en-US" sz="1600" dirty="0">
+              <a:rPr lang="en-US" sz="1700" dirty="0">
                 <a:solidFill>
                   <a:srgbClr val="1F2937"/>
                 </a:solidFill>
@@ -4322,7 +4418,7 @@
               </a:rPr>
               <a:t>Admin: todos os alertas</a:t>
             </a:r>
-            <a:endParaRPr lang="en-US" sz="1600" dirty="0"/>
+            <a:endParaRPr lang="en-US" sz="1700" dirty="0"/>
           </a:p>
           <a:p>
             <a:pPr marL="342900" indent="-342900">
@@ -4333,7 +4429,7 @@
               <a:buChar char="●"/>
             </a:pPr>
             <a:r>
-              <a:rPr lang="en-US" sz="1600" dirty="0">
+              <a:rPr lang="en-US" sz="1700" dirty="0">
                 <a:solidFill>
                   <a:srgbClr val="1F2937"/>
                 </a:solidFill>
@@ -4343,7 +4439,55 @@
               </a:rPr>
               <a:t>Consultor: só alertas financeiros da própria carteira (com link de WhatsApp pronto)</a:t>
             </a:r>
-            <a:endParaRPr lang="en-US" sz="1600" dirty="0"/>
+            <a:endParaRPr lang="en-US" sz="1700" dirty="0"/>
+          </a:p>
+        </p:txBody>
+      </p:sp>
+      <p:sp>
+        <p:nvSpPr>
+          <p:cNvPr id="25" name="Slide Number Placeholder 0"/>
+          <p:cNvSpPr>
+            <a:spLocks noGrp="1"/>
+          </p:cNvSpPr>
+          <p:nvPr>
+            <p:ph type="sldNum" sz="quarter" idx="4294967295"/>
+          </p:nvPr>
+        </p:nvSpPr>
+        <p:spPr>
+          <a:xfrm>
+            <a:off x="11292840" y="6556248"/>
+            <a:ext cx="548640" cy="256032"/>
+          </a:xfrm>
+          <a:prstGeom prst="rect">
+            <a:avLst/>
+          </a:prstGeom>
+          <a:extLst>
+            <a:ext uri="{C572A759-6A51-4108-AA02-DFA0A04FC94B}">
+              <ma14:wrappingTextBoxFlag xmlns:ma14="http://schemas.microsoft.com/office/mac/drawingml/2011/main" val="0"/>
+            </a:ext>
+          </a:extLst>
+        </p:spPr>
+        <p:txBody>
+          <a:bodyPr/>
+          <a:lstStyle>
+            <a:lvl1pPr>
+              <a:defRPr sz="900">
+                <a:solidFill>
+                  <a:srgbClr val="1B3A6B"/>
+                </a:solidFill>
+                <a:latin typeface="Arial"/>
+                <a:ea typeface="Arial"/>
+                <a:cs typeface="Arial"/>
+              </a:defRPr>
+            </a:lvl1pPr>
+          </a:lstStyle>
+          <a:p>
+            <a:pPr algn="r"/>
+            <a:fld id="{F7021451-1387-4CA6-816F-3879F97B5CBC}" type="slidenum">
+              <a:rPr b="1" lang="en-US"/>
+              <a:t>10</a:t>
+            </a:fld>
+            <a:endParaRPr lang="en-US"/>
           </a:p>
         </p:txBody>
       </p:sp>
@@ -4420,7 +4564,7 @@
         </p:blipFill>
         <p:spPr>
           <a:xfrm>
-            <a:off x="411480" y="6547104"/>
+            <a:off x="548640" y="6547104"/>
             <a:ext cx="274320" cy="274320"/>
           </a:xfrm>
           <a:prstGeom prst="rect">
@@ -4436,7 +4580,7 @@
         </p:nvSpPr>
         <p:spPr>
           <a:xfrm>
-            <a:off x="749808" y="6528816"/>
+            <a:off x="886968" y="6528816"/>
             <a:ext cx="6400800" cy="310896"/>
           </a:xfrm>
           <a:prstGeom prst="rect">
@@ -4476,7 +4620,7 @@
         <p:spPr>
           <a:xfrm>
             <a:off x="7132320" y="6528816"/>
-            <a:ext cx="4663440" cy="310896"/>
+            <a:ext cx="4023360" cy="310896"/>
           </a:xfrm>
           <a:prstGeom prst="rect">
             <a:avLst/>
@@ -4514,7 +4658,7 @@
         </p:nvSpPr>
         <p:spPr>
           <a:xfrm>
-            <a:off x="411480" y="384048"/>
+            <a:off x="548640" y="384048"/>
             <a:ext cx="82296" cy="658368"/>
           </a:xfrm>
           <a:prstGeom prst="rect">
@@ -4534,7 +4678,7 @@
         </p:nvSpPr>
         <p:spPr>
           <a:xfrm>
-            <a:off x="640080" y="292608"/>
+            <a:off x="777240" y="292608"/>
             <a:ext cx="10972800" cy="274320"/>
           </a:xfrm>
           <a:prstGeom prst="rect">
@@ -4573,8 +4717,8 @@
         </p:nvSpPr>
         <p:spPr>
           <a:xfrm>
-            <a:off x="640080" y="530352"/>
-            <a:ext cx="11155680" cy="566928"/>
+            <a:off x="777240" y="530352"/>
+            <a:ext cx="10881360" cy="566928"/>
           </a:xfrm>
           <a:prstGeom prst="rect">
             <a:avLst/>
@@ -4664,6 +4808,54 @@
           </a:prstGeom>
         </p:spPr>
       </p:pic>
+      <p:sp>
+        <p:nvSpPr>
+          <p:cNvPr id="25" name="Slide Number Placeholder 0"/>
+          <p:cNvSpPr>
+            <a:spLocks noGrp="1"/>
+          </p:cNvSpPr>
+          <p:nvPr>
+            <p:ph type="sldNum" sz="quarter" idx="4294967295"/>
+          </p:nvPr>
+        </p:nvSpPr>
+        <p:spPr>
+          <a:xfrm>
+            <a:off x="11292840" y="6556248"/>
+            <a:ext cx="548640" cy="256032"/>
+          </a:xfrm>
+          <a:prstGeom prst="rect">
+            <a:avLst/>
+          </a:prstGeom>
+          <a:extLst>
+            <a:ext uri="{C572A759-6A51-4108-AA02-DFA0A04FC94B}">
+              <ma14:wrappingTextBoxFlag xmlns:ma14="http://schemas.microsoft.com/office/mac/drawingml/2011/main" val="0"/>
+            </a:ext>
+          </a:extLst>
+        </p:spPr>
+        <p:txBody>
+          <a:bodyPr/>
+          <a:lstStyle>
+            <a:lvl1pPr>
+              <a:defRPr sz="900">
+                <a:solidFill>
+                  <a:srgbClr val="1B3A6B"/>
+                </a:solidFill>
+                <a:latin typeface="Arial"/>
+                <a:ea typeface="Arial"/>
+                <a:cs typeface="Arial"/>
+              </a:defRPr>
+            </a:lvl1pPr>
+          </a:lstStyle>
+          <a:p>
+            <a:pPr algn="r"/>
+            <a:fld id="{F7021451-1387-4CA6-816F-3879F97B5CBC}" type="slidenum">
+              <a:rPr b="1" lang="en-US"/>
+              <a:t>11</a:t>
+            </a:fld>
+            <a:endParaRPr lang="en-US"/>
+          </a:p>
+        </p:txBody>
+      </p:sp>
     </p:spTree>
   </p:cSld>
   <p:clrMapOvr>
@@ -4737,7 +4929,7 @@
         </p:blipFill>
         <p:spPr>
           <a:xfrm>
-            <a:off x="411480" y="6547104"/>
+            <a:off x="548640" y="6547104"/>
             <a:ext cx="274320" cy="274320"/>
           </a:xfrm>
           <a:prstGeom prst="rect">
@@ -4753,7 +4945,7 @@
         </p:nvSpPr>
         <p:spPr>
           <a:xfrm>
-            <a:off x="749808" y="6528816"/>
+            <a:off x="886968" y="6528816"/>
             <a:ext cx="6400800" cy="310896"/>
           </a:xfrm>
           <a:prstGeom prst="rect">
@@ -4793,7 +4985,7 @@
         <p:spPr>
           <a:xfrm>
             <a:off x="7132320" y="6528816"/>
-            <a:ext cx="4663440" cy="310896"/>
+            <a:ext cx="4023360" cy="310896"/>
           </a:xfrm>
           <a:prstGeom prst="rect">
             <a:avLst/>
@@ -4831,7 +5023,7 @@
         </p:nvSpPr>
         <p:spPr>
           <a:xfrm>
-            <a:off x="411480" y="384048"/>
+            <a:off x="548640" y="384048"/>
             <a:ext cx="82296" cy="658368"/>
           </a:xfrm>
           <a:prstGeom prst="rect">
@@ -4851,7 +5043,7 @@
         </p:nvSpPr>
         <p:spPr>
           <a:xfrm>
-            <a:off x="640080" y="292608"/>
+            <a:off x="777240" y="292608"/>
             <a:ext cx="10972800" cy="274320"/>
           </a:xfrm>
           <a:prstGeom prst="rect">
@@ -4890,8 +5082,8 @@
         </p:nvSpPr>
         <p:spPr>
           <a:xfrm>
-            <a:off x="640080" y="530352"/>
-            <a:ext cx="11155680" cy="566928"/>
+            <a:off x="777240" y="530352"/>
+            <a:ext cx="10881360" cy="566928"/>
           </a:xfrm>
           <a:prstGeom prst="rect">
             <a:avLst/>
@@ -4931,8 +5123,8 @@
         </p:nvSpPr>
         <p:spPr>
           <a:xfrm>
-            <a:off x="411480" y="1325880"/>
-            <a:ext cx="3642360" cy="2331720"/>
+            <a:off x="548640" y="1325880"/>
+            <a:ext cx="3544824" cy="2331720"/>
           </a:xfrm>
           <a:prstGeom prst="roundRect">
             <a:avLst>
@@ -4965,7 +5157,7 @@
         </p:nvSpPr>
         <p:spPr>
           <a:xfrm>
-            <a:off x="594360" y="1508760"/>
+            <a:off x="731520" y="1508760"/>
             <a:ext cx="457200" cy="457200"/>
           </a:xfrm>
           <a:prstGeom prst="ellipse">
@@ -4985,7 +5177,7 @@
         </p:nvSpPr>
         <p:spPr>
           <a:xfrm>
-            <a:off x="594360" y="1508760"/>
+            <a:off x="731520" y="1508760"/>
             <a:ext cx="457200" cy="457200"/>
           </a:xfrm>
           <a:prstGeom prst="rect">
@@ -5024,8 +5216,8 @@
         </p:nvSpPr>
         <p:spPr>
           <a:xfrm>
-            <a:off x="1188720" y="1435608"/>
-            <a:ext cx="2727960" cy="2112264"/>
+            <a:off x="1325880" y="1435608"/>
+            <a:ext cx="2630424" cy="2112264"/>
           </a:xfrm>
           <a:prstGeom prst="rect">
             <a:avLst/>
@@ -5065,8 +5257,8 @@
         </p:nvSpPr>
         <p:spPr>
           <a:xfrm>
-            <a:off x="4282440" y="1325880"/>
-            <a:ext cx="3642360" cy="2331720"/>
+            <a:off x="4322064" y="1325880"/>
+            <a:ext cx="3544824" cy="2331720"/>
           </a:xfrm>
           <a:prstGeom prst="roundRect">
             <a:avLst>
@@ -5099,7 +5291,7 @@
         </p:nvSpPr>
         <p:spPr>
           <a:xfrm>
-            <a:off x="4465320" y="1508760"/>
+            <a:off x="4504944" y="1508760"/>
             <a:ext cx="457200" cy="457200"/>
           </a:xfrm>
           <a:prstGeom prst="ellipse">
@@ -5119,7 +5311,7 @@
         </p:nvSpPr>
         <p:spPr>
           <a:xfrm>
-            <a:off x="4465320" y="1508760"/>
+            <a:off x="4504944" y="1508760"/>
             <a:ext cx="457200" cy="457200"/>
           </a:xfrm>
           <a:prstGeom prst="rect">
@@ -5158,8 +5350,8 @@
         </p:nvSpPr>
         <p:spPr>
           <a:xfrm>
-            <a:off x="5059680" y="1435608"/>
-            <a:ext cx="2727960" cy="2112264"/>
+            <a:off x="5099304" y="1435608"/>
+            <a:ext cx="2630424" cy="2112264"/>
           </a:xfrm>
           <a:prstGeom prst="rect">
             <a:avLst/>
@@ -5199,8 +5391,8 @@
         </p:nvSpPr>
         <p:spPr>
           <a:xfrm>
-            <a:off x="8153400" y="1325880"/>
-            <a:ext cx="3642360" cy="2331720"/>
+            <a:off x="8095488" y="1325880"/>
+            <a:ext cx="3544824" cy="2331720"/>
           </a:xfrm>
           <a:prstGeom prst="roundRect">
             <a:avLst>
@@ -5233,7 +5425,7 @@
         </p:nvSpPr>
         <p:spPr>
           <a:xfrm>
-            <a:off x="8336280" y="1508760"/>
+            <a:off x="8278368" y="1508760"/>
             <a:ext cx="457200" cy="457200"/>
           </a:xfrm>
           <a:prstGeom prst="ellipse">
@@ -5253,7 +5445,7 @@
         </p:nvSpPr>
         <p:spPr>
           <a:xfrm>
-            <a:off x="8336280" y="1508760"/>
+            <a:off x="8278368" y="1508760"/>
             <a:ext cx="457200" cy="457200"/>
           </a:xfrm>
           <a:prstGeom prst="rect">
@@ -5292,8 +5484,8 @@
         </p:nvSpPr>
         <p:spPr>
           <a:xfrm>
-            <a:off x="8930640" y="1435608"/>
-            <a:ext cx="2727960" cy="2112264"/>
+            <a:off x="8872728" y="1435608"/>
+            <a:ext cx="2630424" cy="2112264"/>
           </a:xfrm>
           <a:prstGeom prst="rect">
             <a:avLst/>
@@ -5333,8 +5525,8 @@
         </p:nvSpPr>
         <p:spPr>
           <a:xfrm>
-            <a:off x="411480" y="3886200"/>
-            <a:ext cx="3642360" cy="2331720"/>
+            <a:off x="548640" y="3886200"/>
+            <a:ext cx="3544824" cy="2331720"/>
           </a:xfrm>
           <a:prstGeom prst="roundRect">
             <a:avLst>
@@ -5367,7 +5559,7 @@
         </p:nvSpPr>
         <p:spPr>
           <a:xfrm>
-            <a:off x="594360" y="4069080"/>
+            <a:off x="731520" y="4069080"/>
             <a:ext cx="457200" cy="457200"/>
           </a:xfrm>
           <a:prstGeom prst="ellipse">
@@ -5387,7 +5579,7 @@
         </p:nvSpPr>
         <p:spPr>
           <a:xfrm>
-            <a:off x="594360" y="4069080"/>
+            <a:off x="731520" y="4069080"/>
             <a:ext cx="457200" cy="457200"/>
           </a:xfrm>
           <a:prstGeom prst="rect">
@@ -5426,8 +5618,8 @@
         </p:nvSpPr>
         <p:spPr>
           <a:xfrm>
-            <a:off x="1188720" y="3995928"/>
-            <a:ext cx="2727960" cy="2112264"/>
+            <a:off x="1325880" y="3995928"/>
+            <a:ext cx="2630424" cy="2112264"/>
           </a:xfrm>
           <a:prstGeom prst="rect">
             <a:avLst/>
@@ -5467,8 +5659,8 @@
         </p:nvSpPr>
         <p:spPr>
           <a:xfrm>
-            <a:off x="4282440" y="3886200"/>
-            <a:ext cx="3642360" cy="2331720"/>
+            <a:off x="4322064" y="3886200"/>
+            <a:ext cx="3544824" cy="2331720"/>
           </a:xfrm>
           <a:prstGeom prst="roundRect">
             <a:avLst>
@@ -5501,7 +5693,7 @@
         </p:nvSpPr>
         <p:spPr>
           <a:xfrm>
-            <a:off x="4465320" y="4069080"/>
+            <a:off x="4504944" y="4069080"/>
             <a:ext cx="457200" cy="457200"/>
           </a:xfrm>
           <a:prstGeom prst="ellipse">
@@ -5521,7 +5713,7 @@
         </p:nvSpPr>
         <p:spPr>
           <a:xfrm>
-            <a:off x="4465320" y="4069080"/>
+            <a:off x="4504944" y="4069080"/>
             <a:ext cx="457200" cy="457200"/>
           </a:xfrm>
           <a:prstGeom prst="rect">
@@ -5560,8 +5752,8 @@
         </p:nvSpPr>
         <p:spPr>
           <a:xfrm>
-            <a:off x="5059680" y="3995928"/>
-            <a:ext cx="2727960" cy="2112264"/>
+            <a:off x="5099304" y="3995928"/>
+            <a:ext cx="2630424" cy="2112264"/>
           </a:xfrm>
           <a:prstGeom prst="rect">
             <a:avLst/>
@@ -5590,6 +5782,54 @@
               <a:t>cada perfil vê a sua fila</a:t>
             </a:r>
             <a:endParaRPr lang="en-US" sz="1800" dirty="0"/>
+          </a:p>
+        </p:txBody>
+      </p:sp>
+      <p:sp>
+        <p:nvSpPr>
+          <p:cNvPr id="25" name="Slide Number Placeholder 0"/>
+          <p:cNvSpPr>
+            <a:spLocks noGrp="1"/>
+          </p:cNvSpPr>
+          <p:nvPr>
+            <p:ph type="sldNum" sz="quarter" idx="4294967295"/>
+          </p:nvPr>
+        </p:nvSpPr>
+        <p:spPr>
+          <a:xfrm>
+            <a:off x="11292840" y="6556248"/>
+            <a:ext cx="548640" cy="256032"/>
+          </a:xfrm>
+          <a:prstGeom prst="rect">
+            <a:avLst/>
+          </a:prstGeom>
+          <a:extLst>
+            <a:ext uri="{C572A759-6A51-4108-AA02-DFA0A04FC94B}">
+              <ma14:wrappingTextBoxFlag xmlns:ma14="http://schemas.microsoft.com/office/mac/drawingml/2011/main" val="0"/>
+            </a:ext>
+          </a:extLst>
+        </p:spPr>
+        <p:txBody>
+          <a:bodyPr/>
+          <a:lstStyle>
+            <a:lvl1pPr>
+              <a:defRPr sz="900">
+                <a:solidFill>
+                  <a:srgbClr val="1B3A6B"/>
+                </a:solidFill>
+                <a:latin typeface="Arial"/>
+                <a:ea typeface="Arial"/>
+                <a:cs typeface="Arial"/>
+              </a:defRPr>
+            </a:lvl1pPr>
+          </a:lstStyle>
+          <a:p>
+            <a:pPr algn="r"/>
+            <a:fld id="{F7021451-1387-4CA6-816F-3879F97B5CBC}" type="slidenum">
+              <a:rPr b="1" lang="en-US"/>
+              <a:t>12</a:t>
+            </a:fld>
+            <a:endParaRPr lang="en-US"/>
           </a:p>
         </p:txBody>
       </p:sp>
@@ -5653,6 +5893,45 @@
         </p:nvSpPr>
         <p:spPr>
           <a:xfrm>
+            <a:off x="457200" y="548640"/>
+            <a:ext cx="3474720" cy="1737360"/>
+          </a:xfrm>
+          <a:prstGeom prst="rect">
+            <a:avLst/>
+          </a:prstGeom>
+          <a:noFill/>
+          <a:ln/>
+        </p:spPr>
+        <p:txBody>
+          <a:bodyPr wrap="square" rtlCol="0" anchor="ctr"/>
+          <a:lstStyle/>
+          <a:p>
+            <a:pPr indent="0" marL="0">
+              <a:buNone/>
+            </a:pPr>
+            <a:r>
+              <a:rPr lang="en-US" sz="11000" b="1" dirty="0">
+                <a:solidFill>
+                  <a:srgbClr val="11396F"/>
+                </a:solidFill>
+                <a:latin typeface="Arial" pitchFamily="34" charset="0"/>
+                <a:ea typeface="Arial" pitchFamily="34" charset="-122"/>
+                <a:cs typeface="Arial" pitchFamily="34" charset="-120"/>
+              </a:rPr>
+              <a:t>03</a:t>
+            </a:r>
+            <a:endParaRPr lang="en-US" sz="11000" dirty="0"/>
+          </a:p>
+        </p:txBody>
+      </p:sp>
+      <p:sp>
+        <p:nvSpPr>
+          <p:cNvPr id="4" name="Text 2"/>
+          <p:cNvSpPr/>
+          <p:nvPr/>
+        </p:nvSpPr>
+        <p:spPr>
+          <a:xfrm>
             <a:off x="548640" y="2194560"/>
             <a:ext cx="3291840" cy="548640"/>
           </a:xfrm>
@@ -5686,7 +5965,46 @@
       </p:sp>
       <p:sp>
         <p:nvSpPr>
-          <p:cNvPr id="4" name="Text 2"/>
+          <p:cNvPr id="5" name="Text 3"/>
+          <p:cNvSpPr/>
+          <p:nvPr/>
+        </p:nvSpPr>
+        <p:spPr>
+          <a:xfrm>
+            <a:off x="548640" y="3200400"/>
+            <a:ext cx="3383280" cy="457200"/>
+          </a:xfrm>
+          <a:prstGeom prst="rect">
+            <a:avLst/>
+          </a:prstGeom>
+          <a:noFill/>
+          <a:ln/>
+        </p:spPr>
+        <p:txBody>
+          <a:bodyPr wrap="square" rtlCol="0" anchor="ctr"/>
+          <a:lstStyle/>
+          <a:p>
+            <a:pPr indent="0" marL="0">
+              <a:buNone/>
+            </a:pPr>
+            <a:r>
+              <a:rPr lang="en-US" sz="1100" dirty="0">
+                <a:solidFill>
+                  <a:srgbClr val="C7D2E3"/>
+                </a:solidFill>
+                <a:latin typeface="Arial" pitchFamily="34" charset="0"/>
+                <a:ea typeface="Arial" pitchFamily="34" charset="-122"/>
+                <a:cs typeface="Arial" pitchFamily="34" charset="-120"/>
+              </a:rPr>
+              <a:t>M9 · Etapa 3 · Operação ponta a ponta</a:t>
+            </a:r>
+            <a:endParaRPr lang="en-US" sz="1100" dirty="0"/>
+          </a:p>
+        </p:txBody>
+      </p:sp>
+      <p:sp>
+        <p:nvSpPr>
+          <p:cNvPr id="6" name="Text 4"/>
           <p:cNvSpPr/>
           <p:nvPr/>
         </p:nvSpPr>
@@ -5725,7 +6043,7 @@
       </p:sp>
       <p:pic>
         <p:nvPicPr>
-          <p:cNvPr id="5" name="Image 0" descr="/www/wwwroot/rexar/gdsolar/docs/curso/slides/assets/logo-gdsolar.png">    </p:cNvPr>
+          <p:cNvPr id="7" name="Image 0" descr="/www/wwwroot/rexar/gdsolar/docs/curso/slides/assets/logo-gdsolar.png">    </p:cNvPr>
           <p:cNvPicPr>
             <a:picLocks noChangeAspect="1"/>
           </p:cNvPicPr>
@@ -5749,7 +6067,7 @@
       </p:pic>
       <p:sp>
         <p:nvSpPr>
-          <p:cNvPr id="6" name="Text 3"/>
+          <p:cNvPr id="8" name="Text 5"/>
           <p:cNvSpPr/>
           <p:nvPr/>
         </p:nvSpPr>
@@ -5790,7 +6108,7 @@
       </p:sp>
       <p:sp>
         <p:nvSpPr>
-          <p:cNvPr id="7" name="Text 4"/>
+          <p:cNvPr id="9" name="Text 6"/>
           <p:cNvSpPr/>
           <p:nvPr/>
         </p:nvSpPr>
@@ -5831,7 +6149,7 @@
       </p:sp>
       <p:sp>
         <p:nvSpPr>
-          <p:cNvPr id="8" name="Text 5"/>
+          <p:cNvPr id="10" name="Text 7"/>
           <p:cNvSpPr/>
           <p:nvPr/>
         </p:nvSpPr>
@@ -6010,7 +6328,7 @@
         </p:blipFill>
         <p:spPr>
           <a:xfrm>
-            <a:off x="411480" y="6547104"/>
+            <a:off x="548640" y="6547104"/>
             <a:ext cx="274320" cy="274320"/>
           </a:xfrm>
           <a:prstGeom prst="rect">
@@ -6026,7 +6344,7 @@
         </p:nvSpPr>
         <p:spPr>
           <a:xfrm>
-            <a:off x="749808" y="6528816"/>
+            <a:off x="886968" y="6528816"/>
             <a:ext cx="6400800" cy="310896"/>
           </a:xfrm>
           <a:prstGeom prst="rect">
@@ -6066,7 +6384,7 @@
         <p:spPr>
           <a:xfrm>
             <a:off x="7132320" y="6528816"/>
-            <a:ext cx="4663440" cy="310896"/>
+            <a:ext cx="4023360" cy="310896"/>
           </a:xfrm>
           <a:prstGeom prst="rect">
             <a:avLst/>
@@ -6104,7 +6422,7 @@
         </p:nvSpPr>
         <p:spPr>
           <a:xfrm>
-            <a:off x="411480" y="384048"/>
+            <a:off x="548640" y="384048"/>
             <a:ext cx="82296" cy="658368"/>
           </a:xfrm>
           <a:prstGeom prst="rect">
@@ -6124,7 +6442,7 @@
         </p:nvSpPr>
         <p:spPr>
           <a:xfrm>
-            <a:off x="640080" y="292608"/>
+            <a:off x="777240" y="292608"/>
             <a:ext cx="10972800" cy="274320"/>
           </a:xfrm>
           <a:prstGeom prst="rect">
@@ -6163,8 +6481,8 @@
         </p:nvSpPr>
         <p:spPr>
           <a:xfrm>
-            <a:off x="640080" y="530352"/>
-            <a:ext cx="11155680" cy="566928"/>
+            <a:off x="777240" y="530352"/>
+            <a:ext cx="10881360" cy="566928"/>
           </a:xfrm>
           <a:prstGeom prst="rect">
             <a:avLst/>
@@ -6204,8 +6522,8 @@
         </p:nvSpPr>
         <p:spPr>
           <a:xfrm>
-            <a:off x="411480" y="1325880"/>
-            <a:ext cx="5554980" cy="4937760"/>
+            <a:off x="548640" y="1325880"/>
+            <a:ext cx="5408676" cy="4937760"/>
           </a:xfrm>
           <a:prstGeom prst="roundRect">
             <a:avLst>
@@ -6238,8 +6556,8 @@
         </p:nvSpPr>
         <p:spPr>
           <a:xfrm>
-            <a:off x="411480" y="1325880"/>
-            <a:ext cx="5554980" cy="109728"/>
+            <a:off x="548640" y="1325880"/>
+            <a:ext cx="5408676" cy="109728"/>
           </a:xfrm>
           <a:prstGeom prst="rect">
             <a:avLst/>
@@ -6258,8 +6576,8 @@
         </p:nvSpPr>
         <p:spPr>
           <a:xfrm>
-            <a:off x="685800" y="1554480"/>
-            <a:ext cx="5006340" cy="685800"/>
+            <a:off x="822960" y="1554480"/>
+            <a:ext cx="4860036" cy="685800"/>
           </a:xfrm>
           <a:prstGeom prst="rect">
             <a:avLst/>
@@ -6299,8 +6617,8 @@
         </p:nvSpPr>
         <p:spPr>
           <a:xfrm>
-            <a:off x="685800" y="2286000"/>
-            <a:ext cx="5006340" cy="3749040"/>
+            <a:off x="822960" y="2286000"/>
+            <a:ext cx="4860036" cy="3749040"/>
           </a:xfrm>
           <a:prstGeom prst="rect">
             <a:avLst/>
@@ -6322,7 +6640,7 @@
               <a:buChar char="●"/>
             </a:pPr>
             <a:r>
-              <a:rPr lang="en-US" sz="1600" dirty="0">
+              <a:rPr lang="en-US" sz="1700" dirty="0">
                 <a:solidFill>
                   <a:srgbClr val="1F2937"/>
                 </a:solidFill>
@@ -6332,7 +6650,7 @@
               </a:rPr>
               <a:t>Monitoramento do inversor (diário)</a:t>
             </a:r>
-            <a:endParaRPr lang="en-US" sz="1600" dirty="0"/>
+            <a:endParaRPr lang="en-US" sz="1700" dirty="0"/>
           </a:p>
           <a:p>
             <a:pPr marL="342900" indent="-342900">
@@ -6343,7 +6661,7 @@
               <a:buChar char="●"/>
             </a:pPr>
             <a:r>
-              <a:rPr lang="en-US" sz="1600" dirty="0">
+              <a:rPr lang="en-US" sz="1700" dirty="0">
                 <a:solidFill>
                   <a:srgbClr val="1F2937"/>
                 </a:solidFill>
@@ -6353,7 +6671,7 @@
               </a:rPr>
               <a:t>Geração mensal registrada (plataforma)</a:t>
             </a:r>
-            <a:endParaRPr lang="en-US" sz="1600" dirty="0"/>
+            <a:endParaRPr lang="en-US" sz="1700" dirty="0"/>
           </a:p>
           <a:p>
             <a:pPr marL="342900" indent="-342900">
@@ -6364,7 +6682,7 @@
               <a:buChar char="●"/>
             </a:pPr>
             <a:r>
-              <a:rPr lang="en-US" sz="1600" dirty="0">
+              <a:rPr lang="en-US" sz="1700" dirty="0">
                 <a:solidFill>
                   <a:srgbClr val="1F2937"/>
                 </a:solidFill>
@@ -6374,7 +6692,7 @@
               </a:rPr>
               <a:t>Energia injetada na fatura da usina (distribuidora)</a:t>
             </a:r>
-            <a:endParaRPr lang="en-US" sz="1600" dirty="0"/>
+            <a:endParaRPr lang="en-US" sz="1700" dirty="0"/>
           </a:p>
         </p:txBody>
       </p:sp>
@@ -6386,8 +6704,8 @@
         </p:nvSpPr>
         <p:spPr>
           <a:xfrm>
-            <a:off x="6240780" y="1325880"/>
-            <a:ext cx="5554980" cy="4937760"/>
+            <a:off x="6231636" y="1325880"/>
+            <a:ext cx="5408676" cy="4937760"/>
           </a:xfrm>
           <a:prstGeom prst="roundRect">
             <a:avLst>
@@ -6420,8 +6738,8 @@
         </p:nvSpPr>
         <p:spPr>
           <a:xfrm>
-            <a:off x="6240780" y="1325880"/>
-            <a:ext cx="5554980" cy="109728"/>
+            <a:off x="6231636" y="1325880"/>
+            <a:ext cx="5408676" cy="109728"/>
           </a:xfrm>
           <a:prstGeom prst="rect">
             <a:avLst/>
@@ -6440,8 +6758,8 @@
         </p:nvSpPr>
         <p:spPr>
           <a:xfrm>
-            <a:off x="6515100" y="1554480"/>
-            <a:ext cx="5006340" cy="685800"/>
+            <a:off x="6505956" y="1554480"/>
+            <a:ext cx="4860036" cy="685800"/>
           </a:xfrm>
           <a:prstGeom prst="rect">
             <a:avLst/>
@@ -6481,8 +6799,8 @@
         </p:nvSpPr>
         <p:spPr>
           <a:xfrm>
-            <a:off x="6515100" y="2286000"/>
-            <a:ext cx="5006340" cy="3749040"/>
+            <a:off x="6505956" y="2286000"/>
+            <a:ext cx="4860036" cy="3749040"/>
           </a:xfrm>
           <a:prstGeom prst="rect">
             <a:avLst/>
@@ -6504,7 +6822,7 @@
               <a:buChar char="●"/>
             </a:pPr>
             <a:r>
-              <a:rPr lang="en-US" sz="1600" dirty="0">
+              <a:rPr lang="en-US" sz="1700" dirty="0">
                 <a:solidFill>
                   <a:srgbClr val="1F2937"/>
                 </a:solidFill>
@@ -6514,7 +6832,7 @@
               </a:rPr>
               <a:t>Geração &lt; 90% do esperado para o mês</a:t>
             </a:r>
-            <a:endParaRPr lang="en-US" sz="1600" dirty="0"/>
+            <a:endParaRPr lang="en-US" sz="1700" dirty="0"/>
           </a:p>
           <a:p>
             <a:pPr marL="342900" indent="-342900">
@@ -6525,7 +6843,7 @@
               <a:buChar char="●"/>
             </a:pPr>
             <a:r>
-              <a:rPr lang="en-US" sz="1600" dirty="0">
+              <a:rPr lang="en-US" sz="1700" dirty="0">
                 <a:solidFill>
                   <a:srgbClr val="1F2937"/>
                 </a:solidFill>
@@ -6535,7 +6853,7 @@
               </a:rPr>
               <a:t>usina sem registro no mês</a:t>
             </a:r>
-            <a:endParaRPr lang="en-US" sz="1600" dirty="0"/>
+            <a:endParaRPr lang="en-US" sz="1700" dirty="0"/>
           </a:p>
           <a:p>
             <a:pPr marL="342900" indent="-342900">
@@ -6546,7 +6864,7 @@
               <a:buChar char="●"/>
             </a:pPr>
             <a:r>
-              <a:rPr lang="en-US" sz="1600" dirty="0">
+              <a:rPr lang="en-US" sz="1700" dirty="0">
                 <a:solidFill>
                   <a:srgbClr val="1F2937"/>
                 </a:solidFill>
@@ -6556,7 +6874,7 @@
               </a:rPr>
               <a:t>saldo baixo (≤ 10%)</a:t>
             </a:r>
-            <a:endParaRPr lang="en-US" sz="1600" dirty="0"/>
+            <a:endParaRPr lang="en-US" sz="1700" dirty="0"/>
           </a:p>
           <a:p>
             <a:pPr marL="342900" indent="-342900">
@@ -6567,7 +6885,7 @@
               <a:buChar char="●"/>
             </a:pPr>
             <a:r>
-              <a:rPr lang="en-US" sz="1600" dirty="0">
+              <a:rPr lang="en-US" sz="1700" dirty="0">
                 <a:solidFill>
                   <a:srgbClr val="1F2937"/>
                 </a:solidFill>
@@ -6577,7 +6895,7 @@
               </a:rPr>
               <a:t>alocada &gt; disponível</a:t>
             </a:r>
-            <a:endParaRPr lang="en-US" sz="1600" dirty="0"/>
+            <a:endParaRPr lang="en-US" sz="1700" dirty="0"/>
           </a:p>
           <a:p>
             <a:pPr marL="342900" indent="-342900">
@@ -6588,7 +6906,7 @@
               <a:buChar char="●"/>
             </a:pPr>
             <a:r>
-              <a:rPr lang="en-US" sz="1600" dirty="0">
+              <a:rPr lang="en-US" sz="1700" dirty="0">
                 <a:solidFill>
                   <a:srgbClr val="1F2937"/>
                 </a:solidFill>
@@ -6598,7 +6916,55 @@
               </a:rPr>
               <a:t>cliente consumindo acima da cota</a:t>
             </a:r>
-            <a:endParaRPr lang="en-US" sz="1600" dirty="0"/>
+            <a:endParaRPr lang="en-US" sz="1700" dirty="0"/>
+          </a:p>
+        </p:txBody>
+      </p:sp>
+      <p:sp>
+        <p:nvSpPr>
+          <p:cNvPr id="25" name="Slide Number Placeholder 0"/>
+          <p:cNvSpPr>
+            <a:spLocks noGrp="1"/>
+          </p:cNvSpPr>
+          <p:nvPr>
+            <p:ph type="sldNum" sz="quarter" idx="4294967295"/>
+          </p:nvPr>
+        </p:nvSpPr>
+        <p:spPr>
+          <a:xfrm>
+            <a:off x="11292840" y="6556248"/>
+            <a:ext cx="548640" cy="256032"/>
+          </a:xfrm>
+          <a:prstGeom prst="rect">
+            <a:avLst/>
+          </a:prstGeom>
+          <a:extLst>
+            <a:ext uri="{C572A759-6A51-4108-AA02-DFA0A04FC94B}">
+              <ma14:wrappingTextBoxFlag xmlns:ma14="http://schemas.microsoft.com/office/mac/drawingml/2011/main" val="0"/>
+            </a:ext>
+          </a:extLst>
+        </p:spPr>
+        <p:txBody>
+          <a:bodyPr/>
+          <a:lstStyle>
+            <a:lvl1pPr>
+              <a:defRPr sz="900">
+                <a:solidFill>
+                  <a:srgbClr val="1B3A6B"/>
+                </a:solidFill>
+                <a:latin typeface="Arial"/>
+                <a:ea typeface="Arial"/>
+                <a:cs typeface="Arial"/>
+              </a:defRPr>
+            </a:lvl1pPr>
+          </a:lstStyle>
+          <a:p>
+            <a:pPr algn="r"/>
+            <a:fld id="{F7021451-1387-4CA6-816F-3879F97B5CBC}" type="slidenum">
+              <a:rPr b="1" lang="en-US"/>
+              <a:t>14</a:t>
+            </a:fld>
+            <a:endParaRPr lang="en-US"/>
           </a:p>
         </p:txBody>
       </p:sp>
@@ -6675,7 +7041,7 @@
         </p:blipFill>
         <p:spPr>
           <a:xfrm>
-            <a:off x="411480" y="6547104"/>
+            <a:off x="548640" y="6547104"/>
             <a:ext cx="274320" cy="274320"/>
           </a:xfrm>
           <a:prstGeom prst="rect">
@@ -6691,7 +7057,7 @@
         </p:nvSpPr>
         <p:spPr>
           <a:xfrm>
-            <a:off x="749808" y="6528816"/>
+            <a:off x="886968" y="6528816"/>
             <a:ext cx="6400800" cy="310896"/>
           </a:xfrm>
           <a:prstGeom prst="rect">
@@ -6731,7 +7097,7 @@
         <p:spPr>
           <a:xfrm>
             <a:off x="7132320" y="6528816"/>
-            <a:ext cx="4663440" cy="310896"/>
+            <a:ext cx="4023360" cy="310896"/>
           </a:xfrm>
           <a:prstGeom prst="rect">
             <a:avLst/>
@@ -6769,7 +7135,7 @@
         </p:nvSpPr>
         <p:spPr>
           <a:xfrm>
-            <a:off x="411480" y="384048"/>
+            <a:off x="548640" y="384048"/>
             <a:ext cx="82296" cy="658368"/>
           </a:xfrm>
           <a:prstGeom prst="rect">
@@ -6789,7 +7155,7 @@
         </p:nvSpPr>
         <p:spPr>
           <a:xfrm>
-            <a:off x="640080" y="292608"/>
+            <a:off x="777240" y="292608"/>
             <a:ext cx="10972800" cy="274320"/>
           </a:xfrm>
           <a:prstGeom prst="rect">
@@ -6828,8 +7194,8 @@
         </p:nvSpPr>
         <p:spPr>
           <a:xfrm>
-            <a:off x="640080" y="530352"/>
-            <a:ext cx="11155680" cy="566928"/>
+            <a:off x="777240" y="530352"/>
+            <a:ext cx="10881360" cy="566928"/>
           </a:xfrm>
           <a:prstGeom prst="rect">
             <a:avLst/>
@@ -6869,8 +7235,8 @@
         </p:nvSpPr>
         <p:spPr>
           <a:xfrm>
-            <a:off x="411480" y="2651760"/>
-            <a:ext cx="2377440" cy="1463040"/>
+            <a:off x="548640" y="2651760"/>
+            <a:ext cx="2304288" cy="1463040"/>
           </a:xfrm>
           <a:prstGeom prst="chevron">
             <a:avLst/>
@@ -6894,8 +7260,8 @@
         </p:nvSpPr>
         <p:spPr>
           <a:xfrm>
-            <a:off x="731520" y="2651760"/>
-            <a:ext cx="1856232" cy="1463040"/>
+            <a:off x="868680" y="2651760"/>
+            <a:ext cx="1783080" cy="1463040"/>
           </a:xfrm>
           <a:prstGeom prst="rect">
             <a:avLst/>
@@ -6935,8 +7301,8 @@
         </p:nvSpPr>
         <p:spPr>
           <a:xfrm>
-            <a:off x="2679192" y="2651760"/>
-            <a:ext cx="2377440" cy="1463040"/>
+            <a:off x="2743200" y="2651760"/>
+            <a:ext cx="2304288" cy="1463040"/>
           </a:xfrm>
           <a:prstGeom prst="chevron">
             <a:avLst/>
@@ -6960,8 +7326,8 @@
         </p:nvSpPr>
         <p:spPr>
           <a:xfrm>
-            <a:off x="2999232" y="2651760"/>
-            <a:ext cx="1856232" cy="1463040"/>
+            <a:off x="3063240" y="2651760"/>
+            <a:ext cx="1783080" cy="1463040"/>
           </a:xfrm>
           <a:prstGeom prst="rect">
             <a:avLst/>
@@ -7001,8 +7367,8 @@
         </p:nvSpPr>
         <p:spPr>
           <a:xfrm>
-            <a:off x="4946904" y="2651760"/>
-            <a:ext cx="2377440" cy="1463040"/>
+            <a:off x="4937760" y="2651760"/>
+            <a:ext cx="2304288" cy="1463040"/>
           </a:xfrm>
           <a:prstGeom prst="chevron">
             <a:avLst/>
@@ -7026,8 +7392,8 @@
         </p:nvSpPr>
         <p:spPr>
           <a:xfrm>
-            <a:off x="5266944" y="2651760"/>
-            <a:ext cx="1856232" cy="1463040"/>
+            <a:off x="5257800" y="2651760"/>
+            <a:ext cx="1783080" cy="1463040"/>
           </a:xfrm>
           <a:prstGeom prst="rect">
             <a:avLst/>
@@ -7067,8 +7433,8 @@
         </p:nvSpPr>
         <p:spPr>
           <a:xfrm>
-            <a:off x="7214616" y="2651760"/>
-            <a:ext cx="2377440" cy="1463040"/>
+            <a:off x="7132320" y="2651760"/>
+            <a:ext cx="2304288" cy="1463040"/>
           </a:xfrm>
           <a:prstGeom prst="chevron">
             <a:avLst/>
@@ -7092,8 +7458,8 @@
         </p:nvSpPr>
         <p:spPr>
           <a:xfrm>
-            <a:off x="7534656" y="2651760"/>
-            <a:ext cx="1856232" cy="1463040"/>
+            <a:off x="7452360" y="2651760"/>
+            <a:ext cx="1783080" cy="1463040"/>
           </a:xfrm>
           <a:prstGeom prst="rect">
             <a:avLst/>
@@ -7133,8 +7499,8 @@
         </p:nvSpPr>
         <p:spPr>
           <a:xfrm>
-            <a:off x="9482328" y="2651760"/>
-            <a:ext cx="2377440" cy="1463040"/>
+            <a:off x="9326880" y="2651760"/>
+            <a:ext cx="2304288" cy="1463040"/>
           </a:xfrm>
           <a:prstGeom prst="chevron">
             <a:avLst/>
@@ -7158,8 +7524,8 @@
         </p:nvSpPr>
         <p:spPr>
           <a:xfrm>
-            <a:off x="9802368" y="2651760"/>
-            <a:ext cx="1856232" cy="1463040"/>
+            <a:off x="9646920" y="2651760"/>
+            <a:ext cx="1783080" cy="1463040"/>
           </a:xfrm>
           <a:prstGeom prst="rect">
             <a:avLst/>
@@ -7188,6 +7554,54 @@
               <a:t>clientes informados se o impacto for relevante</a:t>
             </a:r>
             <a:endParaRPr lang="en-US" sz="1200" dirty="0"/>
+          </a:p>
+        </p:txBody>
+      </p:sp>
+      <p:sp>
+        <p:nvSpPr>
+          <p:cNvPr id="25" name="Slide Number Placeholder 0"/>
+          <p:cNvSpPr>
+            <a:spLocks noGrp="1"/>
+          </p:cNvSpPr>
+          <p:nvPr>
+            <p:ph type="sldNum" sz="quarter" idx="4294967295"/>
+          </p:nvPr>
+        </p:nvSpPr>
+        <p:spPr>
+          <a:xfrm>
+            <a:off x="11292840" y="6556248"/>
+            <a:ext cx="548640" cy="256032"/>
+          </a:xfrm>
+          <a:prstGeom prst="rect">
+            <a:avLst/>
+          </a:prstGeom>
+          <a:extLst>
+            <a:ext uri="{C572A759-6A51-4108-AA02-DFA0A04FC94B}">
+              <ma14:wrappingTextBoxFlag xmlns:ma14="http://schemas.microsoft.com/office/mac/drawingml/2011/main" val="0"/>
+            </a:ext>
+          </a:extLst>
+        </p:spPr>
+        <p:txBody>
+          <a:bodyPr/>
+          <a:lstStyle>
+            <a:lvl1pPr>
+              <a:defRPr sz="900">
+                <a:solidFill>
+                  <a:srgbClr val="1B3A6B"/>
+                </a:solidFill>
+                <a:latin typeface="Arial"/>
+                <a:ea typeface="Arial"/>
+                <a:cs typeface="Arial"/>
+              </a:defRPr>
+            </a:lvl1pPr>
+          </a:lstStyle>
+          <a:p>
+            <a:pPr algn="r"/>
+            <a:fld id="{F7021451-1387-4CA6-816F-3879F97B5CBC}" type="slidenum">
+              <a:rPr b="1" lang="en-US"/>
+              <a:t>15</a:t>
+            </a:fld>
+            <a:endParaRPr lang="en-US"/>
           </a:p>
         </p:txBody>
       </p:sp>
@@ -7264,7 +7678,7 @@
         </p:blipFill>
         <p:spPr>
           <a:xfrm>
-            <a:off x="411480" y="6547104"/>
+            <a:off x="548640" y="6547104"/>
             <a:ext cx="274320" cy="274320"/>
           </a:xfrm>
           <a:prstGeom prst="rect">
@@ -7280,7 +7694,7 @@
         </p:nvSpPr>
         <p:spPr>
           <a:xfrm>
-            <a:off x="749808" y="6528816"/>
+            <a:off x="886968" y="6528816"/>
             <a:ext cx="6400800" cy="310896"/>
           </a:xfrm>
           <a:prstGeom prst="rect">
@@ -7320,7 +7734,7 @@
         <p:spPr>
           <a:xfrm>
             <a:off x="7132320" y="6528816"/>
-            <a:ext cx="4663440" cy="310896"/>
+            <a:ext cx="4023360" cy="310896"/>
           </a:xfrm>
           <a:prstGeom prst="rect">
             <a:avLst/>
@@ -7358,7 +7772,7 @@
         </p:nvSpPr>
         <p:spPr>
           <a:xfrm>
-            <a:off x="411480" y="384048"/>
+            <a:off x="548640" y="384048"/>
             <a:ext cx="82296" cy="658368"/>
           </a:xfrm>
           <a:prstGeom prst="rect">
@@ -7378,7 +7792,7 @@
         </p:nvSpPr>
         <p:spPr>
           <a:xfrm>
-            <a:off x="640080" y="292608"/>
+            <a:off x="777240" y="292608"/>
             <a:ext cx="10972800" cy="274320"/>
           </a:xfrm>
           <a:prstGeom prst="rect">
@@ -7417,8 +7831,8 @@
         </p:nvSpPr>
         <p:spPr>
           <a:xfrm>
-            <a:off x="640080" y="530352"/>
-            <a:ext cx="11155680" cy="566928"/>
+            <a:off x="777240" y="530352"/>
+            <a:ext cx="10881360" cy="566928"/>
           </a:xfrm>
           <a:prstGeom prst="rect">
             <a:avLst/>
@@ -7492,6 +7906,54 @@
               <a:t>Ocupação &gt; 95% em todas as usinas + fila de espera = hora da próxima usina (comece o M4 de novo 3–6 meses antes)</a:t>
             </a:r>
             <a:endParaRPr lang="en-US" sz="2000" dirty="0"/>
+          </a:p>
+        </p:txBody>
+      </p:sp>
+      <p:sp>
+        <p:nvSpPr>
+          <p:cNvPr id="25" name="Slide Number Placeholder 0"/>
+          <p:cNvSpPr>
+            <a:spLocks noGrp="1"/>
+          </p:cNvSpPr>
+          <p:nvPr>
+            <p:ph type="sldNum" sz="quarter" idx="4294967295"/>
+          </p:nvPr>
+        </p:nvSpPr>
+        <p:spPr>
+          <a:xfrm>
+            <a:off x="11292840" y="6556248"/>
+            <a:ext cx="548640" cy="256032"/>
+          </a:xfrm>
+          <a:prstGeom prst="rect">
+            <a:avLst/>
+          </a:prstGeom>
+          <a:extLst>
+            <a:ext uri="{C572A759-6A51-4108-AA02-DFA0A04FC94B}">
+              <ma14:wrappingTextBoxFlag xmlns:ma14="http://schemas.microsoft.com/office/mac/drawingml/2011/main" val="0"/>
+            </a:ext>
+          </a:extLst>
+        </p:spPr>
+        <p:txBody>
+          <a:bodyPr/>
+          <a:lstStyle>
+            <a:lvl1pPr>
+              <a:defRPr sz="900">
+                <a:solidFill>
+                  <a:srgbClr val="1B3A6B"/>
+                </a:solidFill>
+                <a:latin typeface="Arial"/>
+                <a:ea typeface="Arial"/>
+                <a:cs typeface="Arial"/>
+              </a:defRPr>
+            </a:lvl1pPr>
+          </a:lstStyle>
+          <a:p>
+            <a:pPr algn="r"/>
+            <a:fld id="{F7021451-1387-4CA6-816F-3879F97B5CBC}" type="slidenum">
+              <a:rPr b="1" lang="en-US"/>
+              <a:t>16</a:t>
+            </a:fld>
+            <a:endParaRPr lang="en-US"/>
           </a:p>
         </p:txBody>
       </p:sp>
@@ -7568,7 +8030,7 @@
         </p:blipFill>
         <p:spPr>
           <a:xfrm>
-            <a:off x="411480" y="6547104"/>
+            <a:off x="548640" y="6547104"/>
             <a:ext cx="274320" cy="274320"/>
           </a:xfrm>
           <a:prstGeom prst="rect">
@@ -7584,7 +8046,7 @@
         </p:nvSpPr>
         <p:spPr>
           <a:xfrm>
-            <a:off x="749808" y="6528816"/>
+            <a:off x="886968" y="6528816"/>
             <a:ext cx="6400800" cy="310896"/>
           </a:xfrm>
           <a:prstGeom prst="rect">
@@ -7624,7 +8086,7 @@
         <p:spPr>
           <a:xfrm>
             <a:off x="7132320" y="6528816"/>
-            <a:ext cx="4663440" cy="310896"/>
+            <a:ext cx="4023360" cy="310896"/>
           </a:xfrm>
           <a:prstGeom prst="rect">
             <a:avLst/>
@@ -7662,7 +8124,7 @@
         </p:nvSpPr>
         <p:spPr>
           <a:xfrm>
-            <a:off x="411480" y="384048"/>
+            <a:off x="548640" y="384048"/>
             <a:ext cx="82296" cy="658368"/>
           </a:xfrm>
           <a:prstGeom prst="rect">
@@ -7682,7 +8144,7 @@
         </p:nvSpPr>
         <p:spPr>
           <a:xfrm>
-            <a:off x="640080" y="292608"/>
+            <a:off x="777240" y="292608"/>
             <a:ext cx="10972800" cy="274320"/>
           </a:xfrm>
           <a:prstGeom prst="rect">
@@ -7721,8 +8183,8 @@
         </p:nvSpPr>
         <p:spPr>
           <a:xfrm>
-            <a:off x="640080" y="530352"/>
-            <a:ext cx="11155680" cy="566928"/>
+            <a:off x="777240" y="530352"/>
+            <a:ext cx="10881360" cy="566928"/>
           </a:xfrm>
           <a:prstGeom prst="rect">
             <a:avLst/>
@@ -7762,8 +8224,8 @@
         </p:nvSpPr>
         <p:spPr>
           <a:xfrm>
-            <a:off x="411480" y="1325880"/>
-            <a:ext cx="5577840" cy="2331720"/>
+            <a:off x="548640" y="1325880"/>
+            <a:ext cx="5431536" cy="2331720"/>
           </a:xfrm>
           <a:prstGeom prst="roundRect">
             <a:avLst>
@@ -7796,7 +8258,7 @@
         </p:nvSpPr>
         <p:spPr>
           <a:xfrm>
-            <a:off x="594360" y="1508760"/>
+            <a:off x="731520" y="1508760"/>
             <a:ext cx="457200" cy="457200"/>
           </a:xfrm>
           <a:prstGeom prst="ellipse">
@@ -7816,7 +8278,7 @@
         </p:nvSpPr>
         <p:spPr>
           <a:xfrm>
-            <a:off x="594360" y="1508760"/>
+            <a:off x="731520" y="1508760"/>
             <a:ext cx="457200" cy="457200"/>
           </a:xfrm>
           <a:prstGeom prst="rect">
@@ -7855,8 +8317,8 @@
         </p:nvSpPr>
         <p:spPr>
           <a:xfrm>
-            <a:off x="1188720" y="1435608"/>
-            <a:ext cx="4663440" cy="2112264"/>
+            <a:off x="1325880" y="1435608"/>
+            <a:ext cx="4517136" cy="2112264"/>
           </a:xfrm>
           <a:prstGeom prst="rect">
             <a:avLst/>
@@ -7896,8 +8358,8 @@
         </p:nvSpPr>
         <p:spPr>
           <a:xfrm>
-            <a:off x="6217920" y="1325880"/>
-            <a:ext cx="5577840" cy="2331720"/>
+            <a:off x="6208776" y="1325880"/>
+            <a:ext cx="5431536" cy="2331720"/>
           </a:xfrm>
           <a:prstGeom prst="roundRect">
             <a:avLst>
@@ -7930,7 +8392,7 @@
         </p:nvSpPr>
         <p:spPr>
           <a:xfrm>
-            <a:off x="6400800" y="1508760"/>
+            <a:off x="6391656" y="1508760"/>
             <a:ext cx="457200" cy="457200"/>
           </a:xfrm>
           <a:prstGeom prst="ellipse">
@@ -7950,7 +8412,7 @@
         </p:nvSpPr>
         <p:spPr>
           <a:xfrm>
-            <a:off x="6400800" y="1508760"/>
+            <a:off x="6391656" y="1508760"/>
             <a:ext cx="457200" cy="457200"/>
           </a:xfrm>
           <a:prstGeom prst="rect">
@@ -7989,8 +8451,8 @@
         </p:nvSpPr>
         <p:spPr>
           <a:xfrm>
-            <a:off x="6995160" y="1435608"/>
-            <a:ext cx="4663440" cy="2112264"/>
+            <a:off x="6986016" y="1435608"/>
+            <a:ext cx="4517136" cy="2112264"/>
           </a:xfrm>
           <a:prstGeom prst="rect">
             <a:avLst/>
@@ -8030,8 +8492,8 @@
         </p:nvSpPr>
         <p:spPr>
           <a:xfrm>
-            <a:off x="411480" y="3886200"/>
-            <a:ext cx="5577840" cy="2331720"/>
+            <a:off x="548640" y="3886200"/>
+            <a:ext cx="5431536" cy="2331720"/>
           </a:xfrm>
           <a:prstGeom prst="roundRect">
             <a:avLst>
@@ -8064,7 +8526,7 @@
         </p:nvSpPr>
         <p:spPr>
           <a:xfrm>
-            <a:off x="594360" y="4069080"/>
+            <a:off x="731520" y="4069080"/>
             <a:ext cx="457200" cy="457200"/>
           </a:xfrm>
           <a:prstGeom prst="ellipse">
@@ -8084,7 +8546,7 @@
         </p:nvSpPr>
         <p:spPr>
           <a:xfrm>
-            <a:off x="594360" y="4069080"/>
+            <a:off x="731520" y="4069080"/>
             <a:ext cx="457200" cy="457200"/>
           </a:xfrm>
           <a:prstGeom prst="rect">
@@ -8123,8 +8585,8 @@
         </p:nvSpPr>
         <p:spPr>
           <a:xfrm>
-            <a:off x="1188720" y="3995928"/>
-            <a:ext cx="4663440" cy="2112264"/>
+            <a:off x="1325880" y="3995928"/>
+            <a:ext cx="4517136" cy="2112264"/>
           </a:xfrm>
           <a:prstGeom prst="rect">
             <a:avLst/>
@@ -8164,8 +8626,8 @@
         </p:nvSpPr>
         <p:spPr>
           <a:xfrm>
-            <a:off x="6217920" y="3886200"/>
-            <a:ext cx="5577840" cy="2331720"/>
+            <a:off x="6208776" y="3886200"/>
+            <a:ext cx="5431536" cy="2331720"/>
           </a:xfrm>
           <a:prstGeom prst="roundRect">
             <a:avLst>
@@ -8198,7 +8660,7 @@
         </p:nvSpPr>
         <p:spPr>
           <a:xfrm>
-            <a:off x="6400800" y="4069080"/>
+            <a:off x="6391656" y="4069080"/>
             <a:ext cx="457200" cy="457200"/>
           </a:xfrm>
           <a:prstGeom prst="ellipse">
@@ -8218,7 +8680,7 @@
         </p:nvSpPr>
         <p:spPr>
           <a:xfrm>
-            <a:off x="6400800" y="4069080"/>
+            <a:off x="6391656" y="4069080"/>
             <a:ext cx="457200" cy="457200"/>
           </a:xfrm>
           <a:prstGeom prst="rect">
@@ -8257,8 +8719,8 @@
         </p:nvSpPr>
         <p:spPr>
           <a:xfrm>
-            <a:off x="6995160" y="3995928"/>
-            <a:ext cx="4663440" cy="2112264"/>
+            <a:off x="6986016" y="3995928"/>
+            <a:ext cx="4517136" cy="2112264"/>
           </a:xfrm>
           <a:prstGeom prst="rect">
             <a:avLst/>
@@ -8287,6 +8749,54 @@
               <a:t>ocupação alta = próxima usina</a:t>
             </a:r>
             <a:endParaRPr lang="en-US" sz="1800" dirty="0"/>
+          </a:p>
+        </p:txBody>
+      </p:sp>
+      <p:sp>
+        <p:nvSpPr>
+          <p:cNvPr id="25" name="Slide Number Placeholder 0"/>
+          <p:cNvSpPr>
+            <a:spLocks noGrp="1"/>
+          </p:cNvSpPr>
+          <p:nvPr>
+            <p:ph type="sldNum" sz="quarter" idx="4294967295"/>
+          </p:nvPr>
+        </p:nvSpPr>
+        <p:spPr>
+          <a:xfrm>
+            <a:off x="11292840" y="6556248"/>
+            <a:ext cx="548640" cy="256032"/>
+          </a:xfrm>
+          <a:prstGeom prst="rect">
+            <a:avLst/>
+          </a:prstGeom>
+          <a:extLst>
+            <a:ext uri="{C572A759-6A51-4108-AA02-DFA0A04FC94B}">
+              <ma14:wrappingTextBoxFlag xmlns:ma14="http://schemas.microsoft.com/office/mac/drawingml/2011/main" val="0"/>
+            </a:ext>
+          </a:extLst>
+        </p:spPr>
+        <p:txBody>
+          <a:bodyPr/>
+          <a:lstStyle>
+            <a:lvl1pPr>
+              <a:defRPr sz="900">
+                <a:solidFill>
+                  <a:srgbClr val="1B3A6B"/>
+                </a:solidFill>
+                <a:latin typeface="Arial"/>
+                <a:ea typeface="Arial"/>
+                <a:cs typeface="Arial"/>
+              </a:defRPr>
+            </a:lvl1pPr>
+          </a:lstStyle>
+          <a:p>
+            <a:pPr algn="r"/>
+            <a:fld id="{F7021451-1387-4CA6-816F-3879F97B5CBC}" type="slidenum">
+              <a:rPr b="1" lang="en-US"/>
+              <a:t>17</a:t>
+            </a:fld>
+            <a:endParaRPr lang="en-US"/>
           </a:p>
         </p:txBody>
       </p:sp>
@@ -8350,6 +8860,45 @@
         </p:nvSpPr>
         <p:spPr>
           <a:xfrm>
+            <a:off x="457200" y="548640"/>
+            <a:ext cx="3474720" cy="1737360"/>
+          </a:xfrm>
+          <a:prstGeom prst="rect">
+            <a:avLst/>
+          </a:prstGeom>
+          <a:noFill/>
+          <a:ln/>
+        </p:spPr>
+        <p:txBody>
+          <a:bodyPr wrap="square" rtlCol="0" anchor="ctr"/>
+          <a:lstStyle/>
+          <a:p>
+            <a:pPr indent="0" marL="0">
+              <a:buNone/>
+            </a:pPr>
+            <a:r>
+              <a:rPr lang="en-US" sz="11000" b="1" dirty="0">
+                <a:solidFill>
+                  <a:srgbClr val="11396F"/>
+                </a:solidFill>
+                <a:latin typeface="Arial" pitchFamily="34" charset="0"/>
+                <a:ea typeface="Arial" pitchFamily="34" charset="-122"/>
+                <a:cs typeface="Arial" pitchFamily="34" charset="-120"/>
+              </a:rPr>
+              <a:t>04</a:t>
+            </a:r>
+            <a:endParaRPr lang="en-US" sz="11000" dirty="0"/>
+          </a:p>
+        </p:txBody>
+      </p:sp>
+      <p:sp>
+        <p:nvSpPr>
+          <p:cNvPr id="4" name="Text 2"/>
+          <p:cNvSpPr/>
+          <p:nvPr/>
+        </p:nvSpPr>
+        <p:spPr>
+          <a:xfrm>
             <a:off x="548640" y="2194560"/>
             <a:ext cx="3291840" cy="548640"/>
           </a:xfrm>
@@ -8383,7 +8932,46 @@
       </p:sp>
       <p:sp>
         <p:nvSpPr>
-          <p:cNvPr id="4" name="Text 2"/>
+          <p:cNvPr id="5" name="Text 3"/>
+          <p:cNvSpPr/>
+          <p:nvPr/>
+        </p:nvSpPr>
+        <p:spPr>
+          <a:xfrm>
+            <a:off x="548640" y="3200400"/>
+            <a:ext cx="3383280" cy="457200"/>
+          </a:xfrm>
+          <a:prstGeom prst="rect">
+            <a:avLst/>
+          </a:prstGeom>
+          <a:noFill/>
+          <a:ln/>
+        </p:spPr>
+        <p:txBody>
+          <a:bodyPr wrap="square" rtlCol="0" anchor="ctr"/>
+          <a:lstStyle/>
+          <a:p>
+            <a:pPr indent="0" marL="0">
+              <a:buNone/>
+            </a:pPr>
+            <a:r>
+              <a:rPr lang="en-US" sz="1100" dirty="0">
+                <a:solidFill>
+                  <a:srgbClr val="C7D2E3"/>
+                </a:solidFill>
+                <a:latin typeface="Arial" pitchFamily="34" charset="0"/>
+                <a:ea typeface="Arial" pitchFamily="34" charset="-122"/>
+                <a:cs typeface="Arial" pitchFamily="34" charset="-120"/>
+              </a:rPr>
+              <a:t>M9 · Etapa 3 · Operação ponta a ponta</a:t>
+            </a:r>
+            <a:endParaRPr lang="en-US" sz="1100" dirty="0"/>
+          </a:p>
+        </p:txBody>
+      </p:sp>
+      <p:sp>
+        <p:nvSpPr>
+          <p:cNvPr id="6" name="Text 4"/>
           <p:cNvSpPr/>
           <p:nvPr/>
         </p:nvSpPr>
@@ -8422,7 +9010,7 @@
       </p:sp>
       <p:pic>
         <p:nvPicPr>
-          <p:cNvPr id="5" name="Image 0" descr="/www/wwwroot/rexar/gdsolar/docs/curso/slides/assets/logo-gdsolar.png">    </p:cNvPr>
+          <p:cNvPr id="7" name="Image 0" descr="/www/wwwroot/rexar/gdsolar/docs/curso/slides/assets/logo-gdsolar.png">    </p:cNvPr>
           <p:cNvPicPr>
             <a:picLocks noChangeAspect="1"/>
           </p:cNvPicPr>
@@ -8446,7 +9034,7 @@
       </p:pic>
       <p:sp>
         <p:nvSpPr>
-          <p:cNvPr id="6" name="Text 3"/>
+          <p:cNvPr id="8" name="Text 5"/>
           <p:cNvSpPr/>
           <p:nvPr/>
         </p:nvSpPr>
@@ -8487,7 +9075,7 @@
       </p:sp>
       <p:sp>
         <p:nvSpPr>
-          <p:cNvPr id="7" name="Text 4"/>
+          <p:cNvPr id="9" name="Text 6"/>
           <p:cNvSpPr/>
           <p:nvPr/>
         </p:nvSpPr>
@@ -8528,7 +9116,7 @@
       </p:sp>
       <p:sp>
         <p:nvSpPr>
-          <p:cNvPr id="8" name="Text 5"/>
+          <p:cNvPr id="10" name="Text 7"/>
           <p:cNvSpPr/>
           <p:nvPr/>
         </p:nvSpPr>
@@ -8707,7 +9295,7 @@
         </p:blipFill>
         <p:spPr>
           <a:xfrm>
-            <a:off x="411480" y="6547104"/>
+            <a:off x="548640" y="6547104"/>
             <a:ext cx="274320" cy="274320"/>
           </a:xfrm>
           <a:prstGeom prst="rect">
@@ -8723,7 +9311,7 @@
         </p:nvSpPr>
         <p:spPr>
           <a:xfrm>
-            <a:off x="749808" y="6528816"/>
+            <a:off x="886968" y="6528816"/>
             <a:ext cx="6400800" cy="310896"/>
           </a:xfrm>
           <a:prstGeom prst="rect">
@@ -8763,7 +9351,7 @@
         <p:spPr>
           <a:xfrm>
             <a:off x="7132320" y="6528816"/>
-            <a:ext cx="4663440" cy="310896"/>
+            <a:ext cx="4023360" cy="310896"/>
           </a:xfrm>
           <a:prstGeom prst="rect">
             <a:avLst/>
@@ -8801,7 +9389,7 @@
         </p:nvSpPr>
         <p:spPr>
           <a:xfrm>
-            <a:off x="411480" y="384048"/>
+            <a:off x="548640" y="384048"/>
             <a:ext cx="82296" cy="658368"/>
           </a:xfrm>
           <a:prstGeom prst="rect">
@@ -8821,7 +9409,7 @@
         </p:nvSpPr>
         <p:spPr>
           <a:xfrm>
-            <a:off x="640080" y="292608"/>
+            <a:off x="777240" y="292608"/>
             <a:ext cx="10972800" cy="274320"/>
           </a:xfrm>
           <a:prstGeom prst="rect">
@@ -8860,8 +9448,8 @@
         </p:nvSpPr>
         <p:spPr>
           <a:xfrm>
-            <a:off x="640080" y="530352"/>
-            <a:ext cx="11155680" cy="566928"/>
+            <a:off x="777240" y="530352"/>
+            <a:ext cx="10881360" cy="566928"/>
           </a:xfrm>
           <a:prstGeom prst="rect">
             <a:avLst/>
@@ -8901,8 +9489,8 @@
         </p:nvSpPr>
         <p:spPr>
           <a:xfrm>
-            <a:off x="411480" y="1325880"/>
-            <a:ext cx="3642360" cy="2331720"/>
+            <a:off x="548640" y="1325880"/>
+            <a:ext cx="3544824" cy="2331720"/>
           </a:xfrm>
           <a:prstGeom prst="roundRect">
             <a:avLst>
@@ -8935,7 +9523,7 @@
         </p:nvSpPr>
         <p:spPr>
           <a:xfrm>
-            <a:off x="594360" y="1508760"/>
+            <a:off x="731520" y="1508760"/>
             <a:ext cx="457200" cy="457200"/>
           </a:xfrm>
           <a:prstGeom prst="ellipse">
@@ -8955,7 +9543,7 @@
         </p:nvSpPr>
         <p:spPr>
           <a:xfrm>
-            <a:off x="594360" y="1508760"/>
+            <a:off x="731520" y="1508760"/>
             <a:ext cx="457200" cy="457200"/>
           </a:xfrm>
           <a:prstGeom prst="rect">
@@ -8994,8 +9582,8 @@
         </p:nvSpPr>
         <p:spPr>
           <a:xfrm>
-            <a:off x="1188720" y="1435608"/>
-            <a:ext cx="2727960" cy="2112264"/>
+            <a:off x="1325880" y="1435608"/>
+            <a:ext cx="2630424" cy="2112264"/>
           </a:xfrm>
           <a:prstGeom prst="rect">
             <a:avLst/>
@@ -9035,8 +9623,8 @@
         </p:nvSpPr>
         <p:spPr>
           <a:xfrm>
-            <a:off x="4282440" y="1325880"/>
-            <a:ext cx="3642360" cy="2331720"/>
+            <a:off x="4322064" y="1325880"/>
+            <a:ext cx="3544824" cy="2331720"/>
           </a:xfrm>
           <a:prstGeom prst="roundRect">
             <a:avLst>
@@ -9069,7 +9657,7 @@
         </p:nvSpPr>
         <p:spPr>
           <a:xfrm>
-            <a:off x="4465320" y="1508760"/>
+            <a:off x="4504944" y="1508760"/>
             <a:ext cx="457200" cy="457200"/>
           </a:xfrm>
           <a:prstGeom prst="ellipse">
@@ -9089,7 +9677,7 @@
         </p:nvSpPr>
         <p:spPr>
           <a:xfrm>
-            <a:off x="4465320" y="1508760"/>
+            <a:off x="4504944" y="1508760"/>
             <a:ext cx="457200" cy="457200"/>
           </a:xfrm>
           <a:prstGeom prst="rect">
@@ -9128,8 +9716,8 @@
         </p:nvSpPr>
         <p:spPr>
           <a:xfrm>
-            <a:off x="5059680" y="1435608"/>
-            <a:ext cx="2727960" cy="2112264"/>
+            <a:off x="5099304" y="1435608"/>
+            <a:ext cx="2630424" cy="2112264"/>
           </a:xfrm>
           <a:prstGeom prst="rect">
             <a:avLst/>
@@ -9169,8 +9757,8 @@
         </p:nvSpPr>
         <p:spPr>
           <a:xfrm>
-            <a:off x="8153400" y="1325880"/>
-            <a:ext cx="3642360" cy="2331720"/>
+            <a:off x="8095488" y="1325880"/>
+            <a:ext cx="3544824" cy="2331720"/>
           </a:xfrm>
           <a:prstGeom prst="roundRect">
             <a:avLst>
@@ -9203,7 +9791,7 @@
         </p:nvSpPr>
         <p:spPr>
           <a:xfrm>
-            <a:off x="8336280" y="1508760"/>
+            <a:off x="8278368" y="1508760"/>
             <a:ext cx="457200" cy="457200"/>
           </a:xfrm>
           <a:prstGeom prst="ellipse">
@@ -9223,7 +9811,7 @@
         </p:nvSpPr>
         <p:spPr>
           <a:xfrm>
-            <a:off x="8336280" y="1508760"/>
+            <a:off x="8278368" y="1508760"/>
             <a:ext cx="457200" cy="457200"/>
           </a:xfrm>
           <a:prstGeom prst="rect">
@@ -9262,8 +9850,8 @@
         </p:nvSpPr>
         <p:spPr>
           <a:xfrm>
-            <a:off x="8930640" y="1435608"/>
-            <a:ext cx="2727960" cy="2112264"/>
+            <a:off x="8872728" y="1435608"/>
+            <a:ext cx="2630424" cy="2112264"/>
           </a:xfrm>
           <a:prstGeom prst="rect">
             <a:avLst/>
@@ -9303,8 +9891,8 @@
         </p:nvSpPr>
         <p:spPr>
           <a:xfrm>
-            <a:off x="411480" y="3886200"/>
-            <a:ext cx="3642360" cy="2331720"/>
+            <a:off x="548640" y="3886200"/>
+            <a:ext cx="3544824" cy="2331720"/>
           </a:xfrm>
           <a:prstGeom prst="roundRect">
             <a:avLst>
@@ -9337,7 +9925,7 @@
         </p:nvSpPr>
         <p:spPr>
           <a:xfrm>
-            <a:off x="594360" y="4069080"/>
+            <a:off x="731520" y="4069080"/>
             <a:ext cx="457200" cy="457200"/>
           </a:xfrm>
           <a:prstGeom prst="ellipse">
@@ -9357,7 +9945,7 @@
         </p:nvSpPr>
         <p:spPr>
           <a:xfrm>
-            <a:off x="594360" y="4069080"/>
+            <a:off x="731520" y="4069080"/>
             <a:ext cx="457200" cy="457200"/>
           </a:xfrm>
           <a:prstGeom prst="rect">
@@ -9396,8 +9984,8 @@
         </p:nvSpPr>
         <p:spPr>
           <a:xfrm>
-            <a:off x="1188720" y="3995928"/>
-            <a:ext cx="2727960" cy="2112264"/>
+            <a:off x="1325880" y="3995928"/>
+            <a:ext cx="2630424" cy="2112264"/>
           </a:xfrm>
           <a:prstGeom prst="rect">
             <a:avLst/>
@@ -9437,8 +10025,8 @@
         </p:nvSpPr>
         <p:spPr>
           <a:xfrm>
-            <a:off x="4282440" y="3886200"/>
-            <a:ext cx="3642360" cy="2331720"/>
+            <a:off x="4322064" y="3886200"/>
+            <a:ext cx="3544824" cy="2331720"/>
           </a:xfrm>
           <a:prstGeom prst="roundRect">
             <a:avLst>
@@ -9471,7 +10059,7 @@
         </p:nvSpPr>
         <p:spPr>
           <a:xfrm>
-            <a:off x="4465320" y="4069080"/>
+            <a:off x="4504944" y="4069080"/>
             <a:ext cx="457200" cy="457200"/>
           </a:xfrm>
           <a:prstGeom prst="ellipse">
@@ -9491,7 +10079,7 @@
         </p:nvSpPr>
         <p:spPr>
           <a:xfrm>
-            <a:off x="4465320" y="4069080"/>
+            <a:off x="4504944" y="4069080"/>
             <a:ext cx="457200" cy="457200"/>
           </a:xfrm>
           <a:prstGeom prst="rect">
@@ -9530,8 +10118,8 @@
         </p:nvSpPr>
         <p:spPr>
           <a:xfrm>
-            <a:off x="5059680" y="3995928"/>
-            <a:ext cx="2727960" cy="2112264"/>
+            <a:off x="5099304" y="3995928"/>
+            <a:ext cx="2630424" cy="2112264"/>
           </a:xfrm>
           <a:prstGeom prst="rect">
             <a:avLst/>
@@ -9571,8 +10159,8 @@
         </p:nvSpPr>
         <p:spPr>
           <a:xfrm>
-            <a:off x="8153400" y="3886200"/>
-            <a:ext cx="3642360" cy="2331720"/>
+            <a:off x="8095488" y="3886200"/>
+            <a:ext cx="3544824" cy="2331720"/>
           </a:xfrm>
           <a:prstGeom prst="roundRect">
             <a:avLst>
@@ -9605,7 +10193,7 @@
         </p:nvSpPr>
         <p:spPr>
           <a:xfrm>
-            <a:off x="8336280" y="4069080"/>
+            <a:off x="8278368" y="4069080"/>
             <a:ext cx="457200" cy="457200"/>
           </a:xfrm>
           <a:prstGeom prst="ellipse">
@@ -9625,7 +10213,7 @@
         </p:nvSpPr>
         <p:spPr>
           <a:xfrm>
-            <a:off x="8336280" y="4069080"/>
+            <a:off x="8278368" y="4069080"/>
             <a:ext cx="457200" cy="457200"/>
           </a:xfrm>
           <a:prstGeom prst="rect">
@@ -9664,8 +10252,8 @@
         </p:nvSpPr>
         <p:spPr>
           <a:xfrm>
-            <a:off x="8930640" y="3995928"/>
-            <a:ext cx="2727960" cy="2112264"/>
+            <a:off x="8872728" y="3995928"/>
+            <a:ext cx="2630424" cy="2112264"/>
           </a:xfrm>
           <a:prstGeom prst="rect">
             <a:avLst/>
@@ -9694,6 +10282,54 @@
               <a:t>'Quero cancelar'</a:t>
             </a:r>
             <a:endParaRPr lang="en-US" sz="1800" dirty="0"/>
+          </a:p>
+        </p:txBody>
+      </p:sp>
+      <p:sp>
+        <p:nvSpPr>
+          <p:cNvPr id="25" name="Slide Number Placeholder 0"/>
+          <p:cNvSpPr>
+            <a:spLocks noGrp="1"/>
+          </p:cNvSpPr>
+          <p:nvPr>
+            <p:ph type="sldNum" sz="quarter" idx="4294967295"/>
+          </p:nvPr>
+        </p:nvSpPr>
+        <p:spPr>
+          <a:xfrm>
+            <a:off x="11292840" y="6556248"/>
+            <a:ext cx="548640" cy="256032"/>
+          </a:xfrm>
+          <a:prstGeom prst="rect">
+            <a:avLst/>
+          </a:prstGeom>
+          <a:extLst>
+            <a:ext uri="{C572A759-6A51-4108-AA02-DFA0A04FC94B}">
+              <ma14:wrappingTextBoxFlag xmlns:ma14="http://schemas.microsoft.com/office/mac/drawingml/2011/main" val="0"/>
+            </a:ext>
+          </a:extLst>
+        </p:spPr>
+        <p:txBody>
+          <a:bodyPr/>
+          <a:lstStyle>
+            <a:lvl1pPr>
+              <a:defRPr sz="900">
+                <a:solidFill>
+                  <a:srgbClr val="1B3A6B"/>
+                </a:solidFill>
+                <a:latin typeface="Arial"/>
+                <a:ea typeface="Arial"/>
+                <a:cs typeface="Arial"/>
+              </a:defRPr>
+            </a:lvl1pPr>
+          </a:lstStyle>
+          <a:p>
+            <a:pPr algn="r"/>
+            <a:fld id="{F7021451-1387-4CA6-816F-3879F97B5CBC}" type="slidenum">
+              <a:rPr b="1" lang="en-US"/>
+              <a:t>19</a:t>
+            </a:fld>
+            <a:endParaRPr lang="en-US"/>
           </a:p>
         </p:txBody>
       </p:sp>
@@ -9757,6 +10393,45 @@
         </p:nvSpPr>
         <p:spPr>
           <a:xfrm>
+            <a:off x="457200" y="548640"/>
+            <a:ext cx="3474720" cy="1737360"/>
+          </a:xfrm>
+          <a:prstGeom prst="rect">
+            <a:avLst/>
+          </a:prstGeom>
+          <a:noFill/>
+          <a:ln/>
+        </p:spPr>
+        <p:txBody>
+          <a:bodyPr wrap="square" rtlCol="0" anchor="ctr"/>
+          <a:lstStyle/>
+          <a:p>
+            <a:pPr indent="0" marL="0">
+              <a:buNone/>
+            </a:pPr>
+            <a:r>
+              <a:rPr lang="en-US" sz="11000" b="1" dirty="0">
+                <a:solidFill>
+                  <a:srgbClr val="11396F"/>
+                </a:solidFill>
+                <a:latin typeface="Arial" pitchFamily="34" charset="0"/>
+                <a:ea typeface="Arial" pitchFamily="34" charset="-122"/>
+                <a:cs typeface="Arial" pitchFamily="34" charset="-120"/>
+              </a:rPr>
+              <a:t>01</a:t>
+            </a:r>
+            <a:endParaRPr lang="en-US" sz="11000" dirty="0"/>
+          </a:p>
+        </p:txBody>
+      </p:sp>
+      <p:sp>
+        <p:nvSpPr>
+          <p:cNvPr id="4" name="Text 2"/>
+          <p:cNvSpPr/>
+          <p:nvPr/>
+        </p:nvSpPr>
+        <p:spPr>
+          <a:xfrm>
             <a:off x="548640" y="2194560"/>
             <a:ext cx="3291840" cy="548640"/>
           </a:xfrm>
@@ -9790,7 +10465,46 @@
       </p:sp>
       <p:sp>
         <p:nvSpPr>
-          <p:cNvPr id="4" name="Text 2"/>
+          <p:cNvPr id="5" name="Text 3"/>
+          <p:cNvSpPr/>
+          <p:nvPr/>
+        </p:nvSpPr>
+        <p:spPr>
+          <a:xfrm>
+            <a:off x="548640" y="3200400"/>
+            <a:ext cx="3383280" cy="457200"/>
+          </a:xfrm>
+          <a:prstGeom prst="rect">
+            <a:avLst/>
+          </a:prstGeom>
+          <a:noFill/>
+          <a:ln/>
+        </p:spPr>
+        <p:txBody>
+          <a:bodyPr wrap="square" rtlCol="0" anchor="ctr"/>
+          <a:lstStyle/>
+          <a:p>
+            <a:pPr indent="0" marL="0">
+              <a:buNone/>
+            </a:pPr>
+            <a:r>
+              <a:rPr lang="en-US" sz="1100" dirty="0">
+                <a:solidFill>
+                  <a:srgbClr val="C7D2E3"/>
+                </a:solidFill>
+                <a:latin typeface="Arial" pitchFamily="34" charset="0"/>
+                <a:ea typeface="Arial" pitchFamily="34" charset="-122"/>
+                <a:cs typeface="Arial" pitchFamily="34" charset="-120"/>
+              </a:rPr>
+              <a:t>M9 · Etapa 3 · Operação ponta a ponta</a:t>
+            </a:r>
+            <a:endParaRPr lang="en-US" sz="1100" dirty="0"/>
+          </a:p>
+        </p:txBody>
+      </p:sp>
+      <p:sp>
+        <p:nvSpPr>
+          <p:cNvPr id="6" name="Text 4"/>
           <p:cNvSpPr/>
           <p:nvPr/>
         </p:nvSpPr>
@@ -9829,7 +10543,7 @@
       </p:sp>
       <p:pic>
         <p:nvPicPr>
-          <p:cNvPr id="5" name="Image 0" descr="/www/wwwroot/rexar/gdsolar/docs/curso/slides/assets/logo-gdsolar.png">    </p:cNvPr>
+          <p:cNvPr id="7" name="Image 0" descr="/www/wwwroot/rexar/gdsolar/docs/curso/slides/assets/logo-gdsolar.png">    </p:cNvPr>
           <p:cNvPicPr>
             <a:picLocks noChangeAspect="1"/>
           </p:cNvPicPr>
@@ -9853,7 +10567,7 @@
       </p:pic>
       <p:sp>
         <p:nvSpPr>
-          <p:cNvPr id="6" name="Text 3"/>
+          <p:cNvPr id="8" name="Text 5"/>
           <p:cNvSpPr/>
           <p:nvPr/>
         </p:nvSpPr>
@@ -9894,7 +10608,7 @@
       </p:sp>
       <p:sp>
         <p:nvSpPr>
-          <p:cNvPr id="7" name="Text 4"/>
+          <p:cNvPr id="9" name="Text 6"/>
           <p:cNvSpPr/>
           <p:nvPr/>
         </p:nvSpPr>
@@ -9935,7 +10649,7 @@
       </p:sp>
       <p:sp>
         <p:nvSpPr>
-          <p:cNvPr id="8" name="Text 5"/>
+          <p:cNvPr id="10" name="Text 7"/>
           <p:cNvSpPr/>
           <p:nvPr/>
         </p:nvSpPr>
@@ -10114,7 +10828,7 @@
         </p:blipFill>
         <p:spPr>
           <a:xfrm>
-            <a:off x="411480" y="6547104"/>
+            <a:off x="548640" y="6547104"/>
             <a:ext cx="274320" cy="274320"/>
           </a:xfrm>
           <a:prstGeom prst="rect">
@@ -10130,7 +10844,7 @@
         </p:nvSpPr>
         <p:spPr>
           <a:xfrm>
-            <a:off x="749808" y="6528816"/>
+            <a:off x="886968" y="6528816"/>
             <a:ext cx="6400800" cy="310896"/>
           </a:xfrm>
           <a:prstGeom prst="rect">
@@ -10170,7 +10884,7 @@
         <p:spPr>
           <a:xfrm>
             <a:off x="7132320" y="6528816"/>
-            <a:ext cx="4663440" cy="310896"/>
+            <a:ext cx="4023360" cy="310896"/>
           </a:xfrm>
           <a:prstGeom prst="rect">
             <a:avLst/>
@@ -10208,7 +10922,7 @@
         </p:nvSpPr>
         <p:spPr>
           <a:xfrm>
-            <a:off x="411480" y="384048"/>
+            <a:off x="548640" y="384048"/>
             <a:ext cx="82296" cy="658368"/>
           </a:xfrm>
           <a:prstGeom prst="rect">
@@ -10228,7 +10942,7 @@
         </p:nvSpPr>
         <p:spPr>
           <a:xfrm>
-            <a:off x="640080" y="292608"/>
+            <a:off x="777240" y="292608"/>
             <a:ext cx="10972800" cy="274320"/>
           </a:xfrm>
           <a:prstGeom prst="rect">
@@ -10267,8 +10981,8 @@
         </p:nvSpPr>
         <p:spPr>
           <a:xfrm>
-            <a:off x="640080" y="530352"/>
-            <a:ext cx="11155680" cy="566928"/>
+            <a:off x="777240" y="530352"/>
+            <a:ext cx="10881360" cy="566928"/>
           </a:xfrm>
           <a:prstGeom prst="rect">
             <a:avLst/>
@@ -10308,8 +11022,8 @@
         </p:nvSpPr>
         <p:spPr>
           <a:xfrm>
-            <a:off x="411480" y="1325880"/>
-            <a:ext cx="5554980" cy="4937760"/>
+            <a:off x="548640" y="1325880"/>
+            <a:ext cx="5408676" cy="4937760"/>
           </a:xfrm>
           <a:prstGeom prst="roundRect">
             <a:avLst>
@@ -10342,8 +11056,8 @@
         </p:nvSpPr>
         <p:spPr>
           <a:xfrm>
-            <a:off x="411480" y="1325880"/>
-            <a:ext cx="5554980" cy="109728"/>
+            <a:off x="548640" y="1325880"/>
+            <a:ext cx="5408676" cy="109728"/>
           </a:xfrm>
           <a:prstGeom prst="rect">
             <a:avLst/>
@@ -10362,8 +11076,8 @@
         </p:nvSpPr>
         <p:spPr>
           <a:xfrm>
-            <a:off x="685800" y="1554480"/>
-            <a:ext cx="5006340" cy="685800"/>
+            <a:off x="822960" y="1554480"/>
+            <a:ext cx="4860036" cy="685800"/>
           </a:xfrm>
           <a:prstGeom prst="rect">
             <a:avLst/>
@@ -10403,8 +11117,8 @@
         </p:nvSpPr>
         <p:spPr>
           <a:xfrm>
-            <a:off x="685800" y="2286000"/>
-            <a:ext cx="5006340" cy="3749040"/>
+            <a:off x="822960" y="2286000"/>
+            <a:ext cx="4860036" cy="3749040"/>
           </a:xfrm>
           <a:prstGeom prst="rect">
             <a:avLst/>
@@ -10425,7 +11139,7 @@
               <a:buNone/>
             </a:pPr>
             <a:r>
-              <a:rPr lang="en-US" sz="1600" dirty="0">
+              <a:rPr lang="en-US" sz="1700" dirty="0">
                 <a:solidFill>
                   <a:srgbClr val="1F2937"/>
                 </a:solidFill>
@@ -10435,7 +11149,7 @@
               </a:rPr>
               <a:t>1. Entender o motivo</a:t>
             </a:r>
-            <a:endParaRPr lang="en-US" sz="1600" dirty="0"/>
+            <a:endParaRPr lang="en-US" sz="1700" dirty="0"/>
           </a:p>
           <a:p>
             <a:pPr indent="0" marL="0">
@@ -10445,7 +11159,7 @@
               <a:buNone/>
             </a:pPr>
             <a:r>
-              <a:rPr lang="en-US" sz="1600" dirty="0">
+              <a:rPr lang="en-US" sz="1700" dirty="0">
                 <a:solidFill>
                   <a:srgbClr val="1F2937"/>
                 </a:solidFill>
@@ -10455,7 +11169,7 @@
               </a:rPr>
               <a:t>2. Mostrar a economia acumulada</a:t>
             </a:r>
-            <a:endParaRPr lang="en-US" sz="1600" dirty="0"/>
+            <a:endParaRPr lang="en-US" sz="1700" dirty="0"/>
           </a:p>
           <a:p>
             <a:pPr indent="0" marL="0">
@@ -10465,7 +11179,7 @@
               <a:buNone/>
             </a:pPr>
             <a:r>
-              <a:rPr lang="en-US" sz="1600" dirty="0">
+              <a:rPr lang="en-US" sz="1700" dirty="0">
                 <a:solidFill>
                   <a:srgbClr val="1F2937"/>
                 </a:solidFill>
@@ -10475,7 +11189,7 @@
               </a:rPr>
               <a:t>3. Resolver a causa (cota, vencimento, explicação)</a:t>
             </a:r>
-            <a:endParaRPr lang="en-US" sz="1600" dirty="0"/>
+            <a:endParaRPr lang="en-US" sz="1700" dirty="0"/>
           </a:p>
           <a:p>
             <a:pPr indent="0" marL="0">
@@ -10485,7 +11199,7 @@
               <a:buNone/>
             </a:pPr>
             <a:r>
-              <a:rPr lang="en-US" sz="1600" dirty="0">
+              <a:rPr lang="en-US" sz="1700" dirty="0">
                 <a:solidFill>
                   <a:srgbClr val="1F2937"/>
                 </a:solidFill>
@@ -10495,7 +11209,7 @@
               </a:rPr>
               <a:t>4. Se sair: sair bem (aviso prévio, rateio, última cobrança)</a:t>
             </a:r>
-            <a:endParaRPr lang="en-US" sz="1600" dirty="0"/>
+            <a:endParaRPr lang="en-US" sz="1700" dirty="0"/>
           </a:p>
         </p:txBody>
       </p:sp>
@@ -10507,8 +11221,8 @@
         </p:nvSpPr>
         <p:spPr>
           <a:xfrm>
-            <a:off x="6240780" y="1325880"/>
-            <a:ext cx="5554980" cy="4937760"/>
+            <a:off x="6231636" y="1325880"/>
+            <a:ext cx="5408676" cy="4937760"/>
           </a:xfrm>
           <a:prstGeom prst="roundRect">
             <a:avLst>
@@ -10541,8 +11255,8 @@
         </p:nvSpPr>
         <p:spPr>
           <a:xfrm>
-            <a:off x="6240780" y="1325880"/>
-            <a:ext cx="5554980" cy="109728"/>
+            <a:off x="6231636" y="1325880"/>
+            <a:ext cx="5408676" cy="109728"/>
           </a:xfrm>
           <a:prstGeom prst="rect">
             <a:avLst/>
@@ -10561,8 +11275,8 @@
         </p:nvSpPr>
         <p:spPr>
           <a:xfrm>
-            <a:off x="6515100" y="1554480"/>
-            <a:ext cx="5006340" cy="685800"/>
+            <a:off x="6505956" y="1554480"/>
+            <a:ext cx="4860036" cy="685800"/>
           </a:xfrm>
           <a:prstGeom prst="rect">
             <a:avLst/>
@@ -10602,8 +11316,8 @@
         </p:nvSpPr>
         <p:spPr>
           <a:xfrm>
-            <a:off x="6515100" y="2286000"/>
-            <a:ext cx="5006340" cy="3749040"/>
+            <a:off x="6505956" y="2286000"/>
+            <a:ext cx="4860036" cy="3749040"/>
           </a:xfrm>
           <a:prstGeom prst="rect">
             <a:avLst/>
@@ -10625,7 +11339,7 @@
               <a:buChar char="●"/>
             </a:pPr>
             <a:r>
-              <a:rPr lang="en-US" sz="1600" dirty="0">
+              <a:rPr lang="en-US" sz="1700" dirty="0">
                 <a:solidFill>
                   <a:srgbClr val="1F2937"/>
                 </a:solidFill>
@@ -10635,7 +11349,7 @@
               </a:rPr>
               <a:t>Boas-vindas explicando as duas contas</a:t>
             </a:r>
-            <a:endParaRPr lang="en-US" sz="1600" dirty="0"/>
+            <a:endParaRPr lang="en-US" sz="1700" dirty="0"/>
           </a:p>
           <a:p>
             <a:pPr marL="342900" indent="-342900">
@@ -10646,7 +11360,7 @@
               <a:buChar char="●"/>
             </a:pPr>
             <a:r>
-              <a:rPr lang="en-US" sz="1600" dirty="0">
+              <a:rPr lang="en-US" sz="1700" dirty="0">
                 <a:solidFill>
                   <a:srgbClr val="1F2937"/>
                 </a:solidFill>
@@ -10656,7 +11370,7 @@
               </a:rPr>
               <a:t>aviso quando o primeiro crédito chega</a:t>
             </a:r>
-            <a:endParaRPr lang="en-US" sz="1600" dirty="0"/>
+            <a:endParaRPr lang="en-US" sz="1700" dirty="0"/>
           </a:p>
           <a:p>
             <a:pPr marL="342900" indent="-342900">
@@ -10667,7 +11381,7 @@
               <a:buChar char="●"/>
             </a:pPr>
             <a:r>
-              <a:rPr lang="en-US" sz="1600" dirty="0">
+              <a:rPr lang="en-US" sz="1700" dirty="0">
                 <a:solidFill>
                   <a:srgbClr val="1F2937"/>
                 </a:solidFill>
@@ -10677,7 +11391,7 @@
               </a:rPr>
               <a:t>relatório de economia trimestral</a:t>
             </a:r>
-            <a:endParaRPr lang="en-US" sz="1600" dirty="0"/>
+            <a:endParaRPr lang="en-US" sz="1700" dirty="0"/>
           </a:p>
           <a:p>
             <a:pPr marL="342900" indent="-342900">
@@ -10688,7 +11402,7 @@
               <a:buChar char="●"/>
             </a:pPr>
             <a:r>
-              <a:rPr lang="en-US" sz="1600" dirty="0">
+              <a:rPr lang="en-US" sz="1700" dirty="0">
                 <a:solidFill>
                   <a:srgbClr val="1F2937"/>
                 </a:solidFill>
@@ -10698,7 +11412,55 @@
               </a:rPr>
               <a:t>programa de indicação</a:t>
             </a:r>
-            <a:endParaRPr lang="en-US" sz="1600" dirty="0"/>
+            <a:endParaRPr lang="en-US" sz="1700" dirty="0"/>
+          </a:p>
+        </p:txBody>
+      </p:sp>
+      <p:sp>
+        <p:nvSpPr>
+          <p:cNvPr id="25" name="Slide Number Placeholder 0"/>
+          <p:cNvSpPr>
+            <a:spLocks noGrp="1"/>
+          </p:cNvSpPr>
+          <p:nvPr>
+            <p:ph type="sldNum" sz="quarter" idx="4294967295"/>
+          </p:nvPr>
+        </p:nvSpPr>
+        <p:spPr>
+          <a:xfrm>
+            <a:off x="11292840" y="6556248"/>
+            <a:ext cx="548640" cy="256032"/>
+          </a:xfrm>
+          <a:prstGeom prst="rect">
+            <a:avLst/>
+          </a:prstGeom>
+          <a:extLst>
+            <a:ext uri="{C572A759-6A51-4108-AA02-DFA0A04FC94B}">
+              <ma14:wrappingTextBoxFlag xmlns:ma14="http://schemas.microsoft.com/office/mac/drawingml/2011/main" val="0"/>
+            </a:ext>
+          </a:extLst>
+        </p:spPr>
+        <p:txBody>
+          <a:bodyPr/>
+          <a:lstStyle>
+            <a:lvl1pPr>
+              <a:defRPr sz="900">
+                <a:solidFill>
+                  <a:srgbClr val="1B3A6B"/>
+                </a:solidFill>
+                <a:latin typeface="Arial"/>
+                <a:ea typeface="Arial"/>
+                <a:cs typeface="Arial"/>
+              </a:defRPr>
+            </a:lvl1pPr>
+          </a:lstStyle>
+          <a:p>
+            <a:pPr algn="r"/>
+            <a:fld id="{F7021451-1387-4CA6-816F-3879F97B5CBC}" type="slidenum">
+              <a:rPr b="1" lang="en-US"/>
+              <a:t>20</a:t>
+            </a:fld>
+            <a:endParaRPr lang="en-US"/>
           </a:p>
         </p:txBody>
       </p:sp>
@@ -10775,7 +11537,7 @@
         </p:blipFill>
         <p:spPr>
           <a:xfrm>
-            <a:off x="411480" y="6547104"/>
+            <a:off x="548640" y="6547104"/>
             <a:ext cx="274320" cy="274320"/>
           </a:xfrm>
           <a:prstGeom prst="rect">
@@ -10791,7 +11553,7 @@
         </p:nvSpPr>
         <p:spPr>
           <a:xfrm>
-            <a:off x="749808" y="6528816"/>
+            <a:off x="886968" y="6528816"/>
             <a:ext cx="6400800" cy="310896"/>
           </a:xfrm>
           <a:prstGeom prst="rect">
@@ -10831,7 +11593,7 @@
         <p:spPr>
           <a:xfrm>
             <a:off x="7132320" y="6528816"/>
-            <a:ext cx="4663440" cy="310896"/>
+            <a:ext cx="4023360" cy="310896"/>
           </a:xfrm>
           <a:prstGeom prst="rect">
             <a:avLst/>
@@ -10869,7 +11631,7 @@
         </p:nvSpPr>
         <p:spPr>
           <a:xfrm>
-            <a:off x="411480" y="384048"/>
+            <a:off x="548640" y="384048"/>
             <a:ext cx="82296" cy="658368"/>
           </a:xfrm>
           <a:prstGeom prst="rect">
@@ -10889,7 +11651,7 @@
         </p:nvSpPr>
         <p:spPr>
           <a:xfrm>
-            <a:off x="640080" y="292608"/>
+            <a:off x="777240" y="292608"/>
             <a:ext cx="10972800" cy="274320"/>
           </a:xfrm>
           <a:prstGeom prst="rect">
@@ -10928,8 +11690,8 @@
         </p:nvSpPr>
         <p:spPr>
           <a:xfrm>
-            <a:off x="640080" y="530352"/>
-            <a:ext cx="11155680" cy="566928"/>
+            <a:off x="777240" y="530352"/>
+            <a:ext cx="10881360" cy="566928"/>
           </a:xfrm>
           <a:prstGeom prst="rect">
             <a:avLst/>
@@ -10969,8 +11731,8 @@
         </p:nvSpPr>
         <p:spPr>
           <a:xfrm>
-            <a:off x="411480" y="1325880"/>
-            <a:ext cx="11384280" cy="4937760"/>
+            <a:off x="548640" y="1325880"/>
+            <a:ext cx="11091672" cy="4937760"/>
           </a:xfrm>
           <a:prstGeom prst="roundRect">
             <a:avLst>
@@ -10996,7 +11758,7 @@
         </p:nvSpPr>
         <p:spPr>
           <a:xfrm>
-            <a:off x="594360" y="1508760"/>
+            <a:off x="731520" y="1508760"/>
             <a:ext cx="822960" cy="384048"/>
           </a:xfrm>
           <a:prstGeom prst="roundRect">
@@ -11018,7 +11780,7 @@
         </p:nvSpPr>
         <p:spPr>
           <a:xfrm>
-            <a:off x="594360" y="1508760"/>
+            <a:off x="731520" y="1508760"/>
             <a:ext cx="822960" cy="384048"/>
           </a:xfrm>
           <a:prstGeom prst="rect">
@@ -11057,8 +11819,8 @@
         </p:nvSpPr>
         <p:spPr>
           <a:xfrm>
-            <a:off x="1508760" y="1463040"/>
-            <a:ext cx="10149840" cy="502920"/>
+            <a:off x="1645920" y="1463040"/>
+            <a:ext cx="9857232" cy="502920"/>
           </a:xfrm>
           <a:prstGeom prst="rect">
             <a:avLst/>
@@ -11098,8 +11860,8 @@
         </p:nvSpPr>
         <p:spPr>
           <a:xfrm>
-            <a:off x="640080" y="2057400"/>
-            <a:ext cx="10927080" cy="4069080"/>
+            <a:off x="777240" y="2057400"/>
+            <a:ext cx="10634472" cy="4069080"/>
           </a:xfrm>
           <a:prstGeom prst="rect">
             <a:avLst/>
@@ -11179,6 +11941,54 @@
               <a:t>status até fechar</a:t>
             </a:r>
             <a:endParaRPr lang="en-US" sz="1500" dirty="0"/>
+          </a:p>
+        </p:txBody>
+      </p:sp>
+      <p:sp>
+        <p:nvSpPr>
+          <p:cNvPr id="25" name="Slide Number Placeholder 0"/>
+          <p:cNvSpPr>
+            <a:spLocks noGrp="1"/>
+          </p:cNvSpPr>
+          <p:nvPr>
+            <p:ph type="sldNum" sz="quarter" idx="4294967295"/>
+          </p:nvPr>
+        </p:nvSpPr>
+        <p:spPr>
+          <a:xfrm>
+            <a:off x="11292840" y="6556248"/>
+            <a:ext cx="548640" cy="256032"/>
+          </a:xfrm>
+          <a:prstGeom prst="rect">
+            <a:avLst/>
+          </a:prstGeom>
+          <a:extLst>
+            <a:ext uri="{C572A759-6A51-4108-AA02-DFA0A04FC94B}">
+              <ma14:wrappingTextBoxFlag xmlns:ma14="http://schemas.microsoft.com/office/mac/drawingml/2011/main" val="0"/>
+            </a:ext>
+          </a:extLst>
+        </p:spPr>
+        <p:txBody>
+          <a:bodyPr/>
+          <a:lstStyle>
+            <a:lvl1pPr>
+              <a:defRPr sz="900">
+                <a:solidFill>
+                  <a:srgbClr val="1B3A6B"/>
+                </a:solidFill>
+                <a:latin typeface="Arial"/>
+                <a:ea typeface="Arial"/>
+                <a:cs typeface="Arial"/>
+              </a:defRPr>
+            </a:lvl1pPr>
+          </a:lstStyle>
+          <a:p>
+            <a:pPr algn="r"/>
+            <a:fld id="{F7021451-1387-4CA6-816F-3879F97B5CBC}" type="slidenum">
+              <a:rPr b="1" lang="en-US"/>
+              <a:t>21</a:t>
+            </a:fld>
+            <a:endParaRPr lang="en-US"/>
           </a:p>
         </p:txBody>
       </p:sp>
@@ -11255,7 +12065,7 @@
         </p:blipFill>
         <p:spPr>
           <a:xfrm>
-            <a:off x="411480" y="6547104"/>
+            <a:off x="548640" y="6547104"/>
             <a:ext cx="274320" cy="274320"/>
           </a:xfrm>
           <a:prstGeom prst="rect">
@@ -11271,7 +12081,7 @@
         </p:nvSpPr>
         <p:spPr>
           <a:xfrm>
-            <a:off x="749808" y="6528816"/>
+            <a:off x="886968" y="6528816"/>
             <a:ext cx="6400800" cy="310896"/>
           </a:xfrm>
           <a:prstGeom prst="rect">
@@ -11311,7 +12121,7 @@
         <p:spPr>
           <a:xfrm>
             <a:off x="7132320" y="6528816"/>
-            <a:ext cx="4663440" cy="310896"/>
+            <a:ext cx="4023360" cy="310896"/>
           </a:xfrm>
           <a:prstGeom prst="rect">
             <a:avLst/>
@@ -11349,7 +12159,7 @@
         </p:nvSpPr>
         <p:spPr>
           <a:xfrm>
-            <a:off x="411480" y="384048"/>
+            <a:off x="548640" y="384048"/>
             <a:ext cx="82296" cy="658368"/>
           </a:xfrm>
           <a:prstGeom prst="rect">
@@ -11369,7 +12179,7 @@
         </p:nvSpPr>
         <p:spPr>
           <a:xfrm>
-            <a:off x="640080" y="292608"/>
+            <a:off x="777240" y="292608"/>
             <a:ext cx="10972800" cy="274320"/>
           </a:xfrm>
           <a:prstGeom prst="rect">
@@ -11408,8 +12218,8 @@
         </p:nvSpPr>
         <p:spPr>
           <a:xfrm>
-            <a:off x="640080" y="530352"/>
-            <a:ext cx="11155680" cy="566928"/>
+            <a:off x="777240" y="530352"/>
+            <a:ext cx="10881360" cy="566928"/>
           </a:xfrm>
           <a:prstGeom prst="rect">
             <a:avLst/>
@@ -11449,8 +12259,8 @@
         </p:nvSpPr>
         <p:spPr>
           <a:xfrm>
-            <a:off x="411480" y="1325880"/>
-            <a:ext cx="5577840" cy="2331720"/>
+            <a:off x="548640" y="1325880"/>
+            <a:ext cx="5431536" cy="2331720"/>
           </a:xfrm>
           <a:prstGeom prst="roundRect">
             <a:avLst>
@@ -11483,7 +12293,7 @@
         </p:nvSpPr>
         <p:spPr>
           <a:xfrm>
-            <a:off x="594360" y="1508760"/>
+            <a:off x="731520" y="1508760"/>
             <a:ext cx="457200" cy="457200"/>
           </a:xfrm>
           <a:prstGeom prst="ellipse">
@@ -11503,7 +12313,7 @@
         </p:nvSpPr>
         <p:spPr>
           <a:xfrm>
-            <a:off x="594360" y="1508760"/>
+            <a:off x="731520" y="1508760"/>
             <a:ext cx="457200" cy="457200"/>
           </a:xfrm>
           <a:prstGeom prst="rect">
@@ -11542,8 +12352,8 @@
         </p:nvSpPr>
         <p:spPr>
           <a:xfrm>
-            <a:off x="1188720" y="1435608"/>
-            <a:ext cx="4663440" cy="2112264"/>
+            <a:off x="1325880" y="1435608"/>
+            <a:ext cx="4517136" cy="2112264"/>
           </a:xfrm>
           <a:prstGeom prst="rect">
             <a:avLst/>
@@ -11583,8 +12393,8 @@
         </p:nvSpPr>
         <p:spPr>
           <a:xfrm>
-            <a:off x="6217920" y="1325880"/>
-            <a:ext cx="5577840" cy="2331720"/>
+            <a:off x="6208776" y="1325880"/>
+            <a:ext cx="5431536" cy="2331720"/>
           </a:xfrm>
           <a:prstGeom prst="roundRect">
             <a:avLst>
@@ -11617,7 +12427,7 @@
         </p:nvSpPr>
         <p:spPr>
           <a:xfrm>
-            <a:off x="6400800" y="1508760"/>
+            <a:off x="6391656" y="1508760"/>
             <a:ext cx="457200" cy="457200"/>
           </a:xfrm>
           <a:prstGeom prst="ellipse">
@@ -11637,7 +12447,7 @@
         </p:nvSpPr>
         <p:spPr>
           <a:xfrm>
-            <a:off x="6400800" y="1508760"/>
+            <a:off x="6391656" y="1508760"/>
             <a:ext cx="457200" cy="457200"/>
           </a:xfrm>
           <a:prstGeom prst="rect">
@@ -11676,8 +12486,8 @@
         </p:nvSpPr>
         <p:spPr>
           <a:xfrm>
-            <a:off x="6995160" y="1435608"/>
-            <a:ext cx="4663440" cy="2112264"/>
+            <a:off x="6986016" y="1435608"/>
+            <a:ext cx="4517136" cy="2112264"/>
           </a:xfrm>
           <a:prstGeom prst="rect">
             <a:avLst/>
@@ -11717,8 +12527,8 @@
         </p:nvSpPr>
         <p:spPr>
           <a:xfrm>
-            <a:off x="411480" y="3886200"/>
-            <a:ext cx="5577840" cy="2331720"/>
+            <a:off x="548640" y="3886200"/>
+            <a:ext cx="5431536" cy="2331720"/>
           </a:xfrm>
           <a:prstGeom prst="roundRect">
             <a:avLst>
@@ -11751,7 +12561,7 @@
         </p:nvSpPr>
         <p:spPr>
           <a:xfrm>
-            <a:off x="594360" y="4069080"/>
+            <a:off x="731520" y="4069080"/>
             <a:ext cx="457200" cy="457200"/>
           </a:xfrm>
           <a:prstGeom prst="ellipse">
@@ -11771,7 +12581,7 @@
         </p:nvSpPr>
         <p:spPr>
           <a:xfrm>
-            <a:off x="594360" y="4069080"/>
+            <a:off x="731520" y="4069080"/>
             <a:ext cx="457200" cy="457200"/>
           </a:xfrm>
           <a:prstGeom prst="rect">
@@ -11810,8 +12620,8 @@
         </p:nvSpPr>
         <p:spPr>
           <a:xfrm>
-            <a:off x="1188720" y="3995928"/>
-            <a:ext cx="4663440" cy="2112264"/>
+            <a:off x="1325880" y="3995928"/>
+            <a:ext cx="4517136" cy="2112264"/>
           </a:xfrm>
           <a:prstGeom prst="rect">
             <a:avLst/>
@@ -11851,8 +12661,8 @@
         </p:nvSpPr>
         <p:spPr>
           <a:xfrm>
-            <a:off x="6217920" y="3886200"/>
-            <a:ext cx="5577840" cy="2331720"/>
+            <a:off x="6208776" y="3886200"/>
+            <a:ext cx="5431536" cy="2331720"/>
           </a:xfrm>
           <a:prstGeom prst="roundRect">
             <a:avLst>
@@ -11885,7 +12695,7 @@
         </p:nvSpPr>
         <p:spPr>
           <a:xfrm>
-            <a:off x="6400800" y="4069080"/>
+            <a:off x="6391656" y="4069080"/>
             <a:ext cx="457200" cy="457200"/>
           </a:xfrm>
           <a:prstGeom prst="ellipse">
@@ -11905,7 +12715,7 @@
         </p:nvSpPr>
         <p:spPr>
           <a:xfrm>
-            <a:off x="6400800" y="4069080"/>
+            <a:off x="6391656" y="4069080"/>
             <a:ext cx="457200" cy="457200"/>
           </a:xfrm>
           <a:prstGeom prst="rect">
@@ -11944,8 +12754,8 @@
         </p:nvSpPr>
         <p:spPr>
           <a:xfrm>
-            <a:off x="6995160" y="3995928"/>
-            <a:ext cx="4663440" cy="2112264"/>
+            <a:off x="6986016" y="3995928"/>
+            <a:ext cx="4517136" cy="2112264"/>
           </a:xfrm>
           <a:prstGeom prst="rect">
             <a:avLst/>
@@ -11974,6 +12784,54 @@
               <a:t>relacionamento proativo</a:t>
             </a:r>
             <a:endParaRPr lang="en-US" sz="1800" dirty="0"/>
+          </a:p>
+        </p:txBody>
+      </p:sp>
+      <p:sp>
+        <p:nvSpPr>
+          <p:cNvPr id="25" name="Slide Number Placeholder 0"/>
+          <p:cNvSpPr>
+            <a:spLocks noGrp="1"/>
+          </p:cNvSpPr>
+          <p:nvPr>
+            <p:ph type="sldNum" sz="quarter" idx="4294967295"/>
+          </p:nvPr>
+        </p:nvSpPr>
+        <p:spPr>
+          <a:xfrm>
+            <a:off x="11292840" y="6556248"/>
+            <a:ext cx="548640" cy="256032"/>
+          </a:xfrm>
+          <a:prstGeom prst="rect">
+            <a:avLst/>
+          </a:prstGeom>
+          <a:extLst>
+            <a:ext uri="{C572A759-6A51-4108-AA02-DFA0A04FC94B}">
+              <ma14:wrappingTextBoxFlag xmlns:ma14="http://schemas.microsoft.com/office/mac/drawingml/2011/main" val="0"/>
+            </a:ext>
+          </a:extLst>
+        </p:spPr>
+        <p:txBody>
+          <a:bodyPr/>
+          <a:lstStyle>
+            <a:lvl1pPr>
+              <a:defRPr sz="900">
+                <a:solidFill>
+                  <a:srgbClr val="1B3A6B"/>
+                </a:solidFill>
+                <a:latin typeface="Arial"/>
+                <a:ea typeface="Arial"/>
+                <a:cs typeface="Arial"/>
+              </a:defRPr>
+            </a:lvl1pPr>
+          </a:lstStyle>
+          <a:p>
+            <a:pPr algn="r"/>
+            <a:fld id="{F7021451-1387-4CA6-816F-3879F97B5CBC}" type="slidenum">
+              <a:rPr b="1" lang="en-US"/>
+              <a:t>22</a:t>
+            </a:fld>
+            <a:endParaRPr lang="en-US"/>
           </a:p>
         </p:txBody>
       </p:sp>
@@ -12037,6 +12895,45 @@
         </p:nvSpPr>
         <p:spPr>
           <a:xfrm>
+            <a:off x="457200" y="548640"/>
+            <a:ext cx="3474720" cy="1737360"/>
+          </a:xfrm>
+          <a:prstGeom prst="rect">
+            <a:avLst/>
+          </a:prstGeom>
+          <a:noFill/>
+          <a:ln/>
+        </p:spPr>
+        <p:txBody>
+          <a:bodyPr wrap="square" rtlCol="0" anchor="ctr"/>
+          <a:lstStyle/>
+          <a:p>
+            <a:pPr indent="0" marL="0">
+              <a:buNone/>
+            </a:pPr>
+            <a:r>
+              <a:rPr lang="en-US" sz="11000" b="1" dirty="0">
+                <a:solidFill>
+                  <a:srgbClr val="11396F"/>
+                </a:solidFill>
+                <a:latin typeface="Arial" pitchFamily="34" charset="0"/>
+                <a:ea typeface="Arial" pitchFamily="34" charset="-122"/>
+                <a:cs typeface="Arial" pitchFamily="34" charset="-120"/>
+              </a:rPr>
+              <a:t>05</a:t>
+            </a:r>
+            <a:endParaRPr lang="en-US" sz="11000" dirty="0"/>
+          </a:p>
+        </p:txBody>
+      </p:sp>
+      <p:sp>
+        <p:nvSpPr>
+          <p:cNvPr id="4" name="Text 2"/>
+          <p:cNvSpPr/>
+          <p:nvPr/>
+        </p:nvSpPr>
+        <p:spPr>
+          <a:xfrm>
             <a:off x="548640" y="2194560"/>
             <a:ext cx="3291840" cy="548640"/>
           </a:xfrm>
@@ -12070,7 +12967,46 @@
       </p:sp>
       <p:sp>
         <p:nvSpPr>
-          <p:cNvPr id="4" name="Text 2"/>
+          <p:cNvPr id="5" name="Text 3"/>
+          <p:cNvSpPr/>
+          <p:nvPr/>
+        </p:nvSpPr>
+        <p:spPr>
+          <a:xfrm>
+            <a:off x="548640" y="3200400"/>
+            <a:ext cx="3383280" cy="457200"/>
+          </a:xfrm>
+          <a:prstGeom prst="rect">
+            <a:avLst/>
+          </a:prstGeom>
+          <a:noFill/>
+          <a:ln/>
+        </p:spPr>
+        <p:txBody>
+          <a:bodyPr wrap="square" rtlCol="0" anchor="ctr"/>
+          <a:lstStyle/>
+          <a:p>
+            <a:pPr indent="0" marL="0">
+              <a:buNone/>
+            </a:pPr>
+            <a:r>
+              <a:rPr lang="en-US" sz="1100" dirty="0">
+                <a:solidFill>
+                  <a:srgbClr val="C7D2E3"/>
+                </a:solidFill>
+                <a:latin typeface="Arial" pitchFamily="34" charset="0"/>
+                <a:ea typeface="Arial" pitchFamily="34" charset="-122"/>
+                <a:cs typeface="Arial" pitchFamily="34" charset="-120"/>
+              </a:rPr>
+              <a:t>M9 · Etapa 3 · Operação ponta a ponta</a:t>
+            </a:r>
+            <a:endParaRPr lang="en-US" sz="1100" dirty="0"/>
+          </a:p>
+        </p:txBody>
+      </p:sp>
+      <p:sp>
+        <p:nvSpPr>
+          <p:cNvPr id="6" name="Text 4"/>
           <p:cNvSpPr/>
           <p:nvPr/>
         </p:nvSpPr>
@@ -12109,7 +13045,7 @@
       </p:sp>
       <p:pic>
         <p:nvPicPr>
-          <p:cNvPr id="5" name="Image 0" descr="/www/wwwroot/rexar/gdsolar/docs/curso/slides/assets/logo-gdsolar.png">    </p:cNvPr>
+          <p:cNvPr id="7" name="Image 0" descr="/www/wwwroot/rexar/gdsolar/docs/curso/slides/assets/logo-gdsolar.png">    </p:cNvPr>
           <p:cNvPicPr>
             <a:picLocks noChangeAspect="1"/>
           </p:cNvPicPr>
@@ -12133,7 +13069,7 @@
       </p:pic>
       <p:sp>
         <p:nvSpPr>
-          <p:cNvPr id="6" name="Text 3"/>
+          <p:cNvPr id="8" name="Text 5"/>
           <p:cNvSpPr/>
           <p:nvPr/>
         </p:nvSpPr>
@@ -12174,7 +13110,7 @@
       </p:sp>
       <p:sp>
         <p:nvSpPr>
-          <p:cNvPr id="7" name="Text 4"/>
+          <p:cNvPr id="9" name="Text 6"/>
           <p:cNvSpPr/>
           <p:nvPr/>
         </p:nvSpPr>
@@ -12215,7 +13151,7 @@
       </p:sp>
       <p:sp>
         <p:nvSpPr>
-          <p:cNvPr id="8" name="Text 5"/>
+          <p:cNvPr id="10" name="Text 7"/>
           <p:cNvSpPr/>
           <p:nvPr/>
         </p:nvSpPr>
@@ -12331,7 +13267,7 @@
         </p:blipFill>
         <p:spPr>
           <a:xfrm>
-            <a:off x="411480" y="6547104"/>
+            <a:off x="548640" y="6547104"/>
             <a:ext cx="274320" cy="274320"/>
           </a:xfrm>
           <a:prstGeom prst="rect">
@@ -12347,7 +13283,7 @@
         </p:nvSpPr>
         <p:spPr>
           <a:xfrm>
-            <a:off x="749808" y="6528816"/>
+            <a:off x="886968" y="6528816"/>
             <a:ext cx="6400800" cy="310896"/>
           </a:xfrm>
           <a:prstGeom prst="rect">
@@ -12387,7 +13323,7 @@
         <p:spPr>
           <a:xfrm>
             <a:off x="7132320" y="6528816"/>
-            <a:ext cx="4663440" cy="310896"/>
+            <a:ext cx="4023360" cy="310896"/>
           </a:xfrm>
           <a:prstGeom prst="rect">
             <a:avLst/>
@@ -12425,7 +13361,7 @@
         </p:nvSpPr>
         <p:spPr>
           <a:xfrm>
-            <a:off x="411480" y="384048"/>
+            <a:off x="548640" y="384048"/>
             <a:ext cx="82296" cy="658368"/>
           </a:xfrm>
           <a:prstGeom prst="rect">
@@ -12445,7 +13381,7 @@
         </p:nvSpPr>
         <p:spPr>
           <a:xfrm>
-            <a:off x="640080" y="292608"/>
+            <a:off x="777240" y="292608"/>
             <a:ext cx="10972800" cy="274320"/>
           </a:xfrm>
           <a:prstGeom prst="rect">
@@ -12484,8 +13420,8 @@
         </p:nvSpPr>
         <p:spPr>
           <a:xfrm>
-            <a:off x="640080" y="530352"/>
-            <a:ext cx="11155680" cy="566928"/>
+            <a:off x="777240" y="530352"/>
+            <a:ext cx="10881360" cy="566928"/>
           </a:xfrm>
           <a:prstGeom prst="rect">
             <a:avLst/>
@@ -12839,6 +13775,54 @@
               <a:t>5. Rateio: saída + entrada · 6. Alertas: zero críticos · 7. Repasse e relatório ao produtor</a:t>
             </a:r>
             <a:endParaRPr lang="en-US" sz="1500" dirty="0"/>
+          </a:p>
+        </p:txBody>
+      </p:sp>
+      <p:sp>
+        <p:nvSpPr>
+          <p:cNvPr id="25" name="Slide Number Placeholder 0"/>
+          <p:cNvSpPr>
+            <a:spLocks noGrp="1"/>
+          </p:cNvSpPr>
+          <p:nvPr>
+            <p:ph type="sldNum" sz="quarter" idx="4294967295"/>
+          </p:nvPr>
+        </p:nvSpPr>
+        <p:spPr>
+          <a:xfrm>
+            <a:off x="11292840" y="6556248"/>
+            <a:ext cx="548640" cy="256032"/>
+          </a:xfrm>
+          <a:prstGeom prst="rect">
+            <a:avLst/>
+          </a:prstGeom>
+          <a:extLst>
+            <a:ext uri="{C572A759-6A51-4108-AA02-DFA0A04FC94B}">
+              <ma14:wrappingTextBoxFlag xmlns:ma14="http://schemas.microsoft.com/office/mac/drawingml/2011/main" val="0"/>
+            </a:ext>
+          </a:extLst>
+        </p:spPr>
+        <p:txBody>
+          <a:bodyPr/>
+          <a:lstStyle>
+            <a:lvl1pPr>
+              <a:defRPr sz="900">
+                <a:solidFill>
+                  <a:srgbClr val="1B3A6B"/>
+                </a:solidFill>
+                <a:latin typeface="Arial"/>
+                <a:ea typeface="Arial"/>
+                <a:cs typeface="Arial"/>
+              </a:defRPr>
+            </a:lvl1pPr>
+          </a:lstStyle>
+          <a:p>
+            <a:pPr algn="r"/>
+            <a:fld id="{F7021451-1387-4CA6-816F-3879F97B5CBC}" type="slidenum">
+              <a:rPr b="1" lang="en-US"/>
+              <a:t>24</a:t>
+            </a:fld>
+            <a:endParaRPr lang="en-US"/>
           </a:p>
         </p:txBody>
       </p:sp>
@@ -12915,7 +13899,7 @@
         </p:blipFill>
         <p:spPr>
           <a:xfrm>
-            <a:off x="411480" y="6547104"/>
+            <a:off x="548640" y="6547104"/>
             <a:ext cx="274320" cy="274320"/>
           </a:xfrm>
           <a:prstGeom prst="rect">
@@ -12931,7 +13915,7 @@
         </p:nvSpPr>
         <p:spPr>
           <a:xfrm>
-            <a:off x="749808" y="6528816"/>
+            <a:off x="886968" y="6528816"/>
             <a:ext cx="6400800" cy="310896"/>
           </a:xfrm>
           <a:prstGeom prst="rect">
@@ -12971,7 +13955,7 @@
         <p:spPr>
           <a:xfrm>
             <a:off x="7132320" y="6528816"/>
-            <a:ext cx="4663440" cy="310896"/>
+            <a:ext cx="4023360" cy="310896"/>
           </a:xfrm>
           <a:prstGeom prst="rect">
             <a:avLst/>
@@ -13009,7 +13993,7 @@
         </p:nvSpPr>
         <p:spPr>
           <a:xfrm>
-            <a:off x="411480" y="384048"/>
+            <a:off x="548640" y="384048"/>
             <a:ext cx="82296" cy="658368"/>
           </a:xfrm>
           <a:prstGeom prst="rect">
@@ -13029,7 +14013,7 @@
         </p:nvSpPr>
         <p:spPr>
           <a:xfrm>
-            <a:off x="640080" y="292608"/>
+            <a:off x="777240" y="292608"/>
             <a:ext cx="10972800" cy="274320"/>
           </a:xfrm>
           <a:prstGeom prst="rect">
@@ -13068,8 +14052,8 @@
         </p:nvSpPr>
         <p:spPr>
           <a:xfrm>
-            <a:off x="640080" y="530352"/>
-            <a:ext cx="11155680" cy="566928"/>
+            <a:off x="777240" y="530352"/>
+            <a:ext cx="10881360" cy="566928"/>
           </a:xfrm>
           <a:prstGeom prst="rect">
             <a:avLst/>
@@ -13159,6 +14143,54 @@
           </a:prstGeom>
         </p:spPr>
       </p:pic>
+      <p:sp>
+        <p:nvSpPr>
+          <p:cNvPr id="25" name="Slide Number Placeholder 0"/>
+          <p:cNvSpPr>
+            <a:spLocks noGrp="1"/>
+          </p:cNvSpPr>
+          <p:nvPr>
+            <p:ph type="sldNum" sz="quarter" idx="4294967295"/>
+          </p:nvPr>
+        </p:nvSpPr>
+        <p:spPr>
+          <a:xfrm>
+            <a:off x="11292840" y="6556248"/>
+            <a:ext cx="548640" cy="256032"/>
+          </a:xfrm>
+          <a:prstGeom prst="rect">
+            <a:avLst/>
+          </a:prstGeom>
+          <a:extLst>
+            <a:ext uri="{C572A759-6A51-4108-AA02-DFA0A04FC94B}">
+              <ma14:wrappingTextBoxFlag xmlns:ma14="http://schemas.microsoft.com/office/mac/drawingml/2011/main" val="0"/>
+            </a:ext>
+          </a:extLst>
+        </p:spPr>
+        <p:txBody>
+          <a:bodyPr/>
+          <a:lstStyle>
+            <a:lvl1pPr>
+              <a:defRPr sz="900">
+                <a:solidFill>
+                  <a:srgbClr val="1B3A6B"/>
+                </a:solidFill>
+                <a:latin typeface="Arial"/>
+                <a:ea typeface="Arial"/>
+                <a:cs typeface="Arial"/>
+              </a:defRPr>
+            </a:lvl1pPr>
+          </a:lstStyle>
+          <a:p>
+            <a:pPr algn="r"/>
+            <a:fld id="{F7021451-1387-4CA6-816F-3879F97B5CBC}" type="slidenum">
+              <a:rPr b="1" lang="en-US"/>
+              <a:t>25</a:t>
+            </a:fld>
+            <a:endParaRPr lang="en-US"/>
+          </a:p>
+        </p:txBody>
+      </p:sp>
     </p:spTree>
   </p:cSld>
   <p:clrMapOvr>
@@ -13232,7 +14264,7 @@
         </p:blipFill>
         <p:spPr>
           <a:xfrm>
-            <a:off x="411480" y="6547104"/>
+            <a:off x="548640" y="6547104"/>
             <a:ext cx="274320" cy="274320"/>
           </a:xfrm>
           <a:prstGeom prst="rect">
@@ -13248,7 +14280,7 @@
         </p:nvSpPr>
         <p:spPr>
           <a:xfrm>
-            <a:off x="749808" y="6528816"/>
+            <a:off x="886968" y="6528816"/>
             <a:ext cx="6400800" cy="310896"/>
           </a:xfrm>
           <a:prstGeom prst="rect">
@@ -13288,7 +14320,7 @@
         <p:spPr>
           <a:xfrm>
             <a:off x="7132320" y="6528816"/>
-            <a:ext cx="4663440" cy="310896"/>
+            <a:ext cx="4023360" cy="310896"/>
           </a:xfrm>
           <a:prstGeom prst="rect">
             <a:avLst/>
@@ -13326,7 +14358,7 @@
         </p:nvSpPr>
         <p:spPr>
           <a:xfrm>
-            <a:off x="411480" y="384048"/>
+            <a:off x="548640" y="384048"/>
             <a:ext cx="82296" cy="658368"/>
           </a:xfrm>
           <a:prstGeom prst="rect">
@@ -13346,7 +14378,7 @@
         </p:nvSpPr>
         <p:spPr>
           <a:xfrm>
-            <a:off x="640080" y="292608"/>
+            <a:off x="777240" y="292608"/>
             <a:ext cx="10972800" cy="274320"/>
           </a:xfrm>
           <a:prstGeom prst="rect">
@@ -13385,8 +14417,8 @@
         </p:nvSpPr>
         <p:spPr>
           <a:xfrm>
-            <a:off x="640080" y="530352"/>
-            <a:ext cx="11155680" cy="566928"/>
+            <a:off x="777240" y="530352"/>
+            <a:ext cx="10881360" cy="566928"/>
           </a:xfrm>
           <a:prstGeom prst="rect">
             <a:avLst/>
@@ -13426,8 +14458,8 @@
         </p:nvSpPr>
         <p:spPr>
           <a:xfrm>
-            <a:off x="411480" y="1325880"/>
-            <a:ext cx="5577840" cy="411480"/>
+            <a:off x="548640" y="1325880"/>
+            <a:ext cx="5394960" cy="411480"/>
           </a:xfrm>
           <a:prstGeom prst="rect">
             <a:avLst/>
@@ -13465,8 +14497,8 @@
         </p:nvSpPr>
         <p:spPr>
           <a:xfrm>
-            <a:off x="411480" y="1783080"/>
-            <a:ext cx="5577840" cy="4480560"/>
+            <a:off x="548640" y="1783080"/>
+            <a:ext cx="5394960" cy="4480560"/>
           </a:xfrm>
           <a:prstGeom prst="rect">
             <a:avLst/>
@@ -13549,8 +14581,8 @@
         </p:nvSpPr>
         <p:spPr>
           <a:xfrm>
-            <a:off x="6309360" y="1325880"/>
-            <a:ext cx="5486400" cy="4937760"/>
+            <a:off x="6172200" y="1325880"/>
+            <a:ext cx="5468112" cy="4937760"/>
           </a:xfrm>
           <a:prstGeom prst="roundRect">
             <a:avLst>
@@ -13571,8 +14603,8 @@
         </p:nvSpPr>
         <p:spPr>
           <a:xfrm>
-            <a:off x="6629400" y="1554480"/>
-            <a:ext cx="4846320" cy="4480560"/>
+            <a:off x="6492240" y="1554480"/>
+            <a:ext cx="4828032" cy="4480560"/>
           </a:xfrm>
           <a:prstGeom prst="rect">
             <a:avLst/>
@@ -13616,6 +14648,54 @@
               <a:t>SOP da minha operação: rotina diária, semanal e mensal em uma página, com responsável e horário de cada tarefa; e o mês 2 fechado no laboratório (geração registrada, faturas aprovadas, cobranças abertas e emitidas, alertas zerados ou justificados, relatório para o produtor).</a:t>
             </a:r>
             <a:endParaRPr lang="en-US" sz="1300" dirty="0"/>
+          </a:p>
+        </p:txBody>
+      </p:sp>
+      <p:sp>
+        <p:nvSpPr>
+          <p:cNvPr id="25" name="Slide Number Placeholder 0"/>
+          <p:cNvSpPr>
+            <a:spLocks noGrp="1"/>
+          </p:cNvSpPr>
+          <p:nvPr>
+            <p:ph type="sldNum" sz="quarter" idx="4294967295"/>
+          </p:nvPr>
+        </p:nvSpPr>
+        <p:spPr>
+          <a:xfrm>
+            <a:off x="11292840" y="6556248"/>
+            <a:ext cx="548640" cy="256032"/>
+          </a:xfrm>
+          <a:prstGeom prst="rect">
+            <a:avLst/>
+          </a:prstGeom>
+          <a:extLst>
+            <a:ext uri="{C572A759-6A51-4108-AA02-DFA0A04FC94B}">
+              <ma14:wrappingTextBoxFlag xmlns:ma14="http://schemas.microsoft.com/office/mac/drawingml/2011/main" val="0"/>
+            </a:ext>
+          </a:extLst>
+        </p:spPr>
+        <p:txBody>
+          <a:bodyPr/>
+          <a:lstStyle>
+            <a:lvl1pPr>
+              <a:defRPr sz="900">
+                <a:solidFill>
+                  <a:srgbClr val="1B3A6B"/>
+                </a:solidFill>
+                <a:latin typeface="Arial"/>
+                <a:ea typeface="Arial"/>
+                <a:cs typeface="Arial"/>
+              </a:defRPr>
+            </a:lvl1pPr>
+          </a:lstStyle>
+          <a:p>
+            <a:pPr algn="r"/>
+            <a:fld id="{F7021451-1387-4CA6-816F-3879F97B5CBC}" type="slidenum">
+              <a:rPr b="1" lang="en-US"/>
+              <a:t>26</a:t>
+            </a:fld>
+            <a:endParaRPr lang="en-US"/>
           </a:p>
         </p:txBody>
       </p:sp>
@@ -13692,7 +14772,7 @@
         </p:blipFill>
         <p:spPr>
           <a:xfrm>
-            <a:off x="411480" y="6547104"/>
+            <a:off x="548640" y="6547104"/>
             <a:ext cx="274320" cy="274320"/>
           </a:xfrm>
           <a:prstGeom prst="rect">
@@ -13708,7 +14788,7 @@
         </p:nvSpPr>
         <p:spPr>
           <a:xfrm>
-            <a:off x="749808" y="6528816"/>
+            <a:off x="886968" y="6528816"/>
             <a:ext cx="6400800" cy="310896"/>
           </a:xfrm>
           <a:prstGeom prst="rect">
@@ -13748,7 +14828,7 @@
         <p:spPr>
           <a:xfrm>
             <a:off x="7132320" y="6528816"/>
-            <a:ext cx="4663440" cy="310896"/>
+            <a:ext cx="4023360" cy="310896"/>
           </a:xfrm>
           <a:prstGeom prst="rect">
             <a:avLst/>
@@ -13786,7 +14866,7 @@
         </p:nvSpPr>
         <p:spPr>
           <a:xfrm>
-            <a:off x="411480" y="384048"/>
+            <a:off x="548640" y="384048"/>
             <a:ext cx="82296" cy="658368"/>
           </a:xfrm>
           <a:prstGeom prst="rect">
@@ -13806,7 +14886,7 @@
         </p:nvSpPr>
         <p:spPr>
           <a:xfrm>
-            <a:off x="640080" y="292608"/>
+            <a:off x="777240" y="292608"/>
             <a:ext cx="10972800" cy="274320"/>
           </a:xfrm>
           <a:prstGeom prst="rect">
@@ -13845,8 +14925,8 @@
         </p:nvSpPr>
         <p:spPr>
           <a:xfrm>
-            <a:off x="640080" y="530352"/>
-            <a:ext cx="11155680" cy="566928"/>
+            <a:off x="777240" y="530352"/>
+            <a:ext cx="10881360" cy="566928"/>
           </a:xfrm>
           <a:prstGeom prst="rect">
             <a:avLst/>
@@ -13886,12 +14966,12 @@
         </p:nvSpPr>
         <p:spPr>
           <a:xfrm>
-            <a:off x="411480" y="1325880"/>
-            <a:ext cx="3642360" cy="4892040"/>
+            <a:off x="548640" y="1325880"/>
+            <a:ext cx="3544824" cy="4892040"/>
           </a:xfrm>
           <a:prstGeom prst="roundRect">
             <a:avLst>
-              <a:gd name="adj" fmla="val 2008"/>
+              <a:gd name="adj" fmla="val 2064"/>
             </a:avLst>
           </a:prstGeom>
           <a:solidFill>
@@ -13920,7 +15000,7 @@
         </p:nvSpPr>
         <p:spPr>
           <a:xfrm>
-            <a:off x="594360" y="1508760"/>
+            <a:off x="731520" y="1508760"/>
             <a:ext cx="457200" cy="457200"/>
           </a:xfrm>
           <a:prstGeom prst="ellipse">
@@ -13940,7 +15020,7 @@
         </p:nvSpPr>
         <p:spPr>
           <a:xfrm>
-            <a:off x="594360" y="1508760"/>
+            <a:off x="731520" y="1508760"/>
             <a:ext cx="457200" cy="457200"/>
           </a:xfrm>
           <a:prstGeom prst="rect">
@@ -13979,8 +15059,8 @@
         </p:nvSpPr>
         <p:spPr>
           <a:xfrm>
-            <a:off x="1188720" y="1435608"/>
-            <a:ext cx="2727960" cy="4672584"/>
+            <a:off x="1325880" y="1435608"/>
+            <a:ext cx="2630424" cy="4672584"/>
           </a:xfrm>
           <a:prstGeom prst="rect">
             <a:avLst/>
@@ -13998,7 +15078,7 @@
               <a:buNone/>
             </a:pPr>
             <a:r>
-              <a:rPr lang="en-US" sz="1600" dirty="0">
+              <a:rPr lang="en-US" sz="1800" dirty="0">
                 <a:solidFill>
                   <a:srgbClr val="1F2937"/>
                 </a:solidFill>
@@ -14008,7 +15088,7 @@
               </a:rPr>
               <a:t>A cada 5 min: sincroniza pagamentos · A cada 10 min: marca vencidas</a:t>
             </a:r>
-            <a:endParaRPr lang="en-US" sz="1600" dirty="0"/>
+            <a:endParaRPr lang="en-US" sz="1800" dirty="0"/>
           </a:p>
         </p:txBody>
       </p:sp>
@@ -14020,12 +15100,12 @@
         </p:nvSpPr>
         <p:spPr>
           <a:xfrm>
-            <a:off x="4282440" y="1325880"/>
-            <a:ext cx="3642360" cy="4892040"/>
+            <a:off x="4322064" y="1325880"/>
+            <a:ext cx="3544824" cy="4892040"/>
           </a:xfrm>
           <a:prstGeom prst="roundRect">
             <a:avLst>
-              <a:gd name="adj" fmla="val 2008"/>
+              <a:gd name="adj" fmla="val 2064"/>
             </a:avLst>
           </a:prstGeom>
           <a:solidFill>
@@ -14054,7 +15134,7 @@
         </p:nvSpPr>
         <p:spPr>
           <a:xfrm>
-            <a:off x="4465320" y="1508760"/>
+            <a:off x="4504944" y="1508760"/>
             <a:ext cx="457200" cy="457200"/>
           </a:xfrm>
           <a:prstGeom prst="ellipse">
@@ -14074,7 +15154,7 @@
         </p:nvSpPr>
         <p:spPr>
           <a:xfrm>
-            <a:off x="4465320" y="1508760"/>
+            <a:off x="4504944" y="1508760"/>
             <a:ext cx="457200" cy="457200"/>
           </a:xfrm>
           <a:prstGeom prst="rect">
@@ -14113,8 +15193,8 @@
         </p:nvSpPr>
         <p:spPr>
           <a:xfrm>
-            <a:off x="5059680" y="1435608"/>
-            <a:ext cx="2727960" cy="4672584"/>
+            <a:off x="5099304" y="1435608"/>
+            <a:ext cx="2630424" cy="4672584"/>
           </a:xfrm>
           <a:prstGeom prst="rect">
             <a:avLst/>
@@ -14132,7 +15212,7 @@
               <a:buNone/>
             </a:pPr>
             <a:r>
-              <a:rPr lang="en-US" sz="1600" dirty="0">
+              <a:rPr lang="en-US" sz="1800" dirty="0">
                 <a:solidFill>
                   <a:srgbClr val="1F2937"/>
                 </a:solidFill>
@@ -14142,7 +15222,7 @@
               </a:rPr>
               <a:t>De hora em hora: importa faturas por e-mail · gera cobranças de faturas aprovadas · varredura de saúde</a:t>
             </a:r>
-            <a:endParaRPr lang="en-US" sz="1600" dirty="0"/>
+            <a:endParaRPr lang="en-US" sz="1800" dirty="0"/>
           </a:p>
         </p:txBody>
       </p:sp>
@@ -14154,12 +15234,12 @@
         </p:nvSpPr>
         <p:spPr>
           <a:xfrm>
-            <a:off x="8153400" y="1325880"/>
-            <a:ext cx="3642360" cy="4892040"/>
+            <a:off x="8095488" y="1325880"/>
+            <a:ext cx="3544824" cy="4892040"/>
           </a:xfrm>
           <a:prstGeom prst="roundRect">
             <a:avLst>
-              <a:gd name="adj" fmla="val 2008"/>
+              <a:gd name="adj" fmla="val 2064"/>
             </a:avLst>
           </a:prstGeom>
           <a:solidFill>
@@ -14188,7 +15268,7 @@
         </p:nvSpPr>
         <p:spPr>
           <a:xfrm>
-            <a:off x="8336280" y="1508760"/>
+            <a:off x="8278368" y="1508760"/>
             <a:ext cx="457200" cy="457200"/>
           </a:xfrm>
           <a:prstGeom prst="ellipse">
@@ -14208,7 +15288,7 @@
         </p:nvSpPr>
         <p:spPr>
           <a:xfrm>
-            <a:off x="8336280" y="1508760"/>
+            <a:off x="8278368" y="1508760"/>
             <a:ext cx="457200" cy="457200"/>
           </a:xfrm>
           <a:prstGeom prst="rect">
@@ -14247,8 +15327,8 @@
         </p:nvSpPr>
         <p:spPr>
           <a:xfrm>
-            <a:off x="8930640" y="1435608"/>
-            <a:ext cx="2727960" cy="4672584"/>
+            <a:off x="8872728" y="1435608"/>
+            <a:ext cx="2630424" cy="4672584"/>
           </a:xfrm>
           <a:prstGeom prst="rect">
             <a:avLst/>
@@ -14266,7 +15346,7 @@
               <a:buNone/>
             </a:pPr>
             <a:r>
-              <a:rPr lang="en-US" sz="1600" dirty="0">
+              <a:rPr lang="en-US" sz="1800" dirty="0">
                 <a:solidFill>
                   <a:srgbClr val="1F2937"/>
                 </a:solidFill>
@@ -14276,7 +15356,55 @@
               </a:rPr>
               <a:t>06:00: expira boletos vencidos · 08:00: lembretes de cobrança</a:t>
             </a:r>
-            <a:endParaRPr lang="en-US" sz="1600" dirty="0"/>
+            <a:endParaRPr lang="en-US" sz="1800" dirty="0"/>
+          </a:p>
+        </p:txBody>
+      </p:sp>
+      <p:sp>
+        <p:nvSpPr>
+          <p:cNvPr id="25" name="Slide Number Placeholder 0"/>
+          <p:cNvSpPr>
+            <a:spLocks noGrp="1"/>
+          </p:cNvSpPr>
+          <p:nvPr>
+            <p:ph type="sldNum" sz="quarter" idx="4294967295"/>
+          </p:nvPr>
+        </p:nvSpPr>
+        <p:spPr>
+          <a:xfrm>
+            <a:off x="11292840" y="6556248"/>
+            <a:ext cx="548640" cy="256032"/>
+          </a:xfrm>
+          <a:prstGeom prst="rect">
+            <a:avLst/>
+          </a:prstGeom>
+          <a:extLst>
+            <a:ext uri="{C572A759-6A51-4108-AA02-DFA0A04FC94B}">
+              <ma14:wrappingTextBoxFlag xmlns:ma14="http://schemas.microsoft.com/office/mac/drawingml/2011/main" val="0"/>
+            </a:ext>
+          </a:extLst>
+        </p:spPr>
+        <p:txBody>
+          <a:bodyPr/>
+          <a:lstStyle>
+            <a:lvl1pPr>
+              <a:defRPr sz="900">
+                <a:solidFill>
+                  <a:srgbClr val="1B3A6B"/>
+                </a:solidFill>
+                <a:latin typeface="Arial"/>
+                <a:ea typeface="Arial"/>
+                <a:cs typeface="Arial"/>
+              </a:defRPr>
+            </a:lvl1pPr>
+          </a:lstStyle>
+          <a:p>
+            <a:pPr algn="r"/>
+            <a:fld id="{F7021451-1387-4CA6-816F-3879F97B5CBC}" type="slidenum">
+              <a:rPr b="1" lang="en-US"/>
+              <a:t>3</a:t>
+            </a:fld>
+            <a:endParaRPr lang="en-US"/>
           </a:p>
         </p:txBody>
       </p:sp>
@@ -14353,7 +15481,7 @@
         </p:blipFill>
         <p:spPr>
           <a:xfrm>
-            <a:off x="411480" y="6547104"/>
+            <a:off x="548640" y="6547104"/>
             <a:ext cx="274320" cy="274320"/>
           </a:xfrm>
           <a:prstGeom prst="rect">
@@ -14369,7 +15497,7 @@
         </p:nvSpPr>
         <p:spPr>
           <a:xfrm>
-            <a:off x="749808" y="6528816"/>
+            <a:off x="886968" y="6528816"/>
             <a:ext cx="6400800" cy="310896"/>
           </a:xfrm>
           <a:prstGeom prst="rect">
@@ -14409,7 +15537,7 @@
         <p:spPr>
           <a:xfrm>
             <a:off x="7132320" y="6528816"/>
-            <a:ext cx="4663440" cy="310896"/>
+            <a:ext cx="4023360" cy="310896"/>
           </a:xfrm>
           <a:prstGeom prst="rect">
             <a:avLst/>
@@ -14447,7 +15575,7 @@
         </p:nvSpPr>
         <p:spPr>
           <a:xfrm>
-            <a:off x="411480" y="384048"/>
+            <a:off x="548640" y="384048"/>
             <a:ext cx="82296" cy="658368"/>
           </a:xfrm>
           <a:prstGeom prst="rect">
@@ -14467,7 +15595,7 @@
         </p:nvSpPr>
         <p:spPr>
           <a:xfrm>
-            <a:off x="640080" y="292608"/>
+            <a:off x="777240" y="292608"/>
             <a:ext cx="10972800" cy="274320"/>
           </a:xfrm>
           <a:prstGeom prst="rect">
@@ -14506,8 +15634,8 @@
         </p:nvSpPr>
         <p:spPr>
           <a:xfrm>
-            <a:off x="640080" y="530352"/>
-            <a:ext cx="11155680" cy="566928"/>
+            <a:off x="777240" y="530352"/>
+            <a:ext cx="10881360" cy="566928"/>
           </a:xfrm>
           <a:prstGeom prst="rect">
             <a:avLst/>
@@ -14547,8 +15675,8 @@
         </p:nvSpPr>
         <p:spPr>
           <a:xfrm>
-            <a:off x="411480" y="1325880"/>
-            <a:ext cx="3642360" cy="2331720"/>
+            <a:off x="548640" y="1325880"/>
+            <a:ext cx="3544824" cy="2331720"/>
           </a:xfrm>
           <a:prstGeom prst="roundRect">
             <a:avLst>
@@ -14581,7 +15709,7 @@
         </p:nvSpPr>
         <p:spPr>
           <a:xfrm>
-            <a:off x="594360" y="1508760"/>
+            <a:off x="731520" y="1508760"/>
             <a:ext cx="457200" cy="457200"/>
           </a:xfrm>
           <a:prstGeom prst="ellipse">
@@ -14601,7 +15729,7 @@
         </p:nvSpPr>
         <p:spPr>
           <a:xfrm>
-            <a:off x="594360" y="1508760"/>
+            <a:off x="731520" y="1508760"/>
             <a:ext cx="457200" cy="457200"/>
           </a:xfrm>
           <a:prstGeom prst="rect">
@@ -14640,8 +15768,8 @@
         </p:nvSpPr>
         <p:spPr>
           <a:xfrm>
-            <a:off x="1188720" y="1435608"/>
-            <a:ext cx="2727960" cy="2112264"/>
+            <a:off x="1325880" y="1435608"/>
+            <a:ext cx="2630424" cy="2112264"/>
           </a:xfrm>
           <a:prstGeom prst="rect">
             <a:avLst/>
@@ -14681,8 +15809,8 @@
         </p:nvSpPr>
         <p:spPr>
           <a:xfrm>
-            <a:off x="4282440" y="1325880"/>
-            <a:ext cx="3642360" cy="2331720"/>
+            <a:off x="4322064" y="1325880"/>
+            <a:ext cx="3544824" cy="2331720"/>
           </a:xfrm>
           <a:prstGeom prst="roundRect">
             <a:avLst>
@@ -14715,7 +15843,7 @@
         </p:nvSpPr>
         <p:spPr>
           <a:xfrm>
-            <a:off x="4465320" y="1508760"/>
+            <a:off x="4504944" y="1508760"/>
             <a:ext cx="457200" cy="457200"/>
           </a:xfrm>
           <a:prstGeom prst="ellipse">
@@ -14735,7 +15863,7 @@
         </p:nvSpPr>
         <p:spPr>
           <a:xfrm>
-            <a:off x="4465320" y="1508760"/>
+            <a:off x="4504944" y="1508760"/>
             <a:ext cx="457200" cy="457200"/>
           </a:xfrm>
           <a:prstGeom prst="rect">
@@ -14774,8 +15902,8 @@
         </p:nvSpPr>
         <p:spPr>
           <a:xfrm>
-            <a:off x="5059680" y="1435608"/>
-            <a:ext cx="2727960" cy="2112264"/>
+            <a:off x="5099304" y="1435608"/>
+            <a:ext cx="2630424" cy="2112264"/>
           </a:xfrm>
           <a:prstGeom prst="rect">
             <a:avLst/>
@@ -14815,8 +15943,8 @@
         </p:nvSpPr>
         <p:spPr>
           <a:xfrm>
-            <a:off x="8153400" y="1325880"/>
-            <a:ext cx="3642360" cy="2331720"/>
+            <a:off x="8095488" y="1325880"/>
+            <a:ext cx="3544824" cy="2331720"/>
           </a:xfrm>
           <a:prstGeom prst="roundRect">
             <a:avLst>
@@ -14849,7 +15977,7 @@
         </p:nvSpPr>
         <p:spPr>
           <a:xfrm>
-            <a:off x="8336280" y="1508760"/>
+            <a:off x="8278368" y="1508760"/>
             <a:ext cx="457200" cy="457200"/>
           </a:xfrm>
           <a:prstGeom prst="ellipse">
@@ -14869,7 +15997,7 @@
         </p:nvSpPr>
         <p:spPr>
           <a:xfrm>
-            <a:off x="8336280" y="1508760"/>
+            <a:off x="8278368" y="1508760"/>
             <a:ext cx="457200" cy="457200"/>
           </a:xfrm>
           <a:prstGeom prst="rect">
@@ -14908,8 +16036,8 @@
         </p:nvSpPr>
         <p:spPr>
           <a:xfrm>
-            <a:off x="8930640" y="1435608"/>
-            <a:ext cx="2727960" cy="2112264"/>
+            <a:off x="8872728" y="1435608"/>
+            <a:ext cx="2630424" cy="2112264"/>
           </a:xfrm>
           <a:prstGeom prst="rect">
             <a:avLst/>
@@ -14949,8 +16077,8 @@
         </p:nvSpPr>
         <p:spPr>
           <a:xfrm>
-            <a:off x="411480" y="3886200"/>
-            <a:ext cx="3642360" cy="2331720"/>
+            <a:off x="548640" y="3886200"/>
+            <a:ext cx="3544824" cy="2331720"/>
           </a:xfrm>
           <a:prstGeom prst="roundRect">
             <a:avLst>
@@ -14983,7 +16111,7 @@
         </p:nvSpPr>
         <p:spPr>
           <a:xfrm>
-            <a:off x="594360" y="4069080"/>
+            <a:off x="731520" y="4069080"/>
             <a:ext cx="457200" cy="457200"/>
           </a:xfrm>
           <a:prstGeom prst="ellipse">
@@ -15003,7 +16131,7 @@
         </p:nvSpPr>
         <p:spPr>
           <a:xfrm>
-            <a:off x="594360" y="4069080"/>
+            <a:off x="731520" y="4069080"/>
             <a:ext cx="457200" cy="457200"/>
           </a:xfrm>
           <a:prstGeom prst="rect">
@@ -15042,8 +16170,8 @@
         </p:nvSpPr>
         <p:spPr>
           <a:xfrm>
-            <a:off x="1188720" y="3995928"/>
-            <a:ext cx="2727960" cy="2112264"/>
+            <a:off x="1325880" y="3995928"/>
+            <a:ext cx="2630424" cy="2112264"/>
           </a:xfrm>
           <a:prstGeom prst="rect">
             <a:avLst/>
@@ -15083,8 +16211,8 @@
         </p:nvSpPr>
         <p:spPr>
           <a:xfrm>
-            <a:off x="4282440" y="3886200"/>
-            <a:ext cx="3642360" cy="2331720"/>
+            <a:off x="4322064" y="3886200"/>
+            <a:ext cx="3544824" cy="2331720"/>
           </a:xfrm>
           <a:prstGeom prst="roundRect">
             <a:avLst>
@@ -15117,7 +16245,7 @@
         </p:nvSpPr>
         <p:spPr>
           <a:xfrm>
-            <a:off x="4465320" y="4069080"/>
+            <a:off x="4504944" y="4069080"/>
             <a:ext cx="457200" cy="457200"/>
           </a:xfrm>
           <a:prstGeom prst="ellipse">
@@ -15137,7 +16265,7 @@
         </p:nvSpPr>
         <p:spPr>
           <a:xfrm>
-            <a:off x="4465320" y="4069080"/>
+            <a:off x="4504944" y="4069080"/>
             <a:ext cx="457200" cy="457200"/>
           </a:xfrm>
           <a:prstGeom prst="rect">
@@ -15176,8 +16304,8 @@
         </p:nvSpPr>
         <p:spPr>
           <a:xfrm>
-            <a:off x="5059680" y="3995928"/>
-            <a:ext cx="2727960" cy="2112264"/>
+            <a:off x="5099304" y="3995928"/>
+            <a:ext cx="2630424" cy="2112264"/>
           </a:xfrm>
           <a:prstGeom prst="rect">
             <a:avLst/>
@@ -15217,8 +16345,8 @@
         </p:nvSpPr>
         <p:spPr>
           <a:xfrm>
-            <a:off x="8153400" y="3886200"/>
-            <a:ext cx="3642360" cy="2331720"/>
+            <a:off x="8095488" y="3886200"/>
+            <a:ext cx="3544824" cy="2331720"/>
           </a:xfrm>
           <a:prstGeom prst="roundRect">
             <a:avLst>
@@ -15251,7 +16379,7 @@
         </p:nvSpPr>
         <p:spPr>
           <a:xfrm>
-            <a:off x="8336280" y="4069080"/>
+            <a:off x="8278368" y="4069080"/>
             <a:ext cx="457200" cy="457200"/>
           </a:xfrm>
           <a:prstGeom prst="ellipse">
@@ -15271,7 +16399,7 @@
         </p:nvSpPr>
         <p:spPr>
           <a:xfrm>
-            <a:off x="8336280" y="4069080"/>
+            <a:off x="8278368" y="4069080"/>
             <a:ext cx="457200" cy="457200"/>
           </a:xfrm>
           <a:prstGeom prst="rect">
@@ -15310,8 +16438,8 @@
         </p:nvSpPr>
         <p:spPr>
           <a:xfrm>
-            <a:off x="8930640" y="3995928"/>
-            <a:ext cx="2727960" cy="2112264"/>
+            <a:off x="8872728" y="3995928"/>
+            <a:ext cx="2630424" cy="2112264"/>
           </a:xfrm>
           <a:prstGeom prst="rect">
             <a:avLst/>
@@ -15340,6 +16468,54 @@
               <a:t>Chamados de suporte</a:t>
             </a:r>
             <a:endParaRPr lang="en-US" sz="1800" dirty="0"/>
+          </a:p>
+        </p:txBody>
+      </p:sp>
+      <p:sp>
+        <p:nvSpPr>
+          <p:cNvPr id="25" name="Slide Number Placeholder 0"/>
+          <p:cNvSpPr>
+            <a:spLocks noGrp="1"/>
+          </p:cNvSpPr>
+          <p:nvPr>
+            <p:ph type="sldNum" sz="quarter" idx="4294967295"/>
+          </p:nvPr>
+        </p:nvSpPr>
+        <p:spPr>
+          <a:xfrm>
+            <a:off x="11292840" y="6556248"/>
+            <a:ext cx="548640" cy="256032"/>
+          </a:xfrm>
+          <a:prstGeom prst="rect">
+            <a:avLst/>
+          </a:prstGeom>
+          <a:extLst>
+            <a:ext uri="{C572A759-6A51-4108-AA02-DFA0A04FC94B}">
+              <ma14:wrappingTextBoxFlag xmlns:ma14="http://schemas.microsoft.com/office/mac/drawingml/2011/main" val="0"/>
+            </a:ext>
+          </a:extLst>
+        </p:spPr>
+        <p:txBody>
+          <a:bodyPr/>
+          <a:lstStyle>
+            <a:lvl1pPr>
+              <a:defRPr sz="900">
+                <a:solidFill>
+                  <a:srgbClr val="1B3A6B"/>
+                </a:solidFill>
+                <a:latin typeface="Arial"/>
+                <a:ea typeface="Arial"/>
+                <a:cs typeface="Arial"/>
+              </a:defRPr>
+            </a:lvl1pPr>
+          </a:lstStyle>
+          <a:p>
+            <a:pPr algn="r"/>
+            <a:fld id="{F7021451-1387-4CA6-816F-3879F97B5CBC}" type="slidenum">
+              <a:rPr b="1" lang="en-US"/>
+              <a:t>4</a:t>
+            </a:fld>
+            <a:endParaRPr lang="en-US"/>
           </a:p>
         </p:txBody>
       </p:sp>
@@ -15416,7 +16592,7 @@
         </p:blipFill>
         <p:spPr>
           <a:xfrm>
-            <a:off x="411480" y="6547104"/>
+            <a:off x="548640" y="6547104"/>
             <a:ext cx="274320" cy="274320"/>
           </a:xfrm>
           <a:prstGeom prst="rect">
@@ -15432,7 +16608,7 @@
         </p:nvSpPr>
         <p:spPr>
           <a:xfrm>
-            <a:off x="749808" y="6528816"/>
+            <a:off x="886968" y="6528816"/>
             <a:ext cx="6400800" cy="310896"/>
           </a:xfrm>
           <a:prstGeom prst="rect">
@@ -15472,7 +16648,7 @@
         <p:spPr>
           <a:xfrm>
             <a:off x="7132320" y="6528816"/>
-            <a:ext cx="4663440" cy="310896"/>
+            <a:ext cx="4023360" cy="310896"/>
           </a:xfrm>
           <a:prstGeom prst="rect">
             <a:avLst/>
@@ -15510,7 +16686,7 @@
         </p:nvSpPr>
         <p:spPr>
           <a:xfrm>
-            <a:off x="411480" y="384048"/>
+            <a:off x="548640" y="384048"/>
             <a:ext cx="82296" cy="658368"/>
           </a:xfrm>
           <a:prstGeom prst="rect">
@@ -15530,7 +16706,7 @@
         </p:nvSpPr>
         <p:spPr>
           <a:xfrm>
-            <a:off x="640080" y="292608"/>
+            <a:off x="777240" y="292608"/>
             <a:ext cx="10972800" cy="274320"/>
           </a:xfrm>
           <a:prstGeom prst="rect">
@@ -15569,8 +16745,8 @@
         </p:nvSpPr>
         <p:spPr>
           <a:xfrm>
-            <a:off x="640080" y="530352"/>
-            <a:ext cx="11155680" cy="566928"/>
+            <a:off x="777240" y="530352"/>
+            <a:ext cx="10881360" cy="566928"/>
           </a:xfrm>
           <a:prstGeom prst="rect">
             <a:avLst/>
@@ -15610,8 +16786,8 @@
         </p:nvSpPr>
         <p:spPr>
           <a:xfrm>
-            <a:off x="411480" y="1325880"/>
-            <a:ext cx="3642360" cy="2331720"/>
+            <a:off x="548640" y="1325880"/>
+            <a:ext cx="3544824" cy="2331720"/>
           </a:xfrm>
           <a:prstGeom prst="roundRect">
             <a:avLst>
@@ -15644,7 +16820,7 @@
         </p:nvSpPr>
         <p:spPr>
           <a:xfrm>
-            <a:off x="594360" y="1508760"/>
+            <a:off x="731520" y="1508760"/>
             <a:ext cx="457200" cy="457200"/>
           </a:xfrm>
           <a:prstGeom prst="ellipse">
@@ -15664,7 +16840,7 @@
         </p:nvSpPr>
         <p:spPr>
           <a:xfrm>
-            <a:off x="594360" y="1508760"/>
+            <a:off x="731520" y="1508760"/>
             <a:ext cx="457200" cy="457200"/>
           </a:xfrm>
           <a:prstGeom prst="rect">
@@ -15703,8 +16879,8 @@
         </p:nvSpPr>
         <p:spPr>
           <a:xfrm>
-            <a:off x="1188720" y="1435608"/>
-            <a:ext cx="2727960" cy="2112264"/>
+            <a:off x="1325880" y="1435608"/>
+            <a:ext cx="2630424" cy="2112264"/>
           </a:xfrm>
           <a:prstGeom prst="rect">
             <a:avLst/>
@@ -15744,8 +16920,8 @@
         </p:nvSpPr>
         <p:spPr>
           <a:xfrm>
-            <a:off x="4282440" y="1325880"/>
-            <a:ext cx="3642360" cy="2331720"/>
+            <a:off x="4322064" y="1325880"/>
+            <a:ext cx="3544824" cy="2331720"/>
           </a:xfrm>
           <a:prstGeom prst="roundRect">
             <a:avLst>
@@ -15778,7 +16954,7 @@
         </p:nvSpPr>
         <p:spPr>
           <a:xfrm>
-            <a:off x="4465320" y="1508760"/>
+            <a:off x="4504944" y="1508760"/>
             <a:ext cx="457200" cy="457200"/>
           </a:xfrm>
           <a:prstGeom prst="ellipse">
@@ -15798,7 +16974,7 @@
         </p:nvSpPr>
         <p:spPr>
           <a:xfrm>
-            <a:off x="4465320" y="1508760"/>
+            <a:off x="4504944" y="1508760"/>
             <a:ext cx="457200" cy="457200"/>
           </a:xfrm>
           <a:prstGeom prst="rect">
@@ -15837,8 +17013,8 @@
         </p:nvSpPr>
         <p:spPr>
           <a:xfrm>
-            <a:off x="5059680" y="1435608"/>
-            <a:ext cx="2727960" cy="2112264"/>
+            <a:off x="5099304" y="1435608"/>
+            <a:ext cx="2630424" cy="2112264"/>
           </a:xfrm>
           <a:prstGeom prst="rect">
             <a:avLst/>
@@ -15878,8 +17054,8 @@
         </p:nvSpPr>
         <p:spPr>
           <a:xfrm>
-            <a:off x="8153400" y="1325880"/>
-            <a:ext cx="3642360" cy="2331720"/>
+            <a:off x="8095488" y="1325880"/>
+            <a:ext cx="3544824" cy="2331720"/>
           </a:xfrm>
           <a:prstGeom prst="roundRect">
             <a:avLst>
@@ -15912,7 +17088,7 @@
         </p:nvSpPr>
         <p:spPr>
           <a:xfrm>
-            <a:off x="8336280" y="1508760"/>
+            <a:off x="8278368" y="1508760"/>
             <a:ext cx="457200" cy="457200"/>
           </a:xfrm>
           <a:prstGeom prst="ellipse">
@@ -15932,7 +17108,7 @@
         </p:nvSpPr>
         <p:spPr>
           <a:xfrm>
-            <a:off x="8336280" y="1508760"/>
+            <a:off x="8278368" y="1508760"/>
             <a:ext cx="457200" cy="457200"/>
           </a:xfrm>
           <a:prstGeom prst="rect">
@@ -15971,8 +17147,8 @@
         </p:nvSpPr>
         <p:spPr>
           <a:xfrm>
-            <a:off x="8930640" y="1435608"/>
-            <a:ext cx="2727960" cy="2112264"/>
+            <a:off x="8872728" y="1435608"/>
+            <a:ext cx="2630424" cy="2112264"/>
           </a:xfrm>
           <a:prstGeom prst="rect">
             <a:avLst/>
@@ -16012,8 +17188,8 @@
         </p:nvSpPr>
         <p:spPr>
           <a:xfrm>
-            <a:off x="411480" y="3886200"/>
-            <a:ext cx="3642360" cy="2331720"/>
+            <a:off x="548640" y="3886200"/>
+            <a:ext cx="3544824" cy="2331720"/>
           </a:xfrm>
           <a:prstGeom prst="roundRect">
             <a:avLst>
@@ -16046,7 +17222,7 @@
         </p:nvSpPr>
         <p:spPr>
           <a:xfrm>
-            <a:off x="594360" y="4069080"/>
+            <a:off x="731520" y="4069080"/>
             <a:ext cx="457200" cy="457200"/>
           </a:xfrm>
           <a:prstGeom prst="ellipse">
@@ -16066,7 +17242,7 @@
         </p:nvSpPr>
         <p:spPr>
           <a:xfrm>
-            <a:off x="594360" y="4069080"/>
+            <a:off x="731520" y="4069080"/>
             <a:ext cx="457200" cy="457200"/>
           </a:xfrm>
           <a:prstGeom prst="rect">
@@ -16105,8 +17281,8 @@
         </p:nvSpPr>
         <p:spPr>
           <a:xfrm>
-            <a:off x="1188720" y="3995928"/>
-            <a:ext cx="2727960" cy="2112264"/>
+            <a:off x="1325880" y="3995928"/>
+            <a:ext cx="2630424" cy="2112264"/>
           </a:xfrm>
           <a:prstGeom prst="rect">
             <a:avLst/>
@@ -16146,8 +17322,8 @@
         </p:nvSpPr>
         <p:spPr>
           <a:xfrm>
-            <a:off x="4282440" y="3886200"/>
-            <a:ext cx="3642360" cy="2331720"/>
+            <a:off x="4322064" y="3886200"/>
+            <a:ext cx="3544824" cy="2331720"/>
           </a:xfrm>
           <a:prstGeom prst="roundRect">
             <a:avLst>
@@ -16180,7 +17356,7 @@
         </p:nvSpPr>
         <p:spPr>
           <a:xfrm>
-            <a:off x="4465320" y="4069080"/>
+            <a:off x="4504944" y="4069080"/>
             <a:ext cx="457200" cy="457200"/>
           </a:xfrm>
           <a:prstGeom prst="ellipse">
@@ -16200,7 +17376,7 @@
         </p:nvSpPr>
         <p:spPr>
           <a:xfrm>
-            <a:off x="4465320" y="4069080"/>
+            <a:off x="4504944" y="4069080"/>
             <a:ext cx="457200" cy="457200"/>
           </a:xfrm>
           <a:prstGeom prst="rect">
@@ -16239,8 +17415,8 @@
         </p:nvSpPr>
         <p:spPr>
           <a:xfrm>
-            <a:off x="5059680" y="3995928"/>
-            <a:ext cx="2727960" cy="2112264"/>
+            <a:off x="5099304" y="3995928"/>
+            <a:ext cx="2630424" cy="2112264"/>
           </a:xfrm>
           <a:prstGeom prst="rect">
             <a:avLst/>
@@ -16269,6 +17445,54 @@
               <a:t>Reunião de 30 min com o time</a:t>
             </a:r>
             <a:endParaRPr lang="en-US" sz="1800" dirty="0"/>
+          </a:p>
+        </p:txBody>
+      </p:sp>
+      <p:sp>
+        <p:nvSpPr>
+          <p:cNvPr id="25" name="Slide Number Placeholder 0"/>
+          <p:cNvSpPr>
+            <a:spLocks noGrp="1"/>
+          </p:cNvSpPr>
+          <p:nvPr>
+            <p:ph type="sldNum" sz="quarter" idx="4294967295"/>
+          </p:nvPr>
+        </p:nvSpPr>
+        <p:spPr>
+          <a:xfrm>
+            <a:off x="11292840" y="6556248"/>
+            <a:ext cx="548640" cy="256032"/>
+          </a:xfrm>
+          <a:prstGeom prst="rect">
+            <a:avLst/>
+          </a:prstGeom>
+          <a:extLst>
+            <a:ext uri="{C572A759-6A51-4108-AA02-DFA0A04FC94B}">
+              <ma14:wrappingTextBoxFlag xmlns:ma14="http://schemas.microsoft.com/office/mac/drawingml/2011/main" val="0"/>
+            </a:ext>
+          </a:extLst>
+        </p:spPr>
+        <p:txBody>
+          <a:bodyPr/>
+          <a:lstStyle>
+            <a:lvl1pPr>
+              <a:defRPr sz="900">
+                <a:solidFill>
+                  <a:srgbClr val="1B3A6B"/>
+                </a:solidFill>
+                <a:latin typeface="Arial"/>
+                <a:ea typeface="Arial"/>
+                <a:cs typeface="Arial"/>
+              </a:defRPr>
+            </a:lvl1pPr>
+          </a:lstStyle>
+          <a:p>
+            <a:pPr algn="r"/>
+            <a:fld id="{F7021451-1387-4CA6-816F-3879F97B5CBC}" type="slidenum">
+              <a:rPr b="1" lang="en-US"/>
+              <a:t>5</a:t>
+            </a:fld>
+            <a:endParaRPr lang="en-US"/>
           </a:p>
         </p:txBody>
       </p:sp>
@@ -16345,7 +17569,7 @@
         </p:blipFill>
         <p:spPr>
           <a:xfrm>
-            <a:off x="411480" y="6547104"/>
+            <a:off x="548640" y="6547104"/>
             <a:ext cx="274320" cy="274320"/>
           </a:xfrm>
           <a:prstGeom prst="rect">
@@ -16361,7 +17585,7 @@
         </p:nvSpPr>
         <p:spPr>
           <a:xfrm>
-            <a:off x="749808" y="6528816"/>
+            <a:off x="886968" y="6528816"/>
             <a:ext cx="6400800" cy="310896"/>
           </a:xfrm>
           <a:prstGeom prst="rect">
@@ -16401,7 +17625,7 @@
         <p:spPr>
           <a:xfrm>
             <a:off x="7132320" y="6528816"/>
-            <a:ext cx="4663440" cy="310896"/>
+            <a:ext cx="4023360" cy="310896"/>
           </a:xfrm>
           <a:prstGeom prst="rect">
             <a:avLst/>
@@ -16439,7 +17663,7 @@
         </p:nvSpPr>
         <p:spPr>
           <a:xfrm>
-            <a:off x="411480" y="384048"/>
+            <a:off x="548640" y="384048"/>
             <a:ext cx="82296" cy="658368"/>
           </a:xfrm>
           <a:prstGeom prst="rect">
@@ -16459,7 +17683,7 @@
         </p:nvSpPr>
         <p:spPr>
           <a:xfrm>
-            <a:off x="640080" y="292608"/>
+            <a:off x="777240" y="292608"/>
             <a:ext cx="10972800" cy="274320"/>
           </a:xfrm>
           <a:prstGeom prst="rect">
@@ -16498,8 +17722,8 @@
         </p:nvSpPr>
         <p:spPr>
           <a:xfrm>
-            <a:off x="640080" y="530352"/>
-            <a:ext cx="11155680" cy="566928"/>
+            <a:off x="777240" y="530352"/>
+            <a:ext cx="10881360" cy="566928"/>
           </a:xfrm>
           <a:prstGeom prst="rect">
             <a:avLst/>
@@ -16539,8 +17763,8 @@
         </p:nvSpPr>
         <p:spPr>
           <a:xfrm>
-            <a:off x="411480" y="1325880"/>
-            <a:ext cx="3642360" cy="2331720"/>
+            <a:off x="548640" y="1325880"/>
+            <a:ext cx="3544824" cy="2331720"/>
           </a:xfrm>
           <a:prstGeom prst="roundRect">
             <a:avLst>
@@ -16573,7 +17797,7 @@
         </p:nvSpPr>
         <p:spPr>
           <a:xfrm>
-            <a:off x="594360" y="1508760"/>
+            <a:off x="731520" y="1508760"/>
             <a:ext cx="457200" cy="457200"/>
           </a:xfrm>
           <a:prstGeom prst="ellipse">
@@ -16593,7 +17817,7 @@
         </p:nvSpPr>
         <p:spPr>
           <a:xfrm>
-            <a:off x="594360" y="1508760"/>
+            <a:off x="731520" y="1508760"/>
             <a:ext cx="457200" cy="457200"/>
           </a:xfrm>
           <a:prstGeom prst="rect">
@@ -16632,8 +17856,8 @@
         </p:nvSpPr>
         <p:spPr>
           <a:xfrm>
-            <a:off x="1188720" y="1435608"/>
-            <a:ext cx="2727960" cy="2112264"/>
+            <a:off x="1325880" y="1435608"/>
+            <a:ext cx="2630424" cy="2112264"/>
           </a:xfrm>
           <a:prstGeom prst="rect">
             <a:avLst/>
@@ -16651,7 +17875,7 @@
               <a:buNone/>
             </a:pPr>
             <a:r>
-              <a:rPr lang="en-US" sz="1600" dirty="0">
+              <a:rPr lang="en-US" sz="1800" dirty="0">
                 <a:solidFill>
                   <a:srgbClr val="1F2937"/>
                 </a:solidFill>
@@ -16661,7 +17885,7 @@
               </a:rPr>
               <a:t>Registrar a geração do mês de cada usina (e avisar o produtor)</a:t>
             </a:r>
-            <a:endParaRPr lang="en-US" sz="1600" dirty="0"/>
+            <a:endParaRPr lang="en-US" sz="1800" dirty="0"/>
           </a:p>
         </p:txBody>
       </p:sp>
@@ -16673,8 +17897,8 @@
         </p:nvSpPr>
         <p:spPr>
           <a:xfrm>
-            <a:off x="4282440" y="1325880"/>
-            <a:ext cx="3642360" cy="2331720"/>
+            <a:off x="4322064" y="1325880"/>
+            <a:ext cx="3544824" cy="2331720"/>
           </a:xfrm>
           <a:prstGeom prst="roundRect">
             <a:avLst>
@@ -16707,7 +17931,7 @@
         </p:nvSpPr>
         <p:spPr>
           <a:xfrm>
-            <a:off x="4465320" y="1508760"/>
+            <a:off x="4504944" y="1508760"/>
             <a:ext cx="457200" cy="457200"/>
           </a:xfrm>
           <a:prstGeom prst="ellipse">
@@ -16727,7 +17951,7 @@
         </p:nvSpPr>
         <p:spPr>
           <a:xfrm>
-            <a:off x="4465320" y="1508760"/>
+            <a:off x="4504944" y="1508760"/>
             <a:ext cx="457200" cy="457200"/>
           </a:xfrm>
           <a:prstGeom prst="rect">
@@ -16766,8 +17990,8 @@
         </p:nvSpPr>
         <p:spPr>
           <a:xfrm>
-            <a:off x="5059680" y="1435608"/>
-            <a:ext cx="2727960" cy="2112264"/>
+            <a:off x="5099304" y="1435608"/>
+            <a:ext cx="2630424" cy="2112264"/>
           </a:xfrm>
           <a:prstGeom prst="rect">
             <a:avLst/>
@@ -16785,7 +18009,7 @@
               <a:buNone/>
             </a:pPr>
             <a:r>
-              <a:rPr lang="en-US" sz="1600" dirty="0">
+              <a:rPr lang="en-US" sz="1800" dirty="0">
                 <a:solidFill>
                   <a:srgbClr val="1F2937"/>
                 </a:solidFill>
@@ -16795,7 +18019,7 @@
               </a:rPr>
               <a:t>Faturas chegando → revisar e aprovar (concentradas conforme o ciclo de leitura)</a:t>
             </a:r>
-            <a:endParaRPr lang="en-US" sz="1600" dirty="0"/>
+            <a:endParaRPr lang="en-US" sz="1800" dirty="0"/>
           </a:p>
         </p:txBody>
       </p:sp>
@@ -16807,8 +18031,8 @@
         </p:nvSpPr>
         <p:spPr>
           <a:xfrm>
-            <a:off x="8153400" y="1325880"/>
-            <a:ext cx="3642360" cy="2331720"/>
+            <a:off x="8095488" y="1325880"/>
+            <a:ext cx="3544824" cy="2331720"/>
           </a:xfrm>
           <a:prstGeom prst="roundRect">
             <a:avLst>
@@ -16841,7 +18065,7 @@
         </p:nvSpPr>
         <p:spPr>
           <a:xfrm>
-            <a:off x="8336280" y="1508760"/>
+            <a:off x="8278368" y="1508760"/>
             <a:ext cx="457200" cy="457200"/>
           </a:xfrm>
           <a:prstGeom prst="ellipse">
@@ -16861,7 +18085,7 @@
         </p:nvSpPr>
         <p:spPr>
           <a:xfrm>
-            <a:off x="8336280" y="1508760"/>
+            <a:off x="8278368" y="1508760"/>
             <a:ext cx="457200" cy="457200"/>
           </a:xfrm>
           <a:prstGeom prst="rect">
@@ -16900,8 +18124,8 @@
         </p:nvSpPr>
         <p:spPr>
           <a:xfrm>
-            <a:off x="8930640" y="1435608"/>
-            <a:ext cx="2727960" cy="2112264"/>
+            <a:off x="8872728" y="1435608"/>
+            <a:ext cx="2630424" cy="2112264"/>
           </a:xfrm>
           <a:prstGeom prst="rect">
             <a:avLst/>
@@ -16919,7 +18143,7 @@
               <a:buNone/>
             </a:pPr>
             <a:r>
-              <a:rPr lang="en-US" sz="1600" dirty="0">
+              <a:rPr lang="en-US" sz="1800" dirty="0">
                 <a:solidFill>
                   <a:srgbClr val="1F2937"/>
                 </a:solidFill>
@@ -16929,7 +18153,7 @@
               </a:rPr>
               <a:t>Cobranças → conferir, abrir, emitir</a:t>
             </a:r>
-            <a:endParaRPr lang="en-US" sz="1600" dirty="0"/>
+            <a:endParaRPr lang="en-US" sz="1800" dirty="0"/>
           </a:p>
         </p:txBody>
       </p:sp>
@@ -16941,8 +18165,8 @@
         </p:nvSpPr>
         <p:spPr>
           <a:xfrm>
-            <a:off x="411480" y="3886200"/>
-            <a:ext cx="3642360" cy="2331720"/>
+            <a:off x="548640" y="3886200"/>
+            <a:ext cx="3544824" cy="2331720"/>
           </a:xfrm>
           <a:prstGeom prst="roundRect">
             <a:avLst>
@@ -16975,7 +18199,7 @@
         </p:nvSpPr>
         <p:spPr>
           <a:xfrm>
-            <a:off x="594360" y="4069080"/>
+            <a:off x="731520" y="4069080"/>
             <a:ext cx="457200" cy="457200"/>
           </a:xfrm>
           <a:prstGeom prst="ellipse">
@@ -16995,7 +18219,7 @@
         </p:nvSpPr>
         <p:spPr>
           <a:xfrm>
-            <a:off x="594360" y="4069080"/>
+            <a:off x="731520" y="4069080"/>
             <a:ext cx="457200" cy="457200"/>
           </a:xfrm>
           <a:prstGeom prst="rect">
@@ -17034,8 +18258,8 @@
         </p:nvSpPr>
         <p:spPr>
           <a:xfrm>
-            <a:off x="1188720" y="3995928"/>
-            <a:ext cx="2727960" cy="2112264"/>
+            <a:off x="1325880" y="3995928"/>
+            <a:ext cx="2630424" cy="2112264"/>
           </a:xfrm>
           <a:prstGeom prst="rect">
             <a:avLst/>
@@ -17053,7 +18277,7 @@
               <a:buNone/>
             </a:pPr>
             <a:r>
-              <a:rPr lang="en-US" sz="1600" dirty="0">
+              <a:rPr lang="en-US" sz="1800" dirty="0">
                 <a:solidFill>
                   <a:srgbClr val="1F2937"/>
                 </a:solidFill>
@@ -17063,7 +18287,7 @@
               </a:rPr>
               <a:t>Atualizar a lista de rateio (entradas, saídas, ajustes) — dia fixo</a:t>
             </a:r>
-            <a:endParaRPr lang="en-US" sz="1600" dirty="0"/>
+            <a:endParaRPr lang="en-US" sz="1800" dirty="0"/>
           </a:p>
         </p:txBody>
       </p:sp>
@@ -17075,8 +18299,8 @@
         </p:nvSpPr>
         <p:spPr>
           <a:xfrm>
-            <a:off x="4282440" y="3886200"/>
-            <a:ext cx="3642360" cy="2331720"/>
+            <a:off x="4322064" y="3886200"/>
+            <a:ext cx="3544824" cy="2331720"/>
           </a:xfrm>
           <a:prstGeom prst="roundRect">
             <a:avLst>
@@ -17109,7 +18333,7 @@
         </p:nvSpPr>
         <p:spPr>
           <a:xfrm>
-            <a:off x="4465320" y="4069080"/>
+            <a:off x="4504944" y="4069080"/>
             <a:ext cx="457200" cy="457200"/>
           </a:xfrm>
           <a:prstGeom prst="ellipse">
@@ -17129,7 +18353,7 @@
         </p:nvSpPr>
         <p:spPr>
           <a:xfrm>
-            <a:off x="4465320" y="4069080"/>
+            <a:off x="4504944" y="4069080"/>
             <a:ext cx="457200" cy="457200"/>
           </a:xfrm>
           <a:prstGeom prst="rect">
@@ -17168,8 +18392,8 @@
         </p:nvSpPr>
         <p:spPr>
           <a:xfrm>
-            <a:off x="5059680" y="3995928"/>
-            <a:ext cx="2727960" cy="2112264"/>
+            <a:off x="5099304" y="3995928"/>
+            <a:ext cx="2630424" cy="2112264"/>
           </a:xfrm>
           <a:prstGeom prst="rect">
             <a:avLst/>
@@ -17187,7 +18411,7 @@
               <a:buNone/>
             </a:pPr>
             <a:r>
-              <a:rPr lang="en-US" sz="1600" dirty="0">
+              <a:rPr lang="en-US" sz="1800" dirty="0">
                 <a:solidFill>
                   <a:srgbClr val="1F2937"/>
                 </a:solidFill>
@@ -17197,7 +18421,7 @@
               </a:rPr>
               <a:t>Repasse ao produtor e relatório</a:t>
             </a:r>
-            <a:endParaRPr lang="en-US" sz="1600" dirty="0"/>
+            <a:endParaRPr lang="en-US" sz="1800" dirty="0"/>
           </a:p>
         </p:txBody>
       </p:sp>
@@ -17209,8 +18433,8 @@
         </p:nvSpPr>
         <p:spPr>
           <a:xfrm>
-            <a:off x="8153400" y="3886200"/>
-            <a:ext cx="3642360" cy="2331720"/>
+            <a:off x="8095488" y="3886200"/>
+            <a:ext cx="3544824" cy="2331720"/>
           </a:xfrm>
           <a:prstGeom prst="roundRect">
             <a:avLst>
@@ -17243,7 +18467,7 @@
         </p:nvSpPr>
         <p:spPr>
           <a:xfrm>
-            <a:off x="8336280" y="4069080"/>
+            <a:off x="8278368" y="4069080"/>
             <a:ext cx="457200" cy="457200"/>
           </a:xfrm>
           <a:prstGeom prst="ellipse">
@@ -17263,7 +18487,7 @@
         </p:nvSpPr>
         <p:spPr>
           <a:xfrm>
-            <a:off x="8336280" y="4069080"/>
+            <a:off x="8278368" y="4069080"/>
             <a:ext cx="457200" cy="457200"/>
           </a:xfrm>
           <a:prstGeom prst="rect">
@@ -17302,8 +18526,8 @@
         </p:nvSpPr>
         <p:spPr>
           <a:xfrm>
-            <a:off x="8930640" y="3995928"/>
-            <a:ext cx="2727960" cy="2112264"/>
+            <a:off x="8872728" y="3995928"/>
+            <a:ext cx="2630424" cy="2112264"/>
           </a:xfrm>
           <a:prstGeom prst="rect">
             <a:avLst/>
@@ -17321,7 +18545,7 @@
               <a:buNone/>
             </a:pPr>
             <a:r>
-              <a:rPr lang="en-US" sz="1600" dirty="0">
+              <a:rPr lang="en-US" sz="1800" dirty="0">
                 <a:solidFill>
                   <a:srgbClr val="1F2937"/>
                 </a:solidFill>
@@ -17331,7 +18555,55 @@
               </a:rPr>
               <a:t>Fechamento: indicadores do mês e relatório executivo</a:t>
             </a:r>
-            <a:endParaRPr lang="en-US" sz="1600" dirty="0"/>
+            <a:endParaRPr lang="en-US" sz="1800" dirty="0"/>
+          </a:p>
+        </p:txBody>
+      </p:sp>
+      <p:sp>
+        <p:nvSpPr>
+          <p:cNvPr id="25" name="Slide Number Placeholder 0"/>
+          <p:cNvSpPr>
+            <a:spLocks noGrp="1"/>
+          </p:cNvSpPr>
+          <p:nvPr>
+            <p:ph type="sldNum" sz="quarter" idx="4294967295"/>
+          </p:nvPr>
+        </p:nvSpPr>
+        <p:spPr>
+          <a:xfrm>
+            <a:off x="11292840" y="6556248"/>
+            <a:ext cx="548640" cy="256032"/>
+          </a:xfrm>
+          <a:prstGeom prst="rect">
+            <a:avLst/>
+          </a:prstGeom>
+          <a:extLst>
+            <a:ext uri="{C572A759-6A51-4108-AA02-DFA0A04FC94B}">
+              <ma14:wrappingTextBoxFlag xmlns:ma14="http://schemas.microsoft.com/office/mac/drawingml/2011/main" val="0"/>
+            </a:ext>
+          </a:extLst>
+        </p:spPr>
+        <p:txBody>
+          <a:bodyPr/>
+          <a:lstStyle>
+            <a:lvl1pPr>
+              <a:defRPr sz="900">
+                <a:solidFill>
+                  <a:srgbClr val="1B3A6B"/>
+                </a:solidFill>
+                <a:latin typeface="Arial"/>
+                <a:ea typeface="Arial"/>
+                <a:cs typeface="Arial"/>
+              </a:defRPr>
+            </a:lvl1pPr>
+          </a:lstStyle>
+          <a:p>
+            <a:pPr algn="r"/>
+            <a:fld id="{F7021451-1387-4CA6-816F-3879F97B5CBC}" type="slidenum">
+              <a:rPr b="1" lang="en-US"/>
+              <a:t>6</a:t>
+            </a:fld>
+            <a:endParaRPr lang="en-US"/>
           </a:p>
         </p:txBody>
       </p:sp>
@@ -17408,7 +18680,7 @@
         </p:blipFill>
         <p:spPr>
           <a:xfrm>
-            <a:off x="411480" y="6547104"/>
+            <a:off x="548640" y="6547104"/>
             <a:ext cx="274320" cy="274320"/>
           </a:xfrm>
           <a:prstGeom prst="rect">
@@ -17424,7 +18696,7 @@
         </p:nvSpPr>
         <p:spPr>
           <a:xfrm>
-            <a:off x="749808" y="6528816"/>
+            <a:off x="886968" y="6528816"/>
             <a:ext cx="6400800" cy="310896"/>
           </a:xfrm>
           <a:prstGeom prst="rect">
@@ -17464,7 +18736,7 @@
         <p:spPr>
           <a:xfrm>
             <a:off x="7132320" y="6528816"/>
-            <a:ext cx="4663440" cy="310896"/>
+            <a:ext cx="4023360" cy="310896"/>
           </a:xfrm>
           <a:prstGeom prst="rect">
             <a:avLst/>
@@ -17502,7 +18774,7 @@
         </p:nvSpPr>
         <p:spPr>
           <a:xfrm>
-            <a:off x="411480" y="384048"/>
+            <a:off x="548640" y="384048"/>
             <a:ext cx="82296" cy="658368"/>
           </a:xfrm>
           <a:prstGeom prst="rect">
@@ -17522,7 +18794,7 @@
         </p:nvSpPr>
         <p:spPr>
           <a:xfrm>
-            <a:off x="640080" y="292608"/>
+            <a:off x="777240" y="292608"/>
             <a:ext cx="10972800" cy="274320"/>
           </a:xfrm>
           <a:prstGeom prst="rect">
@@ -17561,8 +18833,8 @@
         </p:nvSpPr>
         <p:spPr>
           <a:xfrm>
-            <a:off x="640080" y="530352"/>
-            <a:ext cx="11155680" cy="566928"/>
+            <a:off x="777240" y="530352"/>
+            <a:ext cx="10881360" cy="566928"/>
           </a:xfrm>
           <a:prstGeom prst="rect">
             <a:avLst/>
@@ -17602,8 +18874,8 @@
         </p:nvSpPr>
         <p:spPr>
           <a:xfrm>
-            <a:off x="411480" y="1325880"/>
-            <a:ext cx="3642360" cy="2331720"/>
+            <a:off x="548640" y="1325880"/>
+            <a:ext cx="3544824" cy="2331720"/>
           </a:xfrm>
           <a:prstGeom prst="roundRect">
             <a:avLst>
@@ -17636,7 +18908,7 @@
         </p:nvSpPr>
         <p:spPr>
           <a:xfrm>
-            <a:off x="594360" y="1508760"/>
+            <a:off x="731520" y="1508760"/>
             <a:ext cx="457200" cy="457200"/>
           </a:xfrm>
           <a:prstGeom prst="ellipse">
@@ -17656,7 +18928,7 @@
         </p:nvSpPr>
         <p:spPr>
           <a:xfrm>
-            <a:off x="594360" y="1508760"/>
+            <a:off x="731520" y="1508760"/>
             <a:ext cx="457200" cy="457200"/>
           </a:xfrm>
           <a:prstGeom prst="rect">
@@ -17695,8 +18967,8 @@
         </p:nvSpPr>
         <p:spPr>
           <a:xfrm>
-            <a:off x="1188720" y="1435608"/>
-            <a:ext cx="2727960" cy="2112264"/>
+            <a:off x="1325880" y="1435608"/>
+            <a:ext cx="2630424" cy="2112264"/>
           </a:xfrm>
           <a:prstGeom prst="rect">
             <a:avLst/>
@@ -17736,8 +19008,8 @@
         </p:nvSpPr>
         <p:spPr>
           <a:xfrm>
-            <a:off x="4282440" y="1325880"/>
-            <a:ext cx="3642360" cy="2331720"/>
+            <a:off x="4322064" y="1325880"/>
+            <a:ext cx="3544824" cy="2331720"/>
           </a:xfrm>
           <a:prstGeom prst="roundRect">
             <a:avLst>
@@ -17770,7 +19042,7 @@
         </p:nvSpPr>
         <p:spPr>
           <a:xfrm>
-            <a:off x="4465320" y="1508760"/>
+            <a:off x="4504944" y="1508760"/>
             <a:ext cx="457200" cy="457200"/>
           </a:xfrm>
           <a:prstGeom prst="ellipse">
@@ -17790,7 +19062,7 @@
         </p:nvSpPr>
         <p:spPr>
           <a:xfrm>
-            <a:off x="4465320" y="1508760"/>
+            <a:off x="4504944" y="1508760"/>
             <a:ext cx="457200" cy="457200"/>
           </a:xfrm>
           <a:prstGeom prst="rect">
@@ -17829,8 +19101,8 @@
         </p:nvSpPr>
         <p:spPr>
           <a:xfrm>
-            <a:off x="5059680" y="1435608"/>
-            <a:ext cx="2727960" cy="2112264"/>
+            <a:off x="5099304" y="1435608"/>
+            <a:ext cx="2630424" cy="2112264"/>
           </a:xfrm>
           <a:prstGeom prst="rect">
             <a:avLst/>
@@ -17870,8 +19142,8 @@
         </p:nvSpPr>
         <p:spPr>
           <a:xfrm>
-            <a:off x="8153400" y="1325880"/>
-            <a:ext cx="3642360" cy="2331720"/>
+            <a:off x="8095488" y="1325880"/>
+            <a:ext cx="3544824" cy="2331720"/>
           </a:xfrm>
           <a:prstGeom prst="roundRect">
             <a:avLst>
@@ -17904,7 +19176,7 @@
         </p:nvSpPr>
         <p:spPr>
           <a:xfrm>
-            <a:off x="8336280" y="1508760"/>
+            <a:off x="8278368" y="1508760"/>
             <a:ext cx="457200" cy="457200"/>
           </a:xfrm>
           <a:prstGeom prst="ellipse">
@@ -17924,7 +19196,7 @@
         </p:nvSpPr>
         <p:spPr>
           <a:xfrm>
-            <a:off x="8336280" y="1508760"/>
+            <a:off x="8278368" y="1508760"/>
             <a:ext cx="457200" cy="457200"/>
           </a:xfrm>
           <a:prstGeom prst="rect">
@@ -17963,8 +19235,8 @@
         </p:nvSpPr>
         <p:spPr>
           <a:xfrm>
-            <a:off x="8930640" y="1435608"/>
-            <a:ext cx="2727960" cy="2112264"/>
+            <a:off x="8872728" y="1435608"/>
+            <a:ext cx="2630424" cy="2112264"/>
           </a:xfrm>
           <a:prstGeom prst="rect">
             <a:avLst/>
@@ -18004,8 +19276,8 @@
         </p:nvSpPr>
         <p:spPr>
           <a:xfrm>
-            <a:off x="411480" y="3886200"/>
-            <a:ext cx="3642360" cy="2331720"/>
+            <a:off x="548640" y="3886200"/>
+            <a:ext cx="3544824" cy="2331720"/>
           </a:xfrm>
           <a:prstGeom prst="roundRect">
             <a:avLst>
@@ -18038,7 +19310,7 @@
         </p:nvSpPr>
         <p:spPr>
           <a:xfrm>
-            <a:off x="594360" y="4069080"/>
+            <a:off x="731520" y="4069080"/>
             <a:ext cx="457200" cy="457200"/>
           </a:xfrm>
           <a:prstGeom prst="ellipse">
@@ -18058,7 +19330,7 @@
         </p:nvSpPr>
         <p:spPr>
           <a:xfrm>
-            <a:off x="594360" y="4069080"/>
+            <a:off x="731520" y="4069080"/>
             <a:ext cx="457200" cy="457200"/>
           </a:xfrm>
           <a:prstGeom prst="rect">
@@ -18097,8 +19369,8 @@
         </p:nvSpPr>
         <p:spPr>
           <a:xfrm>
-            <a:off x="1188720" y="3995928"/>
-            <a:ext cx="2727960" cy="2112264"/>
+            <a:off x="1325880" y="3995928"/>
+            <a:ext cx="2630424" cy="2112264"/>
           </a:xfrm>
           <a:prstGeom prst="rect">
             <a:avLst/>
@@ -18138,8 +19410,8 @@
         </p:nvSpPr>
         <p:spPr>
           <a:xfrm>
-            <a:off x="4282440" y="3886200"/>
-            <a:ext cx="3642360" cy="2331720"/>
+            <a:off x="4322064" y="3886200"/>
+            <a:ext cx="3544824" cy="2331720"/>
           </a:xfrm>
           <a:prstGeom prst="roundRect">
             <a:avLst>
@@ -18172,7 +19444,7 @@
         </p:nvSpPr>
         <p:spPr>
           <a:xfrm>
-            <a:off x="4465320" y="4069080"/>
+            <a:off x="4504944" y="4069080"/>
             <a:ext cx="457200" cy="457200"/>
           </a:xfrm>
           <a:prstGeom prst="ellipse">
@@ -18192,7 +19464,7 @@
         </p:nvSpPr>
         <p:spPr>
           <a:xfrm>
-            <a:off x="4465320" y="4069080"/>
+            <a:off x="4504944" y="4069080"/>
             <a:ext cx="457200" cy="457200"/>
           </a:xfrm>
           <a:prstGeom prst="rect">
@@ -18231,8 +19503,8 @@
         </p:nvSpPr>
         <p:spPr>
           <a:xfrm>
-            <a:off x="5059680" y="3995928"/>
-            <a:ext cx="2727960" cy="2112264"/>
+            <a:off x="5099304" y="3995928"/>
+            <a:ext cx="2630424" cy="2112264"/>
           </a:xfrm>
           <a:prstGeom prst="rect">
             <a:avLst/>
@@ -18272,8 +19544,8 @@
         </p:nvSpPr>
         <p:spPr>
           <a:xfrm>
-            <a:off x="8153400" y="3886200"/>
-            <a:ext cx="3642360" cy="2331720"/>
+            <a:off x="8095488" y="3886200"/>
+            <a:ext cx="3544824" cy="2331720"/>
           </a:xfrm>
           <a:prstGeom prst="roundRect">
             <a:avLst>
@@ -18306,7 +19578,7 @@
         </p:nvSpPr>
         <p:spPr>
           <a:xfrm>
-            <a:off x="8336280" y="4069080"/>
+            <a:off x="8278368" y="4069080"/>
             <a:ext cx="457200" cy="457200"/>
           </a:xfrm>
           <a:prstGeom prst="ellipse">
@@ -18326,7 +19598,7 @@
         </p:nvSpPr>
         <p:spPr>
           <a:xfrm>
-            <a:off x="8336280" y="4069080"/>
+            <a:off x="8278368" y="4069080"/>
             <a:ext cx="457200" cy="457200"/>
           </a:xfrm>
           <a:prstGeom prst="rect">
@@ -18365,8 +19637,8 @@
         </p:nvSpPr>
         <p:spPr>
           <a:xfrm>
-            <a:off x="8930640" y="3995928"/>
-            <a:ext cx="2727960" cy="2112264"/>
+            <a:off x="8872728" y="3995928"/>
+            <a:ext cx="2630424" cy="2112264"/>
           </a:xfrm>
           <a:prstGeom prst="rect">
             <a:avLst/>
@@ -18395,6 +19667,54 @@
               <a:t>com responsável</a:t>
             </a:r>
             <a:endParaRPr lang="en-US" sz="1800" dirty="0"/>
+          </a:p>
+        </p:txBody>
+      </p:sp>
+      <p:sp>
+        <p:nvSpPr>
+          <p:cNvPr id="25" name="Slide Number Placeholder 0"/>
+          <p:cNvSpPr>
+            <a:spLocks noGrp="1"/>
+          </p:cNvSpPr>
+          <p:nvPr>
+            <p:ph type="sldNum" sz="quarter" idx="4294967295"/>
+          </p:nvPr>
+        </p:nvSpPr>
+        <p:spPr>
+          <a:xfrm>
+            <a:off x="11292840" y="6556248"/>
+            <a:ext cx="548640" cy="256032"/>
+          </a:xfrm>
+          <a:prstGeom prst="rect">
+            <a:avLst/>
+          </a:prstGeom>
+          <a:extLst>
+            <a:ext uri="{C572A759-6A51-4108-AA02-DFA0A04FC94B}">
+              <ma14:wrappingTextBoxFlag xmlns:ma14="http://schemas.microsoft.com/office/mac/drawingml/2011/main" val="0"/>
+            </a:ext>
+          </a:extLst>
+        </p:spPr>
+        <p:txBody>
+          <a:bodyPr/>
+          <a:lstStyle>
+            <a:lvl1pPr>
+              <a:defRPr sz="900">
+                <a:solidFill>
+                  <a:srgbClr val="1B3A6B"/>
+                </a:solidFill>
+                <a:latin typeface="Arial"/>
+                <a:ea typeface="Arial"/>
+                <a:cs typeface="Arial"/>
+              </a:defRPr>
+            </a:lvl1pPr>
+          </a:lstStyle>
+          <a:p>
+            <a:pPr algn="r"/>
+            <a:fld id="{F7021451-1387-4CA6-816F-3879F97B5CBC}" type="slidenum">
+              <a:rPr b="1" lang="en-US"/>
+              <a:t>7</a:t>
+            </a:fld>
+            <a:endParaRPr lang="en-US"/>
           </a:p>
         </p:txBody>
       </p:sp>
@@ -18458,6 +19778,45 @@
         </p:nvSpPr>
         <p:spPr>
           <a:xfrm>
+            <a:off x="457200" y="548640"/>
+            <a:ext cx="3474720" cy="1737360"/>
+          </a:xfrm>
+          <a:prstGeom prst="rect">
+            <a:avLst/>
+          </a:prstGeom>
+          <a:noFill/>
+          <a:ln/>
+        </p:spPr>
+        <p:txBody>
+          <a:bodyPr wrap="square" rtlCol="0" anchor="ctr"/>
+          <a:lstStyle/>
+          <a:p>
+            <a:pPr indent="0" marL="0">
+              <a:buNone/>
+            </a:pPr>
+            <a:r>
+              <a:rPr lang="en-US" sz="11000" b="1" dirty="0">
+                <a:solidFill>
+                  <a:srgbClr val="11396F"/>
+                </a:solidFill>
+                <a:latin typeface="Arial" pitchFamily="34" charset="0"/>
+                <a:ea typeface="Arial" pitchFamily="34" charset="-122"/>
+                <a:cs typeface="Arial" pitchFamily="34" charset="-120"/>
+              </a:rPr>
+              <a:t>02</a:t>
+            </a:r>
+            <a:endParaRPr lang="en-US" sz="11000" dirty="0"/>
+          </a:p>
+        </p:txBody>
+      </p:sp>
+      <p:sp>
+        <p:nvSpPr>
+          <p:cNvPr id="4" name="Text 2"/>
+          <p:cNvSpPr/>
+          <p:nvPr/>
+        </p:nvSpPr>
+        <p:spPr>
+          <a:xfrm>
             <a:off x="548640" y="2194560"/>
             <a:ext cx="3291840" cy="548640"/>
           </a:xfrm>
@@ -18491,7 +19850,46 @@
       </p:sp>
       <p:sp>
         <p:nvSpPr>
-          <p:cNvPr id="4" name="Text 2"/>
+          <p:cNvPr id="5" name="Text 3"/>
+          <p:cNvSpPr/>
+          <p:nvPr/>
+        </p:nvSpPr>
+        <p:spPr>
+          <a:xfrm>
+            <a:off x="548640" y="3200400"/>
+            <a:ext cx="3383280" cy="457200"/>
+          </a:xfrm>
+          <a:prstGeom prst="rect">
+            <a:avLst/>
+          </a:prstGeom>
+          <a:noFill/>
+          <a:ln/>
+        </p:spPr>
+        <p:txBody>
+          <a:bodyPr wrap="square" rtlCol="0" anchor="ctr"/>
+          <a:lstStyle/>
+          <a:p>
+            <a:pPr indent="0" marL="0">
+              <a:buNone/>
+            </a:pPr>
+            <a:r>
+              <a:rPr lang="en-US" sz="1100" dirty="0">
+                <a:solidFill>
+                  <a:srgbClr val="C7D2E3"/>
+                </a:solidFill>
+                <a:latin typeface="Arial" pitchFamily="34" charset="0"/>
+                <a:ea typeface="Arial" pitchFamily="34" charset="-122"/>
+                <a:cs typeface="Arial" pitchFamily="34" charset="-120"/>
+              </a:rPr>
+              <a:t>M9 · Etapa 3 · Operação ponta a ponta</a:t>
+            </a:r>
+            <a:endParaRPr lang="en-US" sz="1100" dirty="0"/>
+          </a:p>
+        </p:txBody>
+      </p:sp>
+      <p:sp>
+        <p:nvSpPr>
+          <p:cNvPr id="6" name="Text 4"/>
           <p:cNvSpPr/>
           <p:nvPr/>
         </p:nvSpPr>
@@ -18530,7 +19928,7 @@
       </p:sp>
       <p:pic>
         <p:nvPicPr>
-          <p:cNvPr id="5" name="Image 0" descr="/www/wwwroot/rexar/gdsolar/docs/curso/slides/assets/logo-gdsolar.png">    </p:cNvPr>
+          <p:cNvPr id="7" name="Image 0" descr="/www/wwwroot/rexar/gdsolar/docs/curso/slides/assets/logo-gdsolar.png">    </p:cNvPr>
           <p:cNvPicPr>
             <a:picLocks noChangeAspect="1"/>
           </p:cNvPicPr>
@@ -18554,7 +19952,7 @@
       </p:pic>
       <p:sp>
         <p:nvSpPr>
-          <p:cNvPr id="6" name="Text 3"/>
+          <p:cNvPr id="8" name="Text 5"/>
           <p:cNvSpPr/>
           <p:nvPr/>
         </p:nvSpPr>
@@ -18595,7 +19993,7 @@
       </p:sp>
       <p:sp>
         <p:nvSpPr>
-          <p:cNvPr id="7" name="Text 4"/>
+          <p:cNvPr id="9" name="Text 6"/>
           <p:cNvSpPr/>
           <p:nvPr/>
         </p:nvSpPr>
@@ -18636,7 +20034,7 @@
       </p:sp>
       <p:sp>
         <p:nvSpPr>
-          <p:cNvPr id="8" name="Text 5"/>
+          <p:cNvPr id="10" name="Text 7"/>
           <p:cNvSpPr/>
           <p:nvPr/>
         </p:nvSpPr>
@@ -18815,7 +20213,7 @@
         </p:blipFill>
         <p:spPr>
           <a:xfrm>
-            <a:off x="411480" y="6547104"/>
+            <a:off x="548640" y="6547104"/>
             <a:ext cx="274320" cy="274320"/>
           </a:xfrm>
           <a:prstGeom prst="rect">
@@ -18831,7 +20229,7 @@
         </p:nvSpPr>
         <p:spPr>
           <a:xfrm>
-            <a:off x="749808" y="6528816"/>
+            <a:off x="886968" y="6528816"/>
             <a:ext cx="6400800" cy="310896"/>
           </a:xfrm>
           <a:prstGeom prst="rect">
@@ -18871,7 +20269,7 @@
         <p:spPr>
           <a:xfrm>
             <a:off x="7132320" y="6528816"/>
-            <a:ext cx="4663440" cy="310896"/>
+            <a:ext cx="4023360" cy="310896"/>
           </a:xfrm>
           <a:prstGeom prst="rect">
             <a:avLst/>
@@ -18909,7 +20307,7 @@
         </p:nvSpPr>
         <p:spPr>
           <a:xfrm>
-            <a:off x="411480" y="384048"/>
+            <a:off x="548640" y="384048"/>
             <a:ext cx="82296" cy="658368"/>
           </a:xfrm>
           <a:prstGeom prst="rect">
@@ -18929,7 +20327,7 @@
         </p:nvSpPr>
         <p:spPr>
           <a:xfrm>
-            <a:off x="640080" y="292608"/>
+            <a:off x="777240" y="292608"/>
             <a:ext cx="10972800" cy="274320"/>
           </a:xfrm>
           <a:prstGeom prst="rect">
@@ -18968,8 +20366,8 @@
         </p:nvSpPr>
         <p:spPr>
           <a:xfrm>
-            <a:off x="640080" y="530352"/>
-            <a:ext cx="11155680" cy="566928"/>
+            <a:off x="777240" y="530352"/>
+            <a:ext cx="10881360" cy="566928"/>
           </a:xfrm>
           <a:prstGeom prst="rect">
             <a:avLst/>
@@ -19106,6 +20504,54 @@
               <a:t>Sistema: tarefa agendada falhou · tarefa em fila esgotou tentativas · conta Mercado Pago ausente · webhook sem chave secreta</a:t>
             </a:r>
             <a:endParaRPr lang="en-US" sz="1200" dirty="0"/>
+          </a:p>
+        </p:txBody>
+      </p:sp>
+      <p:sp>
+        <p:nvSpPr>
+          <p:cNvPr id="25" name="Slide Number Placeholder 0"/>
+          <p:cNvSpPr>
+            <a:spLocks noGrp="1"/>
+          </p:cNvSpPr>
+          <p:nvPr>
+            <p:ph type="sldNum" sz="quarter" idx="4294967295"/>
+          </p:nvPr>
+        </p:nvSpPr>
+        <p:spPr>
+          <a:xfrm>
+            <a:off x="11292840" y="6556248"/>
+            <a:ext cx="548640" cy="256032"/>
+          </a:xfrm>
+          <a:prstGeom prst="rect">
+            <a:avLst/>
+          </a:prstGeom>
+          <a:extLst>
+            <a:ext uri="{C572A759-6A51-4108-AA02-DFA0A04FC94B}">
+              <ma14:wrappingTextBoxFlag xmlns:ma14="http://schemas.microsoft.com/office/mac/drawingml/2011/main" val="0"/>
+            </a:ext>
+          </a:extLst>
+        </p:spPr>
+        <p:txBody>
+          <a:bodyPr/>
+          <a:lstStyle>
+            <a:lvl1pPr>
+              <a:defRPr sz="900">
+                <a:solidFill>
+                  <a:srgbClr val="1B3A6B"/>
+                </a:solidFill>
+                <a:latin typeface="Arial"/>
+                <a:ea typeface="Arial"/>
+                <a:cs typeface="Arial"/>
+              </a:defRPr>
+            </a:lvl1pPr>
+          </a:lstStyle>
+          <a:p>
+            <a:pPr algn="r"/>
+            <a:fld id="{F7021451-1387-4CA6-816F-3879F97B5CBC}" type="slidenum">
+              <a:rPr b="1" lang="en-US"/>
+              <a:t>9</a:t>
+            </a:fld>
+            <a:endParaRPr lang="en-US"/>
           </a:p>
         </p:txBody>
       </p:sp>

--- a/docs/curso/slides/m09-operacao.pptx
+++ b/docs/curso/slides/m09-operacao.pptx
@@ -31,9 +31,13 @@
     <p:sldId id="279" r:id="rId25"/>
     <p:sldId id="280" r:id="rId26"/>
     <p:sldId id="281" r:id="rId27"/>
+    <p:sldId id="282" r:id="rId28"/>
+    <p:sldId id="283" r:id="rId29"/>
+    <p:sldId id="284" r:id="rId30"/>
+    <p:sldId id="285" r:id="rId31"/>
   </p:sldIdLst>
   <p:notesMasterIdLst>
-    <p:notesMasterId r:id="rId28"/>
+    <p:notesMasterId r:id="rId32"/>
   </p:notesMasterIdLst>
   <p:sldSz cx="12192000" cy="6858000"/>
   <p:notesSz cx="6858000" cy="12192000"/>
@@ -615,9 +619,9 @@
           <a:p>
             <a:r>
               <a:rPr lang="en-US" dirty="0"/>
-              <a:t>Cada alerta tem uma severidade. Os críticos ameaçam a receita ou os clientes agora — credencial do Mercado Pago recusada, energia alocada acima da disponível, rotina de importação parada: trate no mesmo dia. Os avisos pedem ação, mas não são urgentes. E os informativos servem para acompanhar. Na fila diária, a ordem é: críticos, depois o que tem data — como cobranças perto do vencimento —, depois o resto.
-Duas características deixam os alertas úteis em vez de barulhentos. Primeiro, cada problema gera um único alerta — por módulo, tipo e registro. Se a mesma caixa de e-mail falha dez vezes, você vê um alerta, renovado, e não dez. Segundo, o alerta se resolve sozinho quando a causa desaparece: a caixa voltou a funcionar, a fatura foi revisada, a geração foi registrada. Você não precisa ficar limpando a lista: ela mostra a situação real. Você também pode marcar um alerta como resolvido manualmente, ou como ignorado, quando ele não se aplica — por exemplo, uma usina em manutenção programada —, e a varredura respeita essa decisão.
-O administrador vê todos os alertas. O consultor vê apenas os alertas financeiros da própria carteira — lembretes, cobranças sem boleto, boletos vencidos —, muitas vezes já com o link do WhatsApp e a mensagem pronta. Ele não vê alertas de faturas nem de sistema, que são responsabilidade da operação. Assim, cada pessoa tem a própria fila, sem ruído.</a:t>
+              <a:t>A severidade define a ordem: críticos no mesmo dia, depois o que tem data, depois o resto.
+Cada problema gera um alerta único, que se resolve sozinho quando a causa desaparece. A lista mostra a situação real.
+Cada perfil vê a sua fila. A meta diária é simples: nenhum alerta crítico.</a:t>
             </a:r>
             <a:endParaRPr lang="en-US" dirty="0"/>
           </a:p>
@@ -793,7 +797,7 @@
           <a:p>
             <a:r>
               <a:rPr lang="en-US" dirty="0"/>
-              <a:t>Resumindo: os alertas cobrem faturas, financeiro, usinas e sistema; a severidade define a ordem; cada problema gera um alerta único que se resolve sozinho; e cada perfil vê a sua fila. A meta diária é simples: sino sem críticos. Na próxima aula, a saúde das usinas.</a:t>
+              <a:t/>
             </a:r>
             <a:endParaRPr lang="en-US" dirty="0"/>
           </a:p>
@@ -969,8 +973,8 @@
           <a:p>
             <a:r>
               <a:rPr lang="en-US" dirty="0"/>
-              <a:t>São três fontes. O monitoramento do inversor, que mostra a geração dia a dia e avisa quando algo para — normalmente acompanhado pela empresa de operação e manutenção. O registro mensal de geração na plataforma, que você faz no ciclo mensal. E a energia injetada que aparece na fatura da unidade da usina, medida pela distribuidora — essa é a oficial, a que gera créditos. As três devem contar a mesma história. Quando divergem, investigue.
-Os sinais que exigem atenção: geração abaixo de noventa por cento do esperado para aquele mês — compare com o mesmo mês do ano anterior, por causa da sazonalidade; usina sem registro de geração no mês, que a plataforma aponta como alerta; saldo baixo, que significa pouca margem para clientes novos ou para um mês fraco; energia alocada acima da disponível, o alerta crítico do módulo 6; e clientes consumindo bem acima da cota, o que indica que vale oferecer mais energia, se houver saldo.</a:t>
+              <a:t>Use as três fontes da tela. Quando divergirem, investigue.
+Os sinais da tela pedem ação.</a:t>
             </a:r>
             <a:endParaRPr lang="en-US" dirty="0"/>
           </a:p>
@@ -1058,7 +1062,7 @@
           <a:p>
             <a:r>
               <a:rPr lang="en-US" dirty="0"/>
-              <a:t>Quando um sinal aparece, a sequência é: acionar a operação e manutenção, dentro do prazo de atendimento do contrato; registrar o que aconteceu e o que foi feito nas observações da geração do mês; informar o produtor — que, de qualquer forma, vê a geração no portal dele; e, se o impacto for relevante para a economia dos clientes, avisar os clientes antes que eles percebam na fatura. Comunicar antes transforma um problema em demonstração de cuidado.</a:t>
+              <a:t>Diante de uma queda, acione a manutenção, registre, informe o produtor e, se o impacto for relevante, avise os clientes antes que eles percebam.</a:t>
             </a:r>
             <a:endParaRPr lang="en-US" dirty="0"/>
           </a:p>
@@ -1146,7 +1150,7 @@
           <a:p>
             <a:r>
               <a:rPr lang="en-US" dirty="0"/>
-              <a:t>A saúde da usina também diz quando crescer. Se todas as usinas estão acima de noventa e cinco por cento de ocupação e a fila de clientes cresce, é hora da próxima usina. E lembre que conseguir e preparar uma usina leva meses: comece a prospecção com antecedência de três a seis meses.</a:t>
+              <a:t>Ocupação alta e fila de clientes indicam a hora da próxima usina. Comece a buscá-la com meses de antecedência.</a:t>
             </a:r>
             <a:endParaRPr lang="en-US" dirty="0"/>
           </a:p>
@@ -1234,7 +1238,7 @@
           <a:p>
             <a:r>
               <a:rPr lang="en-US" dirty="0"/>
-              <a:t>Resumindo: acompanhe três fontes, reaja aos sinais, coordene manutenção, produtor e clientes, e use a ocupação para planejar a expansão. Na próxima aula, o suporte ao cliente.</a:t>
+              <a:t/>
             </a:r>
             <a:endParaRPr lang="en-US" dirty="0"/>
           </a:p>
@@ -1410,7 +1414,7 @@
           <a:p>
             <a:r>
               <a:rPr lang="en-US" dirty="0"/>
-              <a:t>Em qualquer operação de assinatura, as mesmas perguntas se repetem. Por que eu paguei duas contas? Quanto eu economizei? O meu crédito não veio este mês. Quero o boleto de novo. Vou mudar de endereço. Quero cancelar. As cinco primeiras têm resposta pronta — e quase todas podem ser respondidas pelo próprio portal: as cobranças com o Pix e o boleto, e o relatório de economia. Escreva uma resposta padrão para cada pergunta, com o tom da sua empresa, e treine o time. A sexta, o cancelamento, merece um tratamento especial, que veremos daqui a pouco.</a:t>
+              <a:t>As perguntas comuns têm resposta padrão, e quase todas se resolvem no próprio portal.</a:t>
             </a:r>
             <a:endParaRPr lang="en-US" dirty="0"/>
           </a:p>
@@ -1586,8 +1590,8 @@
           <a:p>
             <a:r>
               <a:rPr lang="en-US" dirty="0"/>
-              <a:t>Quando o cliente pede para cancelar, siga um roteiro. Primeiro, entenda o motivo, sem pressão. Segundo, mostre a economia acumulada, com o relatório de economia — muitos clientes não sabem quanto já economizaram. Terceiro, resolva a causa se ela tiver solução: uma cota mal dimensionada, um vencimento ruim, uma explicação que faltou. E, se ainda assim ele quiser sair, faça a saída bem feita: respeite o aviso prévio, tire a unidade dele do rateio no dia certo, emita a última cobrança correta. Um cliente que sai bem volta e indica; um que sai brigando fala mal para o bairro inteiro.
-O melhor suporte é o proativo. Uma mensagem de boas-vindas explicando as duas contas. Um aviso quando o primeiro crédito aparece na fatura. Um relatório de economia a cada trimestre, mostrando quanto ele já economizou. E um programa de indicação, que transforma clientes satisfeitos em vendedores.</a:t>
+              <a:t>No pedido de cancelamento, siga o roteiro da tela. Muitos clientes desistem ao ver quanto já economizaram.
+O melhor suporte é o proativo, como as ações da tela.</a:t>
             </a:r>
             <a:endParaRPr lang="en-US" dirty="0"/>
           </a:p>
@@ -1675,7 +1679,7 @@
           <a:p>
             <a:r>
               <a:rPr lang="en-US" dirty="0"/>
-              <a:t>A plataforma tem um sistema de chamados. O cliente abre o chamado pelo portal, escolhendo a categoria. A equipe vê todos os chamados, com prioridade e status, responde e pode registrar notas internas, que o cliente não vê. O chamado segue por status — novo, em atendimento, aguardando o cliente, resolvido, fechado —, e, quando o cliente responde, volta automaticamente para atendimento. A vantagem sobre o WhatsApp solto é o histórico: qualquer pessoa da equipe sabe o que já foi conversado com aquele cliente.</a:t>
+              <a:t>Cliente abre o chamado no portal equipe responde notas internas invisíveis ao cliente status até fechar</a:t>
             </a:r>
             <a:endParaRPr lang="en-US" dirty="0"/>
           </a:p>
@@ -1763,7 +1767,7 @@
           <a:p>
             <a:r>
               <a:rPr lang="en-US" dirty="0"/>
-              <a:t>Resumindo: respostas padrão para as perguntas comuns, chamados com histórico, um roteiro de retenção e relacionamento proativo. No laboratório a seguir, você fecha um mês inteiro.</a:t>
+              <a:t/>
             </a:r>
             <a:endParaRPr lang="en-US" dirty="0"/>
           </a:p>
@@ -1939,10 +1943,10 @@
           <a:p>
             <a:r>
               <a:rPr lang="en-US" dirty="0"/>
-              <a:t>Passo um: registre a geração do mês dois da sua usina, com os números da ficha do laboratório. Compare com o mês anterior e com o esperado. A geração ficou dentro da faixa? Anote nas observações.
-Passo dois: as faturas do mês dois. Suba os PDFs, filtre as pendentes de revisão e aplique o roteiro de seis passos. Uma das faturas foi preparada com um consumo muito acima da média do cliente: investigue — olhe o histórico, imagine a ligação para o cliente — e registre a conclusão nas observações antes de aprovar. Compare também a energia compensada de cada cliente com o esperado pelo percentual do rateio.
-Passos três e quatro: cobranças e pagamentos. Confira os rascunhos, abra, emita os pagamentos. Um cliente teve a fatura do mês um lida errado — a diferença está na ficha do laboratório —: lance o acréscimo, com uma descrição clara. Avance o tempo, simule os pagamentos e trate as vencidas e o boleto vencido, como no módulo 8.
-Passo cinco: o rateio. Neste mês, um cliente saiu e outro entrou. Encerre o vínculo de quem saiu, crie o vínculo de quem entrou e atualize a planilha de rateio para enviar à distribuidora. Passo seis: os alertas. Abra os alertas operacionais, clique em escanear agora e trate cada um, começando pelos críticos, até não sobrar nenhum crítico. Passo sete: o repasse. No relatório de usinas, veja o que a usina rendeu no mês e calcule o repasse ao produtor, com a regra do contrato. Troque para o perfil Produtor e confira o que ele vê.</a:t>
+              <a:t>Registre a geração do mês e compare com o esperado.
+Suba e revise as faturas do mês. Investigue o consumo atípico antes de aprovar.
+Confira, abra e emita as cobranças, lance o ajuste do mês anterior e trate vencidas e boletos vencidos.
+Atualize o rateio com a saída e a entrada de clientes, zere os alertas críticos e calcule o repasse ao produtor.</a:t>
             </a:r>
             <a:endParaRPr lang="en-US" dirty="0"/>
           </a:p>
@@ -2160,6 +2164,270 @@
 </p:notes>
 </file>
 
+<file path=ppt/notesSlides/notesSlide27.xml><?xml version="1.0" encoding="utf-8"?>
+<p:notes xmlns:a="http://schemas.openxmlformats.org/drawingml/2006/main" xmlns:r="http://schemas.openxmlformats.org/officeDocument/2006/relationships" xmlns:p="http://schemas.openxmlformats.org/presentationml/2006/main">
+  <p:cSld>
+    <p:spTree>
+      <p:nvGrpSpPr>
+        <p:cNvPr id="1" name=""/>
+        <p:cNvGrpSpPr/>
+        <p:nvPr/>
+      </p:nvGrpSpPr>
+      <p:grpSpPr>
+        <a:xfrm>
+          <a:off x="0" y="0"/>
+          <a:ext cx="0" cy="0"/>
+          <a:chOff x="0" y="0"/>
+          <a:chExt cx="0" cy="0"/>
+        </a:xfrm>
+      </p:grpSpPr>
+      <p:sp>
+        <p:nvSpPr>
+          <p:cNvPr id="2" name="Slide Image Placeholder 1"/>
+          <p:cNvSpPr>
+            <a:spLocks noGrp="1" noRot="1" noChangeAspect="1"/>
+          </p:cNvSpPr>
+          <p:nvPr>
+            <p:ph type="sldImg"/>
+          </p:nvPr>
+        </p:nvSpPr>
+        <p:spPr/>
+      </p:sp>
+      <p:sp>
+        <p:nvSpPr>
+          <p:cNvPr id="3" name="Notes Placeholder 2"/>
+          <p:cNvSpPr>
+            <a:spLocks noGrp="1"/>
+          </p:cNvSpPr>
+          <p:nvPr>
+            <p:ph type="body" idx="1"/>
+          </p:nvPr>
+        </p:nvSpPr>
+        <p:spPr/>
+        <p:txBody>
+          <a:bodyPr/>
+          <a:lstStyle/>
+          <a:p>
+            <a:r>
+              <a:rPr lang="en-US" dirty="0"/>
+              <a:t/>
+            </a:r>
+            <a:endParaRPr lang="en-US" dirty="0"/>
+          </a:p>
+        </p:txBody>
+      </p:sp>
+      <p:sp>
+        <p:nvSpPr>
+          <p:cNvPr id="4" name="Slide Number Placeholder 3"/>
+          <p:cNvSpPr>
+            <a:spLocks noGrp="1"/>
+          </p:cNvSpPr>
+          <p:nvPr>
+            <p:ph type="sldNum" sz="quarter" idx="10"/>
+          </p:nvPr>
+        </p:nvSpPr>
+        <p:spPr/>
+        <p:txBody>
+          <a:bodyPr/>
+          <a:lstStyle/>
+          <a:p>
+            <a:fld id="{F7021451-1387-4CA6-816F-3879F97B5CBC}" type="slidenum">
+              <a:rPr lang="en-US"/>
+              <a:t>27</a:t>
+            </a:fld>
+            <a:endParaRPr lang="en-US"/>
+          </a:p>
+        </p:txBody>
+      </p:sp>
+    </p:spTree>
+    <p:extLst>
+      <p:ext uri="{BB962C8B-B14F-4D97-AF65-F5344CB8AC3E}">
+        <p14:creationId xmlns:p14="http://schemas.microsoft.com/office/powerpoint/2010/main" val="1024086991"/>
+      </p:ext>
+    </p:extLst>
+  </p:cSld>
+  <p:clrMapOvr>
+    <a:masterClrMapping/>
+  </p:clrMapOvr>
+</p:notes>
+</file>
+
+<file path=ppt/notesSlides/notesSlide28.xml><?xml version="1.0" encoding="utf-8"?>
+<p:notes xmlns:a="http://schemas.openxmlformats.org/drawingml/2006/main" xmlns:r="http://schemas.openxmlformats.org/officeDocument/2006/relationships" xmlns:p="http://schemas.openxmlformats.org/presentationml/2006/main">
+  <p:cSld>
+    <p:spTree>
+      <p:nvGrpSpPr>
+        <p:cNvPr id="1" name=""/>
+        <p:cNvGrpSpPr/>
+        <p:nvPr/>
+      </p:nvGrpSpPr>
+      <p:grpSpPr>
+        <a:xfrm>
+          <a:off x="0" y="0"/>
+          <a:ext cx="0" cy="0"/>
+          <a:chOff x="0" y="0"/>
+          <a:chExt cx="0" cy="0"/>
+        </a:xfrm>
+      </p:grpSpPr>
+      <p:sp>
+        <p:nvSpPr>
+          <p:cNvPr id="2" name="Slide Image Placeholder 1"/>
+          <p:cNvSpPr>
+            <a:spLocks noGrp="1" noRot="1" noChangeAspect="1"/>
+          </p:cNvSpPr>
+          <p:nvPr>
+            <p:ph type="sldImg"/>
+          </p:nvPr>
+        </p:nvSpPr>
+        <p:spPr/>
+      </p:sp>
+      <p:sp>
+        <p:nvSpPr>
+          <p:cNvPr id="3" name="Notes Placeholder 2"/>
+          <p:cNvSpPr>
+            <a:spLocks noGrp="1"/>
+          </p:cNvSpPr>
+          <p:nvPr>
+            <p:ph type="body" idx="1"/>
+          </p:nvPr>
+        </p:nvSpPr>
+        <p:spPr/>
+        <p:txBody>
+          <a:bodyPr/>
+          <a:lstStyle/>
+          <a:p>
+            <a:r>
+              <a:rPr lang="en-US" dirty="0"/>
+              <a:t/>
+            </a:r>
+            <a:endParaRPr lang="en-US" dirty="0"/>
+          </a:p>
+        </p:txBody>
+      </p:sp>
+      <p:sp>
+        <p:nvSpPr>
+          <p:cNvPr id="4" name="Slide Number Placeholder 3"/>
+          <p:cNvSpPr>
+            <a:spLocks noGrp="1"/>
+          </p:cNvSpPr>
+          <p:nvPr>
+            <p:ph type="sldNum" sz="quarter" idx="10"/>
+          </p:nvPr>
+        </p:nvSpPr>
+        <p:spPr/>
+        <p:txBody>
+          <a:bodyPr/>
+          <a:lstStyle/>
+          <a:p>
+            <a:fld id="{F7021451-1387-4CA6-816F-3879F97B5CBC}" type="slidenum">
+              <a:rPr lang="en-US"/>
+              <a:t>28</a:t>
+            </a:fld>
+            <a:endParaRPr lang="en-US"/>
+          </a:p>
+        </p:txBody>
+      </p:sp>
+    </p:spTree>
+    <p:extLst>
+      <p:ext uri="{BB962C8B-B14F-4D97-AF65-F5344CB8AC3E}">
+        <p14:creationId xmlns:p14="http://schemas.microsoft.com/office/powerpoint/2010/main" val="1024086991"/>
+      </p:ext>
+    </p:extLst>
+  </p:cSld>
+  <p:clrMapOvr>
+    <a:masterClrMapping/>
+  </p:clrMapOvr>
+</p:notes>
+</file>
+
+<file path=ppt/notesSlides/notesSlide29.xml><?xml version="1.0" encoding="utf-8"?>
+<p:notes xmlns:a="http://schemas.openxmlformats.org/drawingml/2006/main" xmlns:r="http://schemas.openxmlformats.org/officeDocument/2006/relationships" xmlns:p="http://schemas.openxmlformats.org/presentationml/2006/main">
+  <p:cSld>
+    <p:spTree>
+      <p:nvGrpSpPr>
+        <p:cNvPr id="1" name=""/>
+        <p:cNvGrpSpPr/>
+        <p:nvPr/>
+      </p:nvGrpSpPr>
+      <p:grpSpPr>
+        <a:xfrm>
+          <a:off x="0" y="0"/>
+          <a:ext cx="0" cy="0"/>
+          <a:chOff x="0" y="0"/>
+          <a:chExt cx="0" cy="0"/>
+        </a:xfrm>
+      </p:grpSpPr>
+      <p:sp>
+        <p:nvSpPr>
+          <p:cNvPr id="2" name="Slide Image Placeholder 1"/>
+          <p:cNvSpPr>
+            <a:spLocks noGrp="1" noRot="1" noChangeAspect="1"/>
+          </p:cNvSpPr>
+          <p:nvPr>
+            <p:ph type="sldImg"/>
+          </p:nvPr>
+        </p:nvSpPr>
+        <p:spPr/>
+      </p:sp>
+      <p:sp>
+        <p:nvSpPr>
+          <p:cNvPr id="3" name="Notes Placeholder 2"/>
+          <p:cNvSpPr>
+            <a:spLocks noGrp="1"/>
+          </p:cNvSpPr>
+          <p:nvPr>
+            <p:ph type="body" idx="1"/>
+          </p:nvPr>
+        </p:nvSpPr>
+        <p:spPr/>
+        <p:txBody>
+          <a:bodyPr/>
+          <a:lstStyle/>
+          <a:p>
+            <a:r>
+              <a:rPr lang="en-US" dirty="0"/>
+              <a:t/>
+            </a:r>
+            <a:endParaRPr lang="en-US" dirty="0"/>
+          </a:p>
+        </p:txBody>
+      </p:sp>
+      <p:sp>
+        <p:nvSpPr>
+          <p:cNvPr id="4" name="Slide Number Placeholder 3"/>
+          <p:cNvSpPr>
+            <a:spLocks noGrp="1"/>
+          </p:cNvSpPr>
+          <p:nvPr>
+            <p:ph type="sldNum" sz="quarter" idx="10"/>
+          </p:nvPr>
+        </p:nvSpPr>
+        <p:spPr/>
+        <p:txBody>
+          <a:bodyPr/>
+          <a:lstStyle/>
+          <a:p>
+            <a:fld id="{F7021451-1387-4CA6-816F-3879F97B5CBC}" type="slidenum">
+              <a:rPr lang="en-US"/>
+              <a:t>29</a:t>
+            </a:fld>
+            <a:endParaRPr lang="en-US"/>
+          </a:p>
+        </p:txBody>
+      </p:sp>
+    </p:spTree>
+    <p:extLst>
+      <p:ext uri="{BB962C8B-B14F-4D97-AF65-F5344CB8AC3E}">
+        <p14:creationId xmlns:p14="http://schemas.microsoft.com/office/powerpoint/2010/main" val="1024086991"/>
+      </p:ext>
+    </p:extLst>
+  </p:cSld>
+  <p:clrMapOvr>
+    <a:masterClrMapping/>
+  </p:clrMapOvr>
+</p:notes>
+</file>
+
 <file path=ppt/notesSlides/notesSlide3.xml><?xml version="1.0" encoding="utf-8"?>
 <p:notes xmlns:a="http://schemas.openxmlformats.org/drawingml/2006/main" xmlns:r="http://schemas.openxmlformats.org/officeDocument/2006/relationships" xmlns:p="http://schemas.openxmlformats.org/presentationml/2006/main">
   <p:cSld>
@@ -2206,7 +2474,7 @@
           <a:p>
             <a:r>
               <a:rPr lang="en-US" dirty="0"/>
-              <a:t>Primeiro, o que você não precisa fazer, porque a plataforma faz sozinha. A cada cinco minutos, ela sincroniza os pagamentos com o Mercado Pago. A cada dez, marca as cobranças vencidas. De hora em hora, importa as faturas que chegaram por e-mail, gera as cobranças das faturas aprovadas e faz uma varredura de saúde da operação. Às seis da manhã, expira os boletos vencidos. Às oito, dispara os lembretes de cobrança. O seu time não substitui essas rotinas: trabalha em cima do que elas produzem — os alertas, as filas e as exceções.</a:t>
+              <a:t>A plataforma faz sozinha o trabalho repetitivo listado na tela. A equipe trabalha em cima do que ela produz: alertas, filas e exceções.</a:t>
             </a:r>
             <a:endParaRPr lang="en-US" dirty="0"/>
           </a:p>
@@ -2230,6 +2498,94 @@
             <a:fld id="{F7021451-1387-4CA6-816F-3879F97B5CBC}" type="slidenum">
               <a:rPr lang="en-US"/>
               <a:t>3</a:t>
+            </a:fld>
+            <a:endParaRPr lang="en-US"/>
+          </a:p>
+        </p:txBody>
+      </p:sp>
+    </p:spTree>
+    <p:extLst>
+      <p:ext uri="{BB962C8B-B14F-4D97-AF65-F5344CB8AC3E}">
+        <p14:creationId xmlns:p14="http://schemas.microsoft.com/office/powerpoint/2010/main" val="1024086991"/>
+      </p:ext>
+    </p:extLst>
+  </p:cSld>
+  <p:clrMapOvr>
+    <a:masterClrMapping/>
+  </p:clrMapOvr>
+</p:notes>
+</file>
+
+<file path=ppt/notesSlides/notesSlide30.xml><?xml version="1.0" encoding="utf-8"?>
+<p:notes xmlns:a="http://schemas.openxmlformats.org/drawingml/2006/main" xmlns:r="http://schemas.openxmlformats.org/officeDocument/2006/relationships" xmlns:p="http://schemas.openxmlformats.org/presentationml/2006/main">
+  <p:cSld>
+    <p:spTree>
+      <p:nvGrpSpPr>
+        <p:cNvPr id="1" name=""/>
+        <p:cNvGrpSpPr/>
+        <p:nvPr/>
+      </p:nvGrpSpPr>
+      <p:grpSpPr>
+        <a:xfrm>
+          <a:off x="0" y="0"/>
+          <a:ext cx="0" cy="0"/>
+          <a:chOff x="0" y="0"/>
+          <a:chExt cx="0" cy="0"/>
+        </a:xfrm>
+      </p:grpSpPr>
+      <p:sp>
+        <p:nvSpPr>
+          <p:cNvPr id="2" name="Slide Image Placeholder 1"/>
+          <p:cNvSpPr>
+            <a:spLocks noGrp="1" noRot="1" noChangeAspect="1"/>
+          </p:cNvSpPr>
+          <p:nvPr>
+            <p:ph type="sldImg"/>
+          </p:nvPr>
+        </p:nvSpPr>
+        <p:spPr/>
+      </p:sp>
+      <p:sp>
+        <p:nvSpPr>
+          <p:cNvPr id="3" name="Notes Placeholder 2"/>
+          <p:cNvSpPr>
+            <a:spLocks noGrp="1"/>
+          </p:cNvSpPr>
+          <p:nvPr>
+            <p:ph type="body" idx="1"/>
+          </p:nvPr>
+        </p:nvSpPr>
+        <p:spPr/>
+        <p:txBody>
+          <a:bodyPr/>
+          <a:lstStyle/>
+          <a:p>
+            <a:r>
+              <a:rPr lang="en-US" dirty="0"/>
+              <a:t/>
+            </a:r>
+            <a:endParaRPr lang="en-US" dirty="0"/>
+          </a:p>
+        </p:txBody>
+      </p:sp>
+      <p:sp>
+        <p:nvSpPr>
+          <p:cNvPr id="4" name="Slide Number Placeholder 3"/>
+          <p:cNvSpPr>
+            <a:spLocks noGrp="1"/>
+          </p:cNvSpPr>
+          <p:nvPr>
+            <p:ph type="sldNum" sz="quarter" idx="10"/>
+          </p:nvPr>
+        </p:nvSpPr>
+        <p:spPr/>
+        <p:txBody>
+          <a:bodyPr/>
+          <a:lstStyle/>
+          <a:p>
+            <a:fld id="{F7021451-1387-4CA6-816F-3879F97B5CBC}" type="slidenum">
+              <a:rPr lang="en-US"/>
+              <a:t>30</a:t>
             </a:fld>
             <a:endParaRPr lang="en-US"/>
           </a:p>
@@ -2294,7 +2650,7 @@
           <a:p>
             <a:r>
               <a:rPr lang="en-US" dirty="0"/>
-              <a:t>A rotina diária leva de trinta minutos a duas horas, dependendo do tamanho da operação, e deve começar sempre no mesmo horário, depois das rotinas da manhã. Abra o sino de alertas e trate primeiro os críticos. Trabalhe a fila de faturas pendentes de revisão. Confira e abra as cobranças em rascunho. Emita o Pix ou o boleto das cobranças que vão vencer em breve. Envie os lembretes e as cobranças do dia, com os links prontos de WhatsApp. E responda os chamados de suporte.</a:t>
+              <a:t>A rotina diária começa sempre no mesmo horário, pelos alertas críticos.</a:t>
             </a:r>
             <a:endParaRPr lang="en-US" dirty="0"/>
           </a:p>
@@ -2382,7 +2738,7 @@
           <a:p>
             <a:r>
               <a:rPr lang="en-US" dirty="0"/>
-              <a:t>Uma vez por semana, olhe o médio prazo. A inadimplência, por faixa de atraso e por consultor. As propostas enviadas sem resposta e as que vão expirar. A ocupação de cada usina e a fila de clientes esperando cota. O quadro de onboarding das usinas novas, com as sete etapas. E faça uma reunião curta com o time, de trinta minutos, olhando esses números juntos.</a:t>
+              <a:t>Uma vez por semana, olhe o médio prazo com o time, em trinta minutos.</a:t>
             </a:r>
             <a:endParaRPr lang="en-US" dirty="0"/>
           </a:p>
@@ -2470,7 +2826,7 @@
           <a:p>
             <a:r>
               <a:rPr lang="en-US" dirty="0"/>
-              <a:t>E o ciclo mensal, que é o coração da operação. Um: registrar a geração do mês de cada usina, com a energia disponível, e avisar o produtor. Dois: as faturas chegam, normalmente concentradas em alguns dias, conforme o ciclo de leitura da distribuidora; revise e aprove. Três: as cobranças nascem; confira, abra e emita os pagamentos. Quatro: num dia fixo do mês, atualize a lista de rateio na distribuidora, consolidando entradas, saídas e ajustes. Cinco: calcule e faça o repasse ao produtor, com o relatório da usina. E seis: o fechamento, com os indicadores do mês e o relatório executivo, que é o tema do módulo 10. Escreva tudo isso num calendário, com o responsável de cada etapa. Esse é o seu SOP.</a:t>
+              <a:t>O ciclo mensal é o coração da operação. Escreva-o num calendário, com o responsável de cada etapa. Esse é o seu procedimento padrão.</a:t>
             </a:r>
             <a:endParaRPr lang="en-US" dirty="0"/>
           </a:p>
@@ -2558,7 +2914,7 @@
           <a:p>
             <a:r>
               <a:rPr lang="en-US" dirty="0"/>
-              <a:t>Resumindo: as automações fazem o trabalho repetitivo; a equipe trata as filas e as exceções, em ciclos diário, semanal e mensal, cada tarefa com um responsável. Na próxima aula, a principal fila de trabalho: os alertas operacionais.</a:t>
+              <a:t/>
             </a:r>
             <a:endParaRPr lang="en-US" dirty="0"/>
           </a:p>
@@ -2734,7 +3090,7 @@
           <a:p>
             <a:r>
               <a:rPr lang="en-US" dirty="0"/>
-              <a:t>Os alertas vêm de quatro grupos. Faturas: problemas na importação por e-mail — caixa inacessível, senha de PDF errada, fatura ilegível, falha ao gravar — e faturas paradas em revisão há três dias. Financeiro: o Mercado Pago recusou emitir um pagamento, a credencial foi recusada, um pagamento não sincroniza há horas, os avisos de pagamento estão falhando, cobranças em rascunho há dois dias, cobranças vencendo em cinco dias sem Pix ou boleto, e os lembretes da régua. Usinas: sem geração registrada no mês, sem energia disponível, energia alocada maior que a disponível, saldo baixo e cliente consumindo acima da cota. E sistema: uma tarefa automática que falhou, uma conta de pagamento ausente ou sem a chave de segurança dos avisos.</a:t>
+              <a:t>Os alertas vêm de quatro áreas: faturas, financeiro, usinas e sistema.</a:t>
             </a:r>
             <a:endParaRPr lang="en-US" dirty="0"/>
           </a:p>
@@ -4022,7 +4378,7 @@
         <p:spPr>
           <a:xfrm>
             <a:off x="822960" y="2286000"/>
-            <a:ext cx="2965704" cy="3749040"/>
+            <a:ext cx="2965704" cy="2286000"/>
           </a:xfrm>
           <a:prstGeom prst="rect">
             <a:avLst/>
@@ -4103,6 +4459,65 @@
       <p:sp>
         <p:nvSpPr>
           <p:cNvPr id="13" name="Shape 10"/>
+          <p:cNvSpPr/>
+          <p:nvPr/>
+        </p:nvSpPr>
+        <p:spPr>
+          <a:xfrm>
+            <a:off x="822960" y="4663440"/>
+            <a:ext cx="2965704" cy="18288"/>
+          </a:xfrm>
+          <a:prstGeom prst="rect">
+            <a:avLst/>
+          </a:prstGeom>
+          <a:solidFill>
+            <a:srgbClr val="D8E0EC"/>
+          </a:solidFill>
+          <a:ln/>
+        </p:spPr>
+      </p:sp>
+      <p:sp>
+        <p:nvSpPr>
+          <p:cNvPr id="14" name="Text 11"/>
+          <p:cNvSpPr/>
+          <p:nvPr/>
+        </p:nvSpPr>
+        <p:spPr>
+          <a:xfrm>
+            <a:off x="822960" y="4754880"/>
+            <a:ext cx="2965704" cy="1371600"/>
+          </a:xfrm>
+          <a:prstGeom prst="rect">
+            <a:avLst/>
+          </a:prstGeom>
+          <a:noFill/>
+          <a:ln/>
+        </p:spPr>
+        <p:txBody>
+          <a:bodyPr wrap="square" rtlCol="0" anchor="t"/>
+          <a:lstStyle/>
+          <a:p>
+            <a:pPr indent="0" marL="0">
+              <a:buNone/>
+            </a:pPr>
+            <a:r>
+              <a:rPr lang="en-US" sz="1300" i="1" dirty="0">
+                <a:solidFill>
+                  <a:srgbClr val="64748B"/>
+                </a:solidFill>
+                <a:latin typeface="Arial" pitchFamily="34" charset="0"/>
+                <a:ea typeface="Arial" pitchFamily="34" charset="-122"/>
+                <a:cs typeface="Arial" pitchFamily="34" charset="-120"/>
+              </a:rPr>
+              <a:t>A severidade define a ordem: críticos no mesmo dia, depois o que tem data, depois o resto.</a:t>
+            </a:r>
+            <a:endParaRPr lang="en-US" sz="1300" dirty="0"/>
+          </a:p>
+        </p:txBody>
+      </p:sp>
+      <p:sp>
+        <p:nvSpPr>
+          <p:cNvPr id="15" name="Shape 12"/>
           <p:cNvSpPr/>
           <p:nvPr/>
         </p:nvSpPr>
@@ -4136,7 +4551,7 @@
       </p:sp>
       <p:sp>
         <p:nvSpPr>
-          <p:cNvPr id="14" name="Shape 11"/>
+          <p:cNvPr id="16" name="Shape 13"/>
           <p:cNvSpPr/>
           <p:nvPr/>
         </p:nvSpPr>
@@ -4156,7 +4571,7 @@
       </p:sp>
       <p:sp>
         <p:nvSpPr>
-          <p:cNvPr id="15" name="Text 12"/>
+          <p:cNvPr id="17" name="Text 14"/>
           <p:cNvSpPr/>
           <p:nvPr/>
         </p:nvSpPr>
@@ -4197,14 +4612,14 @@
       </p:sp>
       <p:sp>
         <p:nvSpPr>
-          <p:cNvPr id="16" name="Text 13"/>
+          <p:cNvPr id="18" name="Text 15"/>
           <p:cNvSpPr/>
           <p:nvPr/>
         </p:nvSpPr>
         <p:spPr>
           <a:xfrm>
             <a:off x="4611624" y="2286000"/>
-            <a:ext cx="2965704" cy="3749040"/>
+            <a:ext cx="2965704" cy="2286000"/>
           </a:xfrm>
           <a:prstGeom prst="rect">
             <a:avLst/>
@@ -4284,7 +4699,66 @@
       </p:sp>
       <p:sp>
         <p:nvSpPr>
-          <p:cNvPr id="17" name="Shape 14"/>
+          <p:cNvPr id="19" name="Shape 16"/>
+          <p:cNvSpPr/>
+          <p:nvPr/>
+        </p:nvSpPr>
+        <p:spPr>
+          <a:xfrm>
+            <a:off x="4611624" y="4663440"/>
+            <a:ext cx="2965704" cy="18288"/>
+          </a:xfrm>
+          <a:prstGeom prst="rect">
+            <a:avLst/>
+          </a:prstGeom>
+          <a:solidFill>
+            <a:srgbClr val="D8E0EC"/>
+          </a:solidFill>
+          <a:ln/>
+        </p:spPr>
+      </p:sp>
+      <p:sp>
+        <p:nvSpPr>
+          <p:cNvPr id="20" name="Text 17"/>
+          <p:cNvSpPr/>
+          <p:nvPr/>
+        </p:nvSpPr>
+        <p:spPr>
+          <a:xfrm>
+            <a:off x="4611624" y="4754880"/>
+            <a:ext cx="2965704" cy="1371600"/>
+          </a:xfrm>
+          <a:prstGeom prst="rect">
+            <a:avLst/>
+          </a:prstGeom>
+          <a:noFill/>
+          <a:ln/>
+        </p:spPr>
+        <p:txBody>
+          <a:bodyPr wrap="square" rtlCol="0" anchor="t"/>
+          <a:lstStyle/>
+          <a:p>
+            <a:pPr indent="0" marL="0">
+              <a:buNone/>
+            </a:pPr>
+            <a:r>
+              <a:rPr lang="en-US" sz="1300" i="1" dirty="0">
+                <a:solidFill>
+                  <a:srgbClr val="64748B"/>
+                </a:solidFill>
+                <a:latin typeface="Arial" pitchFamily="34" charset="0"/>
+                <a:ea typeface="Arial" pitchFamily="34" charset="-122"/>
+                <a:cs typeface="Arial" pitchFamily="34" charset="-120"/>
+              </a:rPr>
+              <a:t>Cada problema gera um alerta único, que se resolve sozinho quando a causa desaparece. A lista mostra a situação real.</a:t>
+            </a:r>
+            <a:endParaRPr lang="en-US" sz="1300" dirty="0"/>
+          </a:p>
+        </p:txBody>
+      </p:sp>
+      <p:sp>
+        <p:nvSpPr>
+          <p:cNvPr id="21" name="Shape 18"/>
           <p:cNvSpPr/>
           <p:nvPr/>
         </p:nvSpPr>
@@ -4318,7 +4792,7 @@
       </p:sp>
       <p:sp>
         <p:nvSpPr>
-          <p:cNvPr id="18" name="Shape 15"/>
+          <p:cNvPr id="22" name="Shape 19"/>
           <p:cNvSpPr/>
           <p:nvPr/>
         </p:nvSpPr>
@@ -4338,7 +4812,7 @@
       </p:sp>
       <p:sp>
         <p:nvSpPr>
-          <p:cNvPr id="19" name="Text 16"/>
+          <p:cNvPr id="23" name="Text 20"/>
           <p:cNvSpPr/>
           <p:nvPr/>
         </p:nvSpPr>
@@ -4379,14 +4853,14 @@
       </p:sp>
       <p:sp>
         <p:nvSpPr>
-          <p:cNvPr id="20" name="Text 17"/>
+          <p:cNvPr id="24" name="Text 21"/>
           <p:cNvSpPr/>
           <p:nvPr/>
         </p:nvSpPr>
         <p:spPr>
           <a:xfrm>
             <a:off x="8400288" y="2286000"/>
-            <a:ext cx="2965704" cy="3749040"/>
+            <a:ext cx="2965704" cy="2286000"/>
           </a:xfrm>
           <a:prstGeom prst="rect">
             <a:avLst/>
@@ -4440,6 +4914,65 @@
               <a:t>Consultor: só alertas financeiros da própria carteira (com link de WhatsApp pronto)</a:t>
             </a:r>
             <a:endParaRPr lang="en-US" sz="1700" dirty="0"/>
+          </a:p>
+        </p:txBody>
+      </p:sp>
+      <p:sp>
+        <p:nvSpPr>
+          <p:cNvPr id="25" name="Shape 22"/>
+          <p:cNvSpPr/>
+          <p:nvPr/>
+        </p:nvSpPr>
+        <p:spPr>
+          <a:xfrm>
+            <a:off x="8400288" y="4663440"/>
+            <a:ext cx="2965704" cy="18288"/>
+          </a:xfrm>
+          <a:prstGeom prst="rect">
+            <a:avLst/>
+          </a:prstGeom>
+          <a:solidFill>
+            <a:srgbClr val="D8E0EC"/>
+          </a:solidFill>
+          <a:ln/>
+        </p:spPr>
+      </p:sp>
+      <p:sp>
+        <p:nvSpPr>
+          <p:cNvPr id="26" name="Text 23"/>
+          <p:cNvSpPr/>
+          <p:nvPr/>
+        </p:nvSpPr>
+        <p:spPr>
+          <a:xfrm>
+            <a:off x="8400288" y="4754880"/>
+            <a:ext cx="2965704" cy="1371600"/>
+          </a:xfrm>
+          <a:prstGeom prst="rect">
+            <a:avLst/>
+          </a:prstGeom>
+          <a:noFill/>
+          <a:ln/>
+        </p:spPr>
+        <p:txBody>
+          <a:bodyPr wrap="square" rtlCol="0" anchor="t"/>
+          <a:lstStyle/>
+          <a:p>
+            <a:pPr indent="0" marL="0">
+              <a:buNone/>
+            </a:pPr>
+            <a:r>
+              <a:rPr lang="en-US" sz="1300" i="1" dirty="0">
+                <a:solidFill>
+                  <a:srgbClr val="64748B"/>
+                </a:solidFill>
+                <a:latin typeface="Arial" pitchFamily="34" charset="0"/>
+                <a:ea typeface="Arial" pitchFamily="34" charset="-122"/>
+                <a:cs typeface="Arial" pitchFamily="34" charset="-120"/>
+              </a:rPr>
+              <a:t>Cada perfil vê a sua fila. A meta diária é simples: nenhum alerta crítico.</a:t>
+            </a:r>
+            <a:endParaRPr lang="en-US" sz="1300" dirty="0"/>
           </a:p>
         </p:txBody>
       </p:sp>
@@ -6618,7 +7151,7 @@
         <p:spPr>
           <a:xfrm>
             <a:off x="822960" y="2286000"/>
-            <a:ext cx="4860036" cy="3749040"/>
+            <a:ext cx="4860036" cy="2286000"/>
           </a:xfrm>
           <a:prstGeom prst="rect">
             <a:avLst/>
@@ -6699,6 +7232,65 @@
       <p:sp>
         <p:nvSpPr>
           <p:cNvPr id="13" name="Shape 10"/>
+          <p:cNvSpPr/>
+          <p:nvPr/>
+        </p:nvSpPr>
+        <p:spPr>
+          <a:xfrm>
+            <a:off x="822960" y="4663440"/>
+            <a:ext cx="4860036" cy="18288"/>
+          </a:xfrm>
+          <a:prstGeom prst="rect">
+            <a:avLst/>
+          </a:prstGeom>
+          <a:solidFill>
+            <a:srgbClr val="D8E0EC"/>
+          </a:solidFill>
+          <a:ln/>
+        </p:spPr>
+      </p:sp>
+      <p:sp>
+        <p:nvSpPr>
+          <p:cNvPr id="14" name="Text 11"/>
+          <p:cNvSpPr/>
+          <p:nvPr/>
+        </p:nvSpPr>
+        <p:spPr>
+          <a:xfrm>
+            <a:off x="822960" y="4754880"/>
+            <a:ext cx="4860036" cy="1371600"/>
+          </a:xfrm>
+          <a:prstGeom prst="rect">
+            <a:avLst/>
+          </a:prstGeom>
+          <a:noFill/>
+          <a:ln/>
+        </p:spPr>
+        <p:txBody>
+          <a:bodyPr wrap="square" rtlCol="0" anchor="t"/>
+          <a:lstStyle/>
+          <a:p>
+            <a:pPr indent="0" marL="0">
+              <a:buNone/>
+            </a:pPr>
+            <a:r>
+              <a:rPr lang="en-US" sz="1300" i="1" dirty="0">
+                <a:solidFill>
+                  <a:srgbClr val="64748B"/>
+                </a:solidFill>
+                <a:latin typeface="Arial" pitchFamily="34" charset="0"/>
+                <a:ea typeface="Arial" pitchFamily="34" charset="-122"/>
+                <a:cs typeface="Arial" pitchFamily="34" charset="-120"/>
+              </a:rPr>
+              <a:t>Use as três fontes da tela. Quando divergirem, investigue.</a:t>
+            </a:r>
+            <a:endParaRPr lang="en-US" sz="1300" dirty="0"/>
+          </a:p>
+        </p:txBody>
+      </p:sp>
+      <p:sp>
+        <p:nvSpPr>
+          <p:cNvPr id="15" name="Shape 12"/>
           <p:cNvSpPr/>
           <p:nvPr/>
         </p:nvSpPr>
@@ -6732,7 +7324,7 @@
       </p:sp>
       <p:sp>
         <p:nvSpPr>
-          <p:cNvPr id="14" name="Shape 11"/>
+          <p:cNvPr id="16" name="Shape 13"/>
           <p:cNvSpPr/>
           <p:nvPr/>
         </p:nvSpPr>
@@ -6752,7 +7344,7 @@
       </p:sp>
       <p:sp>
         <p:nvSpPr>
-          <p:cNvPr id="15" name="Text 12"/>
+          <p:cNvPr id="17" name="Text 14"/>
           <p:cNvSpPr/>
           <p:nvPr/>
         </p:nvSpPr>
@@ -6793,14 +7385,14 @@
       </p:sp>
       <p:sp>
         <p:nvSpPr>
-          <p:cNvPr id="16" name="Text 13"/>
+          <p:cNvPr id="18" name="Text 15"/>
           <p:cNvSpPr/>
           <p:nvPr/>
         </p:nvSpPr>
         <p:spPr>
           <a:xfrm>
             <a:off x="6505956" y="2286000"/>
-            <a:ext cx="4860036" cy="3749040"/>
+            <a:ext cx="4860036" cy="2286000"/>
           </a:xfrm>
           <a:prstGeom prst="rect">
             <a:avLst/>
@@ -6917,6 +7509,65 @@
               <a:t>cliente consumindo acima da cota</a:t>
             </a:r>
             <a:endParaRPr lang="en-US" sz="1700" dirty="0"/>
+          </a:p>
+        </p:txBody>
+      </p:sp>
+      <p:sp>
+        <p:nvSpPr>
+          <p:cNvPr id="19" name="Shape 16"/>
+          <p:cNvSpPr/>
+          <p:nvPr/>
+        </p:nvSpPr>
+        <p:spPr>
+          <a:xfrm>
+            <a:off x="6505956" y="4663440"/>
+            <a:ext cx="4860036" cy="18288"/>
+          </a:xfrm>
+          <a:prstGeom prst="rect">
+            <a:avLst/>
+          </a:prstGeom>
+          <a:solidFill>
+            <a:srgbClr val="D8E0EC"/>
+          </a:solidFill>
+          <a:ln/>
+        </p:spPr>
+      </p:sp>
+      <p:sp>
+        <p:nvSpPr>
+          <p:cNvPr id="20" name="Text 17"/>
+          <p:cNvSpPr/>
+          <p:nvPr/>
+        </p:nvSpPr>
+        <p:spPr>
+          <a:xfrm>
+            <a:off x="6505956" y="4754880"/>
+            <a:ext cx="4860036" cy="1371600"/>
+          </a:xfrm>
+          <a:prstGeom prst="rect">
+            <a:avLst/>
+          </a:prstGeom>
+          <a:noFill/>
+          <a:ln/>
+        </p:spPr>
+        <p:txBody>
+          <a:bodyPr wrap="square" rtlCol="0" anchor="t"/>
+          <a:lstStyle/>
+          <a:p>
+            <a:pPr indent="0" marL="0">
+              <a:buNone/>
+            </a:pPr>
+            <a:r>
+              <a:rPr lang="en-US" sz="1300" i="1" dirty="0">
+                <a:solidFill>
+                  <a:srgbClr val="64748B"/>
+                </a:solidFill>
+                <a:latin typeface="Arial" pitchFamily="34" charset="0"/>
+                <a:ea typeface="Arial" pitchFamily="34" charset="-122"/>
+                <a:cs typeface="Arial" pitchFamily="34" charset="-120"/>
+              </a:rPr>
+              <a:t>Os sinais da tela pedem ação.</a:t>
+            </a:r>
+            <a:endParaRPr lang="en-US" sz="1300" dirty="0"/>
           </a:p>
         </p:txBody>
       </p:sp>
@@ -7235,7 +7886,7 @@
         </p:nvSpPr>
         <p:spPr>
           <a:xfrm>
-            <a:off x="548640" y="2651760"/>
+            <a:off x="548640" y="2583180"/>
             <a:ext cx="2304288" cy="1463040"/>
           </a:xfrm>
           <a:prstGeom prst="chevron">
@@ -7260,7 +7911,7 @@
         </p:nvSpPr>
         <p:spPr>
           <a:xfrm>
-            <a:off x="868680" y="2651760"/>
+            <a:off x="868680" y="2583180"/>
             <a:ext cx="1783080" cy="1463040"/>
           </a:xfrm>
           <a:prstGeom prst="rect">
@@ -7301,7 +7952,7 @@
         </p:nvSpPr>
         <p:spPr>
           <a:xfrm>
-            <a:off x="2743200" y="2651760"/>
+            <a:off x="2743200" y="2583180"/>
             <a:ext cx="2304288" cy="1463040"/>
           </a:xfrm>
           <a:prstGeom prst="chevron">
@@ -7326,7 +7977,7 @@
         </p:nvSpPr>
         <p:spPr>
           <a:xfrm>
-            <a:off x="3063240" y="2651760"/>
+            <a:off x="3063240" y="2583180"/>
             <a:ext cx="1783080" cy="1463040"/>
           </a:xfrm>
           <a:prstGeom prst="rect">
@@ -7367,7 +8018,7 @@
         </p:nvSpPr>
         <p:spPr>
           <a:xfrm>
-            <a:off x="4937760" y="2651760"/>
+            <a:off x="4937760" y="2583180"/>
             <a:ext cx="2304288" cy="1463040"/>
           </a:xfrm>
           <a:prstGeom prst="chevron">
@@ -7392,7 +8043,7 @@
         </p:nvSpPr>
         <p:spPr>
           <a:xfrm>
-            <a:off x="5257800" y="2651760"/>
+            <a:off x="5257800" y="2583180"/>
             <a:ext cx="1783080" cy="1463040"/>
           </a:xfrm>
           <a:prstGeom prst="rect">
@@ -7433,7 +8084,7 @@
         </p:nvSpPr>
         <p:spPr>
           <a:xfrm>
-            <a:off x="7132320" y="2651760"/>
+            <a:off x="7132320" y="2583180"/>
             <a:ext cx="2304288" cy="1463040"/>
           </a:xfrm>
           <a:prstGeom prst="chevron">
@@ -7458,7 +8109,7 @@
         </p:nvSpPr>
         <p:spPr>
           <a:xfrm>
-            <a:off x="7452360" y="2651760"/>
+            <a:off x="7452360" y="2583180"/>
             <a:ext cx="1783080" cy="1463040"/>
           </a:xfrm>
           <a:prstGeom prst="rect">
@@ -7499,7 +8150,7 @@
         </p:nvSpPr>
         <p:spPr>
           <a:xfrm>
-            <a:off x="9326880" y="2651760"/>
+            <a:off x="9326880" y="2583180"/>
             <a:ext cx="2304288" cy="1463040"/>
           </a:xfrm>
           <a:prstGeom prst="chevron">
@@ -7524,7 +8175,7 @@
         </p:nvSpPr>
         <p:spPr>
           <a:xfrm>
-            <a:off x="9646920" y="2651760"/>
+            <a:off x="9646920" y="2583180"/>
             <a:ext cx="1783080" cy="1463040"/>
           </a:xfrm>
           <a:prstGeom prst="rect">
@@ -7554,6 +8205,92 @@
               <a:t>clientes informados se o impacto for relevante</a:t>
             </a:r>
             <a:endParaRPr lang="en-US" sz="1200" dirty="0"/>
+          </a:p>
+        </p:txBody>
+      </p:sp>
+      <p:sp>
+        <p:nvSpPr>
+          <p:cNvPr id="19" name="Shape 16"/>
+          <p:cNvSpPr/>
+          <p:nvPr/>
+        </p:nvSpPr>
+        <p:spPr>
+          <a:xfrm>
+            <a:off x="548640" y="5413248"/>
+            <a:ext cx="11091672" cy="868680"/>
+          </a:xfrm>
+          <a:prstGeom prst="roundRect">
+            <a:avLst>
+              <a:gd name="adj" fmla="val 8421"/>
+            </a:avLst>
+          </a:prstGeom>
+          <a:solidFill>
+            <a:srgbClr val="EEF3FA"/>
+          </a:solidFill>
+          <a:ln w="6350">
+            <a:solidFill>
+              <a:srgbClr val="D8E0EC"/>
+            </a:solidFill>
+            <a:prstDash val="solid"/>
+          </a:ln>
+        </p:spPr>
+      </p:sp>
+      <p:sp>
+        <p:nvSpPr>
+          <p:cNvPr id="20" name="Shape 17"/>
+          <p:cNvSpPr/>
+          <p:nvPr/>
+        </p:nvSpPr>
+        <p:spPr>
+          <a:xfrm>
+            <a:off x="548640" y="5413248"/>
+            <a:ext cx="91440" cy="868680"/>
+          </a:xfrm>
+          <a:prstGeom prst="rect">
+            <a:avLst/>
+          </a:prstGeom>
+          <a:solidFill>
+            <a:srgbClr val="F7A23B"/>
+          </a:solidFill>
+          <a:ln/>
+        </p:spPr>
+      </p:sp>
+      <p:sp>
+        <p:nvSpPr>
+          <p:cNvPr id="21" name="Text 18"/>
+          <p:cNvSpPr/>
+          <p:nvPr/>
+        </p:nvSpPr>
+        <p:spPr>
+          <a:xfrm>
+            <a:off x="777240" y="5458968"/>
+            <a:ext cx="10744200" cy="777240"/>
+          </a:xfrm>
+          <a:prstGeom prst="rect">
+            <a:avLst/>
+          </a:prstGeom>
+          <a:noFill/>
+          <a:ln/>
+        </p:spPr>
+        <p:txBody>
+          <a:bodyPr wrap="square" rtlCol="0" anchor="ctr"/>
+          <a:lstStyle/>
+          <a:p>
+            <a:pPr indent="0" marL="0">
+              <a:buNone/>
+            </a:pPr>
+            <a:r>
+              <a:rPr lang="en-US" sz="1500" dirty="0">
+                <a:solidFill>
+                  <a:srgbClr val="1F2937"/>
+                </a:solidFill>
+                <a:latin typeface="Arial" pitchFamily="34" charset="0"/>
+                <a:ea typeface="Arial" pitchFamily="34" charset="-122"/>
+                <a:cs typeface="Arial" pitchFamily="34" charset="-120"/>
+              </a:rPr>
+              <a:t>Diante de uma queda, acione a manutenção, registre, informe o produtor e, se o impacto for relevante, avise os clientes antes que eles percebam.</a:t>
+            </a:r>
+            <a:endParaRPr lang="en-US" sz="1500" dirty="0"/>
           </a:p>
         </p:txBody>
       </p:sp>
@@ -7873,7 +8610,7 @@
         <p:spPr>
           <a:xfrm>
             <a:off x="548640" y="1325880"/>
-            <a:ext cx="11155680" cy="4937760"/>
+            <a:ext cx="11155680" cy="3977640"/>
           </a:xfrm>
           <a:prstGeom prst="rect">
             <a:avLst/>
@@ -7906,6 +8643,92 @@
               <a:t>Ocupação &gt; 95% em todas as usinas + fila de espera = hora da próxima usina (comece o M4 de novo 3–6 meses antes)</a:t>
             </a:r>
             <a:endParaRPr lang="en-US" sz="2000" dirty="0"/>
+          </a:p>
+        </p:txBody>
+      </p:sp>
+      <p:sp>
+        <p:nvSpPr>
+          <p:cNvPr id="10" name="Shape 7"/>
+          <p:cNvSpPr/>
+          <p:nvPr/>
+        </p:nvSpPr>
+        <p:spPr>
+          <a:xfrm>
+            <a:off x="548640" y="5413248"/>
+            <a:ext cx="11091672" cy="868680"/>
+          </a:xfrm>
+          <a:prstGeom prst="roundRect">
+            <a:avLst>
+              <a:gd name="adj" fmla="val 8421"/>
+            </a:avLst>
+          </a:prstGeom>
+          <a:solidFill>
+            <a:srgbClr val="EEF3FA"/>
+          </a:solidFill>
+          <a:ln w="6350">
+            <a:solidFill>
+              <a:srgbClr val="D8E0EC"/>
+            </a:solidFill>
+            <a:prstDash val="solid"/>
+          </a:ln>
+        </p:spPr>
+      </p:sp>
+      <p:sp>
+        <p:nvSpPr>
+          <p:cNvPr id="11" name="Shape 8"/>
+          <p:cNvSpPr/>
+          <p:nvPr/>
+        </p:nvSpPr>
+        <p:spPr>
+          <a:xfrm>
+            <a:off x="548640" y="5413248"/>
+            <a:ext cx="91440" cy="868680"/>
+          </a:xfrm>
+          <a:prstGeom prst="rect">
+            <a:avLst/>
+          </a:prstGeom>
+          <a:solidFill>
+            <a:srgbClr val="F7A23B"/>
+          </a:solidFill>
+          <a:ln/>
+        </p:spPr>
+      </p:sp>
+      <p:sp>
+        <p:nvSpPr>
+          <p:cNvPr id="12" name="Text 9"/>
+          <p:cNvSpPr/>
+          <p:nvPr/>
+        </p:nvSpPr>
+        <p:spPr>
+          <a:xfrm>
+            <a:off x="777240" y="5458968"/>
+            <a:ext cx="10744200" cy="777240"/>
+          </a:xfrm>
+          <a:prstGeom prst="rect">
+            <a:avLst/>
+          </a:prstGeom>
+          <a:noFill/>
+          <a:ln/>
+        </p:spPr>
+        <p:txBody>
+          <a:bodyPr wrap="square" rtlCol="0" anchor="ctr"/>
+          <a:lstStyle/>
+          <a:p>
+            <a:pPr indent="0" marL="0">
+              <a:buNone/>
+            </a:pPr>
+            <a:r>
+              <a:rPr lang="en-US" sz="1500" dirty="0">
+                <a:solidFill>
+                  <a:srgbClr val="1F2937"/>
+                </a:solidFill>
+                <a:latin typeface="Arial" pitchFamily="34" charset="0"/>
+                <a:ea typeface="Arial" pitchFamily="34" charset="-122"/>
+                <a:cs typeface="Arial" pitchFamily="34" charset="-120"/>
+              </a:rPr>
+              <a:t>Ocupação alta e fila de clientes indicam a hora da próxima usina. Comece a buscá-la com meses de antecedência.</a:t>
+            </a:r>
+            <a:endParaRPr lang="en-US" sz="1500" dirty="0"/>
           </a:p>
         </p:txBody>
       </p:sp>
@@ -9490,11 +10313,11 @@
         <p:spPr>
           <a:xfrm>
             <a:off x="548640" y="1325880"/>
-            <a:ext cx="3544824" cy="2331720"/>
+            <a:ext cx="3544824" cy="1874520"/>
           </a:xfrm>
           <a:prstGeom prst="roundRect">
             <a:avLst>
-              <a:gd name="adj" fmla="val 3137"/>
+              <a:gd name="adj" fmla="val 3902"/>
             </a:avLst>
           </a:prstGeom>
           <a:solidFill>
@@ -9583,7 +10406,7 @@
         <p:spPr>
           <a:xfrm>
             <a:off x="1325880" y="1435608"/>
-            <a:ext cx="2630424" cy="2112264"/>
+            <a:ext cx="2630424" cy="1655064"/>
           </a:xfrm>
           <a:prstGeom prst="rect">
             <a:avLst/>
@@ -9624,11 +10447,11 @@
         <p:spPr>
           <a:xfrm>
             <a:off x="4322064" y="1325880"/>
-            <a:ext cx="3544824" cy="2331720"/>
+            <a:ext cx="3544824" cy="1874520"/>
           </a:xfrm>
           <a:prstGeom prst="roundRect">
             <a:avLst>
-              <a:gd name="adj" fmla="val 3137"/>
+              <a:gd name="adj" fmla="val 3902"/>
             </a:avLst>
           </a:prstGeom>
           <a:solidFill>
@@ -9717,7 +10540,7 @@
         <p:spPr>
           <a:xfrm>
             <a:off x="5099304" y="1435608"/>
-            <a:ext cx="2630424" cy="2112264"/>
+            <a:ext cx="2630424" cy="1655064"/>
           </a:xfrm>
           <a:prstGeom prst="rect">
             <a:avLst/>
@@ -9758,11 +10581,11 @@
         <p:spPr>
           <a:xfrm>
             <a:off x="8095488" y="1325880"/>
-            <a:ext cx="3544824" cy="2331720"/>
+            <a:ext cx="3544824" cy="1874520"/>
           </a:xfrm>
           <a:prstGeom prst="roundRect">
             <a:avLst>
-              <a:gd name="adj" fmla="val 3137"/>
+              <a:gd name="adj" fmla="val 3902"/>
             </a:avLst>
           </a:prstGeom>
           <a:solidFill>
@@ -9851,7 +10674,7 @@
         <p:spPr>
           <a:xfrm>
             <a:off x="8872728" y="1435608"/>
-            <a:ext cx="2630424" cy="2112264"/>
+            <a:ext cx="2630424" cy="1655064"/>
           </a:xfrm>
           <a:prstGeom prst="rect">
             <a:avLst/>
@@ -9891,12 +10714,12 @@
         </p:nvSpPr>
         <p:spPr>
           <a:xfrm>
-            <a:off x="548640" y="3886200"/>
-            <a:ext cx="3544824" cy="2331720"/>
+            <a:off x="548640" y="3429000"/>
+            <a:ext cx="3544824" cy="1874520"/>
           </a:xfrm>
           <a:prstGeom prst="roundRect">
             <a:avLst>
-              <a:gd name="adj" fmla="val 3137"/>
+              <a:gd name="adj" fmla="val 3902"/>
             </a:avLst>
           </a:prstGeom>
           <a:solidFill>
@@ -9925,7 +10748,7 @@
         </p:nvSpPr>
         <p:spPr>
           <a:xfrm>
-            <a:off x="731520" y="4069080"/>
+            <a:off x="731520" y="3611880"/>
             <a:ext cx="457200" cy="457200"/>
           </a:xfrm>
           <a:prstGeom prst="ellipse">
@@ -9945,7 +10768,7 @@
         </p:nvSpPr>
         <p:spPr>
           <a:xfrm>
-            <a:off x="731520" y="4069080"/>
+            <a:off x="731520" y="3611880"/>
             <a:ext cx="457200" cy="457200"/>
           </a:xfrm>
           <a:prstGeom prst="rect">
@@ -9984,8 +10807,8 @@
         </p:nvSpPr>
         <p:spPr>
           <a:xfrm>
-            <a:off x="1325880" y="3995928"/>
-            <a:ext cx="2630424" cy="2112264"/>
+            <a:off x="1325880" y="3538728"/>
+            <a:ext cx="2630424" cy="1655064"/>
           </a:xfrm>
           <a:prstGeom prst="rect">
             <a:avLst/>
@@ -10025,12 +10848,12 @@
         </p:nvSpPr>
         <p:spPr>
           <a:xfrm>
-            <a:off x="4322064" y="3886200"/>
-            <a:ext cx="3544824" cy="2331720"/>
+            <a:off x="4322064" y="3429000"/>
+            <a:ext cx="3544824" cy="1874520"/>
           </a:xfrm>
           <a:prstGeom prst="roundRect">
             <a:avLst>
-              <a:gd name="adj" fmla="val 3137"/>
+              <a:gd name="adj" fmla="val 3902"/>
             </a:avLst>
           </a:prstGeom>
           <a:solidFill>
@@ -10059,7 +10882,7 @@
         </p:nvSpPr>
         <p:spPr>
           <a:xfrm>
-            <a:off x="4504944" y="4069080"/>
+            <a:off x="4504944" y="3611880"/>
             <a:ext cx="457200" cy="457200"/>
           </a:xfrm>
           <a:prstGeom prst="ellipse">
@@ -10079,7 +10902,7 @@
         </p:nvSpPr>
         <p:spPr>
           <a:xfrm>
-            <a:off x="4504944" y="4069080"/>
+            <a:off x="4504944" y="3611880"/>
             <a:ext cx="457200" cy="457200"/>
           </a:xfrm>
           <a:prstGeom prst="rect">
@@ -10118,8 +10941,8 @@
         </p:nvSpPr>
         <p:spPr>
           <a:xfrm>
-            <a:off x="5099304" y="3995928"/>
-            <a:ext cx="2630424" cy="2112264"/>
+            <a:off x="5099304" y="3538728"/>
+            <a:ext cx="2630424" cy="1655064"/>
           </a:xfrm>
           <a:prstGeom prst="rect">
             <a:avLst/>
@@ -10159,12 +10982,12 @@
         </p:nvSpPr>
         <p:spPr>
           <a:xfrm>
-            <a:off x="8095488" y="3886200"/>
-            <a:ext cx="3544824" cy="2331720"/>
+            <a:off x="8095488" y="3429000"/>
+            <a:ext cx="3544824" cy="1874520"/>
           </a:xfrm>
           <a:prstGeom prst="roundRect">
             <a:avLst>
-              <a:gd name="adj" fmla="val 3137"/>
+              <a:gd name="adj" fmla="val 3902"/>
             </a:avLst>
           </a:prstGeom>
           <a:solidFill>
@@ -10193,7 +11016,7 @@
         </p:nvSpPr>
         <p:spPr>
           <a:xfrm>
-            <a:off x="8278368" y="4069080"/>
+            <a:off x="8278368" y="3611880"/>
             <a:ext cx="457200" cy="457200"/>
           </a:xfrm>
           <a:prstGeom prst="ellipse">
@@ -10213,7 +11036,7 @@
         </p:nvSpPr>
         <p:spPr>
           <a:xfrm>
-            <a:off x="8278368" y="4069080"/>
+            <a:off x="8278368" y="3611880"/>
             <a:ext cx="457200" cy="457200"/>
           </a:xfrm>
           <a:prstGeom prst="rect">
@@ -10252,8 +11075,8 @@
         </p:nvSpPr>
         <p:spPr>
           <a:xfrm>
-            <a:off x="8872728" y="3995928"/>
-            <a:ext cx="2630424" cy="2112264"/>
+            <a:off x="8872728" y="3538728"/>
+            <a:ext cx="2630424" cy="1655064"/>
           </a:xfrm>
           <a:prstGeom prst="rect">
             <a:avLst/>
@@ -10282,6 +11105,92 @@
               <a:t>'Quero cancelar'</a:t>
             </a:r>
             <a:endParaRPr lang="en-US" sz="1800" dirty="0"/>
+          </a:p>
+        </p:txBody>
+      </p:sp>
+      <p:sp>
+        <p:nvSpPr>
+          <p:cNvPr id="33" name="Shape 30"/>
+          <p:cNvSpPr/>
+          <p:nvPr/>
+        </p:nvSpPr>
+        <p:spPr>
+          <a:xfrm>
+            <a:off x="548640" y="5413248"/>
+            <a:ext cx="11091672" cy="868680"/>
+          </a:xfrm>
+          <a:prstGeom prst="roundRect">
+            <a:avLst>
+              <a:gd name="adj" fmla="val 8421"/>
+            </a:avLst>
+          </a:prstGeom>
+          <a:solidFill>
+            <a:srgbClr val="EEF3FA"/>
+          </a:solidFill>
+          <a:ln w="6350">
+            <a:solidFill>
+              <a:srgbClr val="D8E0EC"/>
+            </a:solidFill>
+            <a:prstDash val="solid"/>
+          </a:ln>
+        </p:spPr>
+      </p:sp>
+      <p:sp>
+        <p:nvSpPr>
+          <p:cNvPr id="34" name="Shape 31"/>
+          <p:cNvSpPr/>
+          <p:nvPr/>
+        </p:nvSpPr>
+        <p:spPr>
+          <a:xfrm>
+            <a:off x="548640" y="5413248"/>
+            <a:ext cx="91440" cy="868680"/>
+          </a:xfrm>
+          <a:prstGeom prst="rect">
+            <a:avLst/>
+          </a:prstGeom>
+          <a:solidFill>
+            <a:srgbClr val="F7A23B"/>
+          </a:solidFill>
+          <a:ln/>
+        </p:spPr>
+      </p:sp>
+      <p:sp>
+        <p:nvSpPr>
+          <p:cNvPr id="35" name="Text 32"/>
+          <p:cNvSpPr/>
+          <p:nvPr/>
+        </p:nvSpPr>
+        <p:spPr>
+          <a:xfrm>
+            <a:off x="777240" y="5458968"/>
+            <a:ext cx="10744200" cy="777240"/>
+          </a:xfrm>
+          <a:prstGeom prst="rect">
+            <a:avLst/>
+          </a:prstGeom>
+          <a:noFill/>
+          <a:ln/>
+        </p:spPr>
+        <p:txBody>
+          <a:bodyPr wrap="square" rtlCol="0" anchor="ctr"/>
+          <a:lstStyle/>
+          <a:p>
+            <a:pPr indent="0" marL="0">
+              <a:buNone/>
+            </a:pPr>
+            <a:r>
+              <a:rPr lang="en-US" sz="1500" dirty="0">
+                <a:solidFill>
+                  <a:srgbClr val="1F2937"/>
+                </a:solidFill>
+                <a:latin typeface="Arial" pitchFamily="34" charset="0"/>
+                <a:ea typeface="Arial" pitchFamily="34" charset="-122"/>
+                <a:cs typeface="Arial" pitchFamily="34" charset="-120"/>
+              </a:rPr>
+              <a:t>As perguntas comuns têm resposta padrão, e quase todas se resolvem no próprio portal.</a:t>
+            </a:r>
+            <a:endParaRPr lang="en-US" sz="1500" dirty="0"/>
           </a:p>
         </p:txBody>
       </p:sp>
@@ -11118,7 +12027,7 @@
         <p:spPr>
           <a:xfrm>
             <a:off x="822960" y="2286000"/>
-            <a:ext cx="4860036" cy="3749040"/>
+            <a:ext cx="4860036" cy="2286000"/>
           </a:xfrm>
           <a:prstGeom prst="rect">
             <a:avLst/>
@@ -11216,6 +12125,65 @@
       <p:sp>
         <p:nvSpPr>
           <p:cNvPr id="13" name="Shape 10"/>
+          <p:cNvSpPr/>
+          <p:nvPr/>
+        </p:nvSpPr>
+        <p:spPr>
+          <a:xfrm>
+            <a:off x="822960" y="4663440"/>
+            <a:ext cx="4860036" cy="18288"/>
+          </a:xfrm>
+          <a:prstGeom prst="rect">
+            <a:avLst/>
+          </a:prstGeom>
+          <a:solidFill>
+            <a:srgbClr val="D8E0EC"/>
+          </a:solidFill>
+          <a:ln/>
+        </p:spPr>
+      </p:sp>
+      <p:sp>
+        <p:nvSpPr>
+          <p:cNvPr id="14" name="Text 11"/>
+          <p:cNvSpPr/>
+          <p:nvPr/>
+        </p:nvSpPr>
+        <p:spPr>
+          <a:xfrm>
+            <a:off x="822960" y="4754880"/>
+            <a:ext cx="4860036" cy="1371600"/>
+          </a:xfrm>
+          <a:prstGeom prst="rect">
+            <a:avLst/>
+          </a:prstGeom>
+          <a:noFill/>
+          <a:ln/>
+        </p:spPr>
+        <p:txBody>
+          <a:bodyPr wrap="square" rtlCol="0" anchor="t"/>
+          <a:lstStyle/>
+          <a:p>
+            <a:pPr indent="0" marL="0">
+              <a:buNone/>
+            </a:pPr>
+            <a:r>
+              <a:rPr lang="en-US" sz="1300" i="1" dirty="0">
+                <a:solidFill>
+                  <a:srgbClr val="64748B"/>
+                </a:solidFill>
+                <a:latin typeface="Arial" pitchFamily="34" charset="0"/>
+                <a:ea typeface="Arial" pitchFamily="34" charset="-122"/>
+                <a:cs typeface="Arial" pitchFamily="34" charset="-120"/>
+              </a:rPr>
+              <a:t>No pedido de cancelamento, siga o roteiro da tela. Muitos clientes desistem ao ver quanto já economizaram.</a:t>
+            </a:r>
+            <a:endParaRPr lang="en-US" sz="1300" dirty="0"/>
+          </a:p>
+        </p:txBody>
+      </p:sp>
+      <p:sp>
+        <p:nvSpPr>
+          <p:cNvPr id="15" name="Shape 12"/>
           <p:cNvSpPr/>
           <p:nvPr/>
         </p:nvSpPr>
@@ -11249,7 +12217,7 @@
       </p:sp>
       <p:sp>
         <p:nvSpPr>
-          <p:cNvPr id="14" name="Shape 11"/>
+          <p:cNvPr id="16" name="Shape 13"/>
           <p:cNvSpPr/>
           <p:nvPr/>
         </p:nvSpPr>
@@ -11269,7 +12237,7 @@
       </p:sp>
       <p:sp>
         <p:nvSpPr>
-          <p:cNvPr id="15" name="Text 12"/>
+          <p:cNvPr id="17" name="Text 14"/>
           <p:cNvSpPr/>
           <p:nvPr/>
         </p:nvSpPr>
@@ -11310,14 +12278,14 @@
       </p:sp>
       <p:sp>
         <p:nvSpPr>
-          <p:cNvPr id="16" name="Text 13"/>
+          <p:cNvPr id="18" name="Text 15"/>
           <p:cNvSpPr/>
           <p:nvPr/>
         </p:nvSpPr>
         <p:spPr>
           <a:xfrm>
             <a:off x="6505956" y="2286000"/>
-            <a:ext cx="4860036" cy="3749040"/>
+            <a:ext cx="4860036" cy="2286000"/>
           </a:xfrm>
           <a:prstGeom prst="rect">
             <a:avLst/>
@@ -11413,6 +12381,65 @@
               <a:t>programa de indicação</a:t>
             </a:r>
             <a:endParaRPr lang="en-US" sz="1700" dirty="0"/>
+          </a:p>
+        </p:txBody>
+      </p:sp>
+      <p:sp>
+        <p:nvSpPr>
+          <p:cNvPr id="19" name="Shape 16"/>
+          <p:cNvSpPr/>
+          <p:nvPr/>
+        </p:nvSpPr>
+        <p:spPr>
+          <a:xfrm>
+            <a:off x="6505956" y="4663440"/>
+            <a:ext cx="4860036" cy="18288"/>
+          </a:xfrm>
+          <a:prstGeom prst="rect">
+            <a:avLst/>
+          </a:prstGeom>
+          <a:solidFill>
+            <a:srgbClr val="D8E0EC"/>
+          </a:solidFill>
+          <a:ln/>
+        </p:spPr>
+      </p:sp>
+      <p:sp>
+        <p:nvSpPr>
+          <p:cNvPr id="20" name="Text 17"/>
+          <p:cNvSpPr/>
+          <p:nvPr/>
+        </p:nvSpPr>
+        <p:spPr>
+          <a:xfrm>
+            <a:off x="6505956" y="4754880"/>
+            <a:ext cx="4860036" cy="1371600"/>
+          </a:xfrm>
+          <a:prstGeom prst="rect">
+            <a:avLst/>
+          </a:prstGeom>
+          <a:noFill/>
+          <a:ln/>
+        </p:spPr>
+        <p:txBody>
+          <a:bodyPr wrap="square" rtlCol="0" anchor="t"/>
+          <a:lstStyle/>
+          <a:p>
+            <a:pPr indent="0" marL="0">
+              <a:buNone/>
+            </a:pPr>
+            <a:r>
+              <a:rPr lang="en-US" sz="1300" i="1" dirty="0">
+                <a:solidFill>
+                  <a:srgbClr val="64748B"/>
+                </a:solidFill>
+                <a:latin typeface="Arial" pitchFamily="34" charset="0"/>
+                <a:ea typeface="Arial" pitchFamily="34" charset="-122"/>
+                <a:cs typeface="Arial" pitchFamily="34" charset="-120"/>
+              </a:rPr>
+              <a:t>O melhor suporte é o proativo, como as ações da tela.</a:t>
+            </a:r>
+            <a:endParaRPr lang="en-US" sz="1300" dirty="0"/>
           </a:p>
         </p:txBody>
       </p:sp>
@@ -13619,7 +14646,7 @@
                 <a:ea typeface="Arial" pitchFamily="34" charset="-122"/>
                 <a:cs typeface="Arial" pitchFamily="34" charset="-120"/>
               </a:rPr>
-              <a:t>1. Geração do mês 2 registrada e comparada com o esperado</a:t>
+              <a:t>Registre a geração do mês e compare com o esperado.</a:t>
             </a:r>
             <a:endParaRPr lang="en-US" sz="1500" dirty="0"/>
           </a:p>
@@ -13670,7 +14697,7 @@
                 <a:ea typeface="Arial" pitchFamily="34" charset="-122"/>
                 <a:cs typeface="Arial" pitchFamily="34" charset="-120"/>
               </a:rPr>
-              <a:t>2. Faturas: subir · revisar (6 passos) · resolver pendências · aprovar</a:t>
+              <a:t>Suba e revise as faturas do mês. Investigue o consumo atípico antes de aprovar.</a:t>
             </a:r>
             <a:endParaRPr lang="en-US" sz="1500" dirty="0"/>
           </a:p>
@@ -13721,7 +14748,7 @@
                 <a:ea typeface="Arial" pitchFamily="34" charset="-122"/>
                 <a:cs typeface="Arial" pitchFamily="34" charset="-120"/>
               </a:rPr>
-              <a:t>3. Cobranças: conferir · abrir · emitir · ajuste · 4. Pagamentos: baixa · vencidas · reemissão</a:t>
+              <a:t>Confira, abra e emita as cobranças, lance o ajuste do mês anterior e trate vencidas e boletos vencidos.</a:t>
             </a:r>
             <a:endParaRPr lang="en-US" sz="1500" dirty="0"/>
           </a:p>
@@ -13772,7 +14799,7 @@
                 <a:ea typeface="Arial" pitchFamily="34" charset="-122"/>
                 <a:cs typeface="Arial" pitchFamily="34" charset="-120"/>
               </a:rPr>
-              <a:t>5. Rateio: saída + entrada · 6. Alertas: zero críticos · 7. Repasse e relatório ao produtor</a:t>
+              <a:t>Atualize o rateio com a saída e a entrada de clientes, zere os alertas críticos e calcule o repasse ao produtor.</a:t>
             </a:r>
             <a:endParaRPr lang="en-US" sz="1500" dirty="0"/>
           </a:p>
@@ -14344,7 +15371,7 @@
                 <a:ea typeface="Arial" pitchFamily="34" charset="-122"/>
                 <a:cs typeface="Arial" pitchFamily="34" charset="-120"/>
               </a:rPr>
-              <a:t>M9 · Fechamento</a:t>
+              <a:t>M9 · Teste rápido</a:t>
             </a:r>
             <a:endParaRPr lang="en-US" sz="900" dirty="0"/>
           </a:p>
@@ -14403,7 +15430,7 @@
                 <a:ea typeface="Arial" pitchFamily="34" charset="-122"/>
                 <a:cs typeface="Arial" pitchFamily="34" charset="-120"/>
               </a:rPr>
-              <a:t>FECHAMENTO DO MÓDULO</a:t>
+              <a:t>QUESTÕES 1–2 DE 5</a:t>
             </a:r>
             <a:endParaRPr lang="en-US" sz="1000" dirty="0"/>
           </a:p>
@@ -14444,7 +15471,7 @@
                 <a:ea typeface="Arial" pitchFamily="34" charset="-122"/>
                 <a:cs typeface="Arial" pitchFamily="34" charset="-120"/>
               </a:rPr>
-              <a:t>Pratique e entregue</a:t>
+              <a:t>Teste rápido</a:t>
             </a:r>
             <a:endParaRPr lang="en-US" sz="2600" dirty="0"/>
           </a:p>
@@ -14452,142 +15479,17 @@
       </p:sp>
       <p:sp>
         <p:nvSpPr>
-          <p:cNvPr id="9" name="Text 6"/>
+          <p:cNvPr id="9" name="Shape 6"/>
           <p:cNvSpPr/>
           <p:nvPr/>
         </p:nvSpPr>
         <p:spPr>
           <a:xfrm>
             <a:off x="548640" y="1325880"/>
-            <a:ext cx="5394960" cy="411480"/>
-          </a:xfrm>
-          <a:prstGeom prst="rect">
-            <a:avLst/>
-          </a:prstGeom>
-          <a:noFill/>
-          <a:ln/>
-        </p:spPr>
-        <p:txBody>
-          <a:bodyPr wrap="square" rtlCol="0" anchor="ctr"/>
-          <a:lstStyle/>
-          <a:p>
-            <a:pPr indent="0" marL="0">
-              <a:buNone/>
-            </a:pPr>
-            <a:r>
-              <a:rPr lang="en-US" sz="1600" b="1" dirty="0">
-                <a:solidFill>
-                  <a:srgbClr val="1B3A6B"/>
-                </a:solidFill>
-                <a:latin typeface="Arial" pitchFamily="34" charset="0"/>
-                <a:ea typeface="Arial" pitchFamily="34" charset="-122"/>
-                <a:cs typeface="Arial" pitchFamily="34" charset="-120"/>
-              </a:rPr>
-              <a:t>Exercícios</a:t>
-            </a:r>
-            <a:endParaRPr lang="en-US" sz="1600" dirty="0"/>
-          </a:p>
-        </p:txBody>
-      </p:sp>
-      <p:sp>
-        <p:nvSpPr>
-          <p:cNvPr id="10" name="Text 7"/>
-          <p:cNvSpPr/>
-          <p:nvPr/>
-        </p:nvSpPr>
-        <p:spPr>
-          <a:xfrm>
-            <a:off x="548640" y="1783080"/>
-            <a:ext cx="5394960" cy="4480560"/>
-          </a:xfrm>
-          <a:prstGeom prst="rect">
-            <a:avLst/>
-          </a:prstGeom>
-          <a:noFill/>
-          <a:ln/>
-        </p:spPr>
-        <p:txBody>
-          <a:bodyPr wrap="square" rtlCol="0" anchor="t">
-            <a:normAutofit/>
-          </a:bodyPr>
-          <a:lstStyle/>
-          <a:p>
-            <a:pPr indent="0" marL="0">
-              <a:spcAft>
-                <a:spcPts val="800"/>
-              </a:spcAft>
-              <a:buNone/>
-            </a:pPr>
-            <a:r>
-              <a:rPr lang="en-US" sz="1600" dirty="0">
-                <a:solidFill>
-                  <a:srgbClr val="1F2937"/>
-                </a:solidFill>
-                <a:latin typeface="Arial" pitchFamily="34" charset="0"/>
-                <a:ea typeface="Arial" pitchFamily="34" charset="-122"/>
-                <a:cs typeface="Arial" pitchFamily="34" charset="-120"/>
-              </a:rPr>
-              <a:t>1. Monte a agenda do operador para a primeira semana do mês (faturas chegando).</a:t>
-            </a:r>
-            <a:endParaRPr lang="en-US" sz="1600" dirty="0"/>
-          </a:p>
-          <a:p>
-            <a:pPr indent="0" marL="0">
-              <a:spcAft>
-                <a:spcPts val="800"/>
-              </a:spcAft>
-              <a:buNone/>
-            </a:pPr>
-            <a:r>
-              <a:rPr lang="en-US" sz="1600" dirty="0">
-                <a:solidFill>
-                  <a:srgbClr val="1F2937"/>
-                </a:solidFill>
-                <a:latin typeface="Arial" pitchFamily="34" charset="0"/>
-                <a:ea typeface="Arial" pitchFamily="34" charset="-122"/>
-                <a:cs typeface="Arial" pitchFamily="34" charset="-120"/>
-              </a:rPr>
-              <a:t>2. O sino mostra 12 alertas. Em que ordem você trata?</a:t>
-            </a:r>
-            <a:endParaRPr lang="en-US" sz="1600" dirty="0"/>
-          </a:p>
-          <a:p>
-            <a:pPr indent="0" marL="0">
-              <a:spcAft>
-                <a:spcPts val="800"/>
-              </a:spcAft>
-              <a:buNone/>
-            </a:pPr>
-            <a:r>
-              <a:rPr lang="en-US" sz="1600" dirty="0">
-                <a:solidFill>
-                  <a:srgbClr val="1F2937"/>
-                </a:solidFill>
-                <a:latin typeface="Arial" pitchFamily="34" charset="0"/>
-                <a:ea typeface="Arial" pitchFamily="34" charset="-122"/>
-                <a:cs typeface="Arial" pitchFamily="34" charset="-120"/>
-              </a:rPr>
-              <a:t>3. Quantos chamados por mês você espera com 500 clientes, e como reduzir?</a:t>
-            </a:r>
-            <a:endParaRPr lang="en-US" sz="1600" dirty="0"/>
-          </a:p>
-        </p:txBody>
-      </p:sp>
-      <p:sp>
-        <p:nvSpPr>
-          <p:cNvPr id="11" name="Shape 8"/>
-          <p:cNvSpPr/>
-          <p:nvPr/>
-        </p:nvSpPr>
-        <p:spPr>
-          <a:xfrm>
-            <a:off x="6172200" y="1325880"/>
-            <a:ext cx="5468112" cy="4937760"/>
-          </a:xfrm>
-          <a:prstGeom prst="roundRect">
-            <a:avLst>
-              <a:gd name="adj" fmla="val 1852"/>
-            </a:avLst>
+            <a:ext cx="502920" cy="502920"/>
+          </a:xfrm>
+          <a:prstGeom prst="ellipse">
+            <a:avLst/>
           </a:prstGeom>
           <a:solidFill>
             <a:srgbClr val="1B3A6B"/>
@@ -14597,32 +15499,135 @@
       </p:sp>
       <p:sp>
         <p:nvSpPr>
-          <p:cNvPr id="12" name="Text 9"/>
-          <p:cNvSpPr/>
-          <p:nvPr/>
-        </p:nvSpPr>
-        <p:spPr>
-          <a:xfrm>
-            <a:off x="6492240" y="1554480"/>
-            <a:ext cx="4828032" cy="4480560"/>
-          </a:xfrm>
-          <a:prstGeom prst="rect">
-            <a:avLst/>
-          </a:prstGeom>
-          <a:noFill/>
-          <a:ln/>
-        </p:spPr>
-        <p:txBody>
-          <a:bodyPr wrap="square" rtlCol="0" anchor="t">
-            <a:normAutofit/>
-          </a:bodyPr>
+          <p:cNvPr id="10" name="Text 7"/>
+          <p:cNvSpPr/>
+          <p:nvPr/>
+        </p:nvSpPr>
+        <p:spPr>
+          <a:xfrm>
+            <a:off x="548640" y="1325880"/>
+            <a:ext cx="502920" cy="502920"/>
+          </a:xfrm>
+          <a:prstGeom prst="rect">
+            <a:avLst/>
+          </a:prstGeom>
+          <a:noFill/>
+          <a:ln/>
+        </p:spPr>
+        <p:txBody>
+          <a:bodyPr wrap="square" rtlCol="0" anchor="ctr"/>
+          <a:lstStyle/>
+          <a:p>
+            <a:pPr algn="ctr" indent="0" marL="0">
+              <a:buNone/>
+            </a:pPr>
+            <a:r>
+              <a:rPr lang="en-US" sz="1600" b="1" dirty="0">
+                <a:solidFill>
+                  <a:srgbClr val="FFFFFF"/>
+                </a:solidFill>
+                <a:latin typeface="Arial" pitchFamily="34" charset="0"/>
+                <a:ea typeface="Arial" pitchFamily="34" charset="-122"/>
+                <a:cs typeface="Arial" pitchFamily="34" charset="-120"/>
+              </a:rPr>
+              <a:t>1</a:t>
+            </a:r>
+            <a:endParaRPr lang="en-US" sz="1600" dirty="0"/>
+          </a:p>
+        </p:txBody>
+      </p:sp>
+      <p:sp>
+        <p:nvSpPr>
+          <p:cNvPr id="11" name="Text 8"/>
+          <p:cNvSpPr/>
+          <p:nvPr/>
+        </p:nvSpPr>
+        <p:spPr>
+          <a:xfrm>
+            <a:off x="1234440" y="1280160"/>
+            <a:ext cx="10424160" cy="640080"/>
+          </a:xfrm>
+          <a:prstGeom prst="rect">
+            <a:avLst/>
+          </a:prstGeom>
+          <a:noFill/>
+          <a:ln/>
+        </p:spPr>
+        <p:txBody>
+          <a:bodyPr wrap="square" rtlCol="0" anchor="ctr"/>
           <a:lstStyle/>
           <a:p>
             <a:pPr indent="0" marL="0">
               <a:buNone/>
             </a:pPr>
             <a:r>
-              <a:rPr lang="en-US" sz="1300" b="1" spc="100" kern="0" dirty="0">
+              <a:rPr lang="en-US" sz="1800" b="1" dirty="0">
+                <a:solidFill>
+                  <a:srgbClr val="1B3A6B"/>
+                </a:solidFill>
+                <a:latin typeface="Arial" pitchFamily="34" charset="0"/>
+                <a:ea typeface="Arial" pitchFamily="34" charset="-122"/>
+                <a:cs typeface="Arial" pitchFamily="34" charset="-120"/>
+              </a:rPr>
+              <a:t>Com que frequência a fila de faturas em revisão deve ser trabalhada?</a:t>
+            </a:r>
+            <a:endParaRPr lang="en-US" sz="1800" dirty="0"/>
+          </a:p>
+        </p:txBody>
+      </p:sp>
+      <p:sp>
+        <p:nvSpPr>
+          <p:cNvPr id="12" name="Shape 9"/>
+          <p:cNvSpPr/>
+          <p:nvPr/>
+        </p:nvSpPr>
+        <p:spPr>
+          <a:xfrm>
+            <a:off x="548640" y="2057400"/>
+            <a:ext cx="2601468" cy="1463040"/>
+          </a:xfrm>
+          <a:prstGeom prst="roundRect">
+            <a:avLst>
+              <a:gd name="adj" fmla="val 5000"/>
+            </a:avLst>
+          </a:prstGeom>
+          <a:solidFill>
+            <a:srgbClr val="FFFFFF"/>
+          </a:solidFill>
+          <a:ln w="9525">
+            <a:solidFill>
+              <a:srgbClr val="D8E0EC"/>
+            </a:solidFill>
+            <a:prstDash val="solid"/>
+          </a:ln>
+        </p:spPr>
+      </p:sp>
+      <p:sp>
+        <p:nvSpPr>
+          <p:cNvPr id="13" name="Text 10"/>
+          <p:cNvSpPr/>
+          <p:nvPr/>
+        </p:nvSpPr>
+        <p:spPr>
+          <a:xfrm>
+            <a:off x="685800" y="2148840"/>
+            <a:ext cx="365760" cy="365760"/>
+          </a:xfrm>
+          <a:prstGeom prst="rect">
+            <a:avLst/>
+          </a:prstGeom>
+          <a:noFill/>
+          <a:ln/>
+        </p:spPr>
+        <p:txBody>
+          <a:bodyPr wrap="square" rtlCol="0" anchor="ctr"/>
+          <a:lstStyle/>
+          <a:p>
+            <a:pPr indent="0" marL="0">
+              <a:buNone/>
+            </a:pPr>
+            <a:r>
+              <a:rPr lang="en-US" sz="1400" b="1" dirty="0">
                 <a:solidFill>
                   <a:srgbClr val="F7A23B"/>
                 </a:solidFill>
@@ -14630,14 +15635,307 @@
                 <a:ea typeface="Arial" pitchFamily="34" charset="-122"/>
                 <a:cs typeface="Arial" pitchFamily="34" charset="-120"/>
               </a:rPr>
-              <a:t>ENTREGÁVEL DO MÓDULO
-</a:t>
-            </a:r>
+              <a:t>B</a:t>
+            </a:r>
+            <a:endParaRPr lang="en-US" sz="1400" dirty="0"/>
+          </a:p>
+        </p:txBody>
+      </p:sp>
+      <p:sp>
+        <p:nvSpPr>
+          <p:cNvPr id="14" name="Text 11"/>
+          <p:cNvSpPr/>
+          <p:nvPr/>
+        </p:nvSpPr>
+        <p:spPr>
+          <a:xfrm>
+            <a:off x="685800" y="2514600"/>
+            <a:ext cx="2327148" cy="914400"/>
+          </a:xfrm>
+          <a:prstGeom prst="rect">
+            <a:avLst/>
+          </a:prstGeom>
+          <a:noFill/>
+          <a:ln/>
+        </p:spPr>
+        <p:txBody>
+          <a:bodyPr wrap="square" rtlCol="0" anchor="t"/>
+          <a:lstStyle/>
+          <a:p>
             <a:pPr indent="0" marL="0">
               <a:buNone/>
             </a:pPr>
             <a:r>
-              <a:rPr lang="en-US" sz="1600" dirty="0">
+              <a:rPr lang="en-US" sz="1500" dirty="0">
+                <a:solidFill>
+                  <a:srgbClr val="1F2937"/>
+                </a:solidFill>
+                <a:latin typeface="Arial" pitchFamily="34" charset="0"/>
+                <a:ea typeface="Arial" pitchFamily="34" charset="-122"/>
+                <a:cs typeface="Arial" pitchFamily="34" charset="-120"/>
+              </a:rPr>
+              <a:t>mensalmente</a:t>
+            </a:r>
+            <a:endParaRPr lang="en-US" sz="1500" dirty="0"/>
+          </a:p>
+        </p:txBody>
+      </p:sp>
+      <p:sp>
+        <p:nvSpPr>
+          <p:cNvPr id="15" name="Shape 12"/>
+          <p:cNvSpPr/>
+          <p:nvPr/>
+        </p:nvSpPr>
+        <p:spPr>
+          <a:xfrm>
+            <a:off x="3378708" y="2057400"/>
+            <a:ext cx="2601468" cy="1463040"/>
+          </a:xfrm>
+          <a:prstGeom prst="roundRect">
+            <a:avLst>
+              <a:gd name="adj" fmla="val 5000"/>
+            </a:avLst>
+          </a:prstGeom>
+          <a:solidFill>
+            <a:srgbClr val="FFFFFF"/>
+          </a:solidFill>
+          <a:ln w="9525">
+            <a:solidFill>
+              <a:srgbClr val="D8E0EC"/>
+            </a:solidFill>
+            <a:prstDash val="solid"/>
+          </a:ln>
+        </p:spPr>
+      </p:sp>
+      <p:sp>
+        <p:nvSpPr>
+          <p:cNvPr id="16" name="Text 13"/>
+          <p:cNvSpPr/>
+          <p:nvPr/>
+        </p:nvSpPr>
+        <p:spPr>
+          <a:xfrm>
+            <a:off x="3515868" y="2148840"/>
+            <a:ext cx="365760" cy="365760"/>
+          </a:xfrm>
+          <a:prstGeom prst="rect">
+            <a:avLst/>
+          </a:prstGeom>
+          <a:noFill/>
+          <a:ln/>
+        </p:spPr>
+        <p:txBody>
+          <a:bodyPr wrap="square" rtlCol="0" anchor="ctr"/>
+          <a:lstStyle/>
+          <a:p>
+            <a:pPr indent="0" marL="0">
+              <a:buNone/>
+            </a:pPr>
+            <a:r>
+              <a:rPr lang="en-US" sz="1400" b="1" dirty="0">
+                <a:solidFill>
+                  <a:srgbClr val="F7A23B"/>
+                </a:solidFill>
+                <a:latin typeface="Arial" pitchFamily="34" charset="0"/>
+                <a:ea typeface="Arial" pitchFamily="34" charset="-122"/>
+                <a:cs typeface="Arial" pitchFamily="34" charset="-120"/>
+              </a:rPr>
+              <a:t>C</a:t>
+            </a:r>
+            <a:endParaRPr lang="en-US" sz="1400" dirty="0"/>
+          </a:p>
+        </p:txBody>
+      </p:sp>
+      <p:sp>
+        <p:nvSpPr>
+          <p:cNvPr id="17" name="Text 14"/>
+          <p:cNvSpPr/>
+          <p:nvPr/>
+        </p:nvSpPr>
+        <p:spPr>
+          <a:xfrm>
+            <a:off x="3515868" y="2514600"/>
+            <a:ext cx="2327148" cy="914400"/>
+          </a:xfrm>
+          <a:prstGeom prst="rect">
+            <a:avLst/>
+          </a:prstGeom>
+          <a:noFill/>
+          <a:ln/>
+        </p:spPr>
+        <p:txBody>
+          <a:bodyPr wrap="square" rtlCol="0" anchor="t"/>
+          <a:lstStyle/>
+          <a:p>
+            <a:pPr indent="0" marL="0">
+              <a:buNone/>
+            </a:pPr>
+            <a:r>
+              <a:rPr lang="en-US" sz="1500" dirty="0">
+                <a:solidFill>
+                  <a:srgbClr val="1F2937"/>
+                </a:solidFill>
+                <a:latin typeface="Arial" pitchFamily="34" charset="0"/>
+                <a:ea typeface="Arial" pitchFamily="34" charset="-122"/>
+                <a:cs typeface="Arial" pitchFamily="34" charset="-120"/>
+              </a:rPr>
+              <a:t>só quando o cliente reclama</a:t>
+            </a:r>
+            <a:endParaRPr lang="en-US" sz="1500" dirty="0"/>
+          </a:p>
+        </p:txBody>
+      </p:sp>
+      <p:sp>
+        <p:nvSpPr>
+          <p:cNvPr id="18" name="Shape 15"/>
+          <p:cNvSpPr/>
+          <p:nvPr/>
+        </p:nvSpPr>
+        <p:spPr>
+          <a:xfrm>
+            <a:off x="6208776" y="2057400"/>
+            <a:ext cx="2601468" cy="1463040"/>
+          </a:xfrm>
+          <a:prstGeom prst="roundRect">
+            <a:avLst>
+              <a:gd name="adj" fmla="val 5000"/>
+            </a:avLst>
+          </a:prstGeom>
+          <a:solidFill>
+            <a:srgbClr val="FFFFFF"/>
+          </a:solidFill>
+          <a:ln w="9525">
+            <a:solidFill>
+              <a:srgbClr val="D8E0EC"/>
+            </a:solidFill>
+            <a:prstDash val="solid"/>
+          </a:ln>
+        </p:spPr>
+      </p:sp>
+      <p:sp>
+        <p:nvSpPr>
+          <p:cNvPr id="19" name="Text 16"/>
+          <p:cNvSpPr/>
+          <p:nvPr/>
+        </p:nvSpPr>
+        <p:spPr>
+          <a:xfrm>
+            <a:off x="6345936" y="2148840"/>
+            <a:ext cx="365760" cy="365760"/>
+          </a:xfrm>
+          <a:prstGeom prst="rect">
+            <a:avLst/>
+          </a:prstGeom>
+          <a:noFill/>
+          <a:ln/>
+        </p:spPr>
+        <p:txBody>
+          <a:bodyPr wrap="square" rtlCol="0" anchor="ctr"/>
+          <a:lstStyle/>
+          <a:p>
+            <a:pPr indent="0" marL="0">
+              <a:buNone/>
+            </a:pPr>
+            <a:r>
+              <a:rPr lang="en-US" sz="1400" b="1" dirty="0">
+                <a:solidFill>
+                  <a:srgbClr val="F7A23B"/>
+                </a:solidFill>
+                <a:latin typeface="Arial" pitchFamily="34" charset="0"/>
+                <a:ea typeface="Arial" pitchFamily="34" charset="-122"/>
+                <a:cs typeface="Arial" pitchFamily="34" charset="-120"/>
+              </a:rPr>
+              <a:t>D</a:t>
+            </a:r>
+            <a:endParaRPr lang="en-US" sz="1400" dirty="0"/>
+          </a:p>
+        </p:txBody>
+      </p:sp>
+      <p:sp>
+        <p:nvSpPr>
+          <p:cNvPr id="20" name="Text 17"/>
+          <p:cNvSpPr/>
+          <p:nvPr/>
+        </p:nvSpPr>
+        <p:spPr>
+          <a:xfrm>
+            <a:off x="6345936" y="2514600"/>
+            <a:ext cx="2327148" cy="914400"/>
+          </a:xfrm>
+          <a:prstGeom prst="rect">
+            <a:avLst/>
+          </a:prstGeom>
+          <a:noFill/>
+          <a:ln/>
+        </p:spPr>
+        <p:txBody>
+          <a:bodyPr wrap="square" rtlCol="0" anchor="t"/>
+          <a:lstStyle/>
+          <a:p>
+            <a:pPr indent="0" marL="0">
+              <a:buNone/>
+            </a:pPr>
+            <a:r>
+              <a:rPr lang="en-US" sz="1500" dirty="0">
+                <a:solidFill>
+                  <a:srgbClr val="1F2937"/>
+                </a:solidFill>
+                <a:latin typeface="Arial" pitchFamily="34" charset="0"/>
+                <a:ea typeface="Arial" pitchFamily="34" charset="-122"/>
+                <a:cs typeface="Arial" pitchFamily="34" charset="-120"/>
+              </a:rPr>
+              <a:t>anualmente</a:t>
+            </a:r>
+            <a:endParaRPr lang="en-US" sz="1500" dirty="0"/>
+          </a:p>
+        </p:txBody>
+      </p:sp>
+      <p:sp>
+        <p:nvSpPr>
+          <p:cNvPr id="21" name="Shape 18"/>
+          <p:cNvSpPr/>
+          <p:nvPr/>
+        </p:nvSpPr>
+        <p:spPr>
+          <a:xfrm>
+            <a:off x="548640" y="3840480"/>
+            <a:ext cx="502920" cy="502920"/>
+          </a:xfrm>
+          <a:prstGeom prst="ellipse">
+            <a:avLst/>
+          </a:prstGeom>
+          <a:solidFill>
+            <a:srgbClr val="1B3A6B"/>
+          </a:solidFill>
+          <a:ln/>
+        </p:spPr>
+      </p:sp>
+      <p:sp>
+        <p:nvSpPr>
+          <p:cNvPr id="22" name="Text 19"/>
+          <p:cNvSpPr/>
+          <p:nvPr/>
+        </p:nvSpPr>
+        <p:spPr>
+          <a:xfrm>
+            <a:off x="548640" y="3840480"/>
+            <a:ext cx="502920" cy="502920"/>
+          </a:xfrm>
+          <a:prstGeom prst="rect">
+            <a:avLst/>
+          </a:prstGeom>
+          <a:noFill/>
+          <a:ln/>
+        </p:spPr>
+        <p:txBody>
+          <a:bodyPr wrap="square" rtlCol="0" anchor="ctr"/>
+          <a:lstStyle/>
+          <a:p>
+            <a:pPr algn="ctr" indent="0" marL="0">
+              <a:buNone/>
+            </a:pPr>
+            <a:r>
+              <a:rPr lang="en-US" sz="1600" b="1" dirty="0">
                 <a:solidFill>
                   <a:srgbClr val="FFFFFF"/>
                 </a:solidFill>
@@ -14645,9 +15943,468 @@
                 <a:ea typeface="Arial" pitchFamily="34" charset="-122"/>
                 <a:cs typeface="Arial" pitchFamily="34" charset="-120"/>
               </a:rPr>
-              <a:t>SOP da minha operação: rotina diária, semanal e mensal em uma página, com responsável e horário de cada tarefa; e o mês 2 fechado no laboratório (geração registrada, faturas aprovadas, cobranças abertas e emitidas, alertas zerados ou justificados, relatório para o produtor).</a:t>
-            </a:r>
-            <a:endParaRPr lang="en-US" sz="1300" dirty="0"/>
+              <a:t>2</a:t>
+            </a:r>
+            <a:endParaRPr lang="en-US" sz="1600" dirty="0"/>
+          </a:p>
+        </p:txBody>
+      </p:sp>
+      <p:sp>
+        <p:nvSpPr>
+          <p:cNvPr id="23" name="Text 20"/>
+          <p:cNvSpPr/>
+          <p:nvPr/>
+        </p:nvSpPr>
+        <p:spPr>
+          <a:xfrm>
+            <a:off x="1234440" y="3794760"/>
+            <a:ext cx="10424160" cy="640080"/>
+          </a:xfrm>
+          <a:prstGeom prst="rect">
+            <a:avLst/>
+          </a:prstGeom>
+          <a:noFill/>
+          <a:ln/>
+        </p:spPr>
+        <p:txBody>
+          <a:bodyPr wrap="square" rtlCol="0" anchor="ctr"/>
+          <a:lstStyle/>
+          <a:p>
+            <a:pPr indent="0" marL="0">
+              <a:buNone/>
+            </a:pPr>
+            <a:r>
+              <a:rPr lang="en-US" sz="1800" b="1" dirty="0">
+                <a:solidFill>
+                  <a:srgbClr val="1B3A6B"/>
+                </a:solidFill>
+                <a:latin typeface="Arial" pitchFamily="34" charset="0"/>
+                <a:ea typeface="Arial" pitchFamily="34" charset="-122"/>
+                <a:cs typeface="Arial" pitchFamily="34" charset="-120"/>
+              </a:rPr>
+              <a:t>Um alerta operacional que deixa de ter causa:</a:t>
+            </a:r>
+            <a:endParaRPr lang="en-US" sz="1800" dirty="0"/>
+          </a:p>
+        </p:txBody>
+      </p:sp>
+      <p:sp>
+        <p:nvSpPr>
+          <p:cNvPr id="24" name="Shape 21"/>
+          <p:cNvSpPr/>
+          <p:nvPr/>
+        </p:nvSpPr>
+        <p:spPr>
+          <a:xfrm>
+            <a:off x="548640" y="4572000"/>
+            <a:ext cx="2601468" cy="1463040"/>
+          </a:xfrm>
+          <a:prstGeom prst="roundRect">
+            <a:avLst>
+              <a:gd name="adj" fmla="val 5000"/>
+            </a:avLst>
+          </a:prstGeom>
+          <a:solidFill>
+            <a:srgbClr val="FFFFFF"/>
+          </a:solidFill>
+          <a:ln w="9525">
+            <a:solidFill>
+              <a:srgbClr val="D8E0EC"/>
+            </a:solidFill>
+            <a:prstDash val="solid"/>
+          </a:ln>
+        </p:spPr>
+      </p:sp>
+      <p:sp>
+        <p:nvSpPr>
+          <p:cNvPr id="25" name="Text 22"/>
+          <p:cNvSpPr/>
+          <p:nvPr/>
+        </p:nvSpPr>
+        <p:spPr>
+          <a:xfrm>
+            <a:off x="685800" y="4663440"/>
+            <a:ext cx="365760" cy="365760"/>
+          </a:xfrm>
+          <a:prstGeom prst="rect">
+            <a:avLst/>
+          </a:prstGeom>
+          <a:noFill/>
+          <a:ln/>
+        </p:spPr>
+        <p:txBody>
+          <a:bodyPr wrap="square" rtlCol="0" anchor="ctr"/>
+          <a:lstStyle/>
+          <a:p>
+            <a:pPr indent="0" marL="0">
+              <a:buNone/>
+            </a:pPr>
+            <a:r>
+              <a:rPr lang="en-US" sz="1400" b="1" dirty="0">
+                <a:solidFill>
+                  <a:srgbClr val="F7A23B"/>
+                </a:solidFill>
+                <a:latin typeface="Arial" pitchFamily="34" charset="0"/>
+                <a:ea typeface="Arial" pitchFamily="34" charset="-122"/>
+                <a:cs typeface="Arial" pitchFamily="34" charset="-120"/>
+              </a:rPr>
+              <a:t>A</a:t>
+            </a:r>
+            <a:endParaRPr lang="en-US" sz="1400" dirty="0"/>
+          </a:p>
+        </p:txBody>
+      </p:sp>
+      <p:sp>
+        <p:nvSpPr>
+          <p:cNvPr id="26" name="Text 23"/>
+          <p:cNvSpPr/>
+          <p:nvPr/>
+        </p:nvSpPr>
+        <p:spPr>
+          <a:xfrm>
+            <a:off x="685800" y="5029200"/>
+            <a:ext cx="2327148" cy="914400"/>
+          </a:xfrm>
+          <a:prstGeom prst="rect">
+            <a:avLst/>
+          </a:prstGeom>
+          <a:noFill/>
+          <a:ln/>
+        </p:spPr>
+        <p:txBody>
+          <a:bodyPr wrap="square" rtlCol="0" anchor="t"/>
+          <a:lstStyle/>
+          <a:p>
+            <a:pPr indent="0" marL="0">
+              <a:buNone/>
+            </a:pPr>
+            <a:r>
+              <a:rPr lang="en-US" sz="1500" dirty="0">
+                <a:solidFill>
+                  <a:srgbClr val="1F2937"/>
+                </a:solidFill>
+                <a:latin typeface="Arial" pitchFamily="34" charset="0"/>
+                <a:ea typeface="Arial" pitchFamily="34" charset="-122"/>
+                <a:cs typeface="Arial" pitchFamily="34" charset="-120"/>
+              </a:rPr>
+              <a:t>se resolve sozinho na próxima varredura</a:t>
+            </a:r>
+            <a:endParaRPr lang="en-US" sz="1500" dirty="0"/>
+          </a:p>
+        </p:txBody>
+      </p:sp>
+      <p:sp>
+        <p:nvSpPr>
+          <p:cNvPr id="27" name="Shape 24"/>
+          <p:cNvSpPr/>
+          <p:nvPr/>
+        </p:nvSpPr>
+        <p:spPr>
+          <a:xfrm>
+            <a:off x="3378708" y="4572000"/>
+            <a:ext cx="2601468" cy="1463040"/>
+          </a:xfrm>
+          <a:prstGeom prst="roundRect">
+            <a:avLst>
+              <a:gd name="adj" fmla="val 5000"/>
+            </a:avLst>
+          </a:prstGeom>
+          <a:solidFill>
+            <a:srgbClr val="FFFFFF"/>
+          </a:solidFill>
+          <a:ln w="9525">
+            <a:solidFill>
+              <a:srgbClr val="D8E0EC"/>
+            </a:solidFill>
+            <a:prstDash val="solid"/>
+          </a:ln>
+        </p:spPr>
+      </p:sp>
+      <p:sp>
+        <p:nvSpPr>
+          <p:cNvPr id="28" name="Text 25"/>
+          <p:cNvSpPr/>
+          <p:nvPr/>
+        </p:nvSpPr>
+        <p:spPr>
+          <a:xfrm>
+            <a:off x="3515868" y="4663440"/>
+            <a:ext cx="365760" cy="365760"/>
+          </a:xfrm>
+          <a:prstGeom prst="rect">
+            <a:avLst/>
+          </a:prstGeom>
+          <a:noFill/>
+          <a:ln/>
+        </p:spPr>
+        <p:txBody>
+          <a:bodyPr wrap="square" rtlCol="0" anchor="ctr"/>
+          <a:lstStyle/>
+          <a:p>
+            <a:pPr indent="0" marL="0">
+              <a:buNone/>
+            </a:pPr>
+            <a:r>
+              <a:rPr lang="en-US" sz="1400" b="1" dirty="0">
+                <a:solidFill>
+                  <a:srgbClr val="F7A23B"/>
+                </a:solidFill>
+                <a:latin typeface="Arial" pitchFamily="34" charset="0"/>
+                <a:ea typeface="Arial" pitchFamily="34" charset="-122"/>
+                <a:cs typeface="Arial" pitchFamily="34" charset="-120"/>
+              </a:rPr>
+              <a:t>B</a:t>
+            </a:r>
+            <a:endParaRPr lang="en-US" sz="1400" dirty="0"/>
+          </a:p>
+        </p:txBody>
+      </p:sp>
+      <p:sp>
+        <p:nvSpPr>
+          <p:cNvPr id="29" name="Text 26"/>
+          <p:cNvSpPr/>
+          <p:nvPr/>
+        </p:nvSpPr>
+        <p:spPr>
+          <a:xfrm>
+            <a:off x="3515868" y="5029200"/>
+            <a:ext cx="2327148" cy="914400"/>
+          </a:xfrm>
+          <a:prstGeom prst="rect">
+            <a:avLst/>
+          </a:prstGeom>
+          <a:noFill/>
+          <a:ln/>
+        </p:spPr>
+        <p:txBody>
+          <a:bodyPr wrap="square" rtlCol="0" anchor="t"/>
+          <a:lstStyle/>
+          <a:p>
+            <a:pPr indent="0" marL="0">
+              <a:buNone/>
+            </a:pPr>
+            <a:r>
+              <a:rPr lang="en-US" sz="1500" dirty="0">
+                <a:solidFill>
+                  <a:srgbClr val="1F2937"/>
+                </a:solidFill>
+                <a:latin typeface="Arial" pitchFamily="34" charset="0"/>
+                <a:ea typeface="Arial" pitchFamily="34" charset="-122"/>
+                <a:cs typeface="Arial" pitchFamily="34" charset="-120"/>
+              </a:rPr>
+              <a:t>fica para sempre</a:t>
+            </a:r>
+            <a:endParaRPr lang="en-US" sz="1500" dirty="0"/>
+          </a:p>
+        </p:txBody>
+      </p:sp>
+      <p:sp>
+        <p:nvSpPr>
+          <p:cNvPr id="30" name="Shape 27"/>
+          <p:cNvSpPr/>
+          <p:nvPr/>
+        </p:nvSpPr>
+        <p:spPr>
+          <a:xfrm>
+            <a:off x="6208776" y="4572000"/>
+            <a:ext cx="2601468" cy="1463040"/>
+          </a:xfrm>
+          <a:prstGeom prst="roundRect">
+            <a:avLst>
+              <a:gd name="adj" fmla="val 5000"/>
+            </a:avLst>
+          </a:prstGeom>
+          <a:solidFill>
+            <a:srgbClr val="FFFFFF"/>
+          </a:solidFill>
+          <a:ln w="9525">
+            <a:solidFill>
+              <a:srgbClr val="D8E0EC"/>
+            </a:solidFill>
+            <a:prstDash val="solid"/>
+          </a:ln>
+        </p:spPr>
+      </p:sp>
+      <p:sp>
+        <p:nvSpPr>
+          <p:cNvPr id="31" name="Text 28"/>
+          <p:cNvSpPr/>
+          <p:nvPr/>
+        </p:nvSpPr>
+        <p:spPr>
+          <a:xfrm>
+            <a:off x="6345936" y="4663440"/>
+            <a:ext cx="365760" cy="365760"/>
+          </a:xfrm>
+          <a:prstGeom prst="rect">
+            <a:avLst/>
+          </a:prstGeom>
+          <a:noFill/>
+          <a:ln/>
+        </p:spPr>
+        <p:txBody>
+          <a:bodyPr wrap="square" rtlCol="0" anchor="ctr"/>
+          <a:lstStyle/>
+          <a:p>
+            <a:pPr indent="0" marL="0">
+              <a:buNone/>
+            </a:pPr>
+            <a:r>
+              <a:rPr lang="en-US" sz="1400" b="1" dirty="0">
+                <a:solidFill>
+                  <a:srgbClr val="F7A23B"/>
+                </a:solidFill>
+                <a:latin typeface="Arial" pitchFamily="34" charset="0"/>
+                <a:ea typeface="Arial" pitchFamily="34" charset="-122"/>
+                <a:cs typeface="Arial" pitchFamily="34" charset="-120"/>
+              </a:rPr>
+              <a:t>C</a:t>
+            </a:r>
+            <a:endParaRPr lang="en-US" sz="1400" dirty="0"/>
+          </a:p>
+        </p:txBody>
+      </p:sp>
+      <p:sp>
+        <p:nvSpPr>
+          <p:cNvPr id="32" name="Text 29"/>
+          <p:cNvSpPr/>
+          <p:nvPr/>
+        </p:nvSpPr>
+        <p:spPr>
+          <a:xfrm>
+            <a:off x="6345936" y="5029200"/>
+            <a:ext cx="2327148" cy="914400"/>
+          </a:xfrm>
+          <a:prstGeom prst="rect">
+            <a:avLst/>
+          </a:prstGeom>
+          <a:noFill/>
+          <a:ln/>
+        </p:spPr>
+        <p:txBody>
+          <a:bodyPr wrap="square" rtlCol="0" anchor="t"/>
+          <a:lstStyle/>
+          <a:p>
+            <a:pPr indent="0" marL="0">
+              <a:buNone/>
+            </a:pPr>
+            <a:r>
+              <a:rPr lang="en-US" sz="1500" dirty="0">
+                <a:solidFill>
+                  <a:srgbClr val="1F2937"/>
+                </a:solidFill>
+                <a:latin typeface="Arial" pitchFamily="34" charset="0"/>
+                <a:ea typeface="Arial" pitchFamily="34" charset="-122"/>
+                <a:cs typeface="Arial" pitchFamily="34" charset="-120"/>
+              </a:rPr>
+              <a:t>precisa ser apagado</a:t>
+            </a:r>
+            <a:endParaRPr lang="en-US" sz="1500" dirty="0"/>
+          </a:p>
+        </p:txBody>
+      </p:sp>
+      <p:sp>
+        <p:nvSpPr>
+          <p:cNvPr id="33" name="Shape 30"/>
+          <p:cNvSpPr/>
+          <p:nvPr/>
+        </p:nvSpPr>
+        <p:spPr>
+          <a:xfrm>
+            <a:off x="9038844" y="4572000"/>
+            <a:ext cx="2601468" cy="1463040"/>
+          </a:xfrm>
+          <a:prstGeom prst="roundRect">
+            <a:avLst>
+              <a:gd name="adj" fmla="val 5000"/>
+            </a:avLst>
+          </a:prstGeom>
+          <a:solidFill>
+            <a:srgbClr val="FFFFFF"/>
+          </a:solidFill>
+          <a:ln w="9525">
+            <a:solidFill>
+              <a:srgbClr val="D8E0EC"/>
+            </a:solidFill>
+            <a:prstDash val="solid"/>
+          </a:ln>
+        </p:spPr>
+      </p:sp>
+      <p:sp>
+        <p:nvSpPr>
+          <p:cNvPr id="34" name="Text 31"/>
+          <p:cNvSpPr/>
+          <p:nvPr/>
+        </p:nvSpPr>
+        <p:spPr>
+          <a:xfrm>
+            <a:off x="9176004" y="4663440"/>
+            <a:ext cx="365760" cy="365760"/>
+          </a:xfrm>
+          <a:prstGeom prst="rect">
+            <a:avLst/>
+          </a:prstGeom>
+          <a:noFill/>
+          <a:ln/>
+        </p:spPr>
+        <p:txBody>
+          <a:bodyPr wrap="square" rtlCol="0" anchor="ctr"/>
+          <a:lstStyle/>
+          <a:p>
+            <a:pPr indent="0" marL="0">
+              <a:buNone/>
+            </a:pPr>
+            <a:r>
+              <a:rPr lang="en-US" sz="1400" b="1" dirty="0">
+                <a:solidFill>
+                  <a:srgbClr val="F7A23B"/>
+                </a:solidFill>
+                <a:latin typeface="Arial" pitchFamily="34" charset="0"/>
+                <a:ea typeface="Arial" pitchFamily="34" charset="-122"/>
+                <a:cs typeface="Arial" pitchFamily="34" charset="-120"/>
+              </a:rPr>
+              <a:t>D</a:t>
+            </a:r>
+            <a:endParaRPr lang="en-US" sz="1400" dirty="0"/>
+          </a:p>
+        </p:txBody>
+      </p:sp>
+      <p:sp>
+        <p:nvSpPr>
+          <p:cNvPr id="35" name="Text 32"/>
+          <p:cNvSpPr/>
+          <p:nvPr/>
+        </p:nvSpPr>
+        <p:spPr>
+          <a:xfrm>
+            <a:off x="9176004" y="5029200"/>
+            <a:ext cx="2327148" cy="914400"/>
+          </a:xfrm>
+          <a:prstGeom prst="rect">
+            <a:avLst/>
+          </a:prstGeom>
+          <a:noFill/>
+          <a:ln/>
+        </p:spPr>
+        <p:txBody>
+          <a:bodyPr wrap="square" rtlCol="0" anchor="t"/>
+          <a:lstStyle/>
+          <a:p>
+            <a:pPr indent="0" marL="0">
+              <a:buNone/>
+            </a:pPr>
+            <a:r>
+              <a:rPr lang="en-US" sz="1500" dirty="0">
+                <a:solidFill>
+                  <a:srgbClr val="1F2937"/>
+                </a:solidFill>
+                <a:latin typeface="Arial" pitchFamily="34" charset="0"/>
+                <a:ea typeface="Arial" pitchFamily="34" charset="-122"/>
+                <a:cs typeface="Arial" pitchFamily="34" charset="-120"/>
+              </a:rPr>
+              <a:t>vira chamado</a:t>
+            </a:r>
+            <a:endParaRPr lang="en-US" sz="1500" dirty="0"/>
           </a:p>
         </p:txBody>
       </p:sp>
@@ -14694,6 +16451,3151 @@
             <a:fld id="{F7021451-1387-4CA6-816F-3879F97B5CBC}" type="slidenum">
               <a:rPr b="1" lang="en-US"/>
               <a:t>26</a:t>
+            </a:fld>
+            <a:endParaRPr lang="en-US"/>
+          </a:p>
+        </p:txBody>
+      </p:sp>
+    </p:spTree>
+  </p:cSld>
+  <p:clrMapOvr>
+    <a:masterClrMapping/>
+  </p:clrMapOvr>
+</p:sld>
+</file>
+
+<file path=ppt/slides/slide27.xml><?xml version="1.0" encoding="utf-8"?>
+<p:sld xmlns:a="http://schemas.openxmlformats.org/drawingml/2006/main" xmlns:r="http://schemas.openxmlformats.org/officeDocument/2006/relationships" xmlns:p="http://schemas.openxmlformats.org/presentationml/2006/main">
+  <p:cSld name="Slide 27">
+    <p:bg>
+      <p:bgPr>
+        <a:solidFill>
+          <a:srgbClr val="F6F8FB"/>
+        </a:solidFill>
+      </p:bgPr>
+    </p:bg>
+    <p:spTree>
+      <p:nvGrpSpPr>
+        <p:cNvPr id="1" name=""/>
+        <p:cNvGrpSpPr/>
+        <p:nvPr/>
+      </p:nvGrpSpPr>
+      <p:grpSpPr>
+        <a:xfrm>
+          <a:off x="0" y="0"/>
+          <a:ext cx="0" cy="0"/>
+          <a:chOff x="0" y="0"/>
+          <a:chExt cx="0" cy="0"/>
+        </a:xfrm>
+      </p:grpSpPr>
+      <p:sp>
+        <p:nvSpPr>
+          <p:cNvPr id="2" name="Shape 0"/>
+          <p:cNvSpPr/>
+          <p:nvPr/>
+        </p:nvSpPr>
+        <p:spPr>
+          <a:xfrm>
+            <a:off x="0" y="6510528"/>
+            <a:ext cx="12191695" cy="347472"/>
+          </a:xfrm>
+          <a:prstGeom prst="rect">
+            <a:avLst/>
+          </a:prstGeom>
+          <a:solidFill>
+            <a:srgbClr val="FFFFFF"/>
+          </a:solidFill>
+          <a:ln w="6350">
+            <a:solidFill>
+              <a:srgbClr val="D8E0EC"/>
+            </a:solidFill>
+            <a:prstDash val="solid"/>
+          </a:ln>
+        </p:spPr>
+      </p:sp>
+      <p:pic>
+        <p:nvPicPr>
+          <p:cNvPr id="3" name="Image 0" descr="/www/wwwroot/rexar/gdsolar/docs/curso/slides/assets/logo-gdsolar.png">    </p:cNvPr>
+          <p:cNvPicPr>
+            <a:picLocks noChangeAspect="1"/>
+          </p:cNvPicPr>
+          <p:nvPr/>
+        </p:nvPicPr>
+        <p:blipFill>
+          <a:blip r:embed="rId1"/>
+          <a:stretch>
+            <a:fillRect/>
+          </a:stretch>
+        </p:blipFill>
+        <p:spPr>
+          <a:xfrm>
+            <a:off x="548640" y="6547104"/>
+            <a:ext cx="274320" cy="274320"/>
+          </a:xfrm>
+          <a:prstGeom prst="rect">
+            <a:avLst/>
+          </a:prstGeom>
+        </p:spPr>
+      </p:pic>
+      <p:sp>
+        <p:nvSpPr>
+          <p:cNvPr id="4" name="Text 1"/>
+          <p:cNvSpPr/>
+          <p:nvPr/>
+        </p:nvSpPr>
+        <p:spPr>
+          <a:xfrm>
+            <a:off x="886968" y="6528816"/>
+            <a:ext cx="6400800" cy="310896"/>
+          </a:xfrm>
+          <a:prstGeom prst="rect">
+            <a:avLst/>
+          </a:prstGeom>
+          <a:noFill/>
+          <a:ln/>
+        </p:spPr>
+        <p:txBody>
+          <a:bodyPr wrap="square" rtlCol="0" anchor="ctr"/>
+          <a:lstStyle/>
+          <a:p>
+            <a:pPr indent="0" marL="0">
+              <a:buNone/>
+            </a:pPr>
+            <a:r>
+              <a:rPr lang="en-US" sz="900" b="1" dirty="0">
+                <a:solidFill>
+                  <a:srgbClr val="64748B"/>
+                </a:solidFill>
+                <a:latin typeface="Arial" pitchFamily="34" charset="0"/>
+                <a:ea typeface="Arial" pitchFamily="34" charset="-122"/>
+                <a:cs typeface="Arial" pitchFamily="34" charset="-120"/>
+              </a:rPr>
+              <a:t>GD Solar  ·  Formação em Energia por Assinatura</a:t>
+            </a:r>
+            <a:endParaRPr lang="en-US" sz="900" dirty="0"/>
+          </a:p>
+        </p:txBody>
+      </p:sp>
+      <p:sp>
+        <p:nvSpPr>
+          <p:cNvPr id="5" name="Text 2"/>
+          <p:cNvSpPr/>
+          <p:nvPr/>
+        </p:nvSpPr>
+        <p:spPr>
+          <a:xfrm>
+            <a:off x="7132320" y="6528816"/>
+            <a:ext cx="4023360" cy="310896"/>
+          </a:xfrm>
+          <a:prstGeom prst="rect">
+            <a:avLst/>
+          </a:prstGeom>
+          <a:noFill/>
+          <a:ln/>
+        </p:spPr>
+        <p:txBody>
+          <a:bodyPr wrap="square" rtlCol="0" anchor="ctr"/>
+          <a:lstStyle/>
+          <a:p>
+            <a:pPr algn="r" indent="0" marL="0">
+              <a:buNone/>
+            </a:pPr>
+            <a:r>
+              <a:rPr lang="en-US" sz="900" dirty="0">
+                <a:solidFill>
+                  <a:srgbClr val="64748B"/>
+                </a:solidFill>
+                <a:latin typeface="Arial" pitchFamily="34" charset="0"/>
+                <a:ea typeface="Arial" pitchFamily="34" charset="-122"/>
+                <a:cs typeface="Arial" pitchFamily="34" charset="-120"/>
+              </a:rPr>
+              <a:t>M9 · Teste rápido</a:t>
+            </a:r>
+            <a:endParaRPr lang="en-US" sz="900" dirty="0"/>
+          </a:p>
+        </p:txBody>
+      </p:sp>
+      <p:sp>
+        <p:nvSpPr>
+          <p:cNvPr id="6" name="Shape 3"/>
+          <p:cNvSpPr/>
+          <p:nvPr/>
+        </p:nvSpPr>
+        <p:spPr>
+          <a:xfrm>
+            <a:off x="548640" y="384048"/>
+            <a:ext cx="82296" cy="658368"/>
+          </a:xfrm>
+          <a:prstGeom prst="rect">
+            <a:avLst/>
+          </a:prstGeom>
+          <a:solidFill>
+            <a:srgbClr val="F7A23B"/>
+          </a:solidFill>
+          <a:ln/>
+        </p:spPr>
+      </p:sp>
+      <p:sp>
+        <p:nvSpPr>
+          <p:cNvPr id="7" name="Text 4"/>
+          <p:cNvSpPr/>
+          <p:nvPr/>
+        </p:nvSpPr>
+        <p:spPr>
+          <a:xfrm>
+            <a:off x="777240" y="292608"/>
+            <a:ext cx="10972800" cy="274320"/>
+          </a:xfrm>
+          <a:prstGeom prst="rect">
+            <a:avLst/>
+          </a:prstGeom>
+          <a:noFill/>
+          <a:ln/>
+        </p:spPr>
+        <p:txBody>
+          <a:bodyPr wrap="square" rtlCol="0" anchor="ctr"/>
+          <a:lstStyle/>
+          <a:p>
+            <a:pPr indent="0" marL="0">
+              <a:buNone/>
+            </a:pPr>
+            <a:r>
+              <a:rPr lang="en-US" sz="1000" b="1" spc="100" kern="0" dirty="0">
+                <a:solidFill>
+                  <a:srgbClr val="F7A23B"/>
+                </a:solidFill>
+                <a:latin typeface="Arial" pitchFamily="34" charset="0"/>
+                <a:ea typeface="Arial" pitchFamily="34" charset="-122"/>
+                <a:cs typeface="Arial" pitchFamily="34" charset="-120"/>
+              </a:rPr>
+              <a:t>QUESTÕES 3–4 DE 5</a:t>
+            </a:r>
+            <a:endParaRPr lang="en-US" sz="1000" dirty="0"/>
+          </a:p>
+        </p:txBody>
+      </p:sp>
+      <p:sp>
+        <p:nvSpPr>
+          <p:cNvPr id="8" name="Text 5"/>
+          <p:cNvSpPr/>
+          <p:nvPr/>
+        </p:nvSpPr>
+        <p:spPr>
+          <a:xfrm>
+            <a:off x="777240" y="530352"/>
+            <a:ext cx="10881360" cy="566928"/>
+          </a:xfrm>
+          <a:prstGeom prst="rect">
+            <a:avLst/>
+          </a:prstGeom>
+          <a:noFill/>
+          <a:ln/>
+        </p:spPr>
+        <p:txBody>
+          <a:bodyPr wrap="square" rtlCol="0" anchor="ctr">
+            <a:normAutofit/>
+          </a:bodyPr>
+          <a:lstStyle/>
+          <a:p>
+            <a:pPr indent="0" marL="0">
+              <a:buNone/>
+            </a:pPr>
+            <a:r>
+              <a:rPr lang="en-US" sz="2600" b="1" dirty="0">
+                <a:solidFill>
+                  <a:srgbClr val="1B3A6B"/>
+                </a:solidFill>
+                <a:latin typeface="Arial" pitchFamily="34" charset="0"/>
+                <a:ea typeface="Arial" pitchFamily="34" charset="-122"/>
+                <a:cs typeface="Arial" pitchFamily="34" charset="-120"/>
+              </a:rPr>
+              <a:t>Teste rápido</a:t>
+            </a:r>
+            <a:endParaRPr lang="en-US" sz="2600" dirty="0"/>
+          </a:p>
+        </p:txBody>
+      </p:sp>
+      <p:sp>
+        <p:nvSpPr>
+          <p:cNvPr id="9" name="Shape 6"/>
+          <p:cNvSpPr/>
+          <p:nvPr/>
+        </p:nvSpPr>
+        <p:spPr>
+          <a:xfrm>
+            <a:off x="548640" y="1325880"/>
+            <a:ext cx="502920" cy="502920"/>
+          </a:xfrm>
+          <a:prstGeom prst="ellipse">
+            <a:avLst/>
+          </a:prstGeom>
+          <a:solidFill>
+            <a:srgbClr val="1B3A6B"/>
+          </a:solidFill>
+          <a:ln/>
+        </p:spPr>
+      </p:sp>
+      <p:sp>
+        <p:nvSpPr>
+          <p:cNvPr id="10" name="Text 7"/>
+          <p:cNvSpPr/>
+          <p:nvPr/>
+        </p:nvSpPr>
+        <p:spPr>
+          <a:xfrm>
+            <a:off x="548640" y="1325880"/>
+            <a:ext cx="502920" cy="502920"/>
+          </a:xfrm>
+          <a:prstGeom prst="rect">
+            <a:avLst/>
+          </a:prstGeom>
+          <a:noFill/>
+          <a:ln/>
+        </p:spPr>
+        <p:txBody>
+          <a:bodyPr wrap="square" rtlCol="0" anchor="ctr"/>
+          <a:lstStyle/>
+          <a:p>
+            <a:pPr algn="ctr" indent="0" marL="0">
+              <a:buNone/>
+            </a:pPr>
+            <a:r>
+              <a:rPr lang="en-US" sz="1600" b="1" dirty="0">
+                <a:solidFill>
+                  <a:srgbClr val="FFFFFF"/>
+                </a:solidFill>
+                <a:latin typeface="Arial" pitchFamily="34" charset="0"/>
+                <a:ea typeface="Arial" pitchFamily="34" charset="-122"/>
+                <a:cs typeface="Arial" pitchFamily="34" charset="-120"/>
+              </a:rPr>
+              <a:t>3</a:t>
+            </a:r>
+            <a:endParaRPr lang="en-US" sz="1600" dirty="0"/>
+          </a:p>
+        </p:txBody>
+      </p:sp>
+      <p:sp>
+        <p:nvSpPr>
+          <p:cNvPr id="11" name="Text 8"/>
+          <p:cNvSpPr/>
+          <p:nvPr/>
+        </p:nvSpPr>
+        <p:spPr>
+          <a:xfrm>
+            <a:off x="1234440" y="1280160"/>
+            <a:ext cx="10424160" cy="640080"/>
+          </a:xfrm>
+          <a:prstGeom prst="rect">
+            <a:avLst/>
+          </a:prstGeom>
+          <a:noFill/>
+          <a:ln/>
+        </p:spPr>
+        <p:txBody>
+          <a:bodyPr wrap="square" rtlCol="0" anchor="ctr"/>
+          <a:lstStyle/>
+          <a:p>
+            <a:pPr indent="0" marL="0">
+              <a:buNone/>
+            </a:pPr>
+            <a:r>
+              <a:rPr lang="en-US" sz="1800" b="1" dirty="0">
+                <a:solidFill>
+                  <a:srgbClr val="1B3A6B"/>
+                </a:solidFill>
+                <a:latin typeface="Arial" pitchFamily="34" charset="0"/>
+                <a:ea typeface="Arial" pitchFamily="34" charset="-122"/>
+                <a:cs typeface="Arial" pitchFamily="34" charset="-120"/>
+              </a:rPr>
+              <a:t>O consultor vê quais alertas?</a:t>
+            </a:r>
+            <a:endParaRPr lang="en-US" sz="1800" dirty="0"/>
+          </a:p>
+        </p:txBody>
+      </p:sp>
+      <p:sp>
+        <p:nvSpPr>
+          <p:cNvPr id="12" name="Shape 9"/>
+          <p:cNvSpPr/>
+          <p:nvPr/>
+        </p:nvSpPr>
+        <p:spPr>
+          <a:xfrm>
+            <a:off x="548640" y="2057400"/>
+            <a:ext cx="2601468" cy="1463040"/>
+          </a:xfrm>
+          <a:prstGeom prst="roundRect">
+            <a:avLst>
+              <a:gd name="adj" fmla="val 5000"/>
+            </a:avLst>
+          </a:prstGeom>
+          <a:solidFill>
+            <a:srgbClr val="FFFFFF"/>
+          </a:solidFill>
+          <a:ln w="9525">
+            <a:solidFill>
+              <a:srgbClr val="D8E0EC"/>
+            </a:solidFill>
+            <a:prstDash val="solid"/>
+          </a:ln>
+        </p:spPr>
+      </p:sp>
+      <p:sp>
+        <p:nvSpPr>
+          <p:cNvPr id="13" name="Text 10"/>
+          <p:cNvSpPr/>
+          <p:nvPr/>
+        </p:nvSpPr>
+        <p:spPr>
+          <a:xfrm>
+            <a:off x="685800" y="2148840"/>
+            <a:ext cx="365760" cy="365760"/>
+          </a:xfrm>
+          <a:prstGeom prst="rect">
+            <a:avLst/>
+          </a:prstGeom>
+          <a:noFill/>
+          <a:ln/>
+        </p:spPr>
+        <p:txBody>
+          <a:bodyPr wrap="square" rtlCol="0" anchor="ctr"/>
+          <a:lstStyle/>
+          <a:p>
+            <a:pPr indent="0" marL="0">
+              <a:buNone/>
+            </a:pPr>
+            <a:r>
+              <a:rPr lang="en-US" sz="1400" b="1" dirty="0">
+                <a:solidFill>
+                  <a:srgbClr val="F7A23B"/>
+                </a:solidFill>
+                <a:latin typeface="Arial" pitchFamily="34" charset="0"/>
+                <a:ea typeface="Arial" pitchFamily="34" charset="-122"/>
+                <a:cs typeface="Arial" pitchFamily="34" charset="-120"/>
+              </a:rPr>
+              <a:t>A</a:t>
+            </a:r>
+            <a:endParaRPr lang="en-US" sz="1400" dirty="0"/>
+          </a:p>
+        </p:txBody>
+      </p:sp>
+      <p:sp>
+        <p:nvSpPr>
+          <p:cNvPr id="14" name="Text 11"/>
+          <p:cNvSpPr/>
+          <p:nvPr/>
+        </p:nvSpPr>
+        <p:spPr>
+          <a:xfrm>
+            <a:off x="685800" y="2514600"/>
+            <a:ext cx="2327148" cy="914400"/>
+          </a:xfrm>
+          <a:prstGeom prst="rect">
+            <a:avLst/>
+          </a:prstGeom>
+          <a:noFill/>
+          <a:ln/>
+        </p:spPr>
+        <p:txBody>
+          <a:bodyPr wrap="square" rtlCol="0" anchor="t"/>
+          <a:lstStyle/>
+          <a:p>
+            <a:pPr indent="0" marL="0">
+              <a:buNone/>
+            </a:pPr>
+            <a:r>
+              <a:rPr lang="en-US" sz="1500" dirty="0">
+                <a:solidFill>
+                  <a:srgbClr val="1F2937"/>
+                </a:solidFill>
+                <a:latin typeface="Arial" pitchFamily="34" charset="0"/>
+                <a:ea typeface="Arial" pitchFamily="34" charset="-122"/>
+                <a:cs typeface="Arial" pitchFamily="34" charset="-120"/>
+              </a:rPr>
+              <a:t>Todos</a:t>
+            </a:r>
+            <a:endParaRPr lang="en-US" sz="1500" dirty="0"/>
+          </a:p>
+        </p:txBody>
+      </p:sp>
+      <p:sp>
+        <p:nvSpPr>
+          <p:cNvPr id="15" name="Shape 12"/>
+          <p:cNvSpPr/>
+          <p:nvPr/>
+        </p:nvSpPr>
+        <p:spPr>
+          <a:xfrm>
+            <a:off x="3378708" y="2057400"/>
+            <a:ext cx="2601468" cy="1463040"/>
+          </a:xfrm>
+          <a:prstGeom prst="roundRect">
+            <a:avLst>
+              <a:gd name="adj" fmla="val 5000"/>
+            </a:avLst>
+          </a:prstGeom>
+          <a:solidFill>
+            <a:srgbClr val="FFFFFF"/>
+          </a:solidFill>
+          <a:ln w="9525">
+            <a:solidFill>
+              <a:srgbClr val="D8E0EC"/>
+            </a:solidFill>
+            <a:prstDash val="solid"/>
+          </a:ln>
+        </p:spPr>
+      </p:sp>
+      <p:sp>
+        <p:nvSpPr>
+          <p:cNvPr id="16" name="Text 13"/>
+          <p:cNvSpPr/>
+          <p:nvPr/>
+        </p:nvSpPr>
+        <p:spPr>
+          <a:xfrm>
+            <a:off x="3515868" y="2148840"/>
+            <a:ext cx="365760" cy="365760"/>
+          </a:xfrm>
+          <a:prstGeom prst="rect">
+            <a:avLst/>
+          </a:prstGeom>
+          <a:noFill/>
+          <a:ln/>
+        </p:spPr>
+        <p:txBody>
+          <a:bodyPr wrap="square" rtlCol="0" anchor="ctr"/>
+          <a:lstStyle/>
+          <a:p>
+            <a:pPr indent="0" marL="0">
+              <a:buNone/>
+            </a:pPr>
+            <a:r>
+              <a:rPr lang="en-US" sz="1400" b="1" dirty="0">
+                <a:solidFill>
+                  <a:srgbClr val="F7A23B"/>
+                </a:solidFill>
+                <a:latin typeface="Arial" pitchFamily="34" charset="0"/>
+                <a:ea typeface="Arial" pitchFamily="34" charset="-122"/>
+                <a:cs typeface="Arial" pitchFamily="34" charset="-120"/>
+              </a:rPr>
+              <a:t>B</a:t>
+            </a:r>
+            <a:endParaRPr lang="en-US" sz="1400" dirty="0"/>
+          </a:p>
+        </p:txBody>
+      </p:sp>
+      <p:sp>
+        <p:nvSpPr>
+          <p:cNvPr id="17" name="Text 14"/>
+          <p:cNvSpPr/>
+          <p:nvPr/>
+        </p:nvSpPr>
+        <p:spPr>
+          <a:xfrm>
+            <a:off x="3515868" y="2514600"/>
+            <a:ext cx="2327148" cy="914400"/>
+          </a:xfrm>
+          <a:prstGeom prst="rect">
+            <a:avLst/>
+          </a:prstGeom>
+          <a:noFill/>
+          <a:ln/>
+        </p:spPr>
+        <p:txBody>
+          <a:bodyPr wrap="square" rtlCol="0" anchor="t"/>
+          <a:lstStyle/>
+          <a:p>
+            <a:pPr indent="0" marL="0">
+              <a:buNone/>
+            </a:pPr>
+            <a:r>
+              <a:rPr lang="en-US" sz="1500" dirty="0">
+                <a:solidFill>
+                  <a:srgbClr val="1F2937"/>
+                </a:solidFill>
+                <a:latin typeface="Arial" pitchFamily="34" charset="0"/>
+                <a:ea typeface="Arial" pitchFamily="34" charset="-122"/>
+                <a:cs typeface="Arial" pitchFamily="34" charset="-120"/>
+              </a:rPr>
+              <a:t>Só os financeiros da própria carteira</a:t>
+            </a:r>
+            <a:endParaRPr lang="en-US" sz="1500" dirty="0"/>
+          </a:p>
+        </p:txBody>
+      </p:sp>
+      <p:sp>
+        <p:nvSpPr>
+          <p:cNvPr id="18" name="Shape 15"/>
+          <p:cNvSpPr/>
+          <p:nvPr/>
+        </p:nvSpPr>
+        <p:spPr>
+          <a:xfrm>
+            <a:off x="6208776" y="2057400"/>
+            <a:ext cx="2601468" cy="1463040"/>
+          </a:xfrm>
+          <a:prstGeom prst="roundRect">
+            <a:avLst>
+              <a:gd name="adj" fmla="val 5000"/>
+            </a:avLst>
+          </a:prstGeom>
+          <a:solidFill>
+            <a:srgbClr val="FFFFFF"/>
+          </a:solidFill>
+          <a:ln w="9525">
+            <a:solidFill>
+              <a:srgbClr val="D8E0EC"/>
+            </a:solidFill>
+            <a:prstDash val="solid"/>
+          </a:ln>
+        </p:spPr>
+      </p:sp>
+      <p:sp>
+        <p:nvSpPr>
+          <p:cNvPr id="19" name="Text 16"/>
+          <p:cNvSpPr/>
+          <p:nvPr/>
+        </p:nvSpPr>
+        <p:spPr>
+          <a:xfrm>
+            <a:off x="6345936" y="2148840"/>
+            <a:ext cx="365760" cy="365760"/>
+          </a:xfrm>
+          <a:prstGeom prst="rect">
+            <a:avLst/>
+          </a:prstGeom>
+          <a:noFill/>
+          <a:ln/>
+        </p:spPr>
+        <p:txBody>
+          <a:bodyPr wrap="square" rtlCol="0" anchor="ctr"/>
+          <a:lstStyle/>
+          <a:p>
+            <a:pPr indent="0" marL="0">
+              <a:buNone/>
+            </a:pPr>
+            <a:r>
+              <a:rPr lang="en-US" sz="1400" b="1" dirty="0">
+                <a:solidFill>
+                  <a:srgbClr val="F7A23B"/>
+                </a:solidFill>
+                <a:latin typeface="Arial" pitchFamily="34" charset="0"/>
+                <a:ea typeface="Arial" pitchFamily="34" charset="-122"/>
+                <a:cs typeface="Arial" pitchFamily="34" charset="-120"/>
+              </a:rPr>
+              <a:t>C</a:t>
+            </a:r>
+            <a:endParaRPr lang="en-US" sz="1400" dirty="0"/>
+          </a:p>
+        </p:txBody>
+      </p:sp>
+      <p:sp>
+        <p:nvSpPr>
+          <p:cNvPr id="20" name="Text 17"/>
+          <p:cNvSpPr/>
+          <p:nvPr/>
+        </p:nvSpPr>
+        <p:spPr>
+          <a:xfrm>
+            <a:off x="6345936" y="2514600"/>
+            <a:ext cx="2327148" cy="914400"/>
+          </a:xfrm>
+          <a:prstGeom prst="rect">
+            <a:avLst/>
+          </a:prstGeom>
+          <a:noFill/>
+          <a:ln/>
+        </p:spPr>
+        <p:txBody>
+          <a:bodyPr wrap="square" rtlCol="0" anchor="t"/>
+          <a:lstStyle/>
+          <a:p>
+            <a:pPr indent="0" marL="0">
+              <a:buNone/>
+            </a:pPr>
+            <a:r>
+              <a:rPr lang="en-US" sz="1500" dirty="0">
+                <a:solidFill>
+                  <a:srgbClr val="1F2937"/>
+                </a:solidFill>
+                <a:latin typeface="Arial" pitchFamily="34" charset="0"/>
+                <a:ea typeface="Arial" pitchFamily="34" charset="-122"/>
+                <a:cs typeface="Arial" pitchFamily="34" charset="-120"/>
+              </a:rPr>
+              <a:t>Só os de sistema</a:t>
+            </a:r>
+            <a:endParaRPr lang="en-US" sz="1500" dirty="0"/>
+          </a:p>
+        </p:txBody>
+      </p:sp>
+      <p:sp>
+        <p:nvSpPr>
+          <p:cNvPr id="21" name="Shape 18"/>
+          <p:cNvSpPr/>
+          <p:nvPr/>
+        </p:nvSpPr>
+        <p:spPr>
+          <a:xfrm>
+            <a:off x="9038844" y="2057400"/>
+            <a:ext cx="2601468" cy="1463040"/>
+          </a:xfrm>
+          <a:prstGeom prst="roundRect">
+            <a:avLst>
+              <a:gd name="adj" fmla="val 5000"/>
+            </a:avLst>
+          </a:prstGeom>
+          <a:solidFill>
+            <a:srgbClr val="FFFFFF"/>
+          </a:solidFill>
+          <a:ln w="9525">
+            <a:solidFill>
+              <a:srgbClr val="D8E0EC"/>
+            </a:solidFill>
+            <a:prstDash val="solid"/>
+          </a:ln>
+        </p:spPr>
+      </p:sp>
+      <p:sp>
+        <p:nvSpPr>
+          <p:cNvPr id="22" name="Text 19"/>
+          <p:cNvSpPr/>
+          <p:nvPr/>
+        </p:nvSpPr>
+        <p:spPr>
+          <a:xfrm>
+            <a:off x="9176004" y="2148840"/>
+            <a:ext cx="365760" cy="365760"/>
+          </a:xfrm>
+          <a:prstGeom prst="rect">
+            <a:avLst/>
+          </a:prstGeom>
+          <a:noFill/>
+          <a:ln/>
+        </p:spPr>
+        <p:txBody>
+          <a:bodyPr wrap="square" rtlCol="0" anchor="ctr"/>
+          <a:lstStyle/>
+          <a:p>
+            <a:pPr indent="0" marL="0">
+              <a:buNone/>
+            </a:pPr>
+            <a:r>
+              <a:rPr lang="en-US" sz="1400" b="1" dirty="0">
+                <a:solidFill>
+                  <a:srgbClr val="F7A23B"/>
+                </a:solidFill>
+                <a:latin typeface="Arial" pitchFamily="34" charset="0"/>
+                <a:ea typeface="Arial" pitchFamily="34" charset="-122"/>
+                <a:cs typeface="Arial" pitchFamily="34" charset="-120"/>
+              </a:rPr>
+              <a:t>D</a:t>
+            </a:r>
+            <a:endParaRPr lang="en-US" sz="1400" dirty="0"/>
+          </a:p>
+        </p:txBody>
+      </p:sp>
+      <p:sp>
+        <p:nvSpPr>
+          <p:cNvPr id="23" name="Text 20"/>
+          <p:cNvSpPr/>
+          <p:nvPr/>
+        </p:nvSpPr>
+        <p:spPr>
+          <a:xfrm>
+            <a:off x="9176004" y="2514600"/>
+            <a:ext cx="2327148" cy="914400"/>
+          </a:xfrm>
+          <a:prstGeom prst="rect">
+            <a:avLst/>
+          </a:prstGeom>
+          <a:noFill/>
+          <a:ln/>
+        </p:spPr>
+        <p:txBody>
+          <a:bodyPr wrap="square" rtlCol="0" anchor="t"/>
+          <a:lstStyle/>
+          <a:p>
+            <a:pPr indent="0" marL="0">
+              <a:buNone/>
+            </a:pPr>
+            <a:r>
+              <a:rPr lang="en-US" sz="1500" dirty="0">
+                <a:solidFill>
+                  <a:srgbClr val="1F2937"/>
+                </a:solidFill>
+                <a:latin typeface="Arial" pitchFamily="34" charset="0"/>
+                <a:ea typeface="Arial" pitchFamily="34" charset="-122"/>
+                <a:cs typeface="Arial" pitchFamily="34" charset="-120"/>
+              </a:rPr>
+              <a:t>Nenhum</a:t>
+            </a:r>
+            <a:endParaRPr lang="en-US" sz="1500" dirty="0"/>
+          </a:p>
+        </p:txBody>
+      </p:sp>
+      <p:sp>
+        <p:nvSpPr>
+          <p:cNvPr id="24" name="Shape 21"/>
+          <p:cNvSpPr/>
+          <p:nvPr/>
+        </p:nvSpPr>
+        <p:spPr>
+          <a:xfrm>
+            <a:off x="548640" y="3840480"/>
+            <a:ext cx="502920" cy="502920"/>
+          </a:xfrm>
+          <a:prstGeom prst="ellipse">
+            <a:avLst/>
+          </a:prstGeom>
+          <a:solidFill>
+            <a:srgbClr val="1B3A6B"/>
+          </a:solidFill>
+          <a:ln/>
+        </p:spPr>
+      </p:sp>
+      <p:sp>
+        <p:nvSpPr>
+          <p:cNvPr id="25" name="Text 22"/>
+          <p:cNvSpPr/>
+          <p:nvPr/>
+        </p:nvSpPr>
+        <p:spPr>
+          <a:xfrm>
+            <a:off x="548640" y="3840480"/>
+            <a:ext cx="502920" cy="502920"/>
+          </a:xfrm>
+          <a:prstGeom prst="rect">
+            <a:avLst/>
+          </a:prstGeom>
+          <a:noFill/>
+          <a:ln/>
+        </p:spPr>
+        <p:txBody>
+          <a:bodyPr wrap="square" rtlCol="0" anchor="ctr"/>
+          <a:lstStyle/>
+          <a:p>
+            <a:pPr algn="ctr" indent="0" marL="0">
+              <a:buNone/>
+            </a:pPr>
+            <a:r>
+              <a:rPr lang="en-US" sz="1600" b="1" dirty="0">
+                <a:solidFill>
+                  <a:srgbClr val="FFFFFF"/>
+                </a:solidFill>
+                <a:latin typeface="Arial" pitchFamily="34" charset="0"/>
+                <a:ea typeface="Arial" pitchFamily="34" charset="-122"/>
+                <a:cs typeface="Arial" pitchFamily="34" charset="-120"/>
+              </a:rPr>
+              <a:t>4</a:t>
+            </a:r>
+            <a:endParaRPr lang="en-US" sz="1600" dirty="0"/>
+          </a:p>
+        </p:txBody>
+      </p:sp>
+      <p:sp>
+        <p:nvSpPr>
+          <p:cNvPr id="26" name="Text 23"/>
+          <p:cNvSpPr/>
+          <p:nvPr/>
+        </p:nvSpPr>
+        <p:spPr>
+          <a:xfrm>
+            <a:off x="1234440" y="3794760"/>
+            <a:ext cx="10424160" cy="640080"/>
+          </a:xfrm>
+          <a:prstGeom prst="rect">
+            <a:avLst/>
+          </a:prstGeom>
+          <a:noFill/>
+          <a:ln/>
+        </p:spPr>
+        <p:txBody>
+          <a:bodyPr wrap="square" rtlCol="0" anchor="ctr"/>
+          <a:lstStyle/>
+          <a:p>
+            <a:pPr indent="0" marL="0">
+              <a:buNone/>
+            </a:pPr>
+            <a:r>
+              <a:rPr lang="en-US" sz="1800" b="1" dirty="0">
+                <a:solidFill>
+                  <a:srgbClr val="1B3A6B"/>
+                </a:solidFill>
+                <a:latin typeface="Arial" pitchFamily="34" charset="0"/>
+                <a:ea typeface="Arial" pitchFamily="34" charset="-122"/>
+                <a:cs typeface="Arial" pitchFamily="34" charset="-120"/>
+              </a:rPr>
+              <a:t>Usina sem registro de geração no mês gera:</a:t>
+            </a:r>
+            <a:endParaRPr lang="en-US" sz="1800" dirty="0"/>
+          </a:p>
+        </p:txBody>
+      </p:sp>
+      <p:sp>
+        <p:nvSpPr>
+          <p:cNvPr id="27" name="Shape 24"/>
+          <p:cNvSpPr/>
+          <p:nvPr/>
+        </p:nvSpPr>
+        <p:spPr>
+          <a:xfrm>
+            <a:off x="548640" y="4572000"/>
+            <a:ext cx="2601468" cy="1463040"/>
+          </a:xfrm>
+          <a:prstGeom prst="roundRect">
+            <a:avLst>
+              <a:gd name="adj" fmla="val 5000"/>
+            </a:avLst>
+          </a:prstGeom>
+          <a:solidFill>
+            <a:srgbClr val="FFFFFF"/>
+          </a:solidFill>
+          <a:ln w="9525">
+            <a:solidFill>
+              <a:srgbClr val="D8E0EC"/>
+            </a:solidFill>
+            <a:prstDash val="solid"/>
+          </a:ln>
+        </p:spPr>
+      </p:sp>
+      <p:sp>
+        <p:nvSpPr>
+          <p:cNvPr id="28" name="Text 25"/>
+          <p:cNvSpPr/>
+          <p:nvPr/>
+        </p:nvSpPr>
+        <p:spPr>
+          <a:xfrm>
+            <a:off x="685800" y="4663440"/>
+            <a:ext cx="365760" cy="365760"/>
+          </a:xfrm>
+          <a:prstGeom prst="rect">
+            <a:avLst/>
+          </a:prstGeom>
+          <a:noFill/>
+          <a:ln/>
+        </p:spPr>
+        <p:txBody>
+          <a:bodyPr wrap="square" rtlCol="0" anchor="ctr"/>
+          <a:lstStyle/>
+          <a:p>
+            <a:pPr indent="0" marL="0">
+              <a:buNone/>
+            </a:pPr>
+            <a:r>
+              <a:rPr lang="en-US" sz="1400" b="1" dirty="0">
+                <a:solidFill>
+                  <a:srgbClr val="F7A23B"/>
+                </a:solidFill>
+                <a:latin typeface="Arial" pitchFamily="34" charset="0"/>
+                <a:ea typeface="Arial" pitchFamily="34" charset="-122"/>
+                <a:cs typeface="Arial" pitchFamily="34" charset="-120"/>
+              </a:rPr>
+              <a:t>A</a:t>
+            </a:r>
+            <a:endParaRPr lang="en-US" sz="1400" dirty="0"/>
+          </a:p>
+        </p:txBody>
+      </p:sp>
+      <p:sp>
+        <p:nvSpPr>
+          <p:cNvPr id="29" name="Text 26"/>
+          <p:cNvSpPr/>
+          <p:nvPr/>
+        </p:nvSpPr>
+        <p:spPr>
+          <a:xfrm>
+            <a:off x="685800" y="5029200"/>
+            <a:ext cx="2327148" cy="914400"/>
+          </a:xfrm>
+          <a:prstGeom prst="rect">
+            <a:avLst/>
+          </a:prstGeom>
+          <a:noFill/>
+          <a:ln/>
+        </p:spPr>
+        <p:txBody>
+          <a:bodyPr wrap="square" rtlCol="0" anchor="t"/>
+          <a:lstStyle/>
+          <a:p>
+            <a:pPr indent="0" marL="0">
+              <a:buNone/>
+            </a:pPr>
+            <a:r>
+              <a:rPr lang="en-US" sz="1500" dirty="0">
+                <a:solidFill>
+                  <a:srgbClr val="1F2937"/>
+                </a:solidFill>
+                <a:latin typeface="Arial" pitchFamily="34" charset="0"/>
+                <a:ea typeface="Arial" pitchFamily="34" charset="-122"/>
+                <a:cs typeface="Arial" pitchFamily="34" charset="-120"/>
+              </a:rPr>
+              <a:t>um alerta de usina</a:t>
+            </a:r>
+            <a:endParaRPr lang="en-US" sz="1500" dirty="0"/>
+          </a:p>
+        </p:txBody>
+      </p:sp>
+      <p:sp>
+        <p:nvSpPr>
+          <p:cNvPr id="30" name="Shape 27"/>
+          <p:cNvSpPr/>
+          <p:nvPr/>
+        </p:nvSpPr>
+        <p:spPr>
+          <a:xfrm>
+            <a:off x="3378708" y="4572000"/>
+            <a:ext cx="2601468" cy="1463040"/>
+          </a:xfrm>
+          <a:prstGeom prst="roundRect">
+            <a:avLst>
+              <a:gd name="adj" fmla="val 5000"/>
+            </a:avLst>
+          </a:prstGeom>
+          <a:solidFill>
+            <a:srgbClr val="FFFFFF"/>
+          </a:solidFill>
+          <a:ln w="9525">
+            <a:solidFill>
+              <a:srgbClr val="D8E0EC"/>
+            </a:solidFill>
+            <a:prstDash val="solid"/>
+          </a:ln>
+        </p:spPr>
+      </p:sp>
+      <p:sp>
+        <p:nvSpPr>
+          <p:cNvPr id="31" name="Text 28"/>
+          <p:cNvSpPr/>
+          <p:nvPr/>
+        </p:nvSpPr>
+        <p:spPr>
+          <a:xfrm>
+            <a:off x="3515868" y="4663440"/>
+            <a:ext cx="365760" cy="365760"/>
+          </a:xfrm>
+          <a:prstGeom prst="rect">
+            <a:avLst/>
+          </a:prstGeom>
+          <a:noFill/>
+          <a:ln/>
+        </p:spPr>
+        <p:txBody>
+          <a:bodyPr wrap="square" rtlCol="0" anchor="ctr"/>
+          <a:lstStyle/>
+          <a:p>
+            <a:pPr indent="0" marL="0">
+              <a:buNone/>
+            </a:pPr>
+            <a:r>
+              <a:rPr lang="en-US" sz="1400" b="1" dirty="0">
+                <a:solidFill>
+                  <a:srgbClr val="F7A23B"/>
+                </a:solidFill>
+                <a:latin typeface="Arial" pitchFamily="34" charset="0"/>
+                <a:ea typeface="Arial" pitchFamily="34" charset="-122"/>
+                <a:cs typeface="Arial" pitchFamily="34" charset="-120"/>
+              </a:rPr>
+              <a:t>B</a:t>
+            </a:r>
+            <a:endParaRPr lang="en-US" sz="1400" dirty="0"/>
+          </a:p>
+        </p:txBody>
+      </p:sp>
+      <p:sp>
+        <p:nvSpPr>
+          <p:cNvPr id="32" name="Text 29"/>
+          <p:cNvSpPr/>
+          <p:nvPr/>
+        </p:nvSpPr>
+        <p:spPr>
+          <a:xfrm>
+            <a:off x="3515868" y="5029200"/>
+            <a:ext cx="2327148" cy="914400"/>
+          </a:xfrm>
+          <a:prstGeom prst="rect">
+            <a:avLst/>
+          </a:prstGeom>
+          <a:noFill/>
+          <a:ln/>
+        </p:spPr>
+        <p:txBody>
+          <a:bodyPr wrap="square" rtlCol="0" anchor="t"/>
+          <a:lstStyle/>
+          <a:p>
+            <a:pPr indent="0" marL="0">
+              <a:buNone/>
+            </a:pPr>
+            <a:r>
+              <a:rPr lang="en-US" sz="1500" dirty="0">
+                <a:solidFill>
+                  <a:srgbClr val="1F2937"/>
+                </a:solidFill>
+                <a:latin typeface="Arial" pitchFamily="34" charset="0"/>
+                <a:ea typeface="Arial" pitchFamily="34" charset="-122"/>
+                <a:cs typeface="Arial" pitchFamily="34" charset="-120"/>
+              </a:rPr>
+              <a:t>cobrança</a:t>
+            </a:r>
+            <a:endParaRPr lang="en-US" sz="1500" dirty="0"/>
+          </a:p>
+        </p:txBody>
+      </p:sp>
+      <p:sp>
+        <p:nvSpPr>
+          <p:cNvPr id="33" name="Shape 30"/>
+          <p:cNvSpPr/>
+          <p:nvPr/>
+        </p:nvSpPr>
+        <p:spPr>
+          <a:xfrm>
+            <a:off x="6208776" y="4572000"/>
+            <a:ext cx="2601468" cy="1463040"/>
+          </a:xfrm>
+          <a:prstGeom prst="roundRect">
+            <a:avLst>
+              <a:gd name="adj" fmla="val 5000"/>
+            </a:avLst>
+          </a:prstGeom>
+          <a:solidFill>
+            <a:srgbClr val="FFFFFF"/>
+          </a:solidFill>
+          <a:ln w="9525">
+            <a:solidFill>
+              <a:srgbClr val="D8E0EC"/>
+            </a:solidFill>
+            <a:prstDash val="solid"/>
+          </a:ln>
+        </p:spPr>
+      </p:sp>
+      <p:sp>
+        <p:nvSpPr>
+          <p:cNvPr id="34" name="Text 31"/>
+          <p:cNvSpPr/>
+          <p:nvPr/>
+        </p:nvSpPr>
+        <p:spPr>
+          <a:xfrm>
+            <a:off x="6345936" y="4663440"/>
+            <a:ext cx="365760" cy="365760"/>
+          </a:xfrm>
+          <a:prstGeom prst="rect">
+            <a:avLst/>
+          </a:prstGeom>
+          <a:noFill/>
+          <a:ln/>
+        </p:spPr>
+        <p:txBody>
+          <a:bodyPr wrap="square" rtlCol="0" anchor="ctr"/>
+          <a:lstStyle/>
+          <a:p>
+            <a:pPr indent="0" marL="0">
+              <a:buNone/>
+            </a:pPr>
+            <a:r>
+              <a:rPr lang="en-US" sz="1400" b="1" dirty="0">
+                <a:solidFill>
+                  <a:srgbClr val="F7A23B"/>
+                </a:solidFill>
+                <a:latin typeface="Arial" pitchFamily="34" charset="0"/>
+                <a:ea typeface="Arial" pitchFamily="34" charset="-122"/>
+                <a:cs typeface="Arial" pitchFamily="34" charset="-120"/>
+              </a:rPr>
+              <a:t>C</a:t>
+            </a:r>
+            <a:endParaRPr lang="en-US" sz="1400" dirty="0"/>
+          </a:p>
+        </p:txBody>
+      </p:sp>
+      <p:sp>
+        <p:nvSpPr>
+          <p:cNvPr id="35" name="Text 32"/>
+          <p:cNvSpPr/>
+          <p:nvPr/>
+        </p:nvSpPr>
+        <p:spPr>
+          <a:xfrm>
+            <a:off x="6345936" y="5029200"/>
+            <a:ext cx="2327148" cy="914400"/>
+          </a:xfrm>
+          <a:prstGeom prst="rect">
+            <a:avLst/>
+          </a:prstGeom>
+          <a:noFill/>
+          <a:ln/>
+        </p:spPr>
+        <p:txBody>
+          <a:bodyPr wrap="square" rtlCol="0" anchor="t"/>
+          <a:lstStyle/>
+          <a:p>
+            <a:pPr indent="0" marL="0">
+              <a:buNone/>
+            </a:pPr>
+            <a:r>
+              <a:rPr lang="en-US" sz="1500" dirty="0">
+                <a:solidFill>
+                  <a:srgbClr val="1F2937"/>
+                </a:solidFill>
+                <a:latin typeface="Arial" pitchFamily="34" charset="0"/>
+                <a:ea typeface="Arial" pitchFamily="34" charset="-122"/>
+                <a:cs typeface="Arial" pitchFamily="34" charset="-120"/>
+              </a:rPr>
+              <a:t>nada</a:t>
+            </a:r>
+            <a:endParaRPr lang="en-US" sz="1500" dirty="0"/>
+          </a:p>
+        </p:txBody>
+      </p:sp>
+      <p:sp>
+        <p:nvSpPr>
+          <p:cNvPr id="36" name="Shape 33"/>
+          <p:cNvSpPr/>
+          <p:nvPr/>
+        </p:nvSpPr>
+        <p:spPr>
+          <a:xfrm>
+            <a:off x="9038844" y="4572000"/>
+            <a:ext cx="2601468" cy="1463040"/>
+          </a:xfrm>
+          <a:prstGeom prst="roundRect">
+            <a:avLst>
+              <a:gd name="adj" fmla="val 5000"/>
+            </a:avLst>
+          </a:prstGeom>
+          <a:solidFill>
+            <a:srgbClr val="FFFFFF"/>
+          </a:solidFill>
+          <a:ln w="9525">
+            <a:solidFill>
+              <a:srgbClr val="D8E0EC"/>
+            </a:solidFill>
+            <a:prstDash val="solid"/>
+          </a:ln>
+        </p:spPr>
+      </p:sp>
+      <p:sp>
+        <p:nvSpPr>
+          <p:cNvPr id="37" name="Text 34"/>
+          <p:cNvSpPr/>
+          <p:nvPr/>
+        </p:nvSpPr>
+        <p:spPr>
+          <a:xfrm>
+            <a:off x="9176004" y="4663440"/>
+            <a:ext cx="365760" cy="365760"/>
+          </a:xfrm>
+          <a:prstGeom prst="rect">
+            <a:avLst/>
+          </a:prstGeom>
+          <a:noFill/>
+          <a:ln/>
+        </p:spPr>
+        <p:txBody>
+          <a:bodyPr wrap="square" rtlCol="0" anchor="ctr"/>
+          <a:lstStyle/>
+          <a:p>
+            <a:pPr indent="0" marL="0">
+              <a:buNone/>
+            </a:pPr>
+            <a:r>
+              <a:rPr lang="en-US" sz="1400" b="1" dirty="0">
+                <a:solidFill>
+                  <a:srgbClr val="F7A23B"/>
+                </a:solidFill>
+                <a:latin typeface="Arial" pitchFamily="34" charset="0"/>
+                <a:ea typeface="Arial" pitchFamily="34" charset="-122"/>
+                <a:cs typeface="Arial" pitchFamily="34" charset="-120"/>
+              </a:rPr>
+              <a:t>D</a:t>
+            </a:r>
+            <a:endParaRPr lang="en-US" sz="1400" dirty="0"/>
+          </a:p>
+        </p:txBody>
+      </p:sp>
+      <p:sp>
+        <p:nvSpPr>
+          <p:cNvPr id="38" name="Text 35"/>
+          <p:cNvSpPr/>
+          <p:nvPr/>
+        </p:nvSpPr>
+        <p:spPr>
+          <a:xfrm>
+            <a:off x="9176004" y="5029200"/>
+            <a:ext cx="2327148" cy="914400"/>
+          </a:xfrm>
+          <a:prstGeom prst="rect">
+            <a:avLst/>
+          </a:prstGeom>
+          <a:noFill/>
+          <a:ln/>
+        </p:spPr>
+        <p:txBody>
+          <a:bodyPr wrap="square" rtlCol="0" anchor="t"/>
+          <a:lstStyle/>
+          <a:p>
+            <a:pPr indent="0" marL="0">
+              <a:buNone/>
+            </a:pPr>
+            <a:r>
+              <a:rPr lang="en-US" sz="1500" dirty="0">
+                <a:solidFill>
+                  <a:srgbClr val="1F2937"/>
+                </a:solidFill>
+                <a:latin typeface="Arial" pitchFamily="34" charset="0"/>
+                <a:ea typeface="Arial" pitchFamily="34" charset="-122"/>
+                <a:cs typeface="Arial" pitchFamily="34" charset="-120"/>
+              </a:rPr>
+              <a:t>cancelamento</a:t>
+            </a:r>
+            <a:endParaRPr lang="en-US" sz="1500" dirty="0"/>
+          </a:p>
+        </p:txBody>
+      </p:sp>
+      <p:sp>
+        <p:nvSpPr>
+          <p:cNvPr id="25" name="Slide Number Placeholder 0"/>
+          <p:cNvSpPr>
+            <a:spLocks noGrp="1"/>
+          </p:cNvSpPr>
+          <p:nvPr>
+            <p:ph type="sldNum" sz="quarter" idx="4294967295"/>
+          </p:nvPr>
+        </p:nvSpPr>
+        <p:spPr>
+          <a:xfrm>
+            <a:off x="11292840" y="6556248"/>
+            <a:ext cx="548640" cy="256032"/>
+          </a:xfrm>
+          <a:prstGeom prst="rect">
+            <a:avLst/>
+          </a:prstGeom>
+          <a:extLst>
+            <a:ext uri="{C572A759-6A51-4108-AA02-DFA0A04FC94B}">
+              <ma14:wrappingTextBoxFlag xmlns:ma14="http://schemas.microsoft.com/office/mac/drawingml/2011/main" val="0"/>
+            </a:ext>
+          </a:extLst>
+        </p:spPr>
+        <p:txBody>
+          <a:bodyPr/>
+          <a:lstStyle>
+            <a:lvl1pPr>
+              <a:defRPr sz="900">
+                <a:solidFill>
+                  <a:srgbClr val="1B3A6B"/>
+                </a:solidFill>
+                <a:latin typeface="Arial"/>
+                <a:ea typeface="Arial"/>
+                <a:cs typeface="Arial"/>
+              </a:defRPr>
+            </a:lvl1pPr>
+          </a:lstStyle>
+          <a:p>
+            <a:pPr algn="r"/>
+            <a:fld id="{F7021451-1387-4CA6-816F-3879F97B5CBC}" type="slidenum">
+              <a:rPr b="1" lang="en-US"/>
+              <a:t>27</a:t>
+            </a:fld>
+            <a:endParaRPr lang="en-US"/>
+          </a:p>
+        </p:txBody>
+      </p:sp>
+    </p:spTree>
+  </p:cSld>
+  <p:clrMapOvr>
+    <a:masterClrMapping/>
+  </p:clrMapOvr>
+</p:sld>
+</file>
+
+<file path=ppt/slides/slide28.xml><?xml version="1.0" encoding="utf-8"?>
+<p:sld xmlns:a="http://schemas.openxmlformats.org/drawingml/2006/main" xmlns:r="http://schemas.openxmlformats.org/officeDocument/2006/relationships" xmlns:p="http://schemas.openxmlformats.org/presentationml/2006/main">
+  <p:cSld name="Slide 28">
+    <p:bg>
+      <p:bgPr>
+        <a:solidFill>
+          <a:srgbClr val="F6F8FB"/>
+        </a:solidFill>
+      </p:bgPr>
+    </p:bg>
+    <p:spTree>
+      <p:nvGrpSpPr>
+        <p:cNvPr id="1" name=""/>
+        <p:cNvGrpSpPr/>
+        <p:nvPr/>
+      </p:nvGrpSpPr>
+      <p:grpSpPr>
+        <a:xfrm>
+          <a:off x="0" y="0"/>
+          <a:ext cx="0" cy="0"/>
+          <a:chOff x="0" y="0"/>
+          <a:chExt cx="0" cy="0"/>
+        </a:xfrm>
+      </p:grpSpPr>
+      <p:sp>
+        <p:nvSpPr>
+          <p:cNvPr id="2" name="Shape 0"/>
+          <p:cNvSpPr/>
+          <p:nvPr/>
+        </p:nvSpPr>
+        <p:spPr>
+          <a:xfrm>
+            <a:off x="0" y="6510528"/>
+            <a:ext cx="12191695" cy="347472"/>
+          </a:xfrm>
+          <a:prstGeom prst="rect">
+            <a:avLst/>
+          </a:prstGeom>
+          <a:solidFill>
+            <a:srgbClr val="FFFFFF"/>
+          </a:solidFill>
+          <a:ln w="6350">
+            <a:solidFill>
+              <a:srgbClr val="D8E0EC"/>
+            </a:solidFill>
+            <a:prstDash val="solid"/>
+          </a:ln>
+        </p:spPr>
+      </p:sp>
+      <p:pic>
+        <p:nvPicPr>
+          <p:cNvPr id="3" name="Image 0" descr="/www/wwwroot/rexar/gdsolar/docs/curso/slides/assets/logo-gdsolar.png">    </p:cNvPr>
+          <p:cNvPicPr>
+            <a:picLocks noChangeAspect="1"/>
+          </p:cNvPicPr>
+          <p:nvPr/>
+        </p:nvPicPr>
+        <p:blipFill>
+          <a:blip r:embed="rId1"/>
+          <a:stretch>
+            <a:fillRect/>
+          </a:stretch>
+        </p:blipFill>
+        <p:spPr>
+          <a:xfrm>
+            <a:off x="548640" y="6547104"/>
+            <a:ext cx="274320" cy="274320"/>
+          </a:xfrm>
+          <a:prstGeom prst="rect">
+            <a:avLst/>
+          </a:prstGeom>
+        </p:spPr>
+      </p:pic>
+      <p:sp>
+        <p:nvSpPr>
+          <p:cNvPr id="4" name="Text 1"/>
+          <p:cNvSpPr/>
+          <p:nvPr/>
+        </p:nvSpPr>
+        <p:spPr>
+          <a:xfrm>
+            <a:off x="886968" y="6528816"/>
+            <a:ext cx="6400800" cy="310896"/>
+          </a:xfrm>
+          <a:prstGeom prst="rect">
+            <a:avLst/>
+          </a:prstGeom>
+          <a:noFill/>
+          <a:ln/>
+        </p:spPr>
+        <p:txBody>
+          <a:bodyPr wrap="square" rtlCol="0" anchor="ctr"/>
+          <a:lstStyle/>
+          <a:p>
+            <a:pPr indent="0" marL="0">
+              <a:buNone/>
+            </a:pPr>
+            <a:r>
+              <a:rPr lang="en-US" sz="900" b="1" dirty="0">
+                <a:solidFill>
+                  <a:srgbClr val="64748B"/>
+                </a:solidFill>
+                <a:latin typeface="Arial" pitchFamily="34" charset="0"/>
+                <a:ea typeface="Arial" pitchFamily="34" charset="-122"/>
+                <a:cs typeface="Arial" pitchFamily="34" charset="-120"/>
+              </a:rPr>
+              <a:t>GD Solar  ·  Formação em Energia por Assinatura</a:t>
+            </a:r>
+            <a:endParaRPr lang="en-US" sz="900" dirty="0"/>
+          </a:p>
+        </p:txBody>
+      </p:sp>
+      <p:sp>
+        <p:nvSpPr>
+          <p:cNvPr id="5" name="Text 2"/>
+          <p:cNvSpPr/>
+          <p:nvPr/>
+        </p:nvSpPr>
+        <p:spPr>
+          <a:xfrm>
+            <a:off x="7132320" y="6528816"/>
+            <a:ext cx="4023360" cy="310896"/>
+          </a:xfrm>
+          <a:prstGeom prst="rect">
+            <a:avLst/>
+          </a:prstGeom>
+          <a:noFill/>
+          <a:ln/>
+        </p:spPr>
+        <p:txBody>
+          <a:bodyPr wrap="square" rtlCol="0" anchor="ctr"/>
+          <a:lstStyle/>
+          <a:p>
+            <a:pPr algn="r" indent="0" marL="0">
+              <a:buNone/>
+            </a:pPr>
+            <a:r>
+              <a:rPr lang="en-US" sz="900" dirty="0">
+                <a:solidFill>
+                  <a:srgbClr val="64748B"/>
+                </a:solidFill>
+                <a:latin typeface="Arial" pitchFamily="34" charset="0"/>
+                <a:ea typeface="Arial" pitchFamily="34" charset="-122"/>
+                <a:cs typeface="Arial" pitchFamily="34" charset="-120"/>
+              </a:rPr>
+              <a:t>M9 · Teste rápido</a:t>
+            </a:r>
+            <a:endParaRPr lang="en-US" sz="900" dirty="0"/>
+          </a:p>
+        </p:txBody>
+      </p:sp>
+      <p:sp>
+        <p:nvSpPr>
+          <p:cNvPr id="6" name="Shape 3"/>
+          <p:cNvSpPr/>
+          <p:nvPr/>
+        </p:nvSpPr>
+        <p:spPr>
+          <a:xfrm>
+            <a:off x="548640" y="384048"/>
+            <a:ext cx="82296" cy="658368"/>
+          </a:xfrm>
+          <a:prstGeom prst="rect">
+            <a:avLst/>
+          </a:prstGeom>
+          <a:solidFill>
+            <a:srgbClr val="F7A23B"/>
+          </a:solidFill>
+          <a:ln/>
+        </p:spPr>
+      </p:sp>
+      <p:sp>
+        <p:nvSpPr>
+          <p:cNvPr id="7" name="Text 4"/>
+          <p:cNvSpPr/>
+          <p:nvPr/>
+        </p:nvSpPr>
+        <p:spPr>
+          <a:xfrm>
+            <a:off x="777240" y="292608"/>
+            <a:ext cx="10972800" cy="274320"/>
+          </a:xfrm>
+          <a:prstGeom prst="rect">
+            <a:avLst/>
+          </a:prstGeom>
+          <a:noFill/>
+          <a:ln/>
+        </p:spPr>
+        <p:txBody>
+          <a:bodyPr wrap="square" rtlCol="0" anchor="ctr"/>
+          <a:lstStyle/>
+          <a:p>
+            <a:pPr indent="0" marL="0">
+              <a:buNone/>
+            </a:pPr>
+            <a:r>
+              <a:rPr lang="en-US" sz="1000" b="1" spc="100" kern="0" dirty="0">
+                <a:solidFill>
+                  <a:srgbClr val="F7A23B"/>
+                </a:solidFill>
+                <a:latin typeface="Arial" pitchFamily="34" charset="0"/>
+                <a:ea typeface="Arial" pitchFamily="34" charset="-122"/>
+                <a:cs typeface="Arial" pitchFamily="34" charset="-120"/>
+              </a:rPr>
+              <a:t>QUESTÕES 5–5 DE 5</a:t>
+            </a:r>
+            <a:endParaRPr lang="en-US" sz="1000" dirty="0"/>
+          </a:p>
+        </p:txBody>
+      </p:sp>
+      <p:sp>
+        <p:nvSpPr>
+          <p:cNvPr id="8" name="Text 5"/>
+          <p:cNvSpPr/>
+          <p:nvPr/>
+        </p:nvSpPr>
+        <p:spPr>
+          <a:xfrm>
+            <a:off x="777240" y="530352"/>
+            <a:ext cx="10881360" cy="566928"/>
+          </a:xfrm>
+          <a:prstGeom prst="rect">
+            <a:avLst/>
+          </a:prstGeom>
+          <a:noFill/>
+          <a:ln/>
+        </p:spPr>
+        <p:txBody>
+          <a:bodyPr wrap="square" rtlCol="0" anchor="ctr">
+            <a:normAutofit/>
+          </a:bodyPr>
+          <a:lstStyle/>
+          <a:p>
+            <a:pPr indent="0" marL="0">
+              <a:buNone/>
+            </a:pPr>
+            <a:r>
+              <a:rPr lang="en-US" sz="2600" b="1" dirty="0">
+                <a:solidFill>
+                  <a:srgbClr val="1B3A6B"/>
+                </a:solidFill>
+                <a:latin typeface="Arial" pitchFamily="34" charset="0"/>
+                <a:ea typeface="Arial" pitchFamily="34" charset="-122"/>
+                <a:cs typeface="Arial" pitchFamily="34" charset="-120"/>
+              </a:rPr>
+              <a:t>Teste rápido</a:t>
+            </a:r>
+            <a:endParaRPr lang="en-US" sz="2600" dirty="0"/>
+          </a:p>
+        </p:txBody>
+      </p:sp>
+      <p:sp>
+        <p:nvSpPr>
+          <p:cNvPr id="9" name="Shape 6"/>
+          <p:cNvSpPr/>
+          <p:nvPr/>
+        </p:nvSpPr>
+        <p:spPr>
+          <a:xfrm>
+            <a:off x="548640" y="1325880"/>
+            <a:ext cx="502920" cy="502920"/>
+          </a:xfrm>
+          <a:prstGeom prst="ellipse">
+            <a:avLst/>
+          </a:prstGeom>
+          <a:solidFill>
+            <a:srgbClr val="1B3A6B"/>
+          </a:solidFill>
+          <a:ln/>
+        </p:spPr>
+      </p:sp>
+      <p:sp>
+        <p:nvSpPr>
+          <p:cNvPr id="10" name="Text 7"/>
+          <p:cNvSpPr/>
+          <p:nvPr/>
+        </p:nvSpPr>
+        <p:spPr>
+          <a:xfrm>
+            <a:off x="548640" y="1325880"/>
+            <a:ext cx="502920" cy="502920"/>
+          </a:xfrm>
+          <a:prstGeom prst="rect">
+            <a:avLst/>
+          </a:prstGeom>
+          <a:noFill/>
+          <a:ln/>
+        </p:spPr>
+        <p:txBody>
+          <a:bodyPr wrap="square" rtlCol="0" anchor="ctr"/>
+          <a:lstStyle/>
+          <a:p>
+            <a:pPr algn="ctr" indent="0" marL="0">
+              <a:buNone/>
+            </a:pPr>
+            <a:r>
+              <a:rPr lang="en-US" sz="1600" b="1" dirty="0">
+                <a:solidFill>
+                  <a:srgbClr val="FFFFFF"/>
+                </a:solidFill>
+                <a:latin typeface="Arial" pitchFamily="34" charset="0"/>
+                <a:ea typeface="Arial" pitchFamily="34" charset="-122"/>
+                <a:cs typeface="Arial" pitchFamily="34" charset="-120"/>
+              </a:rPr>
+              <a:t>5</a:t>
+            </a:r>
+            <a:endParaRPr lang="en-US" sz="1600" dirty="0"/>
+          </a:p>
+        </p:txBody>
+      </p:sp>
+      <p:sp>
+        <p:nvSpPr>
+          <p:cNvPr id="11" name="Text 8"/>
+          <p:cNvSpPr/>
+          <p:nvPr/>
+        </p:nvSpPr>
+        <p:spPr>
+          <a:xfrm>
+            <a:off x="1234440" y="1280160"/>
+            <a:ext cx="10424160" cy="640080"/>
+          </a:xfrm>
+          <a:prstGeom prst="rect">
+            <a:avLst/>
+          </a:prstGeom>
+          <a:noFill/>
+          <a:ln/>
+        </p:spPr>
+        <p:txBody>
+          <a:bodyPr wrap="square" rtlCol="0" anchor="ctr"/>
+          <a:lstStyle/>
+          <a:p>
+            <a:pPr indent="0" marL="0">
+              <a:buNone/>
+            </a:pPr>
+            <a:r>
+              <a:rPr lang="en-US" sz="1800" b="1" dirty="0">
+                <a:solidFill>
+                  <a:srgbClr val="1B3A6B"/>
+                </a:solidFill>
+                <a:latin typeface="Arial" pitchFamily="34" charset="0"/>
+                <a:ea typeface="Arial" pitchFamily="34" charset="-122"/>
+                <a:cs typeface="Arial" pitchFamily="34" charset="-120"/>
+              </a:rPr>
+              <a:t>Um bom indicador de que o portal está funcionando:</a:t>
+            </a:r>
+            <a:endParaRPr lang="en-US" sz="1800" dirty="0"/>
+          </a:p>
+        </p:txBody>
+      </p:sp>
+      <p:sp>
+        <p:nvSpPr>
+          <p:cNvPr id="12" name="Shape 9"/>
+          <p:cNvSpPr/>
+          <p:nvPr/>
+        </p:nvSpPr>
+        <p:spPr>
+          <a:xfrm>
+            <a:off x="548640" y="2057400"/>
+            <a:ext cx="2601468" cy="1463040"/>
+          </a:xfrm>
+          <a:prstGeom prst="roundRect">
+            <a:avLst>
+              <a:gd name="adj" fmla="val 5000"/>
+            </a:avLst>
+          </a:prstGeom>
+          <a:solidFill>
+            <a:srgbClr val="FFFFFF"/>
+          </a:solidFill>
+          <a:ln w="9525">
+            <a:solidFill>
+              <a:srgbClr val="D8E0EC"/>
+            </a:solidFill>
+            <a:prstDash val="solid"/>
+          </a:ln>
+        </p:spPr>
+      </p:sp>
+      <p:sp>
+        <p:nvSpPr>
+          <p:cNvPr id="13" name="Text 10"/>
+          <p:cNvSpPr/>
+          <p:nvPr/>
+        </p:nvSpPr>
+        <p:spPr>
+          <a:xfrm>
+            <a:off x="685800" y="2148840"/>
+            <a:ext cx="365760" cy="365760"/>
+          </a:xfrm>
+          <a:prstGeom prst="rect">
+            <a:avLst/>
+          </a:prstGeom>
+          <a:noFill/>
+          <a:ln/>
+        </p:spPr>
+        <p:txBody>
+          <a:bodyPr wrap="square" rtlCol="0" anchor="ctr"/>
+          <a:lstStyle/>
+          <a:p>
+            <a:pPr indent="0" marL="0">
+              <a:buNone/>
+            </a:pPr>
+            <a:r>
+              <a:rPr lang="en-US" sz="1400" b="1" dirty="0">
+                <a:solidFill>
+                  <a:srgbClr val="F7A23B"/>
+                </a:solidFill>
+                <a:latin typeface="Arial" pitchFamily="34" charset="0"/>
+                <a:ea typeface="Arial" pitchFamily="34" charset="-122"/>
+                <a:cs typeface="Arial" pitchFamily="34" charset="-120"/>
+              </a:rPr>
+              <a:t>A</a:t>
+            </a:r>
+            <a:endParaRPr lang="en-US" sz="1400" dirty="0"/>
+          </a:p>
+        </p:txBody>
+      </p:sp>
+      <p:sp>
+        <p:nvSpPr>
+          <p:cNvPr id="14" name="Text 11"/>
+          <p:cNvSpPr/>
+          <p:nvPr/>
+        </p:nvSpPr>
+        <p:spPr>
+          <a:xfrm>
+            <a:off x="685800" y="2514600"/>
+            <a:ext cx="2327148" cy="914400"/>
+          </a:xfrm>
+          <a:prstGeom prst="rect">
+            <a:avLst/>
+          </a:prstGeom>
+          <a:noFill/>
+          <a:ln/>
+        </p:spPr>
+        <p:txBody>
+          <a:bodyPr wrap="square" rtlCol="0" anchor="t"/>
+          <a:lstStyle/>
+          <a:p>
+            <a:pPr indent="0" marL="0">
+              <a:buNone/>
+            </a:pPr>
+            <a:r>
+              <a:rPr lang="en-US" sz="1500" dirty="0">
+                <a:solidFill>
+                  <a:srgbClr val="1F2937"/>
+                </a:solidFill>
+                <a:latin typeface="Arial" pitchFamily="34" charset="0"/>
+                <a:ea typeface="Arial" pitchFamily="34" charset="-122"/>
+                <a:cs typeface="Arial" pitchFamily="34" charset="-120"/>
+              </a:rPr>
+              <a:t>mais ligações</a:t>
+            </a:r>
+            <a:endParaRPr lang="en-US" sz="1500" dirty="0"/>
+          </a:p>
+        </p:txBody>
+      </p:sp>
+      <p:sp>
+        <p:nvSpPr>
+          <p:cNvPr id="15" name="Shape 12"/>
+          <p:cNvSpPr/>
+          <p:nvPr/>
+        </p:nvSpPr>
+        <p:spPr>
+          <a:xfrm>
+            <a:off x="3378708" y="2057400"/>
+            <a:ext cx="2601468" cy="1463040"/>
+          </a:xfrm>
+          <a:prstGeom prst="roundRect">
+            <a:avLst>
+              <a:gd name="adj" fmla="val 5000"/>
+            </a:avLst>
+          </a:prstGeom>
+          <a:solidFill>
+            <a:srgbClr val="FFFFFF"/>
+          </a:solidFill>
+          <a:ln w="9525">
+            <a:solidFill>
+              <a:srgbClr val="D8E0EC"/>
+            </a:solidFill>
+            <a:prstDash val="solid"/>
+          </a:ln>
+        </p:spPr>
+      </p:sp>
+      <p:sp>
+        <p:nvSpPr>
+          <p:cNvPr id="16" name="Text 13"/>
+          <p:cNvSpPr/>
+          <p:nvPr/>
+        </p:nvSpPr>
+        <p:spPr>
+          <a:xfrm>
+            <a:off x="3515868" y="2148840"/>
+            <a:ext cx="365760" cy="365760"/>
+          </a:xfrm>
+          <a:prstGeom prst="rect">
+            <a:avLst/>
+          </a:prstGeom>
+          <a:noFill/>
+          <a:ln/>
+        </p:spPr>
+        <p:txBody>
+          <a:bodyPr wrap="square" rtlCol="0" anchor="ctr"/>
+          <a:lstStyle/>
+          <a:p>
+            <a:pPr indent="0" marL="0">
+              <a:buNone/>
+            </a:pPr>
+            <a:r>
+              <a:rPr lang="en-US" sz="1400" b="1" dirty="0">
+                <a:solidFill>
+                  <a:srgbClr val="F7A23B"/>
+                </a:solidFill>
+                <a:latin typeface="Arial" pitchFamily="34" charset="0"/>
+                <a:ea typeface="Arial" pitchFamily="34" charset="-122"/>
+                <a:cs typeface="Arial" pitchFamily="34" charset="-120"/>
+              </a:rPr>
+              <a:t>B</a:t>
+            </a:r>
+            <a:endParaRPr lang="en-US" sz="1400" dirty="0"/>
+          </a:p>
+        </p:txBody>
+      </p:sp>
+      <p:sp>
+        <p:nvSpPr>
+          <p:cNvPr id="17" name="Text 14"/>
+          <p:cNvSpPr/>
+          <p:nvPr/>
+        </p:nvSpPr>
+        <p:spPr>
+          <a:xfrm>
+            <a:off x="3515868" y="2514600"/>
+            <a:ext cx="2327148" cy="914400"/>
+          </a:xfrm>
+          <a:prstGeom prst="rect">
+            <a:avLst/>
+          </a:prstGeom>
+          <a:noFill/>
+          <a:ln/>
+        </p:spPr>
+        <p:txBody>
+          <a:bodyPr wrap="square" rtlCol="0" anchor="t"/>
+          <a:lstStyle/>
+          <a:p>
+            <a:pPr indent="0" marL="0">
+              <a:buNone/>
+            </a:pPr>
+            <a:r>
+              <a:rPr lang="en-US" sz="1500" dirty="0">
+                <a:solidFill>
+                  <a:srgbClr val="1F2937"/>
+                </a:solidFill>
+                <a:latin typeface="Arial" pitchFamily="34" charset="0"/>
+                <a:ea typeface="Arial" pitchFamily="34" charset="-122"/>
+                <a:cs typeface="Arial" pitchFamily="34" charset="-120"/>
+              </a:rPr>
+              <a:t>menos chamados sobre "quanto devo/como pago"</a:t>
+            </a:r>
+            <a:endParaRPr lang="en-US" sz="1500" dirty="0"/>
+          </a:p>
+        </p:txBody>
+      </p:sp>
+      <p:sp>
+        <p:nvSpPr>
+          <p:cNvPr id="18" name="Shape 15"/>
+          <p:cNvSpPr/>
+          <p:nvPr/>
+        </p:nvSpPr>
+        <p:spPr>
+          <a:xfrm>
+            <a:off x="6208776" y="2057400"/>
+            <a:ext cx="2601468" cy="1463040"/>
+          </a:xfrm>
+          <a:prstGeom prst="roundRect">
+            <a:avLst>
+              <a:gd name="adj" fmla="val 5000"/>
+            </a:avLst>
+          </a:prstGeom>
+          <a:solidFill>
+            <a:srgbClr val="FFFFFF"/>
+          </a:solidFill>
+          <a:ln w="9525">
+            <a:solidFill>
+              <a:srgbClr val="D8E0EC"/>
+            </a:solidFill>
+            <a:prstDash val="solid"/>
+          </a:ln>
+        </p:spPr>
+      </p:sp>
+      <p:sp>
+        <p:nvSpPr>
+          <p:cNvPr id="19" name="Text 16"/>
+          <p:cNvSpPr/>
+          <p:nvPr/>
+        </p:nvSpPr>
+        <p:spPr>
+          <a:xfrm>
+            <a:off x="6345936" y="2148840"/>
+            <a:ext cx="365760" cy="365760"/>
+          </a:xfrm>
+          <a:prstGeom prst="rect">
+            <a:avLst/>
+          </a:prstGeom>
+          <a:noFill/>
+          <a:ln/>
+        </p:spPr>
+        <p:txBody>
+          <a:bodyPr wrap="square" rtlCol="0" anchor="ctr"/>
+          <a:lstStyle/>
+          <a:p>
+            <a:pPr indent="0" marL="0">
+              <a:buNone/>
+            </a:pPr>
+            <a:r>
+              <a:rPr lang="en-US" sz="1400" b="1" dirty="0">
+                <a:solidFill>
+                  <a:srgbClr val="F7A23B"/>
+                </a:solidFill>
+                <a:latin typeface="Arial" pitchFamily="34" charset="0"/>
+                <a:ea typeface="Arial" pitchFamily="34" charset="-122"/>
+                <a:cs typeface="Arial" pitchFamily="34" charset="-120"/>
+              </a:rPr>
+              <a:t>C</a:t>
+            </a:r>
+            <a:endParaRPr lang="en-US" sz="1400" dirty="0"/>
+          </a:p>
+        </p:txBody>
+      </p:sp>
+      <p:sp>
+        <p:nvSpPr>
+          <p:cNvPr id="20" name="Text 17"/>
+          <p:cNvSpPr/>
+          <p:nvPr/>
+        </p:nvSpPr>
+        <p:spPr>
+          <a:xfrm>
+            <a:off x="6345936" y="2514600"/>
+            <a:ext cx="2327148" cy="914400"/>
+          </a:xfrm>
+          <a:prstGeom prst="rect">
+            <a:avLst/>
+          </a:prstGeom>
+          <a:noFill/>
+          <a:ln/>
+        </p:spPr>
+        <p:txBody>
+          <a:bodyPr wrap="square" rtlCol="0" anchor="t"/>
+          <a:lstStyle/>
+          <a:p>
+            <a:pPr indent="0" marL="0">
+              <a:buNone/>
+            </a:pPr>
+            <a:r>
+              <a:rPr lang="en-US" sz="1500" dirty="0">
+                <a:solidFill>
+                  <a:srgbClr val="1F2937"/>
+                </a:solidFill>
+                <a:latin typeface="Arial" pitchFamily="34" charset="0"/>
+                <a:ea typeface="Arial" pitchFamily="34" charset="-122"/>
+                <a:cs typeface="Arial" pitchFamily="34" charset="-120"/>
+              </a:rPr>
+              <a:t>mais e-mails</a:t>
+            </a:r>
+            <a:endParaRPr lang="en-US" sz="1500" dirty="0"/>
+          </a:p>
+        </p:txBody>
+      </p:sp>
+      <p:sp>
+        <p:nvSpPr>
+          <p:cNvPr id="21" name="Shape 18"/>
+          <p:cNvSpPr/>
+          <p:nvPr/>
+        </p:nvSpPr>
+        <p:spPr>
+          <a:xfrm>
+            <a:off x="9038844" y="2057400"/>
+            <a:ext cx="2601468" cy="1463040"/>
+          </a:xfrm>
+          <a:prstGeom prst="roundRect">
+            <a:avLst>
+              <a:gd name="adj" fmla="val 5000"/>
+            </a:avLst>
+          </a:prstGeom>
+          <a:solidFill>
+            <a:srgbClr val="FFFFFF"/>
+          </a:solidFill>
+          <a:ln w="9525">
+            <a:solidFill>
+              <a:srgbClr val="D8E0EC"/>
+            </a:solidFill>
+            <a:prstDash val="solid"/>
+          </a:ln>
+        </p:spPr>
+      </p:sp>
+      <p:sp>
+        <p:nvSpPr>
+          <p:cNvPr id="22" name="Text 19"/>
+          <p:cNvSpPr/>
+          <p:nvPr/>
+        </p:nvSpPr>
+        <p:spPr>
+          <a:xfrm>
+            <a:off x="9176004" y="2148840"/>
+            <a:ext cx="365760" cy="365760"/>
+          </a:xfrm>
+          <a:prstGeom prst="rect">
+            <a:avLst/>
+          </a:prstGeom>
+          <a:noFill/>
+          <a:ln/>
+        </p:spPr>
+        <p:txBody>
+          <a:bodyPr wrap="square" rtlCol="0" anchor="ctr"/>
+          <a:lstStyle/>
+          <a:p>
+            <a:pPr indent="0" marL="0">
+              <a:buNone/>
+            </a:pPr>
+            <a:r>
+              <a:rPr lang="en-US" sz="1400" b="1" dirty="0">
+                <a:solidFill>
+                  <a:srgbClr val="F7A23B"/>
+                </a:solidFill>
+                <a:latin typeface="Arial" pitchFamily="34" charset="0"/>
+                <a:ea typeface="Arial" pitchFamily="34" charset="-122"/>
+                <a:cs typeface="Arial" pitchFamily="34" charset="-120"/>
+              </a:rPr>
+              <a:t>D</a:t>
+            </a:r>
+            <a:endParaRPr lang="en-US" sz="1400" dirty="0"/>
+          </a:p>
+        </p:txBody>
+      </p:sp>
+      <p:sp>
+        <p:nvSpPr>
+          <p:cNvPr id="23" name="Text 20"/>
+          <p:cNvSpPr/>
+          <p:nvPr/>
+        </p:nvSpPr>
+        <p:spPr>
+          <a:xfrm>
+            <a:off x="9176004" y="2514600"/>
+            <a:ext cx="2327148" cy="914400"/>
+          </a:xfrm>
+          <a:prstGeom prst="rect">
+            <a:avLst/>
+          </a:prstGeom>
+          <a:noFill/>
+          <a:ln/>
+        </p:spPr>
+        <p:txBody>
+          <a:bodyPr wrap="square" rtlCol="0" anchor="t"/>
+          <a:lstStyle/>
+          <a:p>
+            <a:pPr indent="0" marL="0">
+              <a:buNone/>
+            </a:pPr>
+            <a:r>
+              <a:rPr lang="en-US" sz="1500" dirty="0">
+                <a:solidFill>
+                  <a:srgbClr val="1F2937"/>
+                </a:solidFill>
+                <a:latin typeface="Arial" pitchFamily="34" charset="0"/>
+                <a:ea typeface="Arial" pitchFamily="34" charset="-122"/>
+                <a:cs typeface="Arial" pitchFamily="34" charset="-120"/>
+              </a:rPr>
+              <a:t>mais visitas presenciais</a:t>
+            </a:r>
+            <a:endParaRPr lang="en-US" sz="1500" dirty="0"/>
+          </a:p>
+        </p:txBody>
+      </p:sp>
+      <p:sp>
+        <p:nvSpPr>
+          <p:cNvPr id="25" name="Slide Number Placeholder 0"/>
+          <p:cNvSpPr>
+            <a:spLocks noGrp="1"/>
+          </p:cNvSpPr>
+          <p:nvPr>
+            <p:ph type="sldNum" sz="quarter" idx="4294967295"/>
+          </p:nvPr>
+        </p:nvSpPr>
+        <p:spPr>
+          <a:xfrm>
+            <a:off x="11292840" y="6556248"/>
+            <a:ext cx="548640" cy="256032"/>
+          </a:xfrm>
+          <a:prstGeom prst="rect">
+            <a:avLst/>
+          </a:prstGeom>
+          <a:extLst>
+            <a:ext uri="{C572A759-6A51-4108-AA02-DFA0A04FC94B}">
+              <ma14:wrappingTextBoxFlag xmlns:ma14="http://schemas.microsoft.com/office/mac/drawingml/2011/main" val="0"/>
+            </a:ext>
+          </a:extLst>
+        </p:spPr>
+        <p:txBody>
+          <a:bodyPr/>
+          <a:lstStyle>
+            <a:lvl1pPr>
+              <a:defRPr sz="900">
+                <a:solidFill>
+                  <a:srgbClr val="1B3A6B"/>
+                </a:solidFill>
+                <a:latin typeface="Arial"/>
+                <a:ea typeface="Arial"/>
+                <a:cs typeface="Arial"/>
+              </a:defRPr>
+            </a:lvl1pPr>
+          </a:lstStyle>
+          <a:p>
+            <a:pPr algn="r"/>
+            <a:fld id="{F7021451-1387-4CA6-816F-3879F97B5CBC}" type="slidenum">
+              <a:rPr b="1" lang="en-US"/>
+              <a:t>28</a:t>
+            </a:fld>
+            <a:endParaRPr lang="en-US"/>
+          </a:p>
+        </p:txBody>
+      </p:sp>
+    </p:spTree>
+  </p:cSld>
+  <p:clrMapOvr>
+    <a:masterClrMapping/>
+  </p:clrMapOvr>
+</p:sld>
+</file>
+
+<file path=ppt/slides/slide29.xml><?xml version="1.0" encoding="utf-8"?>
+<p:sld xmlns:a="http://schemas.openxmlformats.org/drawingml/2006/main" xmlns:r="http://schemas.openxmlformats.org/officeDocument/2006/relationships" xmlns:p="http://schemas.openxmlformats.org/presentationml/2006/main">
+  <p:cSld name="Slide 29">
+    <p:bg>
+      <p:bgPr>
+        <a:solidFill>
+          <a:srgbClr val="EEF3FA"/>
+        </a:solidFill>
+      </p:bgPr>
+    </p:bg>
+    <p:spTree>
+      <p:nvGrpSpPr>
+        <p:cNvPr id="1" name=""/>
+        <p:cNvGrpSpPr/>
+        <p:nvPr/>
+      </p:nvGrpSpPr>
+      <p:grpSpPr>
+        <a:xfrm>
+          <a:off x="0" y="0"/>
+          <a:ext cx="0" cy="0"/>
+          <a:chOff x="0" y="0"/>
+          <a:chExt cx="0" cy="0"/>
+        </a:xfrm>
+      </p:grpSpPr>
+      <p:sp>
+        <p:nvSpPr>
+          <p:cNvPr id="2" name="Shape 0"/>
+          <p:cNvSpPr/>
+          <p:nvPr/>
+        </p:nvSpPr>
+        <p:spPr>
+          <a:xfrm>
+            <a:off x="0" y="6510528"/>
+            <a:ext cx="12191695" cy="347472"/>
+          </a:xfrm>
+          <a:prstGeom prst="rect">
+            <a:avLst/>
+          </a:prstGeom>
+          <a:solidFill>
+            <a:srgbClr val="FFFFFF"/>
+          </a:solidFill>
+          <a:ln w="6350">
+            <a:solidFill>
+              <a:srgbClr val="D8E0EC"/>
+            </a:solidFill>
+            <a:prstDash val="solid"/>
+          </a:ln>
+        </p:spPr>
+      </p:sp>
+      <p:pic>
+        <p:nvPicPr>
+          <p:cNvPr id="3" name="Image 0" descr="/www/wwwroot/rexar/gdsolar/docs/curso/slides/assets/logo-gdsolar.png">    </p:cNvPr>
+          <p:cNvPicPr>
+            <a:picLocks noChangeAspect="1"/>
+          </p:cNvPicPr>
+          <p:nvPr/>
+        </p:nvPicPr>
+        <p:blipFill>
+          <a:blip r:embed="rId1"/>
+          <a:stretch>
+            <a:fillRect/>
+          </a:stretch>
+        </p:blipFill>
+        <p:spPr>
+          <a:xfrm>
+            <a:off x="548640" y="6547104"/>
+            <a:ext cx="274320" cy="274320"/>
+          </a:xfrm>
+          <a:prstGeom prst="rect">
+            <a:avLst/>
+          </a:prstGeom>
+        </p:spPr>
+      </p:pic>
+      <p:sp>
+        <p:nvSpPr>
+          <p:cNvPr id="4" name="Text 1"/>
+          <p:cNvSpPr/>
+          <p:nvPr/>
+        </p:nvSpPr>
+        <p:spPr>
+          <a:xfrm>
+            <a:off x="886968" y="6528816"/>
+            <a:ext cx="6400800" cy="310896"/>
+          </a:xfrm>
+          <a:prstGeom prst="rect">
+            <a:avLst/>
+          </a:prstGeom>
+          <a:noFill/>
+          <a:ln/>
+        </p:spPr>
+        <p:txBody>
+          <a:bodyPr wrap="square" rtlCol="0" anchor="ctr"/>
+          <a:lstStyle/>
+          <a:p>
+            <a:pPr indent="0" marL="0">
+              <a:buNone/>
+            </a:pPr>
+            <a:r>
+              <a:rPr lang="en-US" sz="900" b="1" dirty="0">
+                <a:solidFill>
+                  <a:srgbClr val="64748B"/>
+                </a:solidFill>
+                <a:latin typeface="Arial" pitchFamily="34" charset="0"/>
+                <a:ea typeface="Arial" pitchFamily="34" charset="-122"/>
+                <a:cs typeface="Arial" pitchFamily="34" charset="-120"/>
+              </a:rPr>
+              <a:t>GD Solar  ·  Formação em Energia por Assinatura</a:t>
+            </a:r>
+            <a:endParaRPr lang="en-US" sz="900" dirty="0"/>
+          </a:p>
+        </p:txBody>
+      </p:sp>
+      <p:sp>
+        <p:nvSpPr>
+          <p:cNvPr id="5" name="Text 2"/>
+          <p:cNvSpPr/>
+          <p:nvPr/>
+        </p:nvSpPr>
+        <p:spPr>
+          <a:xfrm>
+            <a:off x="7132320" y="6528816"/>
+            <a:ext cx="4023360" cy="310896"/>
+          </a:xfrm>
+          <a:prstGeom prst="rect">
+            <a:avLst/>
+          </a:prstGeom>
+          <a:noFill/>
+          <a:ln/>
+        </p:spPr>
+        <p:txBody>
+          <a:bodyPr wrap="square" rtlCol="0" anchor="ctr"/>
+          <a:lstStyle/>
+          <a:p>
+            <a:pPr algn="r" indent="0" marL="0">
+              <a:buNone/>
+            </a:pPr>
+            <a:r>
+              <a:rPr lang="en-US" sz="900" dirty="0">
+                <a:solidFill>
+                  <a:srgbClr val="64748B"/>
+                </a:solidFill>
+                <a:latin typeface="Arial" pitchFamily="34" charset="0"/>
+                <a:ea typeface="Arial" pitchFamily="34" charset="-122"/>
+                <a:cs typeface="Arial" pitchFamily="34" charset="-120"/>
+              </a:rPr>
+              <a:t>M9 · Teste rápido</a:t>
+            </a:r>
+            <a:endParaRPr lang="en-US" sz="900" dirty="0"/>
+          </a:p>
+        </p:txBody>
+      </p:sp>
+      <p:sp>
+        <p:nvSpPr>
+          <p:cNvPr id="6" name="Shape 3"/>
+          <p:cNvSpPr/>
+          <p:nvPr/>
+        </p:nvSpPr>
+        <p:spPr>
+          <a:xfrm>
+            <a:off x="548640" y="384048"/>
+            <a:ext cx="82296" cy="658368"/>
+          </a:xfrm>
+          <a:prstGeom prst="rect">
+            <a:avLst/>
+          </a:prstGeom>
+          <a:solidFill>
+            <a:srgbClr val="F7A23B"/>
+          </a:solidFill>
+          <a:ln/>
+        </p:spPr>
+      </p:sp>
+      <p:sp>
+        <p:nvSpPr>
+          <p:cNvPr id="7" name="Text 4"/>
+          <p:cNvSpPr/>
+          <p:nvPr/>
+        </p:nvSpPr>
+        <p:spPr>
+          <a:xfrm>
+            <a:off x="777240" y="292608"/>
+            <a:ext cx="10972800" cy="274320"/>
+          </a:xfrm>
+          <a:prstGeom prst="rect">
+            <a:avLst/>
+          </a:prstGeom>
+          <a:noFill/>
+          <a:ln/>
+        </p:spPr>
+        <p:txBody>
+          <a:bodyPr wrap="square" rtlCol="0" anchor="ctr"/>
+          <a:lstStyle/>
+          <a:p>
+            <a:pPr indent="0" marL="0">
+              <a:buNone/>
+            </a:pPr>
+            <a:r>
+              <a:rPr lang="en-US" sz="1000" b="1" spc="100" kern="0" dirty="0">
+                <a:solidFill>
+                  <a:srgbClr val="F7A23B"/>
+                </a:solidFill>
+                <a:latin typeface="Arial" pitchFamily="34" charset="0"/>
+                <a:ea typeface="Arial" pitchFamily="34" charset="-122"/>
+                <a:cs typeface="Arial" pitchFamily="34" charset="-120"/>
+              </a:rPr>
+              <a:t>CONFIRA SUAS RESPOSTAS</a:t>
+            </a:r>
+            <a:endParaRPr lang="en-US" sz="1000" dirty="0"/>
+          </a:p>
+        </p:txBody>
+      </p:sp>
+      <p:sp>
+        <p:nvSpPr>
+          <p:cNvPr id="8" name="Text 5"/>
+          <p:cNvSpPr/>
+          <p:nvPr/>
+        </p:nvSpPr>
+        <p:spPr>
+          <a:xfrm>
+            <a:off x="777240" y="530352"/>
+            <a:ext cx="10881360" cy="566928"/>
+          </a:xfrm>
+          <a:prstGeom prst="rect">
+            <a:avLst/>
+          </a:prstGeom>
+          <a:noFill/>
+          <a:ln/>
+        </p:spPr>
+        <p:txBody>
+          <a:bodyPr wrap="square" rtlCol="0" anchor="ctr">
+            <a:normAutofit/>
+          </a:bodyPr>
+          <a:lstStyle/>
+          <a:p>
+            <a:pPr indent="0" marL="0">
+              <a:buNone/>
+            </a:pPr>
+            <a:r>
+              <a:rPr lang="en-US" sz="2600" b="1" dirty="0">
+                <a:solidFill>
+                  <a:srgbClr val="1B3A6B"/>
+                </a:solidFill>
+                <a:latin typeface="Arial" pitchFamily="34" charset="0"/>
+                <a:ea typeface="Arial" pitchFamily="34" charset="-122"/>
+                <a:cs typeface="Arial" pitchFamily="34" charset="-120"/>
+              </a:rPr>
+              <a:t>Gabarito do teste rápido</a:t>
+            </a:r>
+            <a:endParaRPr lang="en-US" sz="2600" dirty="0"/>
+          </a:p>
+        </p:txBody>
+      </p:sp>
+      <p:sp>
+        <p:nvSpPr>
+          <p:cNvPr id="9" name="Shape 6"/>
+          <p:cNvSpPr/>
+          <p:nvPr/>
+        </p:nvSpPr>
+        <p:spPr>
+          <a:xfrm>
+            <a:off x="548640" y="1325880"/>
+            <a:ext cx="3544824" cy="2331720"/>
+          </a:xfrm>
+          <a:prstGeom prst="roundRect">
+            <a:avLst>
+              <a:gd name="adj" fmla="val 3137"/>
+            </a:avLst>
+          </a:prstGeom>
+          <a:solidFill>
+            <a:srgbClr val="FFFFFF"/>
+          </a:solidFill>
+          <a:ln w="9525">
+            <a:solidFill>
+              <a:srgbClr val="D8E0EC"/>
+            </a:solidFill>
+            <a:prstDash val="solid"/>
+          </a:ln>
+          <a:effectLst>
+            <a:outerShdw sx="100000" sy="100000" kx="0" ky="0" algn="bl" rotWithShape="0" blurRad="38100" dist="12700" dir="5400000">
+              <a:srgbClr val="000000">
+                <a:alpha val="8000"/>
+              </a:srgbClr>
+            </a:outerShdw>
+          </a:effectLst>
+        </p:spPr>
+      </p:sp>
+      <p:sp>
+        <p:nvSpPr>
+          <p:cNvPr id="10" name="Shape 7"/>
+          <p:cNvSpPr/>
+          <p:nvPr/>
+        </p:nvSpPr>
+        <p:spPr>
+          <a:xfrm>
+            <a:off x="731520" y="1508760"/>
+            <a:ext cx="457200" cy="457200"/>
+          </a:xfrm>
+          <a:prstGeom prst="ellipse">
+            <a:avLst/>
+          </a:prstGeom>
+          <a:solidFill>
+            <a:srgbClr val="1B3A6B"/>
+          </a:solidFill>
+          <a:ln/>
+        </p:spPr>
+      </p:sp>
+      <p:sp>
+        <p:nvSpPr>
+          <p:cNvPr id="11" name="Text 8"/>
+          <p:cNvSpPr/>
+          <p:nvPr/>
+        </p:nvSpPr>
+        <p:spPr>
+          <a:xfrm>
+            <a:off x="731520" y="1508760"/>
+            <a:ext cx="457200" cy="457200"/>
+          </a:xfrm>
+          <a:prstGeom prst="rect">
+            <a:avLst/>
+          </a:prstGeom>
+          <a:noFill/>
+          <a:ln/>
+        </p:spPr>
+        <p:txBody>
+          <a:bodyPr wrap="square" rtlCol="0" anchor="ctr"/>
+          <a:lstStyle/>
+          <a:p>
+            <a:pPr algn="ctr" indent="0" marL="0">
+              <a:buNone/>
+            </a:pPr>
+            <a:r>
+              <a:rPr lang="en-US" sz="1400" b="1" dirty="0">
+                <a:solidFill>
+                  <a:srgbClr val="FFFFFF"/>
+                </a:solidFill>
+                <a:latin typeface="Arial" pitchFamily="34" charset="0"/>
+                <a:ea typeface="Arial" pitchFamily="34" charset="-122"/>
+                <a:cs typeface="Arial" pitchFamily="34" charset="-120"/>
+              </a:rPr>
+              <a:t>1</a:t>
+            </a:r>
+            <a:endParaRPr lang="en-US" sz="1400" dirty="0"/>
+          </a:p>
+        </p:txBody>
+      </p:sp>
+      <p:sp>
+        <p:nvSpPr>
+          <p:cNvPr id="12" name="Text 9"/>
+          <p:cNvSpPr/>
+          <p:nvPr/>
+        </p:nvSpPr>
+        <p:spPr>
+          <a:xfrm>
+            <a:off x="1325880" y="1435608"/>
+            <a:ext cx="2630424" cy="2112264"/>
+          </a:xfrm>
+          <a:prstGeom prst="rect">
+            <a:avLst/>
+          </a:prstGeom>
+          <a:noFill/>
+          <a:ln/>
+        </p:spPr>
+        <p:txBody>
+          <a:bodyPr wrap="square" rtlCol="0" anchor="ctr">
+            <a:normAutofit/>
+          </a:bodyPr>
+          <a:lstStyle/>
+          <a:p>
+            <a:pPr indent="0" marL="0">
+              <a:buNone/>
+            </a:pPr>
+            <a:r>
+              <a:rPr lang="en-US" sz="1800" dirty="0">
+                <a:solidFill>
+                  <a:srgbClr val="1F2937"/>
+                </a:solidFill>
+                <a:latin typeface="Arial" pitchFamily="34" charset="0"/>
+                <a:ea typeface="Arial" pitchFamily="34" charset="-122"/>
+                <a:cs typeface="Arial" pitchFamily="34" charset="-120"/>
+              </a:rPr>
+              <a:t>-) </a:t>
+            </a:r>
+            <a:endParaRPr lang="en-US" sz="1800" dirty="0"/>
+          </a:p>
+        </p:txBody>
+      </p:sp>
+      <p:sp>
+        <p:nvSpPr>
+          <p:cNvPr id="13" name="Shape 10"/>
+          <p:cNvSpPr/>
+          <p:nvPr/>
+        </p:nvSpPr>
+        <p:spPr>
+          <a:xfrm>
+            <a:off x="4322064" y="1325880"/>
+            <a:ext cx="3544824" cy="2331720"/>
+          </a:xfrm>
+          <a:prstGeom prst="roundRect">
+            <a:avLst>
+              <a:gd name="adj" fmla="val 3137"/>
+            </a:avLst>
+          </a:prstGeom>
+          <a:solidFill>
+            <a:srgbClr val="FFFFFF"/>
+          </a:solidFill>
+          <a:ln w="9525">
+            <a:solidFill>
+              <a:srgbClr val="D8E0EC"/>
+            </a:solidFill>
+            <a:prstDash val="solid"/>
+          </a:ln>
+          <a:effectLst>
+            <a:outerShdw sx="100000" sy="100000" kx="0" ky="0" algn="bl" rotWithShape="0" blurRad="38100" dist="12700" dir="5400000">
+              <a:srgbClr val="000000">
+                <a:alpha val="8000"/>
+              </a:srgbClr>
+            </a:outerShdw>
+          </a:effectLst>
+        </p:spPr>
+      </p:sp>
+      <p:sp>
+        <p:nvSpPr>
+          <p:cNvPr id="14" name="Shape 11"/>
+          <p:cNvSpPr/>
+          <p:nvPr/>
+        </p:nvSpPr>
+        <p:spPr>
+          <a:xfrm>
+            <a:off x="4504944" y="1508760"/>
+            <a:ext cx="457200" cy="457200"/>
+          </a:xfrm>
+          <a:prstGeom prst="ellipse">
+            <a:avLst/>
+          </a:prstGeom>
+          <a:solidFill>
+            <a:srgbClr val="F7A23B"/>
+          </a:solidFill>
+          <a:ln/>
+        </p:spPr>
+      </p:sp>
+      <p:sp>
+        <p:nvSpPr>
+          <p:cNvPr id="15" name="Text 12"/>
+          <p:cNvSpPr/>
+          <p:nvPr/>
+        </p:nvSpPr>
+        <p:spPr>
+          <a:xfrm>
+            <a:off x="4504944" y="1508760"/>
+            <a:ext cx="457200" cy="457200"/>
+          </a:xfrm>
+          <a:prstGeom prst="rect">
+            <a:avLst/>
+          </a:prstGeom>
+          <a:noFill/>
+          <a:ln/>
+        </p:spPr>
+        <p:txBody>
+          <a:bodyPr wrap="square" rtlCol="0" anchor="ctr"/>
+          <a:lstStyle/>
+          <a:p>
+            <a:pPr algn="ctr" indent="0" marL="0">
+              <a:buNone/>
+            </a:pPr>
+            <a:r>
+              <a:rPr lang="en-US" sz="1400" b="1" dirty="0">
+                <a:solidFill>
+                  <a:srgbClr val="FFFFFF"/>
+                </a:solidFill>
+                <a:latin typeface="Arial" pitchFamily="34" charset="0"/>
+                <a:ea typeface="Arial" pitchFamily="34" charset="-122"/>
+                <a:cs typeface="Arial" pitchFamily="34" charset="-120"/>
+              </a:rPr>
+              <a:t>2</a:t>
+            </a:r>
+            <a:endParaRPr lang="en-US" sz="1400" dirty="0"/>
+          </a:p>
+        </p:txBody>
+      </p:sp>
+      <p:sp>
+        <p:nvSpPr>
+          <p:cNvPr id="16" name="Text 13"/>
+          <p:cNvSpPr/>
+          <p:nvPr/>
+        </p:nvSpPr>
+        <p:spPr>
+          <a:xfrm>
+            <a:off x="5099304" y="1435608"/>
+            <a:ext cx="2630424" cy="2112264"/>
+          </a:xfrm>
+          <a:prstGeom prst="rect">
+            <a:avLst/>
+          </a:prstGeom>
+          <a:noFill/>
+          <a:ln/>
+        </p:spPr>
+        <p:txBody>
+          <a:bodyPr wrap="square" rtlCol="0" anchor="ctr">
+            <a:normAutofit/>
+          </a:bodyPr>
+          <a:lstStyle/>
+          <a:p>
+            <a:pPr indent="0" marL="0">
+              <a:buNone/>
+            </a:pPr>
+            <a:r>
+              <a:rPr lang="en-US" sz="1800" dirty="0">
+                <a:solidFill>
+                  <a:srgbClr val="1F2937"/>
+                </a:solidFill>
+                <a:latin typeface="Arial" pitchFamily="34" charset="0"/>
+                <a:ea typeface="Arial" pitchFamily="34" charset="-122"/>
+                <a:cs typeface="Arial" pitchFamily="34" charset="-120"/>
+              </a:rPr>
+              <a:t>A) se resolve sozinho na próxima varredura</a:t>
+            </a:r>
+            <a:endParaRPr lang="en-US" sz="1800" dirty="0"/>
+          </a:p>
+        </p:txBody>
+      </p:sp>
+      <p:sp>
+        <p:nvSpPr>
+          <p:cNvPr id="17" name="Shape 14"/>
+          <p:cNvSpPr/>
+          <p:nvPr/>
+        </p:nvSpPr>
+        <p:spPr>
+          <a:xfrm>
+            <a:off x="8095488" y="1325880"/>
+            <a:ext cx="3544824" cy="2331720"/>
+          </a:xfrm>
+          <a:prstGeom prst="roundRect">
+            <a:avLst>
+              <a:gd name="adj" fmla="val 3137"/>
+            </a:avLst>
+          </a:prstGeom>
+          <a:solidFill>
+            <a:srgbClr val="FFFFFF"/>
+          </a:solidFill>
+          <a:ln w="9525">
+            <a:solidFill>
+              <a:srgbClr val="D8E0EC"/>
+            </a:solidFill>
+            <a:prstDash val="solid"/>
+          </a:ln>
+          <a:effectLst>
+            <a:outerShdw sx="100000" sy="100000" kx="0" ky="0" algn="bl" rotWithShape="0" blurRad="38100" dist="12700" dir="5400000">
+              <a:srgbClr val="000000">
+                <a:alpha val="8000"/>
+              </a:srgbClr>
+            </a:outerShdw>
+          </a:effectLst>
+        </p:spPr>
+      </p:sp>
+      <p:sp>
+        <p:nvSpPr>
+          <p:cNvPr id="18" name="Shape 15"/>
+          <p:cNvSpPr/>
+          <p:nvPr/>
+        </p:nvSpPr>
+        <p:spPr>
+          <a:xfrm>
+            <a:off x="8278368" y="1508760"/>
+            <a:ext cx="457200" cy="457200"/>
+          </a:xfrm>
+          <a:prstGeom prst="ellipse">
+            <a:avLst/>
+          </a:prstGeom>
+          <a:solidFill>
+            <a:srgbClr val="1B3A6B"/>
+          </a:solidFill>
+          <a:ln/>
+        </p:spPr>
+      </p:sp>
+      <p:sp>
+        <p:nvSpPr>
+          <p:cNvPr id="19" name="Text 16"/>
+          <p:cNvSpPr/>
+          <p:nvPr/>
+        </p:nvSpPr>
+        <p:spPr>
+          <a:xfrm>
+            <a:off x="8278368" y="1508760"/>
+            <a:ext cx="457200" cy="457200"/>
+          </a:xfrm>
+          <a:prstGeom prst="rect">
+            <a:avLst/>
+          </a:prstGeom>
+          <a:noFill/>
+          <a:ln/>
+        </p:spPr>
+        <p:txBody>
+          <a:bodyPr wrap="square" rtlCol="0" anchor="ctr"/>
+          <a:lstStyle/>
+          <a:p>
+            <a:pPr algn="ctr" indent="0" marL="0">
+              <a:buNone/>
+            </a:pPr>
+            <a:r>
+              <a:rPr lang="en-US" sz="1400" b="1" dirty="0">
+                <a:solidFill>
+                  <a:srgbClr val="FFFFFF"/>
+                </a:solidFill>
+                <a:latin typeface="Arial" pitchFamily="34" charset="0"/>
+                <a:ea typeface="Arial" pitchFamily="34" charset="-122"/>
+                <a:cs typeface="Arial" pitchFamily="34" charset="-120"/>
+              </a:rPr>
+              <a:t>3</a:t>
+            </a:r>
+            <a:endParaRPr lang="en-US" sz="1400" dirty="0"/>
+          </a:p>
+        </p:txBody>
+      </p:sp>
+      <p:sp>
+        <p:nvSpPr>
+          <p:cNvPr id="20" name="Text 17"/>
+          <p:cNvSpPr/>
+          <p:nvPr/>
+        </p:nvSpPr>
+        <p:spPr>
+          <a:xfrm>
+            <a:off x="8872728" y="1435608"/>
+            <a:ext cx="2630424" cy="2112264"/>
+          </a:xfrm>
+          <a:prstGeom prst="rect">
+            <a:avLst/>
+          </a:prstGeom>
+          <a:noFill/>
+          <a:ln/>
+        </p:spPr>
+        <p:txBody>
+          <a:bodyPr wrap="square" rtlCol="0" anchor="ctr">
+            <a:normAutofit/>
+          </a:bodyPr>
+          <a:lstStyle/>
+          <a:p>
+            <a:pPr indent="0" marL="0">
+              <a:buNone/>
+            </a:pPr>
+            <a:r>
+              <a:rPr lang="en-US" sz="1800" dirty="0">
+                <a:solidFill>
+                  <a:srgbClr val="1F2937"/>
+                </a:solidFill>
+                <a:latin typeface="Arial" pitchFamily="34" charset="0"/>
+                <a:ea typeface="Arial" pitchFamily="34" charset="-122"/>
+                <a:cs typeface="Arial" pitchFamily="34" charset="-120"/>
+              </a:rPr>
+              <a:t>B) Só os financeiros da própria carteira</a:t>
+            </a:r>
+            <a:endParaRPr lang="en-US" sz="1800" dirty="0"/>
+          </a:p>
+        </p:txBody>
+      </p:sp>
+      <p:sp>
+        <p:nvSpPr>
+          <p:cNvPr id="21" name="Shape 18"/>
+          <p:cNvSpPr/>
+          <p:nvPr/>
+        </p:nvSpPr>
+        <p:spPr>
+          <a:xfrm>
+            <a:off x="548640" y="3886200"/>
+            <a:ext cx="3544824" cy="2331720"/>
+          </a:xfrm>
+          <a:prstGeom prst="roundRect">
+            <a:avLst>
+              <a:gd name="adj" fmla="val 3137"/>
+            </a:avLst>
+          </a:prstGeom>
+          <a:solidFill>
+            <a:srgbClr val="FFFFFF"/>
+          </a:solidFill>
+          <a:ln w="9525">
+            <a:solidFill>
+              <a:srgbClr val="D8E0EC"/>
+            </a:solidFill>
+            <a:prstDash val="solid"/>
+          </a:ln>
+          <a:effectLst>
+            <a:outerShdw sx="100000" sy="100000" kx="0" ky="0" algn="bl" rotWithShape="0" blurRad="38100" dist="12700" dir="5400000">
+              <a:srgbClr val="000000">
+                <a:alpha val="8000"/>
+              </a:srgbClr>
+            </a:outerShdw>
+          </a:effectLst>
+        </p:spPr>
+      </p:sp>
+      <p:sp>
+        <p:nvSpPr>
+          <p:cNvPr id="22" name="Shape 19"/>
+          <p:cNvSpPr/>
+          <p:nvPr/>
+        </p:nvSpPr>
+        <p:spPr>
+          <a:xfrm>
+            <a:off x="731520" y="4069080"/>
+            <a:ext cx="457200" cy="457200"/>
+          </a:xfrm>
+          <a:prstGeom prst="ellipse">
+            <a:avLst/>
+          </a:prstGeom>
+          <a:solidFill>
+            <a:srgbClr val="F7A23B"/>
+          </a:solidFill>
+          <a:ln/>
+        </p:spPr>
+      </p:sp>
+      <p:sp>
+        <p:nvSpPr>
+          <p:cNvPr id="23" name="Text 20"/>
+          <p:cNvSpPr/>
+          <p:nvPr/>
+        </p:nvSpPr>
+        <p:spPr>
+          <a:xfrm>
+            <a:off x="731520" y="4069080"/>
+            <a:ext cx="457200" cy="457200"/>
+          </a:xfrm>
+          <a:prstGeom prst="rect">
+            <a:avLst/>
+          </a:prstGeom>
+          <a:noFill/>
+          <a:ln/>
+        </p:spPr>
+        <p:txBody>
+          <a:bodyPr wrap="square" rtlCol="0" anchor="ctr"/>
+          <a:lstStyle/>
+          <a:p>
+            <a:pPr algn="ctr" indent="0" marL="0">
+              <a:buNone/>
+            </a:pPr>
+            <a:r>
+              <a:rPr lang="en-US" sz="1400" b="1" dirty="0">
+                <a:solidFill>
+                  <a:srgbClr val="FFFFFF"/>
+                </a:solidFill>
+                <a:latin typeface="Arial" pitchFamily="34" charset="0"/>
+                <a:ea typeface="Arial" pitchFamily="34" charset="-122"/>
+                <a:cs typeface="Arial" pitchFamily="34" charset="-120"/>
+              </a:rPr>
+              <a:t>4</a:t>
+            </a:r>
+            <a:endParaRPr lang="en-US" sz="1400" dirty="0"/>
+          </a:p>
+        </p:txBody>
+      </p:sp>
+      <p:sp>
+        <p:nvSpPr>
+          <p:cNvPr id="24" name="Text 21"/>
+          <p:cNvSpPr/>
+          <p:nvPr/>
+        </p:nvSpPr>
+        <p:spPr>
+          <a:xfrm>
+            <a:off x="1325880" y="3995928"/>
+            <a:ext cx="2630424" cy="2112264"/>
+          </a:xfrm>
+          <a:prstGeom prst="rect">
+            <a:avLst/>
+          </a:prstGeom>
+          <a:noFill/>
+          <a:ln/>
+        </p:spPr>
+        <p:txBody>
+          <a:bodyPr wrap="square" rtlCol="0" anchor="ctr">
+            <a:normAutofit/>
+          </a:bodyPr>
+          <a:lstStyle/>
+          <a:p>
+            <a:pPr indent="0" marL="0">
+              <a:buNone/>
+            </a:pPr>
+            <a:r>
+              <a:rPr lang="en-US" sz="1800" dirty="0">
+                <a:solidFill>
+                  <a:srgbClr val="1F2937"/>
+                </a:solidFill>
+                <a:latin typeface="Arial" pitchFamily="34" charset="0"/>
+                <a:ea typeface="Arial" pitchFamily="34" charset="-122"/>
+                <a:cs typeface="Arial" pitchFamily="34" charset="-120"/>
+              </a:rPr>
+              <a:t>A) um alerta de usina</a:t>
+            </a:r>
+            <a:endParaRPr lang="en-US" sz="1800" dirty="0"/>
+          </a:p>
+        </p:txBody>
+      </p:sp>
+      <p:sp>
+        <p:nvSpPr>
+          <p:cNvPr id="25" name="Shape 22"/>
+          <p:cNvSpPr/>
+          <p:nvPr/>
+        </p:nvSpPr>
+        <p:spPr>
+          <a:xfrm>
+            <a:off x="4322064" y="3886200"/>
+            <a:ext cx="3544824" cy="2331720"/>
+          </a:xfrm>
+          <a:prstGeom prst="roundRect">
+            <a:avLst>
+              <a:gd name="adj" fmla="val 3137"/>
+            </a:avLst>
+          </a:prstGeom>
+          <a:solidFill>
+            <a:srgbClr val="FFFFFF"/>
+          </a:solidFill>
+          <a:ln w="9525">
+            <a:solidFill>
+              <a:srgbClr val="D8E0EC"/>
+            </a:solidFill>
+            <a:prstDash val="solid"/>
+          </a:ln>
+          <a:effectLst>
+            <a:outerShdw sx="100000" sy="100000" kx="0" ky="0" algn="bl" rotWithShape="0" blurRad="38100" dist="12700" dir="5400000">
+              <a:srgbClr val="000000">
+                <a:alpha val="8000"/>
+              </a:srgbClr>
+            </a:outerShdw>
+          </a:effectLst>
+        </p:spPr>
+      </p:sp>
+      <p:sp>
+        <p:nvSpPr>
+          <p:cNvPr id="26" name="Shape 23"/>
+          <p:cNvSpPr/>
+          <p:nvPr/>
+        </p:nvSpPr>
+        <p:spPr>
+          <a:xfrm>
+            <a:off x="4504944" y="4069080"/>
+            <a:ext cx="457200" cy="457200"/>
+          </a:xfrm>
+          <a:prstGeom prst="ellipse">
+            <a:avLst/>
+          </a:prstGeom>
+          <a:solidFill>
+            <a:srgbClr val="1B3A6B"/>
+          </a:solidFill>
+          <a:ln/>
+        </p:spPr>
+      </p:sp>
+      <p:sp>
+        <p:nvSpPr>
+          <p:cNvPr id="27" name="Text 24"/>
+          <p:cNvSpPr/>
+          <p:nvPr/>
+        </p:nvSpPr>
+        <p:spPr>
+          <a:xfrm>
+            <a:off x="4504944" y="4069080"/>
+            <a:ext cx="457200" cy="457200"/>
+          </a:xfrm>
+          <a:prstGeom prst="rect">
+            <a:avLst/>
+          </a:prstGeom>
+          <a:noFill/>
+          <a:ln/>
+        </p:spPr>
+        <p:txBody>
+          <a:bodyPr wrap="square" rtlCol="0" anchor="ctr"/>
+          <a:lstStyle/>
+          <a:p>
+            <a:pPr algn="ctr" indent="0" marL="0">
+              <a:buNone/>
+            </a:pPr>
+            <a:r>
+              <a:rPr lang="en-US" sz="1400" b="1" dirty="0">
+                <a:solidFill>
+                  <a:srgbClr val="FFFFFF"/>
+                </a:solidFill>
+                <a:latin typeface="Arial" pitchFamily="34" charset="0"/>
+                <a:ea typeface="Arial" pitchFamily="34" charset="-122"/>
+                <a:cs typeface="Arial" pitchFamily="34" charset="-120"/>
+              </a:rPr>
+              <a:t>5</a:t>
+            </a:r>
+            <a:endParaRPr lang="en-US" sz="1400" dirty="0"/>
+          </a:p>
+        </p:txBody>
+      </p:sp>
+      <p:sp>
+        <p:nvSpPr>
+          <p:cNvPr id="28" name="Text 25"/>
+          <p:cNvSpPr/>
+          <p:nvPr/>
+        </p:nvSpPr>
+        <p:spPr>
+          <a:xfrm>
+            <a:off x="5099304" y="3995928"/>
+            <a:ext cx="2630424" cy="2112264"/>
+          </a:xfrm>
+          <a:prstGeom prst="rect">
+            <a:avLst/>
+          </a:prstGeom>
+          <a:noFill/>
+          <a:ln/>
+        </p:spPr>
+        <p:txBody>
+          <a:bodyPr wrap="square" rtlCol="0" anchor="ctr">
+            <a:normAutofit/>
+          </a:bodyPr>
+          <a:lstStyle/>
+          <a:p>
+            <a:pPr indent="0" marL="0">
+              <a:buNone/>
+            </a:pPr>
+            <a:r>
+              <a:rPr lang="en-US" sz="1800" dirty="0">
+                <a:solidFill>
+                  <a:srgbClr val="1F2937"/>
+                </a:solidFill>
+                <a:latin typeface="Arial" pitchFamily="34" charset="0"/>
+                <a:ea typeface="Arial" pitchFamily="34" charset="-122"/>
+                <a:cs typeface="Arial" pitchFamily="34" charset="-120"/>
+              </a:rPr>
+              <a:t>B) menos chamados sobre "quanto devo/como pago"</a:t>
+            </a:r>
+            <a:endParaRPr lang="en-US" sz="1800" dirty="0"/>
+          </a:p>
+        </p:txBody>
+      </p:sp>
+      <p:sp>
+        <p:nvSpPr>
+          <p:cNvPr id="25" name="Slide Number Placeholder 0"/>
+          <p:cNvSpPr>
+            <a:spLocks noGrp="1"/>
+          </p:cNvSpPr>
+          <p:nvPr>
+            <p:ph type="sldNum" sz="quarter" idx="4294967295"/>
+          </p:nvPr>
+        </p:nvSpPr>
+        <p:spPr>
+          <a:xfrm>
+            <a:off x="11292840" y="6556248"/>
+            <a:ext cx="548640" cy="256032"/>
+          </a:xfrm>
+          <a:prstGeom prst="rect">
+            <a:avLst/>
+          </a:prstGeom>
+          <a:extLst>
+            <a:ext uri="{C572A759-6A51-4108-AA02-DFA0A04FC94B}">
+              <ma14:wrappingTextBoxFlag xmlns:ma14="http://schemas.microsoft.com/office/mac/drawingml/2011/main" val="0"/>
+            </a:ext>
+          </a:extLst>
+        </p:spPr>
+        <p:txBody>
+          <a:bodyPr/>
+          <a:lstStyle>
+            <a:lvl1pPr>
+              <a:defRPr sz="900">
+                <a:solidFill>
+                  <a:srgbClr val="1B3A6B"/>
+                </a:solidFill>
+                <a:latin typeface="Arial"/>
+                <a:ea typeface="Arial"/>
+                <a:cs typeface="Arial"/>
+              </a:defRPr>
+            </a:lvl1pPr>
+          </a:lstStyle>
+          <a:p>
+            <a:pPr algn="r"/>
+            <a:fld id="{F7021451-1387-4CA6-816F-3879F97B5CBC}" type="slidenum">
+              <a:rPr b="1" lang="en-US"/>
+              <a:t>29</a:t>
             </a:fld>
             <a:endParaRPr lang="en-US"/>
           </a:p>
@@ -14967,7 +19869,7 @@
         <p:spPr>
           <a:xfrm>
             <a:off x="548640" y="1325880"/>
-            <a:ext cx="3544824" cy="4892040"/>
+            <a:ext cx="3544824" cy="3977640"/>
           </a:xfrm>
           <a:prstGeom prst="roundRect">
             <a:avLst>
@@ -15060,7 +19962,7 @@
         <p:spPr>
           <a:xfrm>
             <a:off x="1325880" y="1435608"/>
-            <a:ext cx="2630424" cy="4672584"/>
+            <a:ext cx="2630424" cy="3758184"/>
           </a:xfrm>
           <a:prstGeom prst="rect">
             <a:avLst/>
@@ -15101,7 +20003,7 @@
         <p:spPr>
           <a:xfrm>
             <a:off x="4322064" y="1325880"/>
-            <a:ext cx="3544824" cy="4892040"/>
+            <a:ext cx="3544824" cy="3977640"/>
           </a:xfrm>
           <a:prstGeom prst="roundRect">
             <a:avLst>
@@ -15194,7 +20096,7 @@
         <p:spPr>
           <a:xfrm>
             <a:off x="5099304" y="1435608"/>
-            <a:ext cx="2630424" cy="4672584"/>
+            <a:ext cx="2630424" cy="3758184"/>
           </a:xfrm>
           <a:prstGeom prst="rect">
             <a:avLst/>
@@ -15235,7 +20137,7 @@
         <p:spPr>
           <a:xfrm>
             <a:off x="8095488" y="1325880"/>
-            <a:ext cx="3544824" cy="4892040"/>
+            <a:ext cx="3544824" cy="3977640"/>
           </a:xfrm>
           <a:prstGeom prst="roundRect">
             <a:avLst>
@@ -15328,7 +20230,7 @@
         <p:spPr>
           <a:xfrm>
             <a:off x="8872728" y="1435608"/>
-            <a:ext cx="2630424" cy="4672584"/>
+            <a:ext cx="2630424" cy="3758184"/>
           </a:xfrm>
           <a:prstGeom prst="rect">
             <a:avLst/>
@@ -15357,6 +20259,92 @@
               <a:t>06:00: expira boletos vencidos · 08:00: lembretes de cobrança</a:t>
             </a:r>
             <a:endParaRPr lang="en-US" sz="1800" dirty="0"/>
+          </a:p>
+        </p:txBody>
+      </p:sp>
+      <p:sp>
+        <p:nvSpPr>
+          <p:cNvPr id="21" name="Shape 18"/>
+          <p:cNvSpPr/>
+          <p:nvPr/>
+        </p:nvSpPr>
+        <p:spPr>
+          <a:xfrm>
+            <a:off x="548640" y="5413248"/>
+            <a:ext cx="11091672" cy="868680"/>
+          </a:xfrm>
+          <a:prstGeom prst="roundRect">
+            <a:avLst>
+              <a:gd name="adj" fmla="val 8421"/>
+            </a:avLst>
+          </a:prstGeom>
+          <a:solidFill>
+            <a:srgbClr val="EEF3FA"/>
+          </a:solidFill>
+          <a:ln w="6350">
+            <a:solidFill>
+              <a:srgbClr val="D8E0EC"/>
+            </a:solidFill>
+            <a:prstDash val="solid"/>
+          </a:ln>
+        </p:spPr>
+      </p:sp>
+      <p:sp>
+        <p:nvSpPr>
+          <p:cNvPr id="22" name="Shape 19"/>
+          <p:cNvSpPr/>
+          <p:nvPr/>
+        </p:nvSpPr>
+        <p:spPr>
+          <a:xfrm>
+            <a:off x="548640" y="5413248"/>
+            <a:ext cx="91440" cy="868680"/>
+          </a:xfrm>
+          <a:prstGeom prst="rect">
+            <a:avLst/>
+          </a:prstGeom>
+          <a:solidFill>
+            <a:srgbClr val="F7A23B"/>
+          </a:solidFill>
+          <a:ln/>
+        </p:spPr>
+      </p:sp>
+      <p:sp>
+        <p:nvSpPr>
+          <p:cNvPr id="23" name="Text 20"/>
+          <p:cNvSpPr/>
+          <p:nvPr/>
+        </p:nvSpPr>
+        <p:spPr>
+          <a:xfrm>
+            <a:off x="777240" y="5458968"/>
+            <a:ext cx="10744200" cy="777240"/>
+          </a:xfrm>
+          <a:prstGeom prst="rect">
+            <a:avLst/>
+          </a:prstGeom>
+          <a:noFill/>
+          <a:ln/>
+        </p:spPr>
+        <p:txBody>
+          <a:bodyPr wrap="square" rtlCol="0" anchor="ctr"/>
+          <a:lstStyle/>
+          <a:p>
+            <a:pPr indent="0" marL="0">
+              <a:buNone/>
+            </a:pPr>
+            <a:r>
+              <a:rPr lang="en-US" sz="1500" dirty="0">
+                <a:solidFill>
+                  <a:srgbClr val="1F2937"/>
+                </a:solidFill>
+                <a:latin typeface="Arial" pitchFamily="34" charset="0"/>
+                <a:ea typeface="Arial" pitchFamily="34" charset="-122"/>
+                <a:cs typeface="Arial" pitchFamily="34" charset="-120"/>
+              </a:rPr>
+              <a:t>A plataforma faz sozinha o trabalho repetitivo listado na tela. A equipe trabalha em cima do que ela produz: alertas, filas e exceções.</a:t>
+            </a:r>
+            <a:endParaRPr lang="en-US" sz="1500" dirty="0"/>
           </a:p>
         </p:txBody>
       </p:sp>
@@ -15403,6 +20391,514 @@
             <a:fld id="{F7021451-1387-4CA6-816F-3879F97B5CBC}" type="slidenum">
               <a:rPr b="1" lang="en-US"/>
               <a:t>3</a:t>
+            </a:fld>
+            <a:endParaRPr lang="en-US"/>
+          </a:p>
+        </p:txBody>
+      </p:sp>
+    </p:spTree>
+  </p:cSld>
+  <p:clrMapOvr>
+    <a:masterClrMapping/>
+  </p:clrMapOvr>
+</p:sld>
+</file>
+
+<file path=ppt/slides/slide30.xml><?xml version="1.0" encoding="utf-8"?>
+<p:sld xmlns:a="http://schemas.openxmlformats.org/drawingml/2006/main" xmlns:r="http://schemas.openxmlformats.org/officeDocument/2006/relationships" xmlns:p="http://schemas.openxmlformats.org/presentationml/2006/main">
+  <p:cSld name="Slide 30">
+    <p:bg>
+      <p:bgPr>
+        <a:solidFill>
+          <a:srgbClr val="F6F8FB"/>
+        </a:solidFill>
+      </p:bgPr>
+    </p:bg>
+    <p:spTree>
+      <p:nvGrpSpPr>
+        <p:cNvPr id="1" name=""/>
+        <p:cNvGrpSpPr/>
+        <p:nvPr/>
+      </p:nvGrpSpPr>
+      <p:grpSpPr>
+        <a:xfrm>
+          <a:off x="0" y="0"/>
+          <a:ext cx="0" cy="0"/>
+          <a:chOff x="0" y="0"/>
+          <a:chExt cx="0" cy="0"/>
+        </a:xfrm>
+      </p:grpSpPr>
+      <p:sp>
+        <p:nvSpPr>
+          <p:cNvPr id="2" name="Shape 0"/>
+          <p:cNvSpPr/>
+          <p:nvPr/>
+        </p:nvSpPr>
+        <p:spPr>
+          <a:xfrm>
+            <a:off x="0" y="6510528"/>
+            <a:ext cx="12191695" cy="347472"/>
+          </a:xfrm>
+          <a:prstGeom prst="rect">
+            <a:avLst/>
+          </a:prstGeom>
+          <a:solidFill>
+            <a:srgbClr val="FFFFFF"/>
+          </a:solidFill>
+          <a:ln w="6350">
+            <a:solidFill>
+              <a:srgbClr val="D8E0EC"/>
+            </a:solidFill>
+            <a:prstDash val="solid"/>
+          </a:ln>
+        </p:spPr>
+      </p:sp>
+      <p:pic>
+        <p:nvPicPr>
+          <p:cNvPr id="3" name="Image 0" descr="/www/wwwroot/rexar/gdsolar/docs/curso/slides/assets/logo-gdsolar.png">    </p:cNvPr>
+          <p:cNvPicPr>
+            <a:picLocks noChangeAspect="1"/>
+          </p:cNvPicPr>
+          <p:nvPr/>
+        </p:nvPicPr>
+        <p:blipFill>
+          <a:blip r:embed="rId1"/>
+          <a:stretch>
+            <a:fillRect/>
+          </a:stretch>
+        </p:blipFill>
+        <p:spPr>
+          <a:xfrm>
+            <a:off x="548640" y="6547104"/>
+            <a:ext cx="274320" cy="274320"/>
+          </a:xfrm>
+          <a:prstGeom prst="rect">
+            <a:avLst/>
+          </a:prstGeom>
+        </p:spPr>
+      </p:pic>
+      <p:sp>
+        <p:nvSpPr>
+          <p:cNvPr id="4" name="Text 1"/>
+          <p:cNvSpPr/>
+          <p:nvPr/>
+        </p:nvSpPr>
+        <p:spPr>
+          <a:xfrm>
+            <a:off x="886968" y="6528816"/>
+            <a:ext cx="6400800" cy="310896"/>
+          </a:xfrm>
+          <a:prstGeom prst="rect">
+            <a:avLst/>
+          </a:prstGeom>
+          <a:noFill/>
+          <a:ln/>
+        </p:spPr>
+        <p:txBody>
+          <a:bodyPr wrap="square" rtlCol="0" anchor="ctr"/>
+          <a:lstStyle/>
+          <a:p>
+            <a:pPr indent="0" marL="0">
+              <a:buNone/>
+            </a:pPr>
+            <a:r>
+              <a:rPr lang="en-US" sz="900" b="1" dirty="0">
+                <a:solidFill>
+                  <a:srgbClr val="64748B"/>
+                </a:solidFill>
+                <a:latin typeface="Arial" pitchFamily="34" charset="0"/>
+                <a:ea typeface="Arial" pitchFamily="34" charset="-122"/>
+                <a:cs typeface="Arial" pitchFamily="34" charset="-120"/>
+              </a:rPr>
+              <a:t>GD Solar  ·  Formação em Energia por Assinatura</a:t>
+            </a:r>
+            <a:endParaRPr lang="en-US" sz="900" dirty="0"/>
+          </a:p>
+        </p:txBody>
+      </p:sp>
+      <p:sp>
+        <p:nvSpPr>
+          <p:cNvPr id="5" name="Text 2"/>
+          <p:cNvSpPr/>
+          <p:nvPr/>
+        </p:nvSpPr>
+        <p:spPr>
+          <a:xfrm>
+            <a:off x="7132320" y="6528816"/>
+            <a:ext cx="4023360" cy="310896"/>
+          </a:xfrm>
+          <a:prstGeom prst="rect">
+            <a:avLst/>
+          </a:prstGeom>
+          <a:noFill/>
+          <a:ln/>
+        </p:spPr>
+        <p:txBody>
+          <a:bodyPr wrap="square" rtlCol="0" anchor="ctr"/>
+          <a:lstStyle/>
+          <a:p>
+            <a:pPr algn="r" indent="0" marL="0">
+              <a:buNone/>
+            </a:pPr>
+            <a:r>
+              <a:rPr lang="en-US" sz="900" dirty="0">
+                <a:solidFill>
+                  <a:srgbClr val="64748B"/>
+                </a:solidFill>
+                <a:latin typeface="Arial" pitchFamily="34" charset="0"/>
+                <a:ea typeface="Arial" pitchFamily="34" charset="-122"/>
+                <a:cs typeface="Arial" pitchFamily="34" charset="-120"/>
+              </a:rPr>
+              <a:t>M9 · Fechamento</a:t>
+            </a:r>
+            <a:endParaRPr lang="en-US" sz="900" dirty="0"/>
+          </a:p>
+        </p:txBody>
+      </p:sp>
+      <p:sp>
+        <p:nvSpPr>
+          <p:cNvPr id="6" name="Shape 3"/>
+          <p:cNvSpPr/>
+          <p:nvPr/>
+        </p:nvSpPr>
+        <p:spPr>
+          <a:xfrm>
+            <a:off x="548640" y="384048"/>
+            <a:ext cx="82296" cy="658368"/>
+          </a:xfrm>
+          <a:prstGeom prst="rect">
+            <a:avLst/>
+          </a:prstGeom>
+          <a:solidFill>
+            <a:srgbClr val="F7A23B"/>
+          </a:solidFill>
+          <a:ln/>
+        </p:spPr>
+      </p:sp>
+      <p:sp>
+        <p:nvSpPr>
+          <p:cNvPr id="7" name="Text 4"/>
+          <p:cNvSpPr/>
+          <p:nvPr/>
+        </p:nvSpPr>
+        <p:spPr>
+          <a:xfrm>
+            <a:off x="777240" y="292608"/>
+            <a:ext cx="10972800" cy="274320"/>
+          </a:xfrm>
+          <a:prstGeom prst="rect">
+            <a:avLst/>
+          </a:prstGeom>
+          <a:noFill/>
+          <a:ln/>
+        </p:spPr>
+        <p:txBody>
+          <a:bodyPr wrap="square" rtlCol="0" anchor="ctr"/>
+          <a:lstStyle/>
+          <a:p>
+            <a:pPr indent="0" marL="0">
+              <a:buNone/>
+            </a:pPr>
+            <a:r>
+              <a:rPr lang="en-US" sz="1000" b="1" spc="100" kern="0" dirty="0">
+                <a:solidFill>
+                  <a:srgbClr val="F7A23B"/>
+                </a:solidFill>
+                <a:latin typeface="Arial" pitchFamily="34" charset="0"/>
+                <a:ea typeface="Arial" pitchFamily="34" charset="-122"/>
+                <a:cs typeface="Arial" pitchFamily="34" charset="-120"/>
+              </a:rPr>
+              <a:t>FECHAMENTO DO MÓDULO</a:t>
+            </a:r>
+            <a:endParaRPr lang="en-US" sz="1000" dirty="0"/>
+          </a:p>
+        </p:txBody>
+      </p:sp>
+      <p:sp>
+        <p:nvSpPr>
+          <p:cNvPr id="8" name="Text 5"/>
+          <p:cNvSpPr/>
+          <p:nvPr/>
+        </p:nvSpPr>
+        <p:spPr>
+          <a:xfrm>
+            <a:off x="777240" y="530352"/>
+            <a:ext cx="10881360" cy="566928"/>
+          </a:xfrm>
+          <a:prstGeom prst="rect">
+            <a:avLst/>
+          </a:prstGeom>
+          <a:noFill/>
+          <a:ln/>
+        </p:spPr>
+        <p:txBody>
+          <a:bodyPr wrap="square" rtlCol="0" anchor="ctr">
+            <a:normAutofit/>
+          </a:bodyPr>
+          <a:lstStyle/>
+          <a:p>
+            <a:pPr indent="0" marL="0">
+              <a:buNone/>
+            </a:pPr>
+            <a:r>
+              <a:rPr lang="en-US" sz="2600" b="1" dirty="0">
+                <a:solidFill>
+                  <a:srgbClr val="1B3A6B"/>
+                </a:solidFill>
+                <a:latin typeface="Arial" pitchFamily="34" charset="0"/>
+                <a:ea typeface="Arial" pitchFamily="34" charset="-122"/>
+                <a:cs typeface="Arial" pitchFamily="34" charset="-120"/>
+              </a:rPr>
+              <a:t>Pratique e entregue</a:t>
+            </a:r>
+            <a:endParaRPr lang="en-US" sz="2600" dirty="0"/>
+          </a:p>
+        </p:txBody>
+      </p:sp>
+      <p:sp>
+        <p:nvSpPr>
+          <p:cNvPr id="9" name="Text 6"/>
+          <p:cNvSpPr/>
+          <p:nvPr/>
+        </p:nvSpPr>
+        <p:spPr>
+          <a:xfrm>
+            <a:off x="548640" y="1325880"/>
+            <a:ext cx="5394960" cy="411480"/>
+          </a:xfrm>
+          <a:prstGeom prst="rect">
+            <a:avLst/>
+          </a:prstGeom>
+          <a:noFill/>
+          <a:ln/>
+        </p:spPr>
+        <p:txBody>
+          <a:bodyPr wrap="square" rtlCol="0" anchor="ctr"/>
+          <a:lstStyle/>
+          <a:p>
+            <a:pPr indent="0" marL="0">
+              <a:buNone/>
+            </a:pPr>
+            <a:r>
+              <a:rPr lang="en-US" sz="1600" b="1" dirty="0">
+                <a:solidFill>
+                  <a:srgbClr val="1B3A6B"/>
+                </a:solidFill>
+                <a:latin typeface="Arial" pitchFamily="34" charset="0"/>
+                <a:ea typeface="Arial" pitchFamily="34" charset="-122"/>
+                <a:cs typeface="Arial" pitchFamily="34" charset="-120"/>
+              </a:rPr>
+              <a:t>Exercícios</a:t>
+            </a:r>
+            <a:endParaRPr lang="en-US" sz="1600" dirty="0"/>
+          </a:p>
+        </p:txBody>
+      </p:sp>
+      <p:sp>
+        <p:nvSpPr>
+          <p:cNvPr id="10" name="Text 7"/>
+          <p:cNvSpPr/>
+          <p:nvPr/>
+        </p:nvSpPr>
+        <p:spPr>
+          <a:xfrm>
+            <a:off x="548640" y="1783080"/>
+            <a:ext cx="5394960" cy="4480560"/>
+          </a:xfrm>
+          <a:prstGeom prst="rect">
+            <a:avLst/>
+          </a:prstGeom>
+          <a:noFill/>
+          <a:ln/>
+        </p:spPr>
+        <p:txBody>
+          <a:bodyPr wrap="square" rtlCol="0" anchor="t">
+            <a:normAutofit/>
+          </a:bodyPr>
+          <a:lstStyle/>
+          <a:p>
+            <a:pPr indent="0" marL="0">
+              <a:spcAft>
+                <a:spcPts val="800"/>
+              </a:spcAft>
+              <a:buNone/>
+            </a:pPr>
+            <a:r>
+              <a:rPr lang="en-US" sz="1600" dirty="0">
+                <a:solidFill>
+                  <a:srgbClr val="1F2937"/>
+                </a:solidFill>
+                <a:latin typeface="Arial" pitchFamily="34" charset="0"/>
+                <a:ea typeface="Arial" pitchFamily="34" charset="-122"/>
+                <a:cs typeface="Arial" pitchFamily="34" charset="-120"/>
+              </a:rPr>
+              <a:t>1. Monte a agenda do operador para a primeira semana do mês (faturas chegando).</a:t>
+            </a:r>
+            <a:endParaRPr lang="en-US" sz="1600" dirty="0"/>
+          </a:p>
+          <a:p>
+            <a:pPr indent="0" marL="0">
+              <a:spcAft>
+                <a:spcPts val="800"/>
+              </a:spcAft>
+              <a:buNone/>
+            </a:pPr>
+            <a:r>
+              <a:rPr lang="en-US" sz="1600" dirty="0">
+                <a:solidFill>
+                  <a:srgbClr val="1F2937"/>
+                </a:solidFill>
+                <a:latin typeface="Arial" pitchFamily="34" charset="0"/>
+                <a:ea typeface="Arial" pitchFamily="34" charset="-122"/>
+                <a:cs typeface="Arial" pitchFamily="34" charset="-120"/>
+              </a:rPr>
+              <a:t>2. O sino mostra 12 alertas. Em que ordem você trata?</a:t>
+            </a:r>
+            <a:endParaRPr lang="en-US" sz="1600" dirty="0"/>
+          </a:p>
+          <a:p>
+            <a:pPr indent="0" marL="0">
+              <a:spcAft>
+                <a:spcPts val="800"/>
+              </a:spcAft>
+              <a:buNone/>
+            </a:pPr>
+            <a:r>
+              <a:rPr lang="en-US" sz="1600" dirty="0">
+                <a:solidFill>
+                  <a:srgbClr val="1F2937"/>
+                </a:solidFill>
+                <a:latin typeface="Arial" pitchFamily="34" charset="0"/>
+                <a:ea typeface="Arial" pitchFamily="34" charset="-122"/>
+                <a:cs typeface="Arial" pitchFamily="34" charset="-120"/>
+              </a:rPr>
+              <a:t>3. Quantos chamados por mês você espera com 500 clientes, e como reduzir?</a:t>
+            </a:r>
+            <a:endParaRPr lang="en-US" sz="1600" dirty="0"/>
+          </a:p>
+        </p:txBody>
+      </p:sp>
+      <p:sp>
+        <p:nvSpPr>
+          <p:cNvPr id="11" name="Shape 8"/>
+          <p:cNvSpPr/>
+          <p:nvPr/>
+        </p:nvSpPr>
+        <p:spPr>
+          <a:xfrm>
+            <a:off x="6172200" y="1325880"/>
+            <a:ext cx="5468112" cy="4937760"/>
+          </a:xfrm>
+          <a:prstGeom prst="roundRect">
+            <a:avLst>
+              <a:gd name="adj" fmla="val 1852"/>
+            </a:avLst>
+          </a:prstGeom>
+          <a:solidFill>
+            <a:srgbClr val="1B3A6B"/>
+          </a:solidFill>
+          <a:ln/>
+        </p:spPr>
+      </p:sp>
+      <p:sp>
+        <p:nvSpPr>
+          <p:cNvPr id="12" name="Text 9"/>
+          <p:cNvSpPr/>
+          <p:nvPr/>
+        </p:nvSpPr>
+        <p:spPr>
+          <a:xfrm>
+            <a:off x="6492240" y="1554480"/>
+            <a:ext cx="4828032" cy="4480560"/>
+          </a:xfrm>
+          <a:prstGeom prst="rect">
+            <a:avLst/>
+          </a:prstGeom>
+          <a:noFill/>
+          <a:ln/>
+        </p:spPr>
+        <p:txBody>
+          <a:bodyPr wrap="square" rtlCol="0" anchor="t">
+            <a:normAutofit/>
+          </a:bodyPr>
+          <a:lstStyle/>
+          <a:p>
+            <a:pPr indent="0" marL="0">
+              <a:buNone/>
+            </a:pPr>
+            <a:r>
+              <a:rPr lang="en-US" sz="1300" b="1" spc="100" kern="0" dirty="0">
+                <a:solidFill>
+                  <a:srgbClr val="F7A23B"/>
+                </a:solidFill>
+                <a:latin typeface="Arial" pitchFamily="34" charset="0"/>
+                <a:ea typeface="Arial" pitchFamily="34" charset="-122"/>
+                <a:cs typeface="Arial" pitchFamily="34" charset="-120"/>
+              </a:rPr>
+              <a:t>ENTREGÁVEL DO MÓDULO
+</a:t>
+            </a:r>
+            <a:pPr indent="0" marL="0">
+              <a:buNone/>
+            </a:pPr>
+            <a:r>
+              <a:rPr lang="en-US" sz="1600" dirty="0">
+                <a:solidFill>
+                  <a:srgbClr val="FFFFFF"/>
+                </a:solidFill>
+                <a:latin typeface="Arial" pitchFamily="34" charset="0"/>
+                <a:ea typeface="Arial" pitchFamily="34" charset="-122"/>
+                <a:cs typeface="Arial" pitchFamily="34" charset="-120"/>
+              </a:rPr>
+              <a:t>SOP da minha operação: rotina diária, semanal e mensal em uma página, com responsável e horário de cada tarefa; e o mês 2 fechado no laboratório (geração registrada, faturas aprovadas, cobranças abertas e emitidas, alertas zerados ou justificados, relatório para o produtor).</a:t>
+            </a:r>
+            <a:endParaRPr lang="en-US" sz="1300" dirty="0"/>
+          </a:p>
+        </p:txBody>
+      </p:sp>
+      <p:sp>
+        <p:nvSpPr>
+          <p:cNvPr id="25" name="Slide Number Placeholder 0"/>
+          <p:cNvSpPr>
+            <a:spLocks noGrp="1"/>
+          </p:cNvSpPr>
+          <p:nvPr>
+            <p:ph type="sldNum" sz="quarter" idx="4294967295"/>
+          </p:nvPr>
+        </p:nvSpPr>
+        <p:spPr>
+          <a:xfrm>
+            <a:off x="11292840" y="6556248"/>
+            <a:ext cx="548640" cy="256032"/>
+          </a:xfrm>
+          <a:prstGeom prst="rect">
+            <a:avLst/>
+          </a:prstGeom>
+          <a:extLst>
+            <a:ext uri="{C572A759-6A51-4108-AA02-DFA0A04FC94B}">
+              <ma14:wrappingTextBoxFlag xmlns:ma14="http://schemas.microsoft.com/office/mac/drawingml/2011/main" val="0"/>
+            </a:ext>
+          </a:extLst>
+        </p:spPr>
+        <p:txBody>
+          <a:bodyPr/>
+          <a:lstStyle>
+            <a:lvl1pPr>
+              <a:defRPr sz="900">
+                <a:solidFill>
+                  <a:srgbClr val="1B3A6B"/>
+                </a:solidFill>
+                <a:latin typeface="Arial"/>
+                <a:ea typeface="Arial"/>
+                <a:cs typeface="Arial"/>
+              </a:defRPr>
+            </a:lvl1pPr>
+          </a:lstStyle>
+          <a:p>
+            <a:pPr algn="r"/>
+            <a:fld id="{F7021451-1387-4CA6-816F-3879F97B5CBC}" type="slidenum">
+              <a:rPr b="1" lang="en-US"/>
+              <a:t>30</a:t>
             </a:fld>
             <a:endParaRPr lang="en-US"/>
           </a:p>
@@ -15676,11 +21172,11 @@
         <p:spPr>
           <a:xfrm>
             <a:off x="548640" y="1325880"/>
-            <a:ext cx="3544824" cy="2331720"/>
+            <a:ext cx="3544824" cy="1874520"/>
           </a:xfrm>
           <a:prstGeom prst="roundRect">
             <a:avLst>
-              <a:gd name="adj" fmla="val 3137"/>
+              <a:gd name="adj" fmla="val 3902"/>
             </a:avLst>
           </a:prstGeom>
           <a:solidFill>
@@ -15769,7 +21265,7 @@
         <p:spPr>
           <a:xfrm>
             <a:off x="1325880" y="1435608"/>
-            <a:ext cx="2630424" cy="2112264"/>
+            <a:ext cx="2630424" cy="1655064"/>
           </a:xfrm>
           <a:prstGeom prst="rect">
             <a:avLst/>
@@ -15810,11 +21306,11 @@
         <p:spPr>
           <a:xfrm>
             <a:off x="4322064" y="1325880"/>
-            <a:ext cx="3544824" cy="2331720"/>
+            <a:ext cx="3544824" cy="1874520"/>
           </a:xfrm>
           <a:prstGeom prst="roundRect">
             <a:avLst>
-              <a:gd name="adj" fmla="val 3137"/>
+              <a:gd name="adj" fmla="val 3902"/>
             </a:avLst>
           </a:prstGeom>
           <a:solidFill>
@@ -15903,7 +21399,7 @@
         <p:spPr>
           <a:xfrm>
             <a:off x="5099304" y="1435608"/>
-            <a:ext cx="2630424" cy="2112264"/>
+            <a:ext cx="2630424" cy="1655064"/>
           </a:xfrm>
           <a:prstGeom prst="rect">
             <a:avLst/>
@@ -15944,11 +21440,11 @@
         <p:spPr>
           <a:xfrm>
             <a:off x="8095488" y="1325880"/>
-            <a:ext cx="3544824" cy="2331720"/>
+            <a:ext cx="3544824" cy="1874520"/>
           </a:xfrm>
           <a:prstGeom prst="roundRect">
             <a:avLst>
-              <a:gd name="adj" fmla="val 3137"/>
+              <a:gd name="adj" fmla="val 3902"/>
             </a:avLst>
           </a:prstGeom>
           <a:solidFill>
@@ -16037,7 +21533,7 @@
         <p:spPr>
           <a:xfrm>
             <a:off x="8872728" y="1435608"/>
-            <a:ext cx="2630424" cy="2112264"/>
+            <a:ext cx="2630424" cy="1655064"/>
           </a:xfrm>
           <a:prstGeom prst="rect">
             <a:avLst/>
@@ -16077,12 +21573,12 @@
         </p:nvSpPr>
         <p:spPr>
           <a:xfrm>
-            <a:off x="548640" y="3886200"/>
-            <a:ext cx="3544824" cy="2331720"/>
+            <a:off x="548640" y="3429000"/>
+            <a:ext cx="3544824" cy="1874520"/>
           </a:xfrm>
           <a:prstGeom prst="roundRect">
             <a:avLst>
-              <a:gd name="adj" fmla="val 3137"/>
+              <a:gd name="adj" fmla="val 3902"/>
             </a:avLst>
           </a:prstGeom>
           <a:solidFill>
@@ -16111,7 +21607,7 @@
         </p:nvSpPr>
         <p:spPr>
           <a:xfrm>
-            <a:off x="731520" y="4069080"/>
+            <a:off x="731520" y="3611880"/>
             <a:ext cx="457200" cy="457200"/>
           </a:xfrm>
           <a:prstGeom prst="ellipse">
@@ -16131,7 +21627,7 @@
         </p:nvSpPr>
         <p:spPr>
           <a:xfrm>
-            <a:off x="731520" y="4069080"/>
+            <a:off x="731520" y="3611880"/>
             <a:ext cx="457200" cy="457200"/>
           </a:xfrm>
           <a:prstGeom prst="rect">
@@ -16170,8 +21666,8 @@
         </p:nvSpPr>
         <p:spPr>
           <a:xfrm>
-            <a:off x="1325880" y="3995928"/>
-            <a:ext cx="2630424" cy="2112264"/>
+            <a:off x="1325880" y="3538728"/>
+            <a:ext cx="2630424" cy="1655064"/>
           </a:xfrm>
           <a:prstGeom prst="rect">
             <a:avLst/>
@@ -16211,12 +21707,12 @@
         </p:nvSpPr>
         <p:spPr>
           <a:xfrm>
-            <a:off x="4322064" y="3886200"/>
-            <a:ext cx="3544824" cy="2331720"/>
+            <a:off x="4322064" y="3429000"/>
+            <a:ext cx="3544824" cy="1874520"/>
           </a:xfrm>
           <a:prstGeom prst="roundRect">
             <a:avLst>
-              <a:gd name="adj" fmla="val 3137"/>
+              <a:gd name="adj" fmla="val 3902"/>
             </a:avLst>
           </a:prstGeom>
           <a:solidFill>
@@ -16245,7 +21741,7 @@
         </p:nvSpPr>
         <p:spPr>
           <a:xfrm>
-            <a:off x="4504944" y="4069080"/>
+            <a:off x="4504944" y="3611880"/>
             <a:ext cx="457200" cy="457200"/>
           </a:xfrm>
           <a:prstGeom prst="ellipse">
@@ -16265,7 +21761,7 @@
         </p:nvSpPr>
         <p:spPr>
           <a:xfrm>
-            <a:off x="4504944" y="4069080"/>
+            <a:off x="4504944" y="3611880"/>
             <a:ext cx="457200" cy="457200"/>
           </a:xfrm>
           <a:prstGeom prst="rect">
@@ -16304,8 +21800,8 @@
         </p:nvSpPr>
         <p:spPr>
           <a:xfrm>
-            <a:off x="5099304" y="3995928"/>
-            <a:ext cx="2630424" cy="2112264"/>
+            <a:off x="5099304" y="3538728"/>
+            <a:ext cx="2630424" cy="1655064"/>
           </a:xfrm>
           <a:prstGeom prst="rect">
             <a:avLst/>
@@ -16345,12 +21841,12 @@
         </p:nvSpPr>
         <p:spPr>
           <a:xfrm>
-            <a:off x="8095488" y="3886200"/>
-            <a:ext cx="3544824" cy="2331720"/>
+            <a:off x="8095488" y="3429000"/>
+            <a:ext cx="3544824" cy="1874520"/>
           </a:xfrm>
           <a:prstGeom prst="roundRect">
             <a:avLst>
-              <a:gd name="adj" fmla="val 3137"/>
+              <a:gd name="adj" fmla="val 3902"/>
             </a:avLst>
           </a:prstGeom>
           <a:solidFill>
@@ -16379,7 +21875,7 @@
         </p:nvSpPr>
         <p:spPr>
           <a:xfrm>
-            <a:off x="8278368" y="4069080"/>
+            <a:off x="8278368" y="3611880"/>
             <a:ext cx="457200" cy="457200"/>
           </a:xfrm>
           <a:prstGeom prst="ellipse">
@@ -16399,7 +21895,7 @@
         </p:nvSpPr>
         <p:spPr>
           <a:xfrm>
-            <a:off x="8278368" y="4069080"/>
+            <a:off x="8278368" y="3611880"/>
             <a:ext cx="457200" cy="457200"/>
           </a:xfrm>
           <a:prstGeom prst="rect">
@@ -16438,8 +21934,8 @@
         </p:nvSpPr>
         <p:spPr>
           <a:xfrm>
-            <a:off x="8872728" y="3995928"/>
-            <a:ext cx="2630424" cy="2112264"/>
+            <a:off x="8872728" y="3538728"/>
+            <a:ext cx="2630424" cy="1655064"/>
           </a:xfrm>
           <a:prstGeom prst="rect">
             <a:avLst/>
@@ -16468,6 +21964,92 @@
               <a:t>Chamados de suporte</a:t>
             </a:r>
             <a:endParaRPr lang="en-US" sz="1800" dirty="0"/>
+          </a:p>
+        </p:txBody>
+      </p:sp>
+      <p:sp>
+        <p:nvSpPr>
+          <p:cNvPr id="33" name="Shape 30"/>
+          <p:cNvSpPr/>
+          <p:nvPr/>
+        </p:nvSpPr>
+        <p:spPr>
+          <a:xfrm>
+            <a:off x="548640" y="5413248"/>
+            <a:ext cx="11091672" cy="868680"/>
+          </a:xfrm>
+          <a:prstGeom prst="roundRect">
+            <a:avLst>
+              <a:gd name="adj" fmla="val 8421"/>
+            </a:avLst>
+          </a:prstGeom>
+          <a:solidFill>
+            <a:srgbClr val="EEF3FA"/>
+          </a:solidFill>
+          <a:ln w="6350">
+            <a:solidFill>
+              <a:srgbClr val="D8E0EC"/>
+            </a:solidFill>
+            <a:prstDash val="solid"/>
+          </a:ln>
+        </p:spPr>
+      </p:sp>
+      <p:sp>
+        <p:nvSpPr>
+          <p:cNvPr id="34" name="Shape 31"/>
+          <p:cNvSpPr/>
+          <p:nvPr/>
+        </p:nvSpPr>
+        <p:spPr>
+          <a:xfrm>
+            <a:off x="548640" y="5413248"/>
+            <a:ext cx="91440" cy="868680"/>
+          </a:xfrm>
+          <a:prstGeom prst="rect">
+            <a:avLst/>
+          </a:prstGeom>
+          <a:solidFill>
+            <a:srgbClr val="F7A23B"/>
+          </a:solidFill>
+          <a:ln/>
+        </p:spPr>
+      </p:sp>
+      <p:sp>
+        <p:nvSpPr>
+          <p:cNvPr id="35" name="Text 32"/>
+          <p:cNvSpPr/>
+          <p:nvPr/>
+        </p:nvSpPr>
+        <p:spPr>
+          <a:xfrm>
+            <a:off x="777240" y="5458968"/>
+            <a:ext cx="10744200" cy="777240"/>
+          </a:xfrm>
+          <a:prstGeom prst="rect">
+            <a:avLst/>
+          </a:prstGeom>
+          <a:noFill/>
+          <a:ln/>
+        </p:spPr>
+        <p:txBody>
+          <a:bodyPr wrap="square" rtlCol="0" anchor="ctr"/>
+          <a:lstStyle/>
+          <a:p>
+            <a:pPr indent="0" marL="0">
+              <a:buNone/>
+            </a:pPr>
+            <a:r>
+              <a:rPr lang="en-US" sz="1500" dirty="0">
+                <a:solidFill>
+                  <a:srgbClr val="1F2937"/>
+                </a:solidFill>
+                <a:latin typeface="Arial" pitchFamily="34" charset="0"/>
+                <a:ea typeface="Arial" pitchFamily="34" charset="-122"/>
+                <a:cs typeface="Arial" pitchFamily="34" charset="-120"/>
+              </a:rPr>
+              <a:t>A rotina diária começa sempre no mesmo horário, pelos alertas críticos.</a:t>
+            </a:r>
+            <a:endParaRPr lang="en-US" sz="1500" dirty="0"/>
           </a:p>
         </p:txBody>
       </p:sp>
@@ -16787,11 +22369,11 @@
         <p:spPr>
           <a:xfrm>
             <a:off x="548640" y="1325880"/>
-            <a:ext cx="3544824" cy="2331720"/>
+            <a:ext cx="3544824" cy="1874520"/>
           </a:xfrm>
           <a:prstGeom prst="roundRect">
             <a:avLst>
-              <a:gd name="adj" fmla="val 3137"/>
+              <a:gd name="adj" fmla="val 3902"/>
             </a:avLst>
           </a:prstGeom>
           <a:solidFill>
@@ -16880,7 +22462,7 @@
         <p:spPr>
           <a:xfrm>
             <a:off x="1325880" y="1435608"/>
-            <a:ext cx="2630424" cy="2112264"/>
+            <a:ext cx="2630424" cy="1655064"/>
           </a:xfrm>
           <a:prstGeom prst="rect">
             <a:avLst/>
@@ -16921,11 +22503,11 @@
         <p:spPr>
           <a:xfrm>
             <a:off x="4322064" y="1325880"/>
-            <a:ext cx="3544824" cy="2331720"/>
+            <a:ext cx="3544824" cy="1874520"/>
           </a:xfrm>
           <a:prstGeom prst="roundRect">
             <a:avLst>
-              <a:gd name="adj" fmla="val 3137"/>
+              <a:gd name="adj" fmla="val 3902"/>
             </a:avLst>
           </a:prstGeom>
           <a:solidFill>
@@ -17014,7 +22596,7 @@
         <p:spPr>
           <a:xfrm>
             <a:off x="5099304" y="1435608"/>
-            <a:ext cx="2630424" cy="2112264"/>
+            <a:ext cx="2630424" cy="1655064"/>
           </a:xfrm>
           <a:prstGeom prst="rect">
             <a:avLst/>
@@ -17055,11 +22637,11 @@
         <p:spPr>
           <a:xfrm>
             <a:off x="8095488" y="1325880"/>
-            <a:ext cx="3544824" cy="2331720"/>
+            <a:ext cx="3544824" cy="1874520"/>
           </a:xfrm>
           <a:prstGeom prst="roundRect">
             <a:avLst>
-              <a:gd name="adj" fmla="val 3137"/>
+              <a:gd name="adj" fmla="val 3902"/>
             </a:avLst>
           </a:prstGeom>
           <a:solidFill>
@@ -17148,7 +22730,7 @@
         <p:spPr>
           <a:xfrm>
             <a:off x="8872728" y="1435608"/>
-            <a:ext cx="2630424" cy="2112264"/>
+            <a:ext cx="2630424" cy="1655064"/>
           </a:xfrm>
           <a:prstGeom prst="rect">
             <a:avLst/>
@@ -17188,12 +22770,12 @@
         </p:nvSpPr>
         <p:spPr>
           <a:xfrm>
-            <a:off x="548640" y="3886200"/>
-            <a:ext cx="3544824" cy="2331720"/>
+            <a:off x="548640" y="3429000"/>
+            <a:ext cx="3544824" cy="1874520"/>
           </a:xfrm>
           <a:prstGeom prst="roundRect">
             <a:avLst>
-              <a:gd name="adj" fmla="val 3137"/>
+              <a:gd name="adj" fmla="val 3902"/>
             </a:avLst>
           </a:prstGeom>
           <a:solidFill>
@@ -17222,7 +22804,7 @@
         </p:nvSpPr>
         <p:spPr>
           <a:xfrm>
-            <a:off x="731520" y="4069080"/>
+            <a:off x="731520" y="3611880"/>
             <a:ext cx="457200" cy="457200"/>
           </a:xfrm>
           <a:prstGeom prst="ellipse">
@@ -17242,7 +22824,7 @@
         </p:nvSpPr>
         <p:spPr>
           <a:xfrm>
-            <a:off x="731520" y="4069080"/>
+            <a:off x="731520" y="3611880"/>
             <a:ext cx="457200" cy="457200"/>
           </a:xfrm>
           <a:prstGeom prst="rect">
@@ -17281,8 +22863,8 @@
         </p:nvSpPr>
         <p:spPr>
           <a:xfrm>
-            <a:off x="1325880" y="3995928"/>
-            <a:ext cx="2630424" cy="2112264"/>
+            <a:off x="1325880" y="3538728"/>
+            <a:ext cx="2630424" cy="1655064"/>
           </a:xfrm>
           <a:prstGeom prst="rect">
             <a:avLst/>
@@ -17322,12 +22904,12 @@
         </p:nvSpPr>
         <p:spPr>
           <a:xfrm>
-            <a:off x="4322064" y="3886200"/>
-            <a:ext cx="3544824" cy="2331720"/>
+            <a:off x="4322064" y="3429000"/>
+            <a:ext cx="3544824" cy="1874520"/>
           </a:xfrm>
           <a:prstGeom prst="roundRect">
             <a:avLst>
-              <a:gd name="adj" fmla="val 3137"/>
+              <a:gd name="adj" fmla="val 3902"/>
             </a:avLst>
           </a:prstGeom>
           <a:solidFill>
@@ -17356,7 +22938,7 @@
         </p:nvSpPr>
         <p:spPr>
           <a:xfrm>
-            <a:off x="4504944" y="4069080"/>
+            <a:off x="4504944" y="3611880"/>
             <a:ext cx="457200" cy="457200"/>
           </a:xfrm>
           <a:prstGeom prst="ellipse">
@@ -17376,7 +22958,7 @@
         </p:nvSpPr>
         <p:spPr>
           <a:xfrm>
-            <a:off x="4504944" y="4069080"/>
+            <a:off x="4504944" y="3611880"/>
             <a:ext cx="457200" cy="457200"/>
           </a:xfrm>
           <a:prstGeom prst="rect">
@@ -17415,8 +22997,8 @@
         </p:nvSpPr>
         <p:spPr>
           <a:xfrm>
-            <a:off x="5099304" y="3995928"/>
-            <a:ext cx="2630424" cy="2112264"/>
+            <a:off x="5099304" y="3538728"/>
+            <a:ext cx="2630424" cy="1655064"/>
           </a:xfrm>
           <a:prstGeom prst="rect">
             <a:avLst/>
@@ -17445,6 +23027,92 @@
               <a:t>Reunião de 30 min com o time</a:t>
             </a:r>
             <a:endParaRPr lang="en-US" sz="1800" dirty="0"/>
+          </a:p>
+        </p:txBody>
+      </p:sp>
+      <p:sp>
+        <p:nvSpPr>
+          <p:cNvPr id="29" name="Shape 26"/>
+          <p:cNvSpPr/>
+          <p:nvPr/>
+        </p:nvSpPr>
+        <p:spPr>
+          <a:xfrm>
+            <a:off x="548640" y="5413248"/>
+            <a:ext cx="11091672" cy="868680"/>
+          </a:xfrm>
+          <a:prstGeom prst="roundRect">
+            <a:avLst>
+              <a:gd name="adj" fmla="val 8421"/>
+            </a:avLst>
+          </a:prstGeom>
+          <a:solidFill>
+            <a:srgbClr val="EEF3FA"/>
+          </a:solidFill>
+          <a:ln w="6350">
+            <a:solidFill>
+              <a:srgbClr val="D8E0EC"/>
+            </a:solidFill>
+            <a:prstDash val="solid"/>
+          </a:ln>
+        </p:spPr>
+      </p:sp>
+      <p:sp>
+        <p:nvSpPr>
+          <p:cNvPr id="30" name="Shape 27"/>
+          <p:cNvSpPr/>
+          <p:nvPr/>
+        </p:nvSpPr>
+        <p:spPr>
+          <a:xfrm>
+            <a:off x="548640" y="5413248"/>
+            <a:ext cx="91440" cy="868680"/>
+          </a:xfrm>
+          <a:prstGeom prst="rect">
+            <a:avLst/>
+          </a:prstGeom>
+          <a:solidFill>
+            <a:srgbClr val="F7A23B"/>
+          </a:solidFill>
+          <a:ln/>
+        </p:spPr>
+      </p:sp>
+      <p:sp>
+        <p:nvSpPr>
+          <p:cNvPr id="31" name="Text 28"/>
+          <p:cNvSpPr/>
+          <p:nvPr/>
+        </p:nvSpPr>
+        <p:spPr>
+          <a:xfrm>
+            <a:off x="777240" y="5458968"/>
+            <a:ext cx="10744200" cy="777240"/>
+          </a:xfrm>
+          <a:prstGeom prst="rect">
+            <a:avLst/>
+          </a:prstGeom>
+          <a:noFill/>
+          <a:ln/>
+        </p:spPr>
+        <p:txBody>
+          <a:bodyPr wrap="square" rtlCol="0" anchor="ctr"/>
+          <a:lstStyle/>
+          <a:p>
+            <a:pPr indent="0" marL="0">
+              <a:buNone/>
+            </a:pPr>
+            <a:r>
+              <a:rPr lang="en-US" sz="1500" dirty="0">
+                <a:solidFill>
+                  <a:srgbClr val="1F2937"/>
+                </a:solidFill>
+                <a:latin typeface="Arial" pitchFamily="34" charset="0"/>
+                <a:ea typeface="Arial" pitchFamily="34" charset="-122"/>
+                <a:cs typeface="Arial" pitchFamily="34" charset="-120"/>
+              </a:rPr>
+              <a:t>Uma vez por semana, olhe o médio prazo com o time, em trinta minutos.</a:t>
+            </a:r>
+            <a:endParaRPr lang="en-US" sz="1500" dirty="0"/>
           </a:p>
         </p:txBody>
       </p:sp>
@@ -17764,11 +23432,11 @@
         <p:spPr>
           <a:xfrm>
             <a:off x="548640" y="1325880"/>
-            <a:ext cx="3544824" cy="2331720"/>
+            <a:ext cx="3544824" cy="1874520"/>
           </a:xfrm>
           <a:prstGeom prst="roundRect">
             <a:avLst>
-              <a:gd name="adj" fmla="val 3137"/>
+              <a:gd name="adj" fmla="val 3902"/>
             </a:avLst>
           </a:prstGeom>
           <a:solidFill>
@@ -17857,7 +23525,7 @@
         <p:spPr>
           <a:xfrm>
             <a:off x="1325880" y="1435608"/>
-            <a:ext cx="2630424" cy="2112264"/>
+            <a:ext cx="2630424" cy="1655064"/>
           </a:xfrm>
           <a:prstGeom prst="rect">
             <a:avLst/>
@@ -17898,11 +23566,11 @@
         <p:spPr>
           <a:xfrm>
             <a:off x="4322064" y="1325880"/>
-            <a:ext cx="3544824" cy="2331720"/>
+            <a:ext cx="3544824" cy="1874520"/>
           </a:xfrm>
           <a:prstGeom prst="roundRect">
             <a:avLst>
-              <a:gd name="adj" fmla="val 3137"/>
+              <a:gd name="adj" fmla="val 3902"/>
             </a:avLst>
           </a:prstGeom>
           <a:solidFill>
@@ -17991,7 +23659,7 @@
         <p:spPr>
           <a:xfrm>
             <a:off x="5099304" y="1435608"/>
-            <a:ext cx="2630424" cy="2112264"/>
+            <a:ext cx="2630424" cy="1655064"/>
           </a:xfrm>
           <a:prstGeom prst="rect">
             <a:avLst/>
@@ -18032,11 +23700,11 @@
         <p:spPr>
           <a:xfrm>
             <a:off x="8095488" y="1325880"/>
-            <a:ext cx="3544824" cy="2331720"/>
+            <a:ext cx="3544824" cy="1874520"/>
           </a:xfrm>
           <a:prstGeom prst="roundRect">
             <a:avLst>
-              <a:gd name="adj" fmla="val 3137"/>
+              <a:gd name="adj" fmla="val 3902"/>
             </a:avLst>
           </a:prstGeom>
           <a:solidFill>
@@ -18125,7 +23793,7 @@
         <p:spPr>
           <a:xfrm>
             <a:off x="8872728" y="1435608"/>
-            <a:ext cx="2630424" cy="2112264"/>
+            <a:ext cx="2630424" cy="1655064"/>
           </a:xfrm>
           <a:prstGeom prst="rect">
             <a:avLst/>
@@ -18165,12 +23833,12 @@
         </p:nvSpPr>
         <p:spPr>
           <a:xfrm>
-            <a:off x="548640" y="3886200"/>
-            <a:ext cx="3544824" cy="2331720"/>
+            <a:off x="548640" y="3429000"/>
+            <a:ext cx="3544824" cy="1874520"/>
           </a:xfrm>
           <a:prstGeom prst="roundRect">
             <a:avLst>
-              <a:gd name="adj" fmla="val 3137"/>
+              <a:gd name="adj" fmla="val 3902"/>
             </a:avLst>
           </a:prstGeom>
           <a:solidFill>
@@ -18199,7 +23867,7 @@
         </p:nvSpPr>
         <p:spPr>
           <a:xfrm>
-            <a:off x="731520" y="4069080"/>
+            <a:off x="731520" y="3611880"/>
             <a:ext cx="457200" cy="457200"/>
           </a:xfrm>
           <a:prstGeom prst="ellipse">
@@ -18219,7 +23887,7 @@
         </p:nvSpPr>
         <p:spPr>
           <a:xfrm>
-            <a:off x="731520" y="4069080"/>
+            <a:off x="731520" y="3611880"/>
             <a:ext cx="457200" cy="457200"/>
           </a:xfrm>
           <a:prstGeom prst="rect">
@@ -18258,8 +23926,8 @@
         </p:nvSpPr>
         <p:spPr>
           <a:xfrm>
-            <a:off x="1325880" y="3995928"/>
-            <a:ext cx="2630424" cy="2112264"/>
+            <a:off x="1325880" y="3538728"/>
+            <a:ext cx="2630424" cy="1655064"/>
           </a:xfrm>
           <a:prstGeom prst="rect">
             <a:avLst/>
@@ -18299,12 +23967,12 @@
         </p:nvSpPr>
         <p:spPr>
           <a:xfrm>
-            <a:off x="4322064" y="3886200"/>
-            <a:ext cx="3544824" cy="2331720"/>
+            <a:off x="4322064" y="3429000"/>
+            <a:ext cx="3544824" cy="1874520"/>
           </a:xfrm>
           <a:prstGeom prst="roundRect">
             <a:avLst>
-              <a:gd name="adj" fmla="val 3137"/>
+              <a:gd name="adj" fmla="val 3902"/>
             </a:avLst>
           </a:prstGeom>
           <a:solidFill>
@@ -18333,7 +24001,7 @@
         </p:nvSpPr>
         <p:spPr>
           <a:xfrm>
-            <a:off x="4504944" y="4069080"/>
+            <a:off x="4504944" y="3611880"/>
             <a:ext cx="457200" cy="457200"/>
           </a:xfrm>
           <a:prstGeom prst="ellipse">
@@ -18353,7 +24021,7 @@
         </p:nvSpPr>
         <p:spPr>
           <a:xfrm>
-            <a:off x="4504944" y="4069080"/>
+            <a:off x="4504944" y="3611880"/>
             <a:ext cx="457200" cy="457200"/>
           </a:xfrm>
           <a:prstGeom prst="rect">
@@ -18392,8 +24060,8 @@
         </p:nvSpPr>
         <p:spPr>
           <a:xfrm>
-            <a:off x="5099304" y="3995928"/>
-            <a:ext cx="2630424" cy="2112264"/>
+            <a:off x="5099304" y="3538728"/>
+            <a:ext cx="2630424" cy="1655064"/>
           </a:xfrm>
           <a:prstGeom prst="rect">
             <a:avLst/>
@@ -18433,12 +24101,12 @@
         </p:nvSpPr>
         <p:spPr>
           <a:xfrm>
-            <a:off x="8095488" y="3886200"/>
-            <a:ext cx="3544824" cy="2331720"/>
+            <a:off x="8095488" y="3429000"/>
+            <a:ext cx="3544824" cy="1874520"/>
           </a:xfrm>
           <a:prstGeom prst="roundRect">
             <a:avLst>
-              <a:gd name="adj" fmla="val 3137"/>
+              <a:gd name="adj" fmla="val 3902"/>
             </a:avLst>
           </a:prstGeom>
           <a:solidFill>
@@ -18467,7 +24135,7 @@
         </p:nvSpPr>
         <p:spPr>
           <a:xfrm>
-            <a:off x="8278368" y="4069080"/>
+            <a:off x="8278368" y="3611880"/>
             <a:ext cx="457200" cy="457200"/>
           </a:xfrm>
           <a:prstGeom prst="ellipse">
@@ -18487,7 +24155,7 @@
         </p:nvSpPr>
         <p:spPr>
           <a:xfrm>
-            <a:off x="8278368" y="4069080"/>
+            <a:off x="8278368" y="3611880"/>
             <a:ext cx="457200" cy="457200"/>
           </a:xfrm>
           <a:prstGeom prst="rect">
@@ -18526,8 +24194,8 @@
         </p:nvSpPr>
         <p:spPr>
           <a:xfrm>
-            <a:off x="8872728" y="3995928"/>
-            <a:ext cx="2630424" cy="2112264"/>
+            <a:off x="8872728" y="3538728"/>
+            <a:ext cx="2630424" cy="1655064"/>
           </a:xfrm>
           <a:prstGeom prst="rect">
             <a:avLst/>
@@ -18556,6 +24224,92 @@
               <a:t>Fechamento: indicadores do mês e relatório executivo</a:t>
             </a:r>
             <a:endParaRPr lang="en-US" sz="1800" dirty="0"/>
+          </a:p>
+        </p:txBody>
+      </p:sp>
+      <p:sp>
+        <p:nvSpPr>
+          <p:cNvPr id="33" name="Shape 30"/>
+          <p:cNvSpPr/>
+          <p:nvPr/>
+        </p:nvSpPr>
+        <p:spPr>
+          <a:xfrm>
+            <a:off x="548640" y="5413248"/>
+            <a:ext cx="11091672" cy="868680"/>
+          </a:xfrm>
+          <a:prstGeom prst="roundRect">
+            <a:avLst>
+              <a:gd name="adj" fmla="val 8421"/>
+            </a:avLst>
+          </a:prstGeom>
+          <a:solidFill>
+            <a:srgbClr val="EEF3FA"/>
+          </a:solidFill>
+          <a:ln w="6350">
+            <a:solidFill>
+              <a:srgbClr val="D8E0EC"/>
+            </a:solidFill>
+            <a:prstDash val="solid"/>
+          </a:ln>
+        </p:spPr>
+      </p:sp>
+      <p:sp>
+        <p:nvSpPr>
+          <p:cNvPr id="34" name="Shape 31"/>
+          <p:cNvSpPr/>
+          <p:nvPr/>
+        </p:nvSpPr>
+        <p:spPr>
+          <a:xfrm>
+            <a:off x="548640" y="5413248"/>
+            <a:ext cx="91440" cy="868680"/>
+          </a:xfrm>
+          <a:prstGeom prst="rect">
+            <a:avLst/>
+          </a:prstGeom>
+          <a:solidFill>
+            <a:srgbClr val="F7A23B"/>
+          </a:solidFill>
+          <a:ln/>
+        </p:spPr>
+      </p:sp>
+      <p:sp>
+        <p:nvSpPr>
+          <p:cNvPr id="35" name="Text 32"/>
+          <p:cNvSpPr/>
+          <p:nvPr/>
+        </p:nvSpPr>
+        <p:spPr>
+          <a:xfrm>
+            <a:off x="777240" y="5458968"/>
+            <a:ext cx="10744200" cy="777240"/>
+          </a:xfrm>
+          <a:prstGeom prst="rect">
+            <a:avLst/>
+          </a:prstGeom>
+          <a:noFill/>
+          <a:ln/>
+        </p:spPr>
+        <p:txBody>
+          <a:bodyPr wrap="square" rtlCol="0" anchor="ctr"/>
+          <a:lstStyle/>
+          <a:p>
+            <a:pPr indent="0" marL="0">
+              <a:buNone/>
+            </a:pPr>
+            <a:r>
+              <a:rPr lang="en-US" sz="1500" dirty="0">
+                <a:solidFill>
+                  <a:srgbClr val="1F2937"/>
+                </a:solidFill>
+                <a:latin typeface="Arial" pitchFamily="34" charset="0"/>
+                <a:ea typeface="Arial" pitchFamily="34" charset="-122"/>
+                <a:cs typeface="Arial" pitchFamily="34" charset="-120"/>
+              </a:rPr>
+              <a:t>O ciclo mensal é o coração da operação. Escreva-o num calendário, com o responsável de cada etapa. Esse é o seu procedimento padrão.</a:t>
+            </a:r>
+            <a:endParaRPr lang="en-US" sz="1500" dirty="0"/>
           </a:p>
         </p:txBody>
       </p:sp>
@@ -20408,7 +26162,7 @@
         <p:spPr>
           <a:xfrm>
             <a:off x="548640" y="1325880"/>
-            <a:ext cx="11155680" cy="4937760"/>
+            <a:ext cx="11155680" cy="3977640"/>
           </a:xfrm>
           <a:prstGeom prst="rect">
             <a:avLst/>
@@ -20504,6 +26258,92 @@
               <a:t>Sistema: tarefa agendada falhou · tarefa em fila esgotou tentativas · conta Mercado Pago ausente · webhook sem chave secreta</a:t>
             </a:r>
             <a:endParaRPr lang="en-US" sz="1200" dirty="0"/>
+          </a:p>
+        </p:txBody>
+      </p:sp>
+      <p:sp>
+        <p:nvSpPr>
+          <p:cNvPr id="10" name="Shape 7"/>
+          <p:cNvSpPr/>
+          <p:nvPr/>
+        </p:nvSpPr>
+        <p:spPr>
+          <a:xfrm>
+            <a:off x="548640" y="5413248"/>
+            <a:ext cx="11091672" cy="868680"/>
+          </a:xfrm>
+          <a:prstGeom prst="roundRect">
+            <a:avLst>
+              <a:gd name="adj" fmla="val 8421"/>
+            </a:avLst>
+          </a:prstGeom>
+          <a:solidFill>
+            <a:srgbClr val="EEF3FA"/>
+          </a:solidFill>
+          <a:ln w="6350">
+            <a:solidFill>
+              <a:srgbClr val="D8E0EC"/>
+            </a:solidFill>
+            <a:prstDash val="solid"/>
+          </a:ln>
+        </p:spPr>
+      </p:sp>
+      <p:sp>
+        <p:nvSpPr>
+          <p:cNvPr id="11" name="Shape 8"/>
+          <p:cNvSpPr/>
+          <p:nvPr/>
+        </p:nvSpPr>
+        <p:spPr>
+          <a:xfrm>
+            <a:off x="548640" y="5413248"/>
+            <a:ext cx="91440" cy="868680"/>
+          </a:xfrm>
+          <a:prstGeom prst="rect">
+            <a:avLst/>
+          </a:prstGeom>
+          <a:solidFill>
+            <a:srgbClr val="F7A23B"/>
+          </a:solidFill>
+          <a:ln/>
+        </p:spPr>
+      </p:sp>
+      <p:sp>
+        <p:nvSpPr>
+          <p:cNvPr id="12" name="Text 9"/>
+          <p:cNvSpPr/>
+          <p:nvPr/>
+        </p:nvSpPr>
+        <p:spPr>
+          <a:xfrm>
+            <a:off x="777240" y="5458968"/>
+            <a:ext cx="10744200" cy="777240"/>
+          </a:xfrm>
+          <a:prstGeom prst="rect">
+            <a:avLst/>
+          </a:prstGeom>
+          <a:noFill/>
+          <a:ln/>
+        </p:spPr>
+        <p:txBody>
+          <a:bodyPr wrap="square" rtlCol="0" anchor="ctr"/>
+          <a:lstStyle/>
+          <a:p>
+            <a:pPr indent="0" marL="0">
+              <a:buNone/>
+            </a:pPr>
+            <a:r>
+              <a:rPr lang="en-US" sz="1500" dirty="0">
+                <a:solidFill>
+                  <a:srgbClr val="1F2937"/>
+                </a:solidFill>
+                <a:latin typeface="Arial" pitchFamily="34" charset="0"/>
+                <a:ea typeface="Arial" pitchFamily="34" charset="-122"/>
+                <a:cs typeface="Arial" pitchFamily="34" charset="-120"/>
+              </a:rPr>
+              <a:t>Os alertas vêm de quatro áreas: faturas, financeiro, usinas e sistema.</a:t>
+            </a:r>
+            <a:endParaRPr lang="en-US" sz="1500" dirty="0"/>
           </a:p>
         </p:txBody>
       </p:sp>

--- a/docs/curso/slides/m09-operacao.pptx
+++ b/docs/curso/slides/m09-operacao.pptx
@@ -34,10 +34,9 @@
     <p:sldId id="282" r:id="rId28"/>
     <p:sldId id="283" r:id="rId29"/>
     <p:sldId id="284" r:id="rId30"/>
-    <p:sldId id="285" r:id="rId31"/>
   </p:sldIdLst>
   <p:notesMasterIdLst>
-    <p:notesMasterId r:id="rId32"/>
+    <p:notesMasterId r:id="rId31"/>
   </p:notesMasterIdLst>
   <p:sldSz cx="12192000" cy="6858000"/>
   <p:notesSz cx="6858000" cy="12192000"/>
@@ -1590,7 +1589,8 @@
           <a:p>
             <a:r>
               <a:rPr lang="en-US" dirty="0"/>
-              <a:t>No pedido de cancelamento, siga o roteiro da tela. Muitos clientes desistem ao ver quanto já economizaram.
+              <a:t>Pelos chamados, toda a equipe vê o histórico de cada cliente.
+No pedido de cancelamento, siga o roteiro da tela. Muitos clientes desistem ao ver quanto já economizaram.
 O melhor suporte é o proativo, como as ações da tela.</a:t>
             </a:r>
             <a:endParaRPr lang="en-US" dirty="0"/>
@@ -1679,7 +1679,7 @@
           <a:p>
             <a:r>
               <a:rPr lang="en-US" dirty="0"/>
-              <a:t>Cliente abre o chamado no portal equipe responde notas internas invisíveis ao cliente status até fechar</a:t>
+              <a:t/>
             </a:r>
             <a:endParaRPr lang="en-US" dirty="0"/>
           </a:p>
@@ -1855,7 +1855,10 @@
           <a:p>
             <a:r>
               <a:rPr lang="en-US" dirty="0"/>
-              <a:t/>
+              <a:t>Registre a geração do mês e compare com o esperado.
+Suba e revise as faturas do mês. Investigue o consumo atípico antes de aprovar.
+Confira, abra e emita as cobranças, lance o ajuste do mês anterior e trate vencidas e boletos vencidos.
+Atualize o rateio com a saída e a entrada de clientes, zere os alertas críticos e calcule o repasse ao produtor.</a:t>
             </a:r>
             <a:endParaRPr lang="en-US" dirty="0"/>
           </a:p>
@@ -1943,10 +1946,7 @@
           <a:p>
             <a:r>
               <a:rPr lang="en-US" dirty="0"/>
-              <a:t>Registre a geração do mês e compare com o esperado.
-Suba e revise as faturas do mês. Investigue o consumo atípico antes de aprovar.
-Confira, abra e emita as cobranças, lance o ajuste do mês anterior e trate vencidas e boletos vencidos.
-Atualize o rateio com a saída e a entrada de clientes, zere os alertas críticos e calcule o repasse ao produtor.</a:t>
+              <a:t/>
             </a:r>
             <a:endParaRPr lang="en-US" dirty="0"/>
           </a:p>
@@ -2498,94 +2498,6 @@
             <a:fld id="{F7021451-1387-4CA6-816F-3879F97B5CBC}" type="slidenum">
               <a:rPr lang="en-US"/>
               <a:t>3</a:t>
-            </a:fld>
-            <a:endParaRPr lang="en-US"/>
-          </a:p>
-        </p:txBody>
-      </p:sp>
-    </p:spTree>
-    <p:extLst>
-      <p:ext uri="{BB962C8B-B14F-4D97-AF65-F5344CB8AC3E}">
-        <p14:creationId xmlns:p14="http://schemas.microsoft.com/office/powerpoint/2010/main" val="1024086991"/>
-      </p:ext>
-    </p:extLst>
-  </p:cSld>
-  <p:clrMapOvr>
-    <a:masterClrMapping/>
-  </p:clrMapOvr>
-</p:notes>
-</file>
-
-<file path=ppt/notesSlides/notesSlide30.xml><?xml version="1.0" encoding="utf-8"?>
-<p:notes xmlns:a="http://schemas.openxmlformats.org/drawingml/2006/main" xmlns:r="http://schemas.openxmlformats.org/officeDocument/2006/relationships" xmlns:p="http://schemas.openxmlformats.org/presentationml/2006/main">
-  <p:cSld>
-    <p:spTree>
-      <p:nvGrpSpPr>
-        <p:cNvPr id="1" name=""/>
-        <p:cNvGrpSpPr/>
-        <p:nvPr/>
-      </p:nvGrpSpPr>
-      <p:grpSpPr>
-        <a:xfrm>
-          <a:off x="0" y="0"/>
-          <a:ext cx="0" cy="0"/>
-          <a:chOff x="0" y="0"/>
-          <a:chExt cx="0" cy="0"/>
-        </a:xfrm>
-      </p:grpSpPr>
-      <p:sp>
-        <p:nvSpPr>
-          <p:cNvPr id="2" name="Slide Image Placeholder 1"/>
-          <p:cNvSpPr>
-            <a:spLocks noGrp="1" noRot="1" noChangeAspect="1"/>
-          </p:cNvSpPr>
-          <p:nvPr>
-            <p:ph type="sldImg"/>
-          </p:nvPr>
-        </p:nvSpPr>
-        <p:spPr/>
-      </p:sp>
-      <p:sp>
-        <p:nvSpPr>
-          <p:cNvPr id="3" name="Notes Placeholder 2"/>
-          <p:cNvSpPr>
-            <a:spLocks noGrp="1"/>
-          </p:cNvSpPr>
-          <p:nvPr>
-            <p:ph type="body" idx="1"/>
-          </p:nvPr>
-        </p:nvSpPr>
-        <p:spPr/>
-        <p:txBody>
-          <a:bodyPr/>
-          <a:lstStyle/>
-          <a:p>
-            <a:r>
-              <a:rPr lang="en-US" dirty="0"/>
-              <a:t/>
-            </a:r>
-            <a:endParaRPr lang="en-US" dirty="0"/>
-          </a:p>
-        </p:txBody>
-      </p:sp>
-      <p:sp>
-        <p:nvSpPr>
-          <p:cNvPr id="4" name="Slide Number Placeholder 3"/>
-          <p:cNvSpPr>
-            <a:spLocks noGrp="1"/>
-          </p:cNvSpPr>
-          <p:nvPr>
-            <p:ph type="sldNum" sz="quarter" idx="10"/>
-          </p:nvPr>
-        </p:nvSpPr>
-        <p:spPr/>
-        <p:txBody>
-          <a:bodyPr/>
-          <a:lstStyle/>
-          <a:p>
-            <a:fld id="{F7021451-1387-4CA6-816F-3879F97B5CBC}" type="slidenum">
-              <a:rPr lang="en-US"/>
-              <a:t>30</a:t>
             </a:fld>
             <a:endParaRPr lang="en-US"/>
           </a:p>
@@ -3855,7 +3767,7 @@
                 <a:ea typeface="Arial" pitchFamily="34" charset="-122"/>
                 <a:cs typeface="Arial" pitchFamily="34" charset="-120"/>
               </a:rPr>
-              <a:t>5. o fechamento do mês</a:t>
+              <a:t>5. O fechamento do mês</a:t>
             </a:r>
             <a:endParaRPr lang="en-US" sz="1400" dirty="0"/>
           </a:p>
@@ -4501,7 +4413,7 @@
               <a:buNone/>
             </a:pPr>
             <a:r>
-              <a:rPr lang="en-US" sz="1300" i="1" dirty="0">
+              <a:rPr lang="en-US" sz="1400" i="1" dirty="0">
                 <a:solidFill>
                   <a:srgbClr val="64748B"/>
                 </a:solidFill>
@@ -4511,7 +4423,7 @@
               </a:rPr>
               <a:t>A severidade define a ordem: críticos no mesmo dia, depois o que tem data, depois o resto.</a:t>
             </a:r>
-            <a:endParaRPr lang="en-US" sz="1300" dirty="0"/>
+            <a:endParaRPr lang="en-US" sz="1400" dirty="0"/>
           </a:p>
         </p:txBody>
       </p:sp>
@@ -4742,7 +4654,7 @@
               <a:buNone/>
             </a:pPr>
             <a:r>
-              <a:rPr lang="en-US" sz="1300" i="1" dirty="0">
+              <a:rPr lang="en-US" sz="1400" i="1" dirty="0">
                 <a:solidFill>
                   <a:srgbClr val="64748B"/>
                 </a:solidFill>
@@ -4752,7 +4664,7 @@
               </a:rPr>
               <a:t>Cada problema gera um alerta único, que se resolve sozinho quando a causa desaparece. A lista mostra a situação real.</a:t>
             </a:r>
-            <a:endParaRPr lang="en-US" sz="1300" dirty="0"/>
+            <a:endParaRPr lang="en-US" sz="1400" dirty="0"/>
           </a:p>
         </p:txBody>
       </p:sp>
@@ -4962,7 +4874,7 @@
               <a:buNone/>
             </a:pPr>
             <a:r>
-              <a:rPr lang="en-US" sz="1300" i="1" dirty="0">
+              <a:rPr lang="en-US" sz="1400" i="1" dirty="0">
                 <a:solidFill>
                   <a:srgbClr val="64748B"/>
                 </a:solidFill>
@@ -4972,7 +4884,7 @@
               </a:rPr>
               <a:t>Cada perfil vê a sua fila. A meta diária é simples: nenhum alerta crítico.</a:t>
             </a:r>
-            <a:endParaRPr lang="en-US" sz="1300" dirty="0"/>
+            <a:endParaRPr lang="en-US" sz="1400" dirty="0"/>
           </a:p>
         </p:txBody>
       </p:sp>
@@ -6445,7 +6357,7 @@
             <a:r>
               <a:rPr lang="en-US" sz="11000" b="1" dirty="0">
                 <a:solidFill>
-                  <a:srgbClr val="11396F"/>
+                  <a:srgbClr val="F7A23B"/>
                 </a:solidFill>
                 <a:latin typeface="Arial" pitchFamily="34" charset="0"/>
                 <a:ea typeface="Arial" pitchFamily="34" charset="-122"/>
@@ -6568,7 +6480,7 @@
                 <a:ea typeface="Arial" pitchFamily="34" charset="-122"/>
                 <a:cs typeface="Arial" pitchFamily="34" charset="-120"/>
               </a:rPr>
-              <a:t>Aula</a:t>
+              <a:t>Aula teórica</a:t>
             </a:r>
             <a:endParaRPr lang="en-US" sz="1400" dirty="0"/>
           </a:p>
@@ -7274,7 +7186,7 @@
               <a:buNone/>
             </a:pPr>
             <a:r>
-              <a:rPr lang="en-US" sz="1300" i="1" dirty="0">
+              <a:rPr lang="en-US" sz="1400" i="1" dirty="0">
                 <a:solidFill>
                   <a:srgbClr val="64748B"/>
                 </a:solidFill>
@@ -7284,7 +7196,7 @@
               </a:rPr>
               <a:t>Use as três fontes da tela. Quando divergirem, investigue.</a:t>
             </a:r>
-            <a:endParaRPr lang="en-US" sz="1300" dirty="0"/>
+            <a:endParaRPr lang="en-US" sz="1400" dirty="0"/>
           </a:p>
         </p:txBody>
       </p:sp>
@@ -7557,7 +7469,7 @@
               <a:buNone/>
             </a:pPr>
             <a:r>
-              <a:rPr lang="en-US" sz="1300" i="1" dirty="0">
+              <a:rPr lang="en-US" sz="1400" i="1" dirty="0">
                 <a:solidFill>
                   <a:srgbClr val="64748B"/>
                 </a:solidFill>
@@ -7567,7 +7479,7 @@
               </a:rPr>
               <a:t>Os sinais da tela pedem ação.</a:t>
             </a:r>
-            <a:endParaRPr lang="en-US" sz="1300" dirty="0"/>
+            <a:endParaRPr lang="en-US" sz="1400" dirty="0"/>
           </a:p>
         </p:txBody>
       </p:sp>
@@ -8603,38 +8515,86 @@
       </p:sp>
       <p:sp>
         <p:nvSpPr>
-          <p:cNvPr id="9" name="Text 6"/>
-          <p:cNvSpPr/>
-          <p:nvPr/>
-        </p:nvSpPr>
-        <p:spPr>
-          <a:xfrm>
-            <a:off x="548640" y="1325880"/>
-            <a:ext cx="11155680" cy="3977640"/>
-          </a:xfrm>
-          <a:prstGeom prst="rect">
-            <a:avLst/>
-          </a:prstGeom>
-          <a:noFill/>
-          <a:ln/>
-        </p:spPr>
-        <p:txBody>
-          <a:bodyPr wrap="square" rtlCol="0" anchor="t">
-            <a:normAutofit/>
-          </a:bodyPr>
-          <a:lstStyle/>
-          <a:p>
-            <a:pPr marL="342900" indent="-342900">
-              <a:spcAft>
-                <a:spcPts val="600"/>
-              </a:spcAft>
-              <a:buSzPct val="100000"/>
-              <a:buChar char="●"/>
-            </a:pPr>
-            <a:r>
-              <a:rPr lang="en-US" sz="2000" dirty="0">
-                <a:solidFill>
-                  <a:srgbClr val="1F2937"/>
+          <p:cNvPr id="9" name="Shape 6"/>
+          <p:cNvSpPr/>
+          <p:nvPr/>
+        </p:nvSpPr>
+        <p:spPr>
+          <a:xfrm>
+            <a:off x="1463040" y="1600200"/>
+            <a:ext cx="9262872" cy="3429000"/>
+          </a:xfrm>
+          <a:prstGeom prst="roundRect">
+            <a:avLst>
+              <a:gd name="adj" fmla="val 3200"/>
+            </a:avLst>
+          </a:prstGeom>
+          <a:solidFill>
+            <a:srgbClr val="FFFFFF"/>
+          </a:solidFill>
+          <a:ln w="9525">
+            <a:solidFill>
+              <a:srgbClr val="D8E0EC"/>
+            </a:solidFill>
+            <a:prstDash val="solid"/>
+          </a:ln>
+          <a:effectLst>
+            <a:outerShdw sx="100000" sy="100000" kx="0" ky="0" algn="bl" rotWithShape="0" blurRad="50800" dist="12700" dir="5400000">
+              <a:srgbClr val="000000">
+                <a:alpha val="10000"/>
+              </a:srgbClr>
+            </a:outerShdw>
+          </a:effectLst>
+        </p:spPr>
+      </p:sp>
+      <p:sp>
+        <p:nvSpPr>
+          <p:cNvPr id="10" name="Shape 7"/>
+          <p:cNvSpPr/>
+          <p:nvPr/>
+        </p:nvSpPr>
+        <p:spPr>
+          <a:xfrm>
+            <a:off x="1463040" y="1600200"/>
+            <a:ext cx="128016" cy="3429000"/>
+          </a:xfrm>
+          <a:prstGeom prst="rect">
+            <a:avLst/>
+          </a:prstGeom>
+          <a:solidFill>
+            <a:srgbClr val="F7A23B"/>
+          </a:solidFill>
+          <a:ln/>
+        </p:spPr>
+      </p:sp>
+      <p:sp>
+        <p:nvSpPr>
+          <p:cNvPr id="11" name="Text 8"/>
+          <p:cNvSpPr/>
+          <p:nvPr/>
+        </p:nvSpPr>
+        <p:spPr>
+          <a:xfrm>
+            <a:off x="2011680" y="1783080"/>
+            <a:ext cx="8412480" cy="3063240"/>
+          </a:xfrm>
+          <a:prstGeom prst="rect">
+            <a:avLst/>
+          </a:prstGeom>
+          <a:noFill/>
+          <a:ln/>
+        </p:spPr>
+        <p:txBody>
+          <a:bodyPr wrap="square" rtlCol="0" anchor="ctr"/>
+          <a:lstStyle/>
+          <a:p>
+            <a:pPr algn="ctr" indent="0" marL="0">
+              <a:buNone/>
+            </a:pPr>
+            <a:r>
+              <a:rPr lang="en-US" sz="3200" b="1" dirty="0">
+                <a:solidFill>
+                  <a:srgbClr val="1B3A6B"/>
                 </a:solidFill>
                 <a:latin typeface="Arial" pitchFamily="34" charset="0"/>
                 <a:ea typeface="Arial" pitchFamily="34" charset="-122"/>
@@ -8642,13 +8602,13 @@
               </a:rPr>
               <a:t>Ocupação &gt; 95% em todas as usinas + fila de espera = hora da próxima usina (comece o M4 de novo 3–6 meses antes)</a:t>
             </a:r>
-            <a:endParaRPr lang="en-US" sz="2000" dirty="0"/>
-          </a:p>
-        </p:txBody>
-      </p:sp>
-      <p:sp>
-        <p:nvSpPr>
-          <p:cNvPr id="10" name="Shape 7"/>
+            <a:endParaRPr lang="en-US" sz="3200" dirty="0"/>
+          </a:p>
+        </p:txBody>
+      </p:sp>
+      <p:sp>
+        <p:nvSpPr>
+          <p:cNvPr id="12" name="Shape 9"/>
           <p:cNvSpPr/>
           <p:nvPr/>
         </p:nvSpPr>
@@ -8675,7 +8635,7 @@
       </p:sp>
       <p:sp>
         <p:nvSpPr>
-          <p:cNvPr id="11" name="Shape 8"/>
+          <p:cNvPr id="13" name="Shape 10"/>
           <p:cNvSpPr/>
           <p:nvPr/>
         </p:nvSpPr>
@@ -8695,7 +8655,7 @@
       </p:sp>
       <p:sp>
         <p:nvSpPr>
-          <p:cNvPr id="12" name="Text 9"/>
+          <p:cNvPr id="14" name="Text 11"/>
           <p:cNvSpPr/>
           <p:nvPr/>
         </p:nvSpPr>
@@ -9702,7 +9662,7 @@
             <a:r>
               <a:rPr lang="en-US" sz="11000" b="1" dirty="0">
                 <a:solidFill>
-                  <a:srgbClr val="11396F"/>
+                  <a:srgbClr val="F7A23B"/>
                 </a:solidFill>
                 <a:latin typeface="Arial" pitchFamily="34" charset="0"/>
                 <a:ea typeface="Arial" pitchFamily="34" charset="-122"/>
@@ -9825,7 +9785,7 @@
                 <a:ea typeface="Arial" pitchFamily="34" charset="-122"/>
                 <a:cs typeface="Arial" pitchFamily="34" charset="-120"/>
               </a:rPr>
-              <a:t>Aula</a:t>
+              <a:t>Aula teórica</a:t>
             </a:r>
             <a:endParaRPr lang="en-US" sz="1400" dirty="0"/>
           </a:p>
@@ -9997,7 +9957,7 @@
                 <a:ea typeface="Arial" pitchFamily="34" charset="-122"/>
                 <a:cs typeface="Arial" pitchFamily="34" charset="-120"/>
               </a:rPr>
-              <a:t>Retenção: o pedido de cancelamento</a:t>
+              <a:t>Os chamados na plataforma</a:t>
             </a:r>
             <a:endParaRPr lang="en-US" sz="1500" dirty="0"/>
           </a:p>
@@ -10018,7 +9978,7 @@
                 <a:ea typeface="Arial" pitchFamily="34" charset="-122"/>
                 <a:cs typeface="Arial" pitchFamily="34" charset="-120"/>
               </a:rPr>
-              <a:t>Relacionamento proativo</a:t>
+              <a:t>Retenção: o pedido de cancelamento</a:t>
             </a:r>
             <a:endParaRPr lang="en-US" sz="1500" dirty="0"/>
           </a:p>
@@ -10039,7 +9999,7 @@
                 <a:ea typeface="Arial" pitchFamily="34" charset="-122"/>
                 <a:cs typeface="Arial" pitchFamily="34" charset="-120"/>
               </a:rPr>
-              <a:t>Passo a passo na plataforma</a:t>
+              <a:t>Relacionamento proativo</a:t>
             </a:r>
             <a:endParaRPr lang="en-US" sz="1500" dirty="0"/>
           </a:p>
@@ -11321,7 +11281,7 @@
             <a:r>
               <a:rPr lang="en-US" sz="11000" b="1" dirty="0">
                 <a:solidFill>
-                  <a:srgbClr val="11396F"/>
+                  <a:srgbClr val="F7A23B"/>
                 </a:solidFill>
                 <a:latin typeface="Arial" pitchFamily="34" charset="0"/>
                 <a:ea typeface="Arial" pitchFamily="34" charset="-122"/>
@@ -11444,7 +11404,7 @@
                 <a:ea typeface="Arial" pitchFamily="34" charset="-122"/>
                 <a:cs typeface="Arial" pitchFamily="34" charset="-120"/>
               </a:rPr>
-              <a:t>Aula</a:t>
+              <a:t>Aula teórica</a:t>
             </a:r>
             <a:endParaRPr lang="en-US" sz="1400" dirty="0"/>
           </a:p>
@@ -11932,11 +11892,11 @@
         <p:spPr>
           <a:xfrm>
             <a:off x="548640" y="1325880"/>
-            <a:ext cx="5408676" cy="4937760"/>
+            <a:ext cx="3514344" cy="4937760"/>
           </a:xfrm>
           <a:prstGeom prst="roundRect">
             <a:avLst>
-              <a:gd name="adj" fmla="val 1481"/>
+              <a:gd name="adj" fmla="val 2082"/>
             </a:avLst>
           </a:prstGeom>
           <a:solidFill>
@@ -11966,7 +11926,7 @@
         <p:spPr>
           <a:xfrm>
             <a:off x="548640" y="1325880"/>
-            <a:ext cx="5408676" cy="109728"/>
+            <a:ext cx="3514344" cy="109728"/>
           </a:xfrm>
           <a:prstGeom prst="rect">
             <a:avLst/>
@@ -11986,7 +11946,7 @@
         <p:spPr>
           <a:xfrm>
             <a:off x="822960" y="1554480"/>
-            <a:ext cx="4860036" cy="685800"/>
+            <a:ext cx="2965704" cy="685800"/>
           </a:xfrm>
           <a:prstGeom prst="rect">
             <a:avLst/>
@@ -12012,7 +11972,7 @@
                 <a:ea typeface="Arial" pitchFamily="34" charset="-122"/>
                 <a:cs typeface="Arial" pitchFamily="34" charset="-120"/>
               </a:rPr>
-              <a:t>Retenção: o pedido de cancelamento</a:t>
+              <a:t>Os chamados na plataforma</a:t>
             </a:r>
             <a:endParaRPr lang="en-US" sz="1600" dirty="0"/>
           </a:p>
@@ -12027,7 +11987,7 @@
         <p:spPr>
           <a:xfrm>
             <a:off x="822960" y="2286000"/>
-            <a:ext cx="4860036" cy="2286000"/>
+            <a:ext cx="2965704" cy="2286000"/>
           </a:xfrm>
           <a:prstGeom prst="rect">
             <a:avLst/>
@@ -12041,11 +12001,12 @@
           </a:bodyPr>
           <a:lstStyle/>
           <a:p>
-            <a:pPr indent="0" marL="0">
+            <a:pPr marL="342900" indent="-342900">
               <a:spcAft>
                 <a:spcPts val="600"/>
               </a:spcAft>
-              <a:buNone/>
+              <a:buSzPct val="100000"/>
+              <a:buChar char="●"/>
             </a:pPr>
             <a:r>
               <a:rPr lang="en-US" sz="1700" dirty="0">
@@ -12056,16 +12017,17 @@
                 <a:ea typeface="Arial" pitchFamily="34" charset="-122"/>
                 <a:cs typeface="Arial" pitchFamily="34" charset="-120"/>
               </a:rPr>
-              <a:t>1. Entender o motivo</a:t>
+              <a:t>Cliente abre o chamado no portal</a:t>
             </a:r>
             <a:endParaRPr lang="en-US" sz="1700" dirty="0"/>
           </a:p>
           <a:p>
-            <a:pPr indent="0" marL="0">
+            <a:pPr marL="342900" indent="-342900">
               <a:spcAft>
                 <a:spcPts val="600"/>
               </a:spcAft>
-              <a:buNone/>
+              <a:buSzPct val="100000"/>
+              <a:buChar char="●"/>
             </a:pPr>
             <a:r>
               <a:rPr lang="en-US" sz="1700" dirty="0">
@@ -12076,16 +12038,17 @@
                 <a:ea typeface="Arial" pitchFamily="34" charset="-122"/>
                 <a:cs typeface="Arial" pitchFamily="34" charset="-120"/>
               </a:rPr>
-              <a:t>2. Mostrar a economia acumulada</a:t>
+              <a:t>equipe responde</a:t>
             </a:r>
             <a:endParaRPr lang="en-US" sz="1700" dirty="0"/>
           </a:p>
           <a:p>
-            <a:pPr indent="0" marL="0">
+            <a:pPr marL="342900" indent="-342900">
               <a:spcAft>
                 <a:spcPts val="600"/>
               </a:spcAft>
-              <a:buNone/>
+              <a:buSzPct val="100000"/>
+              <a:buChar char="●"/>
             </a:pPr>
             <a:r>
               <a:rPr lang="en-US" sz="1700" dirty="0">
@@ -12096,16 +12059,17 @@
                 <a:ea typeface="Arial" pitchFamily="34" charset="-122"/>
                 <a:cs typeface="Arial" pitchFamily="34" charset="-120"/>
               </a:rPr>
-              <a:t>3. Resolver a causa (cota, vencimento, explicação)</a:t>
+              <a:t>notas internas invisíveis ao cliente</a:t>
             </a:r>
             <a:endParaRPr lang="en-US" sz="1700" dirty="0"/>
           </a:p>
           <a:p>
-            <a:pPr indent="0" marL="0">
+            <a:pPr marL="342900" indent="-342900">
               <a:spcAft>
                 <a:spcPts val="600"/>
               </a:spcAft>
-              <a:buNone/>
+              <a:buSzPct val="100000"/>
+              <a:buChar char="●"/>
             </a:pPr>
             <a:r>
               <a:rPr lang="en-US" sz="1700" dirty="0">
@@ -12116,7 +12080,7 @@
                 <a:ea typeface="Arial" pitchFamily="34" charset="-122"/>
                 <a:cs typeface="Arial" pitchFamily="34" charset="-120"/>
               </a:rPr>
-              <a:t>4. Se sair: sair bem (aviso prévio, rateio, última cobrança)</a:t>
+              <a:t>status até fechar</a:t>
             </a:r>
             <a:endParaRPr lang="en-US" sz="1700" dirty="0"/>
           </a:p>
@@ -12131,7 +12095,7 @@
         <p:spPr>
           <a:xfrm>
             <a:off x="822960" y="4663440"/>
-            <a:ext cx="4860036" cy="18288"/>
+            <a:ext cx="2965704" cy="18288"/>
           </a:xfrm>
           <a:prstGeom prst="rect">
             <a:avLst/>
@@ -12151,7 +12115,7 @@
         <p:spPr>
           <a:xfrm>
             <a:off x="822960" y="4754880"/>
-            <a:ext cx="4860036" cy="1371600"/>
+            <a:ext cx="2965704" cy="1371600"/>
           </a:xfrm>
           <a:prstGeom prst="rect">
             <a:avLst/>
@@ -12167,7 +12131,7 @@
               <a:buNone/>
             </a:pPr>
             <a:r>
-              <a:rPr lang="en-US" sz="1300" i="1" dirty="0">
+              <a:rPr lang="en-US" sz="1400" i="1" dirty="0">
                 <a:solidFill>
                   <a:srgbClr val="64748B"/>
                 </a:solidFill>
@@ -12175,9 +12139,9 @@
                 <a:ea typeface="Arial" pitchFamily="34" charset="-122"/>
                 <a:cs typeface="Arial" pitchFamily="34" charset="-120"/>
               </a:rPr>
-              <a:t>No pedido de cancelamento, siga o roteiro da tela. Muitos clientes desistem ao ver quanto já economizaram.</a:t>
-            </a:r>
-            <a:endParaRPr lang="en-US" sz="1300" dirty="0"/>
+              <a:t>Pelos chamados, toda a equipe vê o histórico de cada cliente.</a:t>
+            </a:r>
+            <a:endParaRPr lang="en-US" sz="1400" dirty="0"/>
           </a:p>
         </p:txBody>
       </p:sp>
@@ -12189,12 +12153,12 @@
         </p:nvSpPr>
         <p:spPr>
           <a:xfrm>
-            <a:off x="6231636" y="1325880"/>
-            <a:ext cx="5408676" cy="4937760"/>
+            <a:off x="4337304" y="1325880"/>
+            <a:ext cx="3514344" cy="4937760"/>
           </a:xfrm>
           <a:prstGeom prst="roundRect">
             <a:avLst>
-              <a:gd name="adj" fmla="val 1481"/>
+              <a:gd name="adj" fmla="val 2082"/>
             </a:avLst>
           </a:prstGeom>
           <a:solidFill>
@@ -12223,8 +12187,8 @@
         </p:nvSpPr>
         <p:spPr>
           <a:xfrm>
-            <a:off x="6231636" y="1325880"/>
-            <a:ext cx="5408676" cy="109728"/>
+            <a:off x="4337304" y="1325880"/>
+            <a:ext cx="3514344" cy="109728"/>
           </a:xfrm>
           <a:prstGeom prst="rect">
             <a:avLst/>
@@ -12243,8 +12207,8 @@
         </p:nvSpPr>
         <p:spPr>
           <a:xfrm>
-            <a:off x="6505956" y="1554480"/>
-            <a:ext cx="4860036" cy="685800"/>
+            <a:off x="4611624" y="1554480"/>
+            <a:ext cx="2965704" cy="685800"/>
           </a:xfrm>
           <a:prstGeom prst="rect">
             <a:avLst/>
@@ -12270,6 +12234,264 @@
                 <a:ea typeface="Arial" pitchFamily="34" charset="-122"/>
                 <a:cs typeface="Arial" pitchFamily="34" charset="-120"/>
               </a:rPr>
+              <a:t>Retenção: o pedido de cancelamento</a:t>
+            </a:r>
+            <a:endParaRPr lang="en-US" sz="1600" dirty="0"/>
+          </a:p>
+        </p:txBody>
+      </p:sp>
+      <p:sp>
+        <p:nvSpPr>
+          <p:cNvPr id="18" name="Text 15"/>
+          <p:cNvSpPr/>
+          <p:nvPr/>
+        </p:nvSpPr>
+        <p:spPr>
+          <a:xfrm>
+            <a:off x="4611624" y="2286000"/>
+            <a:ext cx="2965704" cy="2286000"/>
+          </a:xfrm>
+          <a:prstGeom prst="rect">
+            <a:avLst/>
+          </a:prstGeom>
+          <a:noFill/>
+          <a:ln/>
+        </p:spPr>
+        <p:txBody>
+          <a:bodyPr wrap="square" rtlCol="0" anchor="t">
+            <a:normAutofit/>
+          </a:bodyPr>
+          <a:lstStyle/>
+          <a:p>
+            <a:pPr indent="0" marL="0">
+              <a:spcAft>
+                <a:spcPts val="600"/>
+              </a:spcAft>
+              <a:buNone/>
+            </a:pPr>
+            <a:r>
+              <a:rPr lang="en-US" sz="1400" dirty="0">
+                <a:solidFill>
+                  <a:srgbClr val="1F2937"/>
+                </a:solidFill>
+                <a:latin typeface="Arial" pitchFamily="34" charset="0"/>
+                <a:ea typeface="Arial" pitchFamily="34" charset="-122"/>
+                <a:cs typeface="Arial" pitchFamily="34" charset="-120"/>
+              </a:rPr>
+              <a:t>1. Entender o motivo</a:t>
+            </a:r>
+            <a:endParaRPr lang="en-US" sz="1400" dirty="0"/>
+          </a:p>
+          <a:p>
+            <a:pPr indent="0" marL="0">
+              <a:spcAft>
+                <a:spcPts val="600"/>
+              </a:spcAft>
+              <a:buNone/>
+            </a:pPr>
+            <a:r>
+              <a:rPr lang="en-US" sz="1400" dirty="0">
+                <a:solidFill>
+                  <a:srgbClr val="1F2937"/>
+                </a:solidFill>
+                <a:latin typeface="Arial" pitchFamily="34" charset="0"/>
+                <a:ea typeface="Arial" pitchFamily="34" charset="-122"/>
+                <a:cs typeface="Arial" pitchFamily="34" charset="-120"/>
+              </a:rPr>
+              <a:t>2. Mostrar a economia acumulada</a:t>
+            </a:r>
+            <a:endParaRPr lang="en-US" sz="1400" dirty="0"/>
+          </a:p>
+          <a:p>
+            <a:pPr indent="0" marL="0">
+              <a:spcAft>
+                <a:spcPts val="600"/>
+              </a:spcAft>
+              <a:buNone/>
+            </a:pPr>
+            <a:r>
+              <a:rPr lang="en-US" sz="1400" dirty="0">
+                <a:solidFill>
+                  <a:srgbClr val="1F2937"/>
+                </a:solidFill>
+                <a:latin typeface="Arial" pitchFamily="34" charset="0"/>
+                <a:ea typeface="Arial" pitchFamily="34" charset="-122"/>
+                <a:cs typeface="Arial" pitchFamily="34" charset="-120"/>
+              </a:rPr>
+              <a:t>3. Resolver a causa (cota, vencimento, explicação)</a:t>
+            </a:r>
+            <a:endParaRPr lang="en-US" sz="1400" dirty="0"/>
+          </a:p>
+          <a:p>
+            <a:pPr indent="0" marL="0">
+              <a:spcAft>
+                <a:spcPts val="600"/>
+              </a:spcAft>
+              <a:buNone/>
+            </a:pPr>
+            <a:r>
+              <a:rPr lang="en-US" sz="1400" dirty="0">
+                <a:solidFill>
+                  <a:srgbClr val="1F2937"/>
+                </a:solidFill>
+                <a:latin typeface="Arial" pitchFamily="34" charset="0"/>
+                <a:ea typeface="Arial" pitchFamily="34" charset="-122"/>
+                <a:cs typeface="Arial" pitchFamily="34" charset="-120"/>
+              </a:rPr>
+              <a:t>4. Se sair: sair bem (aviso prévio, rateio, última cobrança)</a:t>
+            </a:r>
+            <a:endParaRPr lang="en-US" sz="1400" dirty="0"/>
+          </a:p>
+        </p:txBody>
+      </p:sp>
+      <p:sp>
+        <p:nvSpPr>
+          <p:cNvPr id="19" name="Shape 16"/>
+          <p:cNvSpPr/>
+          <p:nvPr/>
+        </p:nvSpPr>
+        <p:spPr>
+          <a:xfrm>
+            <a:off x="4611624" y="4663440"/>
+            <a:ext cx="2965704" cy="18288"/>
+          </a:xfrm>
+          <a:prstGeom prst="rect">
+            <a:avLst/>
+          </a:prstGeom>
+          <a:solidFill>
+            <a:srgbClr val="D8E0EC"/>
+          </a:solidFill>
+          <a:ln/>
+        </p:spPr>
+      </p:sp>
+      <p:sp>
+        <p:nvSpPr>
+          <p:cNvPr id="20" name="Text 17"/>
+          <p:cNvSpPr/>
+          <p:nvPr/>
+        </p:nvSpPr>
+        <p:spPr>
+          <a:xfrm>
+            <a:off x="4611624" y="4754880"/>
+            <a:ext cx="2965704" cy="1371600"/>
+          </a:xfrm>
+          <a:prstGeom prst="rect">
+            <a:avLst/>
+          </a:prstGeom>
+          <a:noFill/>
+          <a:ln/>
+        </p:spPr>
+        <p:txBody>
+          <a:bodyPr wrap="square" rtlCol="0" anchor="t"/>
+          <a:lstStyle/>
+          <a:p>
+            <a:pPr indent="0" marL="0">
+              <a:buNone/>
+            </a:pPr>
+            <a:r>
+              <a:rPr lang="en-US" sz="1400" i="1" dirty="0">
+                <a:solidFill>
+                  <a:srgbClr val="64748B"/>
+                </a:solidFill>
+                <a:latin typeface="Arial" pitchFamily="34" charset="0"/>
+                <a:ea typeface="Arial" pitchFamily="34" charset="-122"/>
+                <a:cs typeface="Arial" pitchFamily="34" charset="-120"/>
+              </a:rPr>
+              <a:t>No pedido de cancelamento, siga o roteiro da tela. Muitos clientes desistem ao ver quanto já economizaram.</a:t>
+            </a:r>
+            <a:endParaRPr lang="en-US" sz="1400" dirty="0"/>
+          </a:p>
+        </p:txBody>
+      </p:sp>
+      <p:sp>
+        <p:nvSpPr>
+          <p:cNvPr id="21" name="Shape 18"/>
+          <p:cNvSpPr/>
+          <p:nvPr/>
+        </p:nvSpPr>
+        <p:spPr>
+          <a:xfrm>
+            <a:off x="8125968" y="1325880"/>
+            <a:ext cx="3514344" cy="4937760"/>
+          </a:xfrm>
+          <a:prstGeom prst="roundRect">
+            <a:avLst>
+              <a:gd name="adj" fmla="val 2082"/>
+            </a:avLst>
+          </a:prstGeom>
+          <a:solidFill>
+            <a:srgbClr val="FFFFFF"/>
+          </a:solidFill>
+          <a:ln w="9525">
+            <a:solidFill>
+              <a:srgbClr val="D8E0EC"/>
+            </a:solidFill>
+            <a:prstDash val="solid"/>
+          </a:ln>
+          <a:effectLst>
+            <a:outerShdw sx="100000" sy="100000" kx="0" ky="0" algn="bl" rotWithShape="0" blurRad="38100" dist="12700" dir="5400000">
+              <a:srgbClr val="000000">
+                <a:alpha val="8000"/>
+              </a:srgbClr>
+            </a:outerShdw>
+          </a:effectLst>
+        </p:spPr>
+      </p:sp>
+      <p:sp>
+        <p:nvSpPr>
+          <p:cNvPr id="22" name="Shape 19"/>
+          <p:cNvSpPr/>
+          <p:nvPr/>
+        </p:nvSpPr>
+        <p:spPr>
+          <a:xfrm>
+            <a:off x="8125968" y="1325880"/>
+            <a:ext cx="3514344" cy="109728"/>
+          </a:xfrm>
+          <a:prstGeom prst="rect">
+            <a:avLst/>
+          </a:prstGeom>
+          <a:solidFill>
+            <a:srgbClr val="1B3A6B"/>
+          </a:solidFill>
+          <a:ln/>
+        </p:spPr>
+      </p:sp>
+      <p:sp>
+        <p:nvSpPr>
+          <p:cNvPr id="23" name="Text 20"/>
+          <p:cNvSpPr/>
+          <p:nvPr/>
+        </p:nvSpPr>
+        <p:spPr>
+          <a:xfrm>
+            <a:off x="8400288" y="1554480"/>
+            <a:ext cx="2965704" cy="685800"/>
+          </a:xfrm>
+          <a:prstGeom prst="rect">
+            <a:avLst/>
+          </a:prstGeom>
+          <a:noFill/>
+          <a:ln/>
+        </p:spPr>
+        <p:txBody>
+          <a:bodyPr wrap="square" rtlCol="0" anchor="t">
+            <a:normAutofit/>
+          </a:bodyPr>
+          <a:lstStyle/>
+          <a:p>
+            <a:pPr indent="0" marL="0">
+              <a:buNone/>
+            </a:pPr>
+            <a:r>
+              <a:rPr lang="en-US" sz="1600" b="1" dirty="0">
+                <a:solidFill>
+                  <a:srgbClr val="1B3A6B"/>
+                </a:solidFill>
+                <a:latin typeface="Arial" pitchFamily="34" charset="0"/>
+                <a:ea typeface="Arial" pitchFamily="34" charset="-122"/>
+                <a:cs typeface="Arial" pitchFamily="34" charset="-120"/>
+              </a:rPr>
               <a:t>Relacionamento proativo</a:t>
             </a:r>
             <a:endParaRPr lang="en-US" sz="1600" dirty="0"/>
@@ -12278,14 +12500,14 @@
       </p:sp>
       <p:sp>
         <p:nvSpPr>
-          <p:cNvPr id="18" name="Text 15"/>
-          <p:cNvSpPr/>
-          <p:nvPr/>
-        </p:nvSpPr>
-        <p:spPr>
-          <a:xfrm>
-            <a:off x="6505956" y="2286000"/>
-            <a:ext cx="4860036" cy="2286000"/>
+          <p:cNvPr id="24" name="Text 21"/>
+          <p:cNvSpPr/>
+          <p:nvPr/>
+        </p:nvSpPr>
+        <p:spPr>
+          <a:xfrm>
+            <a:off x="8400288" y="2286000"/>
+            <a:ext cx="2965704" cy="2286000"/>
           </a:xfrm>
           <a:prstGeom prst="rect">
             <a:avLst/>
@@ -12386,14 +12608,14 @@
       </p:sp>
       <p:sp>
         <p:nvSpPr>
-          <p:cNvPr id="19" name="Shape 16"/>
-          <p:cNvSpPr/>
-          <p:nvPr/>
-        </p:nvSpPr>
-        <p:spPr>
-          <a:xfrm>
-            <a:off x="6505956" y="4663440"/>
-            <a:ext cx="4860036" cy="18288"/>
+          <p:cNvPr id="25" name="Shape 22"/>
+          <p:cNvSpPr/>
+          <p:nvPr/>
+        </p:nvSpPr>
+        <p:spPr>
+          <a:xfrm>
+            <a:off x="8400288" y="4663440"/>
+            <a:ext cx="2965704" cy="18288"/>
           </a:xfrm>
           <a:prstGeom prst="rect">
             <a:avLst/>
@@ -12406,14 +12628,14 @@
       </p:sp>
       <p:sp>
         <p:nvSpPr>
-          <p:cNvPr id="20" name="Text 17"/>
-          <p:cNvSpPr/>
-          <p:nvPr/>
-        </p:nvSpPr>
-        <p:spPr>
-          <a:xfrm>
-            <a:off x="6505956" y="4754880"/>
-            <a:ext cx="4860036" cy="1371600"/>
+          <p:cNvPr id="26" name="Text 23"/>
+          <p:cNvSpPr/>
+          <p:nvPr/>
+        </p:nvSpPr>
+        <p:spPr>
+          <a:xfrm>
+            <a:off x="8400288" y="4754880"/>
+            <a:ext cx="2965704" cy="1371600"/>
           </a:xfrm>
           <a:prstGeom prst="rect">
             <a:avLst/>
@@ -12429,7 +12651,7 @@
               <a:buNone/>
             </a:pPr>
             <a:r>
-              <a:rPr lang="en-US" sz="1300" i="1" dirty="0">
+              <a:rPr lang="en-US" sz="1400" i="1" dirty="0">
                 <a:solidFill>
                   <a:srgbClr val="64748B"/>
                 </a:solidFill>
@@ -12439,7 +12661,7 @@
               </a:rPr>
               <a:t>O melhor suporte é o proativo, como as ações da tela.</a:t>
             </a:r>
-            <a:endParaRPr lang="en-US" sz="1300" dirty="0"/>
+            <a:endParaRPr lang="en-US" sz="1400" dirty="0"/>
           </a:p>
         </p:txBody>
       </p:sp>
@@ -12502,6 +12724,1208 @@
 <file path=ppt/slides/slide21.xml><?xml version="1.0" encoding="utf-8"?>
 <p:sld xmlns:a="http://schemas.openxmlformats.org/drawingml/2006/main" xmlns:r="http://schemas.openxmlformats.org/officeDocument/2006/relationships" xmlns:p="http://schemas.openxmlformats.org/presentationml/2006/main">
   <p:cSld name="Slide 21">
+    <p:bg>
+      <p:bgPr>
+        <a:solidFill>
+          <a:srgbClr val="EEF3FA"/>
+        </a:solidFill>
+      </p:bgPr>
+    </p:bg>
+    <p:spTree>
+      <p:nvGrpSpPr>
+        <p:cNvPr id="1" name=""/>
+        <p:cNvGrpSpPr/>
+        <p:nvPr/>
+      </p:nvGrpSpPr>
+      <p:grpSpPr>
+        <a:xfrm>
+          <a:off x="0" y="0"/>
+          <a:ext cx="0" cy="0"/>
+          <a:chOff x="0" y="0"/>
+          <a:chExt cx="0" cy="0"/>
+        </a:xfrm>
+      </p:grpSpPr>
+      <p:sp>
+        <p:nvSpPr>
+          <p:cNvPr id="2" name="Shape 0"/>
+          <p:cNvSpPr/>
+          <p:nvPr/>
+        </p:nvSpPr>
+        <p:spPr>
+          <a:xfrm>
+            <a:off x="0" y="6510528"/>
+            <a:ext cx="12191695" cy="347472"/>
+          </a:xfrm>
+          <a:prstGeom prst="rect">
+            <a:avLst/>
+          </a:prstGeom>
+          <a:solidFill>
+            <a:srgbClr val="FFFFFF"/>
+          </a:solidFill>
+          <a:ln w="6350">
+            <a:solidFill>
+              <a:srgbClr val="D8E0EC"/>
+            </a:solidFill>
+            <a:prstDash val="solid"/>
+          </a:ln>
+        </p:spPr>
+      </p:sp>
+      <p:pic>
+        <p:nvPicPr>
+          <p:cNvPr id="3" name="Image 0" descr="/www/wwwroot/rexar/gdsolar/docs/curso/slides/assets/logo-gdsolar.png">    </p:cNvPr>
+          <p:cNvPicPr>
+            <a:picLocks noChangeAspect="1"/>
+          </p:cNvPicPr>
+          <p:nvPr/>
+        </p:nvPicPr>
+        <p:blipFill>
+          <a:blip r:embed="rId1"/>
+          <a:stretch>
+            <a:fillRect/>
+          </a:stretch>
+        </p:blipFill>
+        <p:spPr>
+          <a:xfrm>
+            <a:off x="548640" y="6547104"/>
+            <a:ext cx="274320" cy="274320"/>
+          </a:xfrm>
+          <a:prstGeom prst="rect">
+            <a:avLst/>
+          </a:prstGeom>
+        </p:spPr>
+      </p:pic>
+      <p:sp>
+        <p:nvSpPr>
+          <p:cNvPr id="4" name="Text 1"/>
+          <p:cNvSpPr/>
+          <p:nvPr/>
+        </p:nvSpPr>
+        <p:spPr>
+          <a:xfrm>
+            <a:off x="886968" y="6528816"/>
+            <a:ext cx="6400800" cy="310896"/>
+          </a:xfrm>
+          <a:prstGeom prst="rect">
+            <a:avLst/>
+          </a:prstGeom>
+          <a:noFill/>
+          <a:ln/>
+        </p:spPr>
+        <p:txBody>
+          <a:bodyPr wrap="square" rtlCol="0" anchor="ctr"/>
+          <a:lstStyle/>
+          <a:p>
+            <a:pPr indent="0" marL="0">
+              <a:buNone/>
+            </a:pPr>
+            <a:r>
+              <a:rPr lang="en-US" sz="900" b="1" dirty="0">
+                <a:solidFill>
+                  <a:srgbClr val="64748B"/>
+                </a:solidFill>
+                <a:latin typeface="Arial" pitchFamily="34" charset="0"/>
+                <a:ea typeface="Arial" pitchFamily="34" charset="-122"/>
+                <a:cs typeface="Arial" pitchFamily="34" charset="-120"/>
+              </a:rPr>
+              <a:t>GD Solar  ·  Formação em Energia por Assinatura</a:t>
+            </a:r>
+            <a:endParaRPr lang="en-US" sz="900" dirty="0"/>
+          </a:p>
+        </p:txBody>
+      </p:sp>
+      <p:sp>
+        <p:nvSpPr>
+          <p:cNvPr id="5" name="Text 2"/>
+          <p:cNvSpPr/>
+          <p:nvPr/>
+        </p:nvSpPr>
+        <p:spPr>
+          <a:xfrm>
+            <a:off x="7132320" y="6528816"/>
+            <a:ext cx="4023360" cy="310896"/>
+          </a:xfrm>
+          <a:prstGeom prst="rect">
+            <a:avLst/>
+          </a:prstGeom>
+          <a:noFill/>
+          <a:ln/>
+        </p:spPr>
+        <p:txBody>
+          <a:bodyPr wrap="square" rtlCol="0" anchor="ctr"/>
+          <a:lstStyle/>
+          <a:p>
+            <a:pPr algn="r" indent="0" marL="0">
+              <a:buNone/>
+            </a:pPr>
+            <a:r>
+              <a:rPr lang="en-US" sz="900" dirty="0">
+                <a:solidFill>
+                  <a:srgbClr val="64748B"/>
+                </a:solidFill>
+                <a:latin typeface="Arial" pitchFamily="34" charset="0"/>
+                <a:ea typeface="Arial" pitchFamily="34" charset="-122"/>
+                <a:cs typeface="Arial" pitchFamily="34" charset="-120"/>
+              </a:rPr>
+              <a:t>M9 · Aula 4</a:t>
+            </a:r>
+            <a:endParaRPr lang="en-US" sz="900" dirty="0"/>
+          </a:p>
+        </p:txBody>
+      </p:sp>
+      <p:sp>
+        <p:nvSpPr>
+          <p:cNvPr id="6" name="Shape 3"/>
+          <p:cNvSpPr/>
+          <p:nvPr/>
+        </p:nvSpPr>
+        <p:spPr>
+          <a:xfrm>
+            <a:off x="548640" y="384048"/>
+            <a:ext cx="82296" cy="658368"/>
+          </a:xfrm>
+          <a:prstGeom prst="rect">
+            <a:avLst/>
+          </a:prstGeom>
+          <a:solidFill>
+            <a:srgbClr val="F7A23B"/>
+          </a:solidFill>
+          <a:ln/>
+        </p:spPr>
+      </p:sp>
+      <p:sp>
+        <p:nvSpPr>
+          <p:cNvPr id="7" name="Text 4"/>
+          <p:cNvSpPr/>
+          <p:nvPr/>
+        </p:nvSpPr>
+        <p:spPr>
+          <a:xfrm>
+            <a:off x="777240" y="292608"/>
+            <a:ext cx="10972800" cy="274320"/>
+          </a:xfrm>
+          <a:prstGeom prst="rect">
+            <a:avLst/>
+          </a:prstGeom>
+          <a:noFill/>
+          <a:ln/>
+        </p:spPr>
+        <p:txBody>
+          <a:bodyPr wrap="square" rtlCol="0" anchor="ctr"/>
+          <a:lstStyle/>
+          <a:p>
+            <a:pPr indent="0" marL="0">
+              <a:buNone/>
+            </a:pPr>
+            <a:r>
+              <a:rPr lang="en-US" sz="1000" b="1" spc="100" kern="0" dirty="0">
+                <a:solidFill>
+                  <a:srgbClr val="F7A23B"/>
+                </a:solidFill>
+                <a:latin typeface="Arial" pitchFamily="34" charset="0"/>
+                <a:ea typeface="Arial" pitchFamily="34" charset="-122"/>
+                <a:cs typeface="Arial" pitchFamily="34" charset="-120"/>
+              </a:rPr>
+              <a:t>AULA 4 · RESUMO</a:t>
+            </a:r>
+            <a:endParaRPr lang="en-US" sz="1000" dirty="0"/>
+          </a:p>
+        </p:txBody>
+      </p:sp>
+      <p:sp>
+        <p:nvSpPr>
+          <p:cNvPr id="8" name="Text 5"/>
+          <p:cNvSpPr/>
+          <p:nvPr/>
+        </p:nvSpPr>
+        <p:spPr>
+          <a:xfrm>
+            <a:off x="777240" y="530352"/>
+            <a:ext cx="10881360" cy="566928"/>
+          </a:xfrm>
+          <a:prstGeom prst="rect">
+            <a:avLst/>
+          </a:prstGeom>
+          <a:noFill/>
+          <a:ln/>
+        </p:spPr>
+        <p:txBody>
+          <a:bodyPr wrap="square" rtlCol="0" anchor="ctr">
+            <a:normAutofit/>
+          </a:bodyPr>
+          <a:lstStyle/>
+          <a:p>
+            <a:pPr indent="0" marL="0">
+              <a:buNone/>
+            </a:pPr>
+            <a:r>
+              <a:rPr lang="en-US" sz="2600" b="1" dirty="0">
+                <a:solidFill>
+                  <a:srgbClr val="1B3A6B"/>
+                </a:solidFill>
+                <a:latin typeface="Arial" pitchFamily="34" charset="0"/>
+                <a:ea typeface="Arial" pitchFamily="34" charset="-122"/>
+                <a:cs typeface="Arial" pitchFamily="34" charset="-120"/>
+              </a:rPr>
+              <a:t>Para levar desta aula</a:t>
+            </a:r>
+            <a:endParaRPr lang="en-US" sz="2600" dirty="0"/>
+          </a:p>
+        </p:txBody>
+      </p:sp>
+      <p:sp>
+        <p:nvSpPr>
+          <p:cNvPr id="9" name="Shape 6"/>
+          <p:cNvSpPr/>
+          <p:nvPr/>
+        </p:nvSpPr>
+        <p:spPr>
+          <a:xfrm>
+            <a:off x="548640" y="1325880"/>
+            <a:ext cx="5431536" cy="2331720"/>
+          </a:xfrm>
+          <a:prstGeom prst="roundRect">
+            <a:avLst>
+              <a:gd name="adj" fmla="val 3137"/>
+            </a:avLst>
+          </a:prstGeom>
+          <a:solidFill>
+            <a:srgbClr val="FFFFFF"/>
+          </a:solidFill>
+          <a:ln w="9525">
+            <a:solidFill>
+              <a:srgbClr val="D8E0EC"/>
+            </a:solidFill>
+            <a:prstDash val="solid"/>
+          </a:ln>
+          <a:effectLst>
+            <a:outerShdw sx="100000" sy="100000" kx="0" ky="0" algn="bl" rotWithShape="0" blurRad="38100" dist="12700" dir="5400000">
+              <a:srgbClr val="000000">
+                <a:alpha val="8000"/>
+              </a:srgbClr>
+            </a:outerShdw>
+          </a:effectLst>
+        </p:spPr>
+      </p:sp>
+      <p:sp>
+        <p:nvSpPr>
+          <p:cNvPr id="10" name="Shape 7"/>
+          <p:cNvSpPr/>
+          <p:nvPr/>
+        </p:nvSpPr>
+        <p:spPr>
+          <a:xfrm>
+            <a:off x="731520" y="1508760"/>
+            <a:ext cx="457200" cy="457200"/>
+          </a:xfrm>
+          <a:prstGeom prst="ellipse">
+            <a:avLst/>
+          </a:prstGeom>
+          <a:solidFill>
+            <a:srgbClr val="1B3A6B"/>
+          </a:solidFill>
+          <a:ln/>
+        </p:spPr>
+      </p:sp>
+      <p:sp>
+        <p:nvSpPr>
+          <p:cNvPr id="11" name="Text 8"/>
+          <p:cNvSpPr/>
+          <p:nvPr/>
+        </p:nvSpPr>
+        <p:spPr>
+          <a:xfrm>
+            <a:off x="731520" y="1508760"/>
+            <a:ext cx="457200" cy="457200"/>
+          </a:xfrm>
+          <a:prstGeom prst="rect">
+            <a:avLst/>
+          </a:prstGeom>
+          <a:noFill/>
+          <a:ln/>
+        </p:spPr>
+        <p:txBody>
+          <a:bodyPr wrap="square" rtlCol="0" anchor="ctr"/>
+          <a:lstStyle/>
+          <a:p>
+            <a:pPr algn="ctr" indent="0" marL="0">
+              <a:buNone/>
+            </a:pPr>
+            <a:r>
+              <a:rPr lang="en-US" sz="1400" b="1" dirty="0">
+                <a:solidFill>
+                  <a:srgbClr val="FFFFFF"/>
+                </a:solidFill>
+                <a:latin typeface="Arial" pitchFamily="34" charset="0"/>
+                <a:ea typeface="Arial" pitchFamily="34" charset="-122"/>
+                <a:cs typeface="Arial" pitchFamily="34" charset="-120"/>
+              </a:rPr>
+              <a:t>1</a:t>
+            </a:r>
+            <a:endParaRPr lang="en-US" sz="1400" dirty="0"/>
+          </a:p>
+        </p:txBody>
+      </p:sp>
+      <p:sp>
+        <p:nvSpPr>
+          <p:cNvPr id="12" name="Text 9"/>
+          <p:cNvSpPr/>
+          <p:nvPr/>
+        </p:nvSpPr>
+        <p:spPr>
+          <a:xfrm>
+            <a:off x="1325880" y="1435608"/>
+            <a:ext cx="4517136" cy="2112264"/>
+          </a:xfrm>
+          <a:prstGeom prst="rect">
+            <a:avLst/>
+          </a:prstGeom>
+          <a:noFill/>
+          <a:ln/>
+        </p:spPr>
+        <p:txBody>
+          <a:bodyPr wrap="square" rtlCol="0" anchor="ctr">
+            <a:normAutofit/>
+          </a:bodyPr>
+          <a:lstStyle/>
+          <a:p>
+            <a:pPr indent="0" marL="0">
+              <a:buNone/>
+            </a:pPr>
+            <a:r>
+              <a:rPr lang="en-US" sz="1800" dirty="0">
+                <a:solidFill>
+                  <a:srgbClr val="1F2937"/>
+                </a:solidFill>
+                <a:latin typeface="Arial" pitchFamily="34" charset="0"/>
+                <a:ea typeface="Arial" pitchFamily="34" charset="-122"/>
+                <a:cs typeface="Arial" pitchFamily="34" charset="-120"/>
+              </a:rPr>
+              <a:t>Respostas padrão</a:t>
+            </a:r>
+            <a:endParaRPr lang="en-US" sz="1800" dirty="0"/>
+          </a:p>
+        </p:txBody>
+      </p:sp>
+      <p:sp>
+        <p:nvSpPr>
+          <p:cNvPr id="13" name="Shape 10"/>
+          <p:cNvSpPr/>
+          <p:nvPr/>
+        </p:nvSpPr>
+        <p:spPr>
+          <a:xfrm>
+            <a:off x="6208776" y="1325880"/>
+            <a:ext cx="5431536" cy="2331720"/>
+          </a:xfrm>
+          <a:prstGeom prst="roundRect">
+            <a:avLst>
+              <a:gd name="adj" fmla="val 3137"/>
+            </a:avLst>
+          </a:prstGeom>
+          <a:solidFill>
+            <a:srgbClr val="FFFFFF"/>
+          </a:solidFill>
+          <a:ln w="9525">
+            <a:solidFill>
+              <a:srgbClr val="D8E0EC"/>
+            </a:solidFill>
+            <a:prstDash val="solid"/>
+          </a:ln>
+          <a:effectLst>
+            <a:outerShdw sx="100000" sy="100000" kx="0" ky="0" algn="bl" rotWithShape="0" blurRad="38100" dist="12700" dir="5400000">
+              <a:srgbClr val="000000">
+                <a:alpha val="8000"/>
+              </a:srgbClr>
+            </a:outerShdw>
+          </a:effectLst>
+        </p:spPr>
+      </p:sp>
+      <p:sp>
+        <p:nvSpPr>
+          <p:cNvPr id="14" name="Shape 11"/>
+          <p:cNvSpPr/>
+          <p:nvPr/>
+        </p:nvSpPr>
+        <p:spPr>
+          <a:xfrm>
+            <a:off x="6391656" y="1508760"/>
+            <a:ext cx="457200" cy="457200"/>
+          </a:xfrm>
+          <a:prstGeom prst="ellipse">
+            <a:avLst/>
+          </a:prstGeom>
+          <a:solidFill>
+            <a:srgbClr val="F7A23B"/>
+          </a:solidFill>
+          <a:ln/>
+        </p:spPr>
+      </p:sp>
+      <p:sp>
+        <p:nvSpPr>
+          <p:cNvPr id="15" name="Text 12"/>
+          <p:cNvSpPr/>
+          <p:nvPr/>
+        </p:nvSpPr>
+        <p:spPr>
+          <a:xfrm>
+            <a:off x="6391656" y="1508760"/>
+            <a:ext cx="457200" cy="457200"/>
+          </a:xfrm>
+          <a:prstGeom prst="rect">
+            <a:avLst/>
+          </a:prstGeom>
+          <a:noFill/>
+          <a:ln/>
+        </p:spPr>
+        <p:txBody>
+          <a:bodyPr wrap="square" rtlCol="0" anchor="ctr"/>
+          <a:lstStyle/>
+          <a:p>
+            <a:pPr algn="ctr" indent="0" marL="0">
+              <a:buNone/>
+            </a:pPr>
+            <a:r>
+              <a:rPr lang="en-US" sz="1400" b="1" dirty="0">
+                <a:solidFill>
+                  <a:srgbClr val="FFFFFF"/>
+                </a:solidFill>
+                <a:latin typeface="Arial" pitchFamily="34" charset="0"/>
+                <a:ea typeface="Arial" pitchFamily="34" charset="-122"/>
+                <a:cs typeface="Arial" pitchFamily="34" charset="-120"/>
+              </a:rPr>
+              <a:t>2</a:t>
+            </a:r>
+            <a:endParaRPr lang="en-US" sz="1400" dirty="0"/>
+          </a:p>
+        </p:txBody>
+      </p:sp>
+      <p:sp>
+        <p:nvSpPr>
+          <p:cNvPr id="16" name="Text 13"/>
+          <p:cNvSpPr/>
+          <p:nvPr/>
+        </p:nvSpPr>
+        <p:spPr>
+          <a:xfrm>
+            <a:off x="6986016" y="1435608"/>
+            <a:ext cx="4517136" cy="2112264"/>
+          </a:xfrm>
+          <a:prstGeom prst="rect">
+            <a:avLst/>
+          </a:prstGeom>
+          <a:noFill/>
+          <a:ln/>
+        </p:spPr>
+        <p:txBody>
+          <a:bodyPr wrap="square" rtlCol="0" anchor="ctr">
+            <a:normAutofit/>
+          </a:bodyPr>
+          <a:lstStyle/>
+          <a:p>
+            <a:pPr indent="0" marL="0">
+              <a:buNone/>
+            </a:pPr>
+            <a:r>
+              <a:rPr lang="en-US" sz="1800" dirty="0">
+                <a:solidFill>
+                  <a:srgbClr val="1F2937"/>
+                </a:solidFill>
+                <a:latin typeface="Arial" pitchFamily="34" charset="0"/>
+                <a:ea typeface="Arial" pitchFamily="34" charset="-122"/>
+                <a:cs typeface="Arial" pitchFamily="34" charset="-120"/>
+              </a:rPr>
+              <a:t>chamados com histórico</a:t>
+            </a:r>
+            <a:endParaRPr lang="en-US" sz="1800" dirty="0"/>
+          </a:p>
+        </p:txBody>
+      </p:sp>
+      <p:sp>
+        <p:nvSpPr>
+          <p:cNvPr id="17" name="Shape 14"/>
+          <p:cNvSpPr/>
+          <p:nvPr/>
+        </p:nvSpPr>
+        <p:spPr>
+          <a:xfrm>
+            <a:off x="548640" y="3886200"/>
+            <a:ext cx="5431536" cy="2331720"/>
+          </a:xfrm>
+          <a:prstGeom prst="roundRect">
+            <a:avLst>
+              <a:gd name="adj" fmla="val 3137"/>
+            </a:avLst>
+          </a:prstGeom>
+          <a:solidFill>
+            <a:srgbClr val="FFFFFF"/>
+          </a:solidFill>
+          <a:ln w="9525">
+            <a:solidFill>
+              <a:srgbClr val="D8E0EC"/>
+            </a:solidFill>
+            <a:prstDash val="solid"/>
+          </a:ln>
+          <a:effectLst>
+            <a:outerShdw sx="100000" sy="100000" kx="0" ky="0" algn="bl" rotWithShape="0" blurRad="38100" dist="12700" dir="5400000">
+              <a:srgbClr val="000000">
+                <a:alpha val="8000"/>
+              </a:srgbClr>
+            </a:outerShdw>
+          </a:effectLst>
+        </p:spPr>
+      </p:sp>
+      <p:sp>
+        <p:nvSpPr>
+          <p:cNvPr id="18" name="Shape 15"/>
+          <p:cNvSpPr/>
+          <p:nvPr/>
+        </p:nvSpPr>
+        <p:spPr>
+          <a:xfrm>
+            <a:off x="731520" y="4069080"/>
+            <a:ext cx="457200" cy="457200"/>
+          </a:xfrm>
+          <a:prstGeom prst="ellipse">
+            <a:avLst/>
+          </a:prstGeom>
+          <a:solidFill>
+            <a:srgbClr val="1B3A6B"/>
+          </a:solidFill>
+          <a:ln/>
+        </p:spPr>
+      </p:sp>
+      <p:sp>
+        <p:nvSpPr>
+          <p:cNvPr id="19" name="Text 16"/>
+          <p:cNvSpPr/>
+          <p:nvPr/>
+        </p:nvSpPr>
+        <p:spPr>
+          <a:xfrm>
+            <a:off x="731520" y="4069080"/>
+            <a:ext cx="457200" cy="457200"/>
+          </a:xfrm>
+          <a:prstGeom prst="rect">
+            <a:avLst/>
+          </a:prstGeom>
+          <a:noFill/>
+          <a:ln/>
+        </p:spPr>
+        <p:txBody>
+          <a:bodyPr wrap="square" rtlCol="0" anchor="ctr"/>
+          <a:lstStyle/>
+          <a:p>
+            <a:pPr algn="ctr" indent="0" marL="0">
+              <a:buNone/>
+            </a:pPr>
+            <a:r>
+              <a:rPr lang="en-US" sz="1400" b="1" dirty="0">
+                <a:solidFill>
+                  <a:srgbClr val="FFFFFF"/>
+                </a:solidFill>
+                <a:latin typeface="Arial" pitchFamily="34" charset="0"/>
+                <a:ea typeface="Arial" pitchFamily="34" charset="-122"/>
+                <a:cs typeface="Arial" pitchFamily="34" charset="-120"/>
+              </a:rPr>
+              <a:t>3</a:t>
+            </a:r>
+            <a:endParaRPr lang="en-US" sz="1400" dirty="0"/>
+          </a:p>
+        </p:txBody>
+      </p:sp>
+      <p:sp>
+        <p:nvSpPr>
+          <p:cNvPr id="20" name="Text 17"/>
+          <p:cNvSpPr/>
+          <p:nvPr/>
+        </p:nvSpPr>
+        <p:spPr>
+          <a:xfrm>
+            <a:off x="1325880" y="3995928"/>
+            <a:ext cx="4517136" cy="2112264"/>
+          </a:xfrm>
+          <a:prstGeom prst="rect">
+            <a:avLst/>
+          </a:prstGeom>
+          <a:noFill/>
+          <a:ln/>
+        </p:spPr>
+        <p:txBody>
+          <a:bodyPr wrap="square" rtlCol="0" anchor="ctr">
+            <a:normAutofit/>
+          </a:bodyPr>
+          <a:lstStyle/>
+          <a:p>
+            <a:pPr indent="0" marL="0">
+              <a:buNone/>
+            </a:pPr>
+            <a:r>
+              <a:rPr lang="en-US" sz="1800" dirty="0">
+                <a:solidFill>
+                  <a:srgbClr val="1F2937"/>
+                </a:solidFill>
+                <a:latin typeface="Arial" pitchFamily="34" charset="0"/>
+                <a:ea typeface="Arial" pitchFamily="34" charset="-122"/>
+                <a:cs typeface="Arial" pitchFamily="34" charset="-120"/>
+              </a:rPr>
+              <a:t>roteiro de retenção</a:t>
+            </a:r>
+            <a:endParaRPr lang="en-US" sz="1800" dirty="0"/>
+          </a:p>
+        </p:txBody>
+      </p:sp>
+      <p:sp>
+        <p:nvSpPr>
+          <p:cNvPr id="21" name="Shape 18"/>
+          <p:cNvSpPr/>
+          <p:nvPr/>
+        </p:nvSpPr>
+        <p:spPr>
+          <a:xfrm>
+            <a:off x="6208776" y="3886200"/>
+            <a:ext cx="5431536" cy="2331720"/>
+          </a:xfrm>
+          <a:prstGeom prst="roundRect">
+            <a:avLst>
+              <a:gd name="adj" fmla="val 3137"/>
+            </a:avLst>
+          </a:prstGeom>
+          <a:solidFill>
+            <a:srgbClr val="FFFFFF"/>
+          </a:solidFill>
+          <a:ln w="9525">
+            <a:solidFill>
+              <a:srgbClr val="D8E0EC"/>
+            </a:solidFill>
+            <a:prstDash val="solid"/>
+          </a:ln>
+          <a:effectLst>
+            <a:outerShdw sx="100000" sy="100000" kx="0" ky="0" algn="bl" rotWithShape="0" blurRad="38100" dist="12700" dir="5400000">
+              <a:srgbClr val="000000">
+                <a:alpha val="8000"/>
+              </a:srgbClr>
+            </a:outerShdw>
+          </a:effectLst>
+        </p:spPr>
+      </p:sp>
+      <p:sp>
+        <p:nvSpPr>
+          <p:cNvPr id="22" name="Shape 19"/>
+          <p:cNvSpPr/>
+          <p:nvPr/>
+        </p:nvSpPr>
+        <p:spPr>
+          <a:xfrm>
+            <a:off x="6391656" y="4069080"/>
+            <a:ext cx="457200" cy="457200"/>
+          </a:xfrm>
+          <a:prstGeom prst="ellipse">
+            <a:avLst/>
+          </a:prstGeom>
+          <a:solidFill>
+            <a:srgbClr val="F7A23B"/>
+          </a:solidFill>
+          <a:ln/>
+        </p:spPr>
+      </p:sp>
+      <p:sp>
+        <p:nvSpPr>
+          <p:cNvPr id="23" name="Text 20"/>
+          <p:cNvSpPr/>
+          <p:nvPr/>
+        </p:nvSpPr>
+        <p:spPr>
+          <a:xfrm>
+            <a:off x="6391656" y="4069080"/>
+            <a:ext cx="457200" cy="457200"/>
+          </a:xfrm>
+          <a:prstGeom prst="rect">
+            <a:avLst/>
+          </a:prstGeom>
+          <a:noFill/>
+          <a:ln/>
+        </p:spPr>
+        <p:txBody>
+          <a:bodyPr wrap="square" rtlCol="0" anchor="ctr"/>
+          <a:lstStyle/>
+          <a:p>
+            <a:pPr algn="ctr" indent="0" marL="0">
+              <a:buNone/>
+            </a:pPr>
+            <a:r>
+              <a:rPr lang="en-US" sz="1400" b="1" dirty="0">
+                <a:solidFill>
+                  <a:srgbClr val="FFFFFF"/>
+                </a:solidFill>
+                <a:latin typeface="Arial" pitchFamily="34" charset="0"/>
+                <a:ea typeface="Arial" pitchFamily="34" charset="-122"/>
+                <a:cs typeface="Arial" pitchFamily="34" charset="-120"/>
+              </a:rPr>
+              <a:t>4</a:t>
+            </a:r>
+            <a:endParaRPr lang="en-US" sz="1400" dirty="0"/>
+          </a:p>
+        </p:txBody>
+      </p:sp>
+      <p:sp>
+        <p:nvSpPr>
+          <p:cNvPr id="24" name="Text 21"/>
+          <p:cNvSpPr/>
+          <p:nvPr/>
+        </p:nvSpPr>
+        <p:spPr>
+          <a:xfrm>
+            <a:off x="6986016" y="3995928"/>
+            <a:ext cx="4517136" cy="2112264"/>
+          </a:xfrm>
+          <a:prstGeom prst="rect">
+            <a:avLst/>
+          </a:prstGeom>
+          <a:noFill/>
+          <a:ln/>
+        </p:spPr>
+        <p:txBody>
+          <a:bodyPr wrap="square" rtlCol="0" anchor="ctr">
+            <a:normAutofit/>
+          </a:bodyPr>
+          <a:lstStyle/>
+          <a:p>
+            <a:pPr indent="0" marL="0">
+              <a:buNone/>
+            </a:pPr>
+            <a:r>
+              <a:rPr lang="en-US" sz="1800" dirty="0">
+                <a:solidFill>
+                  <a:srgbClr val="1F2937"/>
+                </a:solidFill>
+                <a:latin typeface="Arial" pitchFamily="34" charset="0"/>
+                <a:ea typeface="Arial" pitchFamily="34" charset="-122"/>
+                <a:cs typeface="Arial" pitchFamily="34" charset="-120"/>
+              </a:rPr>
+              <a:t>relacionamento proativo</a:t>
+            </a:r>
+            <a:endParaRPr lang="en-US" sz="1800" dirty="0"/>
+          </a:p>
+        </p:txBody>
+      </p:sp>
+      <p:sp>
+        <p:nvSpPr>
+          <p:cNvPr id="25" name="Slide Number Placeholder 0"/>
+          <p:cNvSpPr>
+            <a:spLocks noGrp="1"/>
+          </p:cNvSpPr>
+          <p:nvPr>
+            <p:ph type="sldNum" sz="quarter" idx="4294967295"/>
+          </p:nvPr>
+        </p:nvSpPr>
+        <p:spPr>
+          <a:xfrm>
+            <a:off x="11292840" y="6556248"/>
+            <a:ext cx="548640" cy="256032"/>
+          </a:xfrm>
+          <a:prstGeom prst="rect">
+            <a:avLst/>
+          </a:prstGeom>
+          <a:extLst>
+            <a:ext uri="{C572A759-6A51-4108-AA02-DFA0A04FC94B}">
+              <ma14:wrappingTextBoxFlag xmlns:ma14="http://schemas.microsoft.com/office/mac/drawingml/2011/main" val="0"/>
+            </a:ext>
+          </a:extLst>
+        </p:spPr>
+        <p:txBody>
+          <a:bodyPr/>
+          <a:lstStyle>
+            <a:lvl1pPr>
+              <a:defRPr sz="900">
+                <a:solidFill>
+                  <a:srgbClr val="1B3A6B"/>
+                </a:solidFill>
+                <a:latin typeface="Arial"/>
+                <a:ea typeface="Arial"/>
+                <a:cs typeface="Arial"/>
+              </a:defRPr>
+            </a:lvl1pPr>
+          </a:lstStyle>
+          <a:p>
+            <a:pPr algn="r"/>
+            <a:fld id="{F7021451-1387-4CA6-816F-3879F97B5CBC}" type="slidenum">
+              <a:rPr b="1" lang="en-US"/>
+              <a:t>21</a:t>
+            </a:fld>
+            <a:endParaRPr lang="en-US"/>
+          </a:p>
+        </p:txBody>
+      </p:sp>
+    </p:spTree>
+  </p:cSld>
+  <p:clrMapOvr>
+    <a:masterClrMapping/>
+  </p:clrMapOvr>
+</p:sld>
+</file>
+
+<file path=ppt/slides/slide22.xml><?xml version="1.0" encoding="utf-8"?>
+<p:sld xmlns:a="http://schemas.openxmlformats.org/drawingml/2006/main" xmlns:r="http://schemas.openxmlformats.org/officeDocument/2006/relationships" xmlns:p="http://schemas.openxmlformats.org/presentationml/2006/main">
+  <p:cSld name="Slide 22">
+    <p:bg>
+      <p:bgPr>
+        <a:solidFill>
+          <a:srgbClr val="0B1F3A"/>
+        </a:solidFill>
+      </p:bgPr>
+    </p:bg>
+    <p:spTree>
+      <p:nvGrpSpPr>
+        <p:cNvPr id="1" name=""/>
+        <p:cNvGrpSpPr/>
+        <p:nvPr/>
+      </p:nvGrpSpPr>
+      <p:grpSpPr>
+        <a:xfrm>
+          <a:off x="0" y="0"/>
+          <a:ext cx="0" cy="0"/>
+          <a:chOff x="0" y="0"/>
+          <a:chExt cx="0" cy="0"/>
+        </a:xfrm>
+      </p:grpSpPr>
+      <p:sp>
+        <p:nvSpPr>
+          <p:cNvPr id="2" name="Shape 0"/>
+          <p:cNvSpPr/>
+          <p:nvPr/>
+        </p:nvSpPr>
+        <p:spPr>
+          <a:xfrm>
+            <a:off x="0" y="0"/>
+            <a:ext cx="4206240" cy="6858000"/>
+          </a:xfrm>
+          <a:prstGeom prst="rect">
+            <a:avLst/>
+          </a:prstGeom>
+          <a:solidFill>
+            <a:srgbClr val="1B3A6B"/>
+          </a:solidFill>
+          <a:ln/>
+        </p:spPr>
+      </p:sp>
+      <p:sp>
+        <p:nvSpPr>
+          <p:cNvPr id="3" name="Text 1"/>
+          <p:cNvSpPr/>
+          <p:nvPr/>
+        </p:nvSpPr>
+        <p:spPr>
+          <a:xfrm>
+            <a:off x="457200" y="548640"/>
+            <a:ext cx="3474720" cy="1737360"/>
+          </a:xfrm>
+          <a:prstGeom prst="rect">
+            <a:avLst/>
+          </a:prstGeom>
+          <a:noFill/>
+          <a:ln/>
+        </p:spPr>
+        <p:txBody>
+          <a:bodyPr wrap="square" rtlCol="0" anchor="ctr"/>
+          <a:lstStyle/>
+          <a:p>
+            <a:pPr indent="0" marL="0">
+              <a:buNone/>
+            </a:pPr>
+            <a:r>
+              <a:rPr lang="en-US" sz="11000" b="1" dirty="0">
+                <a:solidFill>
+                  <a:srgbClr val="F7A23B"/>
+                </a:solidFill>
+                <a:latin typeface="Arial" pitchFamily="34" charset="0"/>
+                <a:ea typeface="Arial" pitchFamily="34" charset="-122"/>
+                <a:cs typeface="Arial" pitchFamily="34" charset="-120"/>
+              </a:rPr>
+              <a:t>05</a:t>
+            </a:r>
+            <a:endParaRPr lang="en-US" sz="11000" dirty="0"/>
+          </a:p>
+        </p:txBody>
+      </p:sp>
+      <p:sp>
+        <p:nvSpPr>
+          <p:cNvPr id="4" name="Text 2"/>
+          <p:cNvSpPr/>
+          <p:nvPr/>
+        </p:nvSpPr>
+        <p:spPr>
+          <a:xfrm>
+            <a:off x="548640" y="2194560"/>
+            <a:ext cx="3291840" cy="548640"/>
+          </a:xfrm>
+          <a:prstGeom prst="rect">
+            <a:avLst/>
+          </a:prstGeom>
+          <a:noFill/>
+          <a:ln/>
+        </p:spPr>
+        <p:txBody>
+          <a:bodyPr wrap="square" rtlCol="0" anchor="ctr"/>
+          <a:lstStyle/>
+          <a:p>
+            <a:pPr indent="0" marL="0">
+              <a:buNone/>
+            </a:pPr>
+            <a:r>
+              <a:rPr lang="en-US" sz="1800" b="1" spc="200" kern="0" dirty="0">
+                <a:solidFill>
+                  <a:srgbClr val="F7A23B"/>
+                </a:solidFill>
+                <a:latin typeface="Arial" pitchFamily="34" charset="0"/>
+                <a:ea typeface="Arial" pitchFamily="34" charset="-122"/>
+                <a:cs typeface="Arial" pitchFamily="34" charset="-120"/>
+              </a:rPr>
+              <a:t>AULA 5</a:t>
+            </a:r>
+            <a:endParaRPr lang="en-US" sz="1800" dirty="0"/>
+          </a:p>
+        </p:txBody>
+      </p:sp>
+      <p:sp>
+        <p:nvSpPr>
+          <p:cNvPr id="5" name="Text 3"/>
+          <p:cNvSpPr/>
+          <p:nvPr/>
+        </p:nvSpPr>
+        <p:spPr>
+          <a:xfrm>
+            <a:off x="548640" y="3200400"/>
+            <a:ext cx="3383280" cy="457200"/>
+          </a:xfrm>
+          <a:prstGeom prst="rect">
+            <a:avLst/>
+          </a:prstGeom>
+          <a:noFill/>
+          <a:ln/>
+        </p:spPr>
+        <p:txBody>
+          <a:bodyPr wrap="square" rtlCol="0" anchor="ctr"/>
+          <a:lstStyle/>
+          <a:p>
+            <a:pPr indent="0" marL="0">
+              <a:buNone/>
+            </a:pPr>
+            <a:r>
+              <a:rPr lang="en-US" sz="1100" dirty="0">
+                <a:solidFill>
+                  <a:srgbClr val="C7D2E3"/>
+                </a:solidFill>
+                <a:latin typeface="Arial" pitchFamily="34" charset="0"/>
+                <a:ea typeface="Arial" pitchFamily="34" charset="-122"/>
+                <a:cs typeface="Arial" pitchFamily="34" charset="-120"/>
+              </a:rPr>
+              <a:t>M9 · Etapa 3 · Operação ponta a ponta</a:t>
+            </a:r>
+            <a:endParaRPr lang="en-US" sz="1100" dirty="0"/>
+          </a:p>
+        </p:txBody>
+      </p:sp>
+      <p:sp>
+        <p:nvSpPr>
+          <p:cNvPr id="6" name="Text 4"/>
+          <p:cNvSpPr/>
+          <p:nvPr/>
+        </p:nvSpPr>
+        <p:spPr>
+          <a:xfrm>
+            <a:off x="548640" y="2743200"/>
+            <a:ext cx="3291840" cy="457200"/>
+          </a:xfrm>
+          <a:prstGeom prst="rect">
+            <a:avLst/>
+          </a:prstGeom>
+          <a:noFill/>
+          <a:ln/>
+        </p:spPr>
+        <p:txBody>
+          <a:bodyPr wrap="square" rtlCol="0" anchor="ctr"/>
+          <a:lstStyle/>
+          <a:p>
+            <a:pPr indent="0" marL="0">
+              <a:buNone/>
+            </a:pPr>
+            <a:r>
+              <a:rPr lang="en-US" sz="1400" dirty="0">
+                <a:solidFill>
+                  <a:srgbClr val="C7D2E3"/>
+                </a:solidFill>
+                <a:latin typeface="Arial" pitchFamily="34" charset="0"/>
+                <a:ea typeface="Arial" pitchFamily="34" charset="-122"/>
+                <a:cs typeface="Arial" pitchFamily="34" charset="-120"/>
+              </a:rPr>
+              <a:t>Prática na plataforma</a:t>
+            </a:r>
+            <a:endParaRPr lang="en-US" sz="1400" dirty="0"/>
+          </a:p>
+        </p:txBody>
+      </p:sp>
+      <p:pic>
+        <p:nvPicPr>
+          <p:cNvPr id="7" name="Image 0" descr="/www/wwwroot/rexar/gdsolar/docs/curso/slides/assets/logo-gdsolar.png">    </p:cNvPr>
+          <p:cNvPicPr>
+            <a:picLocks noChangeAspect="1"/>
+          </p:cNvPicPr>
+          <p:nvPr/>
+        </p:nvPicPr>
+        <p:blipFill>
+          <a:blip r:embed="rId1"/>
+          <a:stretch>
+            <a:fillRect/>
+          </a:stretch>
+        </p:blipFill>
+        <p:spPr>
+          <a:xfrm>
+            <a:off x="548640" y="5669280"/>
+            <a:ext cx="640080" cy="640080"/>
+          </a:xfrm>
+          <a:prstGeom prst="rect">
+            <a:avLst/>
+          </a:prstGeom>
+        </p:spPr>
+      </p:pic>
+      <p:sp>
+        <p:nvSpPr>
+          <p:cNvPr id="8" name="Text 5"/>
+          <p:cNvSpPr/>
+          <p:nvPr/>
+        </p:nvSpPr>
+        <p:spPr>
+          <a:xfrm>
+            <a:off x="4663440" y="822960"/>
+            <a:ext cx="7132320" cy="1463040"/>
+          </a:xfrm>
+          <a:prstGeom prst="rect">
+            <a:avLst/>
+          </a:prstGeom>
+          <a:noFill/>
+          <a:ln/>
+        </p:spPr>
+        <p:txBody>
+          <a:bodyPr wrap="square" rtlCol="0" anchor="b">
+            <a:normAutofit/>
+          </a:bodyPr>
+          <a:lstStyle/>
+          <a:p>
+            <a:pPr indent="0" marL="0">
+              <a:buNone/>
+            </a:pPr>
+            <a:r>
+              <a:rPr lang="en-US" sz="3200" b="1" dirty="0">
+                <a:solidFill>
+                  <a:srgbClr val="FFFFFF"/>
+                </a:solidFill>
+                <a:latin typeface="Arial" pitchFamily="34" charset="0"/>
+                <a:ea typeface="Arial" pitchFamily="34" charset="-122"/>
+                <a:cs typeface="Arial" pitchFamily="34" charset="-120"/>
+              </a:rPr>
+              <a:t>O fechamento do mês</a:t>
+            </a:r>
+            <a:endParaRPr lang="en-US" sz="3200" dirty="0"/>
+          </a:p>
+        </p:txBody>
+      </p:sp>
+      <p:sp>
+        <p:nvSpPr>
+          <p:cNvPr id="9" name="Text 6"/>
+          <p:cNvSpPr/>
+          <p:nvPr/>
+        </p:nvSpPr>
+        <p:spPr>
+          <a:xfrm>
+            <a:off x="4663440" y="2377440"/>
+            <a:ext cx="7132320" cy="822960"/>
+          </a:xfrm>
+          <a:prstGeom prst="rect">
+            <a:avLst/>
+          </a:prstGeom>
+          <a:noFill/>
+          <a:ln/>
+        </p:spPr>
+        <p:txBody>
+          <a:bodyPr wrap="square" rtlCol="0" anchor="t">
+            <a:normAutofit/>
+          </a:bodyPr>
+          <a:lstStyle/>
+          <a:p>
+            <a:pPr indent="0" marL="0">
+              <a:buNone/>
+            </a:pPr>
+            <a:r>
+              <a:rPr lang="en-US" sz="1500" dirty="0">
+                <a:solidFill>
+                  <a:srgbClr val="C7D2E3"/>
+                </a:solidFill>
+                <a:latin typeface="Arial" pitchFamily="34" charset="0"/>
+                <a:ea typeface="Arial" pitchFamily="34" charset="-122"/>
+                <a:cs typeface="Arial" pitchFamily="34" charset="-120"/>
+              </a:rPr>
+              <a:t>Executar o ciclo mensal completo do mês 2, seguindo o SOP</a:t>
+            </a:r>
+            <a:endParaRPr lang="en-US" sz="1500" dirty="0"/>
+          </a:p>
+        </p:txBody>
+      </p:sp>
+      <p:sp>
+        <p:nvSpPr>
+          <p:cNvPr id="10" name="Text 7"/>
+          <p:cNvSpPr/>
+          <p:nvPr/>
+        </p:nvSpPr>
+        <p:spPr>
+          <a:xfrm>
+            <a:off x="4663440" y="3383280"/>
+            <a:ext cx="7132320" cy="2926080"/>
+          </a:xfrm>
+          <a:prstGeom prst="rect">
+            <a:avLst/>
+          </a:prstGeom>
+          <a:noFill/>
+          <a:ln/>
+        </p:spPr>
+        <p:txBody>
+          <a:bodyPr wrap="square" rtlCol="0" anchor="t">
+            <a:normAutofit/>
+          </a:bodyPr>
+          <a:lstStyle/>
+          <a:p>
+            <a:pPr marL="342900" indent="-342900">
+              <a:spcAft>
+                <a:spcPts val="600"/>
+              </a:spcAft>
+              <a:buSzPct val="100000"/>
+              <a:buChar char="▸"/>
+            </a:pPr>
+            <a:r>
+              <a:rPr lang="en-US" sz="1500" dirty="0">
+                <a:solidFill>
+                  <a:srgbClr val="FFFFFF"/>
+                </a:solidFill>
+                <a:latin typeface="Arial" pitchFamily="34" charset="0"/>
+                <a:ea typeface="Arial" pitchFamily="34" charset="-122"/>
+                <a:cs typeface="Arial" pitchFamily="34" charset="-120"/>
+              </a:rPr>
+              <a:t>Passo a passo na plataforma</a:t>
+            </a:r>
+            <a:endParaRPr lang="en-US" sz="1500" dirty="0"/>
+          </a:p>
+        </p:txBody>
+      </p:sp>
+    </p:spTree>
+  </p:cSld>
+  <p:clrMapOvr>
+    <a:masterClrMapping/>
+  </p:clrMapOvr>
+</p:sld>
+</file>
+
+<file path=ppt/slides/slide23.xml><?xml version="1.0" encoding="utf-8"?>
+<p:sld xmlns:a="http://schemas.openxmlformats.org/drawingml/2006/main" xmlns:r="http://schemas.openxmlformats.org/officeDocument/2006/relationships" xmlns:p="http://schemas.openxmlformats.org/presentationml/2006/main">
+  <p:cSld name="Slide 23">
     <p:bg>
       <p:bgPr>
         <a:solidFill>
@@ -12644,7 +14068,7 @@
                 <a:ea typeface="Arial" pitchFamily="34" charset="-122"/>
                 <a:cs typeface="Arial" pitchFamily="34" charset="-120"/>
               </a:rPr>
-              <a:t>M9 · Aula 4</a:t>
+              <a:t>M9 · Aula 5</a:t>
             </a:r>
             <a:endParaRPr lang="en-US" sz="900" dirty="0"/>
           </a:p>
@@ -12703,7 +14127,7 @@
                 <a:ea typeface="Arial" pitchFamily="34" charset="-122"/>
                 <a:cs typeface="Arial" pitchFamily="34" charset="-120"/>
               </a:rPr>
-              <a:t>AULA 4 · SUPORTE E RELACIONAMENTO COM O CLIENTE</a:t>
+              <a:t>AULA 5 · O FECHAMENTO DO MÊS</a:t>
             </a:r>
             <a:endParaRPr lang="en-US" sz="1000" dirty="0"/>
           </a:p>
@@ -12758,57 +14182,66 @@
         </p:nvSpPr>
         <p:spPr>
           <a:xfrm>
-            <a:off x="548640" y="1325880"/>
-            <a:ext cx="11091672" cy="4937760"/>
+            <a:off x="420624" y="1289304"/>
+            <a:ext cx="7114032" cy="4033647"/>
           </a:xfrm>
           <a:prstGeom prst="roundRect">
             <a:avLst>
-              <a:gd name="adj" fmla="val 1481"/>
+              <a:gd name="adj" fmla="val 1360"/>
             </a:avLst>
           </a:prstGeom>
           <a:solidFill>
             <a:srgbClr val="FFFFFF"/>
           </a:solidFill>
-          <a:ln w="9525">
+          <a:ln w="12700">
             <a:solidFill>
               <a:srgbClr val="D8E0EC"/>
             </a:solidFill>
             <a:prstDash val="solid"/>
           </a:ln>
-        </p:spPr>
-      </p:sp>
-      <p:sp>
-        <p:nvSpPr>
-          <p:cNvPr id="10" name="Shape 7"/>
-          <p:cNvSpPr/>
-          <p:nvPr/>
-        </p:nvSpPr>
-        <p:spPr>
-          <a:xfrm>
-            <a:off x="731520" y="1508760"/>
-            <a:ext cx="822960" cy="384048"/>
-          </a:xfrm>
-          <a:prstGeom prst="roundRect">
-            <a:avLst>
-              <a:gd name="adj" fmla="val 47619"/>
-            </a:avLst>
-          </a:prstGeom>
-          <a:solidFill>
-            <a:srgbClr val="F7A23B"/>
-          </a:solidFill>
-          <a:ln/>
-        </p:spPr>
-      </p:sp>
-      <p:sp>
-        <p:nvSpPr>
-          <p:cNvPr id="11" name="Text 8"/>
-          <p:cNvSpPr/>
-          <p:nvPr/>
-        </p:nvSpPr>
-        <p:spPr>
-          <a:xfrm>
-            <a:off x="731520" y="1508760"/>
-            <a:ext cx="822960" cy="384048"/>
+          <a:effectLst>
+            <a:outerShdw sx="100000" sy="100000" kx="0" ky="0" algn="bl" rotWithShape="0" blurRad="76200" dist="25400" dir="5400000">
+              <a:srgbClr val="000000">
+                <a:alpha val="15000"/>
+              </a:srgbClr>
+            </a:outerShdw>
+          </a:effectLst>
+        </p:spPr>
+      </p:sp>
+      <p:pic>
+        <p:nvPicPr>
+          <p:cNvPr id="10" name="Image 1" descr="/www/wwwroot/rexar/gdsolar/docs/curso/slides/telas/alertas.jpg">    </p:cNvPr>
+          <p:cNvPicPr>
+            <a:picLocks noChangeAspect="1"/>
+          </p:cNvPicPr>
+          <p:nvPr/>
+        </p:nvPicPr>
+        <p:blipFill>
+          <a:blip r:embed="rId2"/>
+          <a:stretch>
+            <a:fillRect/>
+          </a:stretch>
+        </p:blipFill>
+        <p:spPr>
+          <a:xfrm>
+            <a:off x="457200" y="1325880"/>
+            <a:ext cx="7040880" cy="3960495"/>
+          </a:xfrm>
+          <a:prstGeom prst="rect">
+            <a:avLst/>
+          </a:prstGeom>
+        </p:spPr>
+      </p:pic>
+      <p:sp>
+        <p:nvSpPr>
+          <p:cNvPr id="11" name="Text 7"/>
+          <p:cNvSpPr/>
+          <p:nvPr/>
+        </p:nvSpPr>
+        <p:spPr>
+          <a:xfrm>
+            <a:off x="457200" y="5332095"/>
+            <a:ext cx="7040880" cy="320040"/>
           </a:xfrm>
           <a:prstGeom prst="rect">
             <a:avLst/>
@@ -12824,71 +14257,30 @@
               <a:buNone/>
             </a:pPr>
             <a:r>
-              <a:rPr lang="en-US" sz="1000" b="1" dirty="0">
-                <a:solidFill>
-                  <a:srgbClr val="FFFFFF"/>
-                </a:solidFill>
-                <a:latin typeface="Arial" pitchFamily="34" charset="0"/>
-                <a:ea typeface="Arial" pitchFamily="34" charset="-122"/>
-                <a:cs typeface="Arial" pitchFamily="34" charset="-120"/>
-              </a:rPr>
-              <a:t>PASSO 1</a:t>
-            </a:r>
-            <a:endParaRPr lang="en-US" sz="1000" dirty="0"/>
-          </a:p>
-        </p:txBody>
-      </p:sp>
-      <p:sp>
-        <p:nvSpPr>
-          <p:cNvPr id="12" name="Text 9"/>
-          <p:cNvSpPr/>
-          <p:nvPr/>
-        </p:nvSpPr>
-        <p:spPr>
-          <a:xfrm>
-            <a:off x="1645920" y="1463040"/>
-            <a:ext cx="9857232" cy="502920"/>
-          </a:xfrm>
-          <a:prstGeom prst="rect">
-            <a:avLst/>
-          </a:prstGeom>
-          <a:noFill/>
-          <a:ln/>
-        </p:spPr>
-        <p:txBody>
-          <a:bodyPr wrap="square" rtlCol="0" anchor="ctr">
-            <a:normAutofit/>
-          </a:bodyPr>
-          <a:lstStyle/>
-          <a:p>
-            <a:pPr indent="0" marL="0">
-              <a:buNone/>
-            </a:pPr>
-            <a:r>
-              <a:rPr lang="en-US" sz="1400" b="1" dirty="0">
-                <a:solidFill>
-                  <a:srgbClr val="1B3A6B"/>
-                </a:solidFill>
-                <a:latin typeface="Arial" pitchFamily="34" charset="0"/>
-                <a:ea typeface="Arial" pitchFamily="34" charset="-122"/>
-                <a:cs typeface="Arial" pitchFamily="34" charset="-120"/>
-              </a:rPr>
-              <a:t>Os chamados na plataforma</a:t>
-            </a:r>
-            <a:endParaRPr lang="en-US" sz="1400" dirty="0"/>
-          </a:p>
-        </p:txBody>
-      </p:sp>
-      <p:sp>
-        <p:nvSpPr>
-          <p:cNvPr id="13" name="Text 10"/>
-          <p:cNvSpPr/>
-          <p:nvPr/>
-        </p:nvSpPr>
-        <p:spPr>
-          <a:xfrm>
-            <a:off x="777240" y="2057400"/>
-            <a:ext cx="10634472" cy="4069080"/>
+              <a:rPr lang="en-US" sz="1100" i="1" dirty="0">
+                <a:solidFill>
+                  <a:srgbClr val="64748B"/>
+                </a:solidFill>
+                <a:latin typeface="Arial" pitchFamily="34" charset="0"/>
+                <a:ea typeface="Arial" pitchFamily="34" charset="-122"/>
+                <a:cs typeface="Arial" pitchFamily="34" charset="-120"/>
+              </a:rPr>
+              <a:t>Alertas operacionais</a:t>
+            </a:r>
+            <a:endParaRPr lang="en-US" sz="1100" dirty="0"/>
+          </a:p>
+        </p:txBody>
+      </p:sp>
+      <p:sp>
+        <p:nvSpPr>
+          <p:cNvPr id="12" name="Text 8"/>
+          <p:cNvSpPr/>
+          <p:nvPr/>
+        </p:nvSpPr>
+        <p:spPr>
+          <a:xfrm>
+            <a:off x="7818120" y="1325880"/>
+            <a:ext cx="3977640" cy="4937760"/>
           </a:xfrm>
           <a:prstGeom prst="rect">
             <a:avLst/>
@@ -12906,7 +14298,41 @@
               <a:buNone/>
             </a:pPr>
             <a:r>
-              <a:rPr lang="en-US" sz="1500" dirty="0">
+              <a:rPr lang="en-US" sz="1500" b="1" dirty="0">
+                <a:solidFill>
+                  <a:srgbClr val="F7A23B"/>
+                </a:solidFill>
+                <a:latin typeface="Arial" pitchFamily="34" charset="0"/>
+                <a:ea typeface="Arial" pitchFamily="34" charset="-122"/>
+                <a:cs typeface="Arial" pitchFamily="34" charset="-120"/>
+              </a:rPr>
+              <a:t>1  </a:t>
+            </a:r>
+            <a:pPr indent="0" marL="0">
+              <a:buNone/>
+            </a:pPr>
+            <a:r>
+              <a:rPr lang="en-US" sz="1400" b="1" dirty="0">
+                <a:solidFill>
+                  <a:srgbClr val="1B3A6B"/>
+                </a:solidFill>
+                <a:latin typeface="Arial" pitchFamily="34" charset="0"/>
+                <a:ea typeface="Arial" pitchFamily="34" charset="-122"/>
+                <a:cs typeface="Arial" pitchFamily="34" charset="-120"/>
+              </a:rPr>
+              <a:t>Geração do mês</a:t>
+            </a:r>
+            <a:endParaRPr lang="en-US" sz="1500" dirty="0"/>
+          </a:p>
+          <a:p>
+            <a:pPr indent="0" marL="0">
+              <a:spcAft>
+                <a:spcPts val="800"/>
+              </a:spcAft>
+              <a:buNone/>
+            </a:pPr>
+            <a:r>
+              <a:rPr lang="en-US" sz="1100" dirty="0">
                 <a:solidFill>
                   <a:srgbClr val="1F2937"/>
                 </a:solidFill>
@@ -12914,7 +14340,7 @@
                 <a:ea typeface="Arial" pitchFamily="34" charset="-122"/>
                 <a:cs typeface="Arial" pitchFamily="34" charset="-120"/>
               </a:rPr>
-              <a:t>Cliente abre o chamado no portal</a:t>
+              <a:t>Registre a geração do mês e compare com o esperado.</a:t>
             </a:r>
             <a:endParaRPr lang="en-US" sz="1500" dirty="0"/>
           </a:p>
@@ -12923,7 +14349,41 @@
               <a:buNone/>
             </a:pPr>
             <a:r>
-              <a:rPr lang="en-US" sz="1500" dirty="0">
+              <a:rPr lang="en-US" sz="1500" b="1" dirty="0">
+                <a:solidFill>
+                  <a:srgbClr val="F7A23B"/>
+                </a:solidFill>
+                <a:latin typeface="Arial" pitchFamily="34" charset="0"/>
+                <a:ea typeface="Arial" pitchFamily="34" charset="-122"/>
+                <a:cs typeface="Arial" pitchFamily="34" charset="-120"/>
+              </a:rPr>
+              <a:t>2  </a:t>
+            </a:r>
+            <a:pPr indent="0" marL="0">
+              <a:buNone/>
+            </a:pPr>
+            <a:r>
+              <a:rPr lang="en-US" sz="1400" b="1" dirty="0">
+                <a:solidFill>
+                  <a:srgbClr val="1B3A6B"/>
+                </a:solidFill>
+                <a:latin typeface="Arial" pitchFamily="34" charset="0"/>
+                <a:ea typeface="Arial" pitchFamily="34" charset="-122"/>
+                <a:cs typeface="Arial" pitchFamily="34" charset="-120"/>
+              </a:rPr>
+              <a:t>Faturas</a:t>
+            </a:r>
+            <a:endParaRPr lang="en-US" sz="1500" dirty="0"/>
+          </a:p>
+          <a:p>
+            <a:pPr indent="0" marL="0">
+              <a:spcAft>
+                <a:spcPts val="800"/>
+              </a:spcAft>
+              <a:buNone/>
+            </a:pPr>
+            <a:r>
+              <a:rPr lang="en-US" sz="1100" dirty="0">
                 <a:solidFill>
                   <a:srgbClr val="1F2937"/>
                 </a:solidFill>
@@ -12931,7 +14391,7 @@
                 <a:ea typeface="Arial" pitchFamily="34" charset="-122"/>
                 <a:cs typeface="Arial" pitchFamily="34" charset="-120"/>
               </a:rPr>
-              <a:t>equipe responde</a:t>
+              <a:t>Suba e revise as faturas do mês. Investigue o consumo atípico antes de aprovar.</a:t>
             </a:r>
             <a:endParaRPr lang="en-US" sz="1500" dirty="0"/>
           </a:p>
@@ -12940,7 +14400,41 @@
               <a:buNone/>
             </a:pPr>
             <a:r>
-              <a:rPr lang="en-US" sz="1500" dirty="0">
+              <a:rPr lang="en-US" sz="1500" b="1" dirty="0">
+                <a:solidFill>
+                  <a:srgbClr val="F7A23B"/>
+                </a:solidFill>
+                <a:latin typeface="Arial" pitchFamily="34" charset="0"/>
+                <a:ea typeface="Arial" pitchFamily="34" charset="-122"/>
+                <a:cs typeface="Arial" pitchFamily="34" charset="-120"/>
+              </a:rPr>
+              <a:t>3  </a:t>
+            </a:r>
+            <a:pPr indent="0" marL="0">
+              <a:buNone/>
+            </a:pPr>
+            <a:r>
+              <a:rPr lang="en-US" sz="1400" b="1" dirty="0">
+                <a:solidFill>
+                  <a:srgbClr val="1B3A6B"/>
+                </a:solidFill>
+                <a:latin typeface="Arial" pitchFamily="34" charset="0"/>
+                <a:ea typeface="Arial" pitchFamily="34" charset="-122"/>
+                <a:cs typeface="Arial" pitchFamily="34" charset="-120"/>
+              </a:rPr>
+              <a:t>Cobranças e pagamentos</a:t>
+            </a:r>
+            <a:endParaRPr lang="en-US" sz="1500" dirty="0"/>
+          </a:p>
+          <a:p>
+            <a:pPr indent="0" marL="0">
+              <a:spcAft>
+                <a:spcPts val="800"/>
+              </a:spcAft>
+              <a:buNone/>
+            </a:pPr>
+            <a:r>
+              <a:rPr lang="en-US" sz="1100" dirty="0">
                 <a:solidFill>
                   <a:srgbClr val="1F2937"/>
                 </a:solidFill>
@@ -12948,7 +14442,7 @@
                 <a:ea typeface="Arial" pitchFamily="34" charset="-122"/>
                 <a:cs typeface="Arial" pitchFamily="34" charset="-120"/>
               </a:rPr>
-              <a:t>notas internas invisíveis ao cliente</a:t>
+              <a:t>Confira, abra e emita as cobranças, lance o ajuste do mês anterior e trate vencidas e boletos vencidos.</a:t>
             </a:r>
             <a:endParaRPr lang="en-US" sz="1500" dirty="0"/>
           </a:p>
@@ -12957,7 +14451,41 @@
               <a:buNone/>
             </a:pPr>
             <a:r>
-              <a:rPr lang="en-US" sz="1500" dirty="0">
+              <a:rPr lang="en-US" sz="1500" b="1" dirty="0">
+                <a:solidFill>
+                  <a:srgbClr val="F7A23B"/>
+                </a:solidFill>
+                <a:latin typeface="Arial" pitchFamily="34" charset="0"/>
+                <a:ea typeface="Arial" pitchFamily="34" charset="-122"/>
+                <a:cs typeface="Arial" pitchFamily="34" charset="-120"/>
+              </a:rPr>
+              <a:t>4  </a:t>
+            </a:r>
+            <a:pPr indent="0" marL="0">
+              <a:buNone/>
+            </a:pPr>
+            <a:r>
+              <a:rPr lang="en-US" sz="1400" b="1" dirty="0">
+                <a:solidFill>
+                  <a:srgbClr val="1B3A6B"/>
+                </a:solidFill>
+                <a:latin typeface="Arial" pitchFamily="34" charset="0"/>
+                <a:ea typeface="Arial" pitchFamily="34" charset="-122"/>
+                <a:cs typeface="Arial" pitchFamily="34" charset="-120"/>
+              </a:rPr>
+              <a:t>Rateio, alertas e repasse</a:t>
+            </a:r>
+            <a:endParaRPr lang="en-US" sz="1500" dirty="0"/>
+          </a:p>
+          <a:p>
+            <a:pPr indent="0" marL="0">
+              <a:spcAft>
+                <a:spcPts val="800"/>
+              </a:spcAft>
+              <a:buNone/>
+            </a:pPr>
+            <a:r>
+              <a:rPr lang="en-US" sz="1100" dirty="0">
                 <a:solidFill>
                   <a:srgbClr val="1F2937"/>
                 </a:solidFill>
@@ -12965,7 +14493,7 @@
                 <a:ea typeface="Arial" pitchFamily="34" charset="-122"/>
                 <a:cs typeface="Arial" pitchFamily="34" charset="-120"/>
               </a:rPr>
-              <a:t>status até fechar</a:t>
+              <a:t>Atualize o rateio com a saída e a entrada de clientes, zere os alertas críticos e calcule o repasse ao produtor.</a:t>
             </a:r>
             <a:endParaRPr lang="en-US" sz="1500" dirty="0"/>
           </a:p>
@@ -13013,1211 +14541,9 @@
             <a:pPr algn="r"/>
             <a:fld id="{F7021451-1387-4CA6-816F-3879F97B5CBC}" type="slidenum">
               <a:rPr b="1" lang="en-US"/>
-              <a:t>21</a:t>
+              <a:t>23</a:t>
             </a:fld>
             <a:endParaRPr lang="en-US"/>
-          </a:p>
-        </p:txBody>
-      </p:sp>
-    </p:spTree>
-  </p:cSld>
-  <p:clrMapOvr>
-    <a:masterClrMapping/>
-  </p:clrMapOvr>
-</p:sld>
-</file>
-
-<file path=ppt/slides/slide22.xml><?xml version="1.0" encoding="utf-8"?>
-<p:sld xmlns:a="http://schemas.openxmlformats.org/drawingml/2006/main" xmlns:r="http://schemas.openxmlformats.org/officeDocument/2006/relationships" xmlns:p="http://schemas.openxmlformats.org/presentationml/2006/main">
-  <p:cSld name="Slide 22">
-    <p:bg>
-      <p:bgPr>
-        <a:solidFill>
-          <a:srgbClr val="EEF3FA"/>
-        </a:solidFill>
-      </p:bgPr>
-    </p:bg>
-    <p:spTree>
-      <p:nvGrpSpPr>
-        <p:cNvPr id="1" name=""/>
-        <p:cNvGrpSpPr/>
-        <p:nvPr/>
-      </p:nvGrpSpPr>
-      <p:grpSpPr>
-        <a:xfrm>
-          <a:off x="0" y="0"/>
-          <a:ext cx="0" cy="0"/>
-          <a:chOff x="0" y="0"/>
-          <a:chExt cx="0" cy="0"/>
-        </a:xfrm>
-      </p:grpSpPr>
-      <p:sp>
-        <p:nvSpPr>
-          <p:cNvPr id="2" name="Shape 0"/>
-          <p:cNvSpPr/>
-          <p:nvPr/>
-        </p:nvSpPr>
-        <p:spPr>
-          <a:xfrm>
-            <a:off x="0" y="6510528"/>
-            <a:ext cx="12191695" cy="347472"/>
-          </a:xfrm>
-          <a:prstGeom prst="rect">
-            <a:avLst/>
-          </a:prstGeom>
-          <a:solidFill>
-            <a:srgbClr val="FFFFFF"/>
-          </a:solidFill>
-          <a:ln w="6350">
-            <a:solidFill>
-              <a:srgbClr val="D8E0EC"/>
-            </a:solidFill>
-            <a:prstDash val="solid"/>
-          </a:ln>
-        </p:spPr>
-      </p:sp>
-      <p:pic>
-        <p:nvPicPr>
-          <p:cNvPr id="3" name="Image 0" descr="/www/wwwroot/rexar/gdsolar/docs/curso/slides/assets/logo-gdsolar.png">    </p:cNvPr>
-          <p:cNvPicPr>
-            <a:picLocks noChangeAspect="1"/>
-          </p:cNvPicPr>
-          <p:nvPr/>
-        </p:nvPicPr>
-        <p:blipFill>
-          <a:blip r:embed="rId1"/>
-          <a:stretch>
-            <a:fillRect/>
-          </a:stretch>
-        </p:blipFill>
-        <p:spPr>
-          <a:xfrm>
-            <a:off x="548640" y="6547104"/>
-            <a:ext cx="274320" cy="274320"/>
-          </a:xfrm>
-          <a:prstGeom prst="rect">
-            <a:avLst/>
-          </a:prstGeom>
-        </p:spPr>
-      </p:pic>
-      <p:sp>
-        <p:nvSpPr>
-          <p:cNvPr id="4" name="Text 1"/>
-          <p:cNvSpPr/>
-          <p:nvPr/>
-        </p:nvSpPr>
-        <p:spPr>
-          <a:xfrm>
-            <a:off x="886968" y="6528816"/>
-            <a:ext cx="6400800" cy="310896"/>
-          </a:xfrm>
-          <a:prstGeom prst="rect">
-            <a:avLst/>
-          </a:prstGeom>
-          <a:noFill/>
-          <a:ln/>
-        </p:spPr>
-        <p:txBody>
-          <a:bodyPr wrap="square" rtlCol="0" anchor="ctr"/>
-          <a:lstStyle/>
-          <a:p>
-            <a:pPr indent="0" marL="0">
-              <a:buNone/>
-            </a:pPr>
-            <a:r>
-              <a:rPr lang="en-US" sz="900" b="1" dirty="0">
-                <a:solidFill>
-                  <a:srgbClr val="64748B"/>
-                </a:solidFill>
-                <a:latin typeface="Arial" pitchFamily="34" charset="0"/>
-                <a:ea typeface="Arial" pitchFamily="34" charset="-122"/>
-                <a:cs typeface="Arial" pitchFamily="34" charset="-120"/>
-              </a:rPr>
-              <a:t>GD Solar  ·  Formação em Energia por Assinatura</a:t>
-            </a:r>
-            <a:endParaRPr lang="en-US" sz="900" dirty="0"/>
-          </a:p>
-        </p:txBody>
-      </p:sp>
-      <p:sp>
-        <p:nvSpPr>
-          <p:cNvPr id="5" name="Text 2"/>
-          <p:cNvSpPr/>
-          <p:nvPr/>
-        </p:nvSpPr>
-        <p:spPr>
-          <a:xfrm>
-            <a:off x="7132320" y="6528816"/>
-            <a:ext cx="4023360" cy="310896"/>
-          </a:xfrm>
-          <a:prstGeom prst="rect">
-            <a:avLst/>
-          </a:prstGeom>
-          <a:noFill/>
-          <a:ln/>
-        </p:spPr>
-        <p:txBody>
-          <a:bodyPr wrap="square" rtlCol="0" anchor="ctr"/>
-          <a:lstStyle/>
-          <a:p>
-            <a:pPr algn="r" indent="0" marL="0">
-              <a:buNone/>
-            </a:pPr>
-            <a:r>
-              <a:rPr lang="en-US" sz="900" dirty="0">
-                <a:solidFill>
-                  <a:srgbClr val="64748B"/>
-                </a:solidFill>
-                <a:latin typeface="Arial" pitchFamily="34" charset="0"/>
-                <a:ea typeface="Arial" pitchFamily="34" charset="-122"/>
-                <a:cs typeface="Arial" pitchFamily="34" charset="-120"/>
-              </a:rPr>
-              <a:t>M9 · Aula 4</a:t>
-            </a:r>
-            <a:endParaRPr lang="en-US" sz="900" dirty="0"/>
-          </a:p>
-        </p:txBody>
-      </p:sp>
-      <p:sp>
-        <p:nvSpPr>
-          <p:cNvPr id="6" name="Shape 3"/>
-          <p:cNvSpPr/>
-          <p:nvPr/>
-        </p:nvSpPr>
-        <p:spPr>
-          <a:xfrm>
-            <a:off x="548640" y="384048"/>
-            <a:ext cx="82296" cy="658368"/>
-          </a:xfrm>
-          <a:prstGeom prst="rect">
-            <a:avLst/>
-          </a:prstGeom>
-          <a:solidFill>
-            <a:srgbClr val="F7A23B"/>
-          </a:solidFill>
-          <a:ln/>
-        </p:spPr>
-      </p:sp>
-      <p:sp>
-        <p:nvSpPr>
-          <p:cNvPr id="7" name="Text 4"/>
-          <p:cNvSpPr/>
-          <p:nvPr/>
-        </p:nvSpPr>
-        <p:spPr>
-          <a:xfrm>
-            <a:off x="777240" y="292608"/>
-            <a:ext cx="10972800" cy="274320"/>
-          </a:xfrm>
-          <a:prstGeom prst="rect">
-            <a:avLst/>
-          </a:prstGeom>
-          <a:noFill/>
-          <a:ln/>
-        </p:spPr>
-        <p:txBody>
-          <a:bodyPr wrap="square" rtlCol="0" anchor="ctr"/>
-          <a:lstStyle/>
-          <a:p>
-            <a:pPr indent="0" marL="0">
-              <a:buNone/>
-            </a:pPr>
-            <a:r>
-              <a:rPr lang="en-US" sz="1000" b="1" spc="100" kern="0" dirty="0">
-                <a:solidFill>
-                  <a:srgbClr val="F7A23B"/>
-                </a:solidFill>
-                <a:latin typeface="Arial" pitchFamily="34" charset="0"/>
-                <a:ea typeface="Arial" pitchFamily="34" charset="-122"/>
-                <a:cs typeface="Arial" pitchFamily="34" charset="-120"/>
-              </a:rPr>
-              <a:t>AULA 4 · RESUMO</a:t>
-            </a:r>
-            <a:endParaRPr lang="en-US" sz="1000" dirty="0"/>
-          </a:p>
-        </p:txBody>
-      </p:sp>
-      <p:sp>
-        <p:nvSpPr>
-          <p:cNvPr id="8" name="Text 5"/>
-          <p:cNvSpPr/>
-          <p:nvPr/>
-        </p:nvSpPr>
-        <p:spPr>
-          <a:xfrm>
-            <a:off x="777240" y="530352"/>
-            <a:ext cx="10881360" cy="566928"/>
-          </a:xfrm>
-          <a:prstGeom prst="rect">
-            <a:avLst/>
-          </a:prstGeom>
-          <a:noFill/>
-          <a:ln/>
-        </p:spPr>
-        <p:txBody>
-          <a:bodyPr wrap="square" rtlCol="0" anchor="ctr">
-            <a:normAutofit/>
-          </a:bodyPr>
-          <a:lstStyle/>
-          <a:p>
-            <a:pPr indent="0" marL="0">
-              <a:buNone/>
-            </a:pPr>
-            <a:r>
-              <a:rPr lang="en-US" sz="2600" b="1" dirty="0">
-                <a:solidFill>
-                  <a:srgbClr val="1B3A6B"/>
-                </a:solidFill>
-                <a:latin typeface="Arial" pitchFamily="34" charset="0"/>
-                <a:ea typeface="Arial" pitchFamily="34" charset="-122"/>
-                <a:cs typeface="Arial" pitchFamily="34" charset="-120"/>
-              </a:rPr>
-              <a:t>Para levar desta aula</a:t>
-            </a:r>
-            <a:endParaRPr lang="en-US" sz="2600" dirty="0"/>
-          </a:p>
-        </p:txBody>
-      </p:sp>
-      <p:sp>
-        <p:nvSpPr>
-          <p:cNvPr id="9" name="Shape 6"/>
-          <p:cNvSpPr/>
-          <p:nvPr/>
-        </p:nvSpPr>
-        <p:spPr>
-          <a:xfrm>
-            <a:off x="548640" y="1325880"/>
-            <a:ext cx="5431536" cy="2331720"/>
-          </a:xfrm>
-          <a:prstGeom prst="roundRect">
-            <a:avLst>
-              <a:gd name="adj" fmla="val 3137"/>
-            </a:avLst>
-          </a:prstGeom>
-          <a:solidFill>
-            <a:srgbClr val="FFFFFF"/>
-          </a:solidFill>
-          <a:ln w="9525">
-            <a:solidFill>
-              <a:srgbClr val="D8E0EC"/>
-            </a:solidFill>
-            <a:prstDash val="solid"/>
-          </a:ln>
-          <a:effectLst>
-            <a:outerShdw sx="100000" sy="100000" kx="0" ky="0" algn="bl" rotWithShape="0" blurRad="38100" dist="12700" dir="5400000">
-              <a:srgbClr val="000000">
-                <a:alpha val="8000"/>
-              </a:srgbClr>
-            </a:outerShdw>
-          </a:effectLst>
-        </p:spPr>
-      </p:sp>
-      <p:sp>
-        <p:nvSpPr>
-          <p:cNvPr id="10" name="Shape 7"/>
-          <p:cNvSpPr/>
-          <p:nvPr/>
-        </p:nvSpPr>
-        <p:spPr>
-          <a:xfrm>
-            <a:off x="731520" y="1508760"/>
-            <a:ext cx="457200" cy="457200"/>
-          </a:xfrm>
-          <a:prstGeom prst="ellipse">
-            <a:avLst/>
-          </a:prstGeom>
-          <a:solidFill>
-            <a:srgbClr val="1B3A6B"/>
-          </a:solidFill>
-          <a:ln/>
-        </p:spPr>
-      </p:sp>
-      <p:sp>
-        <p:nvSpPr>
-          <p:cNvPr id="11" name="Text 8"/>
-          <p:cNvSpPr/>
-          <p:nvPr/>
-        </p:nvSpPr>
-        <p:spPr>
-          <a:xfrm>
-            <a:off x="731520" y="1508760"/>
-            <a:ext cx="457200" cy="457200"/>
-          </a:xfrm>
-          <a:prstGeom prst="rect">
-            <a:avLst/>
-          </a:prstGeom>
-          <a:noFill/>
-          <a:ln/>
-        </p:spPr>
-        <p:txBody>
-          <a:bodyPr wrap="square" rtlCol="0" anchor="ctr"/>
-          <a:lstStyle/>
-          <a:p>
-            <a:pPr algn="ctr" indent="0" marL="0">
-              <a:buNone/>
-            </a:pPr>
-            <a:r>
-              <a:rPr lang="en-US" sz="1400" b="1" dirty="0">
-                <a:solidFill>
-                  <a:srgbClr val="FFFFFF"/>
-                </a:solidFill>
-                <a:latin typeface="Arial" pitchFamily="34" charset="0"/>
-                <a:ea typeface="Arial" pitchFamily="34" charset="-122"/>
-                <a:cs typeface="Arial" pitchFamily="34" charset="-120"/>
-              </a:rPr>
-              <a:t>1</a:t>
-            </a:r>
-            <a:endParaRPr lang="en-US" sz="1400" dirty="0"/>
-          </a:p>
-        </p:txBody>
-      </p:sp>
-      <p:sp>
-        <p:nvSpPr>
-          <p:cNvPr id="12" name="Text 9"/>
-          <p:cNvSpPr/>
-          <p:nvPr/>
-        </p:nvSpPr>
-        <p:spPr>
-          <a:xfrm>
-            <a:off x="1325880" y="1435608"/>
-            <a:ext cx="4517136" cy="2112264"/>
-          </a:xfrm>
-          <a:prstGeom prst="rect">
-            <a:avLst/>
-          </a:prstGeom>
-          <a:noFill/>
-          <a:ln/>
-        </p:spPr>
-        <p:txBody>
-          <a:bodyPr wrap="square" rtlCol="0" anchor="ctr">
-            <a:normAutofit/>
-          </a:bodyPr>
-          <a:lstStyle/>
-          <a:p>
-            <a:pPr indent="0" marL="0">
-              <a:buNone/>
-            </a:pPr>
-            <a:r>
-              <a:rPr lang="en-US" sz="1800" dirty="0">
-                <a:solidFill>
-                  <a:srgbClr val="1F2937"/>
-                </a:solidFill>
-                <a:latin typeface="Arial" pitchFamily="34" charset="0"/>
-                <a:ea typeface="Arial" pitchFamily="34" charset="-122"/>
-                <a:cs typeface="Arial" pitchFamily="34" charset="-120"/>
-              </a:rPr>
-              <a:t>Respostas padrão</a:t>
-            </a:r>
-            <a:endParaRPr lang="en-US" sz="1800" dirty="0"/>
-          </a:p>
-        </p:txBody>
-      </p:sp>
-      <p:sp>
-        <p:nvSpPr>
-          <p:cNvPr id="13" name="Shape 10"/>
-          <p:cNvSpPr/>
-          <p:nvPr/>
-        </p:nvSpPr>
-        <p:spPr>
-          <a:xfrm>
-            <a:off x="6208776" y="1325880"/>
-            <a:ext cx="5431536" cy="2331720"/>
-          </a:xfrm>
-          <a:prstGeom prst="roundRect">
-            <a:avLst>
-              <a:gd name="adj" fmla="val 3137"/>
-            </a:avLst>
-          </a:prstGeom>
-          <a:solidFill>
-            <a:srgbClr val="FFFFFF"/>
-          </a:solidFill>
-          <a:ln w="9525">
-            <a:solidFill>
-              <a:srgbClr val="D8E0EC"/>
-            </a:solidFill>
-            <a:prstDash val="solid"/>
-          </a:ln>
-          <a:effectLst>
-            <a:outerShdw sx="100000" sy="100000" kx="0" ky="0" algn="bl" rotWithShape="0" blurRad="38100" dist="12700" dir="5400000">
-              <a:srgbClr val="000000">
-                <a:alpha val="8000"/>
-              </a:srgbClr>
-            </a:outerShdw>
-          </a:effectLst>
-        </p:spPr>
-      </p:sp>
-      <p:sp>
-        <p:nvSpPr>
-          <p:cNvPr id="14" name="Shape 11"/>
-          <p:cNvSpPr/>
-          <p:nvPr/>
-        </p:nvSpPr>
-        <p:spPr>
-          <a:xfrm>
-            <a:off x="6391656" y="1508760"/>
-            <a:ext cx="457200" cy="457200"/>
-          </a:xfrm>
-          <a:prstGeom prst="ellipse">
-            <a:avLst/>
-          </a:prstGeom>
-          <a:solidFill>
-            <a:srgbClr val="F7A23B"/>
-          </a:solidFill>
-          <a:ln/>
-        </p:spPr>
-      </p:sp>
-      <p:sp>
-        <p:nvSpPr>
-          <p:cNvPr id="15" name="Text 12"/>
-          <p:cNvSpPr/>
-          <p:nvPr/>
-        </p:nvSpPr>
-        <p:spPr>
-          <a:xfrm>
-            <a:off x="6391656" y="1508760"/>
-            <a:ext cx="457200" cy="457200"/>
-          </a:xfrm>
-          <a:prstGeom prst="rect">
-            <a:avLst/>
-          </a:prstGeom>
-          <a:noFill/>
-          <a:ln/>
-        </p:spPr>
-        <p:txBody>
-          <a:bodyPr wrap="square" rtlCol="0" anchor="ctr"/>
-          <a:lstStyle/>
-          <a:p>
-            <a:pPr algn="ctr" indent="0" marL="0">
-              <a:buNone/>
-            </a:pPr>
-            <a:r>
-              <a:rPr lang="en-US" sz="1400" b="1" dirty="0">
-                <a:solidFill>
-                  <a:srgbClr val="FFFFFF"/>
-                </a:solidFill>
-                <a:latin typeface="Arial" pitchFamily="34" charset="0"/>
-                <a:ea typeface="Arial" pitchFamily="34" charset="-122"/>
-                <a:cs typeface="Arial" pitchFamily="34" charset="-120"/>
-              </a:rPr>
-              <a:t>2</a:t>
-            </a:r>
-            <a:endParaRPr lang="en-US" sz="1400" dirty="0"/>
-          </a:p>
-        </p:txBody>
-      </p:sp>
-      <p:sp>
-        <p:nvSpPr>
-          <p:cNvPr id="16" name="Text 13"/>
-          <p:cNvSpPr/>
-          <p:nvPr/>
-        </p:nvSpPr>
-        <p:spPr>
-          <a:xfrm>
-            <a:off x="6986016" y="1435608"/>
-            <a:ext cx="4517136" cy="2112264"/>
-          </a:xfrm>
-          <a:prstGeom prst="rect">
-            <a:avLst/>
-          </a:prstGeom>
-          <a:noFill/>
-          <a:ln/>
-        </p:spPr>
-        <p:txBody>
-          <a:bodyPr wrap="square" rtlCol="0" anchor="ctr">
-            <a:normAutofit/>
-          </a:bodyPr>
-          <a:lstStyle/>
-          <a:p>
-            <a:pPr indent="0" marL="0">
-              <a:buNone/>
-            </a:pPr>
-            <a:r>
-              <a:rPr lang="en-US" sz="1800" dirty="0">
-                <a:solidFill>
-                  <a:srgbClr val="1F2937"/>
-                </a:solidFill>
-                <a:latin typeface="Arial" pitchFamily="34" charset="0"/>
-                <a:ea typeface="Arial" pitchFamily="34" charset="-122"/>
-                <a:cs typeface="Arial" pitchFamily="34" charset="-120"/>
-              </a:rPr>
-              <a:t>chamados com histórico</a:t>
-            </a:r>
-            <a:endParaRPr lang="en-US" sz="1800" dirty="0"/>
-          </a:p>
-        </p:txBody>
-      </p:sp>
-      <p:sp>
-        <p:nvSpPr>
-          <p:cNvPr id="17" name="Shape 14"/>
-          <p:cNvSpPr/>
-          <p:nvPr/>
-        </p:nvSpPr>
-        <p:spPr>
-          <a:xfrm>
-            <a:off x="548640" y="3886200"/>
-            <a:ext cx="5431536" cy="2331720"/>
-          </a:xfrm>
-          <a:prstGeom prst="roundRect">
-            <a:avLst>
-              <a:gd name="adj" fmla="val 3137"/>
-            </a:avLst>
-          </a:prstGeom>
-          <a:solidFill>
-            <a:srgbClr val="FFFFFF"/>
-          </a:solidFill>
-          <a:ln w="9525">
-            <a:solidFill>
-              <a:srgbClr val="D8E0EC"/>
-            </a:solidFill>
-            <a:prstDash val="solid"/>
-          </a:ln>
-          <a:effectLst>
-            <a:outerShdw sx="100000" sy="100000" kx="0" ky="0" algn="bl" rotWithShape="0" blurRad="38100" dist="12700" dir="5400000">
-              <a:srgbClr val="000000">
-                <a:alpha val="8000"/>
-              </a:srgbClr>
-            </a:outerShdw>
-          </a:effectLst>
-        </p:spPr>
-      </p:sp>
-      <p:sp>
-        <p:nvSpPr>
-          <p:cNvPr id="18" name="Shape 15"/>
-          <p:cNvSpPr/>
-          <p:nvPr/>
-        </p:nvSpPr>
-        <p:spPr>
-          <a:xfrm>
-            <a:off x="731520" y="4069080"/>
-            <a:ext cx="457200" cy="457200"/>
-          </a:xfrm>
-          <a:prstGeom prst="ellipse">
-            <a:avLst/>
-          </a:prstGeom>
-          <a:solidFill>
-            <a:srgbClr val="1B3A6B"/>
-          </a:solidFill>
-          <a:ln/>
-        </p:spPr>
-      </p:sp>
-      <p:sp>
-        <p:nvSpPr>
-          <p:cNvPr id="19" name="Text 16"/>
-          <p:cNvSpPr/>
-          <p:nvPr/>
-        </p:nvSpPr>
-        <p:spPr>
-          <a:xfrm>
-            <a:off x="731520" y="4069080"/>
-            <a:ext cx="457200" cy="457200"/>
-          </a:xfrm>
-          <a:prstGeom prst="rect">
-            <a:avLst/>
-          </a:prstGeom>
-          <a:noFill/>
-          <a:ln/>
-        </p:spPr>
-        <p:txBody>
-          <a:bodyPr wrap="square" rtlCol="0" anchor="ctr"/>
-          <a:lstStyle/>
-          <a:p>
-            <a:pPr algn="ctr" indent="0" marL="0">
-              <a:buNone/>
-            </a:pPr>
-            <a:r>
-              <a:rPr lang="en-US" sz="1400" b="1" dirty="0">
-                <a:solidFill>
-                  <a:srgbClr val="FFFFFF"/>
-                </a:solidFill>
-                <a:latin typeface="Arial" pitchFamily="34" charset="0"/>
-                <a:ea typeface="Arial" pitchFamily="34" charset="-122"/>
-                <a:cs typeface="Arial" pitchFamily="34" charset="-120"/>
-              </a:rPr>
-              <a:t>3</a:t>
-            </a:r>
-            <a:endParaRPr lang="en-US" sz="1400" dirty="0"/>
-          </a:p>
-        </p:txBody>
-      </p:sp>
-      <p:sp>
-        <p:nvSpPr>
-          <p:cNvPr id="20" name="Text 17"/>
-          <p:cNvSpPr/>
-          <p:nvPr/>
-        </p:nvSpPr>
-        <p:spPr>
-          <a:xfrm>
-            <a:off x="1325880" y="3995928"/>
-            <a:ext cx="4517136" cy="2112264"/>
-          </a:xfrm>
-          <a:prstGeom prst="rect">
-            <a:avLst/>
-          </a:prstGeom>
-          <a:noFill/>
-          <a:ln/>
-        </p:spPr>
-        <p:txBody>
-          <a:bodyPr wrap="square" rtlCol="0" anchor="ctr">
-            <a:normAutofit/>
-          </a:bodyPr>
-          <a:lstStyle/>
-          <a:p>
-            <a:pPr indent="0" marL="0">
-              <a:buNone/>
-            </a:pPr>
-            <a:r>
-              <a:rPr lang="en-US" sz="1800" dirty="0">
-                <a:solidFill>
-                  <a:srgbClr val="1F2937"/>
-                </a:solidFill>
-                <a:latin typeface="Arial" pitchFamily="34" charset="0"/>
-                <a:ea typeface="Arial" pitchFamily="34" charset="-122"/>
-                <a:cs typeface="Arial" pitchFamily="34" charset="-120"/>
-              </a:rPr>
-              <a:t>roteiro de retenção</a:t>
-            </a:r>
-            <a:endParaRPr lang="en-US" sz="1800" dirty="0"/>
-          </a:p>
-        </p:txBody>
-      </p:sp>
-      <p:sp>
-        <p:nvSpPr>
-          <p:cNvPr id="21" name="Shape 18"/>
-          <p:cNvSpPr/>
-          <p:nvPr/>
-        </p:nvSpPr>
-        <p:spPr>
-          <a:xfrm>
-            <a:off x="6208776" y="3886200"/>
-            <a:ext cx="5431536" cy="2331720"/>
-          </a:xfrm>
-          <a:prstGeom prst="roundRect">
-            <a:avLst>
-              <a:gd name="adj" fmla="val 3137"/>
-            </a:avLst>
-          </a:prstGeom>
-          <a:solidFill>
-            <a:srgbClr val="FFFFFF"/>
-          </a:solidFill>
-          <a:ln w="9525">
-            <a:solidFill>
-              <a:srgbClr val="D8E0EC"/>
-            </a:solidFill>
-            <a:prstDash val="solid"/>
-          </a:ln>
-          <a:effectLst>
-            <a:outerShdw sx="100000" sy="100000" kx="0" ky="0" algn="bl" rotWithShape="0" blurRad="38100" dist="12700" dir="5400000">
-              <a:srgbClr val="000000">
-                <a:alpha val="8000"/>
-              </a:srgbClr>
-            </a:outerShdw>
-          </a:effectLst>
-        </p:spPr>
-      </p:sp>
-      <p:sp>
-        <p:nvSpPr>
-          <p:cNvPr id="22" name="Shape 19"/>
-          <p:cNvSpPr/>
-          <p:nvPr/>
-        </p:nvSpPr>
-        <p:spPr>
-          <a:xfrm>
-            <a:off x="6391656" y="4069080"/>
-            <a:ext cx="457200" cy="457200"/>
-          </a:xfrm>
-          <a:prstGeom prst="ellipse">
-            <a:avLst/>
-          </a:prstGeom>
-          <a:solidFill>
-            <a:srgbClr val="F7A23B"/>
-          </a:solidFill>
-          <a:ln/>
-        </p:spPr>
-      </p:sp>
-      <p:sp>
-        <p:nvSpPr>
-          <p:cNvPr id="23" name="Text 20"/>
-          <p:cNvSpPr/>
-          <p:nvPr/>
-        </p:nvSpPr>
-        <p:spPr>
-          <a:xfrm>
-            <a:off x="6391656" y="4069080"/>
-            <a:ext cx="457200" cy="457200"/>
-          </a:xfrm>
-          <a:prstGeom prst="rect">
-            <a:avLst/>
-          </a:prstGeom>
-          <a:noFill/>
-          <a:ln/>
-        </p:spPr>
-        <p:txBody>
-          <a:bodyPr wrap="square" rtlCol="0" anchor="ctr"/>
-          <a:lstStyle/>
-          <a:p>
-            <a:pPr algn="ctr" indent="0" marL="0">
-              <a:buNone/>
-            </a:pPr>
-            <a:r>
-              <a:rPr lang="en-US" sz="1400" b="1" dirty="0">
-                <a:solidFill>
-                  <a:srgbClr val="FFFFFF"/>
-                </a:solidFill>
-                <a:latin typeface="Arial" pitchFamily="34" charset="0"/>
-                <a:ea typeface="Arial" pitchFamily="34" charset="-122"/>
-                <a:cs typeface="Arial" pitchFamily="34" charset="-120"/>
-              </a:rPr>
-              <a:t>4</a:t>
-            </a:r>
-            <a:endParaRPr lang="en-US" sz="1400" dirty="0"/>
-          </a:p>
-        </p:txBody>
-      </p:sp>
-      <p:sp>
-        <p:nvSpPr>
-          <p:cNvPr id="24" name="Text 21"/>
-          <p:cNvSpPr/>
-          <p:nvPr/>
-        </p:nvSpPr>
-        <p:spPr>
-          <a:xfrm>
-            <a:off x="6986016" y="3995928"/>
-            <a:ext cx="4517136" cy="2112264"/>
-          </a:xfrm>
-          <a:prstGeom prst="rect">
-            <a:avLst/>
-          </a:prstGeom>
-          <a:noFill/>
-          <a:ln/>
-        </p:spPr>
-        <p:txBody>
-          <a:bodyPr wrap="square" rtlCol="0" anchor="ctr">
-            <a:normAutofit/>
-          </a:bodyPr>
-          <a:lstStyle/>
-          <a:p>
-            <a:pPr indent="0" marL="0">
-              <a:buNone/>
-            </a:pPr>
-            <a:r>
-              <a:rPr lang="en-US" sz="1800" dirty="0">
-                <a:solidFill>
-                  <a:srgbClr val="1F2937"/>
-                </a:solidFill>
-                <a:latin typeface="Arial" pitchFamily="34" charset="0"/>
-                <a:ea typeface="Arial" pitchFamily="34" charset="-122"/>
-                <a:cs typeface="Arial" pitchFamily="34" charset="-120"/>
-              </a:rPr>
-              <a:t>relacionamento proativo</a:t>
-            </a:r>
-            <a:endParaRPr lang="en-US" sz="1800" dirty="0"/>
-          </a:p>
-        </p:txBody>
-      </p:sp>
-      <p:sp>
-        <p:nvSpPr>
-          <p:cNvPr id="25" name="Slide Number Placeholder 0"/>
-          <p:cNvSpPr>
-            <a:spLocks noGrp="1"/>
-          </p:cNvSpPr>
-          <p:nvPr>
-            <p:ph type="sldNum" sz="quarter" idx="4294967295"/>
-          </p:nvPr>
-        </p:nvSpPr>
-        <p:spPr>
-          <a:xfrm>
-            <a:off x="11292840" y="6556248"/>
-            <a:ext cx="548640" cy="256032"/>
-          </a:xfrm>
-          <a:prstGeom prst="rect">
-            <a:avLst/>
-          </a:prstGeom>
-          <a:extLst>
-            <a:ext uri="{C572A759-6A51-4108-AA02-DFA0A04FC94B}">
-              <ma14:wrappingTextBoxFlag xmlns:ma14="http://schemas.microsoft.com/office/mac/drawingml/2011/main" val="0"/>
-            </a:ext>
-          </a:extLst>
-        </p:spPr>
-        <p:txBody>
-          <a:bodyPr/>
-          <a:lstStyle>
-            <a:lvl1pPr>
-              <a:defRPr sz="900">
-                <a:solidFill>
-                  <a:srgbClr val="1B3A6B"/>
-                </a:solidFill>
-                <a:latin typeface="Arial"/>
-                <a:ea typeface="Arial"/>
-                <a:cs typeface="Arial"/>
-              </a:defRPr>
-            </a:lvl1pPr>
-          </a:lstStyle>
-          <a:p>
-            <a:pPr algn="r"/>
-            <a:fld id="{F7021451-1387-4CA6-816F-3879F97B5CBC}" type="slidenum">
-              <a:rPr b="1" lang="en-US"/>
-              <a:t>22</a:t>
-            </a:fld>
-            <a:endParaRPr lang="en-US"/>
-          </a:p>
-        </p:txBody>
-      </p:sp>
-    </p:spTree>
-  </p:cSld>
-  <p:clrMapOvr>
-    <a:masterClrMapping/>
-  </p:clrMapOvr>
-</p:sld>
-</file>
-
-<file path=ppt/slides/slide23.xml><?xml version="1.0" encoding="utf-8"?>
-<p:sld xmlns:a="http://schemas.openxmlformats.org/drawingml/2006/main" xmlns:r="http://schemas.openxmlformats.org/officeDocument/2006/relationships" xmlns:p="http://schemas.openxmlformats.org/presentationml/2006/main">
-  <p:cSld name="Slide 23">
-    <p:bg>
-      <p:bgPr>
-        <a:solidFill>
-          <a:srgbClr val="0B1F3A"/>
-        </a:solidFill>
-      </p:bgPr>
-    </p:bg>
-    <p:spTree>
-      <p:nvGrpSpPr>
-        <p:cNvPr id="1" name=""/>
-        <p:cNvGrpSpPr/>
-        <p:nvPr/>
-      </p:nvGrpSpPr>
-      <p:grpSpPr>
-        <a:xfrm>
-          <a:off x="0" y="0"/>
-          <a:ext cx="0" cy="0"/>
-          <a:chOff x="0" y="0"/>
-          <a:chExt cx="0" cy="0"/>
-        </a:xfrm>
-      </p:grpSpPr>
-      <p:sp>
-        <p:nvSpPr>
-          <p:cNvPr id="2" name="Shape 0"/>
-          <p:cNvSpPr/>
-          <p:nvPr/>
-        </p:nvSpPr>
-        <p:spPr>
-          <a:xfrm>
-            <a:off x="0" y="0"/>
-            <a:ext cx="4206240" cy="6858000"/>
-          </a:xfrm>
-          <a:prstGeom prst="rect">
-            <a:avLst/>
-          </a:prstGeom>
-          <a:solidFill>
-            <a:srgbClr val="1B3A6B"/>
-          </a:solidFill>
-          <a:ln/>
-        </p:spPr>
-      </p:sp>
-      <p:sp>
-        <p:nvSpPr>
-          <p:cNvPr id="3" name="Text 1"/>
-          <p:cNvSpPr/>
-          <p:nvPr/>
-        </p:nvSpPr>
-        <p:spPr>
-          <a:xfrm>
-            <a:off x="457200" y="548640"/>
-            <a:ext cx="3474720" cy="1737360"/>
-          </a:xfrm>
-          <a:prstGeom prst="rect">
-            <a:avLst/>
-          </a:prstGeom>
-          <a:noFill/>
-          <a:ln/>
-        </p:spPr>
-        <p:txBody>
-          <a:bodyPr wrap="square" rtlCol="0" anchor="ctr"/>
-          <a:lstStyle/>
-          <a:p>
-            <a:pPr indent="0" marL="0">
-              <a:buNone/>
-            </a:pPr>
-            <a:r>
-              <a:rPr lang="en-US" sz="11000" b="1" dirty="0">
-                <a:solidFill>
-                  <a:srgbClr val="11396F"/>
-                </a:solidFill>
-                <a:latin typeface="Arial" pitchFamily="34" charset="0"/>
-                <a:ea typeface="Arial" pitchFamily="34" charset="-122"/>
-                <a:cs typeface="Arial" pitchFamily="34" charset="-120"/>
-              </a:rPr>
-              <a:t>05</a:t>
-            </a:r>
-            <a:endParaRPr lang="en-US" sz="11000" dirty="0"/>
-          </a:p>
-        </p:txBody>
-      </p:sp>
-      <p:sp>
-        <p:nvSpPr>
-          <p:cNvPr id="4" name="Text 2"/>
-          <p:cNvSpPr/>
-          <p:nvPr/>
-        </p:nvSpPr>
-        <p:spPr>
-          <a:xfrm>
-            <a:off x="548640" y="2194560"/>
-            <a:ext cx="3291840" cy="548640"/>
-          </a:xfrm>
-          <a:prstGeom prst="rect">
-            <a:avLst/>
-          </a:prstGeom>
-          <a:noFill/>
-          <a:ln/>
-        </p:spPr>
-        <p:txBody>
-          <a:bodyPr wrap="square" rtlCol="0" anchor="ctr"/>
-          <a:lstStyle/>
-          <a:p>
-            <a:pPr indent="0" marL="0">
-              <a:buNone/>
-            </a:pPr>
-            <a:r>
-              <a:rPr lang="en-US" sz="1800" b="1" spc="200" kern="0" dirty="0">
-                <a:solidFill>
-                  <a:srgbClr val="F7A23B"/>
-                </a:solidFill>
-                <a:latin typeface="Arial" pitchFamily="34" charset="0"/>
-                <a:ea typeface="Arial" pitchFamily="34" charset="-122"/>
-                <a:cs typeface="Arial" pitchFamily="34" charset="-120"/>
-              </a:rPr>
-              <a:t>AULA 5</a:t>
-            </a:r>
-            <a:endParaRPr lang="en-US" sz="1800" dirty="0"/>
-          </a:p>
-        </p:txBody>
-      </p:sp>
-      <p:sp>
-        <p:nvSpPr>
-          <p:cNvPr id="5" name="Text 3"/>
-          <p:cNvSpPr/>
-          <p:nvPr/>
-        </p:nvSpPr>
-        <p:spPr>
-          <a:xfrm>
-            <a:off x="548640" y="3200400"/>
-            <a:ext cx="3383280" cy="457200"/>
-          </a:xfrm>
-          <a:prstGeom prst="rect">
-            <a:avLst/>
-          </a:prstGeom>
-          <a:noFill/>
-          <a:ln/>
-        </p:spPr>
-        <p:txBody>
-          <a:bodyPr wrap="square" rtlCol="0" anchor="ctr"/>
-          <a:lstStyle/>
-          <a:p>
-            <a:pPr indent="0" marL="0">
-              <a:buNone/>
-            </a:pPr>
-            <a:r>
-              <a:rPr lang="en-US" sz="1100" dirty="0">
-                <a:solidFill>
-                  <a:srgbClr val="C7D2E3"/>
-                </a:solidFill>
-                <a:latin typeface="Arial" pitchFamily="34" charset="0"/>
-                <a:ea typeface="Arial" pitchFamily="34" charset="-122"/>
-                <a:cs typeface="Arial" pitchFamily="34" charset="-120"/>
-              </a:rPr>
-              <a:t>M9 · Etapa 3 · Operação ponta a ponta</a:t>
-            </a:r>
-            <a:endParaRPr lang="en-US" sz="1100" dirty="0"/>
-          </a:p>
-        </p:txBody>
-      </p:sp>
-      <p:sp>
-        <p:nvSpPr>
-          <p:cNvPr id="6" name="Text 4"/>
-          <p:cNvSpPr/>
-          <p:nvPr/>
-        </p:nvSpPr>
-        <p:spPr>
-          <a:xfrm>
-            <a:off x="548640" y="2743200"/>
-            <a:ext cx="3291840" cy="457200"/>
-          </a:xfrm>
-          <a:prstGeom prst="rect">
-            <a:avLst/>
-          </a:prstGeom>
-          <a:noFill/>
-          <a:ln/>
-        </p:spPr>
-        <p:txBody>
-          <a:bodyPr wrap="square" rtlCol="0" anchor="ctr"/>
-          <a:lstStyle/>
-          <a:p>
-            <a:pPr indent="0" marL="0">
-              <a:buNone/>
-            </a:pPr>
-            <a:r>
-              <a:rPr lang="en-US" sz="1400" dirty="0">
-                <a:solidFill>
-                  <a:srgbClr val="C7D2E3"/>
-                </a:solidFill>
-                <a:latin typeface="Arial" pitchFamily="34" charset="0"/>
-                <a:ea typeface="Arial" pitchFamily="34" charset="-122"/>
-                <a:cs typeface="Arial" pitchFamily="34" charset="-120"/>
-              </a:rPr>
-              <a:t>Prática na plataforma</a:t>
-            </a:r>
-            <a:endParaRPr lang="en-US" sz="1400" dirty="0"/>
-          </a:p>
-        </p:txBody>
-      </p:sp>
-      <p:pic>
-        <p:nvPicPr>
-          <p:cNvPr id="7" name="Image 0" descr="/www/wwwroot/rexar/gdsolar/docs/curso/slides/assets/logo-gdsolar.png">    </p:cNvPr>
-          <p:cNvPicPr>
-            <a:picLocks noChangeAspect="1"/>
-          </p:cNvPicPr>
-          <p:nvPr/>
-        </p:nvPicPr>
-        <p:blipFill>
-          <a:blip r:embed="rId1"/>
-          <a:stretch>
-            <a:fillRect/>
-          </a:stretch>
-        </p:blipFill>
-        <p:spPr>
-          <a:xfrm>
-            <a:off x="548640" y="5669280"/>
-            <a:ext cx="640080" cy="640080"/>
-          </a:xfrm>
-          <a:prstGeom prst="rect">
-            <a:avLst/>
-          </a:prstGeom>
-        </p:spPr>
-      </p:pic>
-      <p:sp>
-        <p:nvSpPr>
-          <p:cNvPr id="8" name="Text 5"/>
-          <p:cNvSpPr/>
-          <p:nvPr/>
-        </p:nvSpPr>
-        <p:spPr>
-          <a:xfrm>
-            <a:off x="4663440" y="822960"/>
-            <a:ext cx="7132320" cy="1463040"/>
-          </a:xfrm>
-          <a:prstGeom prst="rect">
-            <a:avLst/>
-          </a:prstGeom>
-          <a:noFill/>
-          <a:ln/>
-        </p:spPr>
-        <p:txBody>
-          <a:bodyPr wrap="square" rtlCol="0" anchor="b">
-            <a:normAutofit/>
-          </a:bodyPr>
-          <a:lstStyle/>
-          <a:p>
-            <a:pPr indent="0" marL="0">
-              <a:buNone/>
-            </a:pPr>
-            <a:r>
-              <a:rPr lang="en-US" sz="3200" b="1" dirty="0">
-                <a:solidFill>
-                  <a:srgbClr val="FFFFFF"/>
-                </a:solidFill>
-                <a:latin typeface="Arial" pitchFamily="34" charset="0"/>
-                <a:ea typeface="Arial" pitchFamily="34" charset="-122"/>
-                <a:cs typeface="Arial" pitchFamily="34" charset="-120"/>
-              </a:rPr>
-              <a:t>o fechamento do mês</a:t>
-            </a:r>
-            <a:endParaRPr lang="en-US" sz="3200" dirty="0"/>
-          </a:p>
-        </p:txBody>
-      </p:sp>
-      <p:sp>
-        <p:nvSpPr>
-          <p:cNvPr id="9" name="Text 6"/>
-          <p:cNvSpPr/>
-          <p:nvPr/>
-        </p:nvSpPr>
-        <p:spPr>
-          <a:xfrm>
-            <a:off x="4663440" y="2377440"/>
-            <a:ext cx="7132320" cy="822960"/>
-          </a:xfrm>
-          <a:prstGeom prst="rect">
-            <a:avLst/>
-          </a:prstGeom>
-          <a:noFill/>
-          <a:ln/>
-        </p:spPr>
-        <p:txBody>
-          <a:bodyPr wrap="square" rtlCol="0" anchor="t">
-            <a:normAutofit/>
-          </a:bodyPr>
-          <a:lstStyle/>
-          <a:p>
-            <a:pPr indent="0" marL="0">
-              <a:buNone/>
-            </a:pPr>
-            <a:r>
-              <a:rPr lang="en-US" sz="1500" dirty="0">
-                <a:solidFill>
-                  <a:srgbClr val="C7D2E3"/>
-                </a:solidFill>
-                <a:latin typeface="Arial" pitchFamily="34" charset="0"/>
-                <a:ea typeface="Arial" pitchFamily="34" charset="-122"/>
-                <a:cs typeface="Arial" pitchFamily="34" charset="-120"/>
-              </a:rPr>
-              <a:t>Executar o ciclo mensal completo do mês 2, seguindo o SOP</a:t>
-            </a:r>
-            <a:endParaRPr lang="en-US" sz="1500" dirty="0"/>
-          </a:p>
-        </p:txBody>
-      </p:sp>
-      <p:sp>
-        <p:nvSpPr>
-          <p:cNvPr id="10" name="Text 7"/>
-          <p:cNvSpPr/>
-          <p:nvPr/>
-        </p:nvSpPr>
-        <p:spPr>
-          <a:xfrm>
-            <a:off x="4663440" y="3383280"/>
-            <a:ext cx="7132320" cy="2926080"/>
-          </a:xfrm>
-          <a:prstGeom prst="rect">
-            <a:avLst/>
-          </a:prstGeom>
-          <a:noFill/>
-          <a:ln/>
-        </p:spPr>
-        <p:txBody>
-          <a:bodyPr wrap="square" rtlCol="0" anchor="t">
-            <a:normAutofit/>
-          </a:bodyPr>
-          <a:lstStyle/>
-          <a:p>
-            <a:pPr marL="342900" indent="-342900">
-              <a:spcAft>
-                <a:spcPts val="600"/>
-              </a:spcAft>
-              <a:buSzPct val="100000"/>
-              <a:buChar char="▸"/>
-            </a:pPr>
-            <a:r>
-              <a:rPr lang="en-US" sz="1500" dirty="0">
-                <a:solidFill>
-                  <a:srgbClr val="FFFFFF"/>
-                </a:solidFill>
-                <a:latin typeface="Arial" pitchFamily="34" charset="0"/>
-                <a:ea typeface="Arial" pitchFamily="34" charset="-122"/>
-                <a:cs typeface="Arial" pitchFamily="34" charset="-120"/>
-              </a:rPr>
-              <a:t>Passo a passo na plataforma</a:t>
-            </a:r>
-            <a:endParaRPr lang="en-US" sz="1500" dirty="0"/>
           </a:p>
         </p:txBody>
       </p:sp>
@@ -14433,7 +14759,7 @@
                 <a:ea typeface="Arial" pitchFamily="34" charset="-122"/>
                 <a:cs typeface="Arial" pitchFamily="34" charset="-120"/>
               </a:rPr>
-              <a:t>AULA 5 · O FECHAMENTO DO MÊS</a:t>
+              <a:t>AULA 5 · NA PLATAFORMA</a:t>
             </a:r>
             <a:endParaRPr lang="en-US" sz="1000" dirty="0"/>
           </a:p>
@@ -14474,7 +14800,7 @@
                 <a:ea typeface="Arial" pitchFamily="34" charset="-122"/>
                 <a:cs typeface="Arial" pitchFamily="34" charset="-120"/>
               </a:rPr>
-              <a:t>Passo a passo na plataforma</a:t>
+              <a:t>Relatório por usina</a:t>
             </a:r>
             <a:endParaRPr lang="en-US" sz="2600" dirty="0"/>
           </a:p>
@@ -14488,12 +14814,12 @@
         </p:nvSpPr>
         <p:spPr>
           <a:xfrm>
-            <a:off x="420624" y="1289304"/>
-            <a:ext cx="7114032" cy="4033647"/>
+            <a:off x="1380744" y="1225296"/>
+            <a:ext cx="9400032" cy="5319522"/>
           </a:xfrm>
           <a:prstGeom prst="roundRect">
             <a:avLst>
-              <a:gd name="adj" fmla="val 1360"/>
+              <a:gd name="adj" fmla="val 1031"/>
             </a:avLst>
           </a:prstGeom>
           <a:solidFill>
@@ -14516,7 +14842,7 @@
       </p:sp>
       <p:pic>
         <p:nvPicPr>
-          <p:cNvPr id="10" name="Image 1" descr="/www/wwwroot/rexar/gdsolar/docs/curso/slides/telas/alertas.jpg">    </p:cNvPr>
+          <p:cNvPr id="10" name="Image 1" descr="/www/wwwroot/rexar/gdsolar/docs/curso/slides/telas/relatorio_usinas.jpg">    </p:cNvPr>
           <p:cNvPicPr>
             <a:picLocks noChangeAspect="1"/>
           </p:cNvPicPr>
@@ -14530,281 +14856,14 @@
         </p:blipFill>
         <p:spPr>
           <a:xfrm>
-            <a:off x="457200" y="1325880"/>
-            <a:ext cx="7040880" cy="3960495"/>
+            <a:off x="1417320" y="1261872"/>
+            <a:ext cx="9326880" cy="5246370"/>
           </a:xfrm>
           <a:prstGeom prst="rect">
             <a:avLst/>
           </a:prstGeom>
         </p:spPr>
       </p:pic>
-      <p:sp>
-        <p:nvSpPr>
-          <p:cNvPr id="11" name="Text 7"/>
-          <p:cNvSpPr/>
-          <p:nvPr/>
-        </p:nvSpPr>
-        <p:spPr>
-          <a:xfrm>
-            <a:off x="457200" y="5332095"/>
-            <a:ext cx="7040880" cy="320040"/>
-          </a:xfrm>
-          <a:prstGeom prst="rect">
-            <a:avLst/>
-          </a:prstGeom>
-          <a:noFill/>
-          <a:ln/>
-        </p:spPr>
-        <p:txBody>
-          <a:bodyPr wrap="square" rtlCol="0" anchor="ctr"/>
-          <a:lstStyle/>
-          <a:p>
-            <a:pPr algn="ctr" indent="0" marL="0">
-              <a:buNone/>
-            </a:pPr>
-            <a:r>
-              <a:rPr lang="en-US" sz="1100" i="1" dirty="0">
-                <a:solidFill>
-                  <a:srgbClr val="64748B"/>
-                </a:solidFill>
-                <a:latin typeface="Arial" pitchFamily="34" charset="0"/>
-                <a:ea typeface="Arial" pitchFamily="34" charset="-122"/>
-                <a:cs typeface="Arial" pitchFamily="34" charset="-120"/>
-              </a:rPr>
-              <a:t>Alertas operacionais</a:t>
-            </a:r>
-            <a:endParaRPr lang="en-US" sz="1100" dirty="0"/>
-          </a:p>
-        </p:txBody>
-      </p:sp>
-      <p:sp>
-        <p:nvSpPr>
-          <p:cNvPr id="12" name="Text 8"/>
-          <p:cNvSpPr/>
-          <p:nvPr/>
-        </p:nvSpPr>
-        <p:spPr>
-          <a:xfrm>
-            <a:off x="7818120" y="1325880"/>
-            <a:ext cx="3977640" cy="4937760"/>
-          </a:xfrm>
-          <a:prstGeom prst="rect">
-            <a:avLst/>
-          </a:prstGeom>
-          <a:noFill/>
-          <a:ln/>
-        </p:spPr>
-        <p:txBody>
-          <a:bodyPr wrap="square" rtlCol="0" anchor="t">
-            <a:normAutofit/>
-          </a:bodyPr>
-          <a:lstStyle/>
-          <a:p>
-            <a:pPr indent="0" marL="0">
-              <a:buNone/>
-            </a:pPr>
-            <a:r>
-              <a:rPr lang="en-US" sz="1500" b="1" dirty="0">
-                <a:solidFill>
-                  <a:srgbClr val="F7A23B"/>
-                </a:solidFill>
-                <a:latin typeface="Arial" pitchFamily="34" charset="0"/>
-                <a:ea typeface="Arial" pitchFamily="34" charset="-122"/>
-                <a:cs typeface="Arial" pitchFamily="34" charset="-120"/>
-              </a:rPr>
-              <a:t>1  </a:t>
-            </a:r>
-            <a:pPr indent="0" marL="0">
-              <a:buNone/>
-            </a:pPr>
-            <a:r>
-              <a:rPr lang="en-US" sz="1400" b="1" dirty="0">
-                <a:solidFill>
-                  <a:srgbClr val="1B3A6B"/>
-                </a:solidFill>
-                <a:latin typeface="Arial" pitchFamily="34" charset="0"/>
-                <a:ea typeface="Arial" pitchFamily="34" charset="-122"/>
-                <a:cs typeface="Arial" pitchFamily="34" charset="-120"/>
-              </a:rPr>
-              <a:t>Geração do mês</a:t>
-            </a:r>
-            <a:endParaRPr lang="en-US" sz="1500" dirty="0"/>
-          </a:p>
-          <a:p>
-            <a:pPr indent="0" marL="0">
-              <a:spcAft>
-                <a:spcPts val="800"/>
-              </a:spcAft>
-              <a:buNone/>
-            </a:pPr>
-            <a:r>
-              <a:rPr lang="en-US" sz="1100" dirty="0">
-                <a:solidFill>
-                  <a:srgbClr val="1F2937"/>
-                </a:solidFill>
-                <a:latin typeface="Arial" pitchFamily="34" charset="0"/>
-                <a:ea typeface="Arial" pitchFamily="34" charset="-122"/>
-                <a:cs typeface="Arial" pitchFamily="34" charset="-120"/>
-              </a:rPr>
-              <a:t>Registre a geração do mês e compare com o esperado.</a:t>
-            </a:r>
-            <a:endParaRPr lang="en-US" sz="1500" dirty="0"/>
-          </a:p>
-          <a:p>
-            <a:pPr indent="0" marL="0">
-              <a:buNone/>
-            </a:pPr>
-            <a:r>
-              <a:rPr lang="en-US" sz="1500" b="1" dirty="0">
-                <a:solidFill>
-                  <a:srgbClr val="F7A23B"/>
-                </a:solidFill>
-                <a:latin typeface="Arial" pitchFamily="34" charset="0"/>
-                <a:ea typeface="Arial" pitchFamily="34" charset="-122"/>
-                <a:cs typeface="Arial" pitchFamily="34" charset="-120"/>
-              </a:rPr>
-              <a:t>2  </a:t>
-            </a:r>
-            <a:pPr indent="0" marL="0">
-              <a:buNone/>
-            </a:pPr>
-            <a:r>
-              <a:rPr lang="en-US" sz="1400" b="1" dirty="0">
-                <a:solidFill>
-                  <a:srgbClr val="1B3A6B"/>
-                </a:solidFill>
-                <a:latin typeface="Arial" pitchFamily="34" charset="0"/>
-                <a:ea typeface="Arial" pitchFamily="34" charset="-122"/>
-                <a:cs typeface="Arial" pitchFamily="34" charset="-120"/>
-              </a:rPr>
-              <a:t>Faturas</a:t>
-            </a:r>
-            <a:endParaRPr lang="en-US" sz="1500" dirty="0"/>
-          </a:p>
-          <a:p>
-            <a:pPr indent="0" marL="0">
-              <a:spcAft>
-                <a:spcPts val="800"/>
-              </a:spcAft>
-              <a:buNone/>
-            </a:pPr>
-            <a:r>
-              <a:rPr lang="en-US" sz="1100" dirty="0">
-                <a:solidFill>
-                  <a:srgbClr val="1F2937"/>
-                </a:solidFill>
-                <a:latin typeface="Arial" pitchFamily="34" charset="0"/>
-                <a:ea typeface="Arial" pitchFamily="34" charset="-122"/>
-                <a:cs typeface="Arial" pitchFamily="34" charset="-120"/>
-              </a:rPr>
-              <a:t>Suba e revise as faturas do mês. Investigue o consumo atípico antes de aprovar.</a:t>
-            </a:r>
-            <a:endParaRPr lang="en-US" sz="1500" dirty="0"/>
-          </a:p>
-          <a:p>
-            <a:pPr indent="0" marL="0">
-              <a:buNone/>
-            </a:pPr>
-            <a:r>
-              <a:rPr lang="en-US" sz="1500" b="1" dirty="0">
-                <a:solidFill>
-                  <a:srgbClr val="F7A23B"/>
-                </a:solidFill>
-                <a:latin typeface="Arial" pitchFamily="34" charset="0"/>
-                <a:ea typeface="Arial" pitchFamily="34" charset="-122"/>
-                <a:cs typeface="Arial" pitchFamily="34" charset="-120"/>
-              </a:rPr>
-              <a:t>3  </a:t>
-            </a:r>
-            <a:pPr indent="0" marL="0">
-              <a:buNone/>
-            </a:pPr>
-            <a:r>
-              <a:rPr lang="en-US" sz="1400" b="1" dirty="0">
-                <a:solidFill>
-                  <a:srgbClr val="1B3A6B"/>
-                </a:solidFill>
-                <a:latin typeface="Arial" pitchFamily="34" charset="0"/>
-                <a:ea typeface="Arial" pitchFamily="34" charset="-122"/>
-                <a:cs typeface="Arial" pitchFamily="34" charset="-120"/>
-              </a:rPr>
-              <a:t>Cobranças e pagamentos</a:t>
-            </a:r>
-            <a:endParaRPr lang="en-US" sz="1500" dirty="0"/>
-          </a:p>
-          <a:p>
-            <a:pPr indent="0" marL="0">
-              <a:spcAft>
-                <a:spcPts val="800"/>
-              </a:spcAft>
-              <a:buNone/>
-            </a:pPr>
-            <a:r>
-              <a:rPr lang="en-US" sz="1100" dirty="0">
-                <a:solidFill>
-                  <a:srgbClr val="1F2937"/>
-                </a:solidFill>
-                <a:latin typeface="Arial" pitchFamily="34" charset="0"/>
-                <a:ea typeface="Arial" pitchFamily="34" charset="-122"/>
-                <a:cs typeface="Arial" pitchFamily="34" charset="-120"/>
-              </a:rPr>
-              <a:t>Confira, abra e emita as cobranças, lance o ajuste do mês anterior e trate vencidas e boletos vencidos.</a:t>
-            </a:r>
-            <a:endParaRPr lang="en-US" sz="1500" dirty="0"/>
-          </a:p>
-          <a:p>
-            <a:pPr indent="0" marL="0">
-              <a:buNone/>
-            </a:pPr>
-            <a:r>
-              <a:rPr lang="en-US" sz="1500" b="1" dirty="0">
-                <a:solidFill>
-                  <a:srgbClr val="F7A23B"/>
-                </a:solidFill>
-                <a:latin typeface="Arial" pitchFamily="34" charset="0"/>
-                <a:ea typeface="Arial" pitchFamily="34" charset="-122"/>
-                <a:cs typeface="Arial" pitchFamily="34" charset="-120"/>
-              </a:rPr>
-              <a:t>4  </a:t>
-            </a:r>
-            <a:pPr indent="0" marL="0">
-              <a:buNone/>
-            </a:pPr>
-            <a:r>
-              <a:rPr lang="en-US" sz="1400" b="1" dirty="0">
-                <a:solidFill>
-                  <a:srgbClr val="1B3A6B"/>
-                </a:solidFill>
-                <a:latin typeface="Arial" pitchFamily="34" charset="0"/>
-                <a:ea typeface="Arial" pitchFamily="34" charset="-122"/>
-                <a:cs typeface="Arial" pitchFamily="34" charset="-120"/>
-              </a:rPr>
-              <a:t>Rateio, alertas e repasse</a:t>
-            </a:r>
-            <a:endParaRPr lang="en-US" sz="1500" dirty="0"/>
-          </a:p>
-          <a:p>
-            <a:pPr indent="0" marL="0">
-              <a:spcAft>
-                <a:spcPts val="800"/>
-              </a:spcAft>
-              <a:buNone/>
-            </a:pPr>
-            <a:r>
-              <a:rPr lang="en-US" sz="1100" dirty="0">
-                <a:solidFill>
-                  <a:srgbClr val="1F2937"/>
-                </a:solidFill>
-                <a:latin typeface="Arial" pitchFamily="34" charset="0"/>
-                <a:ea typeface="Arial" pitchFamily="34" charset="-122"/>
-                <a:cs typeface="Arial" pitchFamily="34" charset="-120"/>
-              </a:rPr>
-              <a:t>Atualize o rateio com a saída e a entrada de clientes, zere os alertas críticos e calcule o repasse ao produtor.</a:t>
-            </a:r>
-            <a:endParaRPr lang="en-US" sz="1500" dirty="0"/>
-          </a:p>
-        </p:txBody>
-      </p:sp>
       <p:sp>
         <p:nvSpPr>
           <p:cNvPr id="25" name="Slide Number Placeholder 0"/>
@@ -15006,7 +15065,7 @@
                 <a:ea typeface="Arial" pitchFamily="34" charset="-122"/>
                 <a:cs typeface="Arial" pitchFamily="34" charset="-120"/>
               </a:rPr>
-              <a:t>M9 · Aula 5</a:t>
+              <a:t>M9 · Teste rápido</a:t>
             </a:r>
             <a:endParaRPr lang="en-US" sz="900" dirty="0"/>
           </a:p>
@@ -15065,7 +15124,7 @@
                 <a:ea typeface="Arial" pitchFamily="34" charset="-122"/>
                 <a:cs typeface="Arial" pitchFamily="34" charset="-120"/>
               </a:rPr>
-              <a:t>AULA 5 · NA PLATAFORMA</a:t>
+              <a:t>QUESTÕES 1–2 DE 5</a:t>
             </a:r>
             <a:endParaRPr lang="en-US" sz="1000" dirty="0"/>
           </a:p>
@@ -15106,7 +15165,7 @@
                 <a:ea typeface="Arial" pitchFamily="34" charset="-122"/>
                 <a:cs typeface="Arial" pitchFamily="34" charset="-120"/>
               </a:rPr>
-              <a:t>Relatório por usina</a:t>
+              <a:t>Teste rápido</a:t>
             </a:r>
             <a:endParaRPr lang="en-US" sz="2600" dirty="0"/>
           </a:p>
@@ -15120,56 +15179,929 @@
         </p:nvSpPr>
         <p:spPr>
           <a:xfrm>
-            <a:off x="1380744" y="1225296"/>
-            <a:ext cx="9400032" cy="5319522"/>
+            <a:off x="548640" y="1325880"/>
+            <a:ext cx="502920" cy="502920"/>
+          </a:xfrm>
+          <a:prstGeom prst="ellipse">
+            <a:avLst/>
+          </a:prstGeom>
+          <a:solidFill>
+            <a:srgbClr val="1B3A6B"/>
+          </a:solidFill>
+          <a:ln/>
+        </p:spPr>
+      </p:sp>
+      <p:sp>
+        <p:nvSpPr>
+          <p:cNvPr id="10" name="Text 7"/>
+          <p:cNvSpPr/>
+          <p:nvPr/>
+        </p:nvSpPr>
+        <p:spPr>
+          <a:xfrm>
+            <a:off x="548640" y="1325880"/>
+            <a:ext cx="502920" cy="502920"/>
+          </a:xfrm>
+          <a:prstGeom prst="rect">
+            <a:avLst/>
+          </a:prstGeom>
+          <a:noFill/>
+          <a:ln/>
+        </p:spPr>
+        <p:txBody>
+          <a:bodyPr wrap="square" rtlCol="0" anchor="ctr"/>
+          <a:lstStyle/>
+          <a:p>
+            <a:pPr algn="ctr" indent="0" marL="0">
+              <a:buNone/>
+            </a:pPr>
+            <a:r>
+              <a:rPr lang="en-US" sz="1600" b="1" dirty="0">
+                <a:solidFill>
+                  <a:srgbClr val="FFFFFF"/>
+                </a:solidFill>
+                <a:latin typeface="Arial" pitchFamily="34" charset="0"/>
+                <a:ea typeface="Arial" pitchFamily="34" charset="-122"/>
+                <a:cs typeface="Arial" pitchFamily="34" charset="-120"/>
+              </a:rPr>
+              <a:t>1</a:t>
+            </a:r>
+            <a:endParaRPr lang="en-US" sz="1600" dirty="0"/>
+          </a:p>
+        </p:txBody>
+      </p:sp>
+      <p:sp>
+        <p:nvSpPr>
+          <p:cNvPr id="11" name="Text 8"/>
+          <p:cNvSpPr/>
+          <p:nvPr/>
+        </p:nvSpPr>
+        <p:spPr>
+          <a:xfrm>
+            <a:off x="1234440" y="1280160"/>
+            <a:ext cx="10424160" cy="640080"/>
+          </a:xfrm>
+          <a:prstGeom prst="rect">
+            <a:avLst/>
+          </a:prstGeom>
+          <a:noFill/>
+          <a:ln/>
+        </p:spPr>
+        <p:txBody>
+          <a:bodyPr wrap="square" rtlCol="0" anchor="ctr"/>
+          <a:lstStyle/>
+          <a:p>
+            <a:pPr indent="0" marL="0">
+              <a:buNone/>
+            </a:pPr>
+            <a:r>
+              <a:rPr lang="en-US" sz="1800" b="1" dirty="0">
+                <a:solidFill>
+                  <a:srgbClr val="1B3A6B"/>
+                </a:solidFill>
+                <a:latin typeface="Arial" pitchFamily="34" charset="0"/>
+                <a:ea typeface="Arial" pitchFamily="34" charset="-122"/>
+                <a:cs typeface="Arial" pitchFamily="34" charset="-120"/>
+              </a:rPr>
+              <a:t>Com que frequência a fila de faturas em revisão deve ser trabalhada?</a:t>
+            </a:r>
+            <a:endParaRPr lang="en-US" sz="1800" dirty="0"/>
+          </a:p>
+        </p:txBody>
+      </p:sp>
+      <p:sp>
+        <p:nvSpPr>
+          <p:cNvPr id="12" name="Shape 9"/>
+          <p:cNvSpPr/>
+          <p:nvPr/>
+        </p:nvSpPr>
+        <p:spPr>
+          <a:xfrm>
+            <a:off x="548640" y="2057400"/>
+            <a:ext cx="2601468" cy="1463040"/>
           </a:xfrm>
           <a:prstGeom prst="roundRect">
             <a:avLst>
-              <a:gd name="adj" fmla="val 1031"/>
+              <a:gd name="adj" fmla="val 5000"/>
             </a:avLst>
           </a:prstGeom>
           <a:solidFill>
             <a:srgbClr val="FFFFFF"/>
           </a:solidFill>
-          <a:ln w="12700">
+          <a:ln w="9525">
             <a:solidFill>
               <a:srgbClr val="D8E0EC"/>
             </a:solidFill>
             <a:prstDash val="solid"/>
           </a:ln>
-          <a:effectLst>
-            <a:outerShdw sx="100000" sy="100000" kx="0" ky="0" algn="bl" rotWithShape="0" blurRad="76200" dist="25400" dir="5400000">
-              <a:srgbClr val="000000">
-                <a:alpha val="15000"/>
-              </a:srgbClr>
-            </a:outerShdw>
-          </a:effectLst>
-        </p:spPr>
-      </p:sp>
-      <p:pic>
-        <p:nvPicPr>
-          <p:cNvPr id="10" name="Image 1" descr="/www/wwwroot/rexar/gdsolar/docs/curso/slides/telas/relatorio_usinas.jpg">    </p:cNvPr>
-          <p:cNvPicPr>
-            <a:picLocks noChangeAspect="1"/>
-          </p:cNvPicPr>
-          <p:nvPr/>
-        </p:nvPicPr>
-        <p:blipFill>
-          <a:blip r:embed="rId2"/>
-          <a:stretch>
-            <a:fillRect/>
-          </a:stretch>
-        </p:blipFill>
-        <p:spPr>
-          <a:xfrm>
-            <a:off x="1417320" y="1261872"/>
-            <a:ext cx="9326880" cy="5246370"/>
-          </a:xfrm>
-          <a:prstGeom prst="rect">
-            <a:avLst/>
-          </a:prstGeom>
-        </p:spPr>
-      </p:pic>
+        </p:spPr>
+      </p:sp>
+      <p:sp>
+        <p:nvSpPr>
+          <p:cNvPr id="13" name="Text 10"/>
+          <p:cNvSpPr/>
+          <p:nvPr/>
+        </p:nvSpPr>
+        <p:spPr>
+          <a:xfrm>
+            <a:off x="685800" y="2148840"/>
+            <a:ext cx="365760" cy="365760"/>
+          </a:xfrm>
+          <a:prstGeom prst="rect">
+            <a:avLst/>
+          </a:prstGeom>
+          <a:noFill/>
+          <a:ln/>
+        </p:spPr>
+        <p:txBody>
+          <a:bodyPr wrap="square" rtlCol="0" anchor="ctr"/>
+          <a:lstStyle/>
+          <a:p>
+            <a:pPr indent="0" marL="0">
+              <a:buNone/>
+            </a:pPr>
+            <a:r>
+              <a:rPr lang="en-US" sz="1400" b="1" dirty="0">
+                <a:solidFill>
+                  <a:srgbClr val="F7A23B"/>
+                </a:solidFill>
+                <a:latin typeface="Arial" pitchFamily="34" charset="0"/>
+                <a:ea typeface="Arial" pitchFamily="34" charset="-122"/>
+                <a:cs typeface="Arial" pitchFamily="34" charset="-120"/>
+              </a:rPr>
+              <a:t>B</a:t>
+            </a:r>
+            <a:endParaRPr lang="en-US" sz="1400" dirty="0"/>
+          </a:p>
+        </p:txBody>
+      </p:sp>
+      <p:sp>
+        <p:nvSpPr>
+          <p:cNvPr id="14" name="Text 11"/>
+          <p:cNvSpPr/>
+          <p:nvPr/>
+        </p:nvSpPr>
+        <p:spPr>
+          <a:xfrm>
+            <a:off x="685800" y="2514600"/>
+            <a:ext cx="2327148" cy="914400"/>
+          </a:xfrm>
+          <a:prstGeom prst="rect">
+            <a:avLst/>
+          </a:prstGeom>
+          <a:noFill/>
+          <a:ln/>
+        </p:spPr>
+        <p:txBody>
+          <a:bodyPr wrap="square" rtlCol="0" anchor="t"/>
+          <a:lstStyle/>
+          <a:p>
+            <a:pPr indent="0" marL="0">
+              <a:buNone/>
+            </a:pPr>
+            <a:r>
+              <a:rPr lang="en-US" sz="1500" dirty="0">
+                <a:solidFill>
+                  <a:srgbClr val="1F2937"/>
+                </a:solidFill>
+                <a:latin typeface="Arial" pitchFamily="34" charset="0"/>
+                <a:ea typeface="Arial" pitchFamily="34" charset="-122"/>
+                <a:cs typeface="Arial" pitchFamily="34" charset="-120"/>
+              </a:rPr>
+              <a:t>mensalmente</a:t>
+            </a:r>
+            <a:endParaRPr lang="en-US" sz="1500" dirty="0"/>
+          </a:p>
+        </p:txBody>
+      </p:sp>
+      <p:sp>
+        <p:nvSpPr>
+          <p:cNvPr id="15" name="Shape 12"/>
+          <p:cNvSpPr/>
+          <p:nvPr/>
+        </p:nvSpPr>
+        <p:spPr>
+          <a:xfrm>
+            <a:off x="3378708" y="2057400"/>
+            <a:ext cx="2601468" cy="1463040"/>
+          </a:xfrm>
+          <a:prstGeom prst="roundRect">
+            <a:avLst>
+              <a:gd name="adj" fmla="val 5000"/>
+            </a:avLst>
+          </a:prstGeom>
+          <a:solidFill>
+            <a:srgbClr val="FFFFFF"/>
+          </a:solidFill>
+          <a:ln w="9525">
+            <a:solidFill>
+              <a:srgbClr val="D8E0EC"/>
+            </a:solidFill>
+            <a:prstDash val="solid"/>
+          </a:ln>
+        </p:spPr>
+      </p:sp>
+      <p:sp>
+        <p:nvSpPr>
+          <p:cNvPr id="16" name="Text 13"/>
+          <p:cNvSpPr/>
+          <p:nvPr/>
+        </p:nvSpPr>
+        <p:spPr>
+          <a:xfrm>
+            <a:off x="3515868" y="2148840"/>
+            <a:ext cx="365760" cy="365760"/>
+          </a:xfrm>
+          <a:prstGeom prst="rect">
+            <a:avLst/>
+          </a:prstGeom>
+          <a:noFill/>
+          <a:ln/>
+        </p:spPr>
+        <p:txBody>
+          <a:bodyPr wrap="square" rtlCol="0" anchor="ctr"/>
+          <a:lstStyle/>
+          <a:p>
+            <a:pPr indent="0" marL="0">
+              <a:buNone/>
+            </a:pPr>
+            <a:r>
+              <a:rPr lang="en-US" sz="1400" b="1" dirty="0">
+                <a:solidFill>
+                  <a:srgbClr val="F7A23B"/>
+                </a:solidFill>
+                <a:latin typeface="Arial" pitchFamily="34" charset="0"/>
+                <a:ea typeface="Arial" pitchFamily="34" charset="-122"/>
+                <a:cs typeface="Arial" pitchFamily="34" charset="-120"/>
+              </a:rPr>
+              <a:t>C</a:t>
+            </a:r>
+            <a:endParaRPr lang="en-US" sz="1400" dirty="0"/>
+          </a:p>
+        </p:txBody>
+      </p:sp>
+      <p:sp>
+        <p:nvSpPr>
+          <p:cNvPr id="17" name="Text 14"/>
+          <p:cNvSpPr/>
+          <p:nvPr/>
+        </p:nvSpPr>
+        <p:spPr>
+          <a:xfrm>
+            <a:off x="3515868" y="2514600"/>
+            <a:ext cx="2327148" cy="914400"/>
+          </a:xfrm>
+          <a:prstGeom prst="rect">
+            <a:avLst/>
+          </a:prstGeom>
+          <a:noFill/>
+          <a:ln/>
+        </p:spPr>
+        <p:txBody>
+          <a:bodyPr wrap="square" rtlCol="0" anchor="t"/>
+          <a:lstStyle/>
+          <a:p>
+            <a:pPr indent="0" marL="0">
+              <a:buNone/>
+            </a:pPr>
+            <a:r>
+              <a:rPr lang="en-US" sz="1500" dirty="0">
+                <a:solidFill>
+                  <a:srgbClr val="1F2937"/>
+                </a:solidFill>
+                <a:latin typeface="Arial" pitchFamily="34" charset="0"/>
+                <a:ea typeface="Arial" pitchFamily="34" charset="-122"/>
+                <a:cs typeface="Arial" pitchFamily="34" charset="-120"/>
+              </a:rPr>
+              <a:t>só quando o cliente reclama</a:t>
+            </a:r>
+            <a:endParaRPr lang="en-US" sz="1500" dirty="0"/>
+          </a:p>
+        </p:txBody>
+      </p:sp>
+      <p:sp>
+        <p:nvSpPr>
+          <p:cNvPr id="18" name="Shape 15"/>
+          <p:cNvSpPr/>
+          <p:nvPr/>
+        </p:nvSpPr>
+        <p:spPr>
+          <a:xfrm>
+            <a:off x="6208776" y="2057400"/>
+            <a:ext cx="2601468" cy="1463040"/>
+          </a:xfrm>
+          <a:prstGeom prst="roundRect">
+            <a:avLst>
+              <a:gd name="adj" fmla="val 5000"/>
+            </a:avLst>
+          </a:prstGeom>
+          <a:solidFill>
+            <a:srgbClr val="FFFFFF"/>
+          </a:solidFill>
+          <a:ln w="9525">
+            <a:solidFill>
+              <a:srgbClr val="D8E0EC"/>
+            </a:solidFill>
+            <a:prstDash val="solid"/>
+          </a:ln>
+        </p:spPr>
+      </p:sp>
+      <p:sp>
+        <p:nvSpPr>
+          <p:cNvPr id="19" name="Text 16"/>
+          <p:cNvSpPr/>
+          <p:nvPr/>
+        </p:nvSpPr>
+        <p:spPr>
+          <a:xfrm>
+            <a:off x="6345936" y="2148840"/>
+            <a:ext cx="365760" cy="365760"/>
+          </a:xfrm>
+          <a:prstGeom prst="rect">
+            <a:avLst/>
+          </a:prstGeom>
+          <a:noFill/>
+          <a:ln/>
+        </p:spPr>
+        <p:txBody>
+          <a:bodyPr wrap="square" rtlCol="0" anchor="ctr"/>
+          <a:lstStyle/>
+          <a:p>
+            <a:pPr indent="0" marL="0">
+              <a:buNone/>
+            </a:pPr>
+            <a:r>
+              <a:rPr lang="en-US" sz="1400" b="1" dirty="0">
+                <a:solidFill>
+                  <a:srgbClr val="F7A23B"/>
+                </a:solidFill>
+                <a:latin typeface="Arial" pitchFamily="34" charset="0"/>
+                <a:ea typeface="Arial" pitchFamily="34" charset="-122"/>
+                <a:cs typeface="Arial" pitchFamily="34" charset="-120"/>
+              </a:rPr>
+              <a:t>D</a:t>
+            </a:r>
+            <a:endParaRPr lang="en-US" sz="1400" dirty="0"/>
+          </a:p>
+        </p:txBody>
+      </p:sp>
+      <p:sp>
+        <p:nvSpPr>
+          <p:cNvPr id="20" name="Text 17"/>
+          <p:cNvSpPr/>
+          <p:nvPr/>
+        </p:nvSpPr>
+        <p:spPr>
+          <a:xfrm>
+            <a:off x="6345936" y="2514600"/>
+            <a:ext cx="2327148" cy="914400"/>
+          </a:xfrm>
+          <a:prstGeom prst="rect">
+            <a:avLst/>
+          </a:prstGeom>
+          <a:noFill/>
+          <a:ln/>
+        </p:spPr>
+        <p:txBody>
+          <a:bodyPr wrap="square" rtlCol="0" anchor="t"/>
+          <a:lstStyle/>
+          <a:p>
+            <a:pPr indent="0" marL="0">
+              <a:buNone/>
+            </a:pPr>
+            <a:r>
+              <a:rPr lang="en-US" sz="1500" dirty="0">
+                <a:solidFill>
+                  <a:srgbClr val="1F2937"/>
+                </a:solidFill>
+                <a:latin typeface="Arial" pitchFamily="34" charset="0"/>
+                <a:ea typeface="Arial" pitchFamily="34" charset="-122"/>
+                <a:cs typeface="Arial" pitchFamily="34" charset="-120"/>
+              </a:rPr>
+              <a:t>anualmente</a:t>
+            </a:r>
+            <a:endParaRPr lang="en-US" sz="1500" dirty="0"/>
+          </a:p>
+        </p:txBody>
+      </p:sp>
+      <p:sp>
+        <p:nvSpPr>
+          <p:cNvPr id="21" name="Shape 18"/>
+          <p:cNvSpPr/>
+          <p:nvPr/>
+        </p:nvSpPr>
+        <p:spPr>
+          <a:xfrm>
+            <a:off x="548640" y="3840480"/>
+            <a:ext cx="502920" cy="502920"/>
+          </a:xfrm>
+          <a:prstGeom prst="ellipse">
+            <a:avLst/>
+          </a:prstGeom>
+          <a:solidFill>
+            <a:srgbClr val="1B3A6B"/>
+          </a:solidFill>
+          <a:ln/>
+        </p:spPr>
+      </p:sp>
+      <p:sp>
+        <p:nvSpPr>
+          <p:cNvPr id="22" name="Text 19"/>
+          <p:cNvSpPr/>
+          <p:nvPr/>
+        </p:nvSpPr>
+        <p:spPr>
+          <a:xfrm>
+            <a:off x="548640" y="3840480"/>
+            <a:ext cx="502920" cy="502920"/>
+          </a:xfrm>
+          <a:prstGeom prst="rect">
+            <a:avLst/>
+          </a:prstGeom>
+          <a:noFill/>
+          <a:ln/>
+        </p:spPr>
+        <p:txBody>
+          <a:bodyPr wrap="square" rtlCol="0" anchor="ctr"/>
+          <a:lstStyle/>
+          <a:p>
+            <a:pPr algn="ctr" indent="0" marL="0">
+              <a:buNone/>
+            </a:pPr>
+            <a:r>
+              <a:rPr lang="en-US" sz="1600" b="1" dirty="0">
+                <a:solidFill>
+                  <a:srgbClr val="FFFFFF"/>
+                </a:solidFill>
+                <a:latin typeface="Arial" pitchFamily="34" charset="0"/>
+                <a:ea typeface="Arial" pitchFamily="34" charset="-122"/>
+                <a:cs typeface="Arial" pitchFamily="34" charset="-120"/>
+              </a:rPr>
+              <a:t>2</a:t>
+            </a:r>
+            <a:endParaRPr lang="en-US" sz="1600" dirty="0"/>
+          </a:p>
+        </p:txBody>
+      </p:sp>
+      <p:sp>
+        <p:nvSpPr>
+          <p:cNvPr id="23" name="Text 20"/>
+          <p:cNvSpPr/>
+          <p:nvPr/>
+        </p:nvSpPr>
+        <p:spPr>
+          <a:xfrm>
+            <a:off x="1234440" y="3794760"/>
+            <a:ext cx="10424160" cy="640080"/>
+          </a:xfrm>
+          <a:prstGeom prst="rect">
+            <a:avLst/>
+          </a:prstGeom>
+          <a:noFill/>
+          <a:ln/>
+        </p:spPr>
+        <p:txBody>
+          <a:bodyPr wrap="square" rtlCol="0" anchor="ctr"/>
+          <a:lstStyle/>
+          <a:p>
+            <a:pPr indent="0" marL="0">
+              <a:buNone/>
+            </a:pPr>
+            <a:r>
+              <a:rPr lang="en-US" sz="1800" b="1" dirty="0">
+                <a:solidFill>
+                  <a:srgbClr val="1B3A6B"/>
+                </a:solidFill>
+                <a:latin typeface="Arial" pitchFamily="34" charset="0"/>
+                <a:ea typeface="Arial" pitchFamily="34" charset="-122"/>
+                <a:cs typeface="Arial" pitchFamily="34" charset="-120"/>
+              </a:rPr>
+              <a:t>Um alerta operacional que deixa de ter causa:</a:t>
+            </a:r>
+            <a:endParaRPr lang="en-US" sz="1800" dirty="0"/>
+          </a:p>
+        </p:txBody>
+      </p:sp>
+      <p:sp>
+        <p:nvSpPr>
+          <p:cNvPr id="24" name="Shape 21"/>
+          <p:cNvSpPr/>
+          <p:nvPr/>
+        </p:nvSpPr>
+        <p:spPr>
+          <a:xfrm>
+            <a:off x="548640" y="4572000"/>
+            <a:ext cx="2601468" cy="1463040"/>
+          </a:xfrm>
+          <a:prstGeom prst="roundRect">
+            <a:avLst>
+              <a:gd name="adj" fmla="val 5000"/>
+            </a:avLst>
+          </a:prstGeom>
+          <a:solidFill>
+            <a:srgbClr val="FFFFFF"/>
+          </a:solidFill>
+          <a:ln w="9525">
+            <a:solidFill>
+              <a:srgbClr val="D8E0EC"/>
+            </a:solidFill>
+            <a:prstDash val="solid"/>
+          </a:ln>
+        </p:spPr>
+      </p:sp>
+      <p:sp>
+        <p:nvSpPr>
+          <p:cNvPr id="25" name="Text 22"/>
+          <p:cNvSpPr/>
+          <p:nvPr/>
+        </p:nvSpPr>
+        <p:spPr>
+          <a:xfrm>
+            <a:off x="685800" y="4663440"/>
+            <a:ext cx="365760" cy="365760"/>
+          </a:xfrm>
+          <a:prstGeom prst="rect">
+            <a:avLst/>
+          </a:prstGeom>
+          <a:noFill/>
+          <a:ln/>
+        </p:spPr>
+        <p:txBody>
+          <a:bodyPr wrap="square" rtlCol="0" anchor="ctr"/>
+          <a:lstStyle/>
+          <a:p>
+            <a:pPr indent="0" marL="0">
+              <a:buNone/>
+            </a:pPr>
+            <a:r>
+              <a:rPr lang="en-US" sz="1400" b="1" dirty="0">
+                <a:solidFill>
+                  <a:srgbClr val="F7A23B"/>
+                </a:solidFill>
+                <a:latin typeface="Arial" pitchFamily="34" charset="0"/>
+                <a:ea typeface="Arial" pitchFamily="34" charset="-122"/>
+                <a:cs typeface="Arial" pitchFamily="34" charset="-120"/>
+              </a:rPr>
+              <a:t>A</a:t>
+            </a:r>
+            <a:endParaRPr lang="en-US" sz="1400" dirty="0"/>
+          </a:p>
+        </p:txBody>
+      </p:sp>
+      <p:sp>
+        <p:nvSpPr>
+          <p:cNvPr id="26" name="Text 23"/>
+          <p:cNvSpPr/>
+          <p:nvPr/>
+        </p:nvSpPr>
+        <p:spPr>
+          <a:xfrm>
+            <a:off x="685800" y="5029200"/>
+            <a:ext cx="2327148" cy="914400"/>
+          </a:xfrm>
+          <a:prstGeom prst="rect">
+            <a:avLst/>
+          </a:prstGeom>
+          <a:noFill/>
+          <a:ln/>
+        </p:spPr>
+        <p:txBody>
+          <a:bodyPr wrap="square" rtlCol="0" anchor="t"/>
+          <a:lstStyle/>
+          <a:p>
+            <a:pPr indent="0" marL="0">
+              <a:buNone/>
+            </a:pPr>
+            <a:r>
+              <a:rPr lang="en-US" sz="1500" dirty="0">
+                <a:solidFill>
+                  <a:srgbClr val="1F2937"/>
+                </a:solidFill>
+                <a:latin typeface="Arial" pitchFamily="34" charset="0"/>
+                <a:ea typeface="Arial" pitchFamily="34" charset="-122"/>
+                <a:cs typeface="Arial" pitchFamily="34" charset="-120"/>
+              </a:rPr>
+              <a:t>se resolve sozinho na próxima varredura</a:t>
+            </a:r>
+            <a:endParaRPr lang="en-US" sz="1500" dirty="0"/>
+          </a:p>
+        </p:txBody>
+      </p:sp>
+      <p:sp>
+        <p:nvSpPr>
+          <p:cNvPr id="27" name="Shape 24"/>
+          <p:cNvSpPr/>
+          <p:nvPr/>
+        </p:nvSpPr>
+        <p:spPr>
+          <a:xfrm>
+            <a:off x="3378708" y="4572000"/>
+            <a:ext cx="2601468" cy="1463040"/>
+          </a:xfrm>
+          <a:prstGeom prst="roundRect">
+            <a:avLst>
+              <a:gd name="adj" fmla="val 5000"/>
+            </a:avLst>
+          </a:prstGeom>
+          <a:solidFill>
+            <a:srgbClr val="FFFFFF"/>
+          </a:solidFill>
+          <a:ln w="9525">
+            <a:solidFill>
+              <a:srgbClr val="D8E0EC"/>
+            </a:solidFill>
+            <a:prstDash val="solid"/>
+          </a:ln>
+        </p:spPr>
+      </p:sp>
+      <p:sp>
+        <p:nvSpPr>
+          <p:cNvPr id="28" name="Text 25"/>
+          <p:cNvSpPr/>
+          <p:nvPr/>
+        </p:nvSpPr>
+        <p:spPr>
+          <a:xfrm>
+            <a:off x="3515868" y="4663440"/>
+            <a:ext cx="365760" cy="365760"/>
+          </a:xfrm>
+          <a:prstGeom prst="rect">
+            <a:avLst/>
+          </a:prstGeom>
+          <a:noFill/>
+          <a:ln/>
+        </p:spPr>
+        <p:txBody>
+          <a:bodyPr wrap="square" rtlCol="0" anchor="ctr"/>
+          <a:lstStyle/>
+          <a:p>
+            <a:pPr indent="0" marL="0">
+              <a:buNone/>
+            </a:pPr>
+            <a:r>
+              <a:rPr lang="en-US" sz="1400" b="1" dirty="0">
+                <a:solidFill>
+                  <a:srgbClr val="F7A23B"/>
+                </a:solidFill>
+                <a:latin typeface="Arial" pitchFamily="34" charset="0"/>
+                <a:ea typeface="Arial" pitchFamily="34" charset="-122"/>
+                <a:cs typeface="Arial" pitchFamily="34" charset="-120"/>
+              </a:rPr>
+              <a:t>B</a:t>
+            </a:r>
+            <a:endParaRPr lang="en-US" sz="1400" dirty="0"/>
+          </a:p>
+        </p:txBody>
+      </p:sp>
+      <p:sp>
+        <p:nvSpPr>
+          <p:cNvPr id="29" name="Text 26"/>
+          <p:cNvSpPr/>
+          <p:nvPr/>
+        </p:nvSpPr>
+        <p:spPr>
+          <a:xfrm>
+            <a:off x="3515868" y="5029200"/>
+            <a:ext cx="2327148" cy="914400"/>
+          </a:xfrm>
+          <a:prstGeom prst="rect">
+            <a:avLst/>
+          </a:prstGeom>
+          <a:noFill/>
+          <a:ln/>
+        </p:spPr>
+        <p:txBody>
+          <a:bodyPr wrap="square" rtlCol="0" anchor="t"/>
+          <a:lstStyle/>
+          <a:p>
+            <a:pPr indent="0" marL="0">
+              <a:buNone/>
+            </a:pPr>
+            <a:r>
+              <a:rPr lang="en-US" sz="1500" dirty="0">
+                <a:solidFill>
+                  <a:srgbClr val="1F2937"/>
+                </a:solidFill>
+                <a:latin typeface="Arial" pitchFamily="34" charset="0"/>
+                <a:ea typeface="Arial" pitchFamily="34" charset="-122"/>
+                <a:cs typeface="Arial" pitchFamily="34" charset="-120"/>
+              </a:rPr>
+              <a:t>fica para sempre</a:t>
+            </a:r>
+            <a:endParaRPr lang="en-US" sz="1500" dirty="0"/>
+          </a:p>
+        </p:txBody>
+      </p:sp>
+      <p:sp>
+        <p:nvSpPr>
+          <p:cNvPr id="30" name="Shape 27"/>
+          <p:cNvSpPr/>
+          <p:nvPr/>
+        </p:nvSpPr>
+        <p:spPr>
+          <a:xfrm>
+            <a:off x="6208776" y="4572000"/>
+            <a:ext cx="2601468" cy="1463040"/>
+          </a:xfrm>
+          <a:prstGeom prst="roundRect">
+            <a:avLst>
+              <a:gd name="adj" fmla="val 5000"/>
+            </a:avLst>
+          </a:prstGeom>
+          <a:solidFill>
+            <a:srgbClr val="FFFFFF"/>
+          </a:solidFill>
+          <a:ln w="9525">
+            <a:solidFill>
+              <a:srgbClr val="D8E0EC"/>
+            </a:solidFill>
+            <a:prstDash val="solid"/>
+          </a:ln>
+        </p:spPr>
+      </p:sp>
+      <p:sp>
+        <p:nvSpPr>
+          <p:cNvPr id="31" name="Text 28"/>
+          <p:cNvSpPr/>
+          <p:nvPr/>
+        </p:nvSpPr>
+        <p:spPr>
+          <a:xfrm>
+            <a:off x="6345936" y="4663440"/>
+            <a:ext cx="365760" cy="365760"/>
+          </a:xfrm>
+          <a:prstGeom prst="rect">
+            <a:avLst/>
+          </a:prstGeom>
+          <a:noFill/>
+          <a:ln/>
+        </p:spPr>
+        <p:txBody>
+          <a:bodyPr wrap="square" rtlCol="0" anchor="ctr"/>
+          <a:lstStyle/>
+          <a:p>
+            <a:pPr indent="0" marL="0">
+              <a:buNone/>
+            </a:pPr>
+            <a:r>
+              <a:rPr lang="en-US" sz="1400" b="1" dirty="0">
+                <a:solidFill>
+                  <a:srgbClr val="F7A23B"/>
+                </a:solidFill>
+                <a:latin typeface="Arial" pitchFamily="34" charset="0"/>
+                <a:ea typeface="Arial" pitchFamily="34" charset="-122"/>
+                <a:cs typeface="Arial" pitchFamily="34" charset="-120"/>
+              </a:rPr>
+              <a:t>C</a:t>
+            </a:r>
+            <a:endParaRPr lang="en-US" sz="1400" dirty="0"/>
+          </a:p>
+        </p:txBody>
+      </p:sp>
+      <p:sp>
+        <p:nvSpPr>
+          <p:cNvPr id="32" name="Text 29"/>
+          <p:cNvSpPr/>
+          <p:nvPr/>
+        </p:nvSpPr>
+        <p:spPr>
+          <a:xfrm>
+            <a:off x="6345936" y="5029200"/>
+            <a:ext cx="2327148" cy="914400"/>
+          </a:xfrm>
+          <a:prstGeom prst="rect">
+            <a:avLst/>
+          </a:prstGeom>
+          <a:noFill/>
+          <a:ln/>
+        </p:spPr>
+        <p:txBody>
+          <a:bodyPr wrap="square" rtlCol="0" anchor="t"/>
+          <a:lstStyle/>
+          <a:p>
+            <a:pPr indent="0" marL="0">
+              <a:buNone/>
+            </a:pPr>
+            <a:r>
+              <a:rPr lang="en-US" sz="1500" dirty="0">
+                <a:solidFill>
+                  <a:srgbClr val="1F2937"/>
+                </a:solidFill>
+                <a:latin typeface="Arial" pitchFamily="34" charset="0"/>
+                <a:ea typeface="Arial" pitchFamily="34" charset="-122"/>
+                <a:cs typeface="Arial" pitchFamily="34" charset="-120"/>
+              </a:rPr>
+              <a:t>precisa ser apagado</a:t>
+            </a:r>
+            <a:endParaRPr lang="en-US" sz="1500" dirty="0"/>
+          </a:p>
+        </p:txBody>
+      </p:sp>
+      <p:sp>
+        <p:nvSpPr>
+          <p:cNvPr id="33" name="Shape 30"/>
+          <p:cNvSpPr/>
+          <p:nvPr/>
+        </p:nvSpPr>
+        <p:spPr>
+          <a:xfrm>
+            <a:off x="9038844" y="4572000"/>
+            <a:ext cx="2601468" cy="1463040"/>
+          </a:xfrm>
+          <a:prstGeom prst="roundRect">
+            <a:avLst>
+              <a:gd name="adj" fmla="val 5000"/>
+            </a:avLst>
+          </a:prstGeom>
+          <a:solidFill>
+            <a:srgbClr val="FFFFFF"/>
+          </a:solidFill>
+          <a:ln w="9525">
+            <a:solidFill>
+              <a:srgbClr val="D8E0EC"/>
+            </a:solidFill>
+            <a:prstDash val="solid"/>
+          </a:ln>
+        </p:spPr>
+      </p:sp>
+      <p:sp>
+        <p:nvSpPr>
+          <p:cNvPr id="34" name="Text 31"/>
+          <p:cNvSpPr/>
+          <p:nvPr/>
+        </p:nvSpPr>
+        <p:spPr>
+          <a:xfrm>
+            <a:off x="9176004" y="4663440"/>
+            <a:ext cx="365760" cy="365760"/>
+          </a:xfrm>
+          <a:prstGeom prst="rect">
+            <a:avLst/>
+          </a:prstGeom>
+          <a:noFill/>
+          <a:ln/>
+        </p:spPr>
+        <p:txBody>
+          <a:bodyPr wrap="square" rtlCol="0" anchor="ctr"/>
+          <a:lstStyle/>
+          <a:p>
+            <a:pPr indent="0" marL="0">
+              <a:buNone/>
+            </a:pPr>
+            <a:r>
+              <a:rPr lang="en-US" sz="1400" b="1" dirty="0">
+                <a:solidFill>
+                  <a:srgbClr val="F7A23B"/>
+                </a:solidFill>
+                <a:latin typeface="Arial" pitchFamily="34" charset="0"/>
+                <a:ea typeface="Arial" pitchFamily="34" charset="-122"/>
+                <a:cs typeface="Arial" pitchFamily="34" charset="-120"/>
+              </a:rPr>
+              <a:t>D</a:t>
+            </a:r>
+            <a:endParaRPr lang="en-US" sz="1400" dirty="0"/>
+          </a:p>
+        </p:txBody>
+      </p:sp>
+      <p:sp>
+        <p:nvSpPr>
+          <p:cNvPr id="35" name="Text 32"/>
+          <p:cNvSpPr/>
+          <p:nvPr/>
+        </p:nvSpPr>
+        <p:spPr>
+          <a:xfrm>
+            <a:off x="9176004" y="5029200"/>
+            <a:ext cx="2327148" cy="914400"/>
+          </a:xfrm>
+          <a:prstGeom prst="rect">
+            <a:avLst/>
+          </a:prstGeom>
+          <a:noFill/>
+          <a:ln/>
+        </p:spPr>
+        <p:txBody>
+          <a:bodyPr wrap="square" rtlCol="0" anchor="t"/>
+          <a:lstStyle/>
+          <a:p>
+            <a:pPr indent="0" marL="0">
+              <a:buNone/>
+            </a:pPr>
+            <a:r>
+              <a:rPr lang="en-US" sz="1500" dirty="0">
+                <a:solidFill>
+                  <a:srgbClr val="1F2937"/>
+                </a:solidFill>
+                <a:latin typeface="Arial" pitchFamily="34" charset="0"/>
+                <a:ea typeface="Arial" pitchFamily="34" charset="-122"/>
+                <a:cs typeface="Arial" pitchFamily="34" charset="-120"/>
+              </a:rPr>
+              <a:t>vira chamado</a:t>
+            </a:r>
+            <a:endParaRPr lang="en-US" sz="1500" dirty="0"/>
+          </a:p>
+        </p:txBody>
+      </p:sp>
       <p:sp>
         <p:nvSpPr>
           <p:cNvPr id="25" name="Slide Number Placeholder 0"/>
@@ -15430,7 +16362,7 @@
                 <a:ea typeface="Arial" pitchFamily="34" charset="-122"/>
                 <a:cs typeface="Arial" pitchFamily="34" charset="-120"/>
               </a:rPr>
-              <a:t>QUESTÕES 1–2 DE 5</a:t>
+              <a:t>QUESTÕES 3–4 DE 5</a:t>
             </a:r>
             <a:endParaRPr lang="en-US" sz="1000" dirty="0"/>
           </a:p>
@@ -15530,7 +16462,7 @@
                 <a:ea typeface="Arial" pitchFamily="34" charset="-122"/>
                 <a:cs typeface="Arial" pitchFamily="34" charset="-120"/>
               </a:rPr>
-              <a:t>1</a:t>
+              <a:t>3</a:t>
             </a:r>
             <a:endParaRPr lang="en-US" sz="1600" dirty="0"/>
           </a:p>
@@ -15569,7 +16501,7 @@
                 <a:ea typeface="Arial" pitchFamily="34" charset="-122"/>
                 <a:cs typeface="Arial" pitchFamily="34" charset="-120"/>
               </a:rPr>
-              <a:t>Com que frequência a fila de faturas em revisão deve ser trabalhada?</a:t>
+              <a:t>O consultor vê quais alertas?</a:t>
             </a:r>
             <a:endParaRPr lang="en-US" sz="1800" dirty="0"/>
           </a:p>
@@ -15635,7 +16567,7 @@
                 <a:ea typeface="Arial" pitchFamily="34" charset="-122"/>
                 <a:cs typeface="Arial" pitchFamily="34" charset="-120"/>
               </a:rPr>
-              <a:t>B</a:t>
+              <a:t>A</a:t>
             </a:r>
             <a:endParaRPr lang="en-US" sz="1400" dirty="0"/>
           </a:p>
@@ -15674,7 +16606,7 @@
                 <a:ea typeface="Arial" pitchFamily="34" charset="-122"/>
                 <a:cs typeface="Arial" pitchFamily="34" charset="-120"/>
               </a:rPr>
-              <a:t>mensalmente</a:t>
+              <a:t>Todos</a:t>
             </a:r>
             <a:endParaRPr lang="en-US" sz="1500" dirty="0"/>
           </a:p>
@@ -15740,7 +16672,7 @@
                 <a:ea typeface="Arial" pitchFamily="34" charset="-122"/>
                 <a:cs typeface="Arial" pitchFamily="34" charset="-120"/>
               </a:rPr>
-              <a:t>C</a:t>
+              <a:t>B</a:t>
             </a:r>
             <a:endParaRPr lang="en-US" sz="1400" dirty="0"/>
           </a:p>
@@ -15779,7 +16711,7 @@
                 <a:ea typeface="Arial" pitchFamily="34" charset="-122"/>
                 <a:cs typeface="Arial" pitchFamily="34" charset="-120"/>
               </a:rPr>
-              <a:t>só quando o cliente reclama</a:t>
+              <a:t>Só os financeiros da própria carteira</a:t>
             </a:r>
             <a:endParaRPr lang="en-US" sz="1500" dirty="0"/>
           </a:p>
@@ -15845,7 +16777,7 @@
                 <a:ea typeface="Arial" pitchFamily="34" charset="-122"/>
                 <a:cs typeface="Arial" pitchFamily="34" charset="-120"/>
               </a:rPr>
-              <a:t>D</a:t>
+              <a:t>C</a:t>
             </a:r>
             <a:endParaRPr lang="en-US" sz="1400" dirty="0"/>
           </a:p>
@@ -15884,7 +16816,7 @@
                 <a:ea typeface="Arial" pitchFamily="34" charset="-122"/>
                 <a:cs typeface="Arial" pitchFamily="34" charset="-120"/>
               </a:rPr>
-              <a:t>anualmente</a:t>
+              <a:t>Só os de sistema</a:t>
             </a:r>
             <a:endParaRPr lang="en-US" sz="1500" dirty="0"/>
           </a:p>
@@ -15898,105 +16830,7 @@
         </p:nvSpPr>
         <p:spPr>
           <a:xfrm>
-            <a:off x="548640" y="3840480"/>
-            <a:ext cx="502920" cy="502920"/>
-          </a:xfrm>
-          <a:prstGeom prst="ellipse">
-            <a:avLst/>
-          </a:prstGeom>
-          <a:solidFill>
-            <a:srgbClr val="1B3A6B"/>
-          </a:solidFill>
-          <a:ln/>
-        </p:spPr>
-      </p:sp>
-      <p:sp>
-        <p:nvSpPr>
-          <p:cNvPr id="22" name="Text 19"/>
-          <p:cNvSpPr/>
-          <p:nvPr/>
-        </p:nvSpPr>
-        <p:spPr>
-          <a:xfrm>
-            <a:off x="548640" y="3840480"/>
-            <a:ext cx="502920" cy="502920"/>
-          </a:xfrm>
-          <a:prstGeom prst="rect">
-            <a:avLst/>
-          </a:prstGeom>
-          <a:noFill/>
-          <a:ln/>
-        </p:spPr>
-        <p:txBody>
-          <a:bodyPr wrap="square" rtlCol="0" anchor="ctr"/>
-          <a:lstStyle/>
-          <a:p>
-            <a:pPr algn="ctr" indent="0" marL="0">
-              <a:buNone/>
-            </a:pPr>
-            <a:r>
-              <a:rPr lang="en-US" sz="1600" b="1" dirty="0">
-                <a:solidFill>
-                  <a:srgbClr val="FFFFFF"/>
-                </a:solidFill>
-                <a:latin typeface="Arial" pitchFamily="34" charset="0"/>
-                <a:ea typeface="Arial" pitchFamily="34" charset="-122"/>
-                <a:cs typeface="Arial" pitchFamily="34" charset="-120"/>
-              </a:rPr>
-              <a:t>2</a:t>
-            </a:r>
-            <a:endParaRPr lang="en-US" sz="1600" dirty="0"/>
-          </a:p>
-        </p:txBody>
-      </p:sp>
-      <p:sp>
-        <p:nvSpPr>
-          <p:cNvPr id="23" name="Text 20"/>
-          <p:cNvSpPr/>
-          <p:nvPr/>
-        </p:nvSpPr>
-        <p:spPr>
-          <a:xfrm>
-            <a:off x="1234440" y="3794760"/>
-            <a:ext cx="10424160" cy="640080"/>
-          </a:xfrm>
-          <a:prstGeom prst="rect">
-            <a:avLst/>
-          </a:prstGeom>
-          <a:noFill/>
-          <a:ln/>
-        </p:spPr>
-        <p:txBody>
-          <a:bodyPr wrap="square" rtlCol="0" anchor="ctr"/>
-          <a:lstStyle/>
-          <a:p>
-            <a:pPr indent="0" marL="0">
-              <a:buNone/>
-            </a:pPr>
-            <a:r>
-              <a:rPr lang="en-US" sz="1800" b="1" dirty="0">
-                <a:solidFill>
-                  <a:srgbClr val="1B3A6B"/>
-                </a:solidFill>
-                <a:latin typeface="Arial" pitchFamily="34" charset="0"/>
-                <a:ea typeface="Arial" pitchFamily="34" charset="-122"/>
-                <a:cs typeface="Arial" pitchFamily="34" charset="-120"/>
-              </a:rPr>
-              <a:t>Um alerta operacional que deixa de ter causa:</a:t>
-            </a:r>
-            <a:endParaRPr lang="en-US" sz="1800" dirty="0"/>
-          </a:p>
-        </p:txBody>
-      </p:sp>
-      <p:sp>
-        <p:nvSpPr>
-          <p:cNvPr id="24" name="Shape 21"/>
-          <p:cNvSpPr/>
-          <p:nvPr/>
-        </p:nvSpPr>
-        <p:spPr>
-          <a:xfrm>
-            <a:off x="548640" y="4572000"/>
+            <a:off x="9038844" y="2057400"/>
             <a:ext cx="2601468" cy="1463040"/>
           </a:xfrm>
           <a:prstGeom prst="roundRect">
@@ -16017,14 +16851,112 @@
       </p:sp>
       <p:sp>
         <p:nvSpPr>
+          <p:cNvPr id="22" name="Text 19"/>
+          <p:cNvSpPr/>
+          <p:nvPr/>
+        </p:nvSpPr>
+        <p:spPr>
+          <a:xfrm>
+            <a:off x="9176004" y="2148840"/>
+            <a:ext cx="365760" cy="365760"/>
+          </a:xfrm>
+          <a:prstGeom prst="rect">
+            <a:avLst/>
+          </a:prstGeom>
+          <a:noFill/>
+          <a:ln/>
+        </p:spPr>
+        <p:txBody>
+          <a:bodyPr wrap="square" rtlCol="0" anchor="ctr"/>
+          <a:lstStyle/>
+          <a:p>
+            <a:pPr indent="0" marL="0">
+              <a:buNone/>
+            </a:pPr>
+            <a:r>
+              <a:rPr lang="en-US" sz="1400" b="1" dirty="0">
+                <a:solidFill>
+                  <a:srgbClr val="F7A23B"/>
+                </a:solidFill>
+                <a:latin typeface="Arial" pitchFamily="34" charset="0"/>
+                <a:ea typeface="Arial" pitchFamily="34" charset="-122"/>
+                <a:cs typeface="Arial" pitchFamily="34" charset="-120"/>
+              </a:rPr>
+              <a:t>D</a:t>
+            </a:r>
+            <a:endParaRPr lang="en-US" sz="1400" dirty="0"/>
+          </a:p>
+        </p:txBody>
+      </p:sp>
+      <p:sp>
+        <p:nvSpPr>
+          <p:cNvPr id="23" name="Text 20"/>
+          <p:cNvSpPr/>
+          <p:nvPr/>
+        </p:nvSpPr>
+        <p:spPr>
+          <a:xfrm>
+            <a:off x="9176004" y="2514600"/>
+            <a:ext cx="2327148" cy="914400"/>
+          </a:xfrm>
+          <a:prstGeom prst="rect">
+            <a:avLst/>
+          </a:prstGeom>
+          <a:noFill/>
+          <a:ln/>
+        </p:spPr>
+        <p:txBody>
+          <a:bodyPr wrap="square" rtlCol="0" anchor="t"/>
+          <a:lstStyle/>
+          <a:p>
+            <a:pPr indent="0" marL="0">
+              <a:buNone/>
+            </a:pPr>
+            <a:r>
+              <a:rPr lang="en-US" sz="1500" dirty="0">
+                <a:solidFill>
+                  <a:srgbClr val="1F2937"/>
+                </a:solidFill>
+                <a:latin typeface="Arial" pitchFamily="34" charset="0"/>
+                <a:ea typeface="Arial" pitchFamily="34" charset="-122"/>
+                <a:cs typeface="Arial" pitchFamily="34" charset="-120"/>
+              </a:rPr>
+              <a:t>Nenhum</a:t>
+            </a:r>
+            <a:endParaRPr lang="en-US" sz="1500" dirty="0"/>
+          </a:p>
+        </p:txBody>
+      </p:sp>
+      <p:sp>
+        <p:nvSpPr>
+          <p:cNvPr id="24" name="Shape 21"/>
+          <p:cNvSpPr/>
+          <p:nvPr/>
+        </p:nvSpPr>
+        <p:spPr>
+          <a:xfrm>
+            <a:off x="548640" y="3840480"/>
+            <a:ext cx="502920" cy="502920"/>
+          </a:xfrm>
+          <a:prstGeom prst="ellipse">
+            <a:avLst/>
+          </a:prstGeom>
+          <a:solidFill>
+            <a:srgbClr val="1B3A6B"/>
+          </a:solidFill>
+          <a:ln/>
+        </p:spPr>
+      </p:sp>
+      <p:sp>
+        <p:nvSpPr>
           <p:cNvPr id="25" name="Text 22"/>
           <p:cNvSpPr/>
           <p:nvPr/>
         </p:nvSpPr>
         <p:spPr>
           <a:xfrm>
-            <a:off x="685800" y="4663440"/>
-            <a:ext cx="365760" cy="365760"/>
+            <a:off x="548640" y="3840480"/>
+            <a:ext cx="502920" cy="502920"/>
           </a:xfrm>
           <a:prstGeom prst="rect">
             <a:avLst/>
@@ -16036,60 +16968,60 @@
           <a:bodyPr wrap="square" rtlCol="0" anchor="ctr"/>
           <a:lstStyle/>
           <a:p>
+            <a:pPr algn="ctr" indent="0" marL="0">
+              <a:buNone/>
+            </a:pPr>
+            <a:r>
+              <a:rPr lang="en-US" sz="1600" b="1" dirty="0">
+                <a:solidFill>
+                  <a:srgbClr val="FFFFFF"/>
+                </a:solidFill>
+                <a:latin typeface="Arial" pitchFamily="34" charset="0"/>
+                <a:ea typeface="Arial" pitchFamily="34" charset="-122"/>
+                <a:cs typeface="Arial" pitchFamily="34" charset="-120"/>
+              </a:rPr>
+              <a:t>4</a:t>
+            </a:r>
+            <a:endParaRPr lang="en-US" sz="1600" dirty="0"/>
+          </a:p>
+        </p:txBody>
+      </p:sp>
+      <p:sp>
+        <p:nvSpPr>
+          <p:cNvPr id="26" name="Text 23"/>
+          <p:cNvSpPr/>
+          <p:nvPr/>
+        </p:nvSpPr>
+        <p:spPr>
+          <a:xfrm>
+            <a:off x="1234440" y="3794760"/>
+            <a:ext cx="10424160" cy="640080"/>
+          </a:xfrm>
+          <a:prstGeom prst="rect">
+            <a:avLst/>
+          </a:prstGeom>
+          <a:noFill/>
+          <a:ln/>
+        </p:spPr>
+        <p:txBody>
+          <a:bodyPr wrap="square" rtlCol="0" anchor="ctr"/>
+          <a:lstStyle/>
+          <a:p>
             <a:pPr indent="0" marL="0">
               <a:buNone/>
             </a:pPr>
             <a:r>
-              <a:rPr lang="en-US" sz="1400" b="1" dirty="0">
-                <a:solidFill>
-                  <a:srgbClr val="F7A23B"/>
-                </a:solidFill>
-                <a:latin typeface="Arial" pitchFamily="34" charset="0"/>
-                <a:ea typeface="Arial" pitchFamily="34" charset="-122"/>
-                <a:cs typeface="Arial" pitchFamily="34" charset="-120"/>
-              </a:rPr>
-              <a:t>A</a:t>
-            </a:r>
-            <a:endParaRPr lang="en-US" sz="1400" dirty="0"/>
-          </a:p>
-        </p:txBody>
-      </p:sp>
-      <p:sp>
-        <p:nvSpPr>
-          <p:cNvPr id="26" name="Text 23"/>
-          <p:cNvSpPr/>
-          <p:nvPr/>
-        </p:nvSpPr>
-        <p:spPr>
-          <a:xfrm>
-            <a:off x="685800" y="5029200"/>
-            <a:ext cx="2327148" cy="914400"/>
-          </a:xfrm>
-          <a:prstGeom prst="rect">
-            <a:avLst/>
-          </a:prstGeom>
-          <a:noFill/>
-          <a:ln/>
-        </p:spPr>
-        <p:txBody>
-          <a:bodyPr wrap="square" rtlCol="0" anchor="t"/>
-          <a:lstStyle/>
-          <a:p>
-            <a:pPr indent="0" marL="0">
-              <a:buNone/>
-            </a:pPr>
-            <a:r>
-              <a:rPr lang="en-US" sz="1500" dirty="0">
-                <a:solidFill>
-                  <a:srgbClr val="1F2937"/>
-                </a:solidFill>
-                <a:latin typeface="Arial" pitchFamily="34" charset="0"/>
-                <a:ea typeface="Arial" pitchFamily="34" charset="-122"/>
-                <a:cs typeface="Arial" pitchFamily="34" charset="-120"/>
-              </a:rPr>
-              <a:t>se resolve sozinho na próxima varredura</a:t>
-            </a:r>
-            <a:endParaRPr lang="en-US" sz="1500" dirty="0"/>
+              <a:rPr lang="en-US" sz="1800" b="1" dirty="0">
+                <a:solidFill>
+                  <a:srgbClr val="1B3A6B"/>
+                </a:solidFill>
+                <a:latin typeface="Arial" pitchFamily="34" charset="0"/>
+                <a:ea typeface="Arial" pitchFamily="34" charset="-122"/>
+                <a:cs typeface="Arial" pitchFamily="34" charset="-120"/>
+              </a:rPr>
+              <a:t>Usina sem registro de geração no mês gera:</a:t>
+            </a:r>
+            <a:endParaRPr lang="en-US" sz="1800" dirty="0"/>
           </a:p>
         </p:txBody>
       </p:sp>
@@ -16101,7 +17033,7 @@
         </p:nvSpPr>
         <p:spPr>
           <a:xfrm>
-            <a:off x="3378708" y="4572000"/>
+            <a:off x="548640" y="4572000"/>
             <a:ext cx="2601468" cy="1463040"/>
           </a:xfrm>
           <a:prstGeom prst="roundRect">
@@ -16128,7 +17060,7 @@
         </p:nvSpPr>
         <p:spPr>
           <a:xfrm>
-            <a:off x="3515868" y="4663440"/>
+            <a:off x="685800" y="4663440"/>
             <a:ext cx="365760" cy="365760"/>
           </a:xfrm>
           <a:prstGeom prst="rect">
@@ -16153,7 +17085,7 @@
                 <a:ea typeface="Arial" pitchFamily="34" charset="-122"/>
                 <a:cs typeface="Arial" pitchFamily="34" charset="-120"/>
               </a:rPr>
-              <a:t>B</a:t>
+              <a:t>A</a:t>
             </a:r>
             <a:endParaRPr lang="en-US" sz="1400" dirty="0"/>
           </a:p>
@@ -16167,7 +17099,7 @@
         </p:nvSpPr>
         <p:spPr>
           <a:xfrm>
-            <a:off x="3515868" y="5029200"/>
+            <a:off x="685800" y="5029200"/>
             <a:ext cx="2327148" cy="914400"/>
           </a:xfrm>
           <a:prstGeom prst="rect">
@@ -16192,7 +17124,7 @@
                 <a:ea typeface="Arial" pitchFamily="34" charset="-122"/>
                 <a:cs typeface="Arial" pitchFamily="34" charset="-120"/>
               </a:rPr>
-              <a:t>fica para sempre</a:t>
+              <a:t>um alerta de usina</a:t>
             </a:r>
             <a:endParaRPr lang="en-US" sz="1500" dirty="0"/>
           </a:p>
@@ -16206,7 +17138,7 @@
         </p:nvSpPr>
         <p:spPr>
           <a:xfrm>
-            <a:off x="6208776" y="4572000"/>
+            <a:off x="3378708" y="4572000"/>
             <a:ext cx="2601468" cy="1463040"/>
           </a:xfrm>
           <a:prstGeom prst="roundRect">
@@ -16233,7 +17165,7 @@
         </p:nvSpPr>
         <p:spPr>
           <a:xfrm>
-            <a:off x="6345936" y="4663440"/>
+            <a:off x="3515868" y="4663440"/>
             <a:ext cx="365760" cy="365760"/>
           </a:xfrm>
           <a:prstGeom prst="rect">
@@ -16258,7 +17190,7 @@
                 <a:ea typeface="Arial" pitchFamily="34" charset="-122"/>
                 <a:cs typeface="Arial" pitchFamily="34" charset="-120"/>
               </a:rPr>
-              <a:t>C</a:t>
+              <a:t>B</a:t>
             </a:r>
             <a:endParaRPr lang="en-US" sz="1400" dirty="0"/>
           </a:p>
@@ -16272,7 +17204,7 @@
         </p:nvSpPr>
         <p:spPr>
           <a:xfrm>
-            <a:off x="6345936" y="5029200"/>
+            <a:off x="3515868" y="5029200"/>
             <a:ext cx="2327148" cy="914400"/>
           </a:xfrm>
           <a:prstGeom prst="rect">
@@ -16297,7 +17229,7 @@
                 <a:ea typeface="Arial" pitchFamily="34" charset="-122"/>
                 <a:cs typeface="Arial" pitchFamily="34" charset="-120"/>
               </a:rPr>
-              <a:t>precisa ser apagado</a:t>
+              <a:t>cobrança</a:t>
             </a:r>
             <a:endParaRPr lang="en-US" sz="1500" dirty="0"/>
           </a:p>
@@ -16311,7 +17243,7 @@
         </p:nvSpPr>
         <p:spPr>
           <a:xfrm>
-            <a:off x="9038844" y="4572000"/>
+            <a:off x="6208776" y="4572000"/>
             <a:ext cx="2601468" cy="1463040"/>
           </a:xfrm>
           <a:prstGeom prst="roundRect">
@@ -16338,6 +17270,111 @@
         </p:nvSpPr>
         <p:spPr>
           <a:xfrm>
+            <a:off x="6345936" y="4663440"/>
+            <a:ext cx="365760" cy="365760"/>
+          </a:xfrm>
+          <a:prstGeom prst="rect">
+            <a:avLst/>
+          </a:prstGeom>
+          <a:noFill/>
+          <a:ln/>
+        </p:spPr>
+        <p:txBody>
+          <a:bodyPr wrap="square" rtlCol="0" anchor="ctr"/>
+          <a:lstStyle/>
+          <a:p>
+            <a:pPr indent="0" marL="0">
+              <a:buNone/>
+            </a:pPr>
+            <a:r>
+              <a:rPr lang="en-US" sz="1400" b="1" dirty="0">
+                <a:solidFill>
+                  <a:srgbClr val="F7A23B"/>
+                </a:solidFill>
+                <a:latin typeface="Arial" pitchFamily="34" charset="0"/>
+                <a:ea typeface="Arial" pitchFamily="34" charset="-122"/>
+                <a:cs typeface="Arial" pitchFamily="34" charset="-120"/>
+              </a:rPr>
+              <a:t>C</a:t>
+            </a:r>
+            <a:endParaRPr lang="en-US" sz="1400" dirty="0"/>
+          </a:p>
+        </p:txBody>
+      </p:sp>
+      <p:sp>
+        <p:nvSpPr>
+          <p:cNvPr id="35" name="Text 32"/>
+          <p:cNvSpPr/>
+          <p:nvPr/>
+        </p:nvSpPr>
+        <p:spPr>
+          <a:xfrm>
+            <a:off x="6345936" y="5029200"/>
+            <a:ext cx="2327148" cy="914400"/>
+          </a:xfrm>
+          <a:prstGeom prst="rect">
+            <a:avLst/>
+          </a:prstGeom>
+          <a:noFill/>
+          <a:ln/>
+        </p:spPr>
+        <p:txBody>
+          <a:bodyPr wrap="square" rtlCol="0" anchor="t"/>
+          <a:lstStyle/>
+          <a:p>
+            <a:pPr indent="0" marL="0">
+              <a:buNone/>
+            </a:pPr>
+            <a:r>
+              <a:rPr lang="en-US" sz="1500" dirty="0">
+                <a:solidFill>
+                  <a:srgbClr val="1F2937"/>
+                </a:solidFill>
+                <a:latin typeface="Arial" pitchFamily="34" charset="0"/>
+                <a:ea typeface="Arial" pitchFamily="34" charset="-122"/>
+                <a:cs typeface="Arial" pitchFamily="34" charset="-120"/>
+              </a:rPr>
+              <a:t>nada</a:t>
+            </a:r>
+            <a:endParaRPr lang="en-US" sz="1500" dirty="0"/>
+          </a:p>
+        </p:txBody>
+      </p:sp>
+      <p:sp>
+        <p:nvSpPr>
+          <p:cNvPr id="36" name="Shape 33"/>
+          <p:cNvSpPr/>
+          <p:nvPr/>
+        </p:nvSpPr>
+        <p:spPr>
+          <a:xfrm>
+            <a:off x="9038844" y="4572000"/>
+            <a:ext cx="2601468" cy="1463040"/>
+          </a:xfrm>
+          <a:prstGeom prst="roundRect">
+            <a:avLst>
+              <a:gd name="adj" fmla="val 5000"/>
+            </a:avLst>
+          </a:prstGeom>
+          <a:solidFill>
+            <a:srgbClr val="FFFFFF"/>
+          </a:solidFill>
+          <a:ln w="9525">
+            <a:solidFill>
+              <a:srgbClr val="D8E0EC"/>
+            </a:solidFill>
+            <a:prstDash val="solid"/>
+          </a:ln>
+        </p:spPr>
+      </p:sp>
+      <p:sp>
+        <p:nvSpPr>
+          <p:cNvPr id="37" name="Text 34"/>
+          <p:cNvSpPr/>
+          <p:nvPr/>
+        </p:nvSpPr>
+        <p:spPr>
+          <a:xfrm>
             <a:off x="9176004" y="4663440"/>
             <a:ext cx="365760" cy="365760"/>
           </a:xfrm>
@@ -16371,7 +17408,7 @@
       </p:sp>
       <p:sp>
         <p:nvSpPr>
-          <p:cNvPr id="35" name="Text 32"/>
+          <p:cNvPr id="38" name="Text 35"/>
           <p:cNvSpPr/>
           <p:nvPr/>
         </p:nvSpPr>
@@ -16402,7 +17439,7 @@
                 <a:ea typeface="Arial" pitchFamily="34" charset="-122"/>
                 <a:cs typeface="Arial" pitchFamily="34" charset="-120"/>
               </a:rPr>
-              <a:t>vira chamado</a:t>
+              <a:t>cancelamento</a:t>
             </a:r>
             <a:endParaRPr lang="en-US" sz="1500" dirty="0"/>
           </a:p>
@@ -16668,7 +17705,7 @@
                 <a:ea typeface="Arial" pitchFamily="34" charset="-122"/>
                 <a:cs typeface="Arial" pitchFamily="34" charset="-120"/>
               </a:rPr>
-              <a:t>QUESTÕES 3–4 DE 5</a:t>
+              <a:t>QUESTÕES 5–5 DE 5</a:t>
             </a:r>
             <a:endParaRPr lang="en-US" sz="1000" dirty="0"/>
           </a:p>
@@ -16768,7 +17805,7 @@
                 <a:ea typeface="Arial" pitchFamily="34" charset="-122"/>
                 <a:cs typeface="Arial" pitchFamily="34" charset="-120"/>
               </a:rPr>
-              <a:t>3</a:t>
+              <a:t>5</a:t>
             </a:r>
             <a:endParaRPr lang="en-US" sz="1600" dirty="0"/>
           </a:p>
@@ -16807,7 +17844,7 @@
                 <a:ea typeface="Arial" pitchFamily="34" charset="-122"/>
                 <a:cs typeface="Arial" pitchFamily="34" charset="-120"/>
               </a:rPr>
-              <a:t>O consultor vê quais alertas?</a:t>
+              <a:t>Um bom indicador de que o portal está funcionando:</a:t>
             </a:r>
             <a:endParaRPr lang="en-US" sz="1800" dirty="0"/>
           </a:p>
@@ -16912,7 +17949,7 @@
                 <a:ea typeface="Arial" pitchFamily="34" charset="-122"/>
                 <a:cs typeface="Arial" pitchFamily="34" charset="-120"/>
               </a:rPr>
-              <a:t>Todos</a:t>
+              <a:t>mais ligações</a:t>
             </a:r>
             <a:endParaRPr lang="en-US" sz="1500" dirty="0"/>
           </a:p>
@@ -17017,7 +18054,7 @@
                 <a:ea typeface="Arial" pitchFamily="34" charset="-122"/>
                 <a:cs typeface="Arial" pitchFamily="34" charset="-120"/>
               </a:rPr>
-              <a:t>Só os financeiros da própria carteira</a:t>
+              <a:t>menos chamados sobre "quanto devo/como pago"</a:t>
             </a:r>
             <a:endParaRPr lang="en-US" sz="1500" dirty="0"/>
           </a:p>
@@ -17122,7 +18159,7 @@
                 <a:ea typeface="Arial" pitchFamily="34" charset="-122"/>
                 <a:cs typeface="Arial" pitchFamily="34" charset="-120"/>
               </a:rPr>
-              <a:t>Só os de sistema</a:t>
+              <a:t>mais e-mails</a:t>
             </a:r>
             <a:endParaRPr lang="en-US" sz="1500" dirty="0"/>
           </a:p>
@@ -17227,525 +18264,7 @@
                 <a:ea typeface="Arial" pitchFamily="34" charset="-122"/>
                 <a:cs typeface="Arial" pitchFamily="34" charset="-120"/>
               </a:rPr>
-              <a:t>Nenhum</a:t>
-            </a:r>
-            <a:endParaRPr lang="en-US" sz="1500" dirty="0"/>
-          </a:p>
-        </p:txBody>
-      </p:sp>
-      <p:sp>
-        <p:nvSpPr>
-          <p:cNvPr id="24" name="Shape 21"/>
-          <p:cNvSpPr/>
-          <p:nvPr/>
-        </p:nvSpPr>
-        <p:spPr>
-          <a:xfrm>
-            <a:off x="548640" y="3840480"/>
-            <a:ext cx="502920" cy="502920"/>
-          </a:xfrm>
-          <a:prstGeom prst="ellipse">
-            <a:avLst/>
-          </a:prstGeom>
-          <a:solidFill>
-            <a:srgbClr val="1B3A6B"/>
-          </a:solidFill>
-          <a:ln/>
-        </p:spPr>
-      </p:sp>
-      <p:sp>
-        <p:nvSpPr>
-          <p:cNvPr id="25" name="Text 22"/>
-          <p:cNvSpPr/>
-          <p:nvPr/>
-        </p:nvSpPr>
-        <p:spPr>
-          <a:xfrm>
-            <a:off x="548640" y="3840480"/>
-            <a:ext cx="502920" cy="502920"/>
-          </a:xfrm>
-          <a:prstGeom prst="rect">
-            <a:avLst/>
-          </a:prstGeom>
-          <a:noFill/>
-          <a:ln/>
-        </p:spPr>
-        <p:txBody>
-          <a:bodyPr wrap="square" rtlCol="0" anchor="ctr"/>
-          <a:lstStyle/>
-          <a:p>
-            <a:pPr algn="ctr" indent="0" marL="0">
-              <a:buNone/>
-            </a:pPr>
-            <a:r>
-              <a:rPr lang="en-US" sz="1600" b="1" dirty="0">
-                <a:solidFill>
-                  <a:srgbClr val="FFFFFF"/>
-                </a:solidFill>
-                <a:latin typeface="Arial" pitchFamily="34" charset="0"/>
-                <a:ea typeface="Arial" pitchFamily="34" charset="-122"/>
-                <a:cs typeface="Arial" pitchFamily="34" charset="-120"/>
-              </a:rPr>
-              <a:t>4</a:t>
-            </a:r>
-            <a:endParaRPr lang="en-US" sz="1600" dirty="0"/>
-          </a:p>
-        </p:txBody>
-      </p:sp>
-      <p:sp>
-        <p:nvSpPr>
-          <p:cNvPr id="26" name="Text 23"/>
-          <p:cNvSpPr/>
-          <p:nvPr/>
-        </p:nvSpPr>
-        <p:spPr>
-          <a:xfrm>
-            <a:off x="1234440" y="3794760"/>
-            <a:ext cx="10424160" cy="640080"/>
-          </a:xfrm>
-          <a:prstGeom prst="rect">
-            <a:avLst/>
-          </a:prstGeom>
-          <a:noFill/>
-          <a:ln/>
-        </p:spPr>
-        <p:txBody>
-          <a:bodyPr wrap="square" rtlCol="0" anchor="ctr"/>
-          <a:lstStyle/>
-          <a:p>
-            <a:pPr indent="0" marL="0">
-              <a:buNone/>
-            </a:pPr>
-            <a:r>
-              <a:rPr lang="en-US" sz="1800" b="1" dirty="0">
-                <a:solidFill>
-                  <a:srgbClr val="1B3A6B"/>
-                </a:solidFill>
-                <a:latin typeface="Arial" pitchFamily="34" charset="0"/>
-                <a:ea typeface="Arial" pitchFamily="34" charset="-122"/>
-                <a:cs typeface="Arial" pitchFamily="34" charset="-120"/>
-              </a:rPr>
-              <a:t>Usina sem registro de geração no mês gera:</a:t>
-            </a:r>
-            <a:endParaRPr lang="en-US" sz="1800" dirty="0"/>
-          </a:p>
-        </p:txBody>
-      </p:sp>
-      <p:sp>
-        <p:nvSpPr>
-          <p:cNvPr id="27" name="Shape 24"/>
-          <p:cNvSpPr/>
-          <p:nvPr/>
-        </p:nvSpPr>
-        <p:spPr>
-          <a:xfrm>
-            <a:off x="548640" y="4572000"/>
-            <a:ext cx="2601468" cy="1463040"/>
-          </a:xfrm>
-          <a:prstGeom prst="roundRect">
-            <a:avLst>
-              <a:gd name="adj" fmla="val 5000"/>
-            </a:avLst>
-          </a:prstGeom>
-          <a:solidFill>
-            <a:srgbClr val="FFFFFF"/>
-          </a:solidFill>
-          <a:ln w="9525">
-            <a:solidFill>
-              <a:srgbClr val="D8E0EC"/>
-            </a:solidFill>
-            <a:prstDash val="solid"/>
-          </a:ln>
-        </p:spPr>
-      </p:sp>
-      <p:sp>
-        <p:nvSpPr>
-          <p:cNvPr id="28" name="Text 25"/>
-          <p:cNvSpPr/>
-          <p:nvPr/>
-        </p:nvSpPr>
-        <p:spPr>
-          <a:xfrm>
-            <a:off x="685800" y="4663440"/>
-            <a:ext cx="365760" cy="365760"/>
-          </a:xfrm>
-          <a:prstGeom prst="rect">
-            <a:avLst/>
-          </a:prstGeom>
-          <a:noFill/>
-          <a:ln/>
-        </p:spPr>
-        <p:txBody>
-          <a:bodyPr wrap="square" rtlCol="0" anchor="ctr"/>
-          <a:lstStyle/>
-          <a:p>
-            <a:pPr indent="0" marL="0">
-              <a:buNone/>
-            </a:pPr>
-            <a:r>
-              <a:rPr lang="en-US" sz="1400" b="1" dirty="0">
-                <a:solidFill>
-                  <a:srgbClr val="F7A23B"/>
-                </a:solidFill>
-                <a:latin typeface="Arial" pitchFamily="34" charset="0"/>
-                <a:ea typeface="Arial" pitchFamily="34" charset="-122"/>
-                <a:cs typeface="Arial" pitchFamily="34" charset="-120"/>
-              </a:rPr>
-              <a:t>A</a:t>
-            </a:r>
-            <a:endParaRPr lang="en-US" sz="1400" dirty="0"/>
-          </a:p>
-        </p:txBody>
-      </p:sp>
-      <p:sp>
-        <p:nvSpPr>
-          <p:cNvPr id="29" name="Text 26"/>
-          <p:cNvSpPr/>
-          <p:nvPr/>
-        </p:nvSpPr>
-        <p:spPr>
-          <a:xfrm>
-            <a:off x="685800" y="5029200"/>
-            <a:ext cx="2327148" cy="914400"/>
-          </a:xfrm>
-          <a:prstGeom prst="rect">
-            <a:avLst/>
-          </a:prstGeom>
-          <a:noFill/>
-          <a:ln/>
-        </p:spPr>
-        <p:txBody>
-          <a:bodyPr wrap="square" rtlCol="0" anchor="t"/>
-          <a:lstStyle/>
-          <a:p>
-            <a:pPr indent="0" marL="0">
-              <a:buNone/>
-            </a:pPr>
-            <a:r>
-              <a:rPr lang="en-US" sz="1500" dirty="0">
-                <a:solidFill>
-                  <a:srgbClr val="1F2937"/>
-                </a:solidFill>
-                <a:latin typeface="Arial" pitchFamily="34" charset="0"/>
-                <a:ea typeface="Arial" pitchFamily="34" charset="-122"/>
-                <a:cs typeface="Arial" pitchFamily="34" charset="-120"/>
-              </a:rPr>
-              <a:t>um alerta de usina</a:t>
-            </a:r>
-            <a:endParaRPr lang="en-US" sz="1500" dirty="0"/>
-          </a:p>
-        </p:txBody>
-      </p:sp>
-      <p:sp>
-        <p:nvSpPr>
-          <p:cNvPr id="30" name="Shape 27"/>
-          <p:cNvSpPr/>
-          <p:nvPr/>
-        </p:nvSpPr>
-        <p:spPr>
-          <a:xfrm>
-            <a:off x="3378708" y="4572000"/>
-            <a:ext cx="2601468" cy="1463040"/>
-          </a:xfrm>
-          <a:prstGeom prst="roundRect">
-            <a:avLst>
-              <a:gd name="adj" fmla="val 5000"/>
-            </a:avLst>
-          </a:prstGeom>
-          <a:solidFill>
-            <a:srgbClr val="FFFFFF"/>
-          </a:solidFill>
-          <a:ln w="9525">
-            <a:solidFill>
-              <a:srgbClr val="D8E0EC"/>
-            </a:solidFill>
-            <a:prstDash val="solid"/>
-          </a:ln>
-        </p:spPr>
-      </p:sp>
-      <p:sp>
-        <p:nvSpPr>
-          <p:cNvPr id="31" name="Text 28"/>
-          <p:cNvSpPr/>
-          <p:nvPr/>
-        </p:nvSpPr>
-        <p:spPr>
-          <a:xfrm>
-            <a:off x="3515868" y="4663440"/>
-            <a:ext cx="365760" cy="365760"/>
-          </a:xfrm>
-          <a:prstGeom prst="rect">
-            <a:avLst/>
-          </a:prstGeom>
-          <a:noFill/>
-          <a:ln/>
-        </p:spPr>
-        <p:txBody>
-          <a:bodyPr wrap="square" rtlCol="0" anchor="ctr"/>
-          <a:lstStyle/>
-          <a:p>
-            <a:pPr indent="0" marL="0">
-              <a:buNone/>
-            </a:pPr>
-            <a:r>
-              <a:rPr lang="en-US" sz="1400" b="1" dirty="0">
-                <a:solidFill>
-                  <a:srgbClr val="F7A23B"/>
-                </a:solidFill>
-                <a:latin typeface="Arial" pitchFamily="34" charset="0"/>
-                <a:ea typeface="Arial" pitchFamily="34" charset="-122"/>
-                <a:cs typeface="Arial" pitchFamily="34" charset="-120"/>
-              </a:rPr>
-              <a:t>B</a:t>
-            </a:r>
-            <a:endParaRPr lang="en-US" sz="1400" dirty="0"/>
-          </a:p>
-        </p:txBody>
-      </p:sp>
-      <p:sp>
-        <p:nvSpPr>
-          <p:cNvPr id="32" name="Text 29"/>
-          <p:cNvSpPr/>
-          <p:nvPr/>
-        </p:nvSpPr>
-        <p:spPr>
-          <a:xfrm>
-            <a:off x="3515868" y="5029200"/>
-            <a:ext cx="2327148" cy="914400"/>
-          </a:xfrm>
-          <a:prstGeom prst="rect">
-            <a:avLst/>
-          </a:prstGeom>
-          <a:noFill/>
-          <a:ln/>
-        </p:spPr>
-        <p:txBody>
-          <a:bodyPr wrap="square" rtlCol="0" anchor="t"/>
-          <a:lstStyle/>
-          <a:p>
-            <a:pPr indent="0" marL="0">
-              <a:buNone/>
-            </a:pPr>
-            <a:r>
-              <a:rPr lang="en-US" sz="1500" dirty="0">
-                <a:solidFill>
-                  <a:srgbClr val="1F2937"/>
-                </a:solidFill>
-                <a:latin typeface="Arial" pitchFamily="34" charset="0"/>
-                <a:ea typeface="Arial" pitchFamily="34" charset="-122"/>
-                <a:cs typeface="Arial" pitchFamily="34" charset="-120"/>
-              </a:rPr>
-              <a:t>cobrança</a:t>
-            </a:r>
-            <a:endParaRPr lang="en-US" sz="1500" dirty="0"/>
-          </a:p>
-        </p:txBody>
-      </p:sp>
-      <p:sp>
-        <p:nvSpPr>
-          <p:cNvPr id="33" name="Shape 30"/>
-          <p:cNvSpPr/>
-          <p:nvPr/>
-        </p:nvSpPr>
-        <p:spPr>
-          <a:xfrm>
-            <a:off x="6208776" y="4572000"/>
-            <a:ext cx="2601468" cy="1463040"/>
-          </a:xfrm>
-          <a:prstGeom prst="roundRect">
-            <a:avLst>
-              <a:gd name="adj" fmla="val 5000"/>
-            </a:avLst>
-          </a:prstGeom>
-          <a:solidFill>
-            <a:srgbClr val="FFFFFF"/>
-          </a:solidFill>
-          <a:ln w="9525">
-            <a:solidFill>
-              <a:srgbClr val="D8E0EC"/>
-            </a:solidFill>
-            <a:prstDash val="solid"/>
-          </a:ln>
-        </p:spPr>
-      </p:sp>
-      <p:sp>
-        <p:nvSpPr>
-          <p:cNvPr id="34" name="Text 31"/>
-          <p:cNvSpPr/>
-          <p:nvPr/>
-        </p:nvSpPr>
-        <p:spPr>
-          <a:xfrm>
-            <a:off x="6345936" y="4663440"/>
-            <a:ext cx="365760" cy="365760"/>
-          </a:xfrm>
-          <a:prstGeom prst="rect">
-            <a:avLst/>
-          </a:prstGeom>
-          <a:noFill/>
-          <a:ln/>
-        </p:spPr>
-        <p:txBody>
-          <a:bodyPr wrap="square" rtlCol="0" anchor="ctr"/>
-          <a:lstStyle/>
-          <a:p>
-            <a:pPr indent="0" marL="0">
-              <a:buNone/>
-            </a:pPr>
-            <a:r>
-              <a:rPr lang="en-US" sz="1400" b="1" dirty="0">
-                <a:solidFill>
-                  <a:srgbClr val="F7A23B"/>
-                </a:solidFill>
-                <a:latin typeface="Arial" pitchFamily="34" charset="0"/>
-                <a:ea typeface="Arial" pitchFamily="34" charset="-122"/>
-                <a:cs typeface="Arial" pitchFamily="34" charset="-120"/>
-              </a:rPr>
-              <a:t>C</a:t>
-            </a:r>
-            <a:endParaRPr lang="en-US" sz="1400" dirty="0"/>
-          </a:p>
-        </p:txBody>
-      </p:sp>
-      <p:sp>
-        <p:nvSpPr>
-          <p:cNvPr id="35" name="Text 32"/>
-          <p:cNvSpPr/>
-          <p:nvPr/>
-        </p:nvSpPr>
-        <p:spPr>
-          <a:xfrm>
-            <a:off x="6345936" y="5029200"/>
-            <a:ext cx="2327148" cy="914400"/>
-          </a:xfrm>
-          <a:prstGeom prst="rect">
-            <a:avLst/>
-          </a:prstGeom>
-          <a:noFill/>
-          <a:ln/>
-        </p:spPr>
-        <p:txBody>
-          <a:bodyPr wrap="square" rtlCol="0" anchor="t"/>
-          <a:lstStyle/>
-          <a:p>
-            <a:pPr indent="0" marL="0">
-              <a:buNone/>
-            </a:pPr>
-            <a:r>
-              <a:rPr lang="en-US" sz="1500" dirty="0">
-                <a:solidFill>
-                  <a:srgbClr val="1F2937"/>
-                </a:solidFill>
-                <a:latin typeface="Arial" pitchFamily="34" charset="0"/>
-                <a:ea typeface="Arial" pitchFamily="34" charset="-122"/>
-                <a:cs typeface="Arial" pitchFamily="34" charset="-120"/>
-              </a:rPr>
-              <a:t>nada</a:t>
-            </a:r>
-            <a:endParaRPr lang="en-US" sz="1500" dirty="0"/>
-          </a:p>
-        </p:txBody>
-      </p:sp>
-      <p:sp>
-        <p:nvSpPr>
-          <p:cNvPr id="36" name="Shape 33"/>
-          <p:cNvSpPr/>
-          <p:nvPr/>
-        </p:nvSpPr>
-        <p:spPr>
-          <a:xfrm>
-            <a:off x="9038844" y="4572000"/>
-            <a:ext cx="2601468" cy="1463040"/>
-          </a:xfrm>
-          <a:prstGeom prst="roundRect">
-            <a:avLst>
-              <a:gd name="adj" fmla="val 5000"/>
-            </a:avLst>
-          </a:prstGeom>
-          <a:solidFill>
-            <a:srgbClr val="FFFFFF"/>
-          </a:solidFill>
-          <a:ln w="9525">
-            <a:solidFill>
-              <a:srgbClr val="D8E0EC"/>
-            </a:solidFill>
-            <a:prstDash val="solid"/>
-          </a:ln>
-        </p:spPr>
-      </p:sp>
-      <p:sp>
-        <p:nvSpPr>
-          <p:cNvPr id="37" name="Text 34"/>
-          <p:cNvSpPr/>
-          <p:nvPr/>
-        </p:nvSpPr>
-        <p:spPr>
-          <a:xfrm>
-            <a:off x="9176004" y="4663440"/>
-            <a:ext cx="365760" cy="365760"/>
-          </a:xfrm>
-          <a:prstGeom prst="rect">
-            <a:avLst/>
-          </a:prstGeom>
-          <a:noFill/>
-          <a:ln/>
-        </p:spPr>
-        <p:txBody>
-          <a:bodyPr wrap="square" rtlCol="0" anchor="ctr"/>
-          <a:lstStyle/>
-          <a:p>
-            <a:pPr indent="0" marL="0">
-              <a:buNone/>
-            </a:pPr>
-            <a:r>
-              <a:rPr lang="en-US" sz="1400" b="1" dirty="0">
-                <a:solidFill>
-                  <a:srgbClr val="F7A23B"/>
-                </a:solidFill>
-                <a:latin typeface="Arial" pitchFamily="34" charset="0"/>
-                <a:ea typeface="Arial" pitchFamily="34" charset="-122"/>
-                <a:cs typeface="Arial" pitchFamily="34" charset="-120"/>
-              </a:rPr>
-              <a:t>D</a:t>
-            </a:r>
-            <a:endParaRPr lang="en-US" sz="1400" dirty="0"/>
-          </a:p>
-        </p:txBody>
-      </p:sp>
-      <p:sp>
-        <p:nvSpPr>
-          <p:cNvPr id="38" name="Text 35"/>
-          <p:cNvSpPr/>
-          <p:nvPr/>
-        </p:nvSpPr>
-        <p:spPr>
-          <a:xfrm>
-            <a:off x="9176004" y="5029200"/>
-            <a:ext cx="2327148" cy="914400"/>
-          </a:xfrm>
-          <a:prstGeom prst="rect">
-            <a:avLst/>
-          </a:prstGeom>
-          <a:noFill/>
-          <a:ln/>
-        </p:spPr>
-        <p:txBody>
-          <a:bodyPr wrap="square" rtlCol="0" anchor="t"/>
-          <a:lstStyle/>
-          <a:p>
-            <a:pPr indent="0" marL="0">
-              <a:buNone/>
-            </a:pPr>
-            <a:r>
-              <a:rPr lang="en-US" sz="1500" dirty="0">
-                <a:solidFill>
-                  <a:srgbClr val="1F2937"/>
-                </a:solidFill>
-                <a:latin typeface="Arial" pitchFamily="34" charset="0"/>
-                <a:ea typeface="Arial" pitchFamily="34" charset="-122"/>
-                <a:cs typeface="Arial" pitchFamily="34" charset="-120"/>
-              </a:rPr>
-              <a:t>cancelamento</a:t>
+              <a:t>mais visitas presenciais</a:t>
             </a:r>
             <a:endParaRPr lang="en-US" sz="1500" dirty="0"/>
           </a:p>
@@ -17810,6 +18329,983 @@
 <file path=ppt/slides/slide28.xml><?xml version="1.0" encoding="utf-8"?>
 <p:sld xmlns:a="http://schemas.openxmlformats.org/drawingml/2006/main" xmlns:r="http://schemas.openxmlformats.org/officeDocument/2006/relationships" xmlns:p="http://schemas.openxmlformats.org/presentationml/2006/main">
   <p:cSld name="Slide 28">
+    <p:bg>
+      <p:bgPr>
+        <a:solidFill>
+          <a:srgbClr val="EEF3FA"/>
+        </a:solidFill>
+      </p:bgPr>
+    </p:bg>
+    <p:spTree>
+      <p:nvGrpSpPr>
+        <p:cNvPr id="1" name=""/>
+        <p:cNvGrpSpPr/>
+        <p:nvPr/>
+      </p:nvGrpSpPr>
+      <p:grpSpPr>
+        <a:xfrm>
+          <a:off x="0" y="0"/>
+          <a:ext cx="0" cy="0"/>
+          <a:chOff x="0" y="0"/>
+          <a:chExt cx="0" cy="0"/>
+        </a:xfrm>
+      </p:grpSpPr>
+      <p:sp>
+        <p:nvSpPr>
+          <p:cNvPr id="2" name="Shape 0"/>
+          <p:cNvSpPr/>
+          <p:nvPr/>
+        </p:nvSpPr>
+        <p:spPr>
+          <a:xfrm>
+            <a:off x="0" y="6510528"/>
+            <a:ext cx="12191695" cy="347472"/>
+          </a:xfrm>
+          <a:prstGeom prst="rect">
+            <a:avLst/>
+          </a:prstGeom>
+          <a:solidFill>
+            <a:srgbClr val="FFFFFF"/>
+          </a:solidFill>
+          <a:ln w="6350">
+            <a:solidFill>
+              <a:srgbClr val="D8E0EC"/>
+            </a:solidFill>
+            <a:prstDash val="solid"/>
+          </a:ln>
+        </p:spPr>
+      </p:sp>
+      <p:pic>
+        <p:nvPicPr>
+          <p:cNvPr id="3" name="Image 0" descr="/www/wwwroot/rexar/gdsolar/docs/curso/slides/assets/logo-gdsolar.png">    </p:cNvPr>
+          <p:cNvPicPr>
+            <a:picLocks noChangeAspect="1"/>
+          </p:cNvPicPr>
+          <p:nvPr/>
+        </p:nvPicPr>
+        <p:blipFill>
+          <a:blip r:embed="rId1"/>
+          <a:stretch>
+            <a:fillRect/>
+          </a:stretch>
+        </p:blipFill>
+        <p:spPr>
+          <a:xfrm>
+            <a:off x="548640" y="6547104"/>
+            <a:ext cx="274320" cy="274320"/>
+          </a:xfrm>
+          <a:prstGeom prst="rect">
+            <a:avLst/>
+          </a:prstGeom>
+        </p:spPr>
+      </p:pic>
+      <p:sp>
+        <p:nvSpPr>
+          <p:cNvPr id="4" name="Text 1"/>
+          <p:cNvSpPr/>
+          <p:nvPr/>
+        </p:nvSpPr>
+        <p:spPr>
+          <a:xfrm>
+            <a:off x="886968" y="6528816"/>
+            <a:ext cx="6400800" cy="310896"/>
+          </a:xfrm>
+          <a:prstGeom prst="rect">
+            <a:avLst/>
+          </a:prstGeom>
+          <a:noFill/>
+          <a:ln/>
+        </p:spPr>
+        <p:txBody>
+          <a:bodyPr wrap="square" rtlCol="0" anchor="ctr"/>
+          <a:lstStyle/>
+          <a:p>
+            <a:pPr indent="0" marL="0">
+              <a:buNone/>
+            </a:pPr>
+            <a:r>
+              <a:rPr lang="en-US" sz="900" b="1" dirty="0">
+                <a:solidFill>
+                  <a:srgbClr val="64748B"/>
+                </a:solidFill>
+                <a:latin typeface="Arial" pitchFamily="34" charset="0"/>
+                <a:ea typeface="Arial" pitchFamily="34" charset="-122"/>
+                <a:cs typeface="Arial" pitchFamily="34" charset="-120"/>
+              </a:rPr>
+              <a:t>GD Solar  ·  Formação em Energia por Assinatura</a:t>
+            </a:r>
+            <a:endParaRPr lang="en-US" sz="900" dirty="0"/>
+          </a:p>
+        </p:txBody>
+      </p:sp>
+      <p:sp>
+        <p:nvSpPr>
+          <p:cNvPr id="5" name="Text 2"/>
+          <p:cNvSpPr/>
+          <p:nvPr/>
+        </p:nvSpPr>
+        <p:spPr>
+          <a:xfrm>
+            <a:off x="7132320" y="6528816"/>
+            <a:ext cx="4023360" cy="310896"/>
+          </a:xfrm>
+          <a:prstGeom prst="rect">
+            <a:avLst/>
+          </a:prstGeom>
+          <a:noFill/>
+          <a:ln/>
+        </p:spPr>
+        <p:txBody>
+          <a:bodyPr wrap="square" rtlCol="0" anchor="ctr"/>
+          <a:lstStyle/>
+          <a:p>
+            <a:pPr algn="r" indent="0" marL="0">
+              <a:buNone/>
+            </a:pPr>
+            <a:r>
+              <a:rPr lang="en-US" sz="900" dirty="0">
+                <a:solidFill>
+                  <a:srgbClr val="64748B"/>
+                </a:solidFill>
+                <a:latin typeface="Arial" pitchFamily="34" charset="0"/>
+                <a:ea typeface="Arial" pitchFamily="34" charset="-122"/>
+                <a:cs typeface="Arial" pitchFamily="34" charset="-120"/>
+              </a:rPr>
+              <a:t>M9 · Teste rápido</a:t>
+            </a:r>
+            <a:endParaRPr lang="en-US" sz="900" dirty="0"/>
+          </a:p>
+        </p:txBody>
+      </p:sp>
+      <p:sp>
+        <p:nvSpPr>
+          <p:cNvPr id="6" name="Shape 3"/>
+          <p:cNvSpPr/>
+          <p:nvPr/>
+        </p:nvSpPr>
+        <p:spPr>
+          <a:xfrm>
+            <a:off x="548640" y="384048"/>
+            <a:ext cx="82296" cy="658368"/>
+          </a:xfrm>
+          <a:prstGeom prst="rect">
+            <a:avLst/>
+          </a:prstGeom>
+          <a:solidFill>
+            <a:srgbClr val="F7A23B"/>
+          </a:solidFill>
+          <a:ln/>
+        </p:spPr>
+      </p:sp>
+      <p:sp>
+        <p:nvSpPr>
+          <p:cNvPr id="7" name="Text 4"/>
+          <p:cNvSpPr/>
+          <p:nvPr/>
+        </p:nvSpPr>
+        <p:spPr>
+          <a:xfrm>
+            <a:off x="777240" y="292608"/>
+            <a:ext cx="10972800" cy="274320"/>
+          </a:xfrm>
+          <a:prstGeom prst="rect">
+            <a:avLst/>
+          </a:prstGeom>
+          <a:noFill/>
+          <a:ln/>
+        </p:spPr>
+        <p:txBody>
+          <a:bodyPr wrap="square" rtlCol="0" anchor="ctr"/>
+          <a:lstStyle/>
+          <a:p>
+            <a:pPr indent="0" marL="0">
+              <a:buNone/>
+            </a:pPr>
+            <a:r>
+              <a:rPr lang="en-US" sz="1000" b="1" spc="100" kern="0" dirty="0">
+                <a:solidFill>
+                  <a:srgbClr val="F7A23B"/>
+                </a:solidFill>
+                <a:latin typeface="Arial" pitchFamily="34" charset="0"/>
+                <a:ea typeface="Arial" pitchFamily="34" charset="-122"/>
+                <a:cs typeface="Arial" pitchFamily="34" charset="-120"/>
+              </a:rPr>
+              <a:t>CONFIRA SUAS RESPOSTAS</a:t>
+            </a:r>
+            <a:endParaRPr lang="en-US" sz="1000" dirty="0"/>
+          </a:p>
+        </p:txBody>
+      </p:sp>
+      <p:sp>
+        <p:nvSpPr>
+          <p:cNvPr id="8" name="Text 5"/>
+          <p:cNvSpPr/>
+          <p:nvPr/>
+        </p:nvSpPr>
+        <p:spPr>
+          <a:xfrm>
+            <a:off x="777240" y="530352"/>
+            <a:ext cx="10881360" cy="566928"/>
+          </a:xfrm>
+          <a:prstGeom prst="rect">
+            <a:avLst/>
+          </a:prstGeom>
+          <a:noFill/>
+          <a:ln/>
+        </p:spPr>
+        <p:txBody>
+          <a:bodyPr wrap="square" rtlCol="0" anchor="ctr">
+            <a:normAutofit/>
+          </a:bodyPr>
+          <a:lstStyle/>
+          <a:p>
+            <a:pPr indent="0" marL="0">
+              <a:buNone/>
+            </a:pPr>
+            <a:r>
+              <a:rPr lang="en-US" sz="2600" b="1" dirty="0">
+                <a:solidFill>
+                  <a:srgbClr val="1B3A6B"/>
+                </a:solidFill>
+                <a:latin typeface="Arial" pitchFamily="34" charset="0"/>
+                <a:ea typeface="Arial" pitchFamily="34" charset="-122"/>
+                <a:cs typeface="Arial" pitchFamily="34" charset="-120"/>
+              </a:rPr>
+              <a:t>Gabarito do teste rápido</a:t>
+            </a:r>
+            <a:endParaRPr lang="en-US" sz="2600" dirty="0"/>
+          </a:p>
+        </p:txBody>
+      </p:sp>
+      <p:sp>
+        <p:nvSpPr>
+          <p:cNvPr id="9" name="Shape 6"/>
+          <p:cNvSpPr/>
+          <p:nvPr/>
+        </p:nvSpPr>
+        <p:spPr>
+          <a:xfrm>
+            <a:off x="548640" y="1325880"/>
+            <a:ext cx="3544824" cy="2331720"/>
+          </a:xfrm>
+          <a:prstGeom prst="roundRect">
+            <a:avLst>
+              <a:gd name="adj" fmla="val 3137"/>
+            </a:avLst>
+          </a:prstGeom>
+          <a:solidFill>
+            <a:srgbClr val="FFFFFF"/>
+          </a:solidFill>
+          <a:ln w="9525">
+            <a:solidFill>
+              <a:srgbClr val="D8E0EC"/>
+            </a:solidFill>
+            <a:prstDash val="solid"/>
+          </a:ln>
+          <a:effectLst>
+            <a:outerShdw sx="100000" sy="100000" kx="0" ky="0" algn="bl" rotWithShape="0" blurRad="38100" dist="12700" dir="5400000">
+              <a:srgbClr val="000000">
+                <a:alpha val="8000"/>
+              </a:srgbClr>
+            </a:outerShdw>
+          </a:effectLst>
+        </p:spPr>
+      </p:sp>
+      <p:sp>
+        <p:nvSpPr>
+          <p:cNvPr id="10" name="Shape 7"/>
+          <p:cNvSpPr/>
+          <p:nvPr/>
+        </p:nvSpPr>
+        <p:spPr>
+          <a:xfrm>
+            <a:off x="731520" y="1508760"/>
+            <a:ext cx="457200" cy="457200"/>
+          </a:xfrm>
+          <a:prstGeom prst="ellipse">
+            <a:avLst/>
+          </a:prstGeom>
+          <a:solidFill>
+            <a:srgbClr val="1B3A6B"/>
+          </a:solidFill>
+          <a:ln/>
+        </p:spPr>
+      </p:sp>
+      <p:sp>
+        <p:nvSpPr>
+          <p:cNvPr id="11" name="Text 8"/>
+          <p:cNvSpPr/>
+          <p:nvPr/>
+        </p:nvSpPr>
+        <p:spPr>
+          <a:xfrm>
+            <a:off x="731520" y="1508760"/>
+            <a:ext cx="457200" cy="457200"/>
+          </a:xfrm>
+          <a:prstGeom prst="rect">
+            <a:avLst/>
+          </a:prstGeom>
+          <a:noFill/>
+          <a:ln/>
+        </p:spPr>
+        <p:txBody>
+          <a:bodyPr wrap="square" rtlCol="0" anchor="ctr"/>
+          <a:lstStyle/>
+          <a:p>
+            <a:pPr algn="ctr" indent="0" marL="0">
+              <a:buNone/>
+            </a:pPr>
+            <a:r>
+              <a:rPr lang="en-US" sz="1400" b="1" dirty="0">
+                <a:solidFill>
+                  <a:srgbClr val="FFFFFF"/>
+                </a:solidFill>
+                <a:latin typeface="Arial" pitchFamily="34" charset="0"/>
+                <a:ea typeface="Arial" pitchFamily="34" charset="-122"/>
+                <a:cs typeface="Arial" pitchFamily="34" charset="-120"/>
+              </a:rPr>
+              <a:t>1</a:t>
+            </a:r>
+            <a:endParaRPr lang="en-US" sz="1400" dirty="0"/>
+          </a:p>
+        </p:txBody>
+      </p:sp>
+      <p:sp>
+        <p:nvSpPr>
+          <p:cNvPr id="12" name="Text 9"/>
+          <p:cNvSpPr/>
+          <p:nvPr/>
+        </p:nvSpPr>
+        <p:spPr>
+          <a:xfrm>
+            <a:off x="1325880" y="1435608"/>
+            <a:ext cx="2630424" cy="2112264"/>
+          </a:xfrm>
+          <a:prstGeom prst="rect">
+            <a:avLst/>
+          </a:prstGeom>
+          <a:noFill/>
+          <a:ln/>
+        </p:spPr>
+        <p:txBody>
+          <a:bodyPr wrap="square" rtlCol="0" anchor="ctr">
+            <a:normAutofit/>
+          </a:bodyPr>
+          <a:lstStyle/>
+          <a:p>
+            <a:pPr indent="0" marL="0">
+              <a:buNone/>
+            </a:pPr>
+            <a:r>
+              <a:rPr lang="en-US" sz="1800" dirty="0">
+                <a:solidFill>
+                  <a:srgbClr val="1F2937"/>
+                </a:solidFill>
+                <a:latin typeface="Arial" pitchFamily="34" charset="0"/>
+                <a:ea typeface="Arial" pitchFamily="34" charset="-122"/>
+                <a:cs typeface="Arial" pitchFamily="34" charset="-120"/>
+              </a:rPr>
+              <a:t>-) </a:t>
+            </a:r>
+            <a:endParaRPr lang="en-US" sz="1800" dirty="0"/>
+          </a:p>
+        </p:txBody>
+      </p:sp>
+      <p:sp>
+        <p:nvSpPr>
+          <p:cNvPr id="13" name="Shape 10"/>
+          <p:cNvSpPr/>
+          <p:nvPr/>
+        </p:nvSpPr>
+        <p:spPr>
+          <a:xfrm>
+            <a:off x="4322064" y="1325880"/>
+            <a:ext cx="3544824" cy="2331720"/>
+          </a:xfrm>
+          <a:prstGeom prst="roundRect">
+            <a:avLst>
+              <a:gd name="adj" fmla="val 3137"/>
+            </a:avLst>
+          </a:prstGeom>
+          <a:solidFill>
+            <a:srgbClr val="FFFFFF"/>
+          </a:solidFill>
+          <a:ln w="9525">
+            <a:solidFill>
+              <a:srgbClr val="D8E0EC"/>
+            </a:solidFill>
+            <a:prstDash val="solid"/>
+          </a:ln>
+          <a:effectLst>
+            <a:outerShdw sx="100000" sy="100000" kx="0" ky="0" algn="bl" rotWithShape="0" blurRad="38100" dist="12700" dir="5400000">
+              <a:srgbClr val="000000">
+                <a:alpha val="8000"/>
+              </a:srgbClr>
+            </a:outerShdw>
+          </a:effectLst>
+        </p:spPr>
+      </p:sp>
+      <p:sp>
+        <p:nvSpPr>
+          <p:cNvPr id="14" name="Shape 11"/>
+          <p:cNvSpPr/>
+          <p:nvPr/>
+        </p:nvSpPr>
+        <p:spPr>
+          <a:xfrm>
+            <a:off x="4504944" y="1508760"/>
+            <a:ext cx="457200" cy="457200"/>
+          </a:xfrm>
+          <a:prstGeom prst="ellipse">
+            <a:avLst/>
+          </a:prstGeom>
+          <a:solidFill>
+            <a:srgbClr val="F7A23B"/>
+          </a:solidFill>
+          <a:ln/>
+        </p:spPr>
+      </p:sp>
+      <p:sp>
+        <p:nvSpPr>
+          <p:cNvPr id="15" name="Text 12"/>
+          <p:cNvSpPr/>
+          <p:nvPr/>
+        </p:nvSpPr>
+        <p:spPr>
+          <a:xfrm>
+            <a:off x="4504944" y="1508760"/>
+            <a:ext cx="457200" cy="457200"/>
+          </a:xfrm>
+          <a:prstGeom prst="rect">
+            <a:avLst/>
+          </a:prstGeom>
+          <a:noFill/>
+          <a:ln/>
+        </p:spPr>
+        <p:txBody>
+          <a:bodyPr wrap="square" rtlCol="0" anchor="ctr"/>
+          <a:lstStyle/>
+          <a:p>
+            <a:pPr algn="ctr" indent="0" marL="0">
+              <a:buNone/>
+            </a:pPr>
+            <a:r>
+              <a:rPr lang="en-US" sz="1400" b="1" dirty="0">
+                <a:solidFill>
+                  <a:srgbClr val="FFFFFF"/>
+                </a:solidFill>
+                <a:latin typeface="Arial" pitchFamily="34" charset="0"/>
+                <a:ea typeface="Arial" pitchFamily="34" charset="-122"/>
+                <a:cs typeface="Arial" pitchFamily="34" charset="-120"/>
+              </a:rPr>
+              <a:t>2</a:t>
+            </a:r>
+            <a:endParaRPr lang="en-US" sz="1400" dirty="0"/>
+          </a:p>
+        </p:txBody>
+      </p:sp>
+      <p:sp>
+        <p:nvSpPr>
+          <p:cNvPr id="16" name="Text 13"/>
+          <p:cNvSpPr/>
+          <p:nvPr/>
+        </p:nvSpPr>
+        <p:spPr>
+          <a:xfrm>
+            <a:off x="5099304" y="1435608"/>
+            <a:ext cx="2630424" cy="2112264"/>
+          </a:xfrm>
+          <a:prstGeom prst="rect">
+            <a:avLst/>
+          </a:prstGeom>
+          <a:noFill/>
+          <a:ln/>
+        </p:spPr>
+        <p:txBody>
+          <a:bodyPr wrap="square" rtlCol="0" anchor="ctr">
+            <a:normAutofit/>
+          </a:bodyPr>
+          <a:lstStyle/>
+          <a:p>
+            <a:pPr indent="0" marL="0">
+              <a:buNone/>
+            </a:pPr>
+            <a:r>
+              <a:rPr lang="en-US" sz="1800" dirty="0">
+                <a:solidFill>
+                  <a:srgbClr val="1F2937"/>
+                </a:solidFill>
+                <a:latin typeface="Arial" pitchFamily="34" charset="0"/>
+                <a:ea typeface="Arial" pitchFamily="34" charset="-122"/>
+                <a:cs typeface="Arial" pitchFamily="34" charset="-120"/>
+              </a:rPr>
+              <a:t>A) se resolve sozinho na próxima varredura</a:t>
+            </a:r>
+            <a:endParaRPr lang="en-US" sz="1800" dirty="0"/>
+          </a:p>
+        </p:txBody>
+      </p:sp>
+      <p:sp>
+        <p:nvSpPr>
+          <p:cNvPr id="17" name="Shape 14"/>
+          <p:cNvSpPr/>
+          <p:nvPr/>
+        </p:nvSpPr>
+        <p:spPr>
+          <a:xfrm>
+            <a:off x="8095488" y="1325880"/>
+            <a:ext cx="3544824" cy="2331720"/>
+          </a:xfrm>
+          <a:prstGeom prst="roundRect">
+            <a:avLst>
+              <a:gd name="adj" fmla="val 3137"/>
+            </a:avLst>
+          </a:prstGeom>
+          <a:solidFill>
+            <a:srgbClr val="FFFFFF"/>
+          </a:solidFill>
+          <a:ln w="9525">
+            <a:solidFill>
+              <a:srgbClr val="D8E0EC"/>
+            </a:solidFill>
+            <a:prstDash val="solid"/>
+          </a:ln>
+          <a:effectLst>
+            <a:outerShdw sx="100000" sy="100000" kx="0" ky="0" algn="bl" rotWithShape="0" blurRad="38100" dist="12700" dir="5400000">
+              <a:srgbClr val="000000">
+                <a:alpha val="8000"/>
+              </a:srgbClr>
+            </a:outerShdw>
+          </a:effectLst>
+        </p:spPr>
+      </p:sp>
+      <p:sp>
+        <p:nvSpPr>
+          <p:cNvPr id="18" name="Shape 15"/>
+          <p:cNvSpPr/>
+          <p:nvPr/>
+        </p:nvSpPr>
+        <p:spPr>
+          <a:xfrm>
+            <a:off x="8278368" y="1508760"/>
+            <a:ext cx="457200" cy="457200"/>
+          </a:xfrm>
+          <a:prstGeom prst="ellipse">
+            <a:avLst/>
+          </a:prstGeom>
+          <a:solidFill>
+            <a:srgbClr val="1B3A6B"/>
+          </a:solidFill>
+          <a:ln/>
+        </p:spPr>
+      </p:sp>
+      <p:sp>
+        <p:nvSpPr>
+          <p:cNvPr id="19" name="Text 16"/>
+          <p:cNvSpPr/>
+          <p:nvPr/>
+        </p:nvSpPr>
+        <p:spPr>
+          <a:xfrm>
+            <a:off x="8278368" y="1508760"/>
+            <a:ext cx="457200" cy="457200"/>
+          </a:xfrm>
+          <a:prstGeom prst="rect">
+            <a:avLst/>
+          </a:prstGeom>
+          <a:noFill/>
+          <a:ln/>
+        </p:spPr>
+        <p:txBody>
+          <a:bodyPr wrap="square" rtlCol="0" anchor="ctr"/>
+          <a:lstStyle/>
+          <a:p>
+            <a:pPr algn="ctr" indent="0" marL="0">
+              <a:buNone/>
+            </a:pPr>
+            <a:r>
+              <a:rPr lang="en-US" sz="1400" b="1" dirty="0">
+                <a:solidFill>
+                  <a:srgbClr val="FFFFFF"/>
+                </a:solidFill>
+                <a:latin typeface="Arial" pitchFamily="34" charset="0"/>
+                <a:ea typeface="Arial" pitchFamily="34" charset="-122"/>
+                <a:cs typeface="Arial" pitchFamily="34" charset="-120"/>
+              </a:rPr>
+              <a:t>3</a:t>
+            </a:r>
+            <a:endParaRPr lang="en-US" sz="1400" dirty="0"/>
+          </a:p>
+        </p:txBody>
+      </p:sp>
+      <p:sp>
+        <p:nvSpPr>
+          <p:cNvPr id="20" name="Text 17"/>
+          <p:cNvSpPr/>
+          <p:nvPr/>
+        </p:nvSpPr>
+        <p:spPr>
+          <a:xfrm>
+            <a:off x="8872728" y="1435608"/>
+            <a:ext cx="2630424" cy="2112264"/>
+          </a:xfrm>
+          <a:prstGeom prst="rect">
+            <a:avLst/>
+          </a:prstGeom>
+          <a:noFill/>
+          <a:ln/>
+        </p:spPr>
+        <p:txBody>
+          <a:bodyPr wrap="square" rtlCol="0" anchor="ctr">
+            <a:normAutofit/>
+          </a:bodyPr>
+          <a:lstStyle/>
+          <a:p>
+            <a:pPr indent="0" marL="0">
+              <a:buNone/>
+            </a:pPr>
+            <a:r>
+              <a:rPr lang="en-US" sz="1800" dirty="0">
+                <a:solidFill>
+                  <a:srgbClr val="1F2937"/>
+                </a:solidFill>
+                <a:latin typeface="Arial" pitchFamily="34" charset="0"/>
+                <a:ea typeface="Arial" pitchFamily="34" charset="-122"/>
+                <a:cs typeface="Arial" pitchFamily="34" charset="-120"/>
+              </a:rPr>
+              <a:t>B) Só os financeiros da própria carteira</a:t>
+            </a:r>
+            <a:endParaRPr lang="en-US" sz="1800" dirty="0"/>
+          </a:p>
+        </p:txBody>
+      </p:sp>
+      <p:sp>
+        <p:nvSpPr>
+          <p:cNvPr id="21" name="Shape 18"/>
+          <p:cNvSpPr/>
+          <p:nvPr/>
+        </p:nvSpPr>
+        <p:spPr>
+          <a:xfrm>
+            <a:off x="548640" y="3886200"/>
+            <a:ext cx="3544824" cy="2331720"/>
+          </a:xfrm>
+          <a:prstGeom prst="roundRect">
+            <a:avLst>
+              <a:gd name="adj" fmla="val 3137"/>
+            </a:avLst>
+          </a:prstGeom>
+          <a:solidFill>
+            <a:srgbClr val="FFFFFF"/>
+          </a:solidFill>
+          <a:ln w="9525">
+            <a:solidFill>
+              <a:srgbClr val="D8E0EC"/>
+            </a:solidFill>
+            <a:prstDash val="solid"/>
+          </a:ln>
+          <a:effectLst>
+            <a:outerShdw sx="100000" sy="100000" kx="0" ky="0" algn="bl" rotWithShape="0" blurRad="38100" dist="12700" dir="5400000">
+              <a:srgbClr val="000000">
+                <a:alpha val="8000"/>
+              </a:srgbClr>
+            </a:outerShdw>
+          </a:effectLst>
+        </p:spPr>
+      </p:sp>
+      <p:sp>
+        <p:nvSpPr>
+          <p:cNvPr id="22" name="Shape 19"/>
+          <p:cNvSpPr/>
+          <p:nvPr/>
+        </p:nvSpPr>
+        <p:spPr>
+          <a:xfrm>
+            <a:off x="731520" y="4069080"/>
+            <a:ext cx="457200" cy="457200"/>
+          </a:xfrm>
+          <a:prstGeom prst="ellipse">
+            <a:avLst/>
+          </a:prstGeom>
+          <a:solidFill>
+            <a:srgbClr val="F7A23B"/>
+          </a:solidFill>
+          <a:ln/>
+        </p:spPr>
+      </p:sp>
+      <p:sp>
+        <p:nvSpPr>
+          <p:cNvPr id="23" name="Text 20"/>
+          <p:cNvSpPr/>
+          <p:nvPr/>
+        </p:nvSpPr>
+        <p:spPr>
+          <a:xfrm>
+            <a:off x="731520" y="4069080"/>
+            <a:ext cx="457200" cy="457200"/>
+          </a:xfrm>
+          <a:prstGeom prst="rect">
+            <a:avLst/>
+          </a:prstGeom>
+          <a:noFill/>
+          <a:ln/>
+        </p:spPr>
+        <p:txBody>
+          <a:bodyPr wrap="square" rtlCol="0" anchor="ctr"/>
+          <a:lstStyle/>
+          <a:p>
+            <a:pPr algn="ctr" indent="0" marL="0">
+              <a:buNone/>
+            </a:pPr>
+            <a:r>
+              <a:rPr lang="en-US" sz="1400" b="1" dirty="0">
+                <a:solidFill>
+                  <a:srgbClr val="FFFFFF"/>
+                </a:solidFill>
+                <a:latin typeface="Arial" pitchFamily="34" charset="0"/>
+                <a:ea typeface="Arial" pitchFamily="34" charset="-122"/>
+                <a:cs typeface="Arial" pitchFamily="34" charset="-120"/>
+              </a:rPr>
+              <a:t>4</a:t>
+            </a:r>
+            <a:endParaRPr lang="en-US" sz="1400" dirty="0"/>
+          </a:p>
+        </p:txBody>
+      </p:sp>
+      <p:sp>
+        <p:nvSpPr>
+          <p:cNvPr id="24" name="Text 21"/>
+          <p:cNvSpPr/>
+          <p:nvPr/>
+        </p:nvSpPr>
+        <p:spPr>
+          <a:xfrm>
+            <a:off x="1325880" y="3995928"/>
+            <a:ext cx="2630424" cy="2112264"/>
+          </a:xfrm>
+          <a:prstGeom prst="rect">
+            <a:avLst/>
+          </a:prstGeom>
+          <a:noFill/>
+          <a:ln/>
+        </p:spPr>
+        <p:txBody>
+          <a:bodyPr wrap="square" rtlCol="0" anchor="ctr">
+            <a:normAutofit/>
+          </a:bodyPr>
+          <a:lstStyle/>
+          <a:p>
+            <a:pPr indent="0" marL="0">
+              <a:buNone/>
+            </a:pPr>
+            <a:r>
+              <a:rPr lang="en-US" sz="1800" dirty="0">
+                <a:solidFill>
+                  <a:srgbClr val="1F2937"/>
+                </a:solidFill>
+                <a:latin typeface="Arial" pitchFamily="34" charset="0"/>
+                <a:ea typeface="Arial" pitchFamily="34" charset="-122"/>
+                <a:cs typeface="Arial" pitchFamily="34" charset="-120"/>
+              </a:rPr>
+              <a:t>A) um alerta de usina</a:t>
+            </a:r>
+            <a:endParaRPr lang="en-US" sz="1800" dirty="0"/>
+          </a:p>
+        </p:txBody>
+      </p:sp>
+      <p:sp>
+        <p:nvSpPr>
+          <p:cNvPr id="25" name="Shape 22"/>
+          <p:cNvSpPr/>
+          <p:nvPr/>
+        </p:nvSpPr>
+        <p:spPr>
+          <a:xfrm>
+            <a:off x="4322064" y="3886200"/>
+            <a:ext cx="3544824" cy="2331720"/>
+          </a:xfrm>
+          <a:prstGeom prst="roundRect">
+            <a:avLst>
+              <a:gd name="adj" fmla="val 3137"/>
+            </a:avLst>
+          </a:prstGeom>
+          <a:solidFill>
+            <a:srgbClr val="FFFFFF"/>
+          </a:solidFill>
+          <a:ln w="9525">
+            <a:solidFill>
+              <a:srgbClr val="D8E0EC"/>
+            </a:solidFill>
+            <a:prstDash val="solid"/>
+          </a:ln>
+          <a:effectLst>
+            <a:outerShdw sx="100000" sy="100000" kx="0" ky="0" algn="bl" rotWithShape="0" blurRad="38100" dist="12700" dir="5400000">
+              <a:srgbClr val="000000">
+                <a:alpha val="8000"/>
+              </a:srgbClr>
+            </a:outerShdw>
+          </a:effectLst>
+        </p:spPr>
+      </p:sp>
+      <p:sp>
+        <p:nvSpPr>
+          <p:cNvPr id="26" name="Shape 23"/>
+          <p:cNvSpPr/>
+          <p:nvPr/>
+        </p:nvSpPr>
+        <p:spPr>
+          <a:xfrm>
+            <a:off x="4504944" y="4069080"/>
+            <a:ext cx="457200" cy="457200"/>
+          </a:xfrm>
+          <a:prstGeom prst="ellipse">
+            <a:avLst/>
+          </a:prstGeom>
+          <a:solidFill>
+            <a:srgbClr val="1B3A6B"/>
+          </a:solidFill>
+          <a:ln/>
+        </p:spPr>
+      </p:sp>
+      <p:sp>
+        <p:nvSpPr>
+          <p:cNvPr id="27" name="Text 24"/>
+          <p:cNvSpPr/>
+          <p:nvPr/>
+        </p:nvSpPr>
+        <p:spPr>
+          <a:xfrm>
+            <a:off x="4504944" y="4069080"/>
+            <a:ext cx="457200" cy="457200"/>
+          </a:xfrm>
+          <a:prstGeom prst="rect">
+            <a:avLst/>
+          </a:prstGeom>
+          <a:noFill/>
+          <a:ln/>
+        </p:spPr>
+        <p:txBody>
+          <a:bodyPr wrap="square" rtlCol="0" anchor="ctr"/>
+          <a:lstStyle/>
+          <a:p>
+            <a:pPr algn="ctr" indent="0" marL="0">
+              <a:buNone/>
+            </a:pPr>
+            <a:r>
+              <a:rPr lang="en-US" sz="1400" b="1" dirty="0">
+                <a:solidFill>
+                  <a:srgbClr val="FFFFFF"/>
+                </a:solidFill>
+                <a:latin typeface="Arial" pitchFamily="34" charset="0"/>
+                <a:ea typeface="Arial" pitchFamily="34" charset="-122"/>
+                <a:cs typeface="Arial" pitchFamily="34" charset="-120"/>
+              </a:rPr>
+              <a:t>5</a:t>
+            </a:r>
+            <a:endParaRPr lang="en-US" sz="1400" dirty="0"/>
+          </a:p>
+        </p:txBody>
+      </p:sp>
+      <p:sp>
+        <p:nvSpPr>
+          <p:cNvPr id="28" name="Text 25"/>
+          <p:cNvSpPr/>
+          <p:nvPr/>
+        </p:nvSpPr>
+        <p:spPr>
+          <a:xfrm>
+            <a:off x="5099304" y="3995928"/>
+            <a:ext cx="2630424" cy="2112264"/>
+          </a:xfrm>
+          <a:prstGeom prst="rect">
+            <a:avLst/>
+          </a:prstGeom>
+          <a:noFill/>
+          <a:ln/>
+        </p:spPr>
+        <p:txBody>
+          <a:bodyPr wrap="square" rtlCol="0" anchor="ctr">
+            <a:normAutofit/>
+          </a:bodyPr>
+          <a:lstStyle/>
+          <a:p>
+            <a:pPr indent="0" marL="0">
+              <a:buNone/>
+            </a:pPr>
+            <a:r>
+              <a:rPr lang="en-US" sz="1800" dirty="0">
+                <a:solidFill>
+                  <a:srgbClr val="1F2937"/>
+                </a:solidFill>
+                <a:latin typeface="Arial" pitchFamily="34" charset="0"/>
+                <a:ea typeface="Arial" pitchFamily="34" charset="-122"/>
+                <a:cs typeface="Arial" pitchFamily="34" charset="-120"/>
+              </a:rPr>
+              <a:t>B) menos chamados sobre "quanto devo/como pago"</a:t>
+            </a:r>
+            <a:endParaRPr lang="en-US" sz="1800" dirty="0"/>
+          </a:p>
+        </p:txBody>
+      </p:sp>
+      <p:sp>
+        <p:nvSpPr>
+          <p:cNvPr id="25" name="Slide Number Placeholder 0"/>
+          <p:cNvSpPr>
+            <a:spLocks noGrp="1"/>
+          </p:cNvSpPr>
+          <p:nvPr>
+            <p:ph type="sldNum" sz="quarter" idx="4294967295"/>
+          </p:nvPr>
+        </p:nvSpPr>
+        <p:spPr>
+          <a:xfrm>
+            <a:off x="11292840" y="6556248"/>
+            <a:ext cx="548640" cy="256032"/>
+          </a:xfrm>
+          <a:prstGeom prst="rect">
+            <a:avLst/>
+          </a:prstGeom>
+          <a:extLst>
+            <a:ext uri="{C572A759-6A51-4108-AA02-DFA0A04FC94B}">
+              <ma14:wrappingTextBoxFlag xmlns:ma14="http://schemas.microsoft.com/office/mac/drawingml/2011/main" val="0"/>
+            </a:ext>
+          </a:extLst>
+        </p:spPr>
+        <p:txBody>
+          <a:bodyPr/>
+          <a:lstStyle>
+            <a:lvl1pPr>
+              <a:defRPr sz="900">
+                <a:solidFill>
+                  <a:srgbClr val="1B3A6B"/>
+                </a:solidFill>
+                <a:latin typeface="Arial"/>
+                <a:ea typeface="Arial"/>
+                <a:cs typeface="Arial"/>
+              </a:defRPr>
+            </a:lvl1pPr>
+          </a:lstStyle>
+          <a:p>
+            <a:pPr algn="r"/>
+            <a:fld id="{F7021451-1387-4CA6-816F-3879F97B5CBC}" type="slidenum">
+              <a:rPr b="1" lang="en-US"/>
+              <a:t>28</a:t>
+            </a:fld>
+            <a:endParaRPr lang="en-US"/>
+          </a:p>
+        </p:txBody>
+      </p:sp>
+    </p:spTree>
+  </p:cSld>
+  <p:clrMapOvr>
+    <a:masterClrMapping/>
+  </p:clrMapOvr>
+</p:sld>
+</file>
+
+<file path=ppt/slides/slide29.xml><?xml version="1.0" encoding="utf-8"?>
+<p:sld xmlns:a="http://schemas.openxmlformats.org/drawingml/2006/main" xmlns:r="http://schemas.openxmlformats.org/officeDocument/2006/relationships" xmlns:p="http://schemas.openxmlformats.org/presentationml/2006/main">
+  <p:cSld name="Slide 29">
     <p:bg>
       <p:bgPr>
         <a:solidFill>
@@ -17952,7 +19448,7 @@
                 <a:ea typeface="Arial" pitchFamily="34" charset="-122"/>
                 <a:cs typeface="Arial" pitchFamily="34" charset="-120"/>
               </a:rPr>
-              <a:t>M9 · Teste rápido</a:t>
+              <a:t>M9 · Fechamento</a:t>
             </a:r>
             <a:endParaRPr lang="en-US" sz="900" dirty="0"/>
           </a:p>
@@ -18011,7 +19507,7 @@
                 <a:ea typeface="Arial" pitchFamily="34" charset="-122"/>
                 <a:cs typeface="Arial" pitchFamily="34" charset="-120"/>
               </a:rPr>
-              <a:t>QUESTÕES 5–5 DE 5</a:t>
+              <a:t>FECHAMENTO DO MÓDULO</a:t>
             </a:r>
             <a:endParaRPr lang="en-US" sz="1000" dirty="0"/>
           </a:p>
@@ -18052,7 +19548,7 @@
                 <a:ea typeface="Arial" pitchFamily="34" charset="-122"/>
                 <a:cs typeface="Arial" pitchFamily="34" charset="-120"/>
               </a:rPr>
-              <a:t>Teste rápido</a:t>
+              <a:t>Pratique e entregue</a:t>
             </a:r>
             <a:endParaRPr lang="en-US" sz="2600" dirty="0"/>
           </a:p>
@@ -18060,17 +19556,142 @@
       </p:sp>
       <p:sp>
         <p:nvSpPr>
-          <p:cNvPr id="9" name="Shape 6"/>
+          <p:cNvPr id="9" name="Text 6"/>
           <p:cNvSpPr/>
           <p:nvPr/>
         </p:nvSpPr>
         <p:spPr>
           <a:xfrm>
             <a:off x="548640" y="1325880"/>
-            <a:ext cx="502920" cy="502920"/>
-          </a:xfrm>
-          <a:prstGeom prst="ellipse">
-            <a:avLst/>
+            <a:ext cx="5394960" cy="411480"/>
+          </a:xfrm>
+          <a:prstGeom prst="rect">
+            <a:avLst/>
+          </a:prstGeom>
+          <a:noFill/>
+          <a:ln/>
+        </p:spPr>
+        <p:txBody>
+          <a:bodyPr wrap="square" rtlCol="0" anchor="ctr"/>
+          <a:lstStyle/>
+          <a:p>
+            <a:pPr indent="0" marL="0">
+              <a:buNone/>
+            </a:pPr>
+            <a:r>
+              <a:rPr lang="en-US" sz="1600" b="1" dirty="0">
+                <a:solidFill>
+                  <a:srgbClr val="1B3A6B"/>
+                </a:solidFill>
+                <a:latin typeface="Arial" pitchFamily="34" charset="0"/>
+                <a:ea typeface="Arial" pitchFamily="34" charset="-122"/>
+                <a:cs typeface="Arial" pitchFamily="34" charset="-120"/>
+              </a:rPr>
+              <a:t>Exercícios</a:t>
+            </a:r>
+            <a:endParaRPr lang="en-US" sz="1600" dirty="0"/>
+          </a:p>
+        </p:txBody>
+      </p:sp>
+      <p:sp>
+        <p:nvSpPr>
+          <p:cNvPr id="10" name="Text 7"/>
+          <p:cNvSpPr/>
+          <p:nvPr/>
+        </p:nvSpPr>
+        <p:spPr>
+          <a:xfrm>
+            <a:off x="548640" y="1783080"/>
+            <a:ext cx="5394960" cy="4480560"/>
+          </a:xfrm>
+          <a:prstGeom prst="rect">
+            <a:avLst/>
+          </a:prstGeom>
+          <a:noFill/>
+          <a:ln/>
+        </p:spPr>
+        <p:txBody>
+          <a:bodyPr wrap="square" rtlCol="0" anchor="t">
+            <a:normAutofit/>
+          </a:bodyPr>
+          <a:lstStyle/>
+          <a:p>
+            <a:pPr indent="0" marL="0">
+              <a:spcAft>
+                <a:spcPts val="800"/>
+              </a:spcAft>
+              <a:buNone/>
+            </a:pPr>
+            <a:r>
+              <a:rPr lang="en-US" sz="1600" dirty="0">
+                <a:solidFill>
+                  <a:srgbClr val="1F2937"/>
+                </a:solidFill>
+                <a:latin typeface="Arial" pitchFamily="34" charset="0"/>
+                <a:ea typeface="Arial" pitchFamily="34" charset="-122"/>
+                <a:cs typeface="Arial" pitchFamily="34" charset="-120"/>
+              </a:rPr>
+              <a:t>1. Monte a agenda do operador para a primeira semana do mês (faturas chegando).</a:t>
+            </a:r>
+            <a:endParaRPr lang="en-US" sz="1600" dirty="0"/>
+          </a:p>
+          <a:p>
+            <a:pPr indent="0" marL="0">
+              <a:spcAft>
+                <a:spcPts val="800"/>
+              </a:spcAft>
+              <a:buNone/>
+            </a:pPr>
+            <a:r>
+              <a:rPr lang="en-US" sz="1600" dirty="0">
+                <a:solidFill>
+                  <a:srgbClr val="1F2937"/>
+                </a:solidFill>
+                <a:latin typeface="Arial" pitchFamily="34" charset="0"/>
+                <a:ea typeface="Arial" pitchFamily="34" charset="-122"/>
+                <a:cs typeface="Arial" pitchFamily="34" charset="-120"/>
+              </a:rPr>
+              <a:t>2. O sino mostra 12 alertas. Em que ordem você trata?</a:t>
+            </a:r>
+            <a:endParaRPr lang="en-US" sz="1600" dirty="0"/>
+          </a:p>
+          <a:p>
+            <a:pPr indent="0" marL="0">
+              <a:spcAft>
+                <a:spcPts val="800"/>
+              </a:spcAft>
+              <a:buNone/>
+            </a:pPr>
+            <a:r>
+              <a:rPr lang="en-US" sz="1600" dirty="0">
+                <a:solidFill>
+                  <a:srgbClr val="1F2937"/>
+                </a:solidFill>
+                <a:latin typeface="Arial" pitchFamily="34" charset="0"/>
+                <a:ea typeface="Arial" pitchFamily="34" charset="-122"/>
+                <a:cs typeface="Arial" pitchFamily="34" charset="-120"/>
+              </a:rPr>
+              <a:t>3. Quantos chamados por mês você espera com 500 clientes, e como reduzir?</a:t>
+            </a:r>
+            <a:endParaRPr lang="en-US" sz="1600" dirty="0"/>
+          </a:p>
+        </p:txBody>
+      </p:sp>
+      <p:sp>
+        <p:nvSpPr>
+          <p:cNvPr id="11" name="Shape 8"/>
+          <p:cNvSpPr/>
+          <p:nvPr/>
+        </p:nvSpPr>
+        <p:spPr>
+          <a:xfrm>
+            <a:off x="6172200" y="1325880"/>
+            <a:ext cx="5468112" cy="4937760"/>
+          </a:xfrm>
+          <a:prstGeom prst="roundRect">
+            <a:avLst>
+              <a:gd name="adj" fmla="val 1852"/>
+            </a:avLst>
           </a:prstGeom>
           <a:solidFill>
             <a:srgbClr val="1B3A6B"/>
@@ -18080,787 +19701,23 @@
       </p:sp>
       <p:sp>
         <p:nvSpPr>
-          <p:cNvPr id="10" name="Text 7"/>
-          <p:cNvSpPr/>
-          <p:nvPr/>
-        </p:nvSpPr>
-        <p:spPr>
-          <a:xfrm>
-            <a:off x="548640" y="1325880"/>
-            <a:ext cx="502920" cy="502920"/>
-          </a:xfrm>
-          <a:prstGeom prst="rect">
-            <a:avLst/>
-          </a:prstGeom>
-          <a:noFill/>
-          <a:ln/>
-        </p:spPr>
-        <p:txBody>
-          <a:bodyPr wrap="square" rtlCol="0" anchor="ctr"/>
-          <a:lstStyle/>
-          <a:p>
-            <a:pPr algn="ctr" indent="0" marL="0">
-              <a:buNone/>
-            </a:pPr>
-            <a:r>
-              <a:rPr lang="en-US" sz="1600" b="1" dirty="0">
-                <a:solidFill>
-                  <a:srgbClr val="FFFFFF"/>
-                </a:solidFill>
-                <a:latin typeface="Arial" pitchFamily="34" charset="0"/>
-                <a:ea typeface="Arial" pitchFamily="34" charset="-122"/>
-                <a:cs typeface="Arial" pitchFamily="34" charset="-120"/>
-              </a:rPr>
-              <a:t>5</a:t>
-            </a:r>
-            <a:endParaRPr lang="en-US" sz="1600" dirty="0"/>
-          </a:p>
-        </p:txBody>
-      </p:sp>
-      <p:sp>
-        <p:nvSpPr>
-          <p:cNvPr id="11" name="Text 8"/>
-          <p:cNvSpPr/>
-          <p:nvPr/>
-        </p:nvSpPr>
-        <p:spPr>
-          <a:xfrm>
-            <a:off x="1234440" y="1280160"/>
-            <a:ext cx="10424160" cy="640080"/>
-          </a:xfrm>
-          <a:prstGeom prst="rect">
-            <a:avLst/>
-          </a:prstGeom>
-          <a:noFill/>
-          <a:ln/>
-        </p:spPr>
-        <p:txBody>
-          <a:bodyPr wrap="square" rtlCol="0" anchor="ctr"/>
-          <a:lstStyle/>
-          <a:p>
-            <a:pPr indent="0" marL="0">
-              <a:buNone/>
-            </a:pPr>
-            <a:r>
-              <a:rPr lang="en-US" sz="1800" b="1" dirty="0">
-                <a:solidFill>
-                  <a:srgbClr val="1B3A6B"/>
-                </a:solidFill>
-                <a:latin typeface="Arial" pitchFamily="34" charset="0"/>
-                <a:ea typeface="Arial" pitchFamily="34" charset="-122"/>
-                <a:cs typeface="Arial" pitchFamily="34" charset="-120"/>
-              </a:rPr>
-              <a:t>Um bom indicador de que o portal está funcionando:</a:t>
-            </a:r>
-            <a:endParaRPr lang="en-US" sz="1800" dirty="0"/>
-          </a:p>
-        </p:txBody>
-      </p:sp>
-      <p:sp>
-        <p:nvSpPr>
-          <p:cNvPr id="12" name="Shape 9"/>
-          <p:cNvSpPr/>
-          <p:nvPr/>
-        </p:nvSpPr>
-        <p:spPr>
-          <a:xfrm>
-            <a:off x="548640" y="2057400"/>
-            <a:ext cx="2601468" cy="1463040"/>
-          </a:xfrm>
-          <a:prstGeom prst="roundRect">
-            <a:avLst>
-              <a:gd name="adj" fmla="val 5000"/>
-            </a:avLst>
-          </a:prstGeom>
-          <a:solidFill>
-            <a:srgbClr val="FFFFFF"/>
-          </a:solidFill>
-          <a:ln w="9525">
-            <a:solidFill>
-              <a:srgbClr val="D8E0EC"/>
-            </a:solidFill>
-            <a:prstDash val="solid"/>
-          </a:ln>
-        </p:spPr>
-      </p:sp>
-      <p:sp>
-        <p:nvSpPr>
-          <p:cNvPr id="13" name="Text 10"/>
-          <p:cNvSpPr/>
-          <p:nvPr/>
-        </p:nvSpPr>
-        <p:spPr>
-          <a:xfrm>
-            <a:off x="685800" y="2148840"/>
-            <a:ext cx="365760" cy="365760"/>
-          </a:xfrm>
-          <a:prstGeom prst="rect">
-            <a:avLst/>
-          </a:prstGeom>
-          <a:noFill/>
-          <a:ln/>
-        </p:spPr>
-        <p:txBody>
-          <a:bodyPr wrap="square" rtlCol="0" anchor="ctr"/>
-          <a:lstStyle/>
-          <a:p>
-            <a:pPr indent="0" marL="0">
-              <a:buNone/>
-            </a:pPr>
-            <a:r>
-              <a:rPr lang="en-US" sz="1400" b="1" dirty="0">
-                <a:solidFill>
-                  <a:srgbClr val="F7A23B"/>
-                </a:solidFill>
-                <a:latin typeface="Arial" pitchFamily="34" charset="0"/>
-                <a:ea typeface="Arial" pitchFamily="34" charset="-122"/>
-                <a:cs typeface="Arial" pitchFamily="34" charset="-120"/>
-              </a:rPr>
-              <a:t>A</a:t>
-            </a:r>
-            <a:endParaRPr lang="en-US" sz="1400" dirty="0"/>
-          </a:p>
-        </p:txBody>
-      </p:sp>
-      <p:sp>
-        <p:nvSpPr>
-          <p:cNvPr id="14" name="Text 11"/>
-          <p:cNvSpPr/>
-          <p:nvPr/>
-        </p:nvSpPr>
-        <p:spPr>
-          <a:xfrm>
-            <a:off x="685800" y="2514600"/>
-            <a:ext cx="2327148" cy="914400"/>
-          </a:xfrm>
-          <a:prstGeom prst="rect">
-            <a:avLst/>
-          </a:prstGeom>
-          <a:noFill/>
-          <a:ln/>
-        </p:spPr>
-        <p:txBody>
-          <a:bodyPr wrap="square" rtlCol="0" anchor="t"/>
-          <a:lstStyle/>
-          <a:p>
-            <a:pPr indent="0" marL="0">
-              <a:buNone/>
-            </a:pPr>
-            <a:r>
-              <a:rPr lang="en-US" sz="1500" dirty="0">
-                <a:solidFill>
-                  <a:srgbClr val="1F2937"/>
-                </a:solidFill>
-                <a:latin typeface="Arial" pitchFamily="34" charset="0"/>
-                <a:ea typeface="Arial" pitchFamily="34" charset="-122"/>
-                <a:cs typeface="Arial" pitchFamily="34" charset="-120"/>
-              </a:rPr>
-              <a:t>mais ligações</a:t>
-            </a:r>
-            <a:endParaRPr lang="en-US" sz="1500" dirty="0"/>
-          </a:p>
-        </p:txBody>
-      </p:sp>
-      <p:sp>
-        <p:nvSpPr>
-          <p:cNvPr id="15" name="Shape 12"/>
-          <p:cNvSpPr/>
-          <p:nvPr/>
-        </p:nvSpPr>
-        <p:spPr>
-          <a:xfrm>
-            <a:off x="3378708" y="2057400"/>
-            <a:ext cx="2601468" cy="1463040"/>
-          </a:xfrm>
-          <a:prstGeom prst="roundRect">
-            <a:avLst>
-              <a:gd name="adj" fmla="val 5000"/>
-            </a:avLst>
-          </a:prstGeom>
-          <a:solidFill>
-            <a:srgbClr val="FFFFFF"/>
-          </a:solidFill>
-          <a:ln w="9525">
-            <a:solidFill>
-              <a:srgbClr val="D8E0EC"/>
-            </a:solidFill>
-            <a:prstDash val="solid"/>
-          </a:ln>
-        </p:spPr>
-      </p:sp>
-      <p:sp>
-        <p:nvSpPr>
-          <p:cNvPr id="16" name="Text 13"/>
-          <p:cNvSpPr/>
-          <p:nvPr/>
-        </p:nvSpPr>
-        <p:spPr>
-          <a:xfrm>
-            <a:off x="3515868" y="2148840"/>
-            <a:ext cx="365760" cy="365760"/>
-          </a:xfrm>
-          <a:prstGeom prst="rect">
-            <a:avLst/>
-          </a:prstGeom>
-          <a:noFill/>
-          <a:ln/>
-        </p:spPr>
-        <p:txBody>
-          <a:bodyPr wrap="square" rtlCol="0" anchor="ctr"/>
-          <a:lstStyle/>
-          <a:p>
-            <a:pPr indent="0" marL="0">
-              <a:buNone/>
-            </a:pPr>
-            <a:r>
-              <a:rPr lang="en-US" sz="1400" b="1" dirty="0">
-                <a:solidFill>
-                  <a:srgbClr val="F7A23B"/>
-                </a:solidFill>
-                <a:latin typeface="Arial" pitchFamily="34" charset="0"/>
-                <a:ea typeface="Arial" pitchFamily="34" charset="-122"/>
-                <a:cs typeface="Arial" pitchFamily="34" charset="-120"/>
-              </a:rPr>
-              <a:t>B</a:t>
-            </a:r>
-            <a:endParaRPr lang="en-US" sz="1400" dirty="0"/>
-          </a:p>
-        </p:txBody>
-      </p:sp>
-      <p:sp>
-        <p:nvSpPr>
-          <p:cNvPr id="17" name="Text 14"/>
-          <p:cNvSpPr/>
-          <p:nvPr/>
-        </p:nvSpPr>
-        <p:spPr>
-          <a:xfrm>
-            <a:off x="3515868" y="2514600"/>
-            <a:ext cx="2327148" cy="914400"/>
-          </a:xfrm>
-          <a:prstGeom prst="rect">
-            <a:avLst/>
-          </a:prstGeom>
-          <a:noFill/>
-          <a:ln/>
-        </p:spPr>
-        <p:txBody>
-          <a:bodyPr wrap="square" rtlCol="0" anchor="t"/>
-          <a:lstStyle/>
-          <a:p>
-            <a:pPr indent="0" marL="0">
-              <a:buNone/>
-            </a:pPr>
-            <a:r>
-              <a:rPr lang="en-US" sz="1500" dirty="0">
-                <a:solidFill>
-                  <a:srgbClr val="1F2937"/>
-                </a:solidFill>
-                <a:latin typeface="Arial" pitchFamily="34" charset="0"/>
-                <a:ea typeface="Arial" pitchFamily="34" charset="-122"/>
-                <a:cs typeface="Arial" pitchFamily="34" charset="-120"/>
-              </a:rPr>
-              <a:t>menos chamados sobre "quanto devo/como pago"</a:t>
-            </a:r>
-            <a:endParaRPr lang="en-US" sz="1500" dirty="0"/>
-          </a:p>
-        </p:txBody>
-      </p:sp>
-      <p:sp>
-        <p:nvSpPr>
-          <p:cNvPr id="18" name="Shape 15"/>
-          <p:cNvSpPr/>
-          <p:nvPr/>
-        </p:nvSpPr>
-        <p:spPr>
-          <a:xfrm>
-            <a:off x="6208776" y="2057400"/>
-            <a:ext cx="2601468" cy="1463040"/>
-          </a:xfrm>
-          <a:prstGeom prst="roundRect">
-            <a:avLst>
-              <a:gd name="adj" fmla="val 5000"/>
-            </a:avLst>
-          </a:prstGeom>
-          <a:solidFill>
-            <a:srgbClr val="FFFFFF"/>
-          </a:solidFill>
-          <a:ln w="9525">
-            <a:solidFill>
-              <a:srgbClr val="D8E0EC"/>
-            </a:solidFill>
-            <a:prstDash val="solid"/>
-          </a:ln>
-        </p:spPr>
-      </p:sp>
-      <p:sp>
-        <p:nvSpPr>
-          <p:cNvPr id="19" name="Text 16"/>
-          <p:cNvSpPr/>
-          <p:nvPr/>
-        </p:nvSpPr>
-        <p:spPr>
-          <a:xfrm>
-            <a:off x="6345936" y="2148840"/>
-            <a:ext cx="365760" cy="365760"/>
-          </a:xfrm>
-          <a:prstGeom prst="rect">
-            <a:avLst/>
-          </a:prstGeom>
-          <a:noFill/>
-          <a:ln/>
-        </p:spPr>
-        <p:txBody>
-          <a:bodyPr wrap="square" rtlCol="0" anchor="ctr"/>
-          <a:lstStyle/>
-          <a:p>
-            <a:pPr indent="0" marL="0">
-              <a:buNone/>
-            </a:pPr>
-            <a:r>
-              <a:rPr lang="en-US" sz="1400" b="1" dirty="0">
-                <a:solidFill>
-                  <a:srgbClr val="F7A23B"/>
-                </a:solidFill>
-                <a:latin typeface="Arial" pitchFamily="34" charset="0"/>
-                <a:ea typeface="Arial" pitchFamily="34" charset="-122"/>
-                <a:cs typeface="Arial" pitchFamily="34" charset="-120"/>
-              </a:rPr>
-              <a:t>C</a:t>
-            </a:r>
-            <a:endParaRPr lang="en-US" sz="1400" dirty="0"/>
-          </a:p>
-        </p:txBody>
-      </p:sp>
-      <p:sp>
-        <p:nvSpPr>
-          <p:cNvPr id="20" name="Text 17"/>
-          <p:cNvSpPr/>
-          <p:nvPr/>
-        </p:nvSpPr>
-        <p:spPr>
-          <a:xfrm>
-            <a:off x="6345936" y="2514600"/>
-            <a:ext cx="2327148" cy="914400"/>
-          </a:xfrm>
-          <a:prstGeom prst="rect">
-            <a:avLst/>
-          </a:prstGeom>
-          <a:noFill/>
-          <a:ln/>
-        </p:spPr>
-        <p:txBody>
-          <a:bodyPr wrap="square" rtlCol="0" anchor="t"/>
-          <a:lstStyle/>
-          <a:p>
-            <a:pPr indent="0" marL="0">
-              <a:buNone/>
-            </a:pPr>
-            <a:r>
-              <a:rPr lang="en-US" sz="1500" dirty="0">
-                <a:solidFill>
-                  <a:srgbClr val="1F2937"/>
-                </a:solidFill>
-                <a:latin typeface="Arial" pitchFamily="34" charset="0"/>
-                <a:ea typeface="Arial" pitchFamily="34" charset="-122"/>
-                <a:cs typeface="Arial" pitchFamily="34" charset="-120"/>
-              </a:rPr>
-              <a:t>mais e-mails</a:t>
-            </a:r>
-            <a:endParaRPr lang="en-US" sz="1500" dirty="0"/>
-          </a:p>
-        </p:txBody>
-      </p:sp>
-      <p:sp>
-        <p:nvSpPr>
-          <p:cNvPr id="21" name="Shape 18"/>
-          <p:cNvSpPr/>
-          <p:nvPr/>
-        </p:nvSpPr>
-        <p:spPr>
-          <a:xfrm>
-            <a:off x="9038844" y="2057400"/>
-            <a:ext cx="2601468" cy="1463040"/>
-          </a:xfrm>
-          <a:prstGeom prst="roundRect">
-            <a:avLst>
-              <a:gd name="adj" fmla="val 5000"/>
-            </a:avLst>
-          </a:prstGeom>
-          <a:solidFill>
-            <a:srgbClr val="FFFFFF"/>
-          </a:solidFill>
-          <a:ln w="9525">
-            <a:solidFill>
-              <a:srgbClr val="D8E0EC"/>
-            </a:solidFill>
-            <a:prstDash val="solid"/>
-          </a:ln>
-        </p:spPr>
-      </p:sp>
-      <p:sp>
-        <p:nvSpPr>
-          <p:cNvPr id="22" name="Text 19"/>
-          <p:cNvSpPr/>
-          <p:nvPr/>
-        </p:nvSpPr>
-        <p:spPr>
-          <a:xfrm>
-            <a:off x="9176004" y="2148840"/>
-            <a:ext cx="365760" cy="365760"/>
-          </a:xfrm>
-          <a:prstGeom prst="rect">
-            <a:avLst/>
-          </a:prstGeom>
-          <a:noFill/>
-          <a:ln/>
-        </p:spPr>
-        <p:txBody>
-          <a:bodyPr wrap="square" rtlCol="0" anchor="ctr"/>
-          <a:lstStyle/>
-          <a:p>
-            <a:pPr indent="0" marL="0">
-              <a:buNone/>
-            </a:pPr>
-            <a:r>
-              <a:rPr lang="en-US" sz="1400" b="1" dirty="0">
-                <a:solidFill>
-                  <a:srgbClr val="F7A23B"/>
-                </a:solidFill>
-                <a:latin typeface="Arial" pitchFamily="34" charset="0"/>
-                <a:ea typeface="Arial" pitchFamily="34" charset="-122"/>
-                <a:cs typeface="Arial" pitchFamily="34" charset="-120"/>
-              </a:rPr>
-              <a:t>D</a:t>
-            </a:r>
-            <a:endParaRPr lang="en-US" sz="1400" dirty="0"/>
-          </a:p>
-        </p:txBody>
-      </p:sp>
-      <p:sp>
-        <p:nvSpPr>
-          <p:cNvPr id="23" name="Text 20"/>
-          <p:cNvSpPr/>
-          <p:nvPr/>
-        </p:nvSpPr>
-        <p:spPr>
-          <a:xfrm>
-            <a:off x="9176004" y="2514600"/>
-            <a:ext cx="2327148" cy="914400"/>
-          </a:xfrm>
-          <a:prstGeom prst="rect">
-            <a:avLst/>
-          </a:prstGeom>
-          <a:noFill/>
-          <a:ln/>
-        </p:spPr>
-        <p:txBody>
-          <a:bodyPr wrap="square" rtlCol="0" anchor="t"/>
-          <a:lstStyle/>
-          <a:p>
-            <a:pPr indent="0" marL="0">
-              <a:buNone/>
-            </a:pPr>
-            <a:r>
-              <a:rPr lang="en-US" sz="1500" dirty="0">
-                <a:solidFill>
-                  <a:srgbClr val="1F2937"/>
-                </a:solidFill>
-                <a:latin typeface="Arial" pitchFamily="34" charset="0"/>
-                <a:ea typeface="Arial" pitchFamily="34" charset="-122"/>
-                <a:cs typeface="Arial" pitchFamily="34" charset="-120"/>
-              </a:rPr>
-              <a:t>mais visitas presenciais</a:t>
-            </a:r>
-            <a:endParaRPr lang="en-US" sz="1500" dirty="0"/>
-          </a:p>
-        </p:txBody>
-      </p:sp>
-      <p:sp>
-        <p:nvSpPr>
-          <p:cNvPr id="25" name="Slide Number Placeholder 0"/>
-          <p:cNvSpPr>
-            <a:spLocks noGrp="1"/>
-          </p:cNvSpPr>
-          <p:nvPr>
-            <p:ph type="sldNum" sz="quarter" idx="4294967295"/>
-          </p:nvPr>
-        </p:nvSpPr>
-        <p:spPr>
-          <a:xfrm>
-            <a:off x="11292840" y="6556248"/>
-            <a:ext cx="548640" cy="256032"/>
-          </a:xfrm>
-          <a:prstGeom prst="rect">
-            <a:avLst/>
-          </a:prstGeom>
-          <a:extLst>
-            <a:ext uri="{C572A759-6A51-4108-AA02-DFA0A04FC94B}">
-              <ma14:wrappingTextBoxFlag xmlns:ma14="http://schemas.microsoft.com/office/mac/drawingml/2011/main" val="0"/>
-            </a:ext>
-          </a:extLst>
-        </p:spPr>
-        <p:txBody>
-          <a:bodyPr/>
-          <a:lstStyle>
-            <a:lvl1pPr>
-              <a:defRPr sz="900">
-                <a:solidFill>
-                  <a:srgbClr val="1B3A6B"/>
-                </a:solidFill>
-                <a:latin typeface="Arial"/>
-                <a:ea typeface="Arial"/>
-                <a:cs typeface="Arial"/>
-              </a:defRPr>
-            </a:lvl1pPr>
-          </a:lstStyle>
-          <a:p>
-            <a:pPr algn="r"/>
-            <a:fld id="{F7021451-1387-4CA6-816F-3879F97B5CBC}" type="slidenum">
-              <a:rPr b="1" lang="en-US"/>
-              <a:t>28</a:t>
-            </a:fld>
-            <a:endParaRPr lang="en-US"/>
-          </a:p>
-        </p:txBody>
-      </p:sp>
-    </p:spTree>
-  </p:cSld>
-  <p:clrMapOvr>
-    <a:masterClrMapping/>
-  </p:clrMapOvr>
-</p:sld>
-</file>
-
-<file path=ppt/slides/slide29.xml><?xml version="1.0" encoding="utf-8"?>
-<p:sld xmlns:a="http://schemas.openxmlformats.org/drawingml/2006/main" xmlns:r="http://schemas.openxmlformats.org/officeDocument/2006/relationships" xmlns:p="http://schemas.openxmlformats.org/presentationml/2006/main">
-  <p:cSld name="Slide 29">
-    <p:bg>
-      <p:bgPr>
-        <a:solidFill>
-          <a:srgbClr val="EEF3FA"/>
-        </a:solidFill>
-      </p:bgPr>
-    </p:bg>
-    <p:spTree>
-      <p:nvGrpSpPr>
-        <p:cNvPr id="1" name=""/>
-        <p:cNvGrpSpPr/>
-        <p:nvPr/>
-      </p:nvGrpSpPr>
-      <p:grpSpPr>
-        <a:xfrm>
-          <a:off x="0" y="0"/>
-          <a:ext cx="0" cy="0"/>
-          <a:chOff x="0" y="0"/>
-          <a:chExt cx="0" cy="0"/>
-        </a:xfrm>
-      </p:grpSpPr>
-      <p:sp>
-        <p:nvSpPr>
-          <p:cNvPr id="2" name="Shape 0"/>
-          <p:cNvSpPr/>
-          <p:nvPr/>
-        </p:nvSpPr>
-        <p:spPr>
-          <a:xfrm>
-            <a:off x="0" y="6510528"/>
-            <a:ext cx="12191695" cy="347472"/>
-          </a:xfrm>
-          <a:prstGeom prst="rect">
-            <a:avLst/>
-          </a:prstGeom>
-          <a:solidFill>
-            <a:srgbClr val="FFFFFF"/>
-          </a:solidFill>
-          <a:ln w="6350">
-            <a:solidFill>
-              <a:srgbClr val="D8E0EC"/>
-            </a:solidFill>
-            <a:prstDash val="solid"/>
-          </a:ln>
-        </p:spPr>
-      </p:sp>
-      <p:pic>
-        <p:nvPicPr>
-          <p:cNvPr id="3" name="Image 0" descr="/www/wwwroot/rexar/gdsolar/docs/curso/slides/assets/logo-gdsolar.png">    </p:cNvPr>
-          <p:cNvPicPr>
-            <a:picLocks noChangeAspect="1"/>
-          </p:cNvPicPr>
-          <p:nvPr/>
-        </p:nvPicPr>
-        <p:blipFill>
-          <a:blip r:embed="rId1"/>
-          <a:stretch>
-            <a:fillRect/>
-          </a:stretch>
-        </p:blipFill>
-        <p:spPr>
-          <a:xfrm>
-            <a:off x="548640" y="6547104"/>
-            <a:ext cx="274320" cy="274320"/>
-          </a:xfrm>
-          <a:prstGeom prst="rect">
-            <a:avLst/>
-          </a:prstGeom>
-        </p:spPr>
-      </p:pic>
-      <p:sp>
-        <p:nvSpPr>
-          <p:cNvPr id="4" name="Text 1"/>
-          <p:cNvSpPr/>
-          <p:nvPr/>
-        </p:nvSpPr>
-        <p:spPr>
-          <a:xfrm>
-            <a:off x="886968" y="6528816"/>
-            <a:ext cx="6400800" cy="310896"/>
-          </a:xfrm>
-          <a:prstGeom prst="rect">
-            <a:avLst/>
-          </a:prstGeom>
-          <a:noFill/>
-          <a:ln/>
-        </p:spPr>
-        <p:txBody>
-          <a:bodyPr wrap="square" rtlCol="0" anchor="ctr"/>
-          <a:lstStyle/>
-          <a:p>
-            <a:pPr indent="0" marL="0">
-              <a:buNone/>
-            </a:pPr>
-            <a:r>
-              <a:rPr lang="en-US" sz="900" b="1" dirty="0">
-                <a:solidFill>
-                  <a:srgbClr val="64748B"/>
-                </a:solidFill>
-                <a:latin typeface="Arial" pitchFamily="34" charset="0"/>
-                <a:ea typeface="Arial" pitchFamily="34" charset="-122"/>
-                <a:cs typeface="Arial" pitchFamily="34" charset="-120"/>
-              </a:rPr>
-              <a:t>GD Solar  ·  Formação em Energia por Assinatura</a:t>
-            </a:r>
-            <a:endParaRPr lang="en-US" sz="900" dirty="0"/>
-          </a:p>
-        </p:txBody>
-      </p:sp>
-      <p:sp>
-        <p:nvSpPr>
-          <p:cNvPr id="5" name="Text 2"/>
-          <p:cNvSpPr/>
-          <p:nvPr/>
-        </p:nvSpPr>
-        <p:spPr>
-          <a:xfrm>
-            <a:off x="7132320" y="6528816"/>
-            <a:ext cx="4023360" cy="310896"/>
-          </a:xfrm>
-          <a:prstGeom prst="rect">
-            <a:avLst/>
-          </a:prstGeom>
-          <a:noFill/>
-          <a:ln/>
-        </p:spPr>
-        <p:txBody>
-          <a:bodyPr wrap="square" rtlCol="0" anchor="ctr"/>
-          <a:lstStyle/>
-          <a:p>
-            <a:pPr algn="r" indent="0" marL="0">
-              <a:buNone/>
-            </a:pPr>
-            <a:r>
-              <a:rPr lang="en-US" sz="900" dirty="0">
-                <a:solidFill>
-                  <a:srgbClr val="64748B"/>
-                </a:solidFill>
-                <a:latin typeface="Arial" pitchFamily="34" charset="0"/>
-                <a:ea typeface="Arial" pitchFamily="34" charset="-122"/>
-                <a:cs typeface="Arial" pitchFamily="34" charset="-120"/>
-              </a:rPr>
-              <a:t>M9 · Teste rápido</a:t>
-            </a:r>
-            <a:endParaRPr lang="en-US" sz="900" dirty="0"/>
-          </a:p>
-        </p:txBody>
-      </p:sp>
-      <p:sp>
-        <p:nvSpPr>
-          <p:cNvPr id="6" name="Shape 3"/>
-          <p:cNvSpPr/>
-          <p:nvPr/>
-        </p:nvSpPr>
-        <p:spPr>
-          <a:xfrm>
-            <a:off x="548640" y="384048"/>
-            <a:ext cx="82296" cy="658368"/>
-          </a:xfrm>
-          <a:prstGeom prst="rect">
-            <a:avLst/>
-          </a:prstGeom>
-          <a:solidFill>
-            <a:srgbClr val="F7A23B"/>
-          </a:solidFill>
-          <a:ln/>
-        </p:spPr>
-      </p:sp>
-      <p:sp>
-        <p:nvSpPr>
-          <p:cNvPr id="7" name="Text 4"/>
-          <p:cNvSpPr/>
-          <p:nvPr/>
-        </p:nvSpPr>
-        <p:spPr>
-          <a:xfrm>
-            <a:off x="777240" y="292608"/>
-            <a:ext cx="10972800" cy="274320"/>
-          </a:xfrm>
-          <a:prstGeom prst="rect">
-            <a:avLst/>
-          </a:prstGeom>
-          <a:noFill/>
-          <a:ln/>
-        </p:spPr>
-        <p:txBody>
-          <a:bodyPr wrap="square" rtlCol="0" anchor="ctr"/>
-          <a:lstStyle/>
-          <a:p>
-            <a:pPr indent="0" marL="0">
-              <a:buNone/>
-            </a:pPr>
-            <a:r>
-              <a:rPr lang="en-US" sz="1000" b="1" spc="100" kern="0" dirty="0">
-                <a:solidFill>
-                  <a:srgbClr val="F7A23B"/>
-                </a:solidFill>
-                <a:latin typeface="Arial" pitchFamily="34" charset="0"/>
-                <a:ea typeface="Arial" pitchFamily="34" charset="-122"/>
-                <a:cs typeface="Arial" pitchFamily="34" charset="-120"/>
-              </a:rPr>
-              <a:t>CONFIRA SUAS RESPOSTAS</a:t>
-            </a:r>
-            <a:endParaRPr lang="en-US" sz="1000" dirty="0"/>
-          </a:p>
-        </p:txBody>
-      </p:sp>
-      <p:sp>
-        <p:nvSpPr>
-          <p:cNvPr id="8" name="Text 5"/>
-          <p:cNvSpPr/>
-          <p:nvPr/>
-        </p:nvSpPr>
-        <p:spPr>
-          <a:xfrm>
-            <a:off x="777240" y="530352"/>
-            <a:ext cx="10881360" cy="566928"/>
-          </a:xfrm>
-          <a:prstGeom prst="rect">
-            <a:avLst/>
-          </a:prstGeom>
-          <a:noFill/>
-          <a:ln/>
-        </p:spPr>
-        <p:txBody>
-          <a:bodyPr wrap="square" rtlCol="0" anchor="ctr">
+          <p:cNvPr id="12" name="Text 9"/>
+          <p:cNvSpPr/>
+          <p:nvPr/>
+        </p:nvSpPr>
+        <p:spPr>
+          <a:xfrm>
+            <a:off x="6492240" y="1554480"/>
+            <a:ext cx="4828032" cy="4480560"/>
+          </a:xfrm>
+          <a:prstGeom prst="rect">
+            <a:avLst/>
+          </a:prstGeom>
+          <a:noFill/>
+          <a:ln/>
+        </p:spPr>
+        <p:txBody>
+          <a:bodyPr wrap="square" rtlCol="0" anchor="t">
             <a:normAutofit/>
           </a:bodyPr>
           <a:lstStyle/>
@@ -18869,100 +19726,22 @@
               <a:buNone/>
             </a:pPr>
             <a:r>
-              <a:rPr lang="en-US" sz="2600" b="1" dirty="0">
-                <a:solidFill>
-                  <a:srgbClr val="1B3A6B"/>
-                </a:solidFill>
-                <a:latin typeface="Arial" pitchFamily="34" charset="0"/>
-                <a:ea typeface="Arial" pitchFamily="34" charset="-122"/>
-                <a:cs typeface="Arial" pitchFamily="34" charset="-120"/>
-              </a:rPr>
-              <a:t>Gabarito do teste rápido</a:t>
-            </a:r>
-            <a:endParaRPr lang="en-US" sz="2600" dirty="0"/>
-          </a:p>
-        </p:txBody>
-      </p:sp>
-      <p:sp>
-        <p:nvSpPr>
-          <p:cNvPr id="9" name="Shape 6"/>
-          <p:cNvSpPr/>
-          <p:nvPr/>
-        </p:nvSpPr>
-        <p:spPr>
-          <a:xfrm>
-            <a:off x="548640" y="1325880"/>
-            <a:ext cx="3544824" cy="2331720"/>
-          </a:xfrm>
-          <a:prstGeom prst="roundRect">
-            <a:avLst>
-              <a:gd name="adj" fmla="val 3137"/>
-            </a:avLst>
-          </a:prstGeom>
-          <a:solidFill>
-            <a:srgbClr val="FFFFFF"/>
-          </a:solidFill>
-          <a:ln w="9525">
-            <a:solidFill>
-              <a:srgbClr val="D8E0EC"/>
-            </a:solidFill>
-            <a:prstDash val="solid"/>
-          </a:ln>
-          <a:effectLst>
-            <a:outerShdw sx="100000" sy="100000" kx="0" ky="0" algn="bl" rotWithShape="0" blurRad="38100" dist="12700" dir="5400000">
-              <a:srgbClr val="000000">
-                <a:alpha val="8000"/>
-              </a:srgbClr>
-            </a:outerShdw>
-          </a:effectLst>
-        </p:spPr>
-      </p:sp>
-      <p:sp>
-        <p:nvSpPr>
-          <p:cNvPr id="10" name="Shape 7"/>
-          <p:cNvSpPr/>
-          <p:nvPr/>
-        </p:nvSpPr>
-        <p:spPr>
-          <a:xfrm>
-            <a:off x="731520" y="1508760"/>
-            <a:ext cx="457200" cy="457200"/>
-          </a:xfrm>
-          <a:prstGeom prst="ellipse">
-            <a:avLst/>
-          </a:prstGeom>
-          <a:solidFill>
-            <a:srgbClr val="1B3A6B"/>
-          </a:solidFill>
-          <a:ln/>
-        </p:spPr>
-      </p:sp>
-      <p:sp>
-        <p:nvSpPr>
-          <p:cNvPr id="11" name="Text 8"/>
-          <p:cNvSpPr/>
-          <p:nvPr/>
-        </p:nvSpPr>
-        <p:spPr>
-          <a:xfrm>
-            <a:off x="731520" y="1508760"/>
-            <a:ext cx="457200" cy="457200"/>
-          </a:xfrm>
-          <a:prstGeom prst="rect">
-            <a:avLst/>
-          </a:prstGeom>
-          <a:noFill/>
-          <a:ln/>
-        </p:spPr>
-        <p:txBody>
-          <a:bodyPr wrap="square" rtlCol="0" anchor="ctr"/>
-          <a:lstStyle/>
-          <a:p>
-            <a:pPr algn="ctr" indent="0" marL="0">
-              <a:buNone/>
-            </a:pPr>
-            <a:r>
-              <a:rPr lang="en-US" sz="1400" b="1" dirty="0">
+              <a:rPr lang="en-US" sz="1300" b="1" spc="100" kern="0" dirty="0">
+                <a:solidFill>
+                  <a:srgbClr val="F7A23B"/>
+                </a:solidFill>
+                <a:latin typeface="Arial" pitchFamily="34" charset="0"/>
+                <a:ea typeface="Arial" pitchFamily="34" charset="-122"/>
+                <a:cs typeface="Arial" pitchFamily="34" charset="-120"/>
+              </a:rPr>
+              <a:t>ENTREGÁVEL DO MÓDULO
+</a:t>
+            </a:r>
+            <a:pPr indent="0" marL="0">
+              <a:buNone/>
+            </a:pPr>
+            <a:r>
+              <a:rPr lang="en-US" sz="1600" dirty="0">
                 <a:solidFill>
                   <a:srgbClr val="FFFFFF"/>
                 </a:solidFill>
@@ -18970,586 +19749,9 @@
                 <a:ea typeface="Arial" pitchFamily="34" charset="-122"/>
                 <a:cs typeface="Arial" pitchFamily="34" charset="-120"/>
               </a:rPr>
-              <a:t>1</a:t>
-            </a:r>
-            <a:endParaRPr lang="en-US" sz="1400" dirty="0"/>
-          </a:p>
-        </p:txBody>
-      </p:sp>
-      <p:sp>
-        <p:nvSpPr>
-          <p:cNvPr id="12" name="Text 9"/>
-          <p:cNvSpPr/>
-          <p:nvPr/>
-        </p:nvSpPr>
-        <p:spPr>
-          <a:xfrm>
-            <a:off x="1325880" y="1435608"/>
-            <a:ext cx="2630424" cy="2112264"/>
-          </a:xfrm>
-          <a:prstGeom prst="rect">
-            <a:avLst/>
-          </a:prstGeom>
-          <a:noFill/>
-          <a:ln/>
-        </p:spPr>
-        <p:txBody>
-          <a:bodyPr wrap="square" rtlCol="0" anchor="ctr">
-            <a:normAutofit/>
-          </a:bodyPr>
-          <a:lstStyle/>
-          <a:p>
-            <a:pPr indent="0" marL="0">
-              <a:buNone/>
-            </a:pPr>
-            <a:r>
-              <a:rPr lang="en-US" sz="1800" dirty="0">
-                <a:solidFill>
-                  <a:srgbClr val="1F2937"/>
-                </a:solidFill>
-                <a:latin typeface="Arial" pitchFamily="34" charset="0"/>
-                <a:ea typeface="Arial" pitchFamily="34" charset="-122"/>
-                <a:cs typeface="Arial" pitchFamily="34" charset="-120"/>
-              </a:rPr>
-              <a:t>-) </a:t>
-            </a:r>
-            <a:endParaRPr lang="en-US" sz="1800" dirty="0"/>
-          </a:p>
-        </p:txBody>
-      </p:sp>
-      <p:sp>
-        <p:nvSpPr>
-          <p:cNvPr id="13" name="Shape 10"/>
-          <p:cNvSpPr/>
-          <p:nvPr/>
-        </p:nvSpPr>
-        <p:spPr>
-          <a:xfrm>
-            <a:off x="4322064" y="1325880"/>
-            <a:ext cx="3544824" cy="2331720"/>
-          </a:xfrm>
-          <a:prstGeom prst="roundRect">
-            <a:avLst>
-              <a:gd name="adj" fmla="val 3137"/>
-            </a:avLst>
-          </a:prstGeom>
-          <a:solidFill>
-            <a:srgbClr val="FFFFFF"/>
-          </a:solidFill>
-          <a:ln w="9525">
-            <a:solidFill>
-              <a:srgbClr val="D8E0EC"/>
-            </a:solidFill>
-            <a:prstDash val="solid"/>
-          </a:ln>
-          <a:effectLst>
-            <a:outerShdw sx="100000" sy="100000" kx="0" ky="0" algn="bl" rotWithShape="0" blurRad="38100" dist="12700" dir="5400000">
-              <a:srgbClr val="000000">
-                <a:alpha val="8000"/>
-              </a:srgbClr>
-            </a:outerShdw>
-          </a:effectLst>
-        </p:spPr>
-      </p:sp>
-      <p:sp>
-        <p:nvSpPr>
-          <p:cNvPr id="14" name="Shape 11"/>
-          <p:cNvSpPr/>
-          <p:nvPr/>
-        </p:nvSpPr>
-        <p:spPr>
-          <a:xfrm>
-            <a:off x="4504944" y="1508760"/>
-            <a:ext cx="457200" cy="457200"/>
-          </a:xfrm>
-          <a:prstGeom prst="ellipse">
-            <a:avLst/>
-          </a:prstGeom>
-          <a:solidFill>
-            <a:srgbClr val="F7A23B"/>
-          </a:solidFill>
-          <a:ln/>
-        </p:spPr>
-      </p:sp>
-      <p:sp>
-        <p:nvSpPr>
-          <p:cNvPr id="15" name="Text 12"/>
-          <p:cNvSpPr/>
-          <p:nvPr/>
-        </p:nvSpPr>
-        <p:spPr>
-          <a:xfrm>
-            <a:off x="4504944" y="1508760"/>
-            <a:ext cx="457200" cy="457200"/>
-          </a:xfrm>
-          <a:prstGeom prst="rect">
-            <a:avLst/>
-          </a:prstGeom>
-          <a:noFill/>
-          <a:ln/>
-        </p:spPr>
-        <p:txBody>
-          <a:bodyPr wrap="square" rtlCol="0" anchor="ctr"/>
-          <a:lstStyle/>
-          <a:p>
-            <a:pPr algn="ctr" indent="0" marL="0">
-              <a:buNone/>
-            </a:pPr>
-            <a:r>
-              <a:rPr lang="en-US" sz="1400" b="1" dirty="0">
-                <a:solidFill>
-                  <a:srgbClr val="FFFFFF"/>
-                </a:solidFill>
-                <a:latin typeface="Arial" pitchFamily="34" charset="0"/>
-                <a:ea typeface="Arial" pitchFamily="34" charset="-122"/>
-                <a:cs typeface="Arial" pitchFamily="34" charset="-120"/>
-              </a:rPr>
-              <a:t>2</a:t>
-            </a:r>
-            <a:endParaRPr lang="en-US" sz="1400" dirty="0"/>
-          </a:p>
-        </p:txBody>
-      </p:sp>
-      <p:sp>
-        <p:nvSpPr>
-          <p:cNvPr id="16" name="Text 13"/>
-          <p:cNvSpPr/>
-          <p:nvPr/>
-        </p:nvSpPr>
-        <p:spPr>
-          <a:xfrm>
-            <a:off x="5099304" y="1435608"/>
-            <a:ext cx="2630424" cy="2112264"/>
-          </a:xfrm>
-          <a:prstGeom prst="rect">
-            <a:avLst/>
-          </a:prstGeom>
-          <a:noFill/>
-          <a:ln/>
-        </p:spPr>
-        <p:txBody>
-          <a:bodyPr wrap="square" rtlCol="0" anchor="ctr">
-            <a:normAutofit/>
-          </a:bodyPr>
-          <a:lstStyle/>
-          <a:p>
-            <a:pPr indent="0" marL="0">
-              <a:buNone/>
-            </a:pPr>
-            <a:r>
-              <a:rPr lang="en-US" sz="1800" dirty="0">
-                <a:solidFill>
-                  <a:srgbClr val="1F2937"/>
-                </a:solidFill>
-                <a:latin typeface="Arial" pitchFamily="34" charset="0"/>
-                <a:ea typeface="Arial" pitchFamily="34" charset="-122"/>
-                <a:cs typeface="Arial" pitchFamily="34" charset="-120"/>
-              </a:rPr>
-              <a:t>A) se resolve sozinho na próxima varredura</a:t>
-            </a:r>
-            <a:endParaRPr lang="en-US" sz="1800" dirty="0"/>
-          </a:p>
-        </p:txBody>
-      </p:sp>
-      <p:sp>
-        <p:nvSpPr>
-          <p:cNvPr id="17" name="Shape 14"/>
-          <p:cNvSpPr/>
-          <p:nvPr/>
-        </p:nvSpPr>
-        <p:spPr>
-          <a:xfrm>
-            <a:off x="8095488" y="1325880"/>
-            <a:ext cx="3544824" cy="2331720"/>
-          </a:xfrm>
-          <a:prstGeom prst="roundRect">
-            <a:avLst>
-              <a:gd name="adj" fmla="val 3137"/>
-            </a:avLst>
-          </a:prstGeom>
-          <a:solidFill>
-            <a:srgbClr val="FFFFFF"/>
-          </a:solidFill>
-          <a:ln w="9525">
-            <a:solidFill>
-              <a:srgbClr val="D8E0EC"/>
-            </a:solidFill>
-            <a:prstDash val="solid"/>
-          </a:ln>
-          <a:effectLst>
-            <a:outerShdw sx="100000" sy="100000" kx="0" ky="0" algn="bl" rotWithShape="0" blurRad="38100" dist="12700" dir="5400000">
-              <a:srgbClr val="000000">
-                <a:alpha val="8000"/>
-              </a:srgbClr>
-            </a:outerShdw>
-          </a:effectLst>
-        </p:spPr>
-      </p:sp>
-      <p:sp>
-        <p:nvSpPr>
-          <p:cNvPr id="18" name="Shape 15"/>
-          <p:cNvSpPr/>
-          <p:nvPr/>
-        </p:nvSpPr>
-        <p:spPr>
-          <a:xfrm>
-            <a:off x="8278368" y="1508760"/>
-            <a:ext cx="457200" cy="457200"/>
-          </a:xfrm>
-          <a:prstGeom prst="ellipse">
-            <a:avLst/>
-          </a:prstGeom>
-          <a:solidFill>
-            <a:srgbClr val="1B3A6B"/>
-          </a:solidFill>
-          <a:ln/>
-        </p:spPr>
-      </p:sp>
-      <p:sp>
-        <p:nvSpPr>
-          <p:cNvPr id="19" name="Text 16"/>
-          <p:cNvSpPr/>
-          <p:nvPr/>
-        </p:nvSpPr>
-        <p:spPr>
-          <a:xfrm>
-            <a:off x="8278368" y="1508760"/>
-            <a:ext cx="457200" cy="457200"/>
-          </a:xfrm>
-          <a:prstGeom prst="rect">
-            <a:avLst/>
-          </a:prstGeom>
-          <a:noFill/>
-          <a:ln/>
-        </p:spPr>
-        <p:txBody>
-          <a:bodyPr wrap="square" rtlCol="0" anchor="ctr"/>
-          <a:lstStyle/>
-          <a:p>
-            <a:pPr algn="ctr" indent="0" marL="0">
-              <a:buNone/>
-            </a:pPr>
-            <a:r>
-              <a:rPr lang="en-US" sz="1400" b="1" dirty="0">
-                <a:solidFill>
-                  <a:srgbClr val="FFFFFF"/>
-                </a:solidFill>
-                <a:latin typeface="Arial" pitchFamily="34" charset="0"/>
-                <a:ea typeface="Arial" pitchFamily="34" charset="-122"/>
-                <a:cs typeface="Arial" pitchFamily="34" charset="-120"/>
-              </a:rPr>
-              <a:t>3</a:t>
-            </a:r>
-            <a:endParaRPr lang="en-US" sz="1400" dirty="0"/>
-          </a:p>
-        </p:txBody>
-      </p:sp>
-      <p:sp>
-        <p:nvSpPr>
-          <p:cNvPr id="20" name="Text 17"/>
-          <p:cNvSpPr/>
-          <p:nvPr/>
-        </p:nvSpPr>
-        <p:spPr>
-          <a:xfrm>
-            <a:off x="8872728" y="1435608"/>
-            <a:ext cx="2630424" cy="2112264"/>
-          </a:xfrm>
-          <a:prstGeom prst="rect">
-            <a:avLst/>
-          </a:prstGeom>
-          <a:noFill/>
-          <a:ln/>
-        </p:spPr>
-        <p:txBody>
-          <a:bodyPr wrap="square" rtlCol="0" anchor="ctr">
-            <a:normAutofit/>
-          </a:bodyPr>
-          <a:lstStyle/>
-          <a:p>
-            <a:pPr indent="0" marL="0">
-              <a:buNone/>
-            </a:pPr>
-            <a:r>
-              <a:rPr lang="en-US" sz="1800" dirty="0">
-                <a:solidFill>
-                  <a:srgbClr val="1F2937"/>
-                </a:solidFill>
-                <a:latin typeface="Arial" pitchFamily="34" charset="0"/>
-                <a:ea typeface="Arial" pitchFamily="34" charset="-122"/>
-                <a:cs typeface="Arial" pitchFamily="34" charset="-120"/>
-              </a:rPr>
-              <a:t>B) Só os financeiros da própria carteira</a:t>
-            </a:r>
-            <a:endParaRPr lang="en-US" sz="1800" dirty="0"/>
-          </a:p>
-        </p:txBody>
-      </p:sp>
-      <p:sp>
-        <p:nvSpPr>
-          <p:cNvPr id="21" name="Shape 18"/>
-          <p:cNvSpPr/>
-          <p:nvPr/>
-        </p:nvSpPr>
-        <p:spPr>
-          <a:xfrm>
-            <a:off x="548640" y="3886200"/>
-            <a:ext cx="3544824" cy="2331720"/>
-          </a:xfrm>
-          <a:prstGeom prst="roundRect">
-            <a:avLst>
-              <a:gd name="adj" fmla="val 3137"/>
-            </a:avLst>
-          </a:prstGeom>
-          <a:solidFill>
-            <a:srgbClr val="FFFFFF"/>
-          </a:solidFill>
-          <a:ln w="9525">
-            <a:solidFill>
-              <a:srgbClr val="D8E0EC"/>
-            </a:solidFill>
-            <a:prstDash val="solid"/>
-          </a:ln>
-          <a:effectLst>
-            <a:outerShdw sx="100000" sy="100000" kx="0" ky="0" algn="bl" rotWithShape="0" blurRad="38100" dist="12700" dir="5400000">
-              <a:srgbClr val="000000">
-                <a:alpha val="8000"/>
-              </a:srgbClr>
-            </a:outerShdw>
-          </a:effectLst>
-        </p:spPr>
-      </p:sp>
-      <p:sp>
-        <p:nvSpPr>
-          <p:cNvPr id="22" name="Shape 19"/>
-          <p:cNvSpPr/>
-          <p:nvPr/>
-        </p:nvSpPr>
-        <p:spPr>
-          <a:xfrm>
-            <a:off x="731520" y="4069080"/>
-            <a:ext cx="457200" cy="457200"/>
-          </a:xfrm>
-          <a:prstGeom prst="ellipse">
-            <a:avLst/>
-          </a:prstGeom>
-          <a:solidFill>
-            <a:srgbClr val="F7A23B"/>
-          </a:solidFill>
-          <a:ln/>
-        </p:spPr>
-      </p:sp>
-      <p:sp>
-        <p:nvSpPr>
-          <p:cNvPr id="23" name="Text 20"/>
-          <p:cNvSpPr/>
-          <p:nvPr/>
-        </p:nvSpPr>
-        <p:spPr>
-          <a:xfrm>
-            <a:off x="731520" y="4069080"/>
-            <a:ext cx="457200" cy="457200"/>
-          </a:xfrm>
-          <a:prstGeom prst="rect">
-            <a:avLst/>
-          </a:prstGeom>
-          <a:noFill/>
-          <a:ln/>
-        </p:spPr>
-        <p:txBody>
-          <a:bodyPr wrap="square" rtlCol="0" anchor="ctr"/>
-          <a:lstStyle/>
-          <a:p>
-            <a:pPr algn="ctr" indent="0" marL="0">
-              <a:buNone/>
-            </a:pPr>
-            <a:r>
-              <a:rPr lang="en-US" sz="1400" b="1" dirty="0">
-                <a:solidFill>
-                  <a:srgbClr val="FFFFFF"/>
-                </a:solidFill>
-                <a:latin typeface="Arial" pitchFamily="34" charset="0"/>
-                <a:ea typeface="Arial" pitchFamily="34" charset="-122"/>
-                <a:cs typeface="Arial" pitchFamily="34" charset="-120"/>
-              </a:rPr>
-              <a:t>4</a:t>
-            </a:r>
-            <a:endParaRPr lang="en-US" sz="1400" dirty="0"/>
-          </a:p>
-        </p:txBody>
-      </p:sp>
-      <p:sp>
-        <p:nvSpPr>
-          <p:cNvPr id="24" name="Text 21"/>
-          <p:cNvSpPr/>
-          <p:nvPr/>
-        </p:nvSpPr>
-        <p:spPr>
-          <a:xfrm>
-            <a:off x="1325880" y="3995928"/>
-            <a:ext cx="2630424" cy="2112264"/>
-          </a:xfrm>
-          <a:prstGeom prst="rect">
-            <a:avLst/>
-          </a:prstGeom>
-          <a:noFill/>
-          <a:ln/>
-        </p:spPr>
-        <p:txBody>
-          <a:bodyPr wrap="square" rtlCol="0" anchor="ctr">
-            <a:normAutofit/>
-          </a:bodyPr>
-          <a:lstStyle/>
-          <a:p>
-            <a:pPr indent="0" marL="0">
-              <a:buNone/>
-            </a:pPr>
-            <a:r>
-              <a:rPr lang="en-US" sz="1800" dirty="0">
-                <a:solidFill>
-                  <a:srgbClr val="1F2937"/>
-                </a:solidFill>
-                <a:latin typeface="Arial" pitchFamily="34" charset="0"/>
-                <a:ea typeface="Arial" pitchFamily="34" charset="-122"/>
-                <a:cs typeface="Arial" pitchFamily="34" charset="-120"/>
-              </a:rPr>
-              <a:t>A) um alerta de usina</a:t>
-            </a:r>
-            <a:endParaRPr lang="en-US" sz="1800" dirty="0"/>
-          </a:p>
-        </p:txBody>
-      </p:sp>
-      <p:sp>
-        <p:nvSpPr>
-          <p:cNvPr id="25" name="Shape 22"/>
-          <p:cNvSpPr/>
-          <p:nvPr/>
-        </p:nvSpPr>
-        <p:spPr>
-          <a:xfrm>
-            <a:off x="4322064" y="3886200"/>
-            <a:ext cx="3544824" cy="2331720"/>
-          </a:xfrm>
-          <a:prstGeom prst="roundRect">
-            <a:avLst>
-              <a:gd name="adj" fmla="val 3137"/>
-            </a:avLst>
-          </a:prstGeom>
-          <a:solidFill>
-            <a:srgbClr val="FFFFFF"/>
-          </a:solidFill>
-          <a:ln w="9525">
-            <a:solidFill>
-              <a:srgbClr val="D8E0EC"/>
-            </a:solidFill>
-            <a:prstDash val="solid"/>
-          </a:ln>
-          <a:effectLst>
-            <a:outerShdw sx="100000" sy="100000" kx="0" ky="0" algn="bl" rotWithShape="0" blurRad="38100" dist="12700" dir="5400000">
-              <a:srgbClr val="000000">
-                <a:alpha val="8000"/>
-              </a:srgbClr>
-            </a:outerShdw>
-          </a:effectLst>
-        </p:spPr>
-      </p:sp>
-      <p:sp>
-        <p:nvSpPr>
-          <p:cNvPr id="26" name="Shape 23"/>
-          <p:cNvSpPr/>
-          <p:nvPr/>
-        </p:nvSpPr>
-        <p:spPr>
-          <a:xfrm>
-            <a:off x="4504944" y="4069080"/>
-            <a:ext cx="457200" cy="457200"/>
-          </a:xfrm>
-          <a:prstGeom prst="ellipse">
-            <a:avLst/>
-          </a:prstGeom>
-          <a:solidFill>
-            <a:srgbClr val="1B3A6B"/>
-          </a:solidFill>
-          <a:ln/>
-        </p:spPr>
-      </p:sp>
-      <p:sp>
-        <p:nvSpPr>
-          <p:cNvPr id="27" name="Text 24"/>
-          <p:cNvSpPr/>
-          <p:nvPr/>
-        </p:nvSpPr>
-        <p:spPr>
-          <a:xfrm>
-            <a:off x="4504944" y="4069080"/>
-            <a:ext cx="457200" cy="457200"/>
-          </a:xfrm>
-          <a:prstGeom prst="rect">
-            <a:avLst/>
-          </a:prstGeom>
-          <a:noFill/>
-          <a:ln/>
-        </p:spPr>
-        <p:txBody>
-          <a:bodyPr wrap="square" rtlCol="0" anchor="ctr"/>
-          <a:lstStyle/>
-          <a:p>
-            <a:pPr algn="ctr" indent="0" marL="0">
-              <a:buNone/>
-            </a:pPr>
-            <a:r>
-              <a:rPr lang="en-US" sz="1400" b="1" dirty="0">
-                <a:solidFill>
-                  <a:srgbClr val="FFFFFF"/>
-                </a:solidFill>
-                <a:latin typeface="Arial" pitchFamily="34" charset="0"/>
-                <a:ea typeface="Arial" pitchFamily="34" charset="-122"/>
-                <a:cs typeface="Arial" pitchFamily="34" charset="-120"/>
-              </a:rPr>
-              <a:t>5</a:t>
-            </a:r>
-            <a:endParaRPr lang="en-US" sz="1400" dirty="0"/>
-          </a:p>
-        </p:txBody>
-      </p:sp>
-      <p:sp>
-        <p:nvSpPr>
-          <p:cNvPr id="28" name="Text 25"/>
-          <p:cNvSpPr/>
-          <p:nvPr/>
-        </p:nvSpPr>
-        <p:spPr>
-          <a:xfrm>
-            <a:off x="5099304" y="3995928"/>
-            <a:ext cx="2630424" cy="2112264"/>
-          </a:xfrm>
-          <a:prstGeom prst="rect">
-            <a:avLst/>
-          </a:prstGeom>
-          <a:noFill/>
-          <a:ln/>
-        </p:spPr>
-        <p:txBody>
-          <a:bodyPr wrap="square" rtlCol="0" anchor="ctr">
-            <a:normAutofit/>
-          </a:bodyPr>
-          <a:lstStyle/>
-          <a:p>
-            <a:pPr indent="0" marL="0">
-              <a:buNone/>
-            </a:pPr>
-            <a:r>
-              <a:rPr lang="en-US" sz="1800" dirty="0">
-                <a:solidFill>
-                  <a:srgbClr val="1F2937"/>
-                </a:solidFill>
-                <a:latin typeface="Arial" pitchFamily="34" charset="0"/>
-                <a:ea typeface="Arial" pitchFamily="34" charset="-122"/>
-                <a:cs typeface="Arial" pitchFamily="34" charset="-120"/>
-              </a:rPr>
-              <a:t>B) menos chamados sobre "quanto devo/como pago"</a:t>
-            </a:r>
-            <a:endParaRPr lang="en-US" sz="1800" dirty="0"/>
+              <a:t>SOP da minha operação: rotina diária, semanal e mensal em uma página, com responsável e horário de cada tarefa; e o mês 2 fechado no laboratório (geração registrada, faturas aprovadas, cobranças abertas e emitidas, alertas zerados ou justificados, relatório para o produtor).</a:t>
+            </a:r>
+            <a:endParaRPr lang="en-US" sz="1300" dirty="0"/>
           </a:p>
         </p:txBody>
       </p:sp>
@@ -20404,514 +20606,6 @@
 </p:sld>
 </file>
 
-<file path=ppt/slides/slide30.xml><?xml version="1.0" encoding="utf-8"?>
-<p:sld xmlns:a="http://schemas.openxmlformats.org/drawingml/2006/main" xmlns:r="http://schemas.openxmlformats.org/officeDocument/2006/relationships" xmlns:p="http://schemas.openxmlformats.org/presentationml/2006/main">
-  <p:cSld name="Slide 30">
-    <p:bg>
-      <p:bgPr>
-        <a:solidFill>
-          <a:srgbClr val="F6F8FB"/>
-        </a:solidFill>
-      </p:bgPr>
-    </p:bg>
-    <p:spTree>
-      <p:nvGrpSpPr>
-        <p:cNvPr id="1" name=""/>
-        <p:cNvGrpSpPr/>
-        <p:nvPr/>
-      </p:nvGrpSpPr>
-      <p:grpSpPr>
-        <a:xfrm>
-          <a:off x="0" y="0"/>
-          <a:ext cx="0" cy="0"/>
-          <a:chOff x="0" y="0"/>
-          <a:chExt cx="0" cy="0"/>
-        </a:xfrm>
-      </p:grpSpPr>
-      <p:sp>
-        <p:nvSpPr>
-          <p:cNvPr id="2" name="Shape 0"/>
-          <p:cNvSpPr/>
-          <p:nvPr/>
-        </p:nvSpPr>
-        <p:spPr>
-          <a:xfrm>
-            <a:off x="0" y="6510528"/>
-            <a:ext cx="12191695" cy="347472"/>
-          </a:xfrm>
-          <a:prstGeom prst="rect">
-            <a:avLst/>
-          </a:prstGeom>
-          <a:solidFill>
-            <a:srgbClr val="FFFFFF"/>
-          </a:solidFill>
-          <a:ln w="6350">
-            <a:solidFill>
-              <a:srgbClr val="D8E0EC"/>
-            </a:solidFill>
-            <a:prstDash val="solid"/>
-          </a:ln>
-        </p:spPr>
-      </p:sp>
-      <p:pic>
-        <p:nvPicPr>
-          <p:cNvPr id="3" name="Image 0" descr="/www/wwwroot/rexar/gdsolar/docs/curso/slides/assets/logo-gdsolar.png">    </p:cNvPr>
-          <p:cNvPicPr>
-            <a:picLocks noChangeAspect="1"/>
-          </p:cNvPicPr>
-          <p:nvPr/>
-        </p:nvPicPr>
-        <p:blipFill>
-          <a:blip r:embed="rId1"/>
-          <a:stretch>
-            <a:fillRect/>
-          </a:stretch>
-        </p:blipFill>
-        <p:spPr>
-          <a:xfrm>
-            <a:off x="548640" y="6547104"/>
-            <a:ext cx="274320" cy="274320"/>
-          </a:xfrm>
-          <a:prstGeom prst="rect">
-            <a:avLst/>
-          </a:prstGeom>
-        </p:spPr>
-      </p:pic>
-      <p:sp>
-        <p:nvSpPr>
-          <p:cNvPr id="4" name="Text 1"/>
-          <p:cNvSpPr/>
-          <p:nvPr/>
-        </p:nvSpPr>
-        <p:spPr>
-          <a:xfrm>
-            <a:off x="886968" y="6528816"/>
-            <a:ext cx="6400800" cy="310896"/>
-          </a:xfrm>
-          <a:prstGeom prst="rect">
-            <a:avLst/>
-          </a:prstGeom>
-          <a:noFill/>
-          <a:ln/>
-        </p:spPr>
-        <p:txBody>
-          <a:bodyPr wrap="square" rtlCol="0" anchor="ctr"/>
-          <a:lstStyle/>
-          <a:p>
-            <a:pPr indent="0" marL="0">
-              <a:buNone/>
-            </a:pPr>
-            <a:r>
-              <a:rPr lang="en-US" sz="900" b="1" dirty="0">
-                <a:solidFill>
-                  <a:srgbClr val="64748B"/>
-                </a:solidFill>
-                <a:latin typeface="Arial" pitchFamily="34" charset="0"/>
-                <a:ea typeface="Arial" pitchFamily="34" charset="-122"/>
-                <a:cs typeface="Arial" pitchFamily="34" charset="-120"/>
-              </a:rPr>
-              <a:t>GD Solar  ·  Formação em Energia por Assinatura</a:t>
-            </a:r>
-            <a:endParaRPr lang="en-US" sz="900" dirty="0"/>
-          </a:p>
-        </p:txBody>
-      </p:sp>
-      <p:sp>
-        <p:nvSpPr>
-          <p:cNvPr id="5" name="Text 2"/>
-          <p:cNvSpPr/>
-          <p:nvPr/>
-        </p:nvSpPr>
-        <p:spPr>
-          <a:xfrm>
-            <a:off x="7132320" y="6528816"/>
-            <a:ext cx="4023360" cy="310896"/>
-          </a:xfrm>
-          <a:prstGeom prst="rect">
-            <a:avLst/>
-          </a:prstGeom>
-          <a:noFill/>
-          <a:ln/>
-        </p:spPr>
-        <p:txBody>
-          <a:bodyPr wrap="square" rtlCol="0" anchor="ctr"/>
-          <a:lstStyle/>
-          <a:p>
-            <a:pPr algn="r" indent="0" marL="0">
-              <a:buNone/>
-            </a:pPr>
-            <a:r>
-              <a:rPr lang="en-US" sz="900" dirty="0">
-                <a:solidFill>
-                  <a:srgbClr val="64748B"/>
-                </a:solidFill>
-                <a:latin typeface="Arial" pitchFamily="34" charset="0"/>
-                <a:ea typeface="Arial" pitchFamily="34" charset="-122"/>
-                <a:cs typeface="Arial" pitchFamily="34" charset="-120"/>
-              </a:rPr>
-              <a:t>M9 · Fechamento</a:t>
-            </a:r>
-            <a:endParaRPr lang="en-US" sz="900" dirty="0"/>
-          </a:p>
-        </p:txBody>
-      </p:sp>
-      <p:sp>
-        <p:nvSpPr>
-          <p:cNvPr id="6" name="Shape 3"/>
-          <p:cNvSpPr/>
-          <p:nvPr/>
-        </p:nvSpPr>
-        <p:spPr>
-          <a:xfrm>
-            <a:off x="548640" y="384048"/>
-            <a:ext cx="82296" cy="658368"/>
-          </a:xfrm>
-          <a:prstGeom prst="rect">
-            <a:avLst/>
-          </a:prstGeom>
-          <a:solidFill>
-            <a:srgbClr val="F7A23B"/>
-          </a:solidFill>
-          <a:ln/>
-        </p:spPr>
-      </p:sp>
-      <p:sp>
-        <p:nvSpPr>
-          <p:cNvPr id="7" name="Text 4"/>
-          <p:cNvSpPr/>
-          <p:nvPr/>
-        </p:nvSpPr>
-        <p:spPr>
-          <a:xfrm>
-            <a:off x="777240" y="292608"/>
-            <a:ext cx="10972800" cy="274320"/>
-          </a:xfrm>
-          <a:prstGeom prst="rect">
-            <a:avLst/>
-          </a:prstGeom>
-          <a:noFill/>
-          <a:ln/>
-        </p:spPr>
-        <p:txBody>
-          <a:bodyPr wrap="square" rtlCol="0" anchor="ctr"/>
-          <a:lstStyle/>
-          <a:p>
-            <a:pPr indent="0" marL="0">
-              <a:buNone/>
-            </a:pPr>
-            <a:r>
-              <a:rPr lang="en-US" sz="1000" b="1" spc="100" kern="0" dirty="0">
-                <a:solidFill>
-                  <a:srgbClr val="F7A23B"/>
-                </a:solidFill>
-                <a:latin typeface="Arial" pitchFamily="34" charset="0"/>
-                <a:ea typeface="Arial" pitchFamily="34" charset="-122"/>
-                <a:cs typeface="Arial" pitchFamily="34" charset="-120"/>
-              </a:rPr>
-              <a:t>FECHAMENTO DO MÓDULO</a:t>
-            </a:r>
-            <a:endParaRPr lang="en-US" sz="1000" dirty="0"/>
-          </a:p>
-        </p:txBody>
-      </p:sp>
-      <p:sp>
-        <p:nvSpPr>
-          <p:cNvPr id="8" name="Text 5"/>
-          <p:cNvSpPr/>
-          <p:nvPr/>
-        </p:nvSpPr>
-        <p:spPr>
-          <a:xfrm>
-            <a:off x="777240" y="530352"/>
-            <a:ext cx="10881360" cy="566928"/>
-          </a:xfrm>
-          <a:prstGeom prst="rect">
-            <a:avLst/>
-          </a:prstGeom>
-          <a:noFill/>
-          <a:ln/>
-        </p:spPr>
-        <p:txBody>
-          <a:bodyPr wrap="square" rtlCol="0" anchor="ctr">
-            <a:normAutofit/>
-          </a:bodyPr>
-          <a:lstStyle/>
-          <a:p>
-            <a:pPr indent="0" marL="0">
-              <a:buNone/>
-            </a:pPr>
-            <a:r>
-              <a:rPr lang="en-US" sz="2600" b="1" dirty="0">
-                <a:solidFill>
-                  <a:srgbClr val="1B3A6B"/>
-                </a:solidFill>
-                <a:latin typeface="Arial" pitchFamily="34" charset="0"/>
-                <a:ea typeface="Arial" pitchFamily="34" charset="-122"/>
-                <a:cs typeface="Arial" pitchFamily="34" charset="-120"/>
-              </a:rPr>
-              <a:t>Pratique e entregue</a:t>
-            </a:r>
-            <a:endParaRPr lang="en-US" sz="2600" dirty="0"/>
-          </a:p>
-        </p:txBody>
-      </p:sp>
-      <p:sp>
-        <p:nvSpPr>
-          <p:cNvPr id="9" name="Text 6"/>
-          <p:cNvSpPr/>
-          <p:nvPr/>
-        </p:nvSpPr>
-        <p:spPr>
-          <a:xfrm>
-            <a:off x="548640" y="1325880"/>
-            <a:ext cx="5394960" cy="411480"/>
-          </a:xfrm>
-          <a:prstGeom prst="rect">
-            <a:avLst/>
-          </a:prstGeom>
-          <a:noFill/>
-          <a:ln/>
-        </p:spPr>
-        <p:txBody>
-          <a:bodyPr wrap="square" rtlCol="0" anchor="ctr"/>
-          <a:lstStyle/>
-          <a:p>
-            <a:pPr indent="0" marL="0">
-              <a:buNone/>
-            </a:pPr>
-            <a:r>
-              <a:rPr lang="en-US" sz="1600" b="1" dirty="0">
-                <a:solidFill>
-                  <a:srgbClr val="1B3A6B"/>
-                </a:solidFill>
-                <a:latin typeface="Arial" pitchFamily="34" charset="0"/>
-                <a:ea typeface="Arial" pitchFamily="34" charset="-122"/>
-                <a:cs typeface="Arial" pitchFamily="34" charset="-120"/>
-              </a:rPr>
-              <a:t>Exercícios</a:t>
-            </a:r>
-            <a:endParaRPr lang="en-US" sz="1600" dirty="0"/>
-          </a:p>
-        </p:txBody>
-      </p:sp>
-      <p:sp>
-        <p:nvSpPr>
-          <p:cNvPr id="10" name="Text 7"/>
-          <p:cNvSpPr/>
-          <p:nvPr/>
-        </p:nvSpPr>
-        <p:spPr>
-          <a:xfrm>
-            <a:off x="548640" y="1783080"/>
-            <a:ext cx="5394960" cy="4480560"/>
-          </a:xfrm>
-          <a:prstGeom prst="rect">
-            <a:avLst/>
-          </a:prstGeom>
-          <a:noFill/>
-          <a:ln/>
-        </p:spPr>
-        <p:txBody>
-          <a:bodyPr wrap="square" rtlCol="0" anchor="t">
-            <a:normAutofit/>
-          </a:bodyPr>
-          <a:lstStyle/>
-          <a:p>
-            <a:pPr indent="0" marL="0">
-              <a:spcAft>
-                <a:spcPts val="800"/>
-              </a:spcAft>
-              <a:buNone/>
-            </a:pPr>
-            <a:r>
-              <a:rPr lang="en-US" sz="1600" dirty="0">
-                <a:solidFill>
-                  <a:srgbClr val="1F2937"/>
-                </a:solidFill>
-                <a:latin typeface="Arial" pitchFamily="34" charset="0"/>
-                <a:ea typeface="Arial" pitchFamily="34" charset="-122"/>
-                <a:cs typeface="Arial" pitchFamily="34" charset="-120"/>
-              </a:rPr>
-              <a:t>1. Monte a agenda do operador para a primeira semana do mês (faturas chegando).</a:t>
-            </a:r>
-            <a:endParaRPr lang="en-US" sz="1600" dirty="0"/>
-          </a:p>
-          <a:p>
-            <a:pPr indent="0" marL="0">
-              <a:spcAft>
-                <a:spcPts val="800"/>
-              </a:spcAft>
-              <a:buNone/>
-            </a:pPr>
-            <a:r>
-              <a:rPr lang="en-US" sz="1600" dirty="0">
-                <a:solidFill>
-                  <a:srgbClr val="1F2937"/>
-                </a:solidFill>
-                <a:latin typeface="Arial" pitchFamily="34" charset="0"/>
-                <a:ea typeface="Arial" pitchFamily="34" charset="-122"/>
-                <a:cs typeface="Arial" pitchFamily="34" charset="-120"/>
-              </a:rPr>
-              <a:t>2. O sino mostra 12 alertas. Em que ordem você trata?</a:t>
-            </a:r>
-            <a:endParaRPr lang="en-US" sz="1600" dirty="0"/>
-          </a:p>
-          <a:p>
-            <a:pPr indent="0" marL="0">
-              <a:spcAft>
-                <a:spcPts val="800"/>
-              </a:spcAft>
-              <a:buNone/>
-            </a:pPr>
-            <a:r>
-              <a:rPr lang="en-US" sz="1600" dirty="0">
-                <a:solidFill>
-                  <a:srgbClr val="1F2937"/>
-                </a:solidFill>
-                <a:latin typeface="Arial" pitchFamily="34" charset="0"/>
-                <a:ea typeface="Arial" pitchFamily="34" charset="-122"/>
-                <a:cs typeface="Arial" pitchFamily="34" charset="-120"/>
-              </a:rPr>
-              <a:t>3. Quantos chamados por mês você espera com 500 clientes, e como reduzir?</a:t>
-            </a:r>
-            <a:endParaRPr lang="en-US" sz="1600" dirty="0"/>
-          </a:p>
-        </p:txBody>
-      </p:sp>
-      <p:sp>
-        <p:nvSpPr>
-          <p:cNvPr id="11" name="Shape 8"/>
-          <p:cNvSpPr/>
-          <p:nvPr/>
-        </p:nvSpPr>
-        <p:spPr>
-          <a:xfrm>
-            <a:off x="6172200" y="1325880"/>
-            <a:ext cx="5468112" cy="4937760"/>
-          </a:xfrm>
-          <a:prstGeom prst="roundRect">
-            <a:avLst>
-              <a:gd name="adj" fmla="val 1852"/>
-            </a:avLst>
-          </a:prstGeom>
-          <a:solidFill>
-            <a:srgbClr val="1B3A6B"/>
-          </a:solidFill>
-          <a:ln/>
-        </p:spPr>
-      </p:sp>
-      <p:sp>
-        <p:nvSpPr>
-          <p:cNvPr id="12" name="Text 9"/>
-          <p:cNvSpPr/>
-          <p:nvPr/>
-        </p:nvSpPr>
-        <p:spPr>
-          <a:xfrm>
-            <a:off x="6492240" y="1554480"/>
-            <a:ext cx="4828032" cy="4480560"/>
-          </a:xfrm>
-          <a:prstGeom prst="rect">
-            <a:avLst/>
-          </a:prstGeom>
-          <a:noFill/>
-          <a:ln/>
-        </p:spPr>
-        <p:txBody>
-          <a:bodyPr wrap="square" rtlCol="0" anchor="t">
-            <a:normAutofit/>
-          </a:bodyPr>
-          <a:lstStyle/>
-          <a:p>
-            <a:pPr indent="0" marL="0">
-              <a:buNone/>
-            </a:pPr>
-            <a:r>
-              <a:rPr lang="en-US" sz="1300" b="1" spc="100" kern="0" dirty="0">
-                <a:solidFill>
-                  <a:srgbClr val="F7A23B"/>
-                </a:solidFill>
-                <a:latin typeface="Arial" pitchFamily="34" charset="0"/>
-                <a:ea typeface="Arial" pitchFamily="34" charset="-122"/>
-                <a:cs typeface="Arial" pitchFamily="34" charset="-120"/>
-              </a:rPr>
-              <a:t>ENTREGÁVEL DO MÓDULO
-</a:t>
-            </a:r>
-            <a:pPr indent="0" marL="0">
-              <a:buNone/>
-            </a:pPr>
-            <a:r>
-              <a:rPr lang="en-US" sz="1600" dirty="0">
-                <a:solidFill>
-                  <a:srgbClr val="FFFFFF"/>
-                </a:solidFill>
-                <a:latin typeface="Arial" pitchFamily="34" charset="0"/>
-                <a:ea typeface="Arial" pitchFamily="34" charset="-122"/>
-                <a:cs typeface="Arial" pitchFamily="34" charset="-120"/>
-              </a:rPr>
-              <a:t>SOP da minha operação: rotina diária, semanal e mensal em uma página, com responsável e horário de cada tarefa; e o mês 2 fechado no laboratório (geração registrada, faturas aprovadas, cobranças abertas e emitidas, alertas zerados ou justificados, relatório para o produtor).</a:t>
-            </a:r>
-            <a:endParaRPr lang="en-US" sz="1300" dirty="0"/>
-          </a:p>
-        </p:txBody>
-      </p:sp>
-      <p:sp>
-        <p:nvSpPr>
-          <p:cNvPr id="25" name="Slide Number Placeholder 0"/>
-          <p:cNvSpPr>
-            <a:spLocks noGrp="1"/>
-          </p:cNvSpPr>
-          <p:nvPr>
-            <p:ph type="sldNum" sz="quarter" idx="4294967295"/>
-          </p:nvPr>
-        </p:nvSpPr>
-        <p:spPr>
-          <a:xfrm>
-            <a:off x="11292840" y="6556248"/>
-            <a:ext cx="548640" cy="256032"/>
-          </a:xfrm>
-          <a:prstGeom prst="rect">
-            <a:avLst/>
-          </a:prstGeom>
-          <a:extLst>
-            <a:ext uri="{C572A759-6A51-4108-AA02-DFA0A04FC94B}">
-              <ma14:wrappingTextBoxFlag xmlns:ma14="http://schemas.microsoft.com/office/mac/drawingml/2011/main" val="0"/>
-            </a:ext>
-          </a:extLst>
-        </p:spPr>
-        <p:txBody>
-          <a:bodyPr/>
-          <a:lstStyle>
-            <a:lvl1pPr>
-              <a:defRPr sz="900">
-                <a:solidFill>
-                  <a:srgbClr val="1B3A6B"/>
-                </a:solidFill>
-                <a:latin typeface="Arial"/>
-                <a:ea typeface="Arial"/>
-                <a:cs typeface="Arial"/>
-              </a:defRPr>
-            </a:lvl1pPr>
-          </a:lstStyle>
-          <a:p>
-            <a:pPr algn="r"/>
-            <a:fld id="{F7021451-1387-4CA6-816F-3879F97B5CBC}" type="slidenum">
-              <a:rPr b="1" lang="en-US"/>
-              <a:t>30</a:t>
-            </a:fld>
-            <a:endParaRPr lang="en-US"/>
-          </a:p>
-        </p:txBody>
-      </p:sp>
-    </p:spTree>
-  </p:cSld>
-  <p:clrMapOvr>
-    <a:masterClrMapping/>
-  </p:clrMapOvr>
-</p:sld>
-</file>
-
 <file path=ppt/slides/slide4.xml><?xml version="1.0" encoding="utf-8"?>
 <p:sld xmlns:a="http://schemas.openxmlformats.org/drawingml/2006/main" xmlns:r="http://schemas.openxmlformats.org/officeDocument/2006/relationships" xmlns:p="http://schemas.openxmlformats.org/presentationml/2006/main">
   <p:cSld name="Slide 4">
@@ -25551,7 +25245,7 @@
             <a:r>
               <a:rPr lang="en-US" sz="11000" b="1" dirty="0">
                 <a:solidFill>
-                  <a:srgbClr val="11396F"/>
+                  <a:srgbClr val="F7A23B"/>
                 </a:solidFill>
                 <a:latin typeface="Arial" pitchFamily="34" charset="0"/>
                 <a:ea typeface="Arial" pitchFamily="34" charset="-122"/>
@@ -25674,7 +25368,7 @@
                 <a:ea typeface="Arial" pitchFamily="34" charset="-122"/>
                 <a:cs typeface="Arial" pitchFamily="34" charset="-120"/>
               </a:rPr>
-              <a:t>Aula</a:t>
+              <a:t>Aula teórica</a:t>
             </a:r>
             <a:endParaRPr lang="en-US" sz="1400" dirty="0"/>
           </a:p>
